--- a/docs/装备软件/供应商软件形态与ATE接入.pptx
+++ b/docs/装备软件/供应商软件形态与ATE接入.pptx
@@ -3088,30 +3088,3988 @@
         <p:nvPr/>
       </p:nvGrpSpPr>
       <p:grpSpPr/>
-      <p:pic>
-        <p:nvPicPr>
-          <p:cNvPr id="2" name="Picture 1" descr="供应商软件形态与ATE接入分层.png"/>
-          <p:cNvPicPr>
-            <a:picLocks noChangeAspect="1"/>
-          </p:cNvPicPr>
-          <p:nvPr/>
-        </p:nvPicPr>
-        <p:blipFill>
-          <a:blip r:embed="rId2"/>
-          <a:stretch>
-            <a:fillRect/>
-          </a:stretch>
-        </p:blipFill>
-        <p:spPr>
-          <a:xfrm>
-            <a:off x="0" y="0"/>
-            <a:ext cx="12191695" cy="6858000"/>
+      <p:sp>
+        <p:nvSpPr>
+          <p:cNvPr id="2" name="TextBox 1"/>
+          <p:cNvSpPr txBox="1"/>
+          <p:nvPr/>
+        </p:nvSpPr>
+        <p:spPr>
+          <a:xfrm>
+            <a:off x="274320" y="201168"/>
+            <a:ext cx="8778240" cy="457200"/>
           </a:xfrm>
           <a:prstGeom prst="rect">
             <a:avLst/>
           </a:prstGeom>
-        </p:spPr>
-      </p:pic>
+          <a:noFill/>
+        </p:spPr>
+        <p:txBody>
+          <a:bodyPr wrap="square" lIns="27432" rIns="27432" tIns="9144" bIns="9144" anchor="ctr">
+            <a:spAutoFit/>
+          </a:bodyPr>
+          <a:lstStyle/>
+          <a:p>
+            <a:pPr algn="l">
+              <a:lnSpc>
+                <a:spcPct val="108000"/>
+              </a:lnSpc>
+            </a:pPr>
+            <a:r>
+              <a:rPr sz="2400" b="1">
+                <a:solidFill>
+                  <a:srgbClr val="141414"/>
+                </a:solidFill>
+                <a:latin typeface="微软雅黑"/>
+                <a:ea typeface="微软雅黑"/>
+                <a:cs typeface="微软雅黑"/>
+              </a:rPr>
+              <a:t>供应商设备软件的形态与 ATE 接入方式</a:t>
+            </a:r>
+          </a:p>
+        </p:txBody>
+      </p:sp>
+      <p:sp>
+        <p:nvSpPr>
+          <p:cNvPr id="3" name="TextBox 2"/>
+          <p:cNvSpPr txBox="1"/>
+          <p:nvPr/>
+        </p:nvSpPr>
+        <p:spPr>
+          <a:xfrm>
+            <a:off x="274320" y="658368"/>
+            <a:ext cx="10607040" cy="310896"/>
+          </a:xfrm>
+          <a:prstGeom prst="rect">
+            <a:avLst/>
+          </a:prstGeom>
+          <a:noFill/>
+        </p:spPr>
+        <p:txBody>
+          <a:bodyPr wrap="square" lIns="27432" rIns="27432" tIns="9144" bIns="9144" anchor="ctr">
+            <a:spAutoFit/>
+          </a:bodyPr>
+          <a:lstStyle/>
+          <a:p>
+            <a:pPr algn="l">
+              <a:lnSpc>
+                <a:spcPct val="108000"/>
+              </a:lnSpc>
+            </a:pPr>
+            <a:r>
+              <a:rPr sz="1050" b="0">
+                <a:solidFill>
+                  <a:srgbClr val="5C5C56"/>
+                </a:solidFill>
+                <a:latin typeface="微软雅黑"/>
+                <a:ea typeface="微软雅黑"/>
+                <a:cs typeface="微软雅黑"/>
+              </a:rPr>
+              <a:t>同一台设备可能同时提供多种形态；ATE 侧以统一的设备抽象层屏蔽差异，测试用例只面向能力接口编程，不直接依赖供应商实现</a:t>
+            </a:r>
+          </a:p>
+        </p:txBody>
+      </p:sp>
+      <p:sp>
+        <p:nvSpPr>
+          <p:cNvPr id="4" name="Rectangle 3"/>
+          <p:cNvSpPr/>
+          <p:nvPr/>
+        </p:nvSpPr>
+        <p:spPr>
+          <a:xfrm>
+            <a:off x="274320" y="987552"/>
+            <a:ext cx="11640312" cy="25603"/>
+          </a:xfrm>
+          <a:prstGeom prst="rect">
+            <a:avLst/>
+          </a:prstGeom>
+          <a:solidFill>
+            <a:srgbClr val="8B0F1A"/>
+          </a:solidFill>
+          <a:ln>
+            <a:noFill/>
+          </a:ln>
+          <a:effectLst/>
+        </p:spPr>
+        <p:style>
+          <a:lnRef idx="1">
+            <a:schemeClr val="accent1"/>
+          </a:lnRef>
+          <a:fillRef idx="3">
+            <a:schemeClr val="accent1"/>
+          </a:fillRef>
+          <a:effectRef idx="2">
+            <a:schemeClr val="accent1"/>
+          </a:effectRef>
+          <a:fontRef idx="minor">
+            <a:schemeClr val="lt1"/>
+          </a:fontRef>
+        </p:style>
+        <p:txBody>
+          <a:bodyPr rtlCol="0" anchor="ctr" wrap="square"/>
+          <a:lstStyle/>
+          <a:p>
+            <a:pPr algn="ctr"/>
+          </a:p>
+        </p:txBody>
+      </p:sp>
+      <p:sp>
+        <p:nvSpPr>
+          <p:cNvPr id="5" name="TextBox 4"/>
+          <p:cNvSpPr txBox="1"/>
+          <p:nvPr/>
+        </p:nvSpPr>
+        <p:spPr>
+          <a:xfrm>
+            <a:off x="274320" y="1097280"/>
+            <a:ext cx="1920240" cy="237744"/>
+          </a:xfrm>
+          <a:prstGeom prst="rect">
+            <a:avLst/>
+          </a:prstGeom>
+          <a:noFill/>
+        </p:spPr>
+        <p:txBody>
+          <a:bodyPr wrap="square" lIns="27432" rIns="27432" tIns="9144" bIns="9144" anchor="ctr">
+            <a:spAutoFit/>
+          </a:bodyPr>
+          <a:lstStyle/>
+          <a:p>
+            <a:pPr algn="l">
+              <a:lnSpc>
+                <a:spcPct val="108000"/>
+              </a:lnSpc>
+            </a:pPr>
+            <a:r>
+              <a:rPr sz="1000" b="1">
+                <a:solidFill>
+                  <a:srgbClr val="8B0F1A"/>
+                </a:solidFill>
+                <a:latin typeface="微软雅黑"/>
+                <a:ea typeface="微软雅黑"/>
+                <a:cs typeface="微软雅黑"/>
+              </a:rPr>
+              <a:t>① ATE 测试执行层</a:t>
+            </a:r>
+          </a:p>
+        </p:txBody>
+      </p:sp>
+      <p:sp>
+        <p:nvSpPr>
+          <p:cNvPr id="6" name="TextBox 5"/>
+          <p:cNvSpPr txBox="1"/>
+          <p:nvPr/>
+        </p:nvSpPr>
+        <p:spPr>
+          <a:xfrm>
+            <a:off x="2670048" y="1097280"/>
+            <a:ext cx="3566160" cy="237744"/>
+          </a:xfrm>
+          <a:prstGeom prst="rect">
+            <a:avLst/>
+          </a:prstGeom>
+          <a:noFill/>
+        </p:spPr>
+        <p:txBody>
+          <a:bodyPr wrap="square" lIns="27432" rIns="27432" tIns="9144" bIns="9144" anchor="ctr">
+            <a:spAutoFit/>
+          </a:bodyPr>
+          <a:lstStyle/>
+          <a:p>
+            <a:pPr algn="l">
+              <a:lnSpc>
+                <a:spcPct val="108000"/>
+              </a:lnSpc>
+            </a:pPr>
+            <a:r>
+              <a:rPr sz="1000" b="1">
+                <a:solidFill>
+                  <a:srgbClr val="8B0F1A"/>
+                </a:solidFill>
+                <a:latin typeface="微软雅黑"/>
+                <a:ea typeface="微软雅黑"/>
+                <a:cs typeface="微软雅黑"/>
+              </a:rPr>
+              <a:t>② 设备抽象与适配层（对外统一能力接口，屏蔽形态差异）</a:t>
+            </a:r>
+          </a:p>
+        </p:txBody>
+      </p:sp>
+      <p:sp>
+        <p:nvSpPr>
+          <p:cNvPr id="7" name="TextBox 6"/>
+          <p:cNvSpPr txBox="1"/>
+          <p:nvPr/>
+        </p:nvSpPr>
+        <p:spPr>
+          <a:xfrm>
+            <a:off x="6803136" y="1097280"/>
+            <a:ext cx="5111496" cy="237744"/>
+          </a:xfrm>
+          <a:prstGeom prst="rect">
+            <a:avLst/>
+          </a:prstGeom>
+          <a:noFill/>
+        </p:spPr>
+        <p:txBody>
+          <a:bodyPr wrap="square" lIns="27432" rIns="27432" tIns="9144" bIns="9144" anchor="ctr">
+            <a:spAutoFit/>
+          </a:bodyPr>
+          <a:lstStyle/>
+          <a:p>
+            <a:pPr algn="l">
+              <a:lnSpc>
+                <a:spcPct val="108000"/>
+              </a:lnSpc>
+            </a:pPr>
+            <a:r>
+              <a:rPr sz="1000" b="1">
+                <a:solidFill>
+                  <a:srgbClr val="8B0F1A"/>
+                </a:solidFill>
+                <a:latin typeface="微软雅黑"/>
+                <a:ea typeface="微软雅黑"/>
+                <a:cs typeface="微软雅黑"/>
+              </a:rPr>
+              <a:t>③ 供应商提供的软件形态（按提供方式分四类）</a:t>
+            </a:r>
+          </a:p>
+        </p:txBody>
+      </p:sp>
+      <p:sp>
+        <p:nvSpPr>
+          <p:cNvPr id="8" name="Right Arrow 7"/>
+          <p:cNvSpPr/>
+          <p:nvPr/>
+        </p:nvSpPr>
+        <p:spPr>
+          <a:xfrm>
+            <a:off x="2157984" y="3657600"/>
+            <a:ext cx="420624" cy="310896"/>
+          </a:xfrm>
+          <a:prstGeom prst="rightArrow">
+            <a:avLst/>
+          </a:prstGeom>
+          <a:solidFill>
+            <a:srgbClr val="8B0F1A"/>
+          </a:solidFill>
+          <a:ln>
+            <a:noFill/>
+          </a:ln>
+          <a:effectLst/>
+        </p:spPr>
+        <p:style>
+          <a:lnRef idx="1">
+            <a:schemeClr val="accent1"/>
+          </a:lnRef>
+          <a:fillRef idx="3">
+            <a:schemeClr val="accent1"/>
+          </a:fillRef>
+          <a:effectRef idx="2">
+            <a:schemeClr val="accent1"/>
+          </a:effectRef>
+          <a:fontRef idx="minor">
+            <a:schemeClr val="lt1"/>
+          </a:fontRef>
+        </p:style>
+        <p:txBody>
+          <a:bodyPr rtlCol="0" anchor="ctr"/>
+          <a:lstStyle/>
+          <a:p>
+            <a:pPr algn="ctr"/>
+          </a:p>
+        </p:txBody>
+      </p:sp>
+      <p:sp>
+        <p:nvSpPr>
+          <p:cNvPr id="9" name="Right Arrow 8"/>
+          <p:cNvSpPr/>
+          <p:nvPr/>
+        </p:nvSpPr>
+        <p:spPr>
+          <a:xfrm>
+            <a:off x="6291072" y="3657600"/>
+            <a:ext cx="420624" cy="310896"/>
+          </a:xfrm>
+          <a:prstGeom prst="rightArrow">
+            <a:avLst/>
+          </a:prstGeom>
+          <a:solidFill>
+            <a:srgbClr val="8B0F1A"/>
+          </a:solidFill>
+          <a:ln>
+            <a:noFill/>
+          </a:ln>
+          <a:effectLst/>
+        </p:spPr>
+        <p:style>
+          <a:lnRef idx="1">
+            <a:schemeClr val="accent1"/>
+          </a:lnRef>
+          <a:fillRef idx="3">
+            <a:schemeClr val="accent1"/>
+          </a:fillRef>
+          <a:effectRef idx="2">
+            <a:schemeClr val="accent1"/>
+          </a:effectRef>
+          <a:fontRef idx="minor">
+            <a:schemeClr val="lt1"/>
+          </a:fontRef>
+        </p:style>
+        <p:txBody>
+          <a:bodyPr rtlCol="0" anchor="ctr"/>
+          <a:lstStyle/>
+          <a:p>
+            <a:pPr algn="ctr"/>
+          </a:p>
+        </p:txBody>
+      </p:sp>
+      <p:sp>
+        <p:nvSpPr>
+          <p:cNvPr id="10" name="Rounded Rectangle 9"/>
+          <p:cNvSpPr/>
+          <p:nvPr/>
+        </p:nvSpPr>
+        <p:spPr>
+          <a:xfrm>
+            <a:off x="274320" y="1371600"/>
+            <a:ext cx="1920240" cy="4882896"/>
+          </a:xfrm>
+          <a:prstGeom prst="roundRect">
+            <a:avLst>
+              <a:gd name="adj" fmla="val 5000"/>
+            </a:avLst>
+          </a:prstGeom>
+          <a:solidFill>
+            <a:srgbClr val="FFFFFF"/>
+          </a:solidFill>
+          <a:ln w="17780">
+            <a:solidFill>
+              <a:srgbClr val="8B0F1A"/>
+            </a:solidFill>
+          </a:ln>
+          <a:effectLst/>
+        </p:spPr>
+        <p:style>
+          <a:lnRef idx="1">
+            <a:schemeClr val="accent1"/>
+          </a:lnRef>
+          <a:fillRef idx="3">
+            <a:schemeClr val="accent1"/>
+          </a:fillRef>
+          <a:effectRef idx="2">
+            <a:schemeClr val="accent1"/>
+          </a:effectRef>
+          <a:fontRef idx="minor">
+            <a:schemeClr val="lt1"/>
+          </a:fontRef>
+        </p:style>
+        <p:txBody>
+          <a:bodyPr rtlCol="0" anchor="ctr" wrap="square"/>
+          <a:lstStyle/>
+          <a:p>
+            <a:pPr algn="ctr"/>
+          </a:p>
+        </p:txBody>
+      </p:sp>
+      <p:sp>
+        <p:nvSpPr>
+          <p:cNvPr id="11" name="Rounded Rectangle 10"/>
+          <p:cNvSpPr/>
+          <p:nvPr/>
+        </p:nvSpPr>
+        <p:spPr>
+          <a:xfrm>
+            <a:off x="384048" y="1517904"/>
+            <a:ext cx="1700784" cy="1298448"/>
+          </a:xfrm>
+          <a:prstGeom prst="roundRect">
+            <a:avLst>
+              <a:gd name="adj" fmla="val 5000"/>
+            </a:avLst>
+          </a:prstGeom>
+          <a:solidFill>
+            <a:srgbClr val="ECECEC"/>
+          </a:solidFill>
+          <a:ln>
+            <a:noFill/>
+          </a:ln>
+          <a:effectLst/>
+        </p:spPr>
+        <p:style>
+          <a:lnRef idx="1">
+            <a:schemeClr val="accent1"/>
+          </a:lnRef>
+          <a:fillRef idx="3">
+            <a:schemeClr val="accent1"/>
+          </a:fillRef>
+          <a:effectRef idx="2">
+            <a:schemeClr val="accent1"/>
+          </a:effectRef>
+          <a:fontRef idx="minor">
+            <a:schemeClr val="lt1"/>
+          </a:fontRef>
+        </p:style>
+        <p:txBody>
+          <a:bodyPr rtlCol="0" anchor="ctr" wrap="square"/>
+          <a:lstStyle/>
+          <a:p>
+            <a:pPr algn="ctr"/>
+          </a:p>
+        </p:txBody>
+      </p:sp>
+      <p:sp>
+        <p:nvSpPr>
+          <p:cNvPr id="12" name="TextBox 11"/>
+          <p:cNvSpPr txBox="1"/>
+          <p:nvPr/>
+        </p:nvSpPr>
+        <p:spPr>
+          <a:xfrm>
+            <a:off x="420623" y="1609344"/>
+            <a:ext cx="1627632" cy="1115568"/>
+          </a:xfrm>
+          <a:prstGeom prst="rect">
+            <a:avLst/>
+          </a:prstGeom>
+          <a:noFill/>
+        </p:spPr>
+        <p:txBody>
+          <a:bodyPr wrap="square" lIns="27432" rIns="27432" tIns="9144" bIns="9144" anchor="ctr">
+            <a:spAutoFit/>
+          </a:bodyPr>
+          <a:lstStyle/>
+          <a:p>
+            <a:pPr algn="ctr">
+              <a:lnSpc>
+                <a:spcPct val="108000"/>
+              </a:lnSpc>
+            </a:pPr>
+            <a:r>
+              <a:rPr sz="1150" b="1">
+                <a:solidFill>
+                  <a:srgbClr val="141414"/>
+                </a:solidFill>
+                <a:latin typeface="微软雅黑"/>
+                <a:ea typeface="微软雅黑"/>
+                <a:cs typeface="微软雅黑"/>
+              </a:rPr>
+              <a:t>测试用例</a:t>
+            </a:r>
+          </a:p>
+          <a:p>
+            <a:pPr algn="ctr">
+              <a:lnSpc>
+                <a:spcPct val="108000"/>
+              </a:lnSpc>
+              <a:spcBef>
+                <a:spcPts val="300"/>
+              </a:spcBef>
+            </a:pPr>
+            <a:r>
+              <a:rPr sz="900" b="0">
+                <a:solidFill>
+                  <a:srgbClr val="4A4A45"/>
+                </a:solidFill>
+                <a:latin typeface="微软雅黑"/>
+                <a:ea typeface="微软雅黑"/>
+                <a:cs typeface="微软雅黑"/>
+              </a:rPr>
+              <a:t>pytest 用例 / 测试程序</a:t>
+            </a:r>
+          </a:p>
+        </p:txBody>
+      </p:sp>
+      <p:sp>
+        <p:nvSpPr>
+          <p:cNvPr id="13" name="Rounded Rectangle 12"/>
+          <p:cNvSpPr/>
+          <p:nvPr/>
+        </p:nvSpPr>
+        <p:spPr>
+          <a:xfrm>
+            <a:off x="384048" y="3145536"/>
+            <a:ext cx="1700784" cy="1298448"/>
+          </a:xfrm>
+          <a:prstGeom prst="roundRect">
+            <a:avLst>
+              <a:gd name="adj" fmla="val 5000"/>
+            </a:avLst>
+          </a:prstGeom>
+          <a:solidFill>
+            <a:srgbClr val="ECECEC"/>
+          </a:solidFill>
+          <a:ln>
+            <a:noFill/>
+          </a:ln>
+          <a:effectLst/>
+        </p:spPr>
+        <p:style>
+          <a:lnRef idx="1">
+            <a:schemeClr val="accent1"/>
+          </a:lnRef>
+          <a:fillRef idx="3">
+            <a:schemeClr val="accent1"/>
+          </a:fillRef>
+          <a:effectRef idx="2">
+            <a:schemeClr val="accent1"/>
+          </a:effectRef>
+          <a:fontRef idx="minor">
+            <a:schemeClr val="lt1"/>
+          </a:fontRef>
+        </p:style>
+        <p:txBody>
+          <a:bodyPr rtlCol="0" anchor="ctr" wrap="square"/>
+          <a:lstStyle/>
+          <a:p>
+            <a:pPr algn="ctr"/>
+          </a:p>
+        </p:txBody>
+      </p:sp>
+      <p:sp>
+        <p:nvSpPr>
+          <p:cNvPr id="14" name="TextBox 13"/>
+          <p:cNvSpPr txBox="1"/>
+          <p:nvPr/>
+        </p:nvSpPr>
+        <p:spPr>
+          <a:xfrm>
+            <a:off x="420623" y="3236976"/>
+            <a:ext cx="1627632" cy="1115568"/>
+          </a:xfrm>
+          <a:prstGeom prst="rect">
+            <a:avLst/>
+          </a:prstGeom>
+          <a:noFill/>
+        </p:spPr>
+        <p:txBody>
+          <a:bodyPr wrap="square" lIns="27432" rIns="27432" tIns="9144" bIns="9144" anchor="ctr">
+            <a:spAutoFit/>
+          </a:bodyPr>
+          <a:lstStyle/>
+          <a:p>
+            <a:pPr algn="ctr">
+              <a:lnSpc>
+                <a:spcPct val="108000"/>
+              </a:lnSpc>
+            </a:pPr>
+            <a:r>
+              <a:rPr sz="1150" b="1">
+                <a:solidFill>
+                  <a:srgbClr val="141414"/>
+                </a:solidFill>
+                <a:latin typeface="微软雅黑"/>
+                <a:ea typeface="微软雅黑"/>
+                <a:cs typeface="微软雅黑"/>
+              </a:rPr>
+              <a:t>能力调用</a:t>
+            </a:r>
+          </a:p>
+          <a:p>
+            <a:pPr algn="ctr">
+              <a:lnSpc>
+                <a:spcPct val="108000"/>
+              </a:lnSpc>
+              <a:spcBef>
+                <a:spcPts val="300"/>
+              </a:spcBef>
+            </a:pPr>
+            <a:r>
+              <a:rPr sz="900" b="0">
+                <a:solidFill>
+                  <a:srgbClr val="4A4A45"/>
+                </a:solidFill>
+                <a:latin typeface="微软雅黑"/>
+                <a:ea typeface="微软雅黑"/>
+                <a:cs typeface="微软雅黑"/>
+              </a:rPr>
+              <a:t>连接 · 配置 · 触发 · 采集 · 判定</a:t>
+            </a:r>
+          </a:p>
+        </p:txBody>
+      </p:sp>
+      <p:sp>
+        <p:nvSpPr>
+          <p:cNvPr id="15" name="Rounded Rectangle 14"/>
+          <p:cNvSpPr/>
+          <p:nvPr/>
+        </p:nvSpPr>
+        <p:spPr>
+          <a:xfrm>
+            <a:off x="384048" y="4773168"/>
+            <a:ext cx="1700784" cy="1298448"/>
+          </a:xfrm>
+          <a:prstGeom prst="roundRect">
+            <a:avLst>
+              <a:gd name="adj" fmla="val 5000"/>
+            </a:avLst>
+          </a:prstGeom>
+          <a:solidFill>
+            <a:srgbClr val="ECECEC"/>
+          </a:solidFill>
+          <a:ln>
+            <a:noFill/>
+          </a:ln>
+          <a:effectLst/>
+        </p:spPr>
+        <p:style>
+          <a:lnRef idx="1">
+            <a:schemeClr val="accent1"/>
+          </a:lnRef>
+          <a:fillRef idx="3">
+            <a:schemeClr val="accent1"/>
+          </a:fillRef>
+          <a:effectRef idx="2">
+            <a:schemeClr val="accent1"/>
+          </a:effectRef>
+          <a:fontRef idx="minor">
+            <a:schemeClr val="lt1"/>
+          </a:fontRef>
+        </p:style>
+        <p:txBody>
+          <a:bodyPr rtlCol="0" anchor="ctr" wrap="square"/>
+          <a:lstStyle/>
+          <a:p>
+            <a:pPr algn="ctr"/>
+          </a:p>
+        </p:txBody>
+      </p:sp>
+      <p:sp>
+        <p:nvSpPr>
+          <p:cNvPr id="16" name="TextBox 15"/>
+          <p:cNvSpPr txBox="1"/>
+          <p:nvPr/>
+        </p:nvSpPr>
+        <p:spPr>
+          <a:xfrm>
+            <a:off x="420623" y="4864607"/>
+            <a:ext cx="1627632" cy="1115568"/>
+          </a:xfrm>
+          <a:prstGeom prst="rect">
+            <a:avLst/>
+          </a:prstGeom>
+          <a:noFill/>
+        </p:spPr>
+        <p:txBody>
+          <a:bodyPr wrap="square" lIns="27432" rIns="27432" tIns="9144" bIns="9144" anchor="ctr">
+            <a:spAutoFit/>
+          </a:bodyPr>
+          <a:lstStyle/>
+          <a:p>
+            <a:pPr algn="ctr">
+              <a:lnSpc>
+                <a:spcPct val="108000"/>
+              </a:lnSpc>
+            </a:pPr>
+            <a:r>
+              <a:rPr sz="1150" b="1">
+                <a:solidFill>
+                  <a:srgbClr val="141414"/>
+                </a:solidFill>
+                <a:latin typeface="微软雅黑"/>
+                <a:ea typeface="微软雅黑"/>
+                <a:cs typeface="微软雅黑"/>
+              </a:rPr>
+              <a:t>结果与追溯</a:t>
+            </a:r>
+          </a:p>
+          <a:p>
+            <a:pPr algn="ctr">
+              <a:lnSpc>
+                <a:spcPct val="108000"/>
+              </a:lnSpc>
+              <a:spcBef>
+                <a:spcPts val="300"/>
+              </a:spcBef>
+            </a:pPr>
+            <a:r>
+              <a:rPr sz="900" b="0">
+                <a:solidFill>
+                  <a:srgbClr val="4A4A45"/>
+                </a:solidFill>
+                <a:latin typeface="微软雅黑"/>
+                <a:ea typeface="微软雅黑"/>
+                <a:cs typeface="微软雅黑"/>
+              </a:rPr>
+              <a:t>测量值、判定、日志与报告</a:t>
+            </a:r>
+          </a:p>
+        </p:txBody>
+      </p:sp>
+      <p:sp>
+        <p:nvSpPr>
+          <p:cNvPr id="17" name="Rounded Rectangle 16"/>
+          <p:cNvSpPr/>
+          <p:nvPr/>
+        </p:nvSpPr>
+        <p:spPr>
+          <a:xfrm>
+            <a:off x="2670048" y="1371600"/>
+            <a:ext cx="3566160" cy="745236"/>
+          </a:xfrm>
+          <a:prstGeom prst="roundRect">
+            <a:avLst>
+              <a:gd name="adj" fmla="val 5000"/>
+            </a:avLst>
+          </a:prstGeom>
+          <a:solidFill>
+            <a:srgbClr val="FBFBF9"/>
+          </a:solidFill>
+          <a:ln w="11430">
+            <a:solidFill>
+              <a:srgbClr val="D9D6CD"/>
+            </a:solidFill>
+          </a:ln>
+          <a:effectLst/>
+        </p:spPr>
+        <p:style>
+          <a:lnRef idx="1">
+            <a:schemeClr val="accent1"/>
+          </a:lnRef>
+          <a:fillRef idx="3">
+            <a:schemeClr val="accent1"/>
+          </a:fillRef>
+          <a:effectRef idx="2">
+            <a:schemeClr val="accent1"/>
+          </a:effectRef>
+          <a:fontRef idx="minor">
+            <a:schemeClr val="lt1"/>
+          </a:fontRef>
+        </p:style>
+        <p:txBody>
+          <a:bodyPr rtlCol="0" anchor="ctr" wrap="square"/>
+          <a:lstStyle/>
+          <a:p>
+            <a:pPr algn="ctr"/>
+          </a:p>
+        </p:txBody>
+      </p:sp>
+      <p:sp>
+        <p:nvSpPr>
+          <p:cNvPr id="18" name="Oval 17"/>
+          <p:cNvSpPr/>
+          <p:nvPr/>
+        </p:nvSpPr>
+        <p:spPr>
+          <a:xfrm>
+            <a:off x="2761488" y="1643634"/>
+            <a:ext cx="201168" cy="201168"/>
+          </a:xfrm>
+          <a:prstGeom prst="ellipse">
+            <a:avLst/>
+          </a:prstGeom>
+          <a:solidFill>
+            <a:srgbClr val="8B0F1A"/>
+          </a:solidFill>
+          <a:ln>
+            <a:noFill/>
+          </a:ln>
+          <a:effectLst/>
+        </p:spPr>
+        <p:style>
+          <a:lnRef idx="1">
+            <a:schemeClr val="accent1"/>
+          </a:lnRef>
+          <a:fillRef idx="3">
+            <a:schemeClr val="accent1"/>
+          </a:fillRef>
+          <a:effectRef idx="2">
+            <a:schemeClr val="accent1"/>
+          </a:effectRef>
+          <a:fontRef idx="minor">
+            <a:schemeClr val="lt1"/>
+          </a:fontRef>
+        </p:style>
+        <p:txBody>
+          <a:bodyPr rtlCol="0" anchor="ctr" lIns="27432" rIns="27432" tIns="9144" bIns="9144"/>
+          <a:lstStyle/>
+          <a:p>
+            <a:pPr algn="ctr"/>
+            <a:r>
+              <a:rPr sz="850" b="1">
+                <a:solidFill>
+                  <a:srgbClr val="FFFFFF"/>
+                </a:solidFill>
+                <a:latin typeface="微软雅黑"/>
+                <a:ea typeface="微软雅黑"/>
+                <a:cs typeface="微软雅黑"/>
+              </a:rPr>
+              <a:t>1</a:t>
+            </a:r>
+          </a:p>
+        </p:txBody>
+      </p:sp>
+      <p:sp>
+        <p:nvSpPr>
+          <p:cNvPr id="19" name="TextBox 18"/>
+          <p:cNvSpPr txBox="1"/>
+          <p:nvPr/>
+        </p:nvSpPr>
+        <p:spPr>
+          <a:xfrm>
+            <a:off x="3054096" y="1408176"/>
+            <a:ext cx="3090672" cy="672084"/>
+          </a:xfrm>
+          <a:prstGeom prst="rect">
+            <a:avLst/>
+          </a:prstGeom>
+          <a:noFill/>
+        </p:spPr>
+        <p:txBody>
+          <a:bodyPr wrap="square" lIns="27432" rIns="27432" tIns="9144" bIns="9144" anchor="ctr">
+            <a:spAutoFit/>
+          </a:bodyPr>
+          <a:lstStyle/>
+          <a:p>
+            <a:pPr algn="l">
+              <a:lnSpc>
+                <a:spcPct val="108000"/>
+              </a:lnSpc>
+            </a:pPr>
+            <a:r>
+              <a:rPr sz="1050" b="1">
+                <a:solidFill>
+                  <a:srgbClr val="141414"/>
+                </a:solidFill>
+                <a:latin typeface="微软雅黑"/>
+                <a:ea typeface="微软雅黑"/>
+                <a:cs typeface="微软雅黑"/>
+              </a:rPr>
+              <a:t>C-ABI 封装</a:t>
+            </a:r>
+          </a:p>
+          <a:p>
+            <a:pPr algn="l">
+              <a:lnSpc>
+                <a:spcPct val="108000"/>
+              </a:lnSpc>
+              <a:spcBef>
+                <a:spcPts val="200"/>
+              </a:spcBef>
+            </a:pPr>
+            <a:r>
+              <a:rPr sz="800" b="0">
+                <a:solidFill>
+                  <a:srgbClr val="5C5C56"/>
+                </a:solidFill>
+                <a:latin typeface="微软雅黑"/>
+                <a:ea typeface="微软雅黑"/>
+                <a:cs typeface="微软雅黑"/>
+              </a:rPr>
+              <a:t>ctypes / CFFI 加载 DLL，按头文件声明结构体与函数原型</a:t>
+            </a:r>
+          </a:p>
+        </p:txBody>
+      </p:sp>
+      <p:sp>
+        <p:nvSpPr>
+          <p:cNvPr id="20" name="Rounded Rectangle 19"/>
+          <p:cNvSpPr/>
+          <p:nvPr/>
+        </p:nvSpPr>
+        <p:spPr>
+          <a:xfrm>
+            <a:off x="2670048" y="2199132"/>
+            <a:ext cx="3566160" cy="745236"/>
+          </a:xfrm>
+          <a:prstGeom prst="roundRect">
+            <a:avLst>
+              <a:gd name="adj" fmla="val 5000"/>
+            </a:avLst>
+          </a:prstGeom>
+          <a:solidFill>
+            <a:srgbClr val="FBFBF9"/>
+          </a:solidFill>
+          <a:ln w="11430">
+            <a:solidFill>
+              <a:srgbClr val="D9D6CD"/>
+            </a:solidFill>
+          </a:ln>
+          <a:effectLst/>
+        </p:spPr>
+        <p:style>
+          <a:lnRef idx="1">
+            <a:schemeClr val="accent1"/>
+          </a:lnRef>
+          <a:fillRef idx="3">
+            <a:schemeClr val="accent1"/>
+          </a:fillRef>
+          <a:effectRef idx="2">
+            <a:schemeClr val="accent1"/>
+          </a:effectRef>
+          <a:fontRef idx="minor">
+            <a:schemeClr val="lt1"/>
+          </a:fontRef>
+        </p:style>
+        <p:txBody>
+          <a:bodyPr rtlCol="0" anchor="ctr" wrap="square"/>
+          <a:lstStyle/>
+          <a:p>
+            <a:pPr algn="ctr"/>
+          </a:p>
+        </p:txBody>
+      </p:sp>
+      <p:sp>
+        <p:nvSpPr>
+          <p:cNvPr id="21" name="Oval 20"/>
+          <p:cNvSpPr/>
+          <p:nvPr/>
+        </p:nvSpPr>
+        <p:spPr>
+          <a:xfrm>
+            <a:off x="2761488" y="2471166"/>
+            <a:ext cx="201168" cy="201168"/>
+          </a:xfrm>
+          <a:prstGeom prst="ellipse">
+            <a:avLst/>
+          </a:prstGeom>
+          <a:solidFill>
+            <a:srgbClr val="8B0F1A"/>
+          </a:solidFill>
+          <a:ln>
+            <a:noFill/>
+          </a:ln>
+          <a:effectLst/>
+        </p:spPr>
+        <p:style>
+          <a:lnRef idx="1">
+            <a:schemeClr val="accent1"/>
+          </a:lnRef>
+          <a:fillRef idx="3">
+            <a:schemeClr val="accent1"/>
+          </a:fillRef>
+          <a:effectRef idx="2">
+            <a:schemeClr val="accent1"/>
+          </a:effectRef>
+          <a:fontRef idx="minor">
+            <a:schemeClr val="lt1"/>
+          </a:fontRef>
+        </p:style>
+        <p:txBody>
+          <a:bodyPr rtlCol="0" anchor="ctr" lIns="27432" rIns="27432" tIns="9144" bIns="9144"/>
+          <a:lstStyle/>
+          <a:p>
+            <a:pPr algn="ctr"/>
+            <a:r>
+              <a:rPr sz="850" b="1">
+                <a:solidFill>
+                  <a:srgbClr val="FFFFFF"/>
+                </a:solidFill>
+                <a:latin typeface="微软雅黑"/>
+                <a:ea typeface="微软雅黑"/>
+                <a:cs typeface="微软雅黑"/>
+              </a:rPr>
+              <a:t>2</a:t>
+            </a:r>
+          </a:p>
+        </p:txBody>
+      </p:sp>
+      <p:sp>
+        <p:nvSpPr>
+          <p:cNvPr id="22" name="TextBox 21"/>
+          <p:cNvSpPr txBox="1"/>
+          <p:nvPr/>
+        </p:nvSpPr>
+        <p:spPr>
+          <a:xfrm>
+            <a:off x="3054096" y="2235708"/>
+            <a:ext cx="3090672" cy="672084"/>
+          </a:xfrm>
+          <a:prstGeom prst="rect">
+            <a:avLst/>
+          </a:prstGeom>
+          <a:noFill/>
+        </p:spPr>
+        <p:txBody>
+          <a:bodyPr wrap="square" lIns="27432" rIns="27432" tIns="9144" bIns="9144" anchor="ctr">
+            <a:spAutoFit/>
+          </a:bodyPr>
+          <a:lstStyle/>
+          <a:p>
+            <a:pPr algn="l">
+              <a:lnSpc>
+                <a:spcPct val="108000"/>
+              </a:lnSpc>
+            </a:pPr>
+            <a:r>
+              <a:rPr sz="1050" b="1">
+                <a:solidFill>
+                  <a:srgbClr val="141414"/>
+                </a:solidFill>
+                <a:latin typeface="微软雅黑"/>
+                <a:ea typeface="微软雅黑"/>
+                <a:cs typeface="微软雅黑"/>
+              </a:rPr>
+              <a:t>Python 适配器</a:t>
+            </a:r>
+          </a:p>
+          <a:p>
+            <a:pPr algn="l">
+              <a:lnSpc>
+                <a:spcPct val="108000"/>
+              </a:lnSpc>
+              <a:spcBef>
+                <a:spcPts val="200"/>
+              </a:spcBef>
+            </a:pPr>
+            <a:r>
+              <a:rPr sz="800" b="0">
+                <a:solidFill>
+                  <a:srgbClr val="5C5C56"/>
+                </a:solidFill>
+                <a:latin typeface="微软雅黑"/>
+                <a:ea typeface="微软雅黑"/>
+                <a:cs typeface="微软雅黑"/>
+              </a:rPr>
+              <a:t>直接导入供应商包，包装为统一设备类</a:t>
+            </a:r>
+          </a:p>
+        </p:txBody>
+      </p:sp>
+      <p:sp>
+        <p:nvSpPr>
+          <p:cNvPr id="23" name="Rounded Rectangle 22"/>
+          <p:cNvSpPr/>
+          <p:nvPr/>
+        </p:nvSpPr>
+        <p:spPr>
+          <a:xfrm>
+            <a:off x="2670048" y="3026663"/>
+            <a:ext cx="3566160" cy="745236"/>
+          </a:xfrm>
+          <a:prstGeom prst="roundRect">
+            <a:avLst>
+              <a:gd name="adj" fmla="val 5000"/>
+            </a:avLst>
+          </a:prstGeom>
+          <a:solidFill>
+            <a:srgbClr val="FBFBF9"/>
+          </a:solidFill>
+          <a:ln w="11430">
+            <a:solidFill>
+              <a:srgbClr val="D9D6CD"/>
+            </a:solidFill>
+          </a:ln>
+          <a:effectLst/>
+        </p:spPr>
+        <p:style>
+          <a:lnRef idx="1">
+            <a:schemeClr val="accent1"/>
+          </a:lnRef>
+          <a:fillRef idx="3">
+            <a:schemeClr val="accent1"/>
+          </a:fillRef>
+          <a:effectRef idx="2">
+            <a:schemeClr val="accent1"/>
+          </a:effectRef>
+          <a:fontRef idx="minor">
+            <a:schemeClr val="lt1"/>
+          </a:fontRef>
+        </p:style>
+        <p:txBody>
+          <a:bodyPr rtlCol="0" anchor="ctr" wrap="square"/>
+          <a:lstStyle/>
+          <a:p>
+            <a:pPr algn="ctr"/>
+          </a:p>
+        </p:txBody>
+      </p:sp>
+      <p:sp>
+        <p:nvSpPr>
+          <p:cNvPr id="24" name="Oval 23"/>
+          <p:cNvSpPr/>
+          <p:nvPr/>
+        </p:nvSpPr>
+        <p:spPr>
+          <a:xfrm>
+            <a:off x="2761488" y="3298697"/>
+            <a:ext cx="201168" cy="201168"/>
+          </a:xfrm>
+          <a:prstGeom prst="ellipse">
+            <a:avLst/>
+          </a:prstGeom>
+          <a:solidFill>
+            <a:srgbClr val="8B0F1A"/>
+          </a:solidFill>
+          <a:ln>
+            <a:noFill/>
+          </a:ln>
+          <a:effectLst/>
+        </p:spPr>
+        <p:style>
+          <a:lnRef idx="1">
+            <a:schemeClr val="accent1"/>
+          </a:lnRef>
+          <a:fillRef idx="3">
+            <a:schemeClr val="accent1"/>
+          </a:fillRef>
+          <a:effectRef idx="2">
+            <a:schemeClr val="accent1"/>
+          </a:effectRef>
+          <a:fontRef idx="minor">
+            <a:schemeClr val="lt1"/>
+          </a:fontRef>
+        </p:style>
+        <p:txBody>
+          <a:bodyPr rtlCol="0" anchor="ctr" lIns="27432" rIns="27432" tIns="9144" bIns="9144"/>
+          <a:lstStyle/>
+          <a:p>
+            <a:pPr algn="ctr"/>
+            <a:r>
+              <a:rPr sz="850" b="1">
+                <a:solidFill>
+                  <a:srgbClr val="FFFFFF"/>
+                </a:solidFill>
+                <a:latin typeface="微软雅黑"/>
+                <a:ea typeface="微软雅黑"/>
+                <a:cs typeface="微软雅黑"/>
+              </a:rPr>
+              <a:t>3</a:t>
+            </a:r>
+          </a:p>
+        </p:txBody>
+      </p:sp>
+      <p:sp>
+        <p:nvSpPr>
+          <p:cNvPr id="25" name="TextBox 24"/>
+          <p:cNvSpPr txBox="1"/>
+          <p:nvPr/>
+        </p:nvSpPr>
+        <p:spPr>
+          <a:xfrm>
+            <a:off x="3054096" y="3063239"/>
+            <a:ext cx="3090672" cy="672084"/>
+          </a:xfrm>
+          <a:prstGeom prst="rect">
+            <a:avLst/>
+          </a:prstGeom>
+          <a:noFill/>
+        </p:spPr>
+        <p:txBody>
+          <a:bodyPr wrap="square" lIns="27432" rIns="27432" tIns="9144" bIns="9144" anchor="ctr">
+            <a:spAutoFit/>
+          </a:bodyPr>
+          <a:lstStyle/>
+          <a:p>
+            <a:pPr algn="l">
+              <a:lnSpc>
+                <a:spcPct val="108000"/>
+              </a:lnSpc>
+            </a:pPr>
+            <a:r>
+              <a:rPr sz="1050" b="1">
+                <a:solidFill>
+                  <a:srgbClr val="141414"/>
+                </a:solidFill>
+                <a:latin typeface="微软雅黑"/>
+                <a:ea typeface="微软雅黑"/>
+                <a:cs typeface="微软雅黑"/>
+              </a:rPr>
+              <a:t>VISA / SCPI 客户端</a:t>
+            </a:r>
+          </a:p>
+          <a:p>
+            <a:pPr algn="l">
+              <a:lnSpc>
+                <a:spcPct val="108000"/>
+              </a:lnSpc>
+              <a:spcBef>
+                <a:spcPts val="200"/>
+              </a:spcBef>
+            </a:pPr>
+            <a:r>
+              <a:rPr sz="800" b="0">
+                <a:solidFill>
+                  <a:srgbClr val="5C5C56"/>
+                </a:solidFill>
+                <a:latin typeface="微软雅黑"/>
+                <a:ea typeface="微软雅黑"/>
+                <a:cs typeface="微软雅黑"/>
+              </a:rPr>
+              <a:t>PyVISA 打开资源，按手册下发命令、解析响应</a:t>
+            </a:r>
+          </a:p>
+        </p:txBody>
+      </p:sp>
+      <p:sp>
+        <p:nvSpPr>
+          <p:cNvPr id="26" name="Rounded Rectangle 25"/>
+          <p:cNvSpPr/>
+          <p:nvPr/>
+        </p:nvSpPr>
+        <p:spPr>
+          <a:xfrm>
+            <a:off x="2670048" y="3854196"/>
+            <a:ext cx="3566160" cy="745236"/>
+          </a:xfrm>
+          <a:prstGeom prst="roundRect">
+            <a:avLst>
+              <a:gd name="adj" fmla="val 5000"/>
+            </a:avLst>
+          </a:prstGeom>
+          <a:solidFill>
+            <a:srgbClr val="FBFBF9"/>
+          </a:solidFill>
+          <a:ln w="11430">
+            <a:solidFill>
+              <a:srgbClr val="D9D6CD"/>
+            </a:solidFill>
+          </a:ln>
+          <a:effectLst/>
+        </p:spPr>
+        <p:style>
+          <a:lnRef idx="1">
+            <a:schemeClr val="accent1"/>
+          </a:lnRef>
+          <a:fillRef idx="3">
+            <a:schemeClr val="accent1"/>
+          </a:fillRef>
+          <a:effectRef idx="2">
+            <a:schemeClr val="accent1"/>
+          </a:effectRef>
+          <a:fontRef idx="minor">
+            <a:schemeClr val="lt1"/>
+          </a:fontRef>
+        </p:style>
+        <p:txBody>
+          <a:bodyPr rtlCol="0" anchor="ctr" wrap="square"/>
+          <a:lstStyle/>
+          <a:p>
+            <a:pPr algn="ctr"/>
+          </a:p>
+        </p:txBody>
+      </p:sp>
+      <p:sp>
+        <p:nvSpPr>
+          <p:cNvPr id="27" name="Oval 26"/>
+          <p:cNvSpPr/>
+          <p:nvPr/>
+        </p:nvSpPr>
+        <p:spPr>
+          <a:xfrm>
+            <a:off x="2761488" y="4126229"/>
+            <a:ext cx="201168" cy="201168"/>
+          </a:xfrm>
+          <a:prstGeom prst="ellipse">
+            <a:avLst/>
+          </a:prstGeom>
+          <a:solidFill>
+            <a:srgbClr val="8B0F1A"/>
+          </a:solidFill>
+          <a:ln>
+            <a:noFill/>
+          </a:ln>
+          <a:effectLst/>
+        </p:spPr>
+        <p:style>
+          <a:lnRef idx="1">
+            <a:schemeClr val="accent1"/>
+          </a:lnRef>
+          <a:fillRef idx="3">
+            <a:schemeClr val="accent1"/>
+          </a:fillRef>
+          <a:effectRef idx="2">
+            <a:schemeClr val="accent1"/>
+          </a:effectRef>
+          <a:fontRef idx="minor">
+            <a:schemeClr val="lt1"/>
+          </a:fontRef>
+        </p:style>
+        <p:txBody>
+          <a:bodyPr rtlCol="0" anchor="ctr" lIns="27432" rIns="27432" tIns="9144" bIns="9144"/>
+          <a:lstStyle/>
+          <a:p>
+            <a:pPr algn="ctr"/>
+            <a:r>
+              <a:rPr sz="850" b="1">
+                <a:solidFill>
+                  <a:srgbClr val="FFFFFF"/>
+                </a:solidFill>
+                <a:latin typeface="微软雅黑"/>
+                <a:ea typeface="微软雅黑"/>
+                <a:cs typeface="微软雅黑"/>
+              </a:rPr>
+              <a:t>4</a:t>
+            </a:r>
+          </a:p>
+        </p:txBody>
+      </p:sp>
+      <p:sp>
+        <p:nvSpPr>
+          <p:cNvPr id="28" name="TextBox 27"/>
+          <p:cNvSpPr txBox="1"/>
+          <p:nvPr/>
+        </p:nvSpPr>
+        <p:spPr>
+          <a:xfrm>
+            <a:off x="3054096" y="3890772"/>
+            <a:ext cx="3090672" cy="672084"/>
+          </a:xfrm>
+          <a:prstGeom prst="rect">
+            <a:avLst/>
+          </a:prstGeom>
+          <a:noFill/>
+        </p:spPr>
+        <p:txBody>
+          <a:bodyPr wrap="square" lIns="27432" rIns="27432" tIns="9144" bIns="9144" anchor="ctr">
+            <a:spAutoFit/>
+          </a:bodyPr>
+          <a:lstStyle/>
+          <a:p>
+            <a:pPr algn="l">
+              <a:lnSpc>
+                <a:spcPct val="108000"/>
+              </a:lnSpc>
+            </a:pPr>
+            <a:r>
+              <a:rPr sz="1050" b="1">
+                <a:solidFill>
+                  <a:srgbClr val="141414"/>
+                </a:solidFill>
+                <a:latin typeface="微软雅黑"/>
+                <a:ea typeface="微软雅黑"/>
+                <a:cs typeface="微软雅黑"/>
+              </a:rPr>
+              <a:t>COM / .NET 桥</a:t>
+            </a:r>
+          </a:p>
+          <a:p>
+            <a:pPr algn="l">
+              <a:lnSpc>
+                <a:spcPct val="108000"/>
+              </a:lnSpc>
+              <a:spcBef>
+                <a:spcPts val="200"/>
+              </a:spcBef>
+            </a:pPr>
+            <a:r>
+              <a:rPr sz="800" b="0">
+                <a:solidFill>
+                  <a:srgbClr val="5C5C56"/>
+                </a:solidFill>
+                <a:latin typeface="微软雅黑"/>
+                <a:ea typeface="微软雅黑"/>
+                <a:cs typeface="微软雅黑"/>
+              </a:rPr>
+              <a:t>comtypes 或 pythonnet 调 ActiveX、.NET 程序集</a:t>
+            </a:r>
+          </a:p>
+        </p:txBody>
+      </p:sp>
+      <p:sp>
+        <p:nvSpPr>
+          <p:cNvPr id="29" name="Rounded Rectangle 28"/>
+          <p:cNvSpPr/>
+          <p:nvPr/>
+        </p:nvSpPr>
+        <p:spPr>
+          <a:xfrm>
+            <a:off x="2670048" y="4681728"/>
+            <a:ext cx="3566160" cy="745236"/>
+          </a:xfrm>
+          <a:prstGeom prst="roundRect">
+            <a:avLst>
+              <a:gd name="adj" fmla="val 5000"/>
+            </a:avLst>
+          </a:prstGeom>
+          <a:solidFill>
+            <a:srgbClr val="FBFBF9"/>
+          </a:solidFill>
+          <a:ln w="11430">
+            <a:solidFill>
+              <a:srgbClr val="D9D6CD"/>
+            </a:solidFill>
+          </a:ln>
+          <a:effectLst/>
+        </p:spPr>
+        <p:style>
+          <a:lnRef idx="1">
+            <a:schemeClr val="accent1"/>
+          </a:lnRef>
+          <a:fillRef idx="3">
+            <a:schemeClr val="accent1"/>
+          </a:fillRef>
+          <a:effectRef idx="2">
+            <a:schemeClr val="accent1"/>
+          </a:effectRef>
+          <a:fontRef idx="minor">
+            <a:schemeClr val="lt1"/>
+          </a:fontRef>
+        </p:style>
+        <p:txBody>
+          <a:bodyPr rtlCol="0" anchor="ctr" wrap="square"/>
+          <a:lstStyle/>
+          <a:p>
+            <a:pPr algn="ctr"/>
+          </a:p>
+        </p:txBody>
+      </p:sp>
+      <p:sp>
+        <p:nvSpPr>
+          <p:cNvPr id="30" name="Oval 29"/>
+          <p:cNvSpPr/>
+          <p:nvPr/>
+        </p:nvSpPr>
+        <p:spPr>
+          <a:xfrm>
+            <a:off x="2761488" y="4953762"/>
+            <a:ext cx="201168" cy="201168"/>
+          </a:xfrm>
+          <a:prstGeom prst="ellipse">
+            <a:avLst/>
+          </a:prstGeom>
+          <a:solidFill>
+            <a:srgbClr val="8B0F1A"/>
+          </a:solidFill>
+          <a:ln>
+            <a:noFill/>
+          </a:ln>
+          <a:effectLst/>
+        </p:spPr>
+        <p:style>
+          <a:lnRef idx="1">
+            <a:schemeClr val="accent1"/>
+          </a:lnRef>
+          <a:fillRef idx="3">
+            <a:schemeClr val="accent1"/>
+          </a:fillRef>
+          <a:effectRef idx="2">
+            <a:schemeClr val="accent1"/>
+          </a:effectRef>
+          <a:fontRef idx="minor">
+            <a:schemeClr val="lt1"/>
+          </a:fontRef>
+        </p:style>
+        <p:txBody>
+          <a:bodyPr rtlCol="0" anchor="ctr" lIns="27432" rIns="27432" tIns="9144" bIns="9144"/>
+          <a:lstStyle/>
+          <a:p>
+            <a:pPr algn="ctr"/>
+            <a:r>
+              <a:rPr sz="850" b="1">
+                <a:solidFill>
+                  <a:srgbClr val="FFFFFF"/>
+                </a:solidFill>
+                <a:latin typeface="微软雅黑"/>
+                <a:ea typeface="微软雅黑"/>
+                <a:cs typeface="微软雅黑"/>
+              </a:rPr>
+              <a:t>5</a:t>
+            </a:r>
+          </a:p>
+        </p:txBody>
+      </p:sp>
+      <p:sp>
+        <p:nvSpPr>
+          <p:cNvPr id="31" name="TextBox 30"/>
+          <p:cNvSpPr txBox="1"/>
+          <p:nvPr/>
+        </p:nvSpPr>
+        <p:spPr>
+          <a:xfrm>
+            <a:off x="3054096" y="4718304"/>
+            <a:ext cx="3090672" cy="672084"/>
+          </a:xfrm>
+          <a:prstGeom prst="rect">
+            <a:avLst/>
+          </a:prstGeom>
+          <a:noFill/>
+        </p:spPr>
+        <p:txBody>
+          <a:bodyPr wrap="square" lIns="27432" rIns="27432" tIns="9144" bIns="9144" anchor="ctr">
+            <a:spAutoFit/>
+          </a:bodyPr>
+          <a:lstStyle/>
+          <a:p>
+            <a:pPr algn="l">
+              <a:lnSpc>
+                <a:spcPct val="108000"/>
+              </a:lnSpc>
+            </a:pPr>
+            <a:r>
+              <a:rPr sz="1050" b="1">
+                <a:solidFill>
+                  <a:srgbClr val="141414"/>
+                </a:solidFill>
+                <a:latin typeface="微软雅黑"/>
+                <a:ea typeface="微软雅黑"/>
+                <a:cs typeface="微软雅黑"/>
+              </a:rPr>
+              <a:t>进程调用器</a:t>
+            </a:r>
+          </a:p>
+          <a:p>
+            <a:pPr algn="l">
+              <a:lnSpc>
+                <a:spcPct val="108000"/>
+              </a:lnSpc>
+              <a:spcBef>
+                <a:spcPts val="200"/>
+              </a:spcBef>
+            </a:pPr>
+            <a:r>
+              <a:rPr sz="800" b="0">
+                <a:solidFill>
+                  <a:srgbClr val="5C5C56"/>
+                </a:solidFill>
+                <a:latin typeface="微软雅黑"/>
+                <a:ea typeface="微软雅黑"/>
+                <a:cs typeface="微软雅黑"/>
+              </a:rPr>
+              <a:t>subprocess 调厂商 exe，解析返回码与输出文件</a:t>
+            </a:r>
+          </a:p>
+        </p:txBody>
+      </p:sp>
+      <p:sp>
+        <p:nvSpPr>
+          <p:cNvPr id="32" name="Rounded Rectangle 31"/>
+          <p:cNvSpPr/>
+          <p:nvPr/>
+        </p:nvSpPr>
+        <p:spPr>
+          <a:xfrm>
+            <a:off x="2670048" y="5509260"/>
+            <a:ext cx="3566160" cy="745236"/>
+          </a:xfrm>
+          <a:prstGeom prst="roundRect">
+            <a:avLst>
+              <a:gd name="adj" fmla="val 5000"/>
+            </a:avLst>
+          </a:prstGeom>
+          <a:solidFill>
+            <a:srgbClr val="FBFBF9"/>
+          </a:solidFill>
+          <a:ln w="11430">
+            <a:solidFill>
+              <a:srgbClr val="D9D6CD"/>
+            </a:solidFill>
+          </a:ln>
+          <a:effectLst/>
+        </p:spPr>
+        <p:style>
+          <a:lnRef idx="1">
+            <a:schemeClr val="accent1"/>
+          </a:lnRef>
+          <a:fillRef idx="3">
+            <a:schemeClr val="accent1"/>
+          </a:fillRef>
+          <a:effectRef idx="2">
+            <a:schemeClr val="accent1"/>
+          </a:effectRef>
+          <a:fontRef idx="minor">
+            <a:schemeClr val="lt1"/>
+          </a:fontRef>
+        </p:style>
+        <p:txBody>
+          <a:bodyPr rtlCol="0" anchor="ctr" wrap="square"/>
+          <a:lstStyle/>
+          <a:p>
+            <a:pPr algn="ctr"/>
+          </a:p>
+        </p:txBody>
+      </p:sp>
+      <p:sp>
+        <p:nvSpPr>
+          <p:cNvPr id="33" name="Oval 32"/>
+          <p:cNvSpPr/>
+          <p:nvPr/>
+        </p:nvSpPr>
+        <p:spPr>
+          <a:xfrm>
+            <a:off x="2761488" y="5781294"/>
+            <a:ext cx="201168" cy="201168"/>
+          </a:xfrm>
+          <a:prstGeom prst="ellipse">
+            <a:avLst/>
+          </a:prstGeom>
+          <a:solidFill>
+            <a:srgbClr val="8B0F1A"/>
+          </a:solidFill>
+          <a:ln>
+            <a:noFill/>
+          </a:ln>
+          <a:effectLst/>
+        </p:spPr>
+        <p:style>
+          <a:lnRef idx="1">
+            <a:schemeClr val="accent1"/>
+          </a:lnRef>
+          <a:fillRef idx="3">
+            <a:schemeClr val="accent1"/>
+          </a:fillRef>
+          <a:effectRef idx="2">
+            <a:schemeClr val="accent1"/>
+          </a:effectRef>
+          <a:fontRef idx="minor">
+            <a:schemeClr val="lt1"/>
+          </a:fontRef>
+        </p:style>
+        <p:txBody>
+          <a:bodyPr rtlCol="0" anchor="ctr" lIns="27432" rIns="27432" tIns="9144" bIns="9144"/>
+          <a:lstStyle/>
+          <a:p>
+            <a:pPr algn="ctr"/>
+            <a:r>
+              <a:rPr sz="850" b="1">
+                <a:solidFill>
+                  <a:srgbClr val="FFFFFF"/>
+                </a:solidFill>
+                <a:latin typeface="微软雅黑"/>
+                <a:ea typeface="微软雅黑"/>
+                <a:cs typeface="微软雅黑"/>
+              </a:rPr>
+              <a:t>6</a:t>
+            </a:r>
+          </a:p>
+        </p:txBody>
+      </p:sp>
+      <p:sp>
+        <p:nvSpPr>
+          <p:cNvPr id="34" name="TextBox 33"/>
+          <p:cNvSpPr txBox="1"/>
+          <p:nvPr/>
+        </p:nvSpPr>
+        <p:spPr>
+          <a:xfrm>
+            <a:off x="3054096" y="5545836"/>
+            <a:ext cx="3090672" cy="672084"/>
+          </a:xfrm>
+          <a:prstGeom prst="rect">
+            <a:avLst/>
+          </a:prstGeom>
+          <a:noFill/>
+        </p:spPr>
+        <p:txBody>
+          <a:bodyPr wrap="square" lIns="27432" rIns="27432" tIns="9144" bIns="9144" anchor="ctr">
+            <a:spAutoFit/>
+          </a:bodyPr>
+          <a:lstStyle/>
+          <a:p>
+            <a:pPr algn="l">
+              <a:lnSpc>
+                <a:spcPct val="108000"/>
+              </a:lnSpc>
+            </a:pPr>
+            <a:r>
+              <a:rPr sz="1050" b="1">
+                <a:solidFill>
+                  <a:srgbClr val="141414"/>
+                </a:solidFill>
+                <a:latin typeface="微软雅黑"/>
+                <a:ea typeface="微软雅黑"/>
+                <a:cs typeface="微软雅黑"/>
+              </a:rPr>
+              <a:t>协议实现器</a:t>
+            </a:r>
+          </a:p>
+          <a:p>
+            <a:pPr algn="l">
+              <a:lnSpc>
+                <a:spcPct val="108000"/>
+              </a:lnSpc>
+              <a:spcBef>
+                <a:spcPts val="200"/>
+              </a:spcBef>
+            </a:pPr>
+            <a:r>
+              <a:rPr sz="800" b="0">
+                <a:solidFill>
+                  <a:srgbClr val="5C5C56"/>
+                </a:solidFill>
+                <a:latin typeface="微软雅黑"/>
+                <a:ea typeface="微软雅黑"/>
+                <a:cs typeface="微软雅黑"/>
+              </a:rPr>
+              <a:t>按私有协议手册自建串口 / CAN / TCP 报文收发与校验</a:t>
+            </a:r>
+          </a:p>
+        </p:txBody>
+      </p:sp>
+      <p:sp>
+        <p:nvSpPr>
+          <p:cNvPr id="35" name="Rounded Rectangle 34"/>
+          <p:cNvSpPr/>
+          <p:nvPr/>
+        </p:nvSpPr>
+        <p:spPr>
+          <a:xfrm>
+            <a:off x="6803136" y="1371600"/>
+            <a:ext cx="5111496" cy="274320"/>
+          </a:xfrm>
+          <a:prstGeom prst="roundRect">
+            <a:avLst>
+              <a:gd name="adj" fmla="val 4000"/>
+            </a:avLst>
+          </a:prstGeom>
+          <a:solidFill>
+            <a:srgbClr val="E8F0F7"/>
+          </a:solidFill>
+          <a:ln>
+            <a:noFill/>
+          </a:ln>
+          <a:effectLst/>
+        </p:spPr>
+        <p:style>
+          <a:lnRef idx="1">
+            <a:schemeClr val="accent1"/>
+          </a:lnRef>
+          <a:fillRef idx="3">
+            <a:schemeClr val="accent1"/>
+          </a:fillRef>
+          <a:effectRef idx="2">
+            <a:schemeClr val="accent1"/>
+          </a:effectRef>
+          <a:fontRef idx="minor">
+            <a:schemeClr val="lt1"/>
+          </a:fontRef>
+        </p:style>
+        <p:txBody>
+          <a:bodyPr rtlCol="0" anchor="ctr" wrap="square"/>
+          <a:lstStyle/>
+          <a:p>
+            <a:pPr algn="ctr"/>
+          </a:p>
+        </p:txBody>
+      </p:sp>
+      <p:sp>
+        <p:nvSpPr>
+          <p:cNvPr id="36" name="TextBox 35"/>
+          <p:cNvSpPr txBox="1"/>
+          <p:nvPr/>
+        </p:nvSpPr>
+        <p:spPr>
+          <a:xfrm>
+            <a:off x="6894576" y="1371600"/>
+            <a:ext cx="4928616" cy="274320"/>
+          </a:xfrm>
+          <a:prstGeom prst="rect">
+            <a:avLst/>
+          </a:prstGeom>
+          <a:noFill/>
+        </p:spPr>
+        <p:txBody>
+          <a:bodyPr wrap="square" lIns="27432" rIns="27432" tIns="9144" bIns="9144" anchor="ctr">
+            <a:spAutoFit/>
+          </a:bodyPr>
+          <a:lstStyle/>
+          <a:p>
+            <a:pPr algn="l">
+              <a:lnSpc>
+                <a:spcPct val="108000"/>
+              </a:lnSpc>
+            </a:pPr>
+            <a:r>
+              <a:rPr sz="1000" b="1">
+                <a:solidFill>
+                  <a:srgbClr val="0F4C81"/>
+                </a:solidFill>
+                <a:latin typeface="微软雅黑"/>
+                <a:ea typeface="微软雅黑"/>
+                <a:cs typeface="微软雅黑"/>
+              </a:rPr>
+              <a:t>二进制接口类（随驱动包分发）</a:t>
+            </a:r>
+          </a:p>
+        </p:txBody>
+      </p:sp>
+      <p:sp>
+        <p:nvSpPr>
+          <p:cNvPr id="37" name="Rounded Rectangle 36"/>
+          <p:cNvSpPr/>
+          <p:nvPr/>
+        </p:nvSpPr>
+        <p:spPr>
+          <a:xfrm>
+            <a:off x="6803136" y="1700784"/>
+            <a:ext cx="2519172" cy="420624"/>
+          </a:xfrm>
+          <a:prstGeom prst="roundRect">
+            <a:avLst>
+              <a:gd name="adj" fmla="val 5000"/>
+            </a:avLst>
+          </a:prstGeom>
+          <a:solidFill>
+            <a:srgbClr val="FFFFFF"/>
+          </a:solidFill>
+          <a:ln w="11430">
+            <a:solidFill>
+              <a:srgbClr val="C9C9C2"/>
+            </a:solidFill>
+          </a:ln>
+          <a:effectLst/>
+        </p:spPr>
+        <p:style>
+          <a:lnRef idx="1">
+            <a:schemeClr val="accent1"/>
+          </a:lnRef>
+          <a:fillRef idx="3">
+            <a:schemeClr val="accent1"/>
+          </a:fillRef>
+          <a:effectRef idx="2">
+            <a:schemeClr val="accent1"/>
+          </a:effectRef>
+          <a:fontRef idx="minor">
+            <a:schemeClr val="lt1"/>
+          </a:fontRef>
+        </p:style>
+        <p:txBody>
+          <a:bodyPr rtlCol="0" anchor="ctr" wrap="square"/>
+          <a:lstStyle/>
+          <a:p>
+            <a:pPr algn="ctr"/>
+          </a:p>
+        </p:txBody>
+      </p:sp>
+      <p:sp>
+        <p:nvSpPr>
+          <p:cNvPr id="38" name="TextBox 37"/>
+          <p:cNvSpPr txBox="1"/>
+          <p:nvPr/>
+        </p:nvSpPr>
+        <p:spPr>
+          <a:xfrm>
+            <a:off x="6876288" y="1700784"/>
+            <a:ext cx="2171699" cy="420624"/>
+          </a:xfrm>
+          <a:prstGeom prst="rect">
+            <a:avLst/>
+          </a:prstGeom>
+          <a:noFill/>
+        </p:spPr>
+        <p:txBody>
+          <a:bodyPr wrap="square" lIns="27432" rIns="27432" tIns="9144" bIns="9144" anchor="ctr">
+            <a:spAutoFit/>
+          </a:bodyPr>
+          <a:lstStyle/>
+          <a:p>
+            <a:pPr algn="l">
+              <a:lnSpc>
+                <a:spcPct val="108000"/>
+              </a:lnSpc>
+            </a:pPr>
+            <a:r>
+              <a:rPr sz="900" b="0">
+                <a:solidFill>
+                  <a:srgbClr val="141414"/>
+                </a:solidFill>
+                <a:latin typeface="微软雅黑"/>
+                <a:ea typeface="微软雅黑"/>
+                <a:cs typeface="微软雅黑"/>
+              </a:rPr>
+              <a:t>DLL + 头文件（C/C++ SDK）</a:t>
+            </a:r>
+          </a:p>
+        </p:txBody>
+      </p:sp>
+      <p:sp>
+        <p:nvSpPr>
+          <p:cNvPr id="39" name="Rounded Rectangle 38"/>
+          <p:cNvSpPr/>
+          <p:nvPr/>
+        </p:nvSpPr>
+        <p:spPr>
+          <a:xfrm>
+            <a:off x="9102852" y="1828799"/>
+            <a:ext cx="146304" cy="164592"/>
+          </a:xfrm>
+          <a:prstGeom prst="roundRect">
+            <a:avLst>
+              <a:gd name="adj" fmla="val 12000"/>
+            </a:avLst>
+          </a:prstGeom>
+          <a:solidFill>
+            <a:srgbClr val="8B0F1A"/>
+          </a:solidFill>
+          <a:ln>
+            <a:noFill/>
+          </a:ln>
+          <a:effectLst/>
+        </p:spPr>
+        <p:style>
+          <a:lnRef idx="1">
+            <a:schemeClr val="accent1"/>
+          </a:lnRef>
+          <a:fillRef idx="3">
+            <a:schemeClr val="accent1"/>
+          </a:fillRef>
+          <a:effectRef idx="2">
+            <a:schemeClr val="accent1"/>
+          </a:effectRef>
+          <a:fontRef idx="minor">
+            <a:schemeClr val="lt1"/>
+          </a:fontRef>
+        </p:style>
+        <p:txBody>
+          <a:bodyPr rtlCol="0" anchor="ctr" lIns="27432" rIns="27432" tIns="9144" bIns="9144"/>
+          <a:lstStyle/>
+          <a:p>
+            <a:pPr algn="ctr"/>
+            <a:r>
+              <a:rPr sz="750" b="1">
+                <a:solidFill>
+                  <a:srgbClr val="FFFFFF"/>
+                </a:solidFill>
+                <a:latin typeface="微软雅黑"/>
+                <a:ea typeface="微软雅黑"/>
+                <a:cs typeface="微软雅黑"/>
+              </a:rPr>
+              <a:t>1</a:t>
+            </a:r>
+          </a:p>
+        </p:txBody>
+      </p:sp>
+      <p:sp>
+        <p:nvSpPr>
+          <p:cNvPr id="40" name="Rounded Rectangle 39"/>
+          <p:cNvSpPr/>
+          <p:nvPr/>
+        </p:nvSpPr>
+        <p:spPr>
+          <a:xfrm>
+            <a:off x="9395460" y="1700784"/>
+            <a:ext cx="2519172" cy="420624"/>
+          </a:xfrm>
+          <a:prstGeom prst="roundRect">
+            <a:avLst>
+              <a:gd name="adj" fmla="val 5000"/>
+            </a:avLst>
+          </a:prstGeom>
+          <a:solidFill>
+            <a:srgbClr val="FFFFFF"/>
+          </a:solidFill>
+          <a:ln w="11430">
+            <a:solidFill>
+              <a:srgbClr val="C9C9C2"/>
+            </a:solidFill>
+          </a:ln>
+          <a:effectLst/>
+        </p:spPr>
+        <p:style>
+          <a:lnRef idx="1">
+            <a:schemeClr val="accent1"/>
+          </a:lnRef>
+          <a:fillRef idx="3">
+            <a:schemeClr val="accent1"/>
+          </a:fillRef>
+          <a:effectRef idx="2">
+            <a:schemeClr val="accent1"/>
+          </a:effectRef>
+          <a:fontRef idx="minor">
+            <a:schemeClr val="lt1"/>
+          </a:fontRef>
+        </p:style>
+        <p:txBody>
+          <a:bodyPr rtlCol="0" anchor="ctr" wrap="square"/>
+          <a:lstStyle/>
+          <a:p>
+            <a:pPr algn="ctr"/>
+          </a:p>
+        </p:txBody>
+      </p:sp>
+      <p:sp>
+        <p:nvSpPr>
+          <p:cNvPr id="41" name="TextBox 40"/>
+          <p:cNvSpPr txBox="1"/>
+          <p:nvPr/>
+        </p:nvSpPr>
+        <p:spPr>
+          <a:xfrm>
+            <a:off x="9468612" y="1700784"/>
+            <a:ext cx="2171699" cy="420624"/>
+          </a:xfrm>
+          <a:prstGeom prst="rect">
+            <a:avLst/>
+          </a:prstGeom>
+          <a:noFill/>
+        </p:spPr>
+        <p:txBody>
+          <a:bodyPr wrap="square" lIns="27432" rIns="27432" tIns="9144" bIns="9144" anchor="ctr">
+            <a:spAutoFit/>
+          </a:bodyPr>
+          <a:lstStyle/>
+          <a:p>
+            <a:pPr algn="l">
+              <a:lnSpc>
+                <a:spcPct val="108000"/>
+              </a:lnSpc>
+            </a:pPr>
+            <a:r>
+              <a:rPr sz="900" b="0">
+                <a:solidFill>
+                  <a:srgbClr val="141414"/>
+                </a:solidFill>
+                <a:latin typeface="微软雅黑"/>
+                <a:ea typeface="微软雅黑"/>
+                <a:cs typeface="微软雅黑"/>
+              </a:rPr>
+              <a:t>COM / ActiveX 组件</a:t>
+            </a:r>
+          </a:p>
+        </p:txBody>
+      </p:sp>
+      <p:sp>
+        <p:nvSpPr>
+          <p:cNvPr id="42" name="Rounded Rectangle 41"/>
+          <p:cNvSpPr/>
+          <p:nvPr/>
+        </p:nvSpPr>
+        <p:spPr>
+          <a:xfrm>
+            <a:off x="11695176" y="1828799"/>
+            <a:ext cx="146304" cy="164592"/>
+          </a:xfrm>
+          <a:prstGeom prst="roundRect">
+            <a:avLst>
+              <a:gd name="adj" fmla="val 12000"/>
+            </a:avLst>
+          </a:prstGeom>
+          <a:solidFill>
+            <a:srgbClr val="8B0F1A"/>
+          </a:solidFill>
+          <a:ln>
+            <a:noFill/>
+          </a:ln>
+          <a:effectLst/>
+        </p:spPr>
+        <p:style>
+          <a:lnRef idx="1">
+            <a:schemeClr val="accent1"/>
+          </a:lnRef>
+          <a:fillRef idx="3">
+            <a:schemeClr val="accent1"/>
+          </a:fillRef>
+          <a:effectRef idx="2">
+            <a:schemeClr val="accent1"/>
+          </a:effectRef>
+          <a:fontRef idx="minor">
+            <a:schemeClr val="lt1"/>
+          </a:fontRef>
+        </p:style>
+        <p:txBody>
+          <a:bodyPr rtlCol="0" anchor="ctr" lIns="27432" rIns="27432" tIns="9144" bIns="9144"/>
+          <a:lstStyle/>
+          <a:p>
+            <a:pPr algn="ctr"/>
+            <a:r>
+              <a:rPr sz="750" b="1">
+                <a:solidFill>
+                  <a:srgbClr val="FFFFFF"/>
+                </a:solidFill>
+                <a:latin typeface="微软雅黑"/>
+                <a:ea typeface="微软雅黑"/>
+                <a:cs typeface="微软雅黑"/>
+              </a:rPr>
+              <a:t>4</a:t>
+            </a:r>
+          </a:p>
+        </p:txBody>
+      </p:sp>
+      <p:sp>
+        <p:nvSpPr>
+          <p:cNvPr id="43" name="Rounded Rectangle 42"/>
+          <p:cNvSpPr/>
+          <p:nvPr/>
+        </p:nvSpPr>
+        <p:spPr>
+          <a:xfrm>
+            <a:off x="6803136" y="2176272"/>
+            <a:ext cx="2519172" cy="420624"/>
+          </a:xfrm>
+          <a:prstGeom prst="roundRect">
+            <a:avLst>
+              <a:gd name="adj" fmla="val 5000"/>
+            </a:avLst>
+          </a:prstGeom>
+          <a:solidFill>
+            <a:srgbClr val="FFFFFF"/>
+          </a:solidFill>
+          <a:ln w="11430">
+            <a:solidFill>
+              <a:srgbClr val="C9C9C2"/>
+            </a:solidFill>
+          </a:ln>
+          <a:effectLst/>
+        </p:spPr>
+        <p:style>
+          <a:lnRef idx="1">
+            <a:schemeClr val="accent1"/>
+          </a:lnRef>
+          <a:fillRef idx="3">
+            <a:schemeClr val="accent1"/>
+          </a:fillRef>
+          <a:effectRef idx="2">
+            <a:schemeClr val="accent1"/>
+          </a:effectRef>
+          <a:fontRef idx="minor">
+            <a:schemeClr val="lt1"/>
+          </a:fontRef>
+        </p:style>
+        <p:txBody>
+          <a:bodyPr rtlCol="0" anchor="ctr" wrap="square"/>
+          <a:lstStyle/>
+          <a:p>
+            <a:pPr algn="ctr"/>
+          </a:p>
+        </p:txBody>
+      </p:sp>
+      <p:sp>
+        <p:nvSpPr>
+          <p:cNvPr id="44" name="TextBox 43"/>
+          <p:cNvSpPr txBox="1"/>
+          <p:nvPr/>
+        </p:nvSpPr>
+        <p:spPr>
+          <a:xfrm>
+            <a:off x="6876288" y="2176272"/>
+            <a:ext cx="2171699" cy="420624"/>
+          </a:xfrm>
+          <a:prstGeom prst="rect">
+            <a:avLst/>
+          </a:prstGeom>
+          <a:noFill/>
+        </p:spPr>
+        <p:txBody>
+          <a:bodyPr wrap="square" lIns="27432" rIns="27432" tIns="9144" bIns="9144" anchor="ctr">
+            <a:spAutoFit/>
+          </a:bodyPr>
+          <a:lstStyle/>
+          <a:p>
+            <a:pPr algn="l">
+              <a:lnSpc>
+                <a:spcPct val="108000"/>
+              </a:lnSpc>
+            </a:pPr>
+            <a:r>
+              <a:rPr sz="900" b="0">
+                <a:solidFill>
+                  <a:srgbClr val="141414"/>
+                </a:solidFill>
+                <a:latin typeface="微软雅黑"/>
+                <a:ea typeface="微软雅黑"/>
+                <a:cs typeface="微软雅黑"/>
+              </a:rPr>
+              <a:t>.NET 程序集（含 NuGet）</a:t>
+            </a:r>
+          </a:p>
+        </p:txBody>
+      </p:sp>
+      <p:sp>
+        <p:nvSpPr>
+          <p:cNvPr id="45" name="Rounded Rectangle 44"/>
+          <p:cNvSpPr/>
+          <p:nvPr/>
+        </p:nvSpPr>
+        <p:spPr>
+          <a:xfrm>
+            <a:off x="9102852" y="2304288"/>
+            <a:ext cx="146304" cy="164592"/>
+          </a:xfrm>
+          <a:prstGeom prst="roundRect">
+            <a:avLst>
+              <a:gd name="adj" fmla="val 12000"/>
+            </a:avLst>
+          </a:prstGeom>
+          <a:solidFill>
+            <a:srgbClr val="8B0F1A"/>
+          </a:solidFill>
+          <a:ln>
+            <a:noFill/>
+          </a:ln>
+          <a:effectLst/>
+        </p:spPr>
+        <p:style>
+          <a:lnRef idx="1">
+            <a:schemeClr val="accent1"/>
+          </a:lnRef>
+          <a:fillRef idx="3">
+            <a:schemeClr val="accent1"/>
+          </a:fillRef>
+          <a:effectRef idx="2">
+            <a:schemeClr val="accent1"/>
+          </a:effectRef>
+          <a:fontRef idx="minor">
+            <a:schemeClr val="lt1"/>
+          </a:fontRef>
+        </p:style>
+        <p:txBody>
+          <a:bodyPr rtlCol="0" anchor="ctr" lIns="27432" rIns="27432" tIns="9144" bIns="9144"/>
+          <a:lstStyle/>
+          <a:p>
+            <a:pPr algn="ctr"/>
+            <a:r>
+              <a:rPr sz="750" b="1">
+                <a:solidFill>
+                  <a:srgbClr val="FFFFFF"/>
+                </a:solidFill>
+                <a:latin typeface="微软雅黑"/>
+                <a:ea typeface="微软雅黑"/>
+                <a:cs typeface="微软雅黑"/>
+              </a:rPr>
+              <a:t>4</a:t>
+            </a:r>
+          </a:p>
+        </p:txBody>
+      </p:sp>
+      <p:sp>
+        <p:nvSpPr>
+          <p:cNvPr id="46" name="Rounded Rectangle 45"/>
+          <p:cNvSpPr/>
+          <p:nvPr/>
+        </p:nvSpPr>
+        <p:spPr>
+          <a:xfrm>
+            <a:off x="9395460" y="2176272"/>
+            <a:ext cx="2519172" cy="420624"/>
+          </a:xfrm>
+          <a:prstGeom prst="roundRect">
+            <a:avLst>
+              <a:gd name="adj" fmla="val 5000"/>
+            </a:avLst>
+          </a:prstGeom>
+          <a:solidFill>
+            <a:srgbClr val="FFFFFF"/>
+          </a:solidFill>
+          <a:ln w="11430">
+            <a:solidFill>
+              <a:srgbClr val="C9C9C2"/>
+            </a:solidFill>
+          </a:ln>
+          <a:effectLst/>
+        </p:spPr>
+        <p:style>
+          <a:lnRef idx="1">
+            <a:schemeClr val="accent1"/>
+          </a:lnRef>
+          <a:fillRef idx="3">
+            <a:schemeClr val="accent1"/>
+          </a:fillRef>
+          <a:effectRef idx="2">
+            <a:schemeClr val="accent1"/>
+          </a:effectRef>
+          <a:fontRef idx="minor">
+            <a:schemeClr val="lt1"/>
+          </a:fontRef>
+        </p:style>
+        <p:txBody>
+          <a:bodyPr rtlCol="0" anchor="ctr" wrap="square"/>
+          <a:lstStyle/>
+          <a:p>
+            <a:pPr algn="ctr"/>
+          </a:p>
+        </p:txBody>
+      </p:sp>
+      <p:sp>
+        <p:nvSpPr>
+          <p:cNvPr id="47" name="TextBox 46"/>
+          <p:cNvSpPr txBox="1"/>
+          <p:nvPr/>
+        </p:nvSpPr>
+        <p:spPr>
+          <a:xfrm>
+            <a:off x="9468612" y="2176272"/>
+            <a:ext cx="1988819" cy="420624"/>
+          </a:xfrm>
+          <a:prstGeom prst="rect">
+            <a:avLst/>
+          </a:prstGeom>
+          <a:noFill/>
+        </p:spPr>
+        <p:txBody>
+          <a:bodyPr wrap="square" lIns="27432" rIns="27432" tIns="9144" bIns="9144" anchor="ctr">
+            <a:spAutoFit/>
+          </a:bodyPr>
+          <a:lstStyle/>
+          <a:p>
+            <a:pPr algn="l">
+              <a:lnSpc>
+                <a:spcPct val="108000"/>
+              </a:lnSpc>
+            </a:pPr>
+            <a:r>
+              <a:rPr sz="900" b="0">
+                <a:solidFill>
+                  <a:srgbClr val="141414"/>
+                </a:solidFill>
+                <a:latin typeface="微软雅黑"/>
+                <a:ea typeface="微软雅黑"/>
+                <a:cs typeface="微软雅黑"/>
+              </a:rPr>
+              <a:t>IVI / VXIplug&amp;play 驱动</a:t>
+            </a:r>
+          </a:p>
+        </p:txBody>
+      </p:sp>
+      <p:sp>
+        <p:nvSpPr>
+          <p:cNvPr id="48" name="Rounded Rectangle 47"/>
+          <p:cNvSpPr/>
+          <p:nvPr/>
+        </p:nvSpPr>
+        <p:spPr>
+          <a:xfrm>
+            <a:off x="11512296" y="2304288"/>
+            <a:ext cx="146304" cy="164592"/>
+          </a:xfrm>
+          <a:prstGeom prst="roundRect">
+            <a:avLst>
+              <a:gd name="adj" fmla="val 12000"/>
+            </a:avLst>
+          </a:prstGeom>
+          <a:solidFill>
+            <a:srgbClr val="8B0F1A"/>
+          </a:solidFill>
+          <a:ln>
+            <a:noFill/>
+          </a:ln>
+          <a:effectLst/>
+        </p:spPr>
+        <p:style>
+          <a:lnRef idx="1">
+            <a:schemeClr val="accent1"/>
+          </a:lnRef>
+          <a:fillRef idx="3">
+            <a:schemeClr val="accent1"/>
+          </a:fillRef>
+          <a:effectRef idx="2">
+            <a:schemeClr val="accent1"/>
+          </a:effectRef>
+          <a:fontRef idx="minor">
+            <a:schemeClr val="lt1"/>
+          </a:fontRef>
+        </p:style>
+        <p:txBody>
+          <a:bodyPr rtlCol="0" anchor="ctr" lIns="27432" rIns="27432" tIns="9144" bIns="9144"/>
+          <a:lstStyle/>
+          <a:p>
+            <a:pPr algn="ctr"/>
+            <a:r>
+              <a:rPr sz="750" b="1">
+                <a:solidFill>
+                  <a:srgbClr val="FFFFFF"/>
+                </a:solidFill>
+                <a:latin typeface="微软雅黑"/>
+                <a:ea typeface="微软雅黑"/>
+                <a:cs typeface="微软雅黑"/>
+              </a:rPr>
+              <a:t>1</a:t>
+            </a:r>
+          </a:p>
+        </p:txBody>
+      </p:sp>
+      <p:sp>
+        <p:nvSpPr>
+          <p:cNvPr id="49" name="Rounded Rectangle 48"/>
+          <p:cNvSpPr/>
+          <p:nvPr/>
+        </p:nvSpPr>
+        <p:spPr>
+          <a:xfrm>
+            <a:off x="11695176" y="2304288"/>
+            <a:ext cx="146304" cy="164592"/>
+          </a:xfrm>
+          <a:prstGeom prst="roundRect">
+            <a:avLst>
+              <a:gd name="adj" fmla="val 12000"/>
+            </a:avLst>
+          </a:prstGeom>
+          <a:solidFill>
+            <a:srgbClr val="8B0F1A"/>
+          </a:solidFill>
+          <a:ln>
+            <a:noFill/>
+          </a:ln>
+          <a:effectLst/>
+        </p:spPr>
+        <p:style>
+          <a:lnRef idx="1">
+            <a:schemeClr val="accent1"/>
+          </a:lnRef>
+          <a:fillRef idx="3">
+            <a:schemeClr val="accent1"/>
+          </a:fillRef>
+          <a:effectRef idx="2">
+            <a:schemeClr val="accent1"/>
+          </a:effectRef>
+          <a:fontRef idx="minor">
+            <a:schemeClr val="lt1"/>
+          </a:fontRef>
+        </p:style>
+        <p:txBody>
+          <a:bodyPr rtlCol="0" anchor="ctr" lIns="27432" rIns="27432" tIns="9144" bIns="9144"/>
+          <a:lstStyle/>
+          <a:p>
+            <a:pPr algn="ctr"/>
+            <a:r>
+              <a:rPr sz="750" b="1">
+                <a:solidFill>
+                  <a:srgbClr val="FFFFFF"/>
+                </a:solidFill>
+                <a:latin typeface="微软雅黑"/>
+                <a:ea typeface="微软雅黑"/>
+                <a:cs typeface="微软雅黑"/>
+              </a:rPr>
+              <a:t>3</a:t>
+            </a:r>
+          </a:p>
+        </p:txBody>
+      </p:sp>
+      <p:sp>
+        <p:nvSpPr>
+          <p:cNvPr id="50" name="Rounded Rectangle 49"/>
+          <p:cNvSpPr/>
+          <p:nvPr/>
+        </p:nvSpPr>
+        <p:spPr>
+          <a:xfrm>
+            <a:off x="6803136" y="2871215"/>
+            <a:ext cx="5111496" cy="274320"/>
+          </a:xfrm>
+          <a:prstGeom prst="roundRect">
+            <a:avLst>
+              <a:gd name="adj" fmla="val 4000"/>
+            </a:avLst>
+          </a:prstGeom>
+          <a:solidFill>
+            <a:srgbClr val="E8F0F7"/>
+          </a:solidFill>
+          <a:ln>
+            <a:noFill/>
+          </a:ln>
+          <a:effectLst/>
+        </p:spPr>
+        <p:style>
+          <a:lnRef idx="1">
+            <a:schemeClr val="accent1"/>
+          </a:lnRef>
+          <a:fillRef idx="3">
+            <a:schemeClr val="accent1"/>
+          </a:fillRef>
+          <a:effectRef idx="2">
+            <a:schemeClr val="accent1"/>
+          </a:effectRef>
+          <a:fontRef idx="minor">
+            <a:schemeClr val="lt1"/>
+          </a:fontRef>
+        </p:style>
+        <p:txBody>
+          <a:bodyPr rtlCol="0" anchor="ctr" wrap="square"/>
+          <a:lstStyle/>
+          <a:p>
+            <a:pPr algn="ctr"/>
+          </a:p>
+        </p:txBody>
+      </p:sp>
+      <p:sp>
+        <p:nvSpPr>
+          <p:cNvPr id="51" name="TextBox 50"/>
+          <p:cNvSpPr txBox="1"/>
+          <p:nvPr/>
+        </p:nvSpPr>
+        <p:spPr>
+          <a:xfrm>
+            <a:off x="6894576" y="2871215"/>
+            <a:ext cx="4928616" cy="274320"/>
+          </a:xfrm>
+          <a:prstGeom prst="rect">
+            <a:avLst/>
+          </a:prstGeom>
+          <a:noFill/>
+        </p:spPr>
+        <p:txBody>
+          <a:bodyPr wrap="square" lIns="27432" rIns="27432" tIns="9144" bIns="9144" anchor="ctr">
+            <a:spAutoFit/>
+          </a:bodyPr>
+          <a:lstStyle/>
+          <a:p>
+            <a:pPr algn="l">
+              <a:lnSpc>
+                <a:spcPct val="108000"/>
+              </a:lnSpc>
+            </a:pPr>
+            <a:r>
+              <a:rPr sz="1000" b="1">
+                <a:solidFill>
+                  <a:srgbClr val="0F4C81"/>
+                </a:solidFill>
+                <a:latin typeface="微软雅黑"/>
+                <a:ea typeface="微软雅黑"/>
+                <a:cs typeface="微软雅黑"/>
+              </a:rPr>
+              <a:t>语言绑定类（按语言分发）</a:t>
+            </a:r>
+          </a:p>
+        </p:txBody>
+      </p:sp>
+      <p:sp>
+        <p:nvSpPr>
+          <p:cNvPr id="52" name="Rounded Rectangle 51"/>
+          <p:cNvSpPr/>
+          <p:nvPr/>
+        </p:nvSpPr>
+        <p:spPr>
+          <a:xfrm>
+            <a:off x="6803136" y="3200399"/>
+            <a:ext cx="2519172" cy="420624"/>
+          </a:xfrm>
+          <a:prstGeom prst="roundRect">
+            <a:avLst>
+              <a:gd name="adj" fmla="val 5000"/>
+            </a:avLst>
+          </a:prstGeom>
+          <a:solidFill>
+            <a:srgbClr val="FFFFFF"/>
+          </a:solidFill>
+          <a:ln w="11430">
+            <a:solidFill>
+              <a:srgbClr val="C9C9C2"/>
+            </a:solidFill>
+          </a:ln>
+          <a:effectLst/>
+        </p:spPr>
+        <p:style>
+          <a:lnRef idx="1">
+            <a:schemeClr val="accent1"/>
+          </a:lnRef>
+          <a:fillRef idx="3">
+            <a:schemeClr val="accent1"/>
+          </a:fillRef>
+          <a:effectRef idx="2">
+            <a:schemeClr val="accent1"/>
+          </a:effectRef>
+          <a:fontRef idx="minor">
+            <a:schemeClr val="lt1"/>
+          </a:fontRef>
+        </p:style>
+        <p:txBody>
+          <a:bodyPr rtlCol="0" anchor="ctr" wrap="square"/>
+          <a:lstStyle/>
+          <a:p>
+            <a:pPr algn="ctr"/>
+          </a:p>
+        </p:txBody>
+      </p:sp>
+      <p:sp>
+        <p:nvSpPr>
+          <p:cNvPr id="53" name="TextBox 52"/>
+          <p:cNvSpPr txBox="1"/>
+          <p:nvPr/>
+        </p:nvSpPr>
+        <p:spPr>
+          <a:xfrm>
+            <a:off x="6876288" y="3200399"/>
+            <a:ext cx="2171699" cy="420624"/>
+          </a:xfrm>
+          <a:prstGeom prst="rect">
+            <a:avLst/>
+          </a:prstGeom>
+          <a:noFill/>
+        </p:spPr>
+        <p:txBody>
+          <a:bodyPr wrap="square" lIns="27432" rIns="27432" tIns="9144" bIns="9144" anchor="ctr">
+            <a:spAutoFit/>
+          </a:bodyPr>
+          <a:lstStyle/>
+          <a:p>
+            <a:pPr algn="l">
+              <a:lnSpc>
+                <a:spcPct val="108000"/>
+              </a:lnSpc>
+            </a:pPr>
+            <a:r>
+              <a:rPr sz="900" b="0">
+                <a:solidFill>
+                  <a:srgbClr val="141414"/>
+                </a:solidFill>
+                <a:latin typeface="微软雅黑"/>
+                <a:ea typeface="微软雅黑"/>
+                <a:cs typeface="微软雅黑"/>
+              </a:rPr>
+              <a:t>Python 库（whl / .pyd）</a:t>
+            </a:r>
+          </a:p>
+        </p:txBody>
+      </p:sp>
+      <p:sp>
+        <p:nvSpPr>
+          <p:cNvPr id="54" name="Rounded Rectangle 53"/>
+          <p:cNvSpPr/>
+          <p:nvPr/>
+        </p:nvSpPr>
+        <p:spPr>
+          <a:xfrm>
+            <a:off x="9102852" y="3328415"/>
+            <a:ext cx="146304" cy="164592"/>
+          </a:xfrm>
+          <a:prstGeom prst="roundRect">
+            <a:avLst>
+              <a:gd name="adj" fmla="val 12000"/>
+            </a:avLst>
+          </a:prstGeom>
+          <a:solidFill>
+            <a:srgbClr val="8B0F1A"/>
+          </a:solidFill>
+          <a:ln>
+            <a:noFill/>
+          </a:ln>
+          <a:effectLst/>
+        </p:spPr>
+        <p:style>
+          <a:lnRef idx="1">
+            <a:schemeClr val="accent1"/>
+          </a:lnRef>
+          <a:fillRef idx="3">
+            <a:schemeClr val="accent1"/>
+          </a:fillRef>
+          <a:effectRef idx="2">
+            <a:schemeClr val="accent1"/>
+          </a:effectRef>
+          <a:fontRef idx="minor">
+            <a:schemeClr val="lt1"/>
+          </a:fontRef>
+        </p:style>
+        <p:txBody>
+          <a:bodyPr rtlCol="0" anchor="ctr" lIns="27432" rIns="27432" tIns="9144" bIns="9144"/>
+          <a:lstStyle/>
+          <a:p>
+            <a:pPr algn="ctr"/>
+            <a:r>
+              <a:rPr sz="750" b="1">
+                <a:solidFill>
+                  <a:srgbClr val="FFFFFF"/>
+                </a:solidFill>
+                <a:latin typeface="微软雅黑"/>
+                <a:ea typeface="微软雅黑"/>
+                <a:cs typeface="微软雅黑"/>
+              </a:rPr>
+              <a:t>2</a:t>
+            </a:r>
+          </a:p>
+        </p:txBody>
+      </p:sp>
+      <p:sp>
+        <p:nvSpPr>
+          <p:cNvPr id="55" name="Rounded Rectangle 54"/>
+          <p:cNvSpPr/>
+          <p:nvPr/>
+        </p:nvSpPr>
+        <p:spPr>
+          <a:xfrm>
+            <a:off x="9395460" y="3200399"/>
+            <a:ext cx="2519172" cy="420624"/>
+          </a:xfrm>
+          <a:prstGeom prst="roundRect">
+            <a:avLst>
+              <a:gd name="adj" fmla="val 5000"/>
+            </a:avLst>
+          </a:prstGeom>
+          <a:solidFill>
+            <a:srgbClr val="FFFFFF"/>
+          </a:solidFill>
+          <a:ln w="11430">
+            <a:solidFill>
+              <a:srgbClr val="C9C9C2"/>
+            </a:solidFill>
+          </a:ln>
+          <a:effectLst/>
+        </p:spPr>
+        <p:style>
+          <a:lnRef idx="1">
+            <a:schemeClr val="accent1"/>
+          </a:lnRef>
+          <a:fillRef idx="3">
+            <a:schemeClr val="accent1"/>
+          </a:fillRef>
+          <a:effectRef idx="2">
+            <a:schemeClr val="accent1"/>
+          </a:effectRef>
+          <a:fontRef idx="minor">
+            <a:schemeClr val="lt1"/>
+          </a:fontRef>
+        </p:style>
+        <p:txBody>
+          <a:bodyPr rtlCol="0" anchor="ctr" wrap="square"/>
+          <a:lstStyle/>
+          <a:p>
+            <a:pPr algn="ctr"/>
+          </a:p>
+        </p:txBody>
+      </p:sp>
+      <p:sp>
+        <p:nvSpPr>
+          <p:cNvPr id="56" name="TextBox 55"/>
+          <p:cNvSpPr txBox="1"/>
+          <p:nvPr/>
+        </p:nvSpPr>
+        <p:spPr>
+          <a:xfrm>
+            <a:off x="9468612" y="3200399"/>
+            <a:ext cx="2171699" cy="420624"/>
+          </a:xfrm>
+          <a:prstGeom prst="rect">
+            <a:avLst/>
+          </a:prstGeom>
+          <a:noFill/>
+        </p:spPr>
+        <p:txBody>
+          <a:bodyPr wrap="square" lIns="27432" rIns="27432" tIns="9144" bIns="9144" anchor="ctr">
+            <a:spAutoFit/>
+          </a:bodyPr>
+          <a:lstStyle/>
+          <a:p>
+            <a:pPr algn="l">
+              <a:lnSpc>
+                <a:spcPct val="108000"/>
+              </a:lnSpc>
+            </a:pPr>
+            <a:r>
+              <a:rPr sz="900" b="0">
+                <a:solidFill>
+                  <a:srgbClr val="141414"/>
+                </a:solidFill>
+                <a:latin typeface="微软雅黑"/>
+                <a:ea typeface="微软雅黑"/>
+                <a:cs typeface="微软雅黑"/>
+              </a:rPr>
+              <a:t>LabVIEW VI 库 / 驱动</a:t>
+            </a:r>
+          </a:p>
+        </p:txBody>
+      </p:sp>
+      <p:sp>
+        <p:nvSpPr>
+          <p:cNvPr id="57" name="Rounded Rectangle 56"/>
+          <p:cNvSpPr/>
+          <p:nvPr/>
+        </p:nvSpPr>
+        <p:spPr>
+          <a:xfrm>
+            <a:off x="11695176" y="3328415"/>
+            <a:ext cx="146304" cy="164592"/>
+          </a:xfrm>
+          <a:prstGeom prst="roundRect">
+            <a:avLst>
+              <a:gd name="adj" fmla="val 12000"/>
+            </a:avLst>
+          </a:prstGeom>
+          <a:solidFill>
+            <a:srgbClr val="8B0F1A"/>
+          </a:solidFill>
+          <a:ln>
+            <a:noFill/>
+          </a:ln>
+          <a:effectLst/>
+        </p:spPr>
+        <p:style>
+          <a:lnRef idx="1">
+            <a:schemeClr val="accent1"/>
+          </a:lnRef>
+          <a:fillRef idx="3">
+            <a:schemeClr val="accent1"/>
+          </a:fillRef>
+          <a:effectRef idx="2">
+            <a:schemeClr val="accent1"/>
+          </a:effectRef>
+          <a:fontRef idx="minor">
+            <a:schemeClr val="lt1"/>
+          </a:fontRef>
+        </p:style>
+        <p:txBody>
+          <a:bodyPr rtlCol="0" anchor="ctr" lIns="27432" rIns="27432" tIns="9144" bIns="9144"/>
+          <a:lstStyle/>
+          <a:p>
+            <a:pPr algn="ctr"/>
+            <a:r>
+              <a:rPr sz="750" b="1">
+                <a:solidFill>
+                  <a:srgbClr val="FFFFFF"/>
+                </a:solidFill>
+                <a:latin typeface="微软雅黑"/>
+                <a:ea typeface="微软雅黑"/>
+                <a:cs typeface="微软雅黑"/>
+              </a:rPr>
+              <a:t>5</a:t>
+            </a:r>
+          </a:p>
+        </p:txBody>
+      </p:sp>
+      <p:sp>
+        <p:nvSpPr>
+          <p:cNvPr id="58" name="Rounded Rectangle 57"/>
+          <p:cNvSpPr/>
+          <p:nvPr/>
+        </p:nvSpPr>
+        <p:spPr>
+          <a:xfrm>
+            <a:off x="6803136" y="3675887"/>
+            <a:ext cx="2519172" cy="420624"/>
+          </a:xfrm>
+          <a:prstGeom prst="roundRect">
+            <a:avLst>
+              <a:gd name="adj" fmla="val 5000"/>
+            </a:avLst>
+          </a:prstGeom>
+          <a:solidFill>
+            <a:srgbClr val="FFFFFF"/>
+          </a:solidFill>
+          <a:ln w="11430">
+            <a:solidFill>
+              <a:srgbClr val="C9C9C2"/>
+            </a:solidFill>
+          </a:ln>
+          <a:effectLst/>
+        </p:spPr>
+        <p:style>
+          <a:lnRef idx="1">
+            <a:schemeClr val="accent1"/>
+          </a:lnRef>
+          <a:fillRef idx="3">
+            <a:schemeClr val="accent1"/>
+          </a:fillRef>
+          <a:effectRef idx="2">
+            <a:schemeClr val="accent1"/>
+          </a:effectRef>
+          <a:fontRef idx="minor">
+            <a:schemeClr val="lt1"/>
+          </a:fontRef>
+        </p:style>
+        <p:txBody>
+          <a:bodyPr rtlCol="0" anchor="ctr" wrap="square"/>
+          <a:lstStyle/>
+          <a:p>
+            <a:pPr algn="ctr"/>
+          </a:p>
+        </p:txBody>
+      </p:sp>
+      <p:sp>
+        <p:nvSpPr>
+          <p:cNvPr id="59" name="TextBox 58"/>
+          <p:cNvSpPr txBox="1"/>
+          <p:nvPr/>
+        </p:nvSpPr>
+        <p:spPr>
+          <a:xfrm>
+            <a:off x="6876288" y="3675887"/>
+            <a:ext cx="2171699" cy="420624"/>
+          </a:xfrm>
+          <a:prstGeom prst="rect">
+            <a:avLst/>
+          </a:prstGeom>
+          <a:noFill/>
+        </p:spPr>
+        <p:txBody>
+          <a:bodyPr wrap="square" lIns="27432" rIns="27432" tIns="9144" bIns="9144" anchor="ctr">
+            <a:spAutoFit/>
+          </a:bodyPr>
+          <a:lstStyle/>
+          <a:p>
+            <a:pPr algn="l">
+              <a:lnSpc>
+                <a:spcPct val="108000"/>
+              </a:lnSpc>
+            </a:pPr>
+            <a:r>
+              <a:rPr sz="900" b="0">
+                <a:solidFill>
+                  <a:srgbClr val="141414"/>
+                </a:solidFill>
+                <a:latin typeface="微软雅黑"/>
+                <a:ea typeface="微软雅黑"/>
+                <a:cs typeface="微软雅黑"/>
+              </a:rPr>
+              <a:t>MATLAB / .mex 工具箱</a:t>
+            </a:r>
+          </a:p>
+        </p:txBody>
+      </p:sp>
+      <p:sp>
+        <p:nvSpPr>
+          <p:cNvPr id="60" name="Rounded Rectangle 59"/>
+          <p:cNvSpPr/>
+          <p:nvPr/>
+        </p:nvSpPr>
+        <p:spPr>
+          <a:xfrm>
+            <a:off x="9102852" y="3803904"/>
+            <a:ext cx="146304" cy="164592"/>
+          </a:xfrm>
+          <a:prstGeom prst="roundRect">
+            <a:avLst>
+              <a:gd name="adj" fmla="val 12000"/>
+            </a:avLst>
+          </a:prstGeom>
+          <a:solidFill>
+            <a:srgbClr val="8B0F1A"/>
+          </a:solidFill>
+          <a:ln>
+            <a:noFill/>
+          </a:ln>
+          <a:effectLst/>
+        </p:spPr>
+        <p:style>
+          <a:lnRef idx="1">
+            <a:schemeClr val="accent1"/>
+          </a:lnRef>
+          <a:fillRef idx="3">
+            <a:schemeClr val="accent1"/>
+          </a:fillRef>
+          <a:effectRef idx="2">
+            <a:schemeClr val="accent1"/>
+          </a:effectRef>
+          <a:fontRef idx="minor">
+            <a:schemeClr val="lt1"/>
+          </a:fontRef>
+        </p:style>
+        <p:txBody>
+          <a:bodyPr rtlCol="0" anchor="ctr" lIns="27432" rIns="27432" tIns="9144" bIns="9144"/>
+          <a:lstStyle/>
+          <a:p>
+            <a:pPr algn="ctr"/>
+            <a:r>
+              <a:rPr sz="750" b="1">
+                <a:solidFill>
+                  <a:srgbClr val="FFFFFF"/>
+                </a:solidFill>
+                <a:latin typeface="微软雅黑"/>
+                <a:ea typeface="微软雅黑"/>
+                <a:cs typeface="微软雅黑"/>
+              </a:rPr>
+              <a:t>5</a:t>
+            </a:r>
+          </a:p>
+        </p:txBody>
+      </p:sp>
+      <p:sp>
+        <p:nvSpPr>
+          <p:cNvPr id="61" name="Rounded Rectangle 60"/>
+          <p:cNvSpPr/>
+          <p:nvPr/>
+        </p:nvSpPr>
+        <p:spPr>
+          <a:xfrm>
+            <a:off x="9395460" y="3675887"/>
+            <a:ext cx="2519172" cy="420624"/>
+          </a:xfrm>
+          <a:prstGeom prst="roundRect">
+            <a:avLst>
+              <a:gd name="adj" fmla="val 5000"/>
+            </a:avLst>
+          </a:prstGeom>
+          <a:solidFill>
+            <a:srgbClr val="FFFFFF"/>
+          </a:solidFill>
+          <a:ln w="11430">
+            <a:solidFill>
+              <a:srgbClr val="C9C9C2"/>
+            </a:solidFill>
+          </a:ln>
+          <a:effectLst/>
+        </p:spPr>
+        <p:style>
+          <a:lnRef idx="1">
+            <a:schemeClr val="accent1"/>
+          </a:lnRef>
+          <a:fillRef idx="3">
+            <a:schemeClr val="accent1"/>
+          </a:fillRef>
+          <a:effectRef idx="2">
+            <a:schemeClr val="accent1"/>
+          </a:effectRef>
+          <a:fontRef idx="minor">
+            <a:schemeClr val="lt1"/>
+          </a:fontRef>
+        </p:style>
+        <p:txBody>
+          <a:bodyPr rtlCol="0" anchor="ctr" wrap="square"/>
+          <a:lstStyle/>
+          <a:p>
+            <a:pPr algn="ctr"/>
+          </a:p>
+        </p:txBody>
+      </p:sp>
+      <p:sp>
+        <p:nvSpPr>
+          <p:cNvPr id="62" name="TextBox 61"/>
+          <p:cNvSpPr txBox="1"/>
+          <p:nvPr/>
+        </p:nvSpPr>
+        <p:spPr>
+          <a:xfrm>
+            <a:off x="9468612" y="3675887"/>
+            <a:ext cx="2171699" cy="420624"/>
+          </a:xfrm>
+          <a:prstGeom prst="rect">
+            <a:avLst/>
+          </a:prstGeom>
+          <a:noFill/>
+        </p:spPr>
+        <p:txBody>
+          <a:bodyPr wrap="square" lIns="27432" rIns="27432" tIns="9144" bIns="9144" anchor="ctr">
+            <a:spAutoFit/>
+          </a:bodyPr>
+          <a:lstStyle/>
+          <a:p>
+            <a:pPr algn="l">
+              <a:lnSpc>
+                <a:spcPct val="108000"/>
+              </a:lnSpc>
+            </a:pPr>
+            <a:r>
+              <a:rPr sz="900" b="0">
+                <a:solidFill>
+                  <a:srgbClr val="141414"/>
+                </a:solidFill>
+                <a:latin typeface="微软雅黑"/>
+                <a:ea typeface="微软雅黑"/>
+                <a:cs typeface="微软雅黑"/>
+              </a:rPr>
+              <a:t>Java JAR / JNI</a:t>
+            </a:r>
+          </a:p>
+        </p:txBody>
+      </p:sp>
+      <p:sp>
+        <p:nvSpPr>
+          <p:cNvPr id="63" name="Rounded Rectangle 62"/>
+          <p:cNvSpPr/>
+          <p:nvPr/>
+        </p:nvSpPr>
+        <p:spPr>
+          <a:xfrm>
+            <a:off x="11695176" y="3803904"/>
+            <a:ext cx="146304" cy="164592"/>
+          </a:xfrm>
+          <a:prstGeom prst="roundRect">
+            <a:avLst>
+              <a:gd name="adj" fmla="val 12000"/>
+            </a:avLst>
+          </a:prstGeom>
+          <a:solidFill>
+            <a:srgbClr val="8B0F1A"/>
+          </a:solidFill>
+          <a:ln>
+            <a:noFill/>
+          </a:ln>
+          <a:effectLst/>
+        </p:spPr>
+        <p:style>
+          <a:lnRef idx="1">
+            <a:schemeClr val="accent1"/>
+          </a:lnRef>
+          <a:fillRef idx="3">
+            <a:schemeClr val="accent1"/>
+          </a:fillRef>
+          <a:effectRef idx="2">
+            <a:schemeClr val="accent1"/>
+          </a:effectRef>
+          <a:fontRef idx="minor">
+            <a:schemeClr val="lt1"/>
+          </a:fontRef>
+        </p:style>
+        <p:txBody>
+          <a:bodyPr rtlCol="0" anchor="ctr" lIns="27432" rIns="27432" tIns="9144" bIns="9144"/>
+          <a:lstStyle/>
+          <a:p>
+            <a:pPr algn="ctr"/>
+            <a:r>
+              <a:rPr sz="750" b="1">
+                <a:solidFill>
+                  <a:srgbClr val="FFFFFF"/>
+                </a:solidFill>
+                <a:latin typeface="微软雅黑"/>
+                <a:ea typeface="微软雅黑"/>
+                <a:cs typeface="微软雅黑"/>
+              </a:rPr>
+              <a:t>5</a:t>
+            </a:r>
+          </a:p>
+        </p:txBody>
+      </p:sp>
+      <p:sp>
+        <p:nvSpPr>
+          <p:cNvPr id="64" name="Rounded Rectangle 63"/>
+          <p:cNvSpPr/>
+          <p:nvPr/>
+        </p:nvSpPr>
+        <p:spPr>
+          <a:xfrm>
+            <a:off x="6803136" y="4370831"/>
+            <a:ext cx="5111496" cy="274320"/>
+          </a:xfrm>
+          <a:prstGeom prst="roundRect">
+            <a:avLst>
+              <a:gd name="adj" fmla="val 4000"/>
+            </a:avLst>
+          </a:prstGeom>
+          <a:solidFill>
+            <a:srgbClr val="E8F0F7"/>
+          </a:solidFill>
+          <a:ln>
+            <a:noFill/>
+          </a:ln>
+          <a:effectLst/>
+        </p:spPr>
+        <p:style>
+          <a:lnRef idx="1">
+            <a:schemeClr val="accent1"/>
+          </a:lnRef>
+          <a:fillRef idx="3">
+            <a:schemeClr val="accent1"/>
+          </a:fillRef>
+          <a:effectRef idx="2">
+            <a:schemeClr val="accent1"/>
+          </a:effectRef>
+          <a:fontRef idx="minor">
+            <a:schemeClr val="lt1"/>
+          </a:fontRef>
+        </p:style>
+        <p:txBody>
+          <a:bodyPr rtlCol="0" anchor="ctr" wrap="square"/>
+          <a:lstStyle/>
+          <a:p>
+            <a:pPr algn="ctr"/>
+          </a:p>
+        </p:txBody>
+      </p:sp>
+      <p:sp>
+        <p:nvSpPr>
+          <p:cNvPr id="65" name="TextBox 64"/>
+          <p:cNvSpPr txBox="1"/>
+          <p:nvPr/>
+        </p:nvSpPr>
+        <p:spPr>
+          <a:xfrm>
+            <a:off x="6894576" y="4370831"/>
+            <a:ext cx="4928616" cy="274320"/>
+          </a:xfrm>
+          <a:prstGeom prst="rect">
+            <a:avLst/>
+          </a:prstGeom>
+          <a:noFill/>
+        </p:spPr>
+        <p:txBody>
+          <a:bodyPr wrap="square" lIns="27432" rIns="27432" tIns="9144" bIns="9144" anchor="ctr">
+            <a:spAutoFit/>
+          </a:bodyPr>
+          <a:lstStyle/>
+          <a:p>
+            <a:pPr algn="l">
+              <a:lnSpc>
+                <a:spcPct val="108000"/>
+              </a:lnSpc>
+            </a:pPr>
+            <a:r>
+              <a:rPr sz="1000" b="1">
+                <a:solidFill>
+                  <a:srgbClr val="0F4C81"/>
+                </a:solidFill>
+                <a:latin typeface="微软雅黑"/>
+                <a:ea typeface="微软雅黑"/>
+                <a:cs typeface="微软雅黑"/>
+              </a:rPr>
+              <a:t>协议命令类（只给文档）</a:t>
+            </a:r>
+          </a:p>
+        </p:txBody>
+      </p:sp>
+      <p:sp>
+        <p:nvSpPr>
+          <p:cNvPr id="66" name="Rounded Rectangle 65"/>
+          <p:cNvSpPr/>
+          <p:nvPr/>
+        </p:nvSpPr>
+        <p:spPr>
+          <a:xfrm>
+            <a:off x="6803136" y="4700016"/>
+            <a:ext cx="2519172" cy="420624"/>
+          </a:xfrm>
+          <a:prstGeom prst="roundRect">
+            <a:avLst>
+              <a:gd name="adj" fmla="val 5000"/>
+            </a:avLst>
+          </a:prstGeom>
+          <a:solidFill>
+            <a:srgbClr val="FFFFFF"/>
+          </a:solidFill>
+          <a:ln w="11430">
+            <a:solidFill>
+              <a:srgbClr val="C9C9C2"/>
+            </a:solidFill>
+          </a:ln>
+          <a:effectLst/>
+        </p:spPr>
+        <p:style>
+          <a:lnRef idx="1">
+            <a:schemeClr val="accent1"/>
+          </a:lnRef>
+          <a:fillRef idx="3">
+            <a:schemeClr val="accent1"/>
+          </a:fillRef>
+          <a:effectRef idx="2">
+            <a:schemeClr val="accent1"/>
+          </a:effectRef>
+          <a:fontRef idx="minor">
+            <a:schemeClr val="lt1"/>
+          </a:fontRef>
+        </p:style>
+        <p:txBody>
+          <a:bodyPr rtlCol="0" anchor="ctr" wrap="square"/>
+          <a:lstStyle/>
+          <a:p>
+            <a:pPr algn="ctr"/>
+          </a:p>
+        </p:txBody>
+      </p:sp>
+      <p:sp>
+        <p:nvSpPr>
+          <p:cNvPr id="67" name="TextBox 66"/>
+          <p:cNvSpPr txBox="1"/>
+          <p:nvPr/>
+        </p:nvSpPr>
+        <p:spPr>
+          <a:xfrm>
+            <a:off x="6876288" y="4700016"/>
+            <a:ext cx="2171699" cy="420624"/>
+          </a:xfrm>
+          <a:prstGeom prst="rect">
+            <a:avLst/>
+          </a:prstGeom>
+          <a:noFill/>
+        </p:spPr>
+        <p:txBody>
+          <a:bodyPr wrap="square" lIns="27432" rIns="27432" tIns="9144" bIns="9144" anchor="ctr">
+            <a:spAutoFit/>
+          </a:bodyPr>
+          <a:lstStyle/>
+          <a:p>
+            <a:pPr algn="l">
+              <a:lnSpc>
+                <a:spcPct val="108000"/>
+              </a:lnSpc>
+            </a:pPr>
+            <a:r>
+              <a:rPr sz="900" b="0">
+                <a:solidFill>
+                  <a:srgbClr val="141414"/>
+                </a:solidFill>
+                <a:latin typeface="微软雅黑"/>
+                <a:ea typeface="微软雅黑"/>
+                <a:cs typeface="微软雅黑"/>
+              </a:rPr>
+              <a:t>VISA 接口手册（SCPI 命令集）</a:t>
+            </a:r>
+          </a:p>
+        </p:txBody>
+      </p:sp>
+      <p:sp>
+        <p:nvSpPr>
+          <p:cNvPr id="68" name="Rounded Rectangle 67"/>
+          <p:cNvSpPr/>
+          <p:nvPr/>
+        </p:nvSpPr>
+        <p:spPr>
+          <a:xfrm>
+            <a:off x="9102852" y="4828032"/>
+            <a:ext cx="146304" cy="164592"/>
+          </a:xfrm>
+          <a:prstGeom prst="roundRect">
+            <a:avLst>
+              <a:gd name="adj" fmla="val 12000"/>
+            </a:avLst>
+          </a:prstGeom>
+          <a:solidFill>
+            <a:srgbClr val="8B0F1A"/>
+          </a:solidFill>
+          <a:ln>
+            <a:noFill/>
+          </a:ln>
+          <a:effectLst/>
+        </p:spPr>
+        <p:style>
+          <a:lnRef idx="1">
+            <a:schemeClr val="accent1"/>
+          </a:lnRef>
+          <a:fillRef idx="3">
+            <a:schemeClr val="accent1"/>
+          </a:fillRef>
+          <a:effectRef idx="2">
+            <a:schemeClr val="accent1"/>
+          </a:effectRef>
+          <a:fontRef idx="minor">
+            <a:schemeClr val="lt1"/>
+          </a:fontRef>
+        </p:style>
+        <p:txBody>
+          <a:bodyPr rtlCol="0" anchor="ctr" lIns="27432" rIns="27432" tIns="9144" bIns="9144"/>
+          <a:lstStyle/>
+          <a:p>
+            <a:pPr algn="ctr"/>
+            <a:r>
+              <a:rPr sz="750" b="1">
+                <a:solidFill>
+                  <a:srgbClr val="FFFFFF"/>
+                </a:solidFill>
+                <a:latin typeface="微软雅黑"/>
+                <a:ea typeface="微软雅黑"/>
+                <a:cs typeface="微软雅黑"/>
+              </a:rPr>
+              <a:t>3</a:t>
+            </a:r>
+          </a:p>
+        </p:txBody>
+      </p:sp>
+      <p:sp>
+        <p:nvSpPr>
+          <p:cNvPr id="69" name="Rounded Rectangle 68"/>
+          <p:cNvSpPr/>
+          <p:nvPr/>
+        </p:nvSpPr>
+        <p:spPr>
+          <a:xfrm>
+            <a:off x="9395460" y="4700016"/>
+            <a:ext cx="2519172" cy="420624"/>
+          </a:xfrm>
+          <a:prstGeom prst="roundRect">
+            <a:avLst>
+              <a:gd name="adj" fmla="val 5000"/>
+            </a:avLst>
+          </a:prstGeom>
+          <a:solidFill>
+            <a:srgbClr val="FFFFFF"/>
+          </a:solidFill>
+          <a:ln w="11430">
+            <a:solidFill>
+              <a:srgbClr val="C9C9C2"/>
+            </a:solidFill>
+          </a:ln>
+          <a:effectLst/>
+        </p:spPr>
+        <p:style>
+          <a:lnRef idx="1">
+            <a:schemeClr val="accent1"/>
+          </a:lnRef>
+          <a:fillRef idx="3">
+            <a:schemeClr val="accent1"/>
+          </a:fillRef>
+          <a:effectRef idx="2">
+            <a:schemeClr val="accent1"/>
+          </a:effectRef>
+          <a:fontRef idx="minor">
+            <a:schemeClr val="lt1"/>
+          </a:fontRef>
+        </p:style>
+        <p:txBody>
+          <a:bodyPr rtlCol="0" anchor="ctr" wrap="square"/>
+          <a:lstStyle/>
+          <a:p>
+            <a:pPr algn="ctr"/>
+          </a:p>
+        </p:txBody>
+      </p:sp>
+      <p:sp>
+        <p:nvSpPr>
+          <p:cNvPr id="70" name="TextBox 69"/>
+          <p:cNvSpPr txBox="1"/>
+          <p:nvPr/>
+        </p:nvSpPr>
+        <p:spPr>
+          <a:xfrm>
+            <a:off x="9468612" y="4700016"/>
+            <a:ext cx="2171699" cy="420624"/>
+          </a:xfrm>
+          <a:prstGeom prst="rect">
+            <a:avLst/>
+          </a:prstGeom>
+          <a:noFill/>
+        </p:spPr>
+        <p:txBody>
+          <a:bodyPr wrap="square" lIns="27432" rIns="27432" tIns="9144" bIns="9144" anchor="ctr">
+            <a:spAutoFit/>
+          </a:bodyPr>
+          <a:lstStyle/>
+          <a:p>
+            <a:pPr algn="l">
+              <a:lnSpc>
+                <a:spcPct val="108000"/>
+              </a:lnSpc>
+            </a:pPr>
+            <a:r>
+              <a:rPr sz="900" b="0">
+                <a:solidFill>
+                  <a:srgbClr val="141414"/>
+                </a:solidFill>
+                <a:latin typeface="微软雅黑"/>
+                <a:ea typeface="微软雅黑"/>
+                <a:cs typeface="微软雅黑"/>
+              </a:rPr>
+              <a:t>私有协议手册（串口 / CAN 报文）</a:t>
+            </a:r>
+          </a:p>
+        </p:txBody>
+      </p:sp>
+      <p:sp>
+        <p:nvSpPr>
+          <p:cNvPr id="71" name="Rounded Rectangle 70"/>
+          <p:cNvSpPr/>
+          <p:nvPr/>
+        </p:nvSpPr>
+        <p:spPr>
+          <a:xfrm>
+            <a:off x="11695176" y="4828032"/>
+            <a:ext cx="146304" cy="164592"/>
+          </a:xfrm>
+          <a:prstGeom prst="roundRect">
+            <a:avLst>
+              <a:gd name="adj" fmla="val 12000"/>
+            </a:avLst>
+          </a:prstGeom>
+          <a:solidFill>
+            <a:srgbClr val="8B0F1A"/>
+          </a:solidFill>
+          <a:ln>
+            <a:noFill/>
+          </a:ln>
+          <a:effectLst/>
+        </p:spPr>
+        <p:style>
+          <a:lnRef idx="1">
+            <a:schemeClr val="accent1"/>
+          </a:lnRef>
+          <a:fillRef idx="3">
+            <a:schemeClr val="accent1"/>
+          </a:fillRef>
+          <a:effectRef idx="2">
+            <a:schemeClr val="accent1"/>
+          </a:effectRef>
+          <a:fontRef idx="minor">
+            <a:schemeClr val="lt1"/>
+          </a:fontRef>
+        </p:style>
+        <p:txBody>
+          <a:bodyPr rtlCol="0" anchor="ctr" lIns="27432" rIns="27432" tIns="9144" bIns="9144"/>
+          <a:lstStyle/>
+          <a:p>
+            <a:pPr algn="ctr"/>
+            <a:r>
+              <a:rPr sz="750" b="1">
+                <a:solidFill>
+                  <a:srgbClr val="FFFFFF"/>
+                </a:solidFill>
+                <a:latin typeface="微软雅黑"/>
+                <a:ea typeface="微软雅黑"/>
+                <a:cs typeface="微软雅黑"/>
+              </a:rPr>
+              <a:t>6</a:t>
+            </a:r>
+          </a:p>
+        </p:txBody>
+      </p:sp>
+      <p:sp>
+        <p:nvSpPr>
+          <p:cNvPr id="72" name="Rounded Rectangle 71"/>
+          <p:cNvSpPr/>
+          <p:nvPr/>
+        </p:nvSpPr>
+        <p:spPr>
+          <a:xfrm>
+            <a:off x="6803136" y="5394959"/>
+            <a:ext cx="5111496" cy="274320"/>
+          </a:xfrm>
+          <a:prstGeom prst="roundRect">
+            <a:avLst>
+              <a:gd name="adj" fmla="val 4000"/>
+            </a:avLst>
+          </a:prstGeom>
+          <a:solidFill>
+            <a:srgbClr val="E8F0F7"/>
+          </a:solidFill>
+          <a:ln>
+            <a:noFill/>
+          </a:ln>
+          <a:effectLst/>
+        </p:spPr>
+        <p:style>
+          <a:lnRef idx="1">
+            <a:schemeClr val="accent1"/>
+          </a:lnRef>
+          <a:fillRef idx="3">
+            <a:schemeClr val="accent1"/>
+          </a:fillRef>
+          <a:effectRef idx="2">
+            <a:schemeClr val="accent1"/>
+          </a:effectRef>
+          <a:fontRef idx="minor">
+            <a:schemeClr val="lt1"/>
+          </a:fontRef>
+        </p:style>
+        <p:txBody>
+          <a:bodyPr rtlCol="0" anchor="ctr" wrap="square"/>
+          <a:lstStyle/>
+          <a:p>
+            <a:pPr algn="ctr"/>
+          </a:p>
+        </p:txBody>
+      </p:sp>
+      <p:sp>
+        <p:nvSpPr>
+          <p:cNvPr id="73" name="TextBox 72"/>
+          <p:cNvSpPr txBox="1"/>
+          <p:nvPr/>
+        </p:nvSpPr>
+        <p:spPr>
+          <a:xfrm>
+            <a:off x="6894576" y="5394959"/>
+            <a:ext cx="4928616" cy="274320"/>
+          </a:xfrm>
+          <a:prstGeom prst="rect">
+            <a:avLst/>
+          </a:prstGeom>
+          <a:noFill/>
+        </p:spPr>
+        <p:txBody>
+          <a:bodyPr wrap="square" lIns="27432" rIns="27432" tIns="9144" bIns="9144" anchor="ctr">
+            <a:spAutoFit/>
+          </a:bodyPr>
+          <a:lstStyle/>
+          <a:p>
+            <a:pPr algn="l">
+              <a:lnSpc>
+                <a:spcPct val="108000"/>
+              </a:lnSpc>
+            </a:pPr>
+            <a:r>
+              <a:rPr sz="1000" b="1">
+                <a:solidFill>
+                  <a:srgbClr val="0F4C81"/>
+                </a:solidFill>
+                <a:latin typeface="微软雅黑"/>
+                <a:ea typeface="微软雅黑"/>
+                <a:cs typeface="微软雅黑"/>
+              </a:rPr>
+              <a:t>可执行与服务类（黑盒调用）</a:t>
+            </a:r>
+          </a:p>
+        </p:txBody>
+      </p:sp>
+      <p:sp>
+        <p:nvSpPr>
+          <p:cNvPr id="74" name="Rounded Rectangle 73"/>
+          <p:cNvSpPr/>
+          <p:nvPr/>
+        </p:nvSpPr>
+        <p:spPr>
+          <a:xfrm>
+            <a:off x="6803136" y="5724144"/>
+            <a:ext cx="2519172" cy="420624"/>
+          </a:xfrm>
+          <a:prstGeom prst="roundRect">
+            <a:avLst>
+              <a:gd name="adj" fmla="val 5000"/>
+            </a:avLst>
+          </a:prstGeom>
+          <a:solidFill>
+            <a:srgbClr val="FFFFFF"/>
+          </a:solidFill>
+          <a:ln w="11430">
+            <a:solidFill>
+              <a:srgbClr val="C9C9C2"/>
+            </a:solidFill>
+          </a:ln>
+          <a:effectLst/>
+        </p:spPr>
+        <p:style>
+          <a:lnRef idx="1">
+            <a:schemeClr val="accent1"/>
+          </a:lnRef>
+          <a:fillRef idx="3">
+            <a:schemeClr val="accent1"/>
+          </a:fillRef>
+          <a:effectRef idx="2">
+            <a:schemeClr val="accent1"/>
+          </a:effectRef>
+          <a:fontRef idx="minor">
+            <a:schemeClr val="lt1"/>
+          </a:fontRef>
+        </p:style>
+        <p:txBody>
+          <a:bodyPr rtlCol="0" anchor="ctr" wrap="square"/>
+          <a:lstStyle/>
+          <a:p>
+            <a:pPr algn="ctr"/>
+          </a:p>
+        </p:txBody>
+      </p:sp>
+      <p:sp>
+        <p:nvSpPr>
+          <p:cNvPr id="75" name="TextBox 74"/>
+          <p:cNvSpPr txBox="1"/>
+          <p:nvPr/>
+        </p:nvSpPr>
+        <p:spPr>
+          <a:xfrm>
+            <a:off x="6876288" y="5724144"/>
+            <a:ext cx="2171699" cy="420624"/>
+          </a:xfrm>
+          <a:prstGeom prst="rect">
+            <a:avLst/>
+          </a:prstGeom>
+          <a:noFill/>
+        </p:spPr>
+        <p:txBody>
+          <a:bodyPr wrap="square" lIns="27432" rIns="27432" tIns="9144" bIns="9144" anchor="ctr">
+            <a:spAutoFit/>
+          </a:bodyPr>
+          <a:lstStyle/>
+          <a:p>
+            <a:pPr algn="l">
+              <a:lnSpc>
+                <a:spcPct val="108000"/>
+              </a:lnSpc>
+            </a:pPr>
+            <a:r>
+              <a:rPr sz="900" b="0">
+                <a:solidFill>
+                  <a:srgbClr val="141414"/>
+                </a:solidFill>
+                <a:latin typeface="微软雅黑"/>
+                <a:ea typeface="微软雅黑"/>
+                <a:cs typeface="微软雅黑"/>
+              </a:rPr>
+              <a:t>命令行工具（厂商 exe）</a:t>
+            </a:r>
+          </a:p>
+        </p:txBody>
+      </p:sp>
+      <p:sp>
+        <p:nvSpPr>
+          <p:cNvPr id="76" name="Rounded Rectangle 75"/>
+          <p:cNvSpPr/>
+          <p:nvPr/>
+        </p:nvSpPr>
+        <p:spPr>
+          <a:xfrm>
+            <a:off x="9102852" y="5852160"/>
+            <a:ext cx="146304" cy="164592"/>
+          </a:xfrm>
+          <a:prstGeom prst="roundRect">
+            <a:avLst>
+              <a:gd name="adj" fmla="val 12000"/>
+            </a:avLst>
+          </a:prstGeom>
+          <a:solidFill>
+            <a:srgbClr val="8B0F1A"/>
+          </a:solidFill>
+          <a:ln>
+            <a:noFill/>
+          </a:ln>
+          <a:effectLst/>
+        </p:spPr>
+        <p:style>
+          <a:lnRef idx="1">
+            <a:schemeClr val="accent1"/>
+          </a:lnRef>
+          <a:fillRef idx="3">
+            <a:schemeClr val="accent1"/>
+          </a:fillRef>
+          <a:effectRef idx="2">
+            <a:schemeClr val="accent1"/>
+          </a:effectRef>
+          <a:fontRef idx="minor">
+            <a:schemeClr val="lt1"/>
+          </a:fontRef>
+        </p:style>
+        <p:txBody>
+          <a:bodyPr rtlCol="0" anchor="ctr" lIns="27432" rIns="27432" tIns="9144" bIns="9144"/>
+          <a:lstStyle/>
+          <a:p>
+            <a:pPr algn="ctr"/>
+            <a:r>
+              <a:rPr sz="750" b="1">
+                <a:solidFill>
+                  <a:srgbClr val="FFFFFF"/>
+                </a:solidFill>
+                <a:latin typeface="微软雅黑"/>
+                <a:ea typeface="微软雅黑"/>
+                <a:cs typeface="微软雅黑"/>
+              </a:rPr>
+              <a:t>5</a:t>
+            </a:r>
+          </a:p>
+        </p:txBody>
+      </p:sp>
+      <p:sp>
+        <p:nvSpPr>
+          <p:cNvPr id="77" name="Rounded Rectangle 76"/>
+          <p:cNvSpPr/>
+          <p:nvPr/>
+        </p:nvSpPr>
+        <p:spPr>
+          <a:xfrm>
+            <a:off x="9395460" y="5724144"/>
+            <a:ext cx="2519172" cy="420624"/>
+          </a:xfrm>
+          <a:prstGeom prst="roundRect">
+            <a:avLst>
+              <a:gd name="adj" fmla="val 5000"/>
+            </a:avLst>
+          </a:prstGeom>
+          <a:solidFill>
+            <a:srgbClr val="FFFFFF"/>
+          </a:solidFill>
+          <a:ln w="11430">
+            <a:solidFill>
+              <a:srgbClr val="C9C9C2"/>
+            </a:solidFill>
+          </a:ln>
+          <a:effectLst/>
+        </p:spPr>
+        <p:style>
+          <a:lnRef idx="1">
+            <a:schemeClr val="accent1"/>
+          </a:lnRef>
+          <a:fillRef idx="3">
+            <a:schemeClr val="accent1"/>
+          </a:fillRef>
+          <a:effectRef idx="2">
+            <a:schemeClr val="accent1"/>
+          </a:effectRef>
+          <a:fontRef idx="minor">
+            <a:schemeClr val="lt1"/>
+          </a:fontRef>
+        </p:style>
+        <p:txBody>
+          <a:bodyPr rtlCol="0" anchor="ctr" wrap="square"/>
+          <a:lstStyle/>
+          <a:p>
+            <a:pPr algn="ctr"/>
+          </a:p>
+        </p:txBody>
+      </p:sp>
+      <p:sp>
+        <p:nvSpPr>
+          <p:cNvPr id="78" name="TextBox 77"/>
+          <p:cNvSpPr txBox="1"/>
+          <p:nvPr/>
+        </p:nvSpPr>
+        <p:spPr>
+          <a:xfrm>
+            <a:off x="9468612" y="5724144"/>
+            <a:ext cx="2171699" cy="420624"/>
+          </a:xfrm>
+          <a:prstGeom prst="rect">
+            <a:avLst/>
+          </a:prstGeom>
+          <a:noFill/>
+        </p:spPr>
+        <p:txBody>
+          <a:bodyPr wrap="square" lIns="27432" rIns="27432" tIns="9144" bIns="9144" anchor="ctr">
+            <a:spAutoFit/>
+          </a:bodyPr>
+          <a:lstStyle/>
+          <a:p>
+            <a:pPr algn="l">
+              <a:lnSpc>
+                <a:spcPct val="108000"/>
+              </a:lnSpc>
+            </a:pPr>
+            <a:r>
+              <a:rPr sz="900" b="0">
+                <a:solidFill>
+                  <a:srgbClr val="141414"/>
+                </a:solidFill>
+                <a:latin typeface="微软雅黑"/>
+                <a:ea typeface="微软雅黑"/>
+                <a:cs typeface="微软雅黑"/>
+              </a:rPr>
+              <a:t>REST / gRPC / Socket 服务</a:t>
+            </a:r>
+          </a:p>
+        </p:txBody>
+      </p:sp>
+      <p:sp>
+        <p:nvSpPr>
+          <p:cNvPr id="79" name="Rounded Rectangle 78"/>
+          <p:cNvSpPr/>
+          <p:nvPr/>
+        </p:nvSpPr>
+        <p:spPr>
+          <a:xfrm>
+            <a:off x="11695176" y="5852160"/>
+            <a:ext cx="146304" cy="164592"/>
+          </a:xfrm>
+          <a:prstGeom prst="roundRect">
+            <a:avLst>
+              <a:gd name="adj" fmla="val 12000"/>
+            </a:avLst>
+          </a:prstGeom>
+          <a:solidFill>
+            <a:srgbClr val="8B0F1A"/>
+          </a:solidFill>
+          <a:ln>
+            <a:noFill/>
+          </a:ln>
+          <a:effectLst/>
+        </p:spPr>
+        <p:style>
+          <a:lnRef idx="1">
+            <a:schemeClr val="accent1"/>
+          </a:lnRef>
+          <a:fillRef idx="3">
+            <a:schemeClr val="accent1"/>
+          </a:fillRef>
+          <a:effectRef idx="2">
+            <a:schemeClr val="accent1"/>
+          </a:effectRef>
+          <a:fontRef idx="minor">
+            <a:schemeClr val="lt1"/>
+          </a:fontRef>
+        </p:style>
+        <p:txBody>
+          <a:bodyPr rtlCol="0" anchor="ctr" lIns="27432" rIns="27432" tIns="9144" bIns="9144"/>
+          <a:lstStyle/>
+          <a:p>
+            <a:pPr algn="ctr"/>
+            <a:r>
+              <a:rPr sz="750" b="1">
+                <a:solidFill>
+                  <a:srgbClr val="FFFFFF"/>
+                </a:solidFill>
+                <a:latin typeface="微软雅黑"/>
+                <a:ea typeface="微软雅黑"/>
+                <a:cs typeface="微软雅黑"/>
+              </a:rPr>
+              <a:t>6</a:t>
+            </a:r>
+          </a:p>
+        </p:txBody>
+      </p:sp>
+      <p:sp>
+        <p:nvSpPr>
+          <p:cNvPr id="80" name="Rectangle 79"/>
+          <p:cNvSpPr/>
+          <p:nvPr/>
+        </p:nvSpPr>
+        <p:spPr>
+          <a:xfrm>
+            <a:off x="274320" y="6355080"/>
+            <a:ext cx="11640312" cy="12801"/>
+          </a:xfrm>
+          <a:prstGeom prst="rect">
+            <a:avLst/>
+          </a:prstGeom>
+          <a:solidFill>
+            <a:srgbClr val="D9D6CD"/>
+          </a:solidFill>
+          <a:ln>
+            <a:noFill/>
+          </a:ln>
+          <a:effectLst/>
+        </p:spPr>
+        <p:style>
+          <a:lnRef idx="1">
+            <a:schemeClr val="accent1"/>
+          </a:lnRef>
+          <a:fillRef idx="3">
+            <a:schemeClr val="accent1"/>
+          </a:fillRef>
+          <a:effectRef idx="2">
+            <a:schemeClr val="accent1"/>
+          </a:effectRef>
+          <a:fontRef idx="minor">
+            <a:schemeClr val="lt1"/>
+          </a:fontRef>
+        </p:style>
+        <p:txBody>
+          <a:bodyPr rtlCol="0" anchor="ctr" wrap="square"/>
+          <a:lstStyle/>
+          <a:p>
+            <a:pPr algn="ctr"/>
+          </a:p>
+        </p:txBody>
+      </p:sp>
+      <p:sp>
+        <p:nvSpPr>
+          <p:cNvPr id="81" name="TextBox 80"/>
+          <p:cNvSpPr txBox="1"/>
+          <p:nvPr/>
+        </p:nvSpPr>
+        <p:spPr>
+          <a:xfrm>
+            <a:off x="274320" y="6400800"/>
+            <a:ext cx="6949440" cy="274320"/>
+          </a:xfrm>
+          <a:prstGeom prst="rect">
+            <a:avLst/>
+          </a:prstGeom>
+          <a:noFill/>
+        </p:spPr>
+        <p:txBody>
+          <a:bodyPr wrap="square" lIns="27432" rIns="27432" tIns="9144" bIns="9144" anchor="ctr">
+            <a:spAutoFit/>
+          </a:bodyPr>
+          <a:lstStyle/>
+          <a:p>
+            <a:pPr algn="l">
+              <a:lnSpc>
+                <a:spcPct val="108000"/>
+              </a:lnSpc>
+            </a:pPr>
+            <a:r>
+              <a:rPr sz="850" b="0">
+                <a:solidFill>
+                  <a:srgbClr val="5C5C56"/>
+                </a:solidFill>
+                <a:latin typeface="微软雅黑"/>
+                <a:ea typeface="微软雅黑"/>
+                <a:cs typeface="微软雅黑"/>
+              </a:rPr>
+              <a:t>图例：① C-ABI 封装　② Python 适配器　③ VISA/SCPI 客户端　④ COM/.NET 桥　⑤ 进程调用　⑥ 协议实现</a:t>
+            </a:r>
+          </a:p>
+        </p:txBody>
+      </p:sp>
+      <p:sp>
+        <p:nvSpPr>
+          <p:cNvPr id="82" name="TextBox 81"/>
+          <p:cNvSpPr txBox="1"/>
+          <p:nvPr/>
+        </p:nvSpPr>
+        <p:spPr>
+          <a:xfrm>
+            <a:off x="7315200" y="6400800"/>
+            <a:ext cx="4599432" cy="274320"/>
+          </a:xfrm>
+          <a:prstGeom prst="rect">
+            <a:avLst/>
+          </a:prstGeom>
+          <a:noFill/>
+        </p:spPr>
+        <p:txBody>
+          <a:bodyPr wrap="square" lIns="27432" rIns="27432" tIns="9144" bIns="9144" anchor="ctr">
+            <a:spAutoFit/>
+          </a:bodyPr>
+          <a:lstStyle/>
+          <a:p>
+            <a:pPr algn="r">
+              <a:lnSpc>
+                <a:spcPct val="108000"/>
+              </a:lnSpc>
+            </a:pPr>
+            <a:r>
+              <a:rPr sz="850" b="0">
+                <a:solidFill>
+                  <a:srgbClr val="5C5C56"/>
+                </a:solidFill>
+                <a:latin typeface="微软雅黑"/>
+                <a:ea typeface="微软雅黑"/>
+                <a:cs typeface="微软雅黑"/>
+              </a:rPr>
+              <a:t>形态越靠「文档」，封装工作量越大；同一设备多形态时优先选二进制接口或官方 Python 库</a:t>
+            </a:r>
+          </a:p>
+        </p:txBody>
+      </p:sp>
     </p:spTree>
   </p:cSld>
   <p:clrMapOvr>

--- a/docs/装备软件/供应商软件形态与ATE接入.pptx
+++ b/docs/装备软件/供应商软件形态与ATE接入.pptx
@@ -6,6 +6,8 @@
   </p:sldMasterIdLst>
   <p:sldIdLst>
     <p:sldId id="256" r:id="rId7"/>
+    <p:sldId id="257" r:id="rId8"/>
+    <p:sldId id="258" r:id="rId9"/>
   </p:sldIdLst>
   <p:sldSz cx="12191695" cy="6858000" type="screen4x3"/>
   <p:notesSz cx="6858000" cy="9144000"/>
@@ -3097,7 +3099,7 @@
         <p:spPr>
           <a:xfrm>
             <a:off x="274320" y="201168"/>
-            <a:ext cx="8778240" cy="457200"/>
+            <a:ext cx="10881360" cy="457200"/>
           </a:xfrm>
           <a:prstGeom prst="rect">
             <a:avLst/>
@@ -3112,7 +3114,7 @@
           <a:p>
             <a:pPr algn="l">
               <a:lnSpc>
-                <a:spcPct val="108000"/>
+                <a:spcPct val="110000"/>
               </a:lnSpc>
             </a:pPr>
             <a:r>
@@ -3124,7 +3126,7 @@
                 <a:ea typeface="微软雅黑"/>
                 <a:cs typeface="微软雅黑"/>
               </a:rPr>
-              <a:t>供应商设备软件的形态与 ATE 接入方式</a:t>
+              <a:t>问题背景（一）· 供应商软件接入的六类阻断点</a:t>
             </a:r>
           </a:p>
         </p:txBody>
@@ -3138,7 +3140,7 @@
         <p:spPr>
           <a:xfrm>
             <a:off x="274320" y="658368"/>
-            <a:ext cx="10607040" cy="310896"/>
+            <a:ext cx="11155680" cy="310896"/>
           </a:xfrm>
           <a:prstGeom prst="rect">
             <a:avLst/>
@@ -3153,7 +3155,7 @@
           <a:p>
             <a:pPr algn="l">
               <a:lnSpc>
-                <a:spcPct val="108000"/>
+                <a:spcPct val="110000"/>
               </a:lnSpc>
             </a:pPr>
             <a:r>
@@ -3165,7 +3167,7 @@
                 <a:ea typeface="微软雅黑"/>
                 <a:cs typeface="微软雅黑"/>
               </a:rPr>
-              <a:t>同一台设备可能同时提供多种形态；ATE 侧以统一的设备抽象层屏蔽差异，测试用例只面向能力接口编程，不直接依赖供应商实现</a:t>
+              <a:t>供应商多以「独立设备 + 封闭软件」交付；网络、运行环境、接口与授权四条线同时收紧，ATE 的接入与自动化被挡在边界之外</a:t>
             </a:r>
           </a:p>
         </p:txBody>
@@ -3222,8 +3224,8 @@
         </p:nvSpPr>
         <p:spPr>
           <a:xfrm>
-            <a:off x="274320" y="1097280"/>
-            <a:ext cx="1920240" cy="237744"/>
+            <a:off x="274320" y="1078992"/>
+            <a:ext cx="2240280" cy="237744"/>
           </a:xfrm>
           <a:prstGeom prst="rect">
             <a:avLst/>
@@ -3238,7 +3240,7 @@
           <a:p>
             <a:pPr algn="l">
               <a:lnSpc>
-                <a:spcPct val="108000"/>
+                <a:spcPct val="110000"/>
               </a:lnSpc>
             </a:pPr>
             <a:r>
@@ -3250,7 +3252,7 @@
                 <a:ea typeface="微软雅黑"/>
                 <a:cs typeface="微软雅黑"/>
               </a:rPr>
-              <a:t>① ATE 测试执行层</a:t>
+              <a:t>ATE 平台（我方可控）</a:t>
             </a:r>
           </a:p>
         </p:txBody>
@@ -3263,8 +3265,8 @@
         </p:nvSpPr>
         <p:spPr>
           <a:xfrm>
-            <a:off x="2670048" y="1097280"/>
-            <a:ext cx="3566160" cy="237744"/>
+            <a:off x="2880360" y="1078992"/>
+            <a:ext cx="9034272" cy="237744"/>
           </a:xfrm>
           <a:prstGeom prst="rect">
             <a:avLst/>
@@ -3279,7 +3281,7 @@
           <a:p>
             <a:pPr algn="l">
               <a:lnSpc>
-                <a:spcPct val="108000"/>
+                <a:spcPct val="110000"/>
               </a:lnSpc>
             </a:pPr>
             <a:r>
@@ -3291,150 +3293,21 @@
                 <a:ea typeface="微软雅黑"/>
                 <a:cs typeface="微软雅黑"/>
               </a:rPr>
-              <a:t>② 设备抽象与适配层（对外统一能力接口，屏蔽形态差异）</a:t>
-            </a:r>
-          </a:p>
-        </p:txBody>
-      </p:sp>
-      <p:sp>
-        <p:nvSpPr>
-          <p:cNvPr id="7" name="TextBox 6"/>
-          <p:cNvSpPr txBox="1"/>
-          <p:nvPr/>
-        </p:nvSpPr>
-        <p:spPr>
-          <a:xfrm>
-            <a:off x="6803136" y="1097280"/>
-            <a:ext cx="5111496" cy="237744"/>
-          </a:xfrm>
-          <a:prstGeom prst="rect">
-            <a:avLst/>
-          </a:prstGeom>
-          <a:noFill/>
-        </p:spPr>
-        <p:txBody>
-          <a:bodyPr wrap="square" lIns="27432" rIns="27432" tIns="9144" bIns="9144" anchor="ctr">
-            <a:spAutoFit/>
-          </a:bodyPr>
-          <a:lstStyle/>
-          <a:p>
-            <a:pPr algn="l">
-              <a:lnSpc>
-                <a:spcPct val="108000"/>
-              </a:lnSpc>
-            </a:pPr>
-            <a:r>
-              <a:rPr sz="1000" b="1">
-                <a:solidFill>
-                  <a:srgbClr val="8B0F1A"/>
-                </a:solidFill>
-                <a:latin typeface="微软雅黑"/>
-                <a:ea typeface="微软雅黑"/>
-                <a:cs typeface="微软雅黑"/>
-              </a:rPr>
-              <a:t>③ 供应商提供的软件形态（按提供方式分四类）</a:t>
-            </a:r>
-          </a:p>
-        </p:txBody>
-      </p:sp>
-      <p:sp>
-        <p:nvSpPr>
-          <p:cNvPr id="8" name="Right Arrow 7"/>
+              <a:t>供应商软件（交付形态各异，多数不可控）</a:t>
+            </a:r>
+          </a:p>
+        </p:txBody>
+      </p:sp>
+      <p:sp>
+        <p:nvSpPr>
+          <p:cNvPr id="7" name="Rounded Rectangle 6"/>
           <p:cNvSpPr/>
           <p:nvPr/>
         </p:nvSpPr>
         <p:spPr>
           <a:xfrm>
-            <a:off x="2157984" y="3657600"/>
-            <a:ext cx="420624" cy="310896"/>
-          </a:xfrm>
-          <a:prstGeom prst="rightArrow">
-            <a:avLst/>
-          </a:prstGeom>
-          <a:solidFill>
-            <a:srgbClr val="8B0F1A"/>
-          </a:solidFill>
-          <a:ln>
-            <a:noFill/>
-          </a:ln>
-          <a:effectLst/>
-        </p:spPr>
-        <p:style>
-          <a:lnRef idx="1">
-            <a:schemeClr val="accent1"/>
-          </a:lnRef>
-          <a:fillRef idx="3">
-            <a:schemeClr val="accent1"/>
-          </a:fillRef>
-          <a:effectRef idx="2">
-            <a:schemeClr val="accent1"/>
-          </a:effectRef>
-          <a:fontRef idx="minor">
-            <a:schemeClr val="lt1"/>
-          </a:fontRef>
-        </p:style>
-        <p:txBody>
-          <a:bodyPr rtlCol="0" anchor="ctr"/>
-          <a:lstStyle/>
-          <a:p>
-            <a:pPr algn="ctr"/>
-          </a:p>
-        </p:txBody>
-      </p:sp>
-      <p:sp>
-        <p:nvSpPr>
-          <p:cNvPr id="9" name="Right Arrow 8"/>
-          <p:cNvSpPr/>
-          <p:nvPr/>
-        </p:nvSpPr>
-        <p:spPr>
-          <a:xfrm>
-            <a:off x="6291072" y="3657600"/>
-            <a:ext cx="420624" cy="310896"/>
-          </a:xfrm>
-          <a:prstGeom prst="rightArrow">
-            <a:avLst/>
-          </a:prstGeom>
-          <a:solidFill>
-            <a:srgbClr val="8B0F1A"/>
-          </a:solidFill>
-          <a:ln>
-            <a:noFill/>
-          </a:ln>
-          <a:effectLst/>
-        </p:spPr>
-        <p:style>
-          <a:lnRef idx="1">
-            <a:schemeClr val="accent1"/>
-          </a:lnRef>
-          <a:fillRef idx="3">
-            <a:schemeClr val="accent1"/>
-          </a:fillRef>
-          <a:effectRef idx="2">
-            <a:schemeClr val="accent1"/>
-          </a:effectRef>
-          <a:fontRef idx="minor">
-            <a:schemeClr val="lt1"/>
-          </a:fontRef>
-        </p:style>
-        <p:txBody>
-          <a:bodyPr rtlCol="0" anchor="ctr"/>
-          <a:lstStyle/>
-          <a:p>
-            <a:pPr algn="ctr"/>
-          </a:p>
-        </p:txBody>
-      </p:sp>
-      <p:sp>
-        <p:nvSpPr>
-          <p:cNvPr id="10" name="Rounded Rectangle 9"/>
-          <p:cNvSpPr/>
-          <p:nvPr/>
-        </p:nvSpPr>
-        <p:spPr>
-          <a:xfrm>
             <a:off x="274320" y="1371600"/>
-            <a:ext cx="1920240" cy="4882896"/>
+            <a:ext cx="2240280" cy="4526280"/>
           </a:xfrm>
           <a:prstGeom prst="roundRect">
             <a:avLst>
@@ -3475,14 +3348,14 @@
       </p:sp>
       <p:sp>
         <p:nvSpPr>
-          <p:cNvPr id="11" name="Rounded Rectangle 10"/>
+          <p:cNvPr id="8" name="Rounded Rectangle 7"/>
           <p:cNvSpPr/>
           <p:nvPr/>
         </p:nvSpPr>
         <p:spPr>
           <a:xfrm>
-            <a:off x="384048" y="1517904"/>
-            <a:ext cx="1700784" cy="1298448"/>
+            <a:off x="402336" y="1536192"/>
+            <a:ext cx="1984248" cy="1280160"/>
           </a:xfrm>
           <a:prstGeom prst="roundRect">
             <a:avLst>
@@ -3521,14 +3394,14 @@
       </p:sp>
       <p:sp>
         <p:nvSpPr>
-          <p:cNvPr id="12" name="TextBox 11"/>
+          <p:cNvPr id="9" name="TextBox 8"/>
           <p:cNvSpPr txBox="1"/>
           <p:nvPr/>
         </p:nvSpPr>
         <p:spPr>
           <a:xfrm>
-            <a:off x="420623" y="1609344"/>
-            <a:ext cx="1627632" cy="1115568"/>
+            <a:off x="457200" y="1627632"/>
+            <a:ext cx="1874519" cy="1097280"/>
           </a:xfrm>
           <a:prstGeom prst="rect">
             <a:avLst/>
@@ -3543,11 +3416,11 @@
           <a:p>
             <a:pPr algn="ctr">
               <a:lnSpc>
-                <a:spcPct val="108000"/>
-              </a:lnSpc>
-            </a:pPr>
-            <a:r>
-              <a:rPr sz="1150" b="1">
+                <a:spcPct val="110000"/>
+              </a:lnSpc>
+            </a:pPr>
+            <a:r>
+              <a:rPr sz="1100" b="1">
                 <a:solidFill>
                   <a:srgbClr val="141414"/>
                 </a:solidFill>
@@ -3561,14 +3434,14 @@
           <a:p>
             <a:pPr algn="ctr">
               <a:lnSpc>
-                <a:spcPct val="108000"/>
+                <a:spcPct val="110000"/>
               </a:lnSpc>
               <a:spcBef>
                 <a:spcPts val="300"/>
               </a:spcBef>
             </a:pPr>
             <a:r>
-              <a:rPr sz="900" b="0">
+              <a:rPr sz="850" b="0">
                 <a:solidFill>
                   <a:srgbClr val="4A4A45"/>
                 </a:solidFill>
@@ -3576,21 +3449,21 @@
                 <a:ea typeface="微软雅黑"/>
                 <a:cs typeface="微软雅黑"/>
               </a:rPr>
-              <a:t>pytest 用例 / 测试程序</a:t>
-            </a:r>
-          </a:p>
-        </p:txBody>
-      </p:sp>
-      <p:sp>
-        <p:nvSpPr>
-          <p:cNvPr id="13" name="Rounded Rectangle 12"/>
+              <a:t>pytest 用例 · TPS 编排</a:t>
+            </a:r>
+          </a:p>
+        </p:txBody>
+      </p:sp>
+      <p:sp>
+        <p:nvSpPr>
+          <p:cNvPr id="10" name="Rounded Rectangle 9"/>
           <p:cNvSpPr/>
           <p:nvPr/>
         </p:nvSpPr>
         <p:spPr>
           <a:xfrm>
-            <a:off x="384048" y="3145536"/>
-            <a:ext cx="1700784" cy="1298448"/>
+            <a:off x="402336" y="2999232"/>
+            <a:ext cx="1984248" cy="1280160"/>
           </a:xfrm>
           <a:prstGeom prst="roundRect">
             <a:avLst>
@@ -3629,14 +3502,14 @@
       </p:sp>
       <p:sp>
         <p:nvSpPr>
-          <p:cNvPr id="14" name="TextBox 13"/>
+          <p:cNvPr id="11" name="TextBox 10"/>
           <p:cNvSpPr txBox="1"/>
           <p:nvPr/>
         </p:nvSpPr>
         <p:spPr>
           <a:xfrm>
-            <a:off x="420623" y="3236976"/>
-            <a:ext cx="1627632" cy="1115568"/>
+            <a:off x="457200" y="3090672"/>
+            <a:ext cx="1874519" cy="1097280"/>
           </a:xfrm>
           <a:prstGeom prst="rect">
             <a:avLst/>
@@ -3651,11 +3524,11 @@
           <a:p>
             <a:pPr algn="ctr">
               <a:lnSpc>
-                <a:spcPct val="108000"/>
-              </a:lnSpc>
-            </a:pPr>
-            <a:r>
-              <a:rPr sz="1150" b="1">
+                <a:spcPct val="110000"/>
+              </a:lnSpc>
+            </a:pPr>
+            <a:r>
+              <a:rPr sz="1100" b="1">
                 <a:solidFill>
                   <a:srgbClr val="141414"/>
                 </a:solidFill>
@@ -3663,20 +3536,20 @@
                 <a:ea typeface="微软雅黑"/>
                 <a:cs typeface="微软雅黑"/>
               </a:rPr>
-              <a:t>能力调用</a:t>
+              <a:t>设备抽象层</a:t>
             </a:r>
           </a:p>
           <a:p>
             <a:pPr algn="ctr">
               <a:lnSpc>
-                <a:spcPct val="108000"/>
+                <a:spcPct val="110000"/>
               </a:lnSpc>
               <a:spcBef>
                 <a:spcPts val="300"/>
               </a:spcBef>
             </a:pPr>
             <a:r>
-              <a:rPr sz="900" b="0">
+              <a:rPr sz="850" b="0">
                 <a:solidFill>
                   <a:srgbClr val="4A4A45"/>
                 </a:solidFill>
@@ -3684,21 +3557,21 @@
                 <a:ea typeface="微软雅黑"/>
                 <a:cs typeface="微软雅黑"/>
               </a:rPr>
-              <a:t>连接 · 配置 · 触发 · 采集 · 判定</a:t>
-            </a:r>
-          </a:p>
-        </p:txBody>
-      </p:sp>
-      <p:sp>
-        <p:nvSpPr>
-          <p:cNvPr id="15" name="Rounded Rectangle 14"/>
+              <a:t>统一能力接口：连接 / 配置 / 触发 / 采集</a:t>
+            </a:r>
+          </a:p>
+        </p:txBody>
+      </p:sp>
+      <p:sp>
+        <p:nvSpPr>
+          <p:cNvPr id="12" name="Rounded Rectangle 11"/>
           <p:cNvSpPr/>
           <p:nvPr/>
         </p:nvSpPr>
         <p:spPr>
           <a:xfrm>
-            <a:off x="384048" y="4773168"/>
-            <a:ext cx="1700784" cy="1298448"/>
+            <a:off x="402336" y="4462272"/>
+            <a:ext cx="1984248" cy="1280160"/>
           </a:xfrm>
           <a:prstGeom prst="roundRect">
             <a:avLst>
@@ -3737,14 +3610,14 @@
       </p:sp>
       <p:sp>
         <p:nvSpPr>
-          <p:cNvPr id="16" name="TextBox 15"/>
+          <p:cNvPr id="13" name="TextBox 12"/>
           <p:cNvSpPr txBox="1"/>
           <p:nvPr/>
         </p:nvSpPr>
         <p:spPr>
           <a:xfrm>
-            <a:off x="420623" y="4864607"/>
-            <a:ext cx="1627632" cy="1115568"/>
+            <a:off x="457200" y="4553712"/>
+            <a:ext cx="1874519" cy="1097280"/>
           </a:xfrm>
           <a:prstGeom prst="rect">
             <a:avLst/>
@@ -3759,7 +3632,4787 @@
           <a:p>
             <a:pPr algn="ctr">
               <a:lnSpc>
-                <a:spcPct val="108000"/>
+                <a:spcPct val="110000"/>
+              </a:lnSpc>
+            </a:pPr>
+            <a:r>
+              <a:rPr sz="1100" b="1">
+                <a:solidFill>
+                  <a:srgbClr val="141414"/>
+                </a:solidFill>
+                <a:latin typeface="微软雅黑"/>
+                <a:ea typeface="微软雅黑"/>
+                <a:cs typeface="微软雅黑"/>
+              </a:rPr>
+              <a:t>执行与追溯</a:t>
+            </a:r>
+          </a:p>
+          <a:p>
+            <a:pPr algn="ctr">
+              <a:lnSpc>
+                <a:spcPct val="110000"/>
+              </a:lnSpc>
+              <a:spcBef>
+                <a:spcPts val="300"/>
+              </a:spcBef>
+            </a:pPr>
+            <a:r>
+              <a:rPr sz="850" b="0">
+                <a:solidFill>
+                  <a:srgbClr val="4A4A45"/>
+                </a:solidFill>
+                <a:latin typeface="微软雅黑"/>
+                <a:ea typeface="微软雅黑"/>
+                <a:cs typeface="微软雅黑"/>
+              </a:rPr>
+              <a:t>Runner 执行 · 结果归档</a:t>
+            </a:r>
+          </a:p>
+        </p:txBody>
+      </p:sp>
+      <p:cxnSp>
+        <p:nvCxnSpPr>
+          <p:cNvPr id="14" name="Connector 13"/>
+          <p:cNvCxnSpPr/>
+          <p:nvPr/>
+        </p:nvCxnSpPr>
+        <p:spPr>
+          <a:xfrm>
+            <a:off x="2651760" y="1371600"/>
+            <a:ext cx="0" cy="4526280"/>
+          </a:xfrm>
+          <a:prstGeom prst="line">
+            <a:avLst/>
+          </a:prstGeom>
+          <a:ln w="16510">
+            <a:solidFill>
+              <a:srgbClr val="8B0F1A"/>
+            </a:solidFill>
+            <a:prstDash val="dash"/>
+          </a:ln>
+        </p:spPr>
+        <p:style>
+          <a:lnRef idx="2">
+            <a:schemeClr val="accent1"/>
+          </a:lnRef>
+          <a:fillRef idx="0">
+            <a:schemeClr val="accent1"/>
+          </a:fillRef>
+          <a:effectRef idx="1">
+            <a:schemeClr val="accent1"/>
+          </a:effectRef>
+          <a:fontRef idx="minor">
+            <a:schemeClr val="tx1"/>
+          </a:fontRef>
+        </p:style>
+      </p:cxnSp>
+      <p:sp>
+        <p:nvSpPr>
+          <p:cNvPr id="15" name="TextBox 14"/>
+          <p:cNvSpPr txBox="1"/>
+          <p:nvPr/>
+        </p:nvSpPr>
+        <p:spPr>
+          <a:xfrm>
+            <a:off x="2286000" y="5943600"/>
+            <a:ext cx="731520" cy="201168"/>
+          </a:xfrm>
+          <a:prstGeom prst="rect">
+            <a:avLst/>
+          </a:prstGeom>
+          <a:noFill/>
+        </p:spPr>
+        <p:txBody>
+          <a:bodyPr wrap="square" lIns="27432" rIns="27432" tIns="9144" bIns="9144" anchor="ctr">
+            <a:spAutoFit/>
+          </a:bodyPr>
+          <a:lstStyle/>
+          <a:p>
+            <a:pPr algn="ctr">
+              <a:lnSpc>
+                <a:spcPct val="110000"/>
+              </a:lnSpc>
+            </a:pPr>
+            <a:r>
+              <a:rPr sz="800" b="1">
+                <a:solidFill>
+                  <a:srgbClr val="8B0F1A"/>
+                </a:solidFill>
+                <a:latin typeface="微软雅黑"/>
+                <a:ea typeface="微软雅黑"/>
+                <a:cs typeface="微软雅黑"/>
+              </a:rPr>
+              <a:t>接入边界</a:t>
+            </a:r>
+          </a:p>
+        </p:txBody>
+      </p:sp>
+      <p:sp>
+        <p:nvSpPr>
+          <p:cNvPr id="16" name="Rounded Rectangle 15"/>
+          <p:cNvSpPr/>
+          <p:nvPr/>
+        </p:nvSpPr>
+        <p:spPr>
+          <a:xfrm>
+            <a:off x="2880360" y="1371600"/>
+            <a:ext cx="9034272" cy="4526280"/>
+          </a:xfrm>
+          <a:prstGeom prst="roundRect">
+            <a:avLst>
+              <a:gd name="adj" fmla="val 3000"/>
+            </a:avLst>
+          </a:prstGeom>
+          <a:solidFill>
+            <a:srgbClr val="F6F6F3"/>
+          </a:solidFill>
+          <a:ln w="12700">
+            <a:solidFill>
+              <a:srgbClr val="D9D6CD"/>
+            </a:solidFill>
+          </a:ln>
+          <a:effectLst/>
+        </p:spPr>
+        <p:style>
+          <a:lnRef idx="1">
+            <a:schemeClr val="accent1"/>
+          </a:lnRef>
+          <a:fillRef idx="3">
+            <a:schemeClr val="accent1"/>
+          </a:fillRef>
+          <a:effectRef idx="2">
+            <a:schemeClr val="accent1"/>
+          </a:effectRef>
+          <a:fontRef idx="minor">
+            <a:schemeClr val="lt1"/>
+          </a:fontRef>
+        </p:style>
+        <p:txBody>
+          <a:bodyPr rtlCol="0" anchor="ctr" wrap="square"/>
+          <a:lstStyle/>
+          <a:p>
+            <a:pPr algn="ctr"/>
+          </a:p>
+        </p:txBody>
+      </p:sp>
+      <p:sp>
+        <p:nvSpPr>
+          <p:cNvPr id="17" name="Rounded Rectangle 16"/>
+          <p:cNvSpPr/>
+          <p:nvPr/>
+        </p:nvSpPr>
+        <p:spPr>
+          <a:xfrm>
+            <a:off x="3044952" y="1517904"/>
+            <a:ext cx="4279392" cy="1280160"/>
+          </a:xfrm>
+          <a:prstGeom prst="roundRect">
+            <a:avLst>
+              <a:gd name="adj" fmla="val 5000"/>
+            </a:avLst>
+          </a:prstGeom>
+          <a:solidFill>
+            <a:srgbClr val="FFFFFF"/>
+          </a:solidFill>
+          <a:ln w="12700">
+            <a:solidFill>
+              <a:srgbClr val="C9C9C2"/>
+            </a:solidFill>
+          </a:ln>
+          <a:effectLst/>
+        </p:spPr>
+        <p:style>
+          <a:lnRef idx="1">
+            <a:schemeClr val="accent1"/>
+          </a:lnRef>
+          <a:fillRef idx="3">
+            <a:schemeClr val="accent1"/>
+          </a:fillRef>
+          <a:effectRef idx="2">
+            <a:schemeClr val="accent1"/>
+          </a:effectRef>
+          <a:fontRef idx="minor">
+            <a:schemeClr val="lt1"/>
+          </a:fontRef>
+        </p:style>
+        <p:txBody>
+          <a:bodyPr rtlCol="0" anchor="ctr" wrap="square"/>
+          <a:lstStyle/>
+          <a:p>
+            <a:pPr algn="ctr"/>
+          </a:p>
+        </p:txBody>
+      </p:sp>
+      <p:sp>
+        <p:nvSpPr>
+          <p:cNvPr id="18" name="Oval 17"/>
+          <p:cNvSpPr/>
+          <p:nvPr/>
+        </p:nvSpPr>
+        <p:spPr>
+          <a:xfrm>
+            <a:off x="3163824" y="1636776"/>
+            <a:ext cx="219456" cy="219456"/>
+          </a:xfrm>
+          <a:prstGeom prst="ellipse">
+            <a:avLst/>
+          </a:prstGeom>
+          <a:solidFill>
+            <a:srgbClr val="8B0F1A"/>
+          </a:solidFill>
+          <a:ln>
+            <a:noFill/>
+          </a:ln>
+          <a:effectLst/>
+        </p:spPr>
+        <p:style>
+          <a:lnRef idx="1">
+            <a:schemeClr val="accent1"/>
+          </a:lnRef>
+          <a:fillRef idx="3">
+            <a:schemeClr val="accent1"/>
+          </a:fillRef>
+          <a:effectRef idx="2">
+            <a:schemeClr val="accent1"/>
+          </a:effectRef>
+          <a:fontRef idx="minor">
+            <a:schemeClr val="lt1"/>
+          </a:fontRef>
+        </p:style>
+        <p:txBody>
+          <a:bodyPr rtlCol="0" anchor="ctr" lIns="18288" rIns="18288" tIns="0" bIns="0"/>
+          <a:lstStyle/>
+          <a:p>
+            <a:pPr algn="ctr">
+              <a:lnSpc>
+                <a:spcPct val="100000"/>
+              </a:lnSpc>
+            </a:pPr>
+            <a:r>
+              <a:rPr sz="850" b="1">
+                <a:solidFill>
+                  <a:srgbClr val="FFFFFF"/>
+                </a:solidFill>
+                <a:latin typeface="微软雅黑"/>
+                <a:ea typeface="微软雅黑"/>
+                <a:cs typeface="微软雅黑"/>
+              </a:rPr>
+              <a:t>1</a:t>
+            </a:r>
+          </a:p>
+        </p:txBody>
+      </p:sp>
+      <p:sp>
+        <p:nvSpPr>
+          <p:cNvPr id="19" name="TextBox 18"/>
+          <p:cNvSpPr txBox="1"/>
+          <p:nvPr/>
+        </p:nvSpPr>
+        <p:spPr>
+          <a:xfrm>
+            <a:off x="3483864" y="1591056"/>
+            <a:ext cx="3730752" cy="1133856"/>
+          </a:xfrm>
+          <a:prstGeom prst="rect">
+            <a:avLst/>
+          </a:prstGeom>
+          <a:noFill/>
+        </p:spPr>
+        <p:txBody>
+          <a:bodyPr wrap="square" lIns="27432" rIns="27432" tIns="9144" bIns="9144" anchor="ctr">
+            <a:spAutoFit/>
+          </a:bodyPr>
+          <a:lstStyle/>
+          <a:p>
+            <a:pPr algn="l">
+              <a:lnSpc>
+                <a:spcPct val="110000"/>
+              </a:lnSpc>
+            </a:pPr>
+            <a:r>
+              <a:rPr sz="1050" b="1">
+                <a:solidFill>
+                  <a:srgbClr val="141414"/>
+                </a:solidFill>
+                <a:latin typeface="微软雅黑"/>
+                <a:ea typeface="微软雅黑"/>
+                <a:cs typeface="微软雅黑"/>
+              </a:rPr>
+              <a:t>网口数量受限</a:t>
+            </a:r>
+          </a:p>
+          <a:p>
+            <a:pPr algn="l">
+              <a:lnSpc>
+                <a:spcPct val="110000"/>
+              </a:lnSpc>
+              <a:spcBef>
+                <a:spcPts val="500"/>
+              </a:spcBef>
+            </a:pPr>
+            <a:r>
+              <a:rPr sz="850" b="0">
+                <a:solidFill>
+                  <a:srgbClr val="5C5C56"/>
+                </a:solidFill>
+                <a:latin typeface="微软雅黑"/>
+                <a:ea typeface="微软雅黑"/>
+                <a:cs typeface="微软雅黑"/>
+              </a:rPr>
+              <a:t>设备只提供 1 个业务网口且已被既有测试网占用</a:t>
+            </a:r>
+          </a:p>
+          <a:p>
+            <a:pPr algn="l">
+              <a:lnSpc>
+                <a:spcPct val="110000"/>
+              </a:lnSpc>
+              <a:spcBef>
+                <a:spcPts val="100"/>
+              </a:spcBef>
+            </a:pPr>
+            <a:r>
+              <a:rPr sz="850" b="0">
+                <a:solidFill>
+                  <a:srgbClr val="5C5C56"/>
+                </a:solidFill>
+                <a:latin typeface="微软雅黑"/>
+                <a:ea typeface="微软雅黑"/>
+                <a:cs typeface="微软雅黑"/>
+              </a:rPr>
+              <a:t>没有第二条通路接入 ATE 网络</a:t>
+            </a:r>
+          </a:p>
+        </p:txBody>
+      </p:sp>
+      <p:sp>
+        <p:nvSpPr>
+          <p:cNvPr id="20" name="Rounded Rectangle 19"/>
+          <p:cNvSpPr/>
+          <p:nvPr/>
+        </p:nvSpPr>
+        <p:spPr>
+          <a:xfrm>
+            <a:off x="7516367" y="1517904"/>
+            <a:ext cx="4279392" cy="1280160"/>
+          </a:xfrm>
+          <a:prstGeom prst="roundRect">
+            <a:avLst>
+              <a:gd name="adj" fmla="val 5000"/>
+            </a:avLst>
+          </a:prstGeom>
+          <a:solidFill>
+            <a:srgbClr val="FFFFFF"/>
+          </a:solidFill>
+          <a:ln w="12700">
+            <a:solidFill>
+              <a:srgbClr val="C9C9C2"/>
+            </a:solidFill>
+          </a:ln>
+          <a:effectLst/>
+        </p:spPr>
+        <p:style>
+          <a:lnRef idx="1">
+            <a:schemeClr val="accent1"/>
+          </a:lnRef>
+          <a:fillRef idx="3">
+            <a:schemeClr val="accent1"/>
+          </a:fillRef>
+          <a:effectRef idx="2">
+            <a:schemeClr val="accent1"/>
+          </a:effectRef>
+          <a:fontRef idx="minor">
+            <a:schemeClr val="lt1"/>
+          </a:fontRef>
+        </p:style>
+        <p:txBody>
+          <a:bodyPr rtlCol="0" anchor="ctr" wrap="square"/>
+          <a:lstStyle/>
+          <a:p>
+            <a:pPr algn="ctr"/>
+          </a:p>
+        </p:txBody>
+      </p:sp>
+      <p:sp>
+        <p:nvSpPr>
+          <p:cNvPr id="21" name="Oval 20"/>
+          <p:cNvSpPr/>
+          <p:nvPr/>
+        </p:nvSpPr>
+        <p:spPr>
+          <a:xfrm>
+            <a:off x="7635240" y="1636776"/>
+            <a:ext cx="219456" cy="219456"/>
+          </a:xfrm>
+          <a:prstGeom prst="ellipse">
+            <a:avLst/>
+          </a:prstGeom>
+          <a:solidFill>
+            <a:srgbClr val="8B0F1A"/>
+          </a:solidFill>
+          <a:ln>
+            <a:noFill/>
+          </a:ln>
+          <a:effectLst/>
+        </p:spPr>
+        <p:style>
+          <a:lnRef idx="1">
+            <a:schemeClr val="accent1"/>
+          </a:lnRef>
+          <a:fillRef idx="3">
+            <a:schemeClr val="accent1"/>
+          </a:fillRef>
+          <a:effectRef idx="2">
+            <a:schemeClr val="accent1"/>
+          </a:effectRef>
+          <a:fontRef idx="minor">
+            <a:schemeClr val="lt1"/>
+          </a:fontRef>
+        </p:style>
+        <p:txBody>
+          <a:bodyPr rtlCol="0" anchor="ctr" lIns="18288" rIns="18288" tIns="0" bIns="0"/>
+          <a:lstStyle/>
+          <a:p>
+            <a:pPr algn="ctr">
+              <a:lnSpc>
+                <a:spcPct val="100000"/>
+              </a:lnSpc>
+            </a:pPr>
+            <a:r>
+              <a:rPr sz="850" b="1">
+                <a:solidFill>
+                  <a:srgbClr val="FFFFFF"/>
+                </a:solidFill>
+                <a:latin typeface="微软雅黑"/>
+                <a:ea typeface="微软雅黑"/>
+                <a:cs typeface="微软雅黑"/>
+              </a:rPr>
+              <a:t>2</a:t>
+            </a:r>
+          </a:p>
+        </p:txBody>
+      </p:sp>
+      <p:sp>
+        <p:nvSpPr>
+          <p:cNvPr id="22" name="TextBox 21"/>
+          <p:cNvSpPr txBox="1"/>
+          <p:nvPr/>
+        </p:nvSpPr>
+        <p:spPr>
+          <a:xfrm>
+            <a:off x="7955279" y="1591056"/>
+            <a:ext cx="3730752" cy="1133856"/>
+          </a:xfrm>
+          <a:prstGeom prst="rect">
+            <a:avLst/>
+          </a:prstGeom>
+          <a:noFill/>
+        </p:spPr>
+        <p:txBody>
+          <a:bodyPr wrap="square" lIns="27432" rIns="27432" tIns="9144" bIns="9144" anchor="ctr">
+            <a:spAutoFit/>
+          </a:bodyPr>
+          <a:lstStyle/>
+          <a:p>
+            <a:pPr algn="l">
+              <a:lnSpc>
+                <a:spcPct val="110000"/>
+              </a:lnSpc>
+            </a:pPr>
+            <a:r>
+              <a:rPr sz="1050" b="1">
+                <a:solidFill>
+                  <a:srgbClr val="141414"/>
+                </a:solidFill>
+                <a:latin typeface="微软雅黑"/>
+                <a:ea typeface="微软雅黑"/>
+                <a:cs typeface="微软雅黑"/>
+              </a:rPr>
+              <a:t>网络策略封闭</a:t>
+            </a:r>
+          </a:p>
+          <a:p>
+            <a:pPr algn="l">
+              <a:lnSpc>
+                <a:spcPct val="110000"/>
+              </a:lnSpc>
+              <a:spcBef>
+                <a:spcPts val="500"/>
+              </a:spcBef>
+            </a:pPr>
+            <a:r>
+              <a:rPr sz="850" b="0">
+                <a:solidFill>
+                  <a:srgbClr val="5C5C56"/>
+                </a:solidFill>
+                <a:latin typeface="微软雅黑"/>
+                <a:ea typeface="微软雅黑"/>
+                <a:cs typeface="微软雅黑"/>
+              </a:rPr>
+              <a:t>仅允许与固定主机、固定网段通信，绑定静态路由与白名单</a:t>
+            </a:r>
+          </a:p>
+          <a:p>
+            <a:pPr algn="l">
+              <a:lnSpc>
+                <a:spcPct val="110000"/>
+              </a:lnSpc>
+              <a:spcBef>
+                <a:spcPts val="100"/>
+              </a:spcBef>
+            </a:pPr>
+            <a:r>
+              <a:rPr sz="850" b="0">
+                <a:solidFill>
+                  <a:srgbClr val="5C5C56"/>
+                </a:solidFill>
+                <a:latin typeface="微软雅黑"/>
+                <a:ea typeface="微软雅黑"/>
+                <a:cs typeface="微软雅黑"/>
+              </a:rPr>
+              <a:t>外部主机不可达，策略由供应商侧掌握</a:t>
+            </a:r>
+          </a:p>
+        </p:txBody>
+      </p:sp>
+      <p:sp>
+        <p:nvSpPr>
+          <p:cNvPr id="23" name="Rounded Rectangle 22"/>
+          <p:cNvSpPr/>
+          <p:nvPr/>
+        </p:nvSpPr>
+        <p:spPr>
+          <a:xfrm>
+            <a:off x="3044952" y="2999232"/>
+            <a:ext cx="4279392" cy="1280160"/>
+          </a:xfrm>
+          <a:prstGeom prst="roundRect">
+            <a:avLst>
+              <a:gd name="adj" fmla="val 5000"/>
+            </a:avLst>
+          </a:prstGeom>
+          <a:solidFill>
+            <a:srgbClr val="FFFFFF"/>
+          </a:solidFill>
+          <a:ln w="12700">
+            <a:solidFill>
+              <a:srgbClr val="C9C9C2"/>
+            </a:solidFill>
+          </a:ln>
+          <a:effectLst/>
+        </p:spPr>
+        <p:style>
+          <a:lnRef idx="1">
+            <a:schemeClr val="accent1"/>
+          </a:lnRef>
+          <a:fillRef idx="3">
+            <a:schemeClr val="accent1"/>
+          </a:fillRef>
+          <a:effectRef idx="2">
+            <a:schemeClr val="accent1"/>
+          </a:effectRef>
+          <a:fontRef idx="minor">
+            <a:schemeClr val="lt1"/>
+          </a:fontRef>
+        </p:style>
+        <p:txBody>
+          <a:bodyPr rtlCol="0" anchor="ctr" wrap="square"/>
+          <a:lstStyle/>
+          <a:p>
+            <a:pPr algn="ctr"/>
+          </a:p>
+        </p:txBody>
+      </p:sp>
+      <p:sp>
+        <p:nvSpPr>
+          <p:cNvPr id="24" name="Oval 23"/>
+          <p:cNvSpPr/>
+          <p:nvPr/>
+        </p:nvSpPr>
+        <p:spPr>
+          <a:xfrm>
+            <a:off x="3163824" y="3118104"/>
+            <a:ext cx="219456" cy="219456"/>
+          </a:xfrm>
+          <a:prstGeom prst="ellipse">
+            <a:avLst/>
+          </a:prstGeom>
+          <a:solidFill>
+            <a:srgbClr val="8B0F1A"/>
+          </a:solidFill>
+          <a:ln>
+            <a:noFill/>
+          </a:ln>
+          <a:effectLst/>
+        </p:spPr>
+        <p:style>
+          <a:lnRef idx="1">
+            <a:schemeClr val="accent1"/>
+          </a:lnRef>
+          <a:fillRef idx="3">
+            <a:schemeClr val="accent1"/>
+          </a:fillRef>
+          <a:effectRef idx="2">
+            <a:schemeClr val="accent1"/>
+          </a:effectRef>
+          <a:fontRef idx="minor">
+            <a:schemeClr val="lt1"/>
+          </a:fontRef>
+        </p:style>
+        <p:txBody>
+          <a:bodyPr rtlCol="0" anchor="ctr" lIns="18288" rIns="18288" tIns="0" bIns="0"/>
+          <a:lstStyle/>
+          <a:p>
+            <a:pPr algn="ctr">
+              <a:lnSpc>
+                <a:spcPct val="100000"/>
+              </a:lnSpc>
+            </a:pPr>
+            <a:r>
+              <a:rPr sz="850" b="1">
+                <a:solidFill>
+                  <a:srgbClr val="FFFFFF"/>
+                </a:solidFill>
+                <a:latin typeface="微软雅黑"/>
+                <a:ea typeface="微软雅黑"/>
+                <a:cs typeface="微软雅黑"/>
+              </a:rPr>
+              <a:t>3</a:t>
+            </a:r>
+          </a:p>
+        </p:txBody>
+      </p:sp>
+      <p:sp>
+        <p:nvSpPr>
+          <p:cNvPr id="25" name="TextBox 24"/>
+          <p:cNvSpPr txBox="1"/>
+          <p:nvPr/>
+        </p:nvSpPr>
+        <p:spPr>
+          <a:xfrm>
+            <a:off x="3483864" y="3072384"/>
+            <a:ext cx="3730752" cy="1133856"/>
+          </a:xfrm>
+          <a:prstGeom prst="rect">
+            <a:avLst/>
+          </a:prstGeom>
+          <a:noFill/>
+        </p:spPr>
+        <p:txBody>
+          <a:bodyPr wrap="square" lIns="27432" rIns="27432" tIns="9144" bIns="9144" anchor="ctr">
+            <a:spAutoFit/>
+          </a:bodyPr>
+          <a:lstStyle/>
+          <a:p>
+            <a:pPr algn="l">
+              <a:lnSpc>
+                <a:spcPct val="110000"/>
+              </a:lnSpc>
+            </a:pPr>
+            <a:r>
+              <a:rPr sz="1050" b="1">
+                <a:solidFill>
+                  <a:srgbClr val="141414"/>
+                </a:solidFill>
+                <a:latin typeface="微软雅黑"/>
+                <a:ea typeface="微软雅黑"/>
+                <a:cs typeface="微软雅黑"/>
+              </a:rPr>
+              <a:t>无法安装 Runner</a:t>
+            </a:r>
+          </a:p>
+          <a:p>
+            <a:pPr algn="l">
+              <a:lnSpc>
+                <a:spcPct val="110000"/>
+              </a:lnSpc>
+              <a:spcBef>
+                <a:spcPts val="500"/>
+              </a:spcBef>
+            </a:pPr>
+            <a:r>
+              <a:rPr sz="850" b="0">
+                <a:solidFill>
+                  <a:srgbClr val="5C5C56"/>
+                </a:solidFill>
+                <a:latin typeface="微软雅黑"/>
+                <a:ea typeface="微软雅黑"/>
+                <a:cs typeface="微软雅黑"/>
+              </a:rPr>
+              <a:t>交付封闭系统或受控工控机，禁止安装第三方程序</a:t>
+            </a:r>
+          </a:p>
+          <a:p>
+            <a:pPr algn="l">
+              <a:lnSpc>
+                <a:spcPct val="110000"/>
+              </a:lnSpc>
+              <a:spcBef>
+                <a:spcPts val="100"/>
+              </a:spcBef>
+            </a:pPr>
+            <a:r>
+              <a:rPr sz="850" b="0">
+                <a:solidFill>
+                  <a:srgbClr val="5C5C56"/>
+                </a:solidFill>
+                <a:latin typeface="微软雅黑"/>
+                <a:ea typeface="微软雅黑"/>
+                <a:cs typeface="微软雅黑"/>
+              </a:rPr>
+              <a:t>执行代理无法落地，也无法常驻</a:t>
+            </a:r>
+          </a:p>
+        </p:txBody>
+      </p:sp>
+      <p:sp>
+        <p:nvSpPr>
+          <p:cNvPr id="26" name="Rounded Rectangle 25"/>
+          <p:cNvSpPr/>
+          <p:nvPr/>
+        </p:nvSpPr>
+        <p:spPr>
+          <a:xfrm>
+            <a:off x="7516367" y="2999232"/>
+            <a:ext cx="4279392" cy="1280160"/>
+          </a:xfrm>
+          <a:prstGeom prst="roundRect">
+            <a:avLst>
+              <a:gd name="adj" fmla="val 5000"/>
+            </a:avLst>
+          </a:prstGeom>
+          <a:solidFill>
+            <a:srgbClr val="FFFFFF"/>
+          </a:solidFill>
+          <a:ln w="12700">
+            <a:solidFill>
+              <a:srgbClr val="C9C9C2"/>
+            </a:solidFill>
+          </a:ln>
+          <a:effectLst/>
+        </p:spPr>
+        <p:style>
+          <a:lnRef idx="1">
+            <a:schemeClr val="accent1"/>
+          </a:lnRef>
+          <a:fillRef idx="3">
+            <a:schemeClr val="accent1"/>
+          </a:fillRef>
+          <a:effectRef idx="2">
+            <a:schemeClr val="accent1"/>
+          </a:effectRef>
+          <a:fontRef idx="minor">
+            <a:schemeClr val="lt1"/>
+          </a:fontRef>
+        </p:style>
+        <p:txBody>
+          <a:bodyPr rtlCol="0" anchor="ctr" wrap="square"/>
+          <a:lstStyle/>
+          <a:p>
+            <a:pPr algn="ctr"/>
+          </a:p>
+        </p:txBody>
+      </p:sp>
+      <p:sp>
+        <p:nvSpPr>
+          <p:cNvPr id="27" name="Oval 26"/>
+          <p:cNvSpPr/>
+          <p:nvPr/>
+        </p:nvSpPr>
+        <p:spPr>
+          <a:xfrm>
+            <a:off x="7635240" y="3118104"/>
+            <a:ext cx="219456" cy="219456"/>
+          </a:xfrm>
+          <a:prstGeom prst="ellipse">
+            <a:avLst/>
+          </a:prstGeom>
+          <a:solidFill>
+            <a:srgbClr val="8B0F1A"/>
+          </a:solidFill>
+          <a:ln>
+            <a:noFill/>
+          </a:ln>
+          <a:effectLst/>
+        </p:spPr>
+        <p:style>
+          <a:lnRef idx="1">
+            <a:schemeClr val="accent1"/>
+          </a:lnRef>
+          <a:fillRef idx="3">
+            <a:schemeClr val="accent1"/>
+          </a:fillRef>
+          <a:effectRef idx="2">
+            <a:schemeClr val="accent1"/>
+          </a:effectRef>
+          <a:fontRef idx="minor">
+            <a:schemeClr val="lt1"/>
+          </a:fontRef>
+        </p:style>
+        <p:txBody>
+          <a:bodyPr rtlCol="0" anchor="ctr" lIns="18288" rIns="18288" tIns="0" bIns="0"/>
+          <a:lstStyle/>
+          <a:p>
+            <a:pPr algn="ctr">
+              <a:lnSpc>
+                <a:spcPct val="100000"/>
+              </a:lnSpc>
+            </a:pPr>
+            <a:r>
+              <a:rPr sz="850" b="1">
+                <a:solidFill>
+                  <a:srgbClr val="FFFFFF"/>
+                </a:solidFill>
+                <a:latin typeface="微软雅黑"/>
+                <a:ea typeface="微软雅黑"/>
+                <a:cs typeface="微软雅黑"/>
+              </a:rPr>
+              <a:t>4</a:t>
+            </a:r>
+          </a:p>
+        </p:txBody>
+      </p:sp>
+      <p:sp>
+        <p:nvSpPr>
+          <p:cNvPr id="28" name="TextBox 27"/>
+          <p:cNvSpPr txBox="1"/>
+          <p:nvPr/>
+        </p:nvSpPr>
+        <p:spPr>
+          <a:xfrm>
+            <a:off x="7955279" y="3072384"/>
+            <a:ext cx="3730752" cy="1133856"/>
+          </a:xfrm>
+          <a:prstGeom prst="rect">
+            <a:avLst/>
+          </a:prstGeom>
+          <a:noFill/>
+        </p:spPr>
+        <p:txBody>
+          <a:bodyPr wrap="square" lIns="27432" rIns="27432" tIns="9144" bIns="9144" anchor="ctr">
+            <a:spAutoFit/>
+          </a:bodyPr>
+          <a:lstStyle/>
+          <a:p>
+            <a:pPr algn="l">
+              <a:lnSpc>
+                <a:spcPct val="110000"/>
+              </a:lnSpc>
+            </a:pPr>
+            <a:r>
+              <a:rPr sz="1050" b="1">
+                <a:solidFill>
+                  <a:srgbClr val="141414"/>
+                </a:solidFill>
+                <a:latin typeface="微软雅黑"/>
+                <a:ea typeface="微软雅黑"/>
+                <a:cs typeface="微软雅黑"/>
+              </a:rPr>
+              <a:t>无对外接口</a:t>
+            </a:r>
+          </a:p>
+          <a:p>
+            <a:pPr algn="l">
+              <a:lnSpc>
+                <a:spcPct val="110000"/>
+              </a:lnSpc>
+              <a:spcBef>
+                <a:spcPts val="500"/>
+              </a:spcBef>
+            </a:pPr>
+            <a:r>
+              <a:rPr sz="850" b="0">
+                <a:solidFill>
+                  <a:srgbClr val="5C5C56"/>
+                </a:solidFill>
+                <a:latin typeface="微软雅黑"/>
+                <a:ea typeface="微软雅黑"/>
+                <a:cs typeface="微软雅黑"/>
+              </a:rPr>
+              <a:t>仅提供图形界面，无 CLI、API 或协议文档</a:t>
+            </a:r>
+          </a:p>
+          <a:p>
+            <a:pPr algn="l">
+              <a:lnSpc>
+                <a:spcPct val="110000"/>
+              </a:lnSpc>
+              <a:spcBef>
+                <a:spcPts val="100"/>
+              </a:spcBef>
+            </a:pPr>
+            <a:r>
+              <a:rPr sz="850" b="0">
+                <a:solidFill>
+                  <a:srgbClr val="5C5C56"/>
+                </a:solidFill>
+                <a:latin typeface="微软雅黑"/>
+                <a:ea typeface="微软雅黑"/>
+                <a:cs typeface="微软雅黑"/>
+              </a:rPr>
+              <a:t>外部脚本无法驱动其动作，也取不回数据</a:t>
+            </a:r>
+          </a:p>
+        </p:txBody>
+      </p:sp>
+      <p:sp>
+        <p:nvSpPr>
+          <p:cNvPr id="29" name="Rounded Rectangle 28"/>
+          <p:cNvSpPr/>
+          <p:nvPr/>
+        </p:nvSpPr>
+        <p:spPr>
+          <a:xfrm>
+            <a:off x="3044952" y="4480560"/>
+            <a:ext cx="4279392" cy="1280160"/>
+          </a:xfrm>
+          <a:prstGeom prst="roundRect">
+            <a:avLst>
+              <a:gd name="adj" fmla="val 5000"/>
+            </a:avLst>
+          </a:prstGeom>
+          <a:solidFill>
+            <a:srgbClr val="FFFFFF"/>
+          </a:solidFill>
+          <a:ln w="12700">
+            <a:solidFill>
+              <a:srgbClr val="C9C9C2"/>
+            </a:solidFill>
+          </a:ln>
+          <a:effectLst/>
+        </p:spPr>
+        <p:style>
+          <a:lnRef idx="1">
+            <a:schemeClr val="accent1"/>
+          </a:lnRef>
+          <a:fillRef idx="3">
+            <a:schemeClr val="accent1"/>
+          </a:fillRef>
+          <a:effectRef idx="2">
+            <a:schemeClr val="accent1"/>
+          </a:effectRef>
+          <a:fontRef idx="minor">
+            <a:schemeClr val="lt1"/>
+          </a:fontRef>
+        </p:style>
+        <p:txBody>
+          <a:bodyPr rtlCol="0" anchor="ctr" wrap="square"/>
+          <a:lstStyle/>
+          <a:p>
+            <a:pPr algn="ctr"/>
+          </a:p>
+        </p:txBody>
+      </p:sp>
+      <p:sp>
+        <p:nvSpPr>
+          <p:cNvPr id="30" name="Oval 29"/>
+          <p:cNvSpPr/>
+          <p:nvPr/>
+        </p:nvSpPr>
+        <p:spPr>
+          <a:xfrm>
+            <a:off x="3163824" y="4599432"/>
+            <a:ext cx="219456" cy="219456"/>
+          </a:xfrm>
+          <a:prstGeom prst="ellipse">
+            <a:avLst/>
+          </a:prstGeom>
+          <a:solidFill>
+            <a:srgbClr val="8B0F1A"/>
+          </a:solidFill>
+          <a:ln>
+            <a:noFill/>
+          </a:ln>
+          <a:effectLst/>
+        </p:spPr>
+        <p:style>
+          <a:lnRef idx="1">
+            <a:schemeClr val="accent1"/>
+          </a:lnRef>
+          <a:fillRef idx="3">
+            <a:schemeClr val="accent1"/>
+          </a:fillRef>
+          <a:effectRef idx="2">
+            <a:schemeClr val="accent1"/>
+          </a:effectRef>
+          <a:fontRef idx="minor">
+            <a:schemeClr val="lt1"/>
+          </a:fontRef>
+        </p:style>
+        <p:txBody>
+          <a:bodyPr rtlCol="0" anchor="ctr" lIns="18288" rIns="18288" tIns="0" bIns="0"/>
+          <a:lstStyle/>
+          <a:p>
+            <a:pPr algn="ctr">
+              <a:lnSpc>
+                <a:spcPct val="100000"/>
+              </a:lnSpc>
+            </a:pPr>
+            <a:r>
+              <a:rPr sz="850" b="1">
+                <a:solidFill>
+                  <a:srgbClr val="FFFFFF"/>
+                </a:solidFill>
+                <a:latin typeface="微软雅黑"/>
+                <a:ea typeface="微软雅黑"/>
+                <a:cs typeface="微软雅黑"/>
+              </a:rPr>
+              <a:t>5</a:t>
+            </a:r>
+          </a:p>
+        </p:txBody>
+      </p:sp>
+      <p:sp>
+        <p:nvSpPr>
+          <p:cNvPr id="31" name="TextBox 30"/>
+          <p:cNvSpPr txBox="1"/>
+          <p:nvPr/>
+        </p:nvSpPr>
+        <p:spPr>
+          <a:xfrm>
+            <a:off x="3483864" y="4553712"/>
+            <a:ext cx="3730752" cy="1133856"/>
+          </a:xfrm>
+          <a:prstGeom prst="rect">
+            <a:avLst/>
+          </a:prstGeom>
+          <a:noFill/>
+        </p:spPr>
+        <p:txBody>
+          <a:bodyPr wrap="square" lIns="27432" rIns="27432" tIns="9144" bIns="9144" anchor="ctr">
+            <a:spAutoFit/>
+          </a:bodyPr>
+          <a:lstStyle/>
+          <a:p>
+            <a:pPr algn="l">
+              <a:lnSpc>
+                <a:spcPct val="110000"/>
+              </a:lnSpc>
+            </a:pPr>
+            <a:r>
+              <a:rPr sz="1050" b="1">
+                <a:solidFill>
+                  <a:srgbClr val="141414"/>
+                </a:solidFill>
+                <a:latin typeface="微软雅黑"/>
+                <a:ea typeface="微软雅黑"/>
+                <a:cs typeface="微软雅黑"/>
+              </a:rPr>
+              <a:t>授权绑定 MAC</a:t>
+            </a:r>
+          </a:p>
+          <a:p>
+            <a:pPr algn="l">
+              <a:lnSpc>
+                <a:spcPct val="110000"/>
+              </a:lnSpc>
+              <a:spcBef>
+                <a:spcPts val="500"/>
+              </a:spcBef>
+            </a:pPr>
+            <a:r>
+              <a:rPr sz="850" b="0">
+                <a:solidFill>
+                  <a:srgbClr val="5C5C56"/>
+                </a:solidFill>
+                <a:latin typeface="微软雅黑"/>
+                <a:ea typeface="微软雅黑"/>
+                <a:cs typeface="微软雅黑"/>
+              </a:rPr>
+              <a:t>许可证与网卡 MAC、机器指纹绑定</a:t>
+            </a:r>
+          </a:p>
+          <a:p>
+            <a:pPr algn="l">
+              <a:lnSpc>
+                <a:spcPct val="110000"/>
+              </a:lnSpc>
+              <a:spcBef>
+                <a:spcPts val="100"/>
+              </a:spcBef>
+            </a:pPr>
+            <a:r>
+              <a:rPr sz="850" b="0">
+                <a:solidFill>
+                  <a:srgbClr val="5C5C56"/>
+                </a:solidFill>
+                <a:latin typeface="微软雅黑"/>
+                <a:ea typeface="微软雅黑"/>
+                <a:cs typeface="微软雅黑"/>
+              </a:rPr>
+              <a:t>迁机、换网卡或重装系统即失效</a:t>
+            </a:r>
+          </a:p>
+        </p:txBody>
+      </p:sp>
+      <p:sp>
+        <p:nvSpPr>
+          <p:cNvPr id="32" name="Rounded Rectangle 31"/>
+          <p:cNvSpPr/>
+          <p:nvPr/>
+        </p:nvSpPr>
+        <p:spPr>
+          <a:xfrm>
+            <a:off x="7516367" y="4480560"/>
+            <a:ext cx="4279392" cy="1280160"/>
+          </a:xfrm>
+          <a:prstGeom prst="roundRect">
+            <a:avLst>
+              <a:gd name="adj" fmla="val 5000"/>
+            </a:avLst>
+          </a:prstGeom>
+          <a:solidFill>
+            <a:srgbClr val="FFFFFF"/>
+          </a:solidFill>
+          <a:ln w="12700">
+            <a:solidFill>
+              <a:srgbClr val="C9C9C2"/>
+            </a:solidFill>
+          </a:ln>
+          <a:effectLst/>
+        </p:spPr>
+        <p:style>
+          <a:lnRef idx="1">
+            <a:schemeClr val="accent1"/>
+          </a:lnRef>
+          <a:fillRef idx="3">
+            <a:schemeClr val="accent1"/>
+          </a:fillRef>
+          <a:effectRef idx="2">
+            <a:schemeClr val="accent1"/>
+          </a:effectRef>
+          <a:fontRef idx="minor">
+            <a:schemeClr val="lt1"/>
+          </a:fontRef>
+        </p:style>
+        <p:txBody>
+          <a:bodyPr rtlCol="0" anchor="ctr" wrap="square"/>
+          <a:lstStyle/>
+          <a:p>
+            <a:pPr algn="ctr"/>
+          </a:p>
+        </p:txBody>
+      </p:sp>
+      <p:sp>
+        <p:nvSpPr>
+          <p:cNvPr id="33" name="Oval 32"/>
+          <p:cNvSpPr/>
+          <p:nvPr/>
+        </p:nvSpPr>
+        <p:spPr>
+          <a:xfrm>
+            <a:off x="7635240" y="4599432"/>
+            <a:ext cx="219456" cy="219456"/>
+          </a:xfrm>
+          <a:prstGeom prst="ellipse">
+            <a:avLst/>
+          </a:prstGeom>
+          <a:solidFill>
+            <a:srgbClr val="8B0F1A"/>
+          </a:solidFill>
+          <a:ln>
+            <a:noFill/>
+          </a:ln>
+          <a:effectLst/>
+        </p:spPr>
+        <p:style>
+          <a:lnRef idx="1">
+            <a:schemeClr val="accent1"/>
+          </a:lnRef>
+          <a:fillRef idx="3">
+            <a:schemeClr val="accent1"/>
+          </a:fillRef>
+          <a:effectRef idx="2">
+            <a:schemeClr val="accent1"/>
+          </a:effectRef>
+          <a:fontRef idx="minor">
+            <a:schemeClr val="lt1"/>
+          </a:fontRef>
+        </p:style>
+        <p:txBody>
+          <a:bodyPr rtlCol="0" anchor="ctr" lIns="18288" rIns="18288" tIns="0" bIns="0"/>
+          <a:lstStyle/>
+          <a:p>
+            <a:pPr algn="ctr">
+              <a:lnSpc>
+                <a:spcPct val="100000"/>
+              </a:lnSpc>
+            </a:pPr>
+            <a:r>
+              <a:rPr sz="850" b="1">
+                <a:solidFill>
+                  <a:srgbClr val="FFFFFF"/>
+                </a:solidFill>
+                <a:latin typeface="微软雅黑"/>
+                <a:ea typeface="微软雅黑"/>
+                <a:cs typeface="微软雅黑"/>
+              </a:rPr>
+              <a:t>6</a:t>
+            </a:r>
+          </a:p>
+        </p:txBody>
+      </p:sp>
+      <p:sp>
+        <p:nvSpPr>
+          <p:cNvPr id="34" name="TextBox 33"/>
+          <p:cNvSpPr txBox="1"/>
+          <p:nvPr/>
+        </p:nvSpPr>
+        <p:spPr>
+          <a:xfrm>
+            <a:off x="7955279" y="4553712"/>
+            <a:ext cx="3730752" cy="1133856"/>
+          </a:xfrm>
+          <a:prstGeom prst="rect">
+            <a:avLst/>
+          </a:prstGeom>
+          <a:noFill/>
+        </p:spPr>
+        <p:txBody>
+          <a:bodyPr wrap="square" lIns="27432" rIns="27432" tIns="9144" bIns="9144" anchor="ctr">
+            <a:spAutoFit/>
+          </a:bodyPr>
+          <a:lstStyle/>
+          <a:p>
+            <a:pPr algn="l">
+              <a:lnSpc>
+                <a:spcPct val="110000"/>
+              </a:lnSpc>
+            </a:pPr>
+            <a:r>
+              <a:rPr sz="1050" b="1">
+                <a:solidFill>
+                  <a:srgbClr val="141414"/>
+                </a:solidFill>
+                <a:latin typeface="微软雅黑"/>
+                <a:ea typeface="微软雅黑"/>
+                <a:cs typeface="微软雅黑"/>
+              </a:rPr>
+              <a:t>合规不允许接入</a:t>
+            </a:r>
+          </a:p>
+          <a:p>
+            <a:pPr algn="l">
+              <a:lnSpc>
+                <a:spcPct val="110000"/>
+              </a:lnSpc>
+              <a:spcBef>
+                <a:spcPts val="500"/>
+              </a:spcBef>
+            </a:pPr>
+            <a:r>
+              <a:rPr sz="850" b="0">
+                <a:solidFill>
+                  <a:srgbClr val="5C5C56"/>
+                </a:solidFill>
+                <a:latin typeface="微软雅黑"/>
+                <a:ea typeface="微软雅黑"/>
+                <a:cs typeface="微软雅黑"/>
+              </a:rPr>
+              <a:t>无代码签名、驱动未认证、开放高危端口</a:t>
+            </a:r>
+          </a:p>
+          <a:p>
+            <a:pPr algn="l">
+              <a:lnSpc>
+                <a:spcPct val="110000"/>
+              </a:lnSpc>
+              <a:spcBef>
+                <a:spcPts val="100"/>
+              </a:spcBef>
+            </a:pPr>
+            <a:r>
+              <a:rPr sz="850" b="0">
+                <a:solidFill>
+                  <a:srgbClr val="5C5C56"/>
+                </a:solidFill>
+                <a:latin typeface="微软雅黑"/>
+                <a:ea typeface="微软雅黑"/>
+                <a:cs typeface="微软雅黑"/>
+              </a:rPr>
+              <a:t>触发我方 IT 安全策略，入网审批不通过</a:t>
+            </a:r>
+          </a:p>
+        </p:txBody>
+      </p:sp>
+      <p:sp>
+        <p:nvSpPr>
+          <p:cNvPr id="35" name="Rectangle 34"/>
+          <p:cNvSpPr/>
+          <p:nvPr/>
+        </p:nvSpPr>
+        <p:spPr>
+          <a:xfrm>
+            <a:off x="274320" y="6400800"/>
+            <a:ext cx="11640312" cy="12801"/>
+          </a:xfrm>
+          <a:prstGeom prst="rect">
+            <a:avLst/>
+          </a:prstGeom>
+          <a:solidFill>
+            <a:srgbClr val="D9D6CD"/>
+          </a:solidFill>
+          <a:ln>
+            <a:noFill/>
+          </a:ln>
+          <a:effectLst/>
+        </p:spPr>
+        <p:style>
+          <a:lnRef idx="1">
+            <a:schemeClr val="accent1"/>
+          </a:lnRef>
+          <a:fillRef idx="3">
+            <a:schemeClr val="accent1"/>
+          </a:fillRef>
+          <a:effectRef idx="2">
+            <a:schemeClr val="accent1"/>
+          </a:effectRef>
+          <a:fontRef idx="minor">
+            <a:schemeClr val="lt1"/>
+          </a:fontRef>
+        </p:style>
+        <p:txBody>
+          <a:bodyPr rtlCol="0" anchor="ctr" wrap="square"/>
+          <a:lstStyle/>
+          <a:p>
+            <a:pPr algn="ctr"/>
+          </a:p>
+        </p:txBody>
+      </p:sp>
+      <p:sp>
+        <p:nvSpPr>
+          <p:cNvPr id="36" name="TextBox 35"/>
+          <p:cNvSpPr txBox="1"/>
+          <p:nvPr/>
+        </p:nvSpPr>
+        <p:spPr>
+          <a:xfrm>
+            <a:off x="274320" y="6446520"/>
+            <a:ext cx="6675120" cy="274320"/>
+          </a:xfrm>
+          <a:prstGeom prst="rect">
+            <a:avLst/>
+          </a:prstGeom>
+          <a:noFill/>
+        </p:spPr>
+        <p:txBody>
+          <a:bodyPr wrap="square" lIns="27432" rIns="27432" tIns="9144" bIns="9144" anchor="ctr">
+            <a:spAutoFit/>
+          </a:bodyPr>
+          <a:lstStyle/>
+          <a:p>
+            <a:pPr algn="l">
+              <a:lnSpc>
+                <a:spcPct val="110000"/>
+              </a:lnSpc>
+            </a:pPr>
+            <a:r>
+              <a:rPr sz="850" b="0">
+                <a:solidFill>
+                  <a:srgbClr val="5C5C56"/>
+                </a:solidFill>
+                <a:latin typeface="微软雅黑"/>
+                <a:ea typeface="微软雅黑"/>
+                <a:cs typeface="微软雅黑"/>
+              </a:rPr>
+              <a:t>红色虚线为我方无法单方面突破的接入边界；边界右侧的问题多需供应商配合或在我方侧改造</a:t>
+            </a:r>
+          </a:p>
+        </p:txBody>
+      </p:sp>
+      <p:sp>
+        <p:nvSpPr>
+          <p:cNvPr id="37" name="TextBox 36"/>
+          <p:cNvSpPr txBox="1"/>
+          <p:nvPr/>
+        </p:nvSpPr>
+        <p:spPr>
+          <a:xfrm>
+            <a:off x="7040880" y="6446520"/>
+            <a:ext cx="4873752" cy="274320"/>
+          </a:xfrm>
+          <a:prstGeom prst="rect">
+            <a:avLst/>
+          </a:prstGeom>
+          <a:noFill/>
+        </p:spPr>
+        <p:txBody>
+          <a:bodyPr wrap="square" lIns="27432" rIns="27432" tIns="9144" bIns="9144" anchor="ctr">
+            <a:spAutoFit/>
+          </a:bodyPr>
+          <a:lstStyle/>
+          <a:p>
+            <a:pPr algn="r">
+              <a:lnSpc>
+                <a:spcPct val="110000"/>
+              </a:lnSpc>
+            </a:pPr>
+            <a:r>
+              <a:rPr sz="850" b="0">
+                <a:solidFill>
+                  <a:srgbClr val="5C5C56"/>
+                </a:solidFill>
+                <a:latin typeface="微软雅黑"/>
+                <a:ea typeface="微软雅黑"/>
+                <a:cs typeface="微软雅黑"/>
+              </a:rPr>
+              <a:t>六类问题常叠加出现，同一套供应商软件通常同时命中 2 项以上</a:t>
+            </a:r>
+          </a:p>
+        </p:txBody>
+      </p:sp>
+    </p:spTree>
+  </p:cSld>
+  <p:clrMapOvr>
+    <a:masterClrMapping/>
+  </p:clrMapOvr>
+</p:sld>
+</file>
+
+<file path=ppt/slides/slide2.xml><?xml version="1.0" encoding="utf-8"?>
+<p:sld xmlns:a="http://schemas.openxmlformats.org/drawingml/2006/main" xmlns:p="http://schemas.openxmlformats.org/presentationml/2006/main" xmlns:r="http://schemas.openxmlformats.org/officeDocument/2006/relationships">
+  <p:cSld>
+    <p:spTree>
+      <p:nvGrpSpPr>
+        <p:cNvPr id="1" name=""/>
+        <p:cNvGrpSpPr/>
+        <p:nvPr/>
+      </p:nvGrpSpPr>
+      <p:grpSpPr/>
+      <p:sp>
+        <p:nvSpPr>
+          <p:cNvPr id="2" name="TextBox 1"/>
+          <p:cNvSpPr txBox="1"/>
+          <p:nvPr/>
+        </p:nvSpPr>
+        <p:spPr>
+          <a:xfrm>
+            <a:off x="274320" y="201168"/>
+            <a:ext cx="10881360" cy="457200"/>
+          </a:xfrm>
+          <a:prstGeom prst="rect">
+            <a:avLst/>
+          </a:prstGeom>
+          <a:noFill/>
+        </p:spPr>
+        <p:txBody>
+          <a:bodyPr wrap="square" lIns="27432" rIns="27432" tIns="9144" bIns="9144" anchor="ctr">
+            <a:spAutoFit/>
+          </a:bodyPr>
+          <a:lstStyle/>
+          <a:p>
+            <a:pPr algn="l">
+              <a:lnSpc>
+                <a:spcPct val="110000"/>
+              </a:lnSpc>
+            </a:pPr>
+            <a:r>
+              <a:rPr sz="2400" b="1">
+                <a:solidFill>
+                  <a:srgbClr val="141414"/>
+                </a:solidFill>
+                <a:latin typeface="微软雅黑"/>
+                <a:ea typeface="微软雅黑"/>
+                <a:cs typeface="微软雅黑"/>
+              </a:rPr>
+              <a:t>问题背景（二）· 六类问题的机理图解</a:t>
+            </a:r>
+          </a:p>
+        </p:txBody>
+      </p:sp>
+      <p:sp>
+        <p:nvSpPr>
+          <p:cNvPr id="3" name="TextBox 2"/>
+          <p:cNvSpPr txBox="1"/>
+          <p:nvPr/>
+        </p:nvSpPr>
+        <p:spPr>
+          <a:xfrm>
+            <a:off x="274320" y="658368"/>
+            <a:ext cx="11155680" cy="310896"/>
+          </a:xfrm>
+          <a:prstGeom prst="rect">
+            <a:avLst/>
+          </a:prstGeom>
+          <a:noFill/>
+        </p:spPr>
+        <p:txBody>
+          <a:bodyPr wrap="square" lIns="27432" rIns="27432" tIns="9144" bIns="9144" anchor="ctr">
+            <a:spAutoFit/>
+          </a:bodyPr>
+          <a:lstStyle/>
+          <a:p>
+            <a:pPr algn="l">
+              <a:lnSpc>
+                <a:spcPct val="110000"/>
+              </a:lnSpc>
+            </a:pPr>
+            <a:r>
+              <a:rPr sz="1050" b="0">
+                <a:solidFill>
+                  <a:srgbClr val="5C5C56"/>
+                </a:solidFill>
+                <a:latin typeface="微软雅黑"/>
+                <a:ea typeface="微软雅黑"/>
+                <a:cs typeface="微软雅黑"/>
+              </a:rPr>
+              <a:t>逐项还原阻断发生的环节：端口被占、策略拒绝、装不了代理、没有接口、授权绑机、合规不通过</a:t>
+            </a:r>
+          </a:p>
+        </p:txBody>
+      </p:sp>
+      <p:sp>
+        <p:nvSpPr>
+          <p:cNvPr id="4" name="Rectangle 3"/>
+          <p:cNvSpPr/>
+          <p:nvPr/>
+        </p:nvSpPr>
+        <p:spPr>
+          <a:xfrm>
+            <a:off x="274320" y="987552"/>
+            <a:ext cx="11640312" cy="25603"/>
+          </a:xfrm>
+          <a:prstGeom prst="rect">
+            <a:avLst/>
+          </a:prstGeom>
+          <a:solidFill>
+            <a:srgbClr val="8B0F1A"/>
+          </a:solidFill>
+          <a:ln>
+            <a:noFill/>
+          </a:ln>
+          <a:effectLst/>
+        </p:spPr>
+        <p:style>
+          <a:lnRef idx="1">
+            <a:schemeClr val="accent1"/>
+          </a:lnRef>
+          <a:fillRef idx="3">
+            <a:schemeClr val="accent1"/>
+          </a:fillRef>
+          <a:effectRef idx="2">
+            <a:schemeClr val="accent1"/>
+          </a:effectRef>
+          <a:fontRef idx="minor">
+            <a:schemeClr val="lt1"/>
+          </a:fontRef>
+        </p:style>
+        <p:txBody>
+          <a:bodyPr rtlCol="0" anchor="ctr" wrap="square"/>
+          <a:lstStyle/>
+          <a:p>
+            <a:pPr algn="ctr"/>
+          </a:p>
+        </p:txBody>
+      </p:sp>
+      <p:sp>
+        <p:nvSpPr>
+          <p:cNvPr id="5" name="Rounded Rectangle 4"/>
+          <p:cNvSpPr/>
+          <p:nvPr/>
+        </p:nvSpPr>
+        <p:spPr>
+          <a:xfrm>
+            <a:off x="274320" y="1371600"/>
+            <a:ext cx="3694176" cy="2240280"/>
+          </a:xfrm>
+          <a:prstGeom prst="roundRect">
+            <a:avLst>
+              <a:gd name="adj" fmla="val 4000"/>
+            </a:avLst>
+          </a:prstGeom>
+          <a:solidFill>
+            <a:srgbClr val="FFFFFF"/>
+          </a:solidFill>
+          <a:ln w="12700">
+            <a:solidFill>
+              <a:srgbClr val="C9C9C2"/>
+            </a:solidFill>
+          </a:ln>
+          <a:effectLst/>
+        </p:spPr>
+        <p:style>
+          <a:lnRef idx="1">
+            <a:schemeClr val="accent1"/>
+          </a:lnRef>
+          <a:fillRef idx="3">
+            <a:schemeClr val="accent1"/>
+          </a:fillRef>
+          <a:effectRef idx="2">
+            <a:schemeClr val="accent1"/>
+          </a:effectRef>
+          <a:fontRef idx="minor">
+            <a:schemeClr val="lt1"/>
+          </a:fontRef>
+        </p:style>
+        <p:txBody>
+          <a:bodyPr rtlCol="0" anchor="ctr" wrap="square"/>
+          <a:lstStyle/>
+          <a:p>
+            <a:pPr algn="ctr"/>
+          </a:p>
+        </p:txBody>
+      </p:sp>
+      <p:sp>
+        <p:nvSpPr>
+          <p:cNvPr id="6" name="TextBox 5"/>
+          <p:cNvSpPr txBox="1"/>
+          <p:nvPr/>
+        </p:nvSpPr>
+        <p:spPr>
+          <a:xfrm>
+            <a:off x="384048" y="1444752"/>
+            <a:ext cx="3474720" cy="274320"/>
+          </a:xfrm>
+          <a:prstGeom prst="rect">
+            <a:avLst/>
+          </a:prstGeom>
+          <a:noFill/>
+        </p:spPr>
+        <p:txBody>
+          <a:bodyPr wrap="square" lIns="27432" rIns="27432" tIns="9144" bIns="9144" anchor="ctr">
+            <a:spAutoFit/>
+          </a:bodyPr>
+          <a:lstStyle/>
+          <a:p>
+            <a:pPr algn="l">
+              <a:lnSpc>
+                <a:spcPct val="110000"/>
+              </a:lnSpc>
+            </a:pPr>
+            <a:r>
+              <a:rPr sz="1000" b="1">
+                <a:solidFill>
+                  <a:srgbClr val="141414"/>
+                </a:solidFill>
+                <a:latin typeface="微软雅黑"/>
+                <a:ea typeface="微软雅黑"/>
+                <a:cs typeface="微软雅黑"/>
+              </a:rPr>
+              <a:t>① 网口数量受限</a:t>
+            </a:r>
+          </a:p>
+        </p:txBody>
+      </p:sp>
+      <p:sp>
+        <p:nvSpPr>
+          <p:cNvPr id="7" name="TextBox 6"/>
+          <p:cNvSpPr txBox="1"/>
+          <p:nvPr/>
+        </p:nvSpPr>
+        <p:spPr>
+          <a:xfrm>
+            <a:off x="384048" y="2834640"/>
+            <a:ext cx="3474720" cy="694944"/>
+          </a:xfrm>
+          <a:prstGeom prst="rect">
+            <a:avLst/>
+          </a:prstGeom>
+          <a:noFill/>
+        </p:spPr>
+        <p:txBody>
+          <a:bodyPr wrap="square" lIns="27432" rIns="27432" tIns="9144" bIns="9144" anchor="t">
+            <a:spAutoFit/>
+          </a:bodyPr>
+          <a:lstStyle/>
+          <a:p>
+            <a:pPr algn="l">
+              <a:lnSpc>
+                <a:spcPct val="110000"/>
+              </a:lnSpc>
+            </a:pPr>
+            <a:r>
+              <a:rPr sz="850" b="0">
+                <a:solidFill>
+                  <a:srgbClr val="5C5C56"/>
+                </a:solidFill>
+                <a:latin typeface="微软雅黑"/>
+                <a:ea typeface="微软雅黑"/>
+                <a:cs typeface="微软雅黑"/>
+              </a:rPr>
+              <a:t>设备仅 1 个业务网口，且已被既有测试网占满；ATE 侧无法在同一条链路上并存接入</a:t>
+            </a:r>
+          </a:p>
+        </p:txBody>
+      </p:sp>
+      <p:sp>
+        <p:nvSpPr>
+          <p:cNvPr id="8" name="Rounded Rectangle 7"/>
+          <p:cNvSpPr/>
+          <p:nvPr/>
+        </p:nvSpPr>
+        <p:spPr>
+          <a:xfrm>
+            <a:off x="384048" y="1920240"/>
+            <a:ext cx="1188720" cy="502920"/>
+          </a:xfrm>
+          <a:prstGeom prst="roundRect">
+            <a:avLst>
+              <a:gd name="adj" fmla="val 5000"/>
+            </a:avLst>
+          </a:prstGeom>
+          <a:solidFill>
+            <a:srgbClr val="ECECEC"/>
+          </a:solidFill>
+          <a:ln w="11430">
+            <a:solidFill>
+              <a:srgbClr val="C9C9C2"/>
+            </a:solidFill>
+          </a:ln>
+          <a:effectLst/>
+        </p:spPr>
+        <p:style>
+          <a:lnRef idx="1">
+            <a:schemeClr val="accent1"/>
+          </a:lnRef>
+          <a:fillRef idx="3">
+            <a:schemeClr val="accent1"/>
+          </a:fillRef>
+          <a:effectRef idx="2">
+            <a:schemeClr val="accent1"/>
+          </a:effectRef>
+          <a:fontRef idx="minor">
+            <a:schemeClr val="lt1"/>
+          </a:fontRef>
+        </p:style>
+        <p:txBody>
+          <a:bodyPr rtlCol="0" anchor="ctr" wrap="square" lIns="18288" rIns="18288" tIns="0" bIns="0"/>
+          <a:lstStyle/>
+          <a:p>
+            <a:pPr algn="ctr">
+              <a:lnSpc>
+                <a:spcPct val="100000"/>
+              </a:lnSpc>
+            </a:pPr>
+            <a:r>
+              <a:rPr sz="800" b="0">
+                <a:solidFill>
+                  <a:srgbClr val="141414"/>
+                </a:solidFill>
+                <a:latin typeface="微软雅黑"/>
+                <a:ea typeface="微软雅黑"/>
+                <a:cs typeface="微软雅黑"/>
+              </a:rPr>
+              <a:t>供应商设备</a:t>
+            </a:r>
+          </a:p>
+        </p:txBody>
+      </p:sp>
+      <p:sp>
+        <p:nvSpPr>
+          <p:cNvPr id="9" name="Rectangle 8"/>
+          <p:cNvSpPr/>
+          <p:nvPr/>
+        </p:nvSpPr>
+        <p:spPr>
+          <a:xfrm>
+            <a:off x="1572768" y="2084831"/>
+            <a:ext cx="100584" cy="164592"/>
+          </a:xfrm>
+          <a:prstGeom prst="rect">
+            <a:avLst/>
+          </a:prstGeom>
+          <a:solidFill>
+            <a:srgbClr val="8B0F1A"/>
+          </a:solidFill>
+          <a:ln>
+            <a:noFill/>
+          </a:ln>
+          <a:effectLst/>
+        </p:spPr>
+        <p:style>
+          <a:lnRef idx="1">
+            <a:schemeClr val="accent1"/>
+          </a:lnRef>
+          <a:fillRef idx="3">
+            <a:schemeClr val="accent1"/>
+          </a:fillRef>
+          <a:effectRef idx="2">
+            <a:schemeClr val="accent1"/>
+          </a:effectRef>
+          <a:fontRef idx="minor">
+            <a:schemeClr val="lt1"/>
+          </a:fontRef>
+        </p:style>
+        <p:txBody>
+          <a:bodyPr rtlCol="0" anchor="ctr" wrap="square"/>
+          <a:lstStyle/>
+          <a:p>
+            <a:pPr algn="ctr"/>
+          </a:p>
+        </p:txBody>
+      </p:sp>
+      <p:cxnSp>
+        <p:nvCxnSpPr>
+          <p:cNvPr id="10" name="Connector 9"/>
+          <p:cNvCxnSpPr/>
+          <p:nvPr/>
+        </p:nvCxnSpPr>
+        <p:spPr>
+          <a:xfrm>
+            <a:off x="1673351" y="2167128"/>
+            <a:ext cx="795528" cy="0"/>
+          </a:xfrm>
+          <a:prstGeom prst="line">
+            <a:avLst/>
+          </a:prstGeom>
+          <a:ln w="12700">
+            <a:solidFill>
+              <a:srgbClr val="5C5C56"/>
+            </a:solidFill>
+            <a:prstDash val="dash"/>
+          </a:ln>
+        </p:spPr>
+        <p:style>
+          <a:lnRef idx="2">
+            <a:schemeClr val="accent1"/>
+          </a:lnRef>
+          <a:fillRef idx="0">
+            <a:schemeClr val="accent1"/>
+          </a:fillRef>
+          <a:effectRef idx="1">
+            <a:schemeClr val="accent1"/>
+          </a:effectRef>
+          <a:fontRef idx="minor">
+            <a:schemeClr val="tx1"/>
+          </a:fontRef>
+        </p:style>
+      </p:cxnSp>
+      <p:sp>
+        <p:nvSpPr>
+          <p:cNvPr id="11" name="Rounded Rectangle 10"/>
+          <p:cNvSpPr/>
+          <p:nvPr/>
+        </p:nvSpPr>
+        <p:spPr>
+          <a:xfrm>
+            <a:off x="2468879" y="1920240"/>
+            <a:ext cx="1143000" cy="502920"/>
+          </a:xfrm>
+          <a:prstGeom prst="roundRect">
+            <a:avLst>
+              <a:gd name="adj" fmla="val 5000"/>
+            </a:avLst>
+          </a:prstGeom>
+          <a:solidFill>
+            <a:srgbClr val="FFFFFF"/>
+          </a:solidFill>
+          <a:ln w="12700">
+            <a:solidFill>
+              <a:srgbClr val="8B0F1A"/>
+            </a:solidFill>
+          </a:ln>
+          <a:effectLst/>
+        </p:spPr>
+        <p:style>
+          <a:lnRef idx="1">
+            <a:schemeClr val="accent1"/>
+          </a:lnRef>
+          <a:fillRef idx="3">
+            <a:schemeClr val="accent1"/>
+          </a:fillRef>
+          <a:effectRef idx="2">
+            <a:schemeClr val="accent1"/>
+          </a:effectRef>
+          <a:fontRef idx="minor">
+            <a:schemeClr val="lt1"/>
+          </a:fontRef>
+        </p:style>
+        <p:txBody>
+          <a:bodyPr rtlCol="0" anchor="ctr" wrap="square" lIns="18288" rIns="18288" tIns="0" bIns="0"/>
+          <a:lstStyle/>
+          <a:p>
+            <a:pPr algn="ctr">
+              <a:lnSpc>
+                <a:spcPct val="100000"/>
+              </a:lnSpc>
+            </a:pPr>
+            <a:r>
+              <a:rPr sz="800" b="0">
+                <a:solidFill>
+                  <a:srgbClr val="141414"/>
+                </a:solidFill>
+                <a:latin typeface="微软雅黑"/>
+                <a:ea typeface="微软雅黑"/>
+                <a:cs typeface="微软雅黑"/>
+              </a:rPr>
+              <a:t>ATE 网络</a:t>
+            </a:r>
+          </a:p>
+        </p:txBody>
+      </p:sp>
+      <p:sp>
+        <p:nvSpPr>
+          <p:cNvPr id="12" name="TextBox 11"/>
+          <p:cNvSpPr txBox="1"/>
+          <p:nvPr/>
+        </p:nvSpPr>
+        <p:spPr>
+          <a:xfrm>
+            <a:off x="1947672" y="1892807"/>
+            <a:ext cx="256032" cy="274320"/>
+          </a:xfrm>
+          <a:prstGeom prst="rect">
+            <a:avLst/>
+          </a:prstGeom>
+          <a:noFill/>
+        </p:spPr>
+        <p:txBody>
+          <a:bodyPr wrap="square" lIns="27432" rIns="27432" tIns="9144" bIns="9144" anchor="ctr">
+            <a:spAutoFit/>
+          </a:bodyPr>
+          <a:lstStyle/>
+          <a:p>
+            <a:pPr algn="ctr">
+              <a:lnSpc>
+                <a:spcPct val="110000"/>
+              </a:lnSpc>
+            </a:pPr>
+            <a:r>
+              <a:rPr sz="1500" b="1">
+                <a:solidFill>
+                  <a:srgbClr val="8B0F1A"/>
+                </a:solidFill>
+                <a:latin typeface="微软雅黑"/>
+                <a:ea typeface="微软雅黑"/>
+                <a:cs typeface="微软雅黑"/>
+              </a:rPr>
+              <a:t>×</a:t>
+            </a:r>
+          </a:p>
+        </p:txBody>
+      </p:sp>
+      <p:sp>
+        <p:nvSpPr>
+          <p:cNvPr id="13" name="TextBox 12"/>
+          <p:cNvSpPr txBox="1"/>
+          <p:nvPr/>
+        </p:nvSpPr>
+        <p:spPr>
+          <a:xfrm>
+            <a:off x="1627632" y="2468880"/>
+            <a:ext cx="960120" cy="182880"/>
+          </a:xfrm>
+          <a:prstGeom prst="rect">
+            <a:avLst/>
+          </a:prstGeom>
+          <a:noFill/>
+        </p:spPr>
+        <p:txBody>
+          <a:bodyPr wrap="square" lIns="27432" rIns="27432" tIns="9144" bIns="9144" anchor="ctr">
+            <a:spAutoFit/>
+          </a:bodyPr>
+          <a:lstStyle/>
+          <a:p>
+            <a:pPr algn="ctr">
+              <a:lnSpc>
+                <a:spcPct val="110000"/>
+              </a:lnSpc>
+            </a:pPr>
+            <a:r>
+              <a:rPr sz="750" b="0">
+                <a:solidFill>
+                  <a:srgbClr val="8B0F1A"/>
+                </a:solidFill>
+                <a:latin typeface="微软雅黑"/>
+                <a:ea typeface="微软雅黑"/>
+                <a:cs typeface="微软雅黑"/>
+              </a:rPr>
+              <a:t>唯一网口已占用</a:t>
+            </a:r>
+          </a:p>
+        </p:txBody>
+      </p:sp>
+      <p:sp>
+        <p:nvSpPr>
+          <p:cNvPr id="14" name="Rounded Rectangle 13"/>
+          <p:cNvSpPr/>
+          <p:nvPr/>
+        </p:nvSpPr>
+        <p:spPr>
+          <a:xfrm>
+            <a:off x="4224528" y="1371600"/>
+            <a:ext cx="3694176" cy="2240280"/>
+          </a:xfrm>
+          <a:prstGeom prst="roundRect">
+            <a:avLst>
+              <a:gd name="adj" fmla="val 4000"/>
+            </a:avLst>
+          </a:prstGeom>
+          <a:solidFill>
+            <a:srgbClr val="FFFFFF"/>
+          </a:solidFill>
+          <a:ln w="12700">
+            <a:solidFill>
+              <a:srgbClr val="C9C9C2"/>
+            </a:solidFill>
+          </a:ln>
+          <a:effectLst/>
+        </p:spPr>
+        <p:style>
+          <a:lnRef idx="1">
+            <a:schemeClr val="accent1"/>
+          </a:lnRef>
+          <a:fillRef idx="3">
+            <a:schemeClr val="accent1"/>
+          </a:fillRef>
+          <a:effectRef idx="2">
+            <a:schemeClr val="accent1"/>
+          </a:effectRef>
+          <a:fontRef idx="minor">
+            <a:schemeClr val="lt1"/>
+          </a:fontRef>
+        </p:style>
+        <p:txBody>
+          <a:bodyPr rtlCol="0" anchor="ctr" wrap="square"/>
+          <a:lstStyle/>
+          <a:p>
+            <a:pPr algn="ctr"/>
+          </a:p>
+        </p:txBody>
+      </p:sp>
+      <p:sp>
+        <p:nvSpPr>
+          <p:cNvPr id="15" name="TextBox 14"/>
+          <p:cNvSpPr txBox="1"/>
+          <p:nvPr/>
+        </p:nvSpPr>
+        <p:spPr>
+          <a:xfrm>
+            <a:off x="4334256" y="1444752"/>
+            <a:ext cx="3474720" cy="274320"/>
+          </a:xfrm>
+          <a:prstGeom prst="rect">
+            <a:avLst/>
+          </a:prstGeom>
+          <a:noFill/>
+        </p:spPr>
+        <p:txBody>
+          <a:bodyPr wrap="square" lIns="27432" rIns="27432" tIns="9144" bIns="9144" anchor="ctr">
+            <a:spAutoFit/>
+          </a:bodyPr>
+          <a:lstStyle/>
+          <a:p>
+            <a:pPr algn="l">
+              <a:lnSpc>
+                <a:spcPct val="110000"/>
+              </a:lnSpc>
+            </a:pPr>
+            <a:r>
+              <a:rPr sz="1000" b="1">
+                <a:solidFill>
+                  <a:srgbClr val="141414"/>
+                </a:solidFill>
+                <a:latin typeface="微软雅黑"/>
+                <a:ea typeface="微软雅黑"/>
+                <a:cs typeface="微软雅黑"/>
+              </a:rPr>
+              <a:t>② 网络策略封闭</a:t>
+            </a:r>
+          </a:p>
+        </p:txBody>
+      </p:sp>
+      <p:sp>
+        <p:nvSpPr>
+          <p:cNvPr id="16" name="TextBox 15"/>
+          <p:cNvSpPr txBox="1"/>
+          <p:nvPr/>
+        </p:nvSpPr>
+        <p:spPr>
+          <a:xfrm>
+            <a:off x="4334256" y="2834640"/>
+            <a:ext cx="3474720" cy="694944"/>
+          </a:xfrm>
+          <a:prstGeom prst="rect">
+            <a:avLst/>
+          </a:prstGeom>
+          <a:noFill/>
+        </p:spPr>
+        <p:txBody>
+          <a:bodyPr wrap="square" lIns="27432" rIns="27432" tIns="9144" bIns="9144" anchor="t">
+            <a:spAutoFit/>
+          </a:bodyPr>
+          <a:lstStyle/>
+          <a:p>
+            <a:pPr algn="l">
+              <a:lnSpc>
+                <a:spcPct val="110000"/>
+              </a:lnSpc>
+            </a:pPr>
+            <a:r>
+              <a:rPr sz="850" b="0">
+                <a:solidFill>
+                  <a:srgbClr val="5C5C56"/>
+                </a:solidFill>
+                <a:latin typeface="微软雅黑"/>
+                <a:ea typeface="微软雅黑"/>
+                <a:cs typeface="微软雅黑"/>
+              </a:rPr>
+              <a:t>设备侧白名单只放行指定主机与网段，ATE 主机既不在白名单、也无法修改设备策略</a:t>
+            </a:r>
+          </a:p>
+        </p:txBody>
+      </p:sp>
+      <p:sp>
+        <p:nvSpPr>
+          <p:cNvPr id="17" name="Rounded Rectangle 16"/>
+          <p:cNvSpPr/>
+          <p:nvPr/>
+        </p:nvSpPr>
+        <p:spPr>
+          <a:xfrm>
+            <a:off x="4334256" y="1920240"/>
+            <a:ext cx="1078992" cy="502920"/>
+          </a:xfrm>
+          <a:prstGeom prst="roundRect">
+            <a:avLst>
+              <a:gd name="adj" fmla="val 5000"/>
+            </a:avLst>
+          </a:prstGeom>
+          <a:solidFill>
+            <a:srgbClr val="FFFFFF"/>
+          </a:solidFill>
+          <a:ln w="12700">
+            <a:solidFill>
+              <a:srgbClr val="8B0F1A"/>
+            </a:solidFill>
+          </a:ln>
+          <a:effectLst/>
+        </p:spPr>
+        <p:style>
+          <a:lnRef idx="1">
+            <a:schemeClr val="accent1"/>
+          </a:lnRef>
+          <a:fillRef idx="3">
+            <a:schemeClr val="accent1"/>
+          </a:fillRef>
+          <a:effectRef idx="2">
+            <a:schemeClr val="accent1"/>
+          </a:effectRef>
+          <a:fontRef idx="minor">
+            <a:schemeClr val="lt1"/>
+          </a:fontRef>
+        </p:style>
+        <p:txBody>
+          <a:bodyPr rtlCol="0" anchor="ctr" wrap="square" lIns="18288" rIns="18288" tIns="0" bIns="0"/>
+          <a:lstStyle/>
+          <a:p>
+            <a:pPr algn="ctr">
+              <a:lnSpc>
+                <a:spcPct val="100000"/>
+              </a:lnSpc>
+            </a:pPr>
+            <a:r>
+              <a:rPr sz="800" b="0">
+                <a:solidFill>
+                  <a:srgbClr val="141414"/>
+                </a:solidFill>
+                <a:latin typeface="微软雅黑"/>
+                <a:ea typeface="微软雅黑"/>
+                <a:cs typeface="微软雅黑"/>
+              </a:rPr>
+              <a:t>ATE 10.0.5.99</a:t>
+            </a:r>
+          </a:p>
+        </p:txBody>
+      </p:sp>
+      <p:cxnSp>
+        <p:nvCxnSpPr>
+          <p:cNvPr id="18" name="Connector 17"/>
+          <p:cNvCxnSpPr/>
+          <p:nvPr/>
+        </p:nvCxnSpPr>
+        <p:spPr>
+          <a:xfrm>
+            <a:off x="5413248" y="2167128"/>
+            <a:ext cx="822960" cy="0"/>
+          </a:xfrm>
+          <a:prstGeom prst="line">
+            <a:avLst/>
+          </a:prstGeom>
+          <a:ln w="12700">
+            <a:solidFill>
+              <a:srgbClr val="5C5C56"/>
+            </a:solidFill>
+            <a:prstDash val="dash"/>
+          </a:ln>
+        </p:spPr>
+        <p:style>
+          <a:lnRef idx="2">
+            <a:schemeClr val="accent1"/>
+          </a:lnRef>
+          <a:fillRef idx="0">
+            <a:schemeClr val="accent1"/>
+          </a:fillRef>
+          <a:effectRef idx="1">
+            <a:schemeClr val="accent1"/>
+          </a:effectRef>
+          <a:fontRef idx="minor">
+            <a:schemeClr val="tx1"/>
+          </a:fontRef>
+        </p:style>
+      </p:cxnSp>
+      <p:sp>
+        <p:nvSpPr>
+          <p:cNvPr id="19" name="Rounded Rectangle 18"/>
+          <p:cNvSpPr/>
+          <p:nvPr/>
+        </p:nvSpPr>
+        <p:spPr>
+          <a:xfrm>
+            <a:off x="6236208" y="1920240"/>
+            <a:ext cx="1298448" cy="502920"/>
+          </a:xfrm>
+          <a:prstGeom prst="roundRect">
+            <a:avLst>
+              <a:gd name="adj" fmla="val 5000"/>
+            </a:avLst>
+          </a:prstGeom>
+          <a:solidFill>
+            <a:srgbClr val="ECECEC"/>
+          </a:solidFill>
+          <a:ln w="11430">
+            <a:solidFill>
+              <a:srgbClr val="C9C9C2"/>
+            </a:solidFill>
+          </a:ln>
+          <a:effectLst/>
+        </p:spPr>
+        <p:style>
+          <a:lnRef idx="1">
+            <a:schemeClr val="accent1"/>
+          </a:lnRef>
+          <a:fillRef idx="3">
+            <a:schemeClr val="accent1"/>
+          </a:fillRef>
+          <a:effectRef idx="2">
+            <a:schemeClr val="accent1"/>
+          </a:effectRef>
+          <a:fontRef idx="minor">
+            <a:schemeClr val="lt1"/>
+          </a:fontRef>
+        </p:style>
+        <p:txBody>
+          <a:bodyPr rtlCol="0" anchor="ctr" wrap="square" lIns="18288" rIns="18288" tIns="0" bIns="0"/>
+          <a:lstStyle/>
+          <a:p>
+            <a:pPr algn="ctr">
+              <a:lnSpc>
+                <a:spcPct val="100000"/>
+              </a:lnSpc>
+            </a:pPr>
+            <a:r>
+              <a:rPr sz="800" b="0">
+                <a:solidFill>
+                  <a:srgbClr val="141414"/>
+                </a:solidFill>
+                <a:latin typeface="微软雅黑"/>
+                <a:ea typeface="微软雅黑"/>
+                <a:cs typeface="微软雅黑"/>
+              </a:rPr>
+              <a:t>设备（白名单）</a:t>
+            </a:r>
+          </a:p>
+        </p:txBody>
+      </p:sp>
+      <p:sp>
+        <p:nvSpPr>
+          <p:cNvPr id="20" name="TextBox 19"/>
+          <p:cNvSpPr txBox="1"/>
+          <p:nvPr/>
+        </p:nvSpPr>
+        <p:spPr>
+          <a:xfrm>
+            <a:off x="5696712" y="1892807"/>
+            <a:ext cx="256032" cy="274320"/>
+          </a:xfrm>
+          <a:prstGeom prst="rect">
+            <a:avLst/>
+          </a:prstGeom>
+          <a:noFill/>
+        </p:spPr>
+        <p:txBody>
+          <a:bodyPr wrap="square" lIns="27432" rIns="27432" tIns="9144" bIns="9144" anchor="ctr">
+            <a:spAutoFit/>
+          </a:bodyPr>
+          <a:lstStyle/>
+          <a:p>
+            <a:pPr algn="ctr">
+              <a:lnSpc>
+                <a:spcPct val="110000"/>
+              </a:lnSpc>
+            </a:pPr>
+            <a:r>
+              <a:rPr sz="1500" b="1">
+                <a:solidFill>
+                  <a:srgbClr val="8B0F1A"/>
+                </a:solidFill>
+                <a:latin typeface="微软雅黑"/>
+                <a:ea typeface="微软雅黑"/>
+                <a:cs typeface="微软雅黑"/>
+              </a:rPr>
+              <a:t>×</a:t>
+            </a:r>
+          </a:p>
+        </p:txBody>
+      </p:sp>
+      <p:sp>
+        <p:nvSpPr>
+          <p:cNvPr id="21" name="TextBox 20"/>
+          <p:cNvSpPr txBox="1"/>
+          <p:nvPr/>
+        </p:nvSpPr>
+        <p:spPr>
+          <a:xfrm>
+            <a:off x="5266944" y="2468880"/>
+            <a:ext cx="1325880" cy="182880"/>
+          </a:xfrm>
+          <a:prstGeom prst="rect">
+            <a:avLst/>
+          </a:prstGeom>
+          <a:noFill/>
+        </p:spPr>
+        <p:txBody>
+          <a:bodyPr wrap="square" lIns="27432" rIns="27432" tIns="9144" bIns="9144" anchor="ctr">
+            <a:spAutoFit/>
+          </a:bodyPr>
+          <a:lstStyle/>
+          <a:p>
+            <a:pPr algn="ctr">
+              <a:lnSpc>
+                <a:spcPct val="110000"/>
+              </a:lnSpc>
+            </a:pPr>
+            <a:r>
+              <a:rPr sz="750" b="0">
+                <a:solidFill>
+                  <a:srgbClr val="8B0F1A"/>
+                </a:solidFill>
+                <a:latin typeface="微软雅黑"/>
+                <a:ea typeface="微软雅黑"/>
+                <a:cs typeface="微软雅黑"/>
+              </a:rPr>
+              <a:t>仅放行 10.0.5.20</a:t>
+            </a:r>
+          </a:p>
+        </p:txBody>
+      </p:sp>
+      <p:sp>
+        <p:nvSpPr>
+          <p:cNvPr id="22" name="Rounded Rectangle 21"/>
+          <p:cNvSpPr/>
+          <p:nvPr/>
+        </p:nvSpPr>
+        <p:spPr>
+          <a:xfrm>
+            <a:off x="8174736" y="1371600"/>
+            <a:ext cx="3694176" cy="2240280"/>
+          </a:xfrm>
+          <a:prstGeom prst="roundRect">
+            <a:avLst>
+              <a:gd name="adj" fmla="val 4000"/>
+            </a:avLst>
+          </a:prstGeom>
+          <a:solidFill>
+            <a:srgbClr val="FFFFFF"/>
+          </a:solidFill>
+          <a:ln w="12700">
+            <a:solidFill>
+              <a:srgbClr val="C9C9C2"/>
+            </a:solidFill>
+          </a:ln>
+          <a:effectLst/>
+        </p:spPr>
+        <p:style>
+          <a:lnRef idx="1">
+            <a:schemeClr val="accent1"/>
+          </a:lnRef>
+          <a:fillRef idx="3">
+            <a:schemeClr val="accent1"/>
+          </a:fillRef>
+          <a:effectRef idx="2">
+            <a:schemeClr val="accent1"/>
+          </a:effectRef>
+          <a:fontRef idx="minor">
+            <a:schemeClr val="lt1"/>
+          </a:fontRef>
+        </p:style>
+        <p:txBody>
+          <a:bodyPr rtlCol="0" anchor="ctr" wrap="square"/>
+          <a:lstStyle/>
+          <a:p>
+            <a:pPr algn="ctr"/>
+          </a:p>
+        </p:txBody>
+      </p:sp>
+      <p:sp>
+        <p:nvSpPr>
+          <p:cNvPr id="23" name="TextBox 22"/>
+          <p:cNvSpPr txBox="1"/>
+          <p:nvPr/>
+        </p:nvSpPr>
+        <p:spPr>
+          <a:xfrm>
+            <a:off x="8284463" y="1444752"/>
+            <a:ext cx="3474720" cy="274320"/>
+          </a:xfrm>
+          <a:prstGeom prst="rect">
+            <a:avLst/>
+          </a:prstGeom>
+          <a:noFill/>
+        </p:spPr>
+        <p:txBody>
+          <a:bodyPr wrap="square" lIns="27432" rIns="27432" tIns="9144" bIns="9144" anchor="ctr">
+            <a:spAutoFit/>
+          </a:bodyPr>
+          <a:lstStyle/>
+          <a:p>
+            <a:pPr algn="l">
+              <a:lnSpc>
+                <a:spcPct val="110000"/>
+              </a:lnSpc>
+            </a:pPr>
+            <a:r>
+              <a:rPr sz="1000" b="1">
+                <a:solidFill>
+                  <a:srgbClr val="141414"/>
+                </a:solidFill>
+                <a:latin typeface="微软雅黑"/>
+                <a:ea typeface="微软雅黑"/>
+                <a:cs typeface="微软雅黑"/>
+              </a:rPr>
+              <a:t>③ 无法安装 Runner</a:t>
+            </a:r>
+          </a:p>
+        </p:txBody>
+      </p:sp>
+      <p:sp>
+        <p:nvSpPr>
+          <p:cNvPr id="24" name="TextBox 23"/>
+          <p:cNvSpPr txBox="1"/>
+          <p:nvPr/>
+        </p:nvSpPr>
+        <p:spPr>
+          <a:xfrm>
+            <a:off x="8284463" y="2834640"/>
+            <a:ext cx="3474720" cy="694944"/>
+          </a:xfrm>
+          <a:prstGeom prst="rect">
+            <a:avLst/>
+          </a:prstGeom>
+          <a:noFill/>
+        </p:spPr>
+        <p:txBody>
+          <a:bodyPr wrap="square" lIns="27432" rIns="27432" tIns="9144" bIns="9144" anchor="t">
+            <a:spAutoFit/>
+          </a:bodyPr>
+          <a:lstStyle/>
+          <a:p>
+            <a:pPr algn="l">
+              <a:lnSpc>
+                <a:spcPct val="110000"/>
+              </a:lnSpc>
+            </a:pPr>
+            <a:r>
+              <a:rPr sz="850" b="0">
+                <a:solidFill>
+                  <a:srgbClr val="5C5C56"/>
+                </a:solidFill>
+                <a:latin typeface="微软雅黑"/>
+                <a:ea typeface="微软雅黑"/>
+                <a:cs typeface="微软雅黑"/>
+              </a:rPr>
+              <a:t>交付系统封闭或镜像只读、无管理员权限，第三方执行代理无法安装与常驻</a:t>
+            </a:r>
+          </a:p>
+        </p:txBody>
+      </p:sp>
+      <p:sp>
+        <p:nvSpPr>
+          <p:cNvPr id="25" name="Rounded Rectangle 24"/>
+          <p:cNvSpPr/>
+          <p:nvPr/>
+        </p:nvSpPr>
+        <p:spPr>
+          <a:xfrm>
+            <a:off x="8284463" y="1920240"/>
+            <a:ext cx="1481328" cy="502920"/>
+          </a:xfrm>
+          <a:prstGeom prst="roundRect">
+            <a:avLst>
+              <a:gd name="adj" fmla="val 5000"/>
+            </a:avLst>
+          </a:prstGeom>
+          <a:solidFill>
+            <a:srgbClr val="ECECEC"/>
+          </a:solidFill>
+          <a:ln w="11430">
+            <a:solidFill>
+              <a:srgbClr val="C9C9C2"/>
+            </a:solidFill>
+          </a:ln>
+          <a:effectLst/>
+        </p:spPr>
+        <p:style>
+          <a:lnRef idx="1">
+            <a:schemeClr val="accent1"/>
+          </a:lnRef>
+          <a:fillRef idx="3">
+            <a:schemeClr val="accent1"/>
+          </a:fillRef>
+          <a:effectRef idx="2">
+            <a:schemeClr val="accent1"/>
+          </a:effectRef>
+          <a:fontRef idx="minor">
+            <a:schemeClr val="lt1"/>
+          </a:fontRef>
+        </p:style>
+        <p:txBody>
+          <a:bodyPr rtlCol="0" anchor="ctr" wrap="square" lIns="18288" rIns="18288" tIns="0" bIns="0"/>
+          <a:lstStyle/>
+          <a:p>
+            <a:pPr algn="ctr">
+              <a:lnSpc>
+                <a:spcPct val="100000"/>
+              </a:lnSpc>
+            </a:pPr>
+            <a:r>
+              <a:rPr sz="800" b="0">
+                <a:solidFill>
+                  <a:srgbClr val="141414"/>
+                </a:solidFill>
+                <a:latin typeface="微软雅黑"/>
+                <a:ea typeface="微软雅黑"/>
+                <a:cs typeface="微软雅黑"/>
+              </a:rPr>
+              <a:t>封闭系统 / 只读镜像</a:t>
+            </a:r>
+          </a:p>
+        </p:txBody>
+      </p:sp>
+      <p:cxnSp>
+        <p:nvCxnSpPr>
+          <p:cNvPr id="26" name="Connector 25"/>
+          <p:cNvCxnSpPr/>
+          <p:nvPr/>
+        </p:nvCxnSpPr>
+        <p:spPr>
+          <a:xfrm>
+            <a:off x="9765792" y="2167128"/>
+            <a:ext cx="621792" cy="0"/>
+          </a:xfrm>
+          <a:prstGeom prst="line">
+            <a:avLst/>
+          </a:prstGeom>
+          <a:ln w="12700">
+            <a:solidFill>
+              <a:srgbClr val="5C5C56"/>
+            </a:solidFill>
+            <a:prstDash val="dash"/>
+          </a:ln>
+        </p:spPr>
+        <p:style>
+          <a:lnRef idx="2">
+            <a:schemeClr val="accent1"/>
+          </a:lnRef>
+          <a:fillRef idx="0">
+            <a:schemeClr val="accent1"/>
+          </a:fillRef>
+          <a:effectRef idx="1">
+            <a:schemeClr val="accent1"/>
+          </a:effectRef>
+          <a:fontRef idx="minor">
+            <a:schemeClr val="tx1"/>
+          </a:fontRef>
+        </p:style>
+      </p:cxnSp>
+      <p:sp>
+        <p:nvSpPr>
+          <p:cNvPr id="27" name="Rectangle 26"/>
+          <p:cNvSpPr/>
+          <p:nvPr/>
+        </p:nvSpPr>
+        <p:spPr>
+          <a:xfrm>
+            <a:off x="10387584" y="1956816"/>
+            <a:ext cx="713232" cy="438912"/>
+          </a:xfrm>
+          <a:prstGeom prst="rect">
+            <a:avLst/>
+          </a:prstGeom>
+          <a:solidFill>
+            <a:srgbClr val="FFFFFF"/>
+          </a:solidFill>
+          <a:ln w="13970">
+            <a:solidFill>
+              <a:srgbClr val="8B0F1A"/>
+            </a:solidFill>
+          </a:ln>
+          <a:effectLst/>
+        </p:spPr>
+        <p:style>
+          <a:lnRef idx="1">
+            <a:schemeClr val="accent1"/>
+          </a:lnRef>
+          <a:fillRef idx="3">
+            <a:schemeClr val="accent1"/>
+          </a:fillRef>
+          <a:effectRef idx="2">
+            <a:schemeClr val="accent1"/>
+          </a:effectRef>
+          <a:fontRef idx="minor">
+            <a:schemeClr val="lt1"/>
+          </a:fontRef>
+        </p:style>
+        <p:txBody>
+          <a:bodyPr rtlCol="0" anchor="ctr" wrap="square" lIns="18288" rIns="18288" tIns="0" bIns="0"/>
+          <a:lstStyle/>
+          <a:p>
+            <a:pPr algn="ctr">
+              <a:lnSpc>
+                <a:spcPct val="100000"/>
+              </a:lnSpc>
+            </a:pPr>
+            <a:r>
+              <a:rPr sz="800" b="0">
+                <a:solidFill>
+                  <a:srgbClr val="8B0F1A"/>
+                </a:solidFill>
+                <a:latin typeface="微软雅黑"/>
+                <a:ea typeface="微软雅黑"/>
+                <a:cs typeface="微软雅黑"/>
+              </a:rPr>
+              <a:t>Runner</a:t>
+            </a:r>
+          </a:p>
+        </p:txBody>
+      </p:sp>
+      <p:sp>
+        <p:nvSpPr>
+          <p:cNvPr id="28" name="&quot;No&quot; Symbol 27"/>
+          <p:cNvSpPr/>
+          <p:nvPr/>
+        </p:nvSpPr>
+        <p:spPr>
+          <a:xfrm>
+            <a:off x="10332719" y="1865376"/>
+            <a:ext cx="841248" cy="841248"/>
+          </a:xfrm>
+          <a:prstGeom prst="noSmoking">
+            <a:avLst/>
+          </a:prstGeom>
+          <a:noFill/>
+          <a:ln w="30480">
+            <a:solidFill>
+              <a:srgbClr val="8B0F1A"/>
+            </a:solidFill>
+          </a:ln>
+          <a:effectLst/>
+        </p:spPr>
+        <p:style>
+          <a:lnRef idx="1">
+            <a:schemeClr val="accent1"/>
+          </a:lnRef>
+          <a:fillRef idx="3">
+            <a:schemeClr val="accent1"/>
+          </a:fillRef>
+          <a:effectRef idx="2">
+            <a:schemeClr val="accent1"/>
+          </a:effectRef>
+          <a:fontRef idx="minor">
+            <a:schemeClr val="lt1"/>
+          </a:fontRef>
+        </p:style>
+        <p:txBody>
+          <a:bodyPr rtlCol="0" anchor="ctr"/>
+          <a:lstStyle/>
+          <a:p>
+            <a:pPr algn="ctr"/>
+          </a:p>
+        </p:txBody>
+      </p:sp>
+      <p:sp>
+        <p:nvSpPr>
+          <p:cNvPr id="29" name="TextBox 28"/>
+          <p:cNvSpPr txBox="1"/>
+          <p:nvPr/>
+        </p:nvSpPr>
+        <p:spPr>
+          <a:xfrm>
+            <a:off x="9966959" y="1874520"/>
+            <a:ext cx="256032" cy="274320"/>
+          </a:xfrm>
+          <a:prstGeom prst="rect">
+            <a:avLst/>
+          </a:prstGeom>
+          <a:noFill/>
+        </p:spPr>
+        <p:txBody>
+          <a:bodyPr wrap="square" lIns="27432" rIns="27432" tIns="9144" bIns="9144" anchor="ctr">
+            <a:spAutoFit/>
+          </a:bodyPr>
+          <a:lstStyle/>
+          <a:p>
+            <a:pPr algn="ctr">
+              <a:lnSpc>
+                <a:spcPct val="110000"/>
+              </a:lnSpc>
+            </a:pPr>
+            <a:r>
+              <a:rPr sz="1500" b="1">
+                <a:solidFill>
+                  <a:srgbClr val="8B0F1A"/>
+                </a:solidFill>
+                <a:latin typeface="微软雅黑"/>
+                <a:ea typeface="微软雅黑"/>
+                <a:cs typeface="微软雅黑"/>
+              </a:rPr>
+              <a:t>×</a:t>
+            </a:r>
+          </a:p>
+        </p:txBody>
+      </p:sp>
+      <p:sp>
+        <p:nvSpPr>
+          <p:cNvPr id="30" name="TextBox 29"/>
+          <p:cNvSpPr txBox="1"/>
+          <p:nvPr/>
+        </p:nvSpPr>
+        <p:spPr>
+          <a:xfrm>
+            <a:off x="8302751" y="2487168"/>
+            <a:ext cx="1517904" cy="182880"/>
+          </a:xfrm>
+          <a:prstGeom prst="rect">
+            <a:avLst/>
+          </a:prstGeom>
+          <a:noFill/>
+        </p:spPr>
+        <p:txBody>
+          <a:bodyPr wrap="square" lIns="27432" rIns="27432" tIns="9144" bIns="9144" anchor="ctr">
+            <a:spAutoFit/>
+          </a:bodyPr>
+          <a:lstStyle/>
+          <a:p>
+            <a:pPr algn="ctr">
+              <a:lnSpc>
+                <a:spcPct val="110000"/>
+              </a:lnSpc>
+            </a:pPr>
+            <a:r>
+              <a:rPr sz="750" b="0">
+                <a:solidFill>
+                  <a:srgbClr val="8B0F1A"/>
+                </a:solidFill>
+                <a:latin typeface="微软雅黑"/>
+                <a:ea typeface="微软雅黑"/>
+                <a:cs typeface="微软雅黑"/>
+              </a:rPr>
+              <a:t>禁止安装第三方程序</a:t>
+            </a:r>
+          </a:p>
+        </p:txBody>
+      </p:sp>
+      <p:sp>
+        <p:nvSpPr>
+          <p:cNvPr id="31" name="Rounded Rectangle 30"/>
+          <p:cNvSpPr/>
+          <p:nvPr/>
+        </p:nvSpPr>
+        <p:spPr>
+          <a:xfrm>
+            <a:off x="274320" y="3703320"/>
+            <a:ext cx="3694176" cy="2240280"/>
+          </a:xfrm>
+          <a:prstGeom prst="roundRect">
+            <a:avLst>
+              <a:gd name="adj" fmla="val 4000"/>
+            </a:avLst>
+          </a:prstGeom>
+          <a:solidFill>
+            <a:srgbClr val="FFFFFF"/>
+          </a:solidFill>
+          <a:ln w="12700">
+            <a:solidFill>
+              <a:srgbClr val="C9C9C2"/>
+            </a:solidFill>
+          </a:ln>
+          <a:effectLst/>
+        </p:spPr>
+        <p:style>
+          <a:lnRef idx="1">
+            <a:schemeClr val="accent1"/>
+          </a:lnRef>
+          <a:fillRef idx="3">
+            <a:schemeClr val="accent1"/>
+          </a:fillRef>
+          <a:effectRef idx="2">
+            <a:schemeClr val="accent1"/>
+          </a:effectRef>
+          <a:fontRef idx="minor">
+            <a:schemeClr val="lt1"/>
+          </a:fontRef>
+        </p:style>
+        <p:txBody>
+          <a:bodyPr rtlCol="0" anchor="ctr" wrap="square"/>
+          <a:lstStyle/>
+          <a:p>
+            <a:pPr algn="ctr"/>
+          </a:p>
+        </p:txBody>
+      </p:sp>
+      <p:sp>
+        <p:nvSpPr>
+          <p:cNvPr id="32" name="TextBox 31"/>
+          <p:cNvSpPr txBox="1"/>
+          <p:nvPr/>
+        </p:nvSpPr>
+        <p:spPr>
+          <a:xfrm>
+            <a:off x="384048" y="3776472"/>
+            <a:ext cx="3474720" cy="274320"/>
+          </a:xfrm>
+          <a:prstGeom prst="rect">
+            <a:avLst/>
+          </a:prstGeom>
+          <a:noFill/>
+        </p:spPr>
+        <p:txBody>
+          <a:bodyPr wrap="square" lIns="27432" rIns="27432" tIns="9144" bIns="9144" anchor="ctr">
+            <a:spAutoFit/>
+          </a:bodyPr>
+          <a:lstStyle/>
+          <a:p>
+            <a:pPr algn="l">
+              <a:lnSpc>
+                <a:spcPct val="110000"/>
+              </a:lnSpc>
+            </a:pPr>
+            <a:r>
+              <a:rPr sz="1000" b="1">
+                <a:solidFill>
+                  <a:srgbClr val="141414"/>
+                </a:solidFill>
+                <a:latin typeface="微软雅黑"/>
+                <a:ea typeface="微软雅黑"/>
+                <a:cs typeface="微软雅黑"/>
+              </a:rPr>
+              <a:t>④ 无对外接口</a:t>
+            </a:r>
+          </a:p>
+        </p:txBody>
+      </p:sp>
+      <p:sp>
+        <p:nvSpPr>
+          <p:cNvPr id="33" name="TextBox 32"/>
+          <p:cNvSpPr txBox="1"/>
+          <p:nvPr/>
+        </p:nvSpPr>
+        <p:spPr>
+          <a:xfrm>
+            <a:off x="384048" y="5166360"/>
+            <a:ext cx="3474720" cy="694944"/>
+          </a:xfrm>
+          <a:prstGeom prst="rect">
+            <a:avLst/>
+          </a:prstGeom>
+          <a:noFill/>
+        </p:spPr>
+        <p:txBody>
+          <a:bodyPr wrap="square" lIns="27432" rIns="27432" tIns="9144" bIns="9144" anchor="t">
+            <a:spAutoFit/>
+          </a:bodyPr>
+          <a:lstStyle/>
+          <a:p>
+            <a:pPr algn="l">
+              <a:lnSpc>
+                <a:spcPct val="110000"/>
+              </a:lnSpc>
+            </a:pPr>
+            <a:r>
+              <a:rPr sz="850" b="0">
+                <a:solidFill>
+                  <a:srgbClr val="5C5C56"/>
+                </a:solidFill>
+                <a:latin typeface="微软雅黑"/>
+                <a:ea typeface="微软雅黑"/>
+                <a:cs typeface="微软雅黑"/>
+              </a:rPr>
+              <a:t>软件只有图形界面，无 CLI、API、协议文档；外部脚本无法触发动作、也无法取回数据</a:t>
+            </a:r>
+          </a:p>
+        </p:txBody>
+      </p:sp>
+      <p:sp>
+        <p:nvSpPr>
+          <p:cNvPr id="34" name="Rounded Rectangle 33"/>
+          <p:cNvSpPr/>
+          <p:nvPr/>
+        </p:nvSpPr>
+        <p:spPr>
+          <a:xfrm>
+            <a:off x="384048" y="4233672"/>
+            <a:ext cx="1298448" cy="548640"/>
+          </a:xfrm>
+          <a:prstGeom prst="roundRect">
+            <a:avLst>
+              <a:gd name="adj" fmla="val 4000"/>
+            </a:avLst>
+          </a:prstGeom>
+          <a:solidFill>
+            <a:srgbClr val="2B2B28"/>
+          </a:solidFill>
+          <a:ln>
+            <a:noFill/>
+          </a:ln>
+          <a:effectLst/>
+        </p:spPr>
+        <p:style>
+          <a:lnRef idx="1">
+            <a:schemeClr val="accent1"/>
+          </a:lnRef>
+          <a:fillRef idx="3">
+            <a:schemeClr val="accent1"/>
+          </a:fillRef>
+          <a:effectRef idx="2">
+            <a:schemeClr val="accent1"/>
+          </a:effectRef>
+          <a:fontRef idx="minor">
+            <a:schemeClr val="lt1"/>
+          </a:fontRef>
+        </p:style>
+        <p:txBody>
+          <a:bodyPr rtlCol="0" anchor="ctr" wrap="square" lIns="18288" rIns="18288" tIns="0" bIns="0"/>
+          <a:lstStyle/>
+          <a:p>
+            <a:pPr algn="ctr">
+              <a:lnSpc>
+                <a:spcPct val="100000"/>
+              </a:lnSpc>
+            </a:pPr>
+            <a:r>
+              <a:rPr sz="800" b="0">
+                <a:solidFill>
+                  <a:srgbClr val="FFFFFF"/>
+                </a:solidFill>
+                <a:latin typeface="微软雅黑"/>
+                <a:ea typeface="微软雅黑"/>
+                <a:cs typeface="微软雅黑"/>
+              </a:rPr>
+              <a:t>供应商软件（仅 GUI）</a:t>
+            </a:r>
+          </a:p>
+        </p:txBody>
+      </p:sp>
+      <p:sp>
+        <p:nvSpPr>
+          <p:cNvPr id="35" name="Rectangle 34"/>
+          <p:cNvSpPr/>
+          <p:nvPr/>
+        </p:nvSpPr>
+        <p:spPr>
+          <a:xfrm>
+            <a:off x="1956816" y="4142231"/>
+            <a:ext cx="54864" cy="621792"/>
+          </a:xfrm>
+          <a:prstGeom prst="rect">
+            <a:avLst/>
+          </a:prstGeom>
+          <a:solidFill>
+            <a:srgbClr val="8B0F1A"/>
+          </a:solidFill>
+          <a:ln>
+            <a:noFill/>
+          </a:ln>
+          <a:effectLst/>
+        </p:spPr>
+        <p:style>
+          <a:lnRef idx="1">
+            <a:schemeClr val="accent1"/>
+          </a:lnRef>
+          <a:fillRef idx="3">
+            <a:schemeClr val="accent1"/>
+          </a:fillRef>
+          <a:effectRef idx="2">
+            <a:schemeClr val="accent1"/>
+          </a:effectRef>
+          <a:fontRef idx="minor">
+            <a:schemeClr val="lt1"/>
+          </a:fontRef>
+        </p:style>
+        <p:txBody>
+          <a:bodyPr rtlCol="0" anchor="ctr" wrap="square"/>
+          <a:lstStyle/>
+          <a:p>
+            <a:pPr algn="ctr"/>
+          </a:p>
+        </p:txBody>
+      </p:sp>
+      <p:sp>
+        <p:nvSpPr>
+          <p:cNvPr id="36" name="Rounded Rectangle 35"/>
+          <p:cNvSpPr/>
+          <p:nvPr/>
+        </p:nvSpPr>
+        <p:spPr>
+          <a:xfrm>
+            <a:off x="2304288" y="4233672"/>
+            <a:ext cx="1298448" cy="548640"/>
+          </a:xfrm>
+          <a:prstGeom prst="roundRect">
+            <a:avLst>
+              <a:gd name="adj" fmla="val 5000"/>
+            </a:avLst>
+          </a:prstGeom>
+          <a:solidFill>
+            <a:srgbClr val="FFFFFF"/>
+          </a:solidFill>
+          <a:ln w="11430">
+            <a:solidFill>
+              <a:srgbClr val="C9C9C2"/>
+            </a:solidFill>
+          </a:ln>
+          <a:effectLst/>
+        </p:spPr>
+        <p:style>
+          <a:lnRef idx="1">
+            <a:schemeClr val="accent1"/>
+          </a:lnRef>
+          <a:fillRef idx="3">
+            <a:schemeClr val="accent1"/>
+          </a:fillRef>
+          <a:effectRef idx="2">
+            <a:schemeClr val="accent1"/>
+          </a:effectRef>
+          <a:fontRef idx="minor">
+            <a:schemeClr val="lt1"/>
+          </a:fontRef>
+        </p:style>
+        <p:txBody>
+          <a:bodyPr rtlCol="0" anchor="ctr" wrap="square" lIns="18288" rIns="18288" tIns="0" bIns="0"/>
+          <a:lstStyle/>
+          <a:p>
+            <a:pPr algn="ctr">
+              <a:lnSpc>
+                <a:spcPct val="100000"/>
+              </a:lnSpc>
+            </a:pPr>
+            <a:r>
+              <a:rPr sz="800" b="0">
+                <a:solidFill>
+                  <a:srgbClr val="141414"/>
+                </a:solidFill>
+                <a:latin typeface="微软雅黑"/>
+                <a:ea typeface="微软雅黑"/>
+                <a:cs typeface="微软雅黑"/>
+              </a:rPr>
+              <a:t>外部脚本 / 自动化</a:t>
+            </a:r>
+          </a:p>
+        </p:txBody>
+      </p:sp>
+      <p:cxnSp>
+        <p:nvCxnSpPr>
+          <p:cNvPr id="37" name="Connector 36"/>
+          <p:cNvCxnSpPr/>
+          <p:nvPr/>
+        </p:nvCxnSpPr>
+        <p:spPr>
+          <a:xfrm flipH="1">
+            <a:off x="2011680" y="4507992"/>
+            <a:ext cx="292608" cy="0"/>
+          </a:xfrm>
+          <a:prstGeom prst="line">
+            <a:avLst/>
+          </a:prstGeom>
+          <a:ln w="12700">
+            <a:solidFill>
+              <a:srgbClr val="5C5C56"/>
+            </a:solidFill>
+            <a:prstDash val="dash"/>
+          </a:ln>
+        </p:spPr>
+        <p:style>
+          <a:lnRef idx="2">
+            <a:schemeClr val="accent1"/>
+          </a:lnRef>
+          <a:fillRef idx="0">
+            <a:schemeClr val="accent1"/>
+          </a:fillRef>
+          <a:effectRef idx="1">
+            <a:schemeClr val="accent1"/>
+          </a:effectRef>
+          <a:fontRef idx="minor">
+            <a:schemeClr val="tx1"/>
+          </a:fontRef>
+        </p:style>
+      </p:cxnSp>
+      <p:sp>
+        <p:nvSpPr>
+          <p:cNvPr id="38" name="TextBox 37"/>
+          <p:cNvSpPr txBox="1"/>
+          <p:nvPr/>
+        </p:nvSpPr>
+        <p:spPr>
+          <a:xfrm>
+            <a:off x="1719072" y="4224527"/>
+            <a:ext cx="256032" cy="274320"/>
+          </a:xfrm>
+          <a:prstGeom prst="rect">
+            <a:avLst/>
+          </a:prstGeom>
+          <a:noFill/>
+        </p:spPr>
+        <p:txBody>
+          <a:bodyPr wrap="square" lIns="27432" rIns="27432" tIns="9144" bIns="9144" anchor="ctr">
+            <a:spAutoFit/>
+          </a:bodyPr>
+          <a:lstStyle/>
+          <a:p>
+            <a:pPr algn="ctr">
+              <a:lnSpc>
+                <a:spcPct val="110000"/>
+              </a:lnSpc>
+            </a:pPr>
+            <a:r>
+              <a:rPr sz="1300" b="1">
+                <a:solidFill>
+                  <a:srgbClr val="8B0F1A"/>
+                </a:solidFill>
+                <a:latin typeface="微软雅黑"/>
+                <a:ea typeface="微软雅黑"/>
+                <a:cs typeface="微软雅黑"/>
+              </a:rPr>
+              <a:t>×</a:t>
+            </a:r>
+          </a:p>
+        </p:txBody>
+      </p:sp>
+      <p:sp>
+        <p:nvSpPr>
+          <p:cNvPr id="39" name="TextBox 38"/>
+          <p:cNvSpPr txBox="1"/>
+          <p:nvPr/>
+        </p:nvSpPr>
+        <p:spPr>
+          <a:xfrm>
+            <a:off x="1773936" y="4818888"/>
+            <a:ext cx="1737360" cy="182880"/>
+          </a:xfrm>
+          <a:prstGeom prst="rect">
+            <a:avLst/>
+          </a:prstGeom>
+          <a:noFill/>
+        </p:spPr>
+        <p:txBody>
+          <a:bodyPr wrap="square" lIns="27432" rIns="27432" tIns="9144" bIns="9144" anchor="ctr">
+            <a:spAutoFit/>
+          </a:bodyPr>
+          <a:lstStyle/>
+          <a:p>
+            <a:pPr algn="ctr">
+              <a:lnSpc>
+                <a:spcPct val="110000"/>
+              </a:lnSpc>
+            </a:pPr>
+            <a:r>
+              <a:rPr sz="750" b="0">
+                <a:solidFill>
+                  <a:srgbClr val="8B0F1A"/>
+                </a:solidFill>
+                <a:latin typeface="微软雅黑"/>
+                <a:ea typeface="微软雅黑"/>
+                <a:cs typeface="微软雅黑"/>
+              </a:rPr>
+              <a:t>无 CLI / API / 协议文档</a:t>
+            </a:r>
+          </a:p>
+        </p:txBody>
+      </p:sp>
+      <p:sp>
+        <p:nvSpPr>
+          <p:cNvPr id="40" name="Rounded Rectangle 39"/>
+          <p:cNvSpPr/>
+          <p:nvPr/>
+        </p:nvSpPr>
+        <p:spPr>
+          <a:xfrm>
+            <a:off x="4224528" y="3703320"/>
+            <a:ext cx="3694176" cy="2240280"/>
+          </a:xfrm>
+          <a:prstGeom prst="roundRect">
+            <a:avLst>
+              <a:gd name="adj" fmla="val 4000"/>
+            </a:avLst>
+          </a:prstGeom>
+          <a:solidFill>
+            <a:srgbClr val="FFFFFF"/>
+          </a:solidFill>
+          <a:ln w="12700">
+            <a:solidFill>
+              <a:srgbClr val="C9C9C2"/>
+            </a:solidFill>
+          </a:ln>
+          <a:effectLst/>
+        </p:spPr>
+        <p:style>
+          <a:lnRef idx="1">
+            <a:schemeClr val="accent1"/>
+          </a:lnRef>
+          <a:fillRef idx="3">
+            <a:schemeClr val="accent1"/>
+          </a:fillRef>
+          <a:effectRef idx="2">
+            <a:schemeClr val="accent1"/>
+          </a:effectRef>
+          <a:fontRef idx="minor">
+            <a:schemeClr val="lt1"/>
+          </a:fontRef>
+        </p:style>
+        <p:txBody>
+          <a:bodyPr rtlCol="0" anchor="ctr" wrap="square"/>
+          <a:lstStyle/>
+          <a:p>
+            <a:pPr algn="ctr"/>
+          </a:p>
+        </p:txBody>
+      </p:sp>
+      <p:sp>
+        <p:nvSpPr>
+          <p:cNvPr id="41" name="TextBox 40"/>
+          <p:cNvSpPr txBox="1"/>
+          <p:nvPr/>
+        </p:nvSpPr>
+        <p:spPr>
+          <a:xfrm>
+            <a:off x="4334256" y="3776472"/>
+            <a:ext cx="3474720" cy="274320"/>
+          </a:xfrm>
+          <a:prstGeom prst="rect">
+            <a:avLst/>
+          </a:prstGeom>
+          <a:noFill/>
+        </p:spPr>
+        <p:txBody>
+          <a:bodyPr wrap="square" lIns="27432" rIns="27432" tIns="9144" bIns="9144" anchor="ctr">
+            <a:spAutoFit/>
+          </a:bodyPr>
+          <a:lstStyle/>
+          <a:p>
+            <a:pPr algn="l">
+              <a:lnSpc>
+                <a:spcPct val="110000"/>
+              </a:lnSpc>
+            </a:pPr>
+            <a:r>
+              <a:rPr sz="1000" b="1">
+                <a:solidFill>
+                  <a:srgbClr val="141414"/>
+                </a:solidFill>
+                <a:latin typeface="微软雅黑"/>
+                <a:ea typeface="微软雅黑"/>
+                <a:cs typeface="微软雅黑"/>
+              </a:rPr>
+              <a:t>⑤ 授权绑定 MAC</a:t>
+            </a:r>
+          </a:p>
+        </p:txBody>
+      </p:sp>
+      <p:sp>
+        <p:nvSpPr>
+          <p:cNvPr id="42" name="TextBox 41"/>
+          <p:cNvSpPr txBox="1"/>
+          <p:nvPr/>
+        </p:nvSpPr>
+        <p:spPr>
+          <a:xfrm>
+            <a:off x="4334256" y="5166360"/>
+            <a:ext cx="3474720" cy="694944"/>
+          </a:xfrm>
+          <a:prstGeom prst="rect">
+            <a:avLst/>
+          </a:prstGeom>
+          <a:noFill/>
+        </p:spPr>
+        <p:txBody>
+          <a:bodyPr wrap="square" lIns="27432" rIns="27432" tIns="9144" bIns="9144" anchor="t">
+            <a:spAutoFit/>
+          </a:bodyPr>
+          <a:lstStyle/>
+          <a:p>
+            <a:pPr algn="l">
+              <a:lnSpc>
+                <a:spcPct val="110000"/>
+              </a:lnSpc>
+            </a:pPr>
+            <a:r>
+              <a:rPr sz="850" b="0">
+                <a:solidFill>
+                  <a:srgbClr val="5C5C56"/>
+                </a:solidFill>
+                <a:latin typeface="微软雅黑"/>
+                <a:ea typeface="微软雅黑"/>
+                <a:cs typeface="微软雅黑"/>
+              </a:rPr>
+              <a:t>许可证绑定网卡 MAC 与机器指纹，迁机、换网卡、重装系统即失效，无法随平台部署</a:t>
+            </a:r>
+          </a:p>
+        </p:txBody>
+      </p:sp>
+      <p:sp>
+        <p:nvSpPr>
+          <p:cNvPr id="43" name="Rounded Rectangle 42"/>
+          <p:cNvSpPr/>
+          <p:nvPr/>
+        </p:nvSpPr>
+        <p:spPr>
+          <a:xfrm>
+            <a:off x="4334256" y="4215383"/>
+            <a:ext cx="877824" cy="585216"/>
+          </a:xfrm>
+          <a:prstGeom prst="roundRect">
+            <a:avLst>
+              <a:gd name="adj" fmla="val 5000"/>
+            </a:avLst>
+          </a:prstGeom>
+          <a:solidFill>
+            <a:srgbClr val="ECECEC"/>
+          </a:solidFill>
+          <a:ln w="11430">
+            <a:solidFill>
+              <a:srgbClr val="C9C9C2"/>
+            </a:solidFill>
+          </a:ln>
+          <a:effectLst/>
+        </p:spPr>
+        <p:style>
+          <a:lnRef idx="1">
+            <a:schemeClr val="accent1"/>
+          </a:lnRef>
+          <a:fillRef idx="3">
+            <a:schemeClr val="accent1"/>
+          </a:fillRef>
+          <a:effectRef idx="2">
+            <a:schemeClr val="accent1"/>
+          </a:effectRef>
+          <a:fontRef idx="minor">
+            <a:schemeClr val="lt1"/>
+          </a:fontRef>
+        </p:style>
+        <p:txBody>
+          <a:bodyPr rtlCol="0" anchor="ctr" wrap="square" lIns="18288" rIns="18288" tIns="0" bIns="0"/>
+          <a:lstStyle/>
+          <a:p>
+            <a:pPr algn="ctr">
+              <a:lnSpc>
+                <a:spcPct val="100000"/>
+              </a:lnSpc>
+            </a:pPr>
+            <a:r>
+              <a:rPr sz="800" b="1">
+                <a:solidFill>
+                  <a:srgbClr val="141414"/>
+                </a:solidFill>
+                <a:latin typeface="微软雅黑"/>
+                <a:ea typeface="微软雅黑"/>
+                <a:cs typeface="微软雅黑"/>
+              </a:rPr>
+              <a:t>机器 A</a:t>
+            </a:r>
+          </a:p>
+          <a:p>
+            <a:pPr algn="ctr"/>
+            <a:r>
+              <a:rPr sz="750">
+                <a:solidFill>
+                  <a:srgbClr val="5C5C56"/>
+                </a:solidFill>
+                <a:latin typeface="微软雅黑"/>
+                <a:ea typeface="微软雅黑"/>
+                <a:cs typeface="微软雅黑"/>
+              </a:rPr>
+              <a:t>MAC A1</a:t>
+            </a:r>
+          </a:p>
+        </p:txBody>
+      </p:sp>
+      <p:sp>
+        <p:nvSpPr>
+          <p:cNvPr id="44" name="Rounded Rectangle 43"/>
+          <p:cNvSpPr/>
+          <p:nvPr/>
+        </p:nvSpPr>
+        <p:spPr>
+          <a:xfrm>
+            <a:off x="5522976" y="4251959"/>
+            <a:ext cx="621792" cy="512064"/>
+          </a:xfrm>
+          <a:prstGeom prst="roundRect">
+            <a:avLst>
+              <a:gd name="adj" fmla="val 5000"/>
+            </a:avLst>
+          </a:prstGeom>
+          <a:solidFill>
+            <a:srgbClr val="FFFFFF"/>
+          </a:solidFill>
+          <a:ln w="13970">
+            <a:solidFill>
+              <a:srgbClr val="8B0F1A"/>
+            </a:solidFill>
+          </a:ln>
+          <a:effectLst/>
+        </p:spPr>
+        <p:style>
+          <a:lnRef idx="1">
+            <a:schemeClr val="accent1"/>
+          </a:lnRef>
+          <a:fillRef idx="3">
+            <a:schemeClr val="accent1"/>
+          </a:fillRef>
+          <a:effectRef idx="2">
+            <a:schemeClr val="accent1"/>
+          </a:effectRef>
+          <a:fontRef idx="minor">
+            <a:schemeClr val="lt1"/>
+          </a:fontRef>
+        </p:style>
+        <p:txBody>
+          <a:bodyPr rtlCol="0" anchor="ctr" wrap="square" lIns="18288" rIns="18288" tIns="0" bIns="0"/>
+          <a:lstStyle/>
+          <a:p>
+            <a:pPr algn="ctr">
+              <a:lnSpc>
+                <a:spcPct val="100000"/>
+              </a:lnSpc>
+            </a:pPr>
+            <a:r>
+              <a:rPr sz="800" b="0">
+                <a:solidFill>
+                  <a:srgbClr val="8B0F1A"/>
+                </a:solidFill>
+                <a:latin typeface="微软雅黑"/>
+                <a:ea typeface="微软雅黑"/>
+                <a:cs typeface="微软雅黑"/>
+              </a:rPr>
+              <a:t>许可证</a:t>
+            </a:r>
+          </a:p>
+        </p:txBody>
+      </p:sp>
+      <p:cxnSp>
+        <p:nvCxnSpPr>
+          <p:cNvPr id="45" name="Connector 44"/>
+          <p:cNvCxnSpPr/>
+          <p:nvPr/>
+        </p:nvCxnSpPr>
+        <p:spPr>
+          <a:xfrm flipH="1">
+            <a:off x="5212080" y="4507992"/>
+            <a:ext cx="310896" cy="0"/>
+          </a:xfrm>
+          <a:prstGeom prst="line">
+            <a:avLst/>
+          </a:prstGeom>
+          <a:ln w="13970">
+            <a:solidFill>
+              <a:srgbClr val="5C5C56"/>
+            </a:solidFill>
+          </a:ln>
+        </p:spPr>
+        <p:style>
+          <a:lnRef idx="2">
+            <a:schemeClr val="accent1"/>
+          </a:lnRef>
+          <a:fillRef idx="0">
+            <a:schemeClr val="accent1"/>
+          </a:fillRef>
+          <a:effectRef idx="1">
+            <a:schemeClr val="accent1"/>
+          </a:effectRef>
+          <a:fontRef idx="minor">
+            <a:schemeClr val="tx1"/>
+          </a:fontRef>
+        </p:style>
+      </p:cxnSp>
+      <p:sp>
+        <p:nvSpPr>
+          <p:cNvPr id="46" name="Rounded Rectangle 45"/>
+          <p:cNvSpPr/>
+          <p:nvPr/>
+        </p:nvSpPr>
+        <p:spPr>
+          <a:xfrm>
+            <a:off x="6528816" y="4215383"/>
+            <a:ext cx="1005840" cy="585216"/>
+          </a:xfrm>
+          <a:prstGeom prst="roundRect">
+            <a:avLst>
+              <a:gd name="adj" fmla="val 5000"/>
+            </a:avLst>
+          </a:prstGeom>
+          <a:solidFill>
+            <a:srgbClr val="ECECEC"/>
+          </a:solidFill>
+          <a:ln w="11430">
+            <a:solidFill>
+              <a:srgbClr val="C9C9C2"/>
+            </a:solidFill>
+          </a:ln>
+          <a:effectLst/>
+        </p:spPr>
+        <p:style>
+          <a:lnRef idx="1">
+            <a:schemeClr val="accent1"/>
+          </a:lnRef>
+          <a:fillRef idx="3">
+            <a:schemeClr val="accent1"/>
+          </a:fillRef>
+          <a:effectRef idx="2">
+            <a:schemeClr val="accent1"/>
+          </a:effectRef>
+          <a:fontRef idx="minor">
+            <a:schemeClr val="lt1"/>
+          </a:fontRef>
+        </p:style>
+        <p:txBody>
+          <a:bodyPr rtlCol="0" anchor="ctr" wrap="square" lIns="18288" rIns="18288" tIns="0" bIns="0"/>
+          <a:lstStyle/>
+          <a:p>
+            <a:pPr algn="ctr">
+              <a:lnSpc>
+                <a:spcPct val="100000"/>
+              </a:lnSpc>
+            </a:pPr>
+            <a:r>
+              <a:rPr sz="800" b="1">
+                <a:solidFill>
+                  <a:srgbClr val="141414"/>
+                </a:solidFill>
+                <a:latin typeface="微软雅黑"/>
+                <a:ea typeface="微软雅黑"/>
+                <a:cs typeface="微软雅黑"/>
+              </a:rPr>
+              <a:t>机器 B</a:t>
+            </a:r>
+          </a:p>
+          <a:p>
+            <a:pPr algn="ctr"/>
+            <a:r>
+              <a:rPr sz="750">
+                <a:solidFill>
+                  <a:srgbClr val="5C5C56"/>
+                </a:solidFill>
+                <a:latin typeface="微软雅黑"/>
+                <a:ea typeface="微软雅黑"/>
+                <a:cs typeface="微软雅黑"/>
+              </a:rPr>
+              <a:t>MAC B2</a:t>
+            </a:r>
+          </a:p>
+        </p:txBody>
+      </p:sp>
+      <p:cxnSp>
+        <p:nvCxnSpPr>
+          <p:cNvPr id="47" name="Connector 46"/>
+          <p:cNvCxnSpPr/>
+          <p:nvPr/>
+        </p:nvCxnSpPr>
+        <p:spPr>
+          <a:xfrm>
+            <a:off x="6144768" y="4507992"/>
+            <a:ext cx="384048" cy="0"/>
+          </a:xfrm>
+          <a:prstGeom prst="line">
+            <a:avLst/>
+          </a:prstGeom>
+          <a:ln w="13970">
+            <a:solidFill>
+              <a:srgbClr val="5C5C56"/>
+            </a:solidFill>
+            <a:prstDash val="dash"/>
+          </a:ln>
+        </p:spPr>
+        <p:style>
+          <a:lnRef idx="2">
+            <a:schemeClr val="accent1"/>
+          </a:lnRef>
+          <a:fillRef idx="0">
+            <a:schemeClr val="accent1"/>
+          </a:fillRef>
+          <a:effectRef idx="1">
+            <a:schemeClr val="accent1"/>
+          </a:effectRef>
+          <a:fontRef idx="minor">
+            <a:schemeClr val="tx1"/>
+          </a:fontRef>
+        </p:style>
+      </p:cxnSp>
+      <p:sp>
+        <p:nvSpPr>
+          <p:cNvPr id="48" name="TextBox 47"/>
+          <p:cNvSpPr txBox="1"/>
+          <p:nvPr/>
+        </p:nvSpPr>
+        <p:spPr>
+          <a:xfrm>
+            <a:off x="6208776" y="4224527"/>
+            <a:ext cx="256032" cy="274320"/>
+          </a:xfrm>
+          <a:prstGeom prst="rect">
+            <a:avLst/>
+          </a:prstGeom>
+          <a:noFill/>
+        </p:spPr>
+        <p:txBody>
+          <a:bodyPr wrap="square" lIns="27432" rIns="27432" tIns="9144" bIns="9144" anchor="ctr">
+            <a:spAutoFit/>
+          </a:bodyPr>
+          <a:lstStyle/>
+          <a:p>
+            <a:pPr algn="ctr">
+              <a:lnSpc>
+                <a:spcPct val="110000"/>
+              </a:lnSpc>
+            </a:pPr>
+            <a:r>
+              <a:rPr sz="1200" b="1">
+                <a:solidFill>
+                  <a:srgbClr val="8B0F1A"/>
+                </a:solidFill>
+                <a:latin typeface="微软雅黑"/>
+                <a:ea typeface="微软雅黑"/>
+                <a:cs typeface="微软雅黑"/>
+              </a:rPr>
+              <a:t>×</a:t>
+            </a:r>
+          </a:p>
+        </p:txBody>
+      </p:sp>
+      <p:sp>
+        <p:nvSpPr>
+          <p:cNvPr id="49" name="TextBox 48"/>
+          <p:cNvSpPr txBox="1"/>
+          <p:nvPr/>
+        </p:nvSpPr>
+        <p:spPr>
+          <a:xfrm>
+            <a:off x="4974336" y="4818888"/>
+            <a:ext cx="786384" cy="182880"/>
+          </a:xfrm>
+          <a:prstGeom prst="rect">
+            <a:avLst/>
+          </a:prstGeom>
+          <a:noFill/>
+        </p:spPr>
+        <p:txBody>
+          <a:bodyPr wrap="square" lIns="27432" rIns="27432" tIns="9144" bIns="9144" anchor="ctr">
+            <a:spAutoFit/>
+          </a:bodyPr>
+          <a:lstStyle/>
+          <a:p>
+            <a:pPr algn="ctr">
+              <a:lnSpc>
+                <a:spcPct val="110000"/>
+              </a:lnSpc>
+            </a:pPr>
+            <a:r>
+              <a:rPr sz="750" b="0">
+                <a:solidFill>
+                  <a:srgbClr val="0F4C81"/>
+                </a:solidFill>
+                <a:latin typeface="微软雅黑"/>
+                <a:ea typeface="微软雅黑"/>
+                <a:cs typeface="微软雅黑"/>
+              </a:rPr>
+              <a:t>授权有效</a:t>
+            </a:r>
+          </a:p>
+        </p:txBody>
+      </p:sp>
+      <p:sp>
+        <p:nvSpPr>
+          <p:cNvPr id="50" name="TextBox 49"/>
+          <p:cNvSpPr txBox="1"/>
+          <p:nvPr/>
+        </p:nvSpPr>
+        <p:spPr>
+          <a:xfrm>
+            <a:off x="6181344" y="4818888"/>
+            <a:ext cx="1005840" cy="182880"/>
+          </a:xfrm>
+          <a:prstGeom prst="rect">
+            <a:avLst/>
+          </a:prstGeom>
+          <a:noFill/>
+        </p:spPr>
+        <p:txBody>
+          <a:bodyPr wrap="square" lIns="27432" rIns="27432" tIns="9144" bIns="9144" anchor="ctr">
+            <a:spAutoFit/>
+          </a:bodyPr>
+          <a:lstStyle/>
+          <a:p>
+            <a:pPr algn="ctr">
+              <a:lnSpc>
+                <a:spcPct val="110000"/>
+              </a:lnSpc>
+            </a:pPr>
+            <a:r>
+              <a:rPr sz="750" b="0">
+                <a:solidFill>
+                  <a:srgbClr val="8B0F1A"/>
+                </a:solidFill>
+                <a:latin typeface="微软雅黑"/>
+                <a:ea typeface="微软雅黑"/>
+                <a:cs typeface="微软雅黑"/>
+              </a:rPr>
+              <a:t>迁机即失效</a:t>
+            </a:r>
+          </a:p>
+        </p:txBody>
+      </p:sp>
+      <p:sp>
+        <p:nvSpPr>
+          <p:cNvPr id="51" name="Rounded Rectangle 50"/>
+          <p:cNvSpPr/>
+          <p:nvPr/>
+        </p:nvSpPr>
+        <p:spPr>
+          <a:xfrm>
+            <a:off x="8174736" y="3703320"/>
+            <a:ext cx="3694176" cy="2240280"/>
+          </a:xfrm>
+          <a:prstGeom prst="roundRect">
+            <a:avLst>
+              <a:gd name="adj" fmla="val 4000"/>
+            </a:avLst>
+          </a:prstGeom>
+          <a:solidFill>
+            <a:srgbClr val="FFFFFF"/>
+          </a:solidFill>
+          <a:ln w="12700">
+            <a:solidFill>
+              <a:srgbClr val="C9C9C2"/>
+            </a:solidFill>
+          </a:ln>
+          <a:effectLst/>
+        </p:spPr>
+        <p:style>
+          <a:lnRef idx="1">
+            <a:schemeClr val="accent1"/>
+          </a:lnRef>
+          <a:fillRef idx="3">
+            <a:schemeClr val="accent1"/>
+          </a:fillRef>
+          <a:effectRef idx="2">
+            <a:schemeClr val="accent1"/>
+          </a:effectRef>
+          <a:fontRef idx="minor">
+            <a:schemeClr val="lt1"/>
+          </a:fontRef>
+        </p:style>
+        <p:txBody>
+          <a:bodyPr rtlCol="0" anchor="ctr" wrap="square"/>
+          <a:lstStyle/>
+          <a:p>
+            <a:pPr algn="ctr"/>
+          </a:p>
+        </p:txBody>
+      </p:sp>
+      <p:sp>
+        <p:nvSpPr>
+          <p:cNvPr id="52" name="TextBox 51"/>
+          <p:cNvSpPr txBox="1"/>
+          <p:nvPr/>
+        </p:nvSpPr>
+        <p:spPr>
+          <a:xfrm>
+            <a:off x="8284463" y="3776472"/>
+            <a:ext cx="3474720" cy="274320"/>
+          </a:xfrm>
+          <a:prstGeom prst="rect">
+            <a:avLst/>
+          </a:prstGeom>
+          <a:noFill/>
+        </p:spPr>
+        <p:txBody>
+          <a:bodyPr wrap="square" lIns="27432" rIns="27432" tIns="9144" bIns="9144" anchor="ctr">
+            <a:spAutoFit/>
+          </a:bodyPr>
+          <a:lstStyle/>
+          <a:p>
+            <a:pPr algn="l">
+              <a:lnSpc>
+                <a:spcPct val="110000"/>
+              </a:lnSpc>
+            </a:pPr>
+            <a:r>
+              <a:rPr sz="1000" b="1">
+                <a:solidFill>
+                  <a:srgbClr val="141414"/>
+                </a:solidFill>
+                <a:latin typeface="微软雅黑"/>
+                <a:ea typeface="微软雅黑"/>
+                <a:cs typeface="微软雅黑"/>
+              </a:rPr>
+              <a:t>⑥ 合规不允许接入</a:t>
+            </a:r>
+          </a:p>
+        </p:txBody>
+      </p:sp>
+      <p:sp>
+        <p:nvSpPr>
+          <p:cNvPr id="53" name="TextBox 52"/>
+          <p:cNvSpPr txBox="1"/>
+          <p:nvPr/>
+        </p:nvSpPr>
+        <p:spPr>
+          <a:xfrm>
+            <a:off x="8284463" y="5166360"/>
+            <a:ext cx="3474720" cy="694944"/>
+          </a:xfrm>
+          <a:prstGeom prst="rect">
+            <a:avLst/>
+          </a:prstGeom>
+          <a:noFill/>
+        </p:spPr>
+        <p:txBody>
+          <a:bodyPr wrap="square" lIns="27432" rIns="27432" tIns="9144" bIns="9144" anchor="t">
+            <a:spAutoFit/>
+          </a:bodyPr>
+          <a:lstStyle/>
+          <a:p>
+            <a:pPr algn="l">
+              <a:lnSpc>
+                <a:spcPct val="110000"/>
+              </a:lnSpc>
+            </a:pPr>
+            <a:r>
+              <a:rPr sz="850" b="0">
+                <a:solidFill>
+                  <a:srgbClr val="5C5C56"/>
+                </a:solidFill>
+                <a:latin typeface="微软雅黑"/>
+                <a:ea typeface="微软雅黑"/>
+                <a:cs typeface="微软雅黑"/>
+              </a:rPr>
+              <a:t>无代码签名、驱动未认证、开放高危端口或缺少审计日志，入网审批不通过</a:t>
+            </a:r>
+          </a:p>
+        </p:txBody>
+      </p:sp>
+      <p:sp>
+        <p:nvSpPr>
+          <p:cNvPr id="54" name="Rectangle 53"/>
+          <p:cNvSpPr/>
+          <p:nvPr/>
+        </p:nvSpPr>
+        <p:spPr>
+          <a:xfrm>
+            <a:off x="8284463" y="4105655"/>
+            <a:ext cx="1188720" cy="274320"/>
+          </a:xfrm>
+          <a:prstGeom prst="rect">
+            <a:avLst/>
+          </a:prstGeom>
+          <a:solidFill>
+            <a:srgbClr val="ECECEC"/>
+          </a:solidFill>
+          <a:ln>
+            <a:noFill/>
+          </a:ln>
+          <a:effectLst/>
+        </p:spPr>
+        <p:style>
+          <a:lnRef idx="1">
+            <a:schemeClr val="accent1"/>
+          </a:lnRef>
+          <a:fillRef idx="3">
+            <a:schemeClr val="accent1"/>
+          </a:fillRef>
+          <a:effectRef idx="2">
+            <a:schemeClr val="accent1"/>
+          </a:effectRef>
+          <a:fontRef idx="minor">
+            <a:schemeClr val="lt1"/>
+          </a:fontRef>
+        </p:style>
+        <p:txBody>
+          <a:bodyPr rtlCol="0" anchor="ctr" wrap="square" lIns="18288" rIns="18288" tIns="0" bIns="0"/>
+          <a:lstStyle/>
+          <a:p>
+            <a:pPr algn="ctr">
+              <a:lnSpc>
+                <a:spcPct val="100000"/>
+              </a:lnSpc>
+            </a:pPr>
+            <a:r>
+              <a:rPr sz="750" b="0">
+                <a:solidFill>
+                  <a:srgbClr val="3A3A35"/>
+                </a:solidFill>
+                <a:latin typeface="微软雅黑"/>
+                <a:ea typeface="微软雅黑"/>
+                <a:cs typeface="微软雅黑"/>
+              </a:rPr>
+              <a:t>无签名驱动</a:t>
+            </a:r>
+          </a:p>
+        </p:txBody>
+      </p:sp>
+      <p:sp>
+        <p:nvSpPr>
+          <p:cNvPr id="55" name="Rectangle 54"/>
+          <p:cNvSpPr/>
+          <p:nvPr/>
+        </p:nvSpPr>
+        <p:spPr>
+          <a:xfrm>
+            <a:off x="8284463" y="4434840"/>
+            <a:ext cx="1188720" cy="274320"/>
+          </a:xfrm>
+          <a:prstGeom prst="rect">
+            <a:avLst/>
+          </a:prstGeom>
+          <a:solidFill>
+            <a:srgbClr val="ECECEC"/>
+          </a:solidFill>
+          <a:ln>
+            <a:noFill/>
+          </a:ln>
+          <a:effectLst/>
+        </p:spPr>
+        <p:style>
+          <a:lnRef idx="1">
+            <a:schemeClr val="accent1"/>
+          </a:lnRef>
+          <a:fillRef idx="3">
+            <a:schemeClr val="accent1"/>
+          </a:fillRef>
+          <a:effectRef idx="2">
+            <a:schemeClr val="accent1"/>
+          </a:effectRef>
+          <a:fontRef idx="minor">
+            <a:schemeClr val="lt1"/>
+          </a:fontRef>
+        </p:style>
+        <p:txBody>
+          <a:bodyPr rtlCol="0" anchor="ctr" wrap="square" lIns="18288" rIns="18288" tIns="0" bIns="0"/>
+          <a:lstStyle/>
+          <a:p>
+            <a:pPr algn="ctr">
+              <a:lnSpc>
+                <a:spcPct val="100000"/>
+              </a:lnSpc>
+            </a:pPr>
+            <a:r>
+              <a:rPr sz="750" b="0">
+                <a:solidFill>
+                  <a:srgbClr val="3A3A35"/>
+                </a:solidFill>
+                <a:latin typeface="微软雅黑"/>
+                <a:ea typeface="微软雅黑"/>
+                <a:cs typeface="微软雅黑"/>
+              </a:rPr>
+              <a:t>开放高危端口</a:t>
+            </a:r>
+          </a:p>
+        </p:txBody>
+      </p:sp>
+      <p:sp>
+        <p:nvSpPr>
+          <p:cNvPr id="56" name="Rectangle 55"/>
+          <p:cNvSpPr/>
+          <p:nvPr/>
+        </p:nvSpPr>
+        <p:spPr>
+          <a:xfrm>
+            <a:off x="8284463" y="4764023"/>
+            <a:ext cx="1188720" cy="274320"/>
+          </a:xfrm>
+          <a:prstGeom prst="rect">
+            <a:avLst/>
+          </a:prstGeom>
+          <a:solidFill>
+            <a:srgbClr val="ECECEC"/>
+          </a:solidFill>
+          <a:ln>
+            <a:noFill/>
+          </a:ln>
+          <a:effectLst/>
+        </p:spPr>
+        <p:style>
+          <a:lnRef idx="1">
+            <a:schemeClr val="accent1"/>
+          </a:lnRef>
+          <a:fillRef idx="3">
+            <a:schemeClr val="accent1"/>
+          </a:fillRef>
+          <a:effectRef idx="2">
+            <a:schemeClr val="accent1"/>
+          </a:effectRef>
+          <a:fontRef idx="minor">
+            <a:schemeClr val="lt1"/>
+          </a:fontRef>
+        </p:style>
+        <p:txBody>
+          <a:bodyPr rtlCol="0" anchor="ctr" wrap="square" lIns="18288" rIns="18288" tIns="0" bIns="0"/>
+          <a:lstStyle/>
+          <a:p>
+            <a:pPr algn="ctr">
+              <a:lnSpc>
+                <a:spcPct val="100000"/>
+              </a:lnSpc>
+            </a:pPr>
+            <a:r>
+              <a:rPr sz="750" b="0">
+                <a:solidFill>
+                  <a:srgbClr val="3A3A35"/>
+                </a:solidFill>
+                <a:latin typeface="微软雅黑"/>
+                <a:ea typeface="微软雅黑"/>
+                <a:cs typeface="微软雅黑"/>
+              </a:rPr>
+              <a:t>无审计日志</a:t>
+            </a:r>
+          </a:p>
+        </p:txBody>
+      </p:sp>
+      <p:sp>
+        <p:nvSpPr>
+          <p:cNvPr id="57" name="Hexagon 56"/>
+          <p:cNvSpPr/>
+          <p:nvPr/>
+        </p:nvSpPr>
+        <p:spPr>
+          <a:xfrm>
+            <a:off x="10131551" y="4306824"/>
+            <a:ext cx="1325880" cy="640080"/>
+          </a:xfrm>
+          <a:prstGeom prst="hexagon">
+            <a:avLst/>
+          </a:prstGeom>
+          <a:solidFill>
+            <a:srgbClr val="2B2B28"/>
+          </a:solidFill>
+          <a:ln>
+            <a:noFill/>
+          </a:ln>
+          <a:effectLst/>
+        </p:spPr>
+        <p:style>
+          <a:lnRef idx="1">
+            <a:schemeClr val="accent1"/>
+          </a:lnRef>
+          <a:fillRef idx="3">
+            <a:schemeClr val="accent1"/>
+          </a:fillRef>
+          <a:effectRef idx="2">
+            <a:schemeClr val="accent1"/>
+          </a:effectRef>
+          <a:fontRef idx="minor">
+            <a:schemeClr val="lt1"/>
+          </a:fontRef>
+        </p:style>
+        <p:txBody>
+          <a:bodyPr rtlCol="0" anchor="ctr" lIns="18288" rIns="18288" tIns="0" bIns="0"/>
+          <a:lstStyle/>
+          <a:p>
+            <a:pPr algn="ctr">
+              <a:lnSpc>
+                <a:spcPct val="100000"/>
+              </a:lnSpc>
+            </a:pPr>
+            <a:r>
+              <a:rPr sz="850" b="1">
+                <a:solidFill>
+                  <a:srgbClr val="FFFFFF"/>
+                </a:solidFill>
+                <a:latin typeface="微软雅黑"/>
+                <a:ea typeface="微软雅黑"/>
+                <a:cs typeface="微软雅黑"/>
+              </a:rPr>
+              <a:t>IT 安全策略</a:t>
+            </a:r>
+          </a:p>
+        </p:txBody>
+      </p:sp>
+      <p:cxnSp>
+        <p:nvCxnSpPr>
+          <p:cNvPr id="58" name="Connector 57"/>
+          <p:cNvCxnSpPr/>
+          <p:nvPr/>
+        </p:nvCxnSpPr>
+        <p:spPr>
+          <a:xfrm>
+            <a:off x="9473184" y="4562856"/>
+            <a:ext cx="658367" cy="0"/>
+          </a:xfrm>
+          <a:prstGeom prst="line">
+            <a:avLst/>
+          </a:prstGeom>
+          <a:ln w="12700">
+            <a:solidFill>
+              <a:srgbClr val="5C5C56"/>
+            </a:solidFill>
+            <a:prstDash val="dash"/>
+          </a:ln>
+        </p:spPr>
+        <p:style>
+          <a:lnRef idx="2">
+            <a:schemeClr val="accent1"/>
+          </a:lnRef>
+          <a:fillRef idx="0">
+            <a:schemeClr val="accent1"/>
+          </a:fillRef>
+          <a:effectRef idx="1">
+            <a:schemeClr val="accent1"/>
+          </a:effectRef>
+          <a:fontRef idx="minor">
+            <a:schemeClr val="tx1"/>
+          </a:fontRef>
+        </p:style>
+      </p:cxnSp>
+      <p:sp>
+        <p:nvSpPr>
+          <p:cNvPr id="59" name="TextBox 58"/>
+          <p:cNvSpPr txBox="1"/>
+          <p:nvPr/>
+        </p:nvSpPr>
+        <p:spPr>
+          <a:xfrm>
+            <a:off x="9674351" y="4297679"/>
+            <a:ext cx="256032" cy="274320"/>
+          </a:xfrm>
+          <a:prstGeom prst="rect">
+            <a:avLst/>
+          </a:prstGeom>
+          <a:noFill/>
+        </p:spPr>
+        <p:txBody>
+          <a:bodyPr wrap="square" lIns="27432" rIns="27432" tIns="9144" bIns="9144" anchor="ctr">
+            <a:spAutoFit/>
+          </a:bodyPr>
+          <a:lstStyle/>
+          <a:p>
+            <a:pPr algn="ctr">
+              <a:lnSpc>
+                <a:spcPct val="110000"/>
+              </a:lnSpc>
+            </a:pPr>
+            <a:r>
+              <a:rPr sz="1300" b="1">
+                <a:solidFill>
+                  <a:srgbClr val="8B0F1A"/>
+                </a:solidFill>
+                <a:latin typeface="微软雅黑"/>
+                <a:ea typeface="微软雅黑"/>
+                <a:cs typeface="微软雅黑"/>
+              </a:rPr>
+              <a:t>×</a:t>
+            </a:r>
+          </a:p>
+        </p:txBody>
+      </p:sp>
+      <p:sp>
+        <p:nvSpPr>
+          <p:cNvPr id="60" name="Rectangle 59"/>
+          <p:cNvSpPr/>
+          <p:nvPr/>
+        </p:nvSpPr>
+        <p:spPr>
+          <a:xfrm>
+            <a:off x="274320" y="6400800"/>
+            <a:ext cx="11640312" cy="12801"/>
+          </a:xfrm>
+          <a:prstGeom prst="rect">
+            <a:avLst/>
+          </a:prstGeom>
+          <a:solidFill>
+            <a:srgbClr val="D9D6CD"/>
+          </a:solidFill>
+          <a:ln>
+            <a:noFill/>
+          </a:ln>
+          <a:effectLst/>
+        </p:spPr>
+        <p:style>
+          <a:lnRef idx="1">
+            <a:schemeClr val="accent1"/>
+          </a:lnRef>
+          <a:fillRef idx="3">
+            <a:schemeClr val="accent1"/>
+          </a:fillRef>
+          <a:effectRef idx="2">
+            <a:schemeClr val="accent1"/>
+          </a:effectRef>
+          <a:fontRef idx="minor">
+            <a:schemeClr val="lt1"/>
+          </a:fontRef>
+        </p:style>
+        <p:txBody>
+          <a:bodyPr rtlCol="0" anchor="ctr" wrap="square"/>
+          <a:lstStyle/>
+          <a:p>
+            <a:pPr algn="ctr"/>
+          </a:p>
+        </p:txBody>
+      </p:sp>
+      <p:sp>
+        <p:nvSpPr>
+          <p:cNvPr id="61" name="TextBox 60"/>
+          <p:cNvSpPr txBox="1"/>
+          <p:nvPr/>
+        </p:nvSpPr>
+        <p:spPr>
+          <a:xfrm>
+            <a:off x="274320" y="6446520"/>
+            <a:ext cx="6675120" cy="274320"/>
+          </a:xfrm>
+          <a:prstGeom prst="rect">
+            <a:avLst/>
+          </a:prstGeom>
+          <a:noFill/>
+        </p:spPr>
+        <p:txBody>
+          <a:bodyPr wrap="square" lIns="27432" rIns="27432" tIns="9144" bIns="9144" anchor="ctr">
+            <a:spAutoFit/>
+          </a:bodyPr>
+          <a:lstStyle/>
+          <a:p>
+            <a:pPr algn="l">
+              <a:lnSpc>
+                <a:spcPct val="110000"/>
+              </a:lnSpc>
+            </a:pPr>
+            <a:r>
+              <a:rPr sz="850" b="0">
+                <a:solidFill>
+                  <a:srgbClr val="5C5C56"/>
+                </a:solidFill>
+                <a:latin typeface="微软雅黑"/>
+                <a:ea typeface="微软雅黑"/>
+                <a:cs typeface="微软雅黑"/>
+              </a:rPr>
+              <a:t>① ② 属网络可达性，③ 属运行环境，④ 属接口能力，⑤ ⑥ 属授权与合规</a:t>
+            </a:r>
+          </a:p>
+        </p:txBody>
+      </p:sp>
+      <p:sp>
+        <p:nvSpPr>
+          <p:cNvPr id="62" name="TextBox 61"/>
+          <p:cNvSpPr txBox="1"/>
+          <p:nvPr/>
+        </p:nvSpPr>
+        <p:spPr>
+          <a:xfrm>
+            <a:off x="7040880" y="6446520"/>
+            <a:ext cx="4873752" cy="274320"/>
+          </a:xfrm>
+          <a:prstGeom prst="rect">
+            <a:avLst/>
+          </a:prstGeom>
+          <a:noFill/>
+        </p:spPr>
+        <p:txBody>
+          <a:bodyPr wrap="square" lIns="27432" rIns="27432" tIns="9144" bIns="9144" anchor="ctr">
+            <a:spAutoFit/>
+          </a:bodyPr>
+          <a:lstStyle/>
+          <a:p>
+            <a:pPr algn="r">
+              <a:lnSpc>
+                <a:spcPct val="110000"/>
+              </a:lnSpc>
+            </a:pPr>
+            <a:r>
+              <a:rPr sz="850" b="0">
+                <a:solidFill>
+                  <a:srgbClr val="5C5C56"/>
+                </a:solidFill>
+                <a:latin typeface="微软雅黑"/>
+                <a:ea typeface="微软雅黑"/>
+                <a:cs typeface="微软雅黑"/>
+              </a:rPr>
+              <a:t>除策略类问题可申请例外外，其余多需在我方侧以代理、旁路或协议适配方式绕开</a:t>
+            </a:r>
+          </a:p>
+        </p:txBody>
+      </p:sp>
+    </p:spTree>
+  </p:cSld>
+  <p:clrMapOvr>
+    <a:masterClrMapping/>
+  </p:clrMapOvr>
+</p:sld>
+</file>
+
+<file path=ppt/slides/slide3.xml><?xml version="1.0" encoding="utf-8"?>
+<p:sld xmlns:a="http://schemas.openxmlformats.org/drawingml/2006/main" xmlns:p="http://schemas.openxmlformats.org/presentationml/2006/main" xmlns:r="http://schemas.openxmlformats.org/officeDocument/2006/relationships">
+  <p:cSld>
+    <p:spTree>
+      <p:nvGrpSpPr>
+        <p:cNvPr id="1" name=""/>
+        <p:cNvGrpSpPr/>
+        <p:nvPr/>
+      </p:nvGrpSpPr>
+      <p:grpSpPr/>
+      <p:sp>
+        <p:nvSpPr>
+          <p:cNvPr id="2" name="TextBox 1"/>
+          <p:cNvSpPr txBox="1"/>
+          <p:nvPr/>
+        </p:nvSpPr>
+        <p:spPr>
+          <a:xfrm>
+            <a:off x="274320" y="201168"/>
+            <a:ext cx="10881360" cy="457200"/>
+          </a:xfrm>
+          <a:prstGeom prst="rect">
+            <a:avLst/>
+          </a:prstGeom>
+          <a:noFill/>
+        </p:spPr>
+        <p:txBody>
+          <a:bodyPr wrap="square" lIns="27432" rIns="27432" tIns="9144" bIns="9144" anchor="ctr">
+            <a:spAutoFit/>
+          </a:bodyPr>
+          <a:lstStyle/>
+          <a:p>
+            <a:pPr algn="l">
+              <a:lnSpc>
+                <a:spcPct val="110000"/>
+              </a:lnSpc>
+            </a:pPr>
+            <a:r>
+              <a:rPr sz="2400" b="1">
+                <a:solidFill>
+                  <a:srgbClr val="141414"/>
+                </a:solidFill>
+                <a:latin typeface="微软雅黑"/>
+                <a:ea typeface="微软雅黑"/>
+                <a:cs typeface="微软雅黑"/>
+              </a:rPr>
+              <a:t>供应商设备软件的形态与 ATE 接入方式</a:t>
+            </a:r>
+          </a:p>
+        </p:txBody>
+      </p:sp>
+      <p:sp>
+        <p:nvSpPr>
+          <p:cNvPr id="3" name="TextBox 2"/>
+          <p:cNvSpPr txBox="1"/>
+          <p:nvPr/>
+        </p:nvSpPr>
+        <p:spPr>
+          <a:xfrm>
+            <a:off x="274320" y="658368"/>
+            <a:ext cx="11155680" cy="310896"/>
+          </a:xfrm>
+          <a:prstGeom prst="rect">
+            <a:avLst/>
+          </a:prstGeom>
+          <a:noFill/>
+        </p:spPr>
+        <p:txBody>
+          <a:bodyPr wrap="square" lIns="27432" rIns="27432" tIns="9144" bIns="9144" anchor="ctr">
+            <a:spAutoFit/>
+          </a:bodyPr>
+          <a:lstStyle/>
+          <a:p>
+            <a:pPr algn="l">
+              <a:lnSpc>
+                <a:spcPct val="110000"/>
+              </a:lnSpc>
+            </a:pPr>
+            <a:r>
+              <a:rPr sz="1050" b="0">
+                <a:solidFill>
+                  <a:srgbClr val="5C5C56"/>
+                </a:solidFill>
+                <a:latin typeface="微软雅黑"/>
+                <a:ea typeface="微软雅黑"/>
+                <a:cs typeface="微软雅黑"/>
+              </a:rPr>
+              <a:t>同一台设备可能同时提供多种形态；ATE 侧以统一的设备抽象层屏蔽差异，测试用例只面向能力接口编程，不直接依赖供应商实现</a:t>
+            </a:r>
+          </a:p>
+        </p:txBody>
+      </p:sp>
+      <p:sp>
+        <p:nvSpPr>
+          <p:cNvPr id="4" name="Rectangle 3"/>
+          <p:cNvSpPr/>
+          <p:nvPr/>
+        </p:nvSpPr>
+        <p:spPr>
+          <a:xfrm>
+            <a:off x="274320" y="987552"/>
+            <a:ext cx="11640312" cy="25603"/>
+          </a:xfrm>
+          <a:prstGeom prst="rect">
+            <a:avLst/>
+          </a:prstGeom>
+          <a:solidFill>
+            <a:srgbClr val="8B0F1A"/>
+          </a:solidFill>
+          <a:ln>
+            <a:noFill/>
+          </a:ln>
+          <a:effectLst/>
+        </p:spPr>
+        <p:style>
+          <a:lnRef idx="1">
+            <a:schemeClr val="accent1"/>
+          </a:lnRef>
+          <a:fillRef idx="3">
+            <a:schemeClr val="accent1"/>
+          </a:fillRef>
+          <a:effectRef idx="2">
+            <a:schemeClr val="accent1"/>
+          </a:effectRef>
+          <a:fontRef idx="minor">
+            <a:schemeClr val="lt1"/>
+          </a:fontRef>
+        </p:style>
+        <p:txBody>
+          <a:bodyPr rtlCol="0" anchor="ctr" wrap="square"/>
+          <a:lstStyle/>
+          <a:p>
+            <a:pPr algn="ctr"/>
+          </a:p>
+        </p:txBody>
+      </p:sp>
+      <p:sp>
+        <p:nvSpPr>
+          <p:cNvPr id="5" name="TextBox 4"/>
+          <p:cNvSpPr txBox="1"/>
+          <p:nvPr/>
+        </p:nvSpPr>
+        <p:spPr>
+          <a:xfrm>
+            <a:off x="274320" y="1097280"/>
+            <a:ext cx="1920240" cy="237744"/>
+          </a:xfrm>
+          <a:prstGeom prst="rect">
+            <a:avLst/>
+          </a:prstGeom>
+          <a:noFill/>
+        </p:spPr>
+        <p:txBody>
+          <a:bodyPr wrap="square" lIns="27432" rIns="27432" tIns="9144" bIns="9144" anchor="ctr">
+            <a:spAutoFit/>
+          </a:bodyPr>
+          <a:lstStyle/>
+          <a:p>
+            <a:pPr algn="l">
+              <a:lnSpc>
+                <a:spcPct val="110000"/>
+              </a:lnSpc>
+            </a:pPr>
+            <a:r>
+              <a:rPr sz="1000" b="1">
+                <a:solidFill>
+                  <a:srgbClr val="8B0F1A"/>
+                </a:solidFill>
+                <a:latin typeface="微软雅黑"/>
+                <a:ea typeface="微软雅黑"/>
+                <a:cs typeface="微软雅黑"/>
+              </a:rPr>
+              <a:t>① ATE 测试执行层</a:t>
+            </a:r>
+          </a:p>
+        </p:txBody>
+      </p:sp>
+      <p:sp>
+        <p:nvSpPr>
+          <p:cNvPr id="6" name="TextBox 5"/>
+          <p:cNvSpPr txBox="1"/>
+          <p:nvPr/>
+        </p:nvSpPr>
+        <p:spPr>
+          <a:xfrm>
+            <a:off x="2670048" y="1097280"/>
+            <a:ext cx="3566160" cy="237744"/>
+          </a:xfrm>
+          <a:prstGeom prst="rect">
+            <a:avLst/>
+          </a:prstGeom>
+          <a:noFill/>
+        </p:spPr>
+        <p:txBody>
+          <a:bodyPr wrap="square" lIns="27432" rIns="27432" tIns="9144" bIns="9144" anchor="ctr">
+            <a:spAutoFit/>
+          </a:bodyPr>
+          <a:lstStyle/>
+          <a:p>
+            <a:pPr algn="l">
+              <a:lnSpc>
+                <a:spcPct val="110000"/>
+              </a:lnSpc>
+            </a:pPr>
+            <a:r>
+              <a:rPr sz="1000" b="1">
+                <a:solidFill>
+                  <a:srgbClr val="8B0F1A"/>
+                </a:solidFill>
+                <a:latin typeface="微软雅黑"/>
+                <a:ea typeface="微软雅黑"/>
+                <a:cs typeface="微软雅黑"/>
+              </a:rPr>
+              <a:t>② 设备抽象与适配层（对外统一能力接口，屏蔽形态差异）</a:t>
+            </a:r>
+          </a:p>
+        </p:txBody>
+      </p:sp>
+      <p:sp>
+        <p:nvSpPr>
+          <p:cNvPr id="7" name="TextBox 6"/>
+          <p:cNvSpPr txBox="1"/>
+          <p:nvPr/>
+        </p:nvSpPr>
+        <p:spPr>
+          <a:xfrm>
+            <a:off x="6803136" y="1097280"/>
+            <a:ext cx="5111496" cy="237744"/>
+          </a:xfrm>
+          <a:prstGeom prst="rect">
+            <a:avLst/>
+          </a:prstGeom>
+          <a:noFill/>
+        </p:spPr>
+        <p:txBody>
+          <a:bodyPr wrap="square" lIns="27432" rIns="27432" tIns="9144" bIns="9144" anchor="ctr">
+            <a:spAutoFit/>
+          </a:bodyPr>
+          <a:lstStyle/>
+          <a:p>
+            <a:pPr algn="l">
+              <a:lnSpc>
+                <a:spcPct val="110000"/>
+              </a:lnSpc>
+            </a:pPr>
+            <a:r>
+              <a:rPr sz="1000" b="1">
+                <a:solidFill>
+                  <a:srgbClr val="8B0F1A"/>
+                </a:solidFill>
+                <a:latin typeface="微软雅黑"/>
+                <a:ea typeface="微软雅黑"/>
+                <a:cs typeface="微软雅黑"/>
+              </a:rPr>
+              <a:t>③ 供应商提供的软件形态（按提供方式分四类）</a:t>
+            </a:r>
+          </a:p>
+        </p:txBody>
+      </p:sp>
+      <p:sp>
+        <p:nvSpPr>
+          <p:cNvPr id="8" name="Right Arrow 7"/>
+          <p:cNvSpPr/>
+          <p:nvPr/>
+        </p:nvSpPr>
+        <p:spPr>
+          <a:xfrm>
+            <a:off x="2157984" y="3657600"/>
+            <a:ext cx="420624" cy="310896"/>
+          </a:xfrm>
+          <a:prstGeom prst="rightArrow">
+            <a:avLst/>
+          </a:prstGeom>
+          <a:solidFill>
+            <a:srgbClr val="8B0F1A"/>
+          </a:solidFill>
+          <a:ln>
+            <a:noFill/>
+          </a:ln>
+          <a:effectLst/>
+        </p:spPr>
+        <p:style>
+          <a:lnRef idx="1">
+            <a:schemeClr val="accent1"/>
+          </a:lnRef>
+          <a:fillRef idx="3">
+            <a:schemeClr val="accent1"/>
+          </a:fillRef>
+          <a:effectRef idx="2">
+            <a:schemeClr val="accent1"/>
+          </a:effectRef>
+          <a:fontRef idx="minor">
+            <a:schemeClr val="lt1"/>
+          </a:fontRef>
+        </p:style>
+        <p:txBody>
+          <a:bodyPr rtlCol="0" anchor="ctr"/>
+          <a:lstStyle/>
+          <a:p>
+            <a:pPr algn="ctr"/>
+          </a:p>
+        </p:txBody>
+      </p:sp>
+      <p:sp>
+        <p:nvSpPr>
+          <p:cNvPr id="9" name="Right Arrow 8"/>
+          <p:cNvSpPr/>
+          <p:nvPr/>
+        </p:nvSpPr>
+        <p:spPr>
+          <a:xfrm>
+            <a:off x="6291072" y="3657600"/>
+            <a:ext cx="420624" cy="310896"/>
+          </a:xfrm>
+          <a:prstGeom prst="rightArrow">
+            <a:avLst/>
+          </a:prstGeom>
+          <a:solidFill>
+            <a:srgbClr val="8B0F1A"/>
+          </a:solidFill>
+          <a:ln>
+            <a:noFill/>
+          </a:ln>
+          <a:effectLst/>
+        </p:spPr>
+        <p:style>
+          <a:lnRef idx="1">
+            <a:schemeClr val="accent1"/>
+          </a:lnRef>
+          <a:fillRef idx="3">
+            <a:schemeClr val="accent1"/>
+          </a:fillRef>
+          <a:effectRef idx="2">
+            <a:schemeClr val="accent1"/>
+          </a:effectRef>
+          <a:fontRef idx="minor">
+            <a:schemeClr val="lt1"/>
+          </a:fontRef>
+        </p:style>
+        <p:txBody>
+          <a:bodyPr rtlCol="0" anchor="ctr"/>
+          <a:lstStyle/>
+          <a:p>
+            <a:pPr algn="ctr"/>
+          </a:p>
+        </p:txBody>
+      </p:sp>
+      <p:sp>
+        <p:nvSpPr>
+          <p:cNvPr id="10" name="Rounded Rectangle 9"/>
+          <p:cNvSpPr/>
+          <p:nvPr/>
+        </p:nvSpPr>
+        <p:spPr>
+          <a:xfrm>
+            <a:off x="274320" y="1371600"/>
+            <a:ext cx="1920240" cy="4882896"/>
+          </a:xfrm>
+          <a:prstGeom prst="roundRect">
+            <a:avLst>
+              <a:gd name="adj" fmla="val 5000"/>
+            </a:avLst>
+          </a:prstGeom>
+          <a:solidFill>
+            <a:srgbClr val="FFFFFF"/>
+          </a:solidFill>
+          <a:ln w="17780">
+            <a:solidFill>
+              <a:srgbClr val="8B0F1A"/>
+            </a:solidFill>
+          </a:ln>
+          <a:effectLst/>
+        </p:spPr>
+        <p:style>
+          <a:lnRef idx="1">
+            <a:schemeClr val="accent1"/>
+          </a:lnRef>
+          <a:fillRef idx="3">
+            <a:schemeClr val="accent1"/>
+          </a:fillRef>
+          <a:effectRef idx="2">
+            <a:schemeClr val="accent1"/>
+          </a:effectRef>
+          <a:fontRef idx="minor">
+            <a:schemeClr val="lt1"/>
+          </a:fontRef>
+        </p:style>
+        <p:txBody>
+          <a:bodyPr rtlCol="0" anchor="ctr" wrap="square"/>
+          <a:lstStyle/>
+          <a:p>
+            <a:pPr algn="ctr"/>
+          </a:p>
+        </p:txBody>
+      </p:sp>
+      <p:sp>
+        <p:nvSpPr>
+          <p:cNvPr id="11" name="Rounded Rectangle 10"/>
+          <p:cNvSpPr/>
+          <p:nvPr/>
+        </p:nvSpPr>
+        <p:spPr>
+          <a:xfrm>
+            <a:off x="384048" y="1517904"/>
+            <a:ext cx="1700784" cy="1298448"/>
+          </a:xfrm>
+          <a:prstGeom prst="roundRect">
+            <a:avLst>
+              <a:gd name="adj" fmla="val 5000"/>
+            </a:avLst>
+          </a:prstGeom>
+          <a:solidFill>
+            <a:srgbClr val="ECECEC"/>
+          </a:solidFill>
+          <a:ln>
+            <a:noFill/>
+          </a:ln>
+          <a:effectLst/>
+        </p:spPr>
+        <p:style>
+          <a:lnRef idx="1">
+            <a:schemeClr val="accent1"/>
+          </a:lnRef>
+          <a:fillRef idx="3">
+            <a:schemeClr val="accent1"/>
+          </a:fillRef>
+          <a:effectRef idx="2">
+            <a:schemeClr val="accent1"/>
+          </a:effectRef>
+          <a:fontRef idx="minor">
+            <a:schemeClr val="lt1"/>
+          </a:fontRef>
+        </p:style>
+        <p:txBody>
+          <a:bodyPr rtlCol="0" anchor="ctr" wrap="square"/>
+          <a:lstStyle/>
+          <a:p>
+            <a:pPr algn="ctr"/>
+          </a:p>
+        </p:txBody>
+      </p:sp>
+      <p:sp>
+        <p:nvSpPr>
+          <p:cNvPr id="12" name="TextBox 11"/>
+          <p:cNvSpPr txBox="1"/>
+          <p:nvPr/>
+        </p:nvSpPr>
+        <p:spPr>
+          <a:xfrm>
+            <a:off x="420623" y="1609344"/>
+            <a:ext cx="1627632" cy="1115568"/>
+          </a:xfrm>
+          <a:prstGeom prst="rect">
+            <a:avLst/>
+          </a:prstGeom>
+          <a:noFill/>
+        </p:spPr>
+        <p:txBody>
+          <a:bodyPr wrap="square" lIns="27432" rIns="27432" tIns="9144" bIns="9144" anchor="ctr">
+            <a:spAutoFit/>
+          </a:bodyPr>
+          <a:lstStyle/>
+          <a:p>
+            <a:pPr algn="ctr">
+              <a:lnSpc>
+                <a:spcPct val="110000"/>
               </a:lnSpc>
             </a:pPr>
             <a:r>
@@ -3771,13 +8424,229 @@
                 <a:ea typeface="微软雅黑"/>
                 <a:cs typeface="微软雅黑"/>
               </a:rPr>
+              <a:t>测试用例</a:t>
+            </a:r>
+          </a:p>
+          <a:p>
+            <a:pPr algn="ctr">
+              <a:lnSpc>
+                <a:spcPct val="110000"/>
+              </a:lnSpc>
+              <a:spcBef>
+                <a:spcPts val="300"/>
+              </a:spcBef>
+            </a:pPr>
+            <a:r>
+              <a:rPr sz="900" b="0">
+                <a:solidFill>
+                  <a:srgbClr val="4A4A45"/>
+                </a:solidFill>
+                <a:latin typeface="微软雅黑"/>
+                <a:ea typeface="微软雅黑"/>
+                <a:cs typeface="微软雅黑"/>
+              </a:rPr>
+              <a:t>pytest 用例 / 测试程序</a:t>
+            </a:r>
+          </a:p>
+        </p:txBody>
+      </p:sp>
+      <p:sp>
+        <p:nvSpPr>
+          <p:cNvPr id="13" name="Rounded Rectangle 12"/>
+          <p:cNvSpPr/>
+          <p:nvPr/>
+        </p:nvSpPr>
+        <p:spPr>
+          <a:xfrm>
+            <a:off x="384048" y="3145536"/>
+            <a:ext cx="1700784" cy="1298448"/>
+          </a:xfrm>
+          <a:prstGeom prst="roundRect">
+            <a:avLst>
+              <a:gd name="adj" fmla="val 5000"/>
+            </a:avLst>
+          </a:prstGeom>
+          <a:solidFill>
+            <a:srgbClr val="ECECEC"/>
+          </a:solidFill>
+          <a:ln>
+            <a:noFill/>
+          </a:ln>
+          <a:effectLst/>
+        </p:spPr>
+        <p:style>
+          <a:lnRef idx="1">
+            <a:schemeClr val="accent1"/>
+          </a:lnRef>
+          <a:fillRef idx="3">
+            <a:schemeClr val="accent1"/>
+          </a:fillRef>
+          <a:effectRef idx="2">
+            <a:schemeClr val="accent1"/>
+          </a:effectRef>
+          <a:fontRef idx="minor">
+            <a:schemeClr val="lt1"/>
+          </a:fontRef>
+        </p:style>
+        <p:txBody>
+          <a:bodyPr rtlCol="0" anchor="ctr" wrap="square"/>
+          <a:lstStyle/>
+          <a:p>
+            <a:pPr algn="ctr"/>
+          </a:p>
+        </p:txBody>
+      </p:sp>
+      <p:sp>
+        <p:nvSpPr>
+          <p:cNvPr id="14" name="TextBox 13"/>
+          <p:cNvSpPr txBox="1"/>
+          <p:nvPr/>
+        </p:nvSpPr>
+        <p:spPr>
+          <a:xfrm>
+            <a:off x="420623" y="3236976"/>
+            <a:ext cx="1627632" cy="1115568"/>
+          </a:xfrm>
+          <a:prstGeom prst="rect">
+            <a:avLst/>
+          </a:prstGeom>
+          <a:noFill/>
+        </p:spPr>
+        <p:txBody>
+          <a:bodyPr wrap="square" lIns="27432" rIns="27432" tIns="9144" bIns="9144" anchor="ctr">
+            <a:spAutoFit/>
+          </a:bodyPr>
+          <a:lstStyle/>
+          <a:p>
+            <a:pPr algn="ctr">
+              <a:lnSpc>
+                <a:spcPct val="110000"/>
+              </a:lnSpc>
+            </a:pPr>
+            <a:r>
+              <a:rPr sz="1150" b="1">
+                <a:solidFill>
+                  <a:srgbClr val="141414"/>
+                </a:solidFill>
+                <a:latin typeface="微软雅黑"/>
+                <a:ea typeface="微软雅黑"/>
+                <a:cs typeface="微软雅黑"/>
+              </a:rPr>
+              <a:t>能力调用</a:t>
+            </a:r>
+          </a:p>
+          <a:p>
+            <a:pPr algn="ctr">
+              <a:lnSpc>
+                <a:spcPct val="110000"/>
+              </a:lnSpc>
+              <a:spcBef>
+                <a:spcPts val="300"/>
+              </a:spcBef>
+            </a:pPr>
+            <a:r>
+              <a:rPr sz="900" b="0">
+                <a:solidFill>
+                  <a:srgbClr val="4A4A45"/>
+                </a:solidFill>
+                <a:latin typeface="微软雅黑"/>
+                <a:ea typeface="微软雅黑"/>
+                <a:cs typeface="微软雅黑"/>
+              </a:rPr>
+              <a:t>连接 · 配置 · 触发 · 采集 · 判定</a:t>
+            </a:r>
+          </a:p>
+        </p:txBody>
+      </p:sp>
+      <p:sp>
+        <p:nvSpPr>
+          <p:cNvPr id="15" name="Rounded Rectangle 14"/>
+          <p:cNvSpPr/>
+          <p:nvPr/>
+        </p:nvSpPr>
+        <p:spPr>
+          <a:xfrm>
+            <a:off x="384048" y="4773168"/>
+            <a:ext cx="1700784" cy="1298448"/>
+          </a:xfrm>
+          <a:prstGeom prst="roundRect">
+            <a:avLst>
+              <a:gd name="adj" fmla="val 5000"/>
+            </a:avLst>
+          </a:prstGeom>
+          <a:solidFill>
+            <a:srgbClr val="ECECEC"/>
+          </a:solidFill>
+          <a:ln>
+            <a:noFill/>
+          </a:ln>
+          <a:effectLst/>
+        </p:spPr>
+        <p:style>
+          <a:lnRef idx="1">
+            <a:schemeClr val="accent1"/>
+          </a:lnRef>
+          <a:fillRef idx="3">
+            <a:schemeClr val="accent1"/>
+          </a:fillRef>
+          <a:effectRef idx="2">
+            <a:schemeClr val="accent1"/>
+          </a:effectRef>
+          <a:fontRef idx="minor">
+            <a:schemeClr val="lt1"/>
+          </a:fontRef>
+        </p:style>
+        <p:txBody>
+          <a:bodyPr rtlCol="0" anchor="ctr" wrap="square"/>
+          <a:lstStyle/>
+          <a:p>
+            <a:pPr algn="ctr"/>
+          </a:p>
+        </p:txBody>
+      </p:sp>
+      <p:sp>
+        <p:nvSpPr>
+          <p:cNvPr id="16" name="TextBox 15"/>
+          <p:cNvSpPr txBox="1"/>
+          <p:nvPr/>
+        </p:nvSpPr>
+        <p:spPr>
+          <a:xfrm>
+            <a:off x="420623" y="4864607"/>
+            <a:ext cx="1627632" cy="1115568"/>
+          </a:xfrm>
+          <a:prstGeom prst="rect">
+            <a:avLst/>
+          </a:prstGeom>
+          <a:noFill/>
+        </p:spPr>
+        <p:txBody>
+          <a:bodyPr wrap="square" lIns="27432" rIns="27432" tIns="9144" bIns="9144" anchor="ctr">
+            <a:spAutoFit/>
+          </a:bodyPr>
+          <a:lstStyle/>
+          <a:p>
+            <a:pPr algn="ctr">
+              <a:lnSpc>
+                <a:spcPct val="110000"/>
+              </a:lnSpc>
+            </a:pPr>
+            <a:r>
+              <a:rPr sz="1150" b="1">
+                <a:solidFill>
+                  <a:srgbClr val="141414"/>
+                </a:solidFill>
+                <a:latin typeface="微软雅黑"/>
+                <a:ea typeface="微软雅黑"/>
+                <a:cs typeface="微软雅黑"/>
+              </a:rPr>
               <a:t>结果与追溯</a:t>
             </a:r>
           </a:p>
           <a:p>
             <a:pPr algn="ctr">
               <a:lnSpc>
-                <a:spcPct val="108000"/>
+                <a:spcPct val="110000"/>
               </a:lnSpc>
               <a:spcBef>
                 <a:spcPts val="300"/>
@@ -3882,10 +8751,14 @@
           </a:fontRef>
         </p:style>
         <p:txBody>
-          <a:bodyPr rtlCol="0" anchor="ctr" lIns="27432" rIns="27432" tIns="9144" bIns="9144"/>
-          <a:lstStyle/>
-          <a:p>
-            <a:pPr algn="ctr"/>
+          <a:bodyPr rtlCol="0" anchor="ctr" lIns="18288" rIns="18288" tIns="0" bIns="0"/>
+          <a:lstStyle/>
+          <a:p>
+            <a:pPr algn="ctr">
+              <a:lnSpc>
+                <a:spcPct val="100000"/>
+              </a:lnSpc>
+            </a:pPr>
             <a:r>
               <a:rPr sz="850" b="1">
                 <a:solidFill>
@@ -3924,7 +8797,7 @@
           <a:p>
             <a:pPr algn="l">
               <a:lnSpc>
-                <a:spcPct val="108000"/>
+                <a:spcPct val="110000"/>
               </a:lnSpc>
             </a:pPr>
             <a:r>
@@ -3942,7 +8815,7 @@
           <a:p>
             <a:pPr algn="l">
               <a:lnSpc>
-                <a:spcPct val="108000"/>
+                <a:spcPct val="110000"/>
               </a:lnSpc>
               <a:spcBef>
                 <a:spcPts val="200"/>
@@ -4047,10 +8920,14 @@
           </a:fontRef>
         </p:style>
         <p:txBody>
-          <a:bodyPr rtlCol="0" anchor="ctr" lIns="27432" rIns="27432" tIns="9144" bIns="9144"/>
-          <a:lstStyle/>
-          <a:p>
-            <a:pPr algn="ctr"/>
+          <a:bodyPr rtlCol="0" anchor="ctr" lIns="18288" rIns="18288" tIns="0" bIns="0"/>
+          <a:lstStyle/>
+          <a:p>
+            <a:pPr algn="ctr">
+              <a:lnSpc>
+                <a:spcPct val="100000"/>
+              </a:lnSpc>
+            </a:pPr>
             <a:r>
               <a:rPr sz="850" b="1">
                 <a:solidFill>
@@ -4089,7 +8966,7 @@
           <a:p>
             <a:pPr algn="l">
               <a:lnSpc>
-                <a:spcPct val="108000"/>
+                <a:spcPct val="110000"/>
               </a:lnSpc>
             </a:pPr>
             <a:r>
@@ -4107,7 +8984,7 @@
           <a:p>
             <a:pPr algn="l">
               <a:lnSpc>
-                <a:spcPct val="108000"/>
+                <a:spcPct val="110000"/>
               </a:lnSpc>
               <a:spcBef>
                 <a:spcPts val="200"/>
@@ -4212,10 +9089,14 @@
           </a:fontRef>
         </p:style>
         <p:txBody>
-          <a:bodyPr rtlCol="0" anchor="ctr" lIns="27432" rIns="27432" tIns="9144" bIns="9144"/>
-          <a:lstStyle/>
-          <a:p>
-            <a:pPr algn="ctr"/>
+          <a:bodyPr rtlCol="0" anchor="ctr" lIns="18288" rIns="18288" tIns="0" bIns="0"/>
+          <a:lstStyle/>
+          <a:p>
+            <a:pPr algn="ctr">
+              <a:lnSpc>
+                <a:spcPct val="100000"/>
+              </a:lnSpc>
+            </a:pPr>
             <a:r>
               <a:rPr sz="850" b="1">
                 <a:solidFill>
@@ -4254,7 +9135,7 @@
           <a:p>
             <a:pPr algn="l">
               <a:lnSpc>
-                <a:spcPct val="108000"/>
+                <a:spcPct val="110000"/>
               </a:lnSpc>
             </a:pPr>
             <a:r>
@@ -4272,7 +9153,7 @@
           <a:p>
             <a:pPr algn="l">
               <a:lnSpc>
-                <a:spcPct val="108000"/>
+                <a:spcPct val="110000"/>
               </a:lnSpc>
               <a:spcBef>
                 <a:spcPts val="200"/>
@@ -4377,10 +9258,14 @@
           </a:fontRef>
         </p:style>
         <p:txBody>
-          <a:bodyPr rtlCol="0" anchor="ctr" lIns="27432" rIns="27432" tIns="9144" bIns="9144"/>
-          <a:lstStyle/>
-          <a:p>
-            <a:pPr algn="ctr"/>
+          <a:bodyPr rtlCol="0" anchor="ctr" lIns="18288" rIns="18288" tIns="0" bIns="0"/>
+          <a:lstStyle/>
+          <a:p>
+            <a:pPr algn="ctr">
+              <a:lnSpc>
+                <a:spcPct val="100000"/>
+              </a:lnSpc>
+            </a:pPr>
             <a:r>
               <a:rPr sz="850" b="1">
                 <a:solidFill>
@@ -4419,7 +9304,7 @@
           <a:p>
             <a:pPr algn="l">
               <a:lnSpc>
-                <a:spcPct val="108000"/>
+                <a:spcPct val="110000"/>
               </a:lnSpc>
             </a:pPr>
             <a:r>
@@ -4437,7 +9322,7 @@
           <a:p>
             <a:pPr algn="l">
               <a:lnSpc>
-                <a:spcPct val="108000"/>
+                <a:spcPct val="110000"/>
               </a:lnSpc>
               <a:spcBef>
                 <a:spcPts val="200"/>
@@ -4542,10 +9427,14 @@
           </a:fontRef>
         </p:style>
         <p:txBody>
-          <a:bodyPr rtlCol="0" anchor="ctr" lIns="27432" rIns="27432" tIns="9144" bIns="9144"/>
-          <a:lstStyle/>
-          <a:p>
-            <a:pPr algn="ctr"/>
+          <a:bodyPr rtlCol="0" anchor="ctr" lIns="18288" rIns="18288" tIns="0" bIns="0"/>
+          <a:lstStyle/>
+          <a:p>
+            <a:pPr algn="ctr">
+              <a:lnSpc>
+                <a:spcPct val="100000"/>
+              </a:lnSpc>
+            </a:pPr>
             <a:r>
               <a:rPr sz="850" b="1">
                 <a:solidFill>
@@ -4584,7 +9473,7 @@
           <a:p>
             <a:pPr algn="l">
               <a:lnSpc>
-                <a:spcPct val="108000"/>
+                <a:spcPct val="110000"/>
               </a:lnSpc>
             </a:pPr>
             <a:r>
@@ -4602,7 +9491,7 @@
           <a:p>
             <a:pPr algn="l">
               <a:lnSpc>
-                <a:spcPct val="108000"/>
+                <a:spcPct val="110000"/>
               </a:lnSpc>
               <a:spcBef>
                 <a:spcPts val="200"/>
@@ -4707,10 +9596,14 @@
           </a:fontRef>
         </p:style>
         <p:txBody>
-          <a:bodyPr rtlCol="0" anchor="ctr" lIns="27432" rIns="27432" tIns="9144" bIns="9144"/>
-          <a:lstStyle/>
-          <a:p>
-            <a:pPr algn="ctr"/>
+          <a:bodyPr rtlCol="0" anchor="ctr" lIns="18288" rIns="18288" tIns="0" bIns="0"/>
+          <a:lstStyle/>
+          <a:p>
+            <a:pPr algn="ctr">
+              <a:lnSpc>
+                <a:spcPct val="100000"/>
+              </a:lnSpc>
+            </a:pPr>
             <a:r>
               <a:rPr sz="850" b="1">
                 <a:solidFill>
@@ -4749,7 +9642,7 @@
           <a:p>
             <a:pPr algn="l">
               <a:lnSpc>
-                <a:spcPct val="108000"/>
+                <a:spcPct val="110000"/>
               </a:lnSpc>
             </a:pPr>
             <a:r>
@@ -4767,7 +9660,7 @@
           <a:p>
             <a:pPr algn="l">
               <a:lnSpc>
-                <a:spcPct val="108000"/>
+                <a:spcPct val="110000"/>
               </a:lnSpc>
               <a:spcBef>
                 <a:spcPts val="200"/>
@@ -4857,7 +9750,7 @@
           <a:p>
             <a:pPr algn="l">
               <a:lnSpc>
-                <a:spcPct val="108000"/>
+                <a:spcPct val="110000"/>
               </a:lnSpc>
             </a:pPr>
             <a:r>
@@ -4946,7 +9839,7 @@
           <a:p>
             <a:pPr algn="l">
               <a:lnSpc>
-                <a:spcPct val="108000"/>
+                <a:spcPct val="110000"/>
               </a:lnSpc>
             </a:pPr>
             <a:r>
@@ -5002,10 +9895,14 @@
           </a:fontRef>
         </p:style>
         <p:txBody>
-          <a:bodyPr rtlCol="0" anchor="ctr" lIns="27432" rIns="27432" tIns="9144" bIns="9144"/>
-          <a:lstStyle/>
-          <a:p>
-            <a:pPr algn="ctr"/>
+          <a:bodyPr rtlCol="0" anchor="ctr" lIns="18288" rIns="18288" tIns="0" bIns="0"/>
+          <a:lstStyle/>
+          <a:p>
+            <a:pPr algn="ctr">
+              <a:lnSpc>
+                <a:spcPct val="100000"/>
+              </a:lnSpc>
+            </a:pPr>
             <a:r>
               <a:rPr sz="750" b="1">
                 <a:solidFill>
@@ -5092,7 +9989,7 @@
           <a:p>
             <a:pPr algn="l">
               <a:lnSpc>
-                <a:spcPct val="108000"/>
+                <a:spcPct val="110000"/>
               </a:lnSpc>
             </a:pPr>
             <a:r>
@@ -5148,10 +10045,14 @@
           </a:fontRef>
         </p:style>
         <p:txBody>
-          <a:bodyPr rtlCol="0" anchor="ctr" lIns="27432" rIns="27432" tIns="9144" bIns="9144"/>
-          <a:lstStyle/>
-          <a:p>
-            <a:pPr algn="ctr"/>
+          <a:bodyPr rtlCol="0" anchor="ctr" lIns="18288" rIns="18288" tIns="0" bIns="0"/>
+          <a:lstStyle/>
+          <a:p>
+            <a:pPr algn="ctr">
+              <a:lnSpc>
+                <a:spcPct val="100000"/>
+              </a:lnSpc>
+            </a:pPr>
             <a:r>
               <a:rPr sz="750" b="1">
                 <a:solidFill>
@@ -5238,7 +10139,7 @@
           <a:p>
             <a:pPr algn="l">
               <a:lnSpc>
-                <a:spcPct val="108000"/>
+                <a:spcPct val="110000"/>
               </a:lnSpc>
             </a:pPr>
             <a:r>
@@ -5294,10 +10195,14 @@
           </a:fontRef>
         </p:style>
         <p:txBody>
-          <a:bodyPr rtlCol="0" anchor="ctr" lIns="27432" rIns="27432" tIns="9144" bIns="9144"/>
-          <a:lstStyle/>
-          <a:p>
-            <a:pPr algn="ctr"/>
+          <a:bodyPr rtlCol="0" anchor="ctr" lIns="18288" rIns="18288" tIns="0" bIns="0"/>
+          <a:lstStyle/>
+          <a:p>
+            <a:pPr algn="ctr">
+              <a:lnSpc>
+                <a:spcPct val="100000"/>
+              </a:lnSpc>
+            </a:pPr>
             <a:r>
               <a:rPr sz="750" b="1">
                 <a:solidFill>
@@ -5384,7 +10289,7 @@
           <a:p>
             <a:pPr algn="l">
               <a:lnSpc>
-                <a:spcPct val="108000"/>
+                <a:spcPct val="110000"/>
               </a:lnSpc>
             </a:pPr>
             <a:r>
@@ -5440,10 +10345,14 @@
           </a:fontRef>
         </p:style>
         <p:txBody>
-          <a:bodyPr rtlCol="0" anchor="ctr" lIns="27432" rIns="27432" tIns="9144" bIns="9144"/>
-          <a:lstStyle/>
-          <a:p>
-            <a:pPr algn="ctr"/>
+          <a:bodyPr rtlCol="0" anchor="ctr" lIns="18288" rIns="18288" tIns="0" bIns="0"/>
+          <a:lstStyle/>
+          <a:p>
+            <a:pPr algn="ctr">
+              <a:lnSpc>
+                <a:spcPct val="100000"/>
+              </a:lnSpc>
+            </a:pPr>
             <a:r>
               <a:rPr sz="750" b="1">
                 <a:solidFill>
@@ -5497,10 +10406,14 @@
           </a:fontRef>
         </p:style>
         <p:txBody>
-          <a:bodyPr rtlCol="0" anchor="ctr" lIns="27432" rIns="27432" tIns="9144" bIns="9144"/>
-          <a:lstStyle/>
-          <a:p>
-            <a:pPr algn="ctr"/>
+          <a:bodyPr rtlCol="0" anchor="ctr" lIns="18288" rIns="18288" tIns="0" bIns="0"/>
+          <a:lstStyle/>
+          <a:p>
+            <a:pPr algn="ctr">
+              <a:lnSpc>
+                <a:spcPct val="100000"/>
+              </a:lnSpc>
+            </a:pPr>
             <a:r>
               <a:rPr sz="750" b="1">
                 <a:solidFill>
@@ -5585,7 +10498,7 @@
           <a:p>
             <a:pPr algn="l">
               <a:lnSpc>
-                <a:spcPct val="108000"/>
+                <a:spcPct val="110000"/>
               </a:lnSpc>
             </a:pPr>
             <a:r>
@@ -5674,7 +10587,7 @@
           <a:p>
             <a:pPr algn="l">
               <a:lnSpc>
-                <a:spcPct val="108000"/>
+                <a:spcPct val="110000"/>
               </a:lnSpc>
             </a:pPr>
             <a:r>
@@ -5730,10 +10643,14 @@
           </a:fontRef>
         </p:style>
         <p:txBody>
-          <a:bodyPr rtlCol="0" anchor="ctr" lIns="27432" rIns="27432" tIns="9144" bIns="9144"/>
-          <a:lstStyle/>
-          <a:p>
-            <a:pPr algn="ctr"/>
+          <a:bodyPr rtlCol="0" anchor="ctr" lIns="18288" rIns="18288" tIns="0" bIns="0"/>
+          <a:lstStyle/>
+          <a:p>
+            <a:pPr algn="ctr">
+              <a:lnSpc>
+                <a:spcPct val="100000"/>
+              </a:lnSpc>
+            </a:pPr>
             <a:r>
               <a:rPr sz="750" b="1">
                 <a:solidFill>
@@ -5820,7 +10737,7 @@
           <a:p>
             <a:pPr algn="l">
               <a:lnSpc>
-                <a:spcPct val="108000"/>
+                <a:spcPct val="110000"/>
               </a:lnSpc>
             </a:pPr>
             <a:r>
@@ -5876,10 +10793,14 @@
           </a:fontRef>
         </p:style>
         <p:txBody>
-          <a:bodyPr rtlCol="0" anchor="ctr" lIns="27432" rIns="27432" tIns="9144" bIns="9144"/>
-          <a:lstStyle/>
-          <a:p>
-            <a:pPr algn="ctr"/>
+          <a:bodyPr rtlCol="0" anchor="ctr" lIns="18288" rIns="18288" tIns="0" bIns="0"/>
+          <a:lstStyle/>
+          <a:p>
+            <a:pPr algn="ctr">
+              <a:lnSpc>
+                <a:spcPct val="100000"/>
+              </a:lnSpc>
+            </a:pPr>
             <a:r>
               <a:rPr sz="750" b="1">
                 <a:solidFill>
@@ -5966,7 +10887,7 @@
           <a:p>
             <a:pPr algn="l">
               <a:lnSpc>
-                <a:spcPct val="108000"/>
+                <a:spcPct val="110000"/>
               </a:lnSpc>
             </a:pPr>
             <a:r>
@@ -6022,10 +10943,14 @@
           </a:fontRef>
         </p:style>
         <p:txBody>
-          <a:bodyPr rtlCol="0" anchor="ctr" lIns="27432" rIns="27432" tIns="9144" bIns="9144"/>
-          <a:lstStyle/>
-          <a:p>
-            <a:pPr algn="ctr"/>
+          <a:bodyPr rtlCol="0" anchor="ctr" lIns="18288" rIns="18288" tIns="0" bIns="0"/>
+          <a:lstStyle/>
+          <a:p>
+            <a:pPr algn="ctr">
+              <a:lnSpc>
+                <a:spcPct val="100000"/>
+              </a:lnSpc>
+            </a:pPr>
             <a:r>
               <a:rPr sz="750" b="1">
                 <a:solidFill>
@@ -6112,7 +11037,7 @@
           <a:p>
             <a:pPr algn="l">
               <a:lnSpc>
-                <a:spcPct val="108000"/>
+                <a:spcPct val="110000"/>
               </a:lnSpc>
             </a:pPr>
             <a:r>
@@ -6168,10 +11093,14 @@
           </a:fontRef>
         </p:style>
         <p:txBody>
-          <a:bodyPr rtlCol="0" anchor="ctr" lIns="27432" rIns="27432" tIns="9144" bIns="9144"/>
-          <a:lstStyle/>
-          <a:p>
-            <a:pPr algn="ctr"/>
+          <a:bodyPr rtlCol="0" anchor="ctr" lIns="18288" rIns="18288" tIns="0" bIns="0"/>
+          <a:lstStyle/>
+          <a:p>
+            <a:pPr algn="ctr">
+              <a:lnSpc>
+                <a:spcPct val="100000"/>
+              </a:lnSpc>
+            </a:pPr>
             <a:r>
               <a:rPr sz="750" b="1">
                 <a:solidFill>
@@ -6256,7 +11185,7 @@
           <a:p>
             <a:pPr algn="l">
               <a:lnSpc>
-                <a:spcPct val="108000"/>
+                <a:spcPct val="110000"/>
               </a:lnSpc>
             </a:pPr>
             <a:r>
@@ -6345,7 +11274,7 @@
           <a:p>
             <a:pPr algn="l">
               <a:lnSpc>
-                <a:spcPct val="108000"/>
+                <a:spcPct val="110000"/>
               </a:lnSpc>
             </a:pPr>
             <a:r>
@@ -6401,10 +11330,14 @@
           </a:fontRef>
         </p:style>
         <p:txBody>
-          <a:bodyPr rtlCol="0" anchor="ctr" lIns="27432" rIns="27432" tIns="9144" bIns="9144"/>
-          <a:lstStyle/>
-          <a:p>
-            <a:pPr algn="ctr"/>
+          <a:bodyPr rtlCol="0" anchor="ctr" lIns="18288" rIns="18288" tIns="0" bIns="0"/>
+          <a:lstStyle/>
+          <a:p>
+            <a:pPr algn="ctr">
+              <a:lnSpc>
+                <a:spcPct val="100000"/>
+              </a:lnSpc>
+            </a:pPr>
             <a:r>
               <a:rPr sz="750" b="1">
                 <a:solidFill>
@@ -6491,7 +11424,7 @@
           <a:p>
             <a:pPr algn="l">
               <a:lnSpc>
-                <a:spcPct val="108000"/>
+                <a:spcPct val="110000"/>
               </a:lnSpc>
             </a:pPr>
             <a:r>
@@ -6547,10 +11480,14 @@
           </a:fontRef>
         </p:style>
         <p:txBody>
-          <a:bodyPr rtlCol="0" anchor="ctr" lIns="27432" rIns="27432" tIns="9144" bIns="9144"/>
-          <a:lstStyle/>
-          <a:p>
-            <a:pPr algn="ctr"/>
+          <a:bodyPr rtlCol="0" anchor="ctr" lIns="18288" rIns="18288" tIns="0" bIns="0"/>
+          <a:lstStyle/>
+          <a:p>
+            <a:pPr algn="ctr">
+              <a:lnSpc>
+                <a:spcPct val="100000"/>
+              </a:lnSpc>
+            </a:pPr>
             <a:r>
               <a:rPr sz="750" b="1">
                 <a:solidFill>
@@ -6635,7 +11572,7 @@
           <a:p>
             <a:pPr algn="l">
               <a:lnSpc>
-                <a:spcPct val="108000"/>
+                <a:spcPct val="110000"/>
               </a:lnSpc>
             </a:pPr>
             <a:r>
@@ -6724,7 +11661,7 @@
           <a:p>
             <a:pPr algn="l">
               <a:lnSpc>
-                <a:spcPct val="108000"/>
+                <a:spcPct val="110000"/>
               </a:lnSpc>
             </a:pPr>
             <a:r>
@@ -6780,10 +11717,14 @@
           </a:fontRef>
         </p:style>
         <p:txBody>
-          <a:bodyPr rtlCol="0" anchor="ctr" lIns="27432" rIns="27432" tIns="9144" bIns="9144"/>
-          <a:lstStyle/>
-          <a:p>
-            <a:pPr algn="ctr"/>
+          <a:bodyPr rtlCol="0" anchor="ctr" lIns="18288" rIns="18288" tIns="0" bIns="0"/>
+          <a:lstStyle/>
+          <a:p>
+            <a:pPr algn="ctr">
+              <a:lnSpc>
+                <a:spcPct val="100000"/>
+              </a:lnSpc>
+            </a:pPr>
             <a:r>
               <a:rPr sz="750" b="1">
                 <a:solidFill>
@@ -6870,7 +11811,7 @@
           <a:p>
             <a:pPr algn="l">
               <a:lnSpc>
-                <a:spcPct val="108000"/>
+                <a:spcPct val="110000"/>
               </a:lnSpc>
             </a:pPr>
             <a:r>
@@ -6926,10 +11867,14 @@
           </a:fontRef>
         </p:style>
         <p:txBody>
-          <a:bodyPr rtlCol="0" anchor="ctr" lIns="27432" rIns="27432" tIns="9144" bIns="9144"/>
-          <a:lstStyle/>
-          <a:p>
-            <a:pPr algn="ctr"/>
+          <a:bodyPr rtlCol="0" anchor="ctr" lIns="18288" rIns="18288" tIns="0" bIns="0"/>
+          <a:lstStyle/>
+          <a:p>
+            <a:pPr algn="ctr">
+              <a:lnSpc>
+                <a:spcPct val="100000"/>
+              </a:lnSpc>
+            </a:pPr>
             <a:r>
               <a:rPr sz="750" b="1">
                 <a:solidFill>
@@ -6952,7 +11897,7 @@
         </p:nvSpPr>
         <p:spPr>
           <a:xfrm>
-            <a:off x="274320" y="6355080"/>
+            <a:off x="274320" y="6400800"/>
             <a:ext cx="11640312" cy="12801"/>
           </a:xfrm>
           <a:prstGeom prst="rect">
@@ -6996,8 +11941,8 @@
         </p:nvSpPr>
         <p:spPr>
           <a:xfrm>
-            <a:off x="274320" y="6400800"/>
-            <a:ext cx="6949440" cy="274320"/>
+            <a:off x="274320" y="6446520"/>
+            <a:ext cx="6675120" cy="274320"/>
           </a:xfrm>
           <a:prstGeom prst="rect">
             <a:avLst/>
@@ -7012,7 +11957,7 @@
           <a:p>
             <a:pPr algn="l">
               <a:lnSpc>
-                <a:spcPct val="108000"/>
+                <a:spcPct val="110000"/>
               </a:lnSpc>
             </a:pPr>
             <a:r>
@@ -7037,8 +11982,8 @@
         </p:nvSpPr>
         <p:spPr>
           <a:xfrm>
-            <a:off x="7315200" y="6400800"/>
-            <a:ext cx="4599432" cy="274320"/>
+            <a:off x="7040880" y="6446520"/>
+            <a:ext cx="4873752" cy="274320"/>
           </a:xfrm>
           <a:prstGeom prst="rect">
             <a:avLst/>
@@ -7053,7 +11998,7 @@
           <a:p>
             <a:pPr algn="r">
               <a:lnSpc>
-                <a:spcPct val="108000"/>
+                <a:spcPct val="110000"/>
               </a:lnSpc>
             </a:pPr>
             <a:r>

--- a/docs/装备软件/供应商软件形态与ATE接入.pptx
+++ b/docs/装备软件/供应商软件形态与ATE接入.pptx
@@ -8,6 +8,7 @@
     <p:sldId id="256" r:id="rId7"/>
     <p:sldId id="257" r:id="rId8"/>
     <p:sldId id="258" r:id="rId9"/>
+    <p:sldId id="259" r:id="rId10"/>
   </p:sldIdLst>
   <p:sldSz cx="12191695" cy="6858000" type="screen4x3"/>
   <p:notesSz cx="6858000" cy="9144000"/>
@@ -3126,7 +3127,7 @@
                 <a:ea typeface="微软雅黑"/>
                 <a:cs typeface="微软雅黑"/>
               </a:rPr>
-              <a:t>问题背景（一）· 供应商软件接入的六类阻断点</a:t>
+              <a:t>问题背景（一）· 供应商软件接入的十二个阻断点</a:t>
             </a:r>
           </a:p>
         </p:txBody>
@@ -3167,7 +3168,7 @@
                 <a:ea typeface="微软雅黑"/>
                 <a:cs typeface="微软雅黑"/>
               </a:rPr>
-              <a:t>供应商多以「独立设备 + 封闭软件」交付；网络、运行环境、接口与授权四条线同时收紧，ATE 的接入与自动化被挡在边界之外</a:t>
+              <a:t>阻断点分布在网络、接口、运行环境、授权、合规五个方向；边界右侧的问题多需供应商配合，或在我方侧以代理、旁路方式绕开</a:t>
             </a:r>
           </a:p>
         </p:txBody>
@@ -3225,7 +3226,7 @@
         <p:spPr>
           <a:xfrm>
             <a:off x="274320" y="1078992"/>
-            <a:ext cx="2240280" cy="237744"/>
+            <a:ext cx="2103120" cy="237744"/>
           </a:xfrm>
           <a:prstGeom prst="rect">
             <a:avLst/>
@@ -3265,8 +3266,8 @@
         </p:nvSpPr>
         <p:spPr>
           <a:xfrm>
-            <a:off x="2880360" y="1078992"/>
-            <a:ext cx="9034272" cy="237744"/>
+            <a:off x="2761488" y="1078992"/>
+            <a:ext cx="9153144" cy="237744"/>
           </a:xfrm>
           <a:prstGeom prst="rect">
             <a:avLst/>
@@ -3293,7 +3294,7 @@
                 <a:ea typeface="微软雅黑"/>
                 <a:cs typeface="微软雅黑"/>
               </a:rPr>
-              <a:t>供应商软件（交付形态各异，多数不可控）</a:t>
+              <a:t>供应商软件与设备（交付形态各异，多数不可控）</a:t>
             </a:r>
           </a:p>
         </p:txBody>
@@ -3307,7 +3308,7 @@
         <p:spPr>
           <a:xfrm>
             <a:off x="274320" y="1371600"/>
-            <a:ext cx="2240280" cy="4526280"/>
+            <a:ext cx="2103120" cy="4526280"/>
           </a:xfrm>
           <a:prstGeom prst="roundRect">
             <a:avLst>
@@ -3354,8 +3355,8 @@
         </p:nvSpPr>
         <p:spPr>
           <a:xfrm>
-            <a:off x="402336" y="1536192"/>
-            <a:ext cx="1984248" cy="1280160"/>
+            <a:off x="384048" y="1536192"/>
+            <a:ext cx="1883664" cy="1280160"/>
           </a:xfrm>
           <a:prstGeom prst="roundRect">
             <a:avLst>
@@ -3400,8 +3401,8 @@
         </p:nvSpPr>
         <p:spPr>
           <a:xfrm>
-            <a:off x="457200" y="1627632"/>
-            <a:ext cx="1874519" cy="1097280"/>
+            <a:off x="420624" y="1645919"/>
+            <a:ext cx="1810512" cy="1060704"/>
           </a:xfrm>
           <a:prstGeom prst="rect">
             <a:avLst/>
@@ -3420,7 +3421,7 @@
               </a:lnSpc>
             </a:pPr>
             <a:r>
-              <a:rPr sz="1100" b="1">
+              <a:rPr sz="1050" b="1">
                 <a:solidFill>
                   <a:srgbClr val="141414"/>
                 </a:solidFill>
@@ -3462,8 +3463,8 @@
         </p:nvSpPr>
         <p:spPr>
           <a:xfrm>
-            <a:off x="402336" y="2999232"/>
-            <a:ext cx="1984248" cy="1280160"/>
+            <a:off x="384048" y="2999232"/>
+            <a:ext cx="1883664" cy="1280160"/>
           </a:xfrm>
           <a:prstGeom prst="roundRect">
             <a:avLst>
@@ -3508,8 +3509,8 @@
         </p:nvSpPr>
         <p:spPr>
           <a:xfrm>
-            <a:off x="457200" y="3090672"/>
-            <a:ext cx="1874519" cy="1097280"/>
+            <a:off x="420624" y="3108960"/>
+            <a:ext cx="1810512" cy="1060704"/>
           </a:xfrm>
           <a:prstGeom prst="rect">
             <a:avLst/>
@@ -3528,7 +3529,7 @@
               </a:lnSpc>
             </a:pPr>
             <a:r>
-              <a:rPr sz="1100" b="1">
+              <a:rPr sz="1050" b="1">
                 <a:solidFill>
                   <a:srgbClr val="141414"/>
                 </a:solidFill>
@@ -3557,7 +3558,7 @@
                 <a:ea typeface="微软雅黑"/>
                 <a:cs typeface="微软雅黑"/>
               </a:rPr>
-              <a:t>统一能力接口：连接 / 配置 / 触发 / 采集</a:t>
+              <a:t>统一能力接口</a:t>
             </a:r>
           </a:p>
         </p:txBody>
@@ -3570,8 +3571,8 @@
         </p:nvSpPr>
         <p:spPr>
           <a:xfrm>
-            <a:off x="402336" y="4462272"/>
-            <a:ext cx="1984248" cy="1280160"/>
+            <a:off x="384048" y="4462272"/>
+            <a:ext cx="1883664" cy="1280160"/>
           </a:xfrm>
           <a:prstGeom prst="roundRect">
             <a:avLst>
@@ -3616,8 +3617,8 @@
         </p:nvSpPr>
         <p:spPr>
           <a:xfrm>
-            <a:off x="457200" y="4553712"/>
-            <a:ext cx="1874519" cy="1097280"/>
+            <a:off x="420624" y="4572000"/>
+            <a:ext cx="1810512" cy="1060704"/>
           </a:xfrm>
           <a:prstGeom prst="rect">
             <a:avLst/>
@@ -3636,7 +3637,7 @@
               </a:lnSpc>
             </a:pPr>
             <a:r>
-              <a:rPr sz="1100" b="1">
+              <a:rPr sz="1050" b="1">
                 <a:solidFill>
                   <a:srgbClr val="141414"/>
                 </a:solidFill>
@@ -3678,7 +3679,7 @@
         </p:nvCxnSpPr>
         <p:spPr>
           <a:xfrm>
-            <a:off x="2651760" y="1371600"/>
+            <a:off x="2542032" y="1371600"/>
             <a:ext cx="0" cy="4526280"/>
           </a:xfrm>
           <a:prstGeom prst="line">
@@ -3714,7 +3715,7 @@
         </p:nvSpPr>
         <p:spPr>
           <a:xfrm>
-            <a:off x="2286000" y="5943600"/>
+            <a:off x="2176272" y="5943600"/>
             <a:ext cx="731520" cy="201168"/>
           </a:xfrm>
           <a:prstGeom prst="rect">
@@ -3755,8 +3756,8 @@
         </p:nvSpPr>
         <p:spPr>
           <a:xfrm>
-            <a:off x="2880360" y="1371600"/>
-            <a:ext cx="9034272" cy="4526280"/>
+            <a:off x="2761488" y="1371600"/>
+            <a:ext cx="9153144" cy="4526280"/>
           </a:xfrm>
           <a:prstGeom prst="roundRect">
             <a:avLst>
@@ -3803,8 +3804,8 @@
         </p:nvSpPr>
         <p:spPr>
           <a:xfrm>
-            <a:off x="3044952" y="1517904"/>
-            <a:ext cx="4279392" cy="1280160"/>
+            <a:off x="2907792" y="1463040"/>
+            <a:ext cx="2862072" cy="1024128"/>
           </a:xfrm>
           <a:prstGeom prst="roundRect">
             <a:avLst>
@@ -3851,8 +3852,8 @@
         </p:nvSpPr>
         <p:spPr>
           <a:xfrm>
-            <a:off x="3163824" y="1636776"/>
-            <a:ext cx="219456" cy="219456"/>
+            <a:off x="2999232" y="1554480"/>
+            <a:ext cx="201168" cy="201168"/>
           </a:xfrm>
           <a:prstGeom prst="ellipse">
             <a:avLst/>
@@ -3889,7 +3890,7 @@
               </a:lnSpc>
             </a:pPr>
             <a:r>
-              <a:rPr sz="850" b="1">
+              <a:rPr sz="800" b="1">
                 <a:solidFill>
                   <a:srgbClr val="FFFFFF"/>
                 </a:solidFill>
@@ -3904,14 +3905,58 @@
       </p:sp>
       <p:sp>
         <p:nvSpPr>
-          <p:cNvPr id="19" name="TextBox 18"/>
+          <p:cNvPr id="19" name="Rectangle 18"/>
+          <p:cNvSpPr/>
+          <p:nvPr/>
+        </p:nvSpPr>
+        <p:spPr>
+          <a:xfrm>
+            <a:off x="5184648" y="1563624"/>
+            <a:ext cx="512064" cy="182880"/>
+          </a:xfrm>
+          <a:prstGeom prst="rect">
+            <a:avLst/>
+          </a:prstGeom>
+          <a:solidFill>
+            <a:srgbClr val="E8F0F7"/>
+          </a:solidFill>
+          <a:ln>
+            <a:noFill/>
+          </a:ln>
+          <a:effectLst/>
+        </p:spPr>
+        <p:style>
+          <a:lnRef idx="1">
+            <a:schemeClr val="accent1"/>
+          </a:lnRef>
+          <a:fillRef idx="3">
+            <a:schemeClr val="accent1"/>
+          </a:fillRef>
+          <a:effectRef idx="2">
+            <a:schemeClr val="accent1"/>
+          </a:effectRef>
+          <a:fontRef idx="minor">
+            <a:schemeClr val="lt1"/>
+          </a:fontRef>
+        </p:style>
+        <p:txBody>
+          <a:bodyPr rtlCol="0" anchor="ctr" wrap="square"/>
+          <a:lstStyle/>
+          <a:p>
+            <a:pPr algn="ctr"/>
+          </a:p>
+        </p:txBody>
+      </p:sp>
+      <p:sp>
+        <p:nvSpPr>
+          <p:cNvPr id="20" name="TextBox 19"/>
           <p:cNvSpPr txBox="1"/>
           <p:nvPr/>
         </p:nvSpPr>
         <p:spPr>
           <a:xfrm>
-            <a:off x="3483864" y="1591056"/>
-            <a:ext cx="3730752" cy="1133856"/>
+            <a:off x="5184648" y="1563624"/>
+            <a:ext cx="512064" cy="182880"/>
           </a:xfrm>
           <a:prstGeom prst="rect">
             <a:avLst/>
@@ -3924,13 +3969,54 @@
           </a:bodyPr>
           <a:lstStyle/>
           <a:p>
+            <a:pPr algn="ctr">
+              <a:lnSpc>
+                <a:spcPct val="110000"/>
+              </a:lnSpc>
+            </a:pPr>
+            <a:r>
+              <a:rPr sz="700" b="1">
+                <a:solidFill>
+                  <a:srgbClr val="0F4C81"/>
+                </a:solidFill>
+                <a:latin typeface="微软雅黑"/>
+                <a:ea typeface="微软雅黑"/>
+                <a:cs typeface="微软雅黑"/>
+              </a:rPr>
+              <a:t>网络</a:t>
+            </a:r>
+          </a:p>
+        </p:txBody>
+      </p:sp>
+      <p:sp>
+        <p:nvSpPr>
+          <p:cNvPr id="21" name="TextBox 20"/>
+          <p:cNvSpPr txBox="1"/>
+          <p:nvPr/>
+        </p:nvSpPr>
+        <p:spPr>
+          <a:xfrm>
+            <a:off x="3273552" y="1517904"/>
+            <a:ext cx="1856231" cy="256032"/>
+          </a:xfrm>
+          <a:prstGeom prst="rect">
+            <a:avLst/>
+          </a:prstGeom>
+          <a:noFill/>
+        </p:spPr>
+        <p:txBody>
+          <a:bodyPr wrap="square" lIns="27432" rIns="27432" tIns="9144" bIns="9144" anchor="ctr">
+            <a:spAutoFit/>
+          </a:bodyPr>
+          <a:lstStyle/>
+          <a:p>
             <a:pPr algn="l">
               <a:lnSpc>
                 <a:spcPct val="110000"/>
               </a:lnSpc>
             </a:pPr>
             <a:r>
-              <a:rPr sz="1050" b="1">
+              <a:rPr sz="950" b="1">
                 <a:solidFill>
                   <a:srgbClr val="141414"/>
                 </a:solidFill>
@@ -3941,17 +4027,37 @@
               <a:t>网口数量受限</a:t>
             </a:r>
           </a:p>
+        </p:txBody>
+      </p:sp>
+      <p:sp>
+        <p:nvSpPr>
+          <p:cNvPr id="22" name="TextBox 21"/>
+          <p:cNvSpPr txBox="1"/>
+          <p:nvPr/>
+        </p:nvSpPr>
+        <p:spPr>
+          <a:xfrm>
+            <a:off x="2999232" y="1828800"/>
+            <a:ext cx="2679191" cy="566928"/>
+          </a:xfrm>
+          <a:prstGeom prst="rect">
+            <a:avLst/>
+          </a:prstGeom>
+          <a:noFill/>
+        </p:spPr>
+        <p:txBody>
+          <a:bodyPr wrap="square" lIns="27432" rIns="27432" tIns="9144" bIns="9144" anchor="ctr">
+            <a:spAutoFit/>
+          </a:bodyPr>
+          <a:lstStyle/>
           <a:p>
             <a:pPr algn="l">
               <a:lnSpc>
                 <a:spcPct val="110000"/>
               </a:lnSpc>
-              <a:spcBef>
-                <a:spcPts val="500"/>
-              </a:spcBef>
-            </a:pPr>
-            <a:r>
-              <a:rPr sz="850" b="0">
+            </a:pPr>
+            <a:r>
+              <a:rPr sz="800" b="0">
                 <a:solidFill>
                   <a:srgbClr val="5C5C56"/>
                 </a:solidFill>
@@ -3959,42 +4065,21 @@
                 <a:ea typeface="微软雅黑"/>
                 <a:cs typeface="微软雅黑"/>
               </a:rPr>
-              <a:t>设备只提供 1 个业务网口且已被既有测试网占用</a:t>
-            </a:r>
-          </a:p>
-          <a:p>
-            <a:pPr algn="l">
-              <a:lnSpc>
-                <a:spcPct val="110000"/>
-              </a:lnSpc>
-              <a:spcBef>
-                <a:spcPts val="100"/>
-              </a:spcBef>
-            </a:pPr>
-            <a:r>
-              <a:rPr sz="850" b="0">
-                <a:solidFill>
-                  <a:srgbClr val="5C5C56"/>
-                </a:solidFill>
-                <a:latin typeface="微软雅黑"/>
-                <a:ea typeface="微软雅黑"/>
-                <a:cs typeface="微软雅黑"/>
-              </a:rPr>
-              <a:t>没有第二条通路接入 ATE 网络</a:t>
-            </a:r>
-          </a:p>
-        </p:txBody>
-      </p:sp>
-      <p:sp>
-        <p:nvSpPr>
-          <p:cNvPr id="20" name="Rounded Rectangle 19"/>
+              <a:t>设备仅 1 个业务网口，已被既有测试网占用</a:t>
+            </a:r>
+          </a:p>
+        </p:txBody>
+      </p:sp>
+      <p:sp>
+        <p:nvSpPr>
+          <p:cNvPr id="23" name="Rounded Rectangle 22"/>
           <p:cNvSpPr/>
           <p:nvPr/>
         </p:nvSpPr>
         <p:spPr>
           <a:xfrm>
-            <a:off x="7516367" y="1517904"/>
-            <a:ext cx="4279392" cy="1280160"/>
+            <a:off x="5897880" y="1463040"/>
+            <a:ext cx="2862072" cy="1024128"/>
           </a:xfrm>
           <a:prstGeom prst="roundRect">
             <a:avLst>
@@ -4035,14 +4120,14 @@
       </p:sp>
       <p:sp>
         <p:nvSpPr>
-          <p:cNvPr id="21" name="Oval 20"/>
+          <p:cNvPr id="24" name="Oval 23"/>
           <p:cNvSpPr/>
           <p:nvPr/>
         </p:nvSpPr>
         <p:spPr>
           <a:xfrm>
-            <a:off x="7635240" y="1636776"/>
-            <a:ext cx="219456" cy="219456"/>
+            <a:off x="5989320" y="1554480"/>
+            <a:ext cx="201168" cy="201168"/>
           </a:xfrm>
           <a:prstGeom prst="ellipse">
             <a:avLst/>
@@ -4079,7 +4164,7 @@
               </a:lnSpc>
             </a:pPr>
             <a:r>
-              <a:rPr sz="850" b="1">
+              <a:rPr sz="800" b="1">
                 <a:solidFill>
                   <a:srgbClr val="FFFFFF"/>
                 </a:solidFill>
@@ -4094,14 +4179,58 @@
       </p:sp>
       <p:sp>
         <p:nvSpPr>
-          <p:cNvPr id="22" name="TextBox 21"/>
+          <p:cNvPr id="25" name="Rectangle 24"/>
+          <p:cNvSpPr/>
+          <p:nvPr/>
+        </p:nvSpPr>
+        <p:spPr>
+          <a:xfrm>
+            <a:off x="8174736" y="1563624"/>
+            <a:ext cx="512064" cy="182880"/>
+          </a:xfrm>
+          <a:prstGeom prst="rect">
+            <a:avLst/>
+          </a:prstGeom>
+          <a:solidFill>
+            <a:srgbClr val="E8F0F7"/>
+          </a:solidFill>
+          <a:ln>
+            <a:noFill/>
+          </a:ln>
+          <a:effectLst/>
+        </p:spPr>
+        <p:style>
+          <a:lnRef idx="1">
+            <a:schemeClr val="accent1"/>
+          </a:lnRef>
+          <a:fillRef idx="3">
+            <a:schemeClr val="accent1"/>
+          </a:fillRef>
+          <a:effectRef idx="2">
+            <a:schemeClr val="accent1"/>
+          </a:effectRef>
+          <a:fontRef idx="minor">
+            <a:schemeClr val="lt1"/>
+          </a:fontRef>
+        </p:style>
+        <p:txBody>
+          <a:bodyPr rtlCol="0" anchor="ctr" wrap="square"/>
+          <a:lstStyle/>
+          <a:p>
+            <a:pPr algn="ctr"/>
+          </a:p>
+        </p:txBody>
+      </p:sp>
+      <p:sp>
+        <p:nvSpPr>
+          <p:cNvPr id="26" name="TextBox 25"/>
           <p:cNvSpPr txBox="1"/>
           <p:nvPr/>
         </p:nvSpPr>
         <p:spPr>
           <a:xfrm>
-            <a:off x="7955279" y="1591056"/>
-            <a:ext cx="3730752" cy="1133856"/>
+            <a:off x="8174736" y="1563624"/>
+            <a:ext cx="512064" cy="182880"/>
           </a:xfrm>
           <a:prstGeom prst="rect">
             <a:avLst/>
@@ -4114,13 +4243,54 @@
           </a:bodyPr>
           <a:lstStyle/>
           <a:p>
+            <a:pPr algn="ctr">
+              <a:lnSpc>
+                <a:spcPct val="110000"/>
+              </a:lnSpc>
+            </a:pPr>
+            <a:r>
+              <a:rPr sz="700" b="1">
+                <a:solidFill>
+                  <a:srgbClr val="0F4C81"/>
+                </a:solidFill>
+                <a:latin typeface="微软雅黑"/>
+                <a:ea typeface="微软雅黑"/>
+                <a:cs typeface="微软雅黑"/>
+              </a:rPr>
+              <a:t>网络</a:t>
+            </a:r>
+          </a:p>
+        </p:txBody>
+      </p:sp>
+      <p:sp>
+        <p:nvSpPr>
+          <p:cNvPr id="27" name="TextBox 26"/>
+          <p:cNvSpPr txBox="1"/>
+          <p:nvPr/>
+        </p:nvSpPr>
+        <p:spPr>
+          <a:xfrm>
+            <a:off x="6263640" y="1517904"/>
+            <a:ext cx="1856231" cy="256032"/>
+          </a:xfrm>
+          <a:prstGeom prst="rect">
+            <a:avLst/>
+          </a:prstGeom>
+          <a:noFill/>
+        </p:spPr>
+        <p:txBody>
+          <a:bodyPr wrap="square" lIns="27432" rIns="27432" tIns="9144" bIns="9144" anchor="ctr">
+            <a:spAutoFit/>
+          </a:bodyPr>
+          <a:lstStyle/>
+          <a:p>
             <a:pPr algn="l">
               <a:lnSpc>
                 <a:spcPct val="110000"/>
               </a:lnSpc>
             </a:pPr>
             <a:r>
-              <a:rPr sz="1050" b="1">
+              <a:rPr sz="950" b="1">
                 <a:solidFill>
                   <a:srgbClr val="141414"/>
                 </a:solidFill>
@@ -4131,17 +4301,37 @@
               <a:t>网络策略封闭</a:t>
             </a:r>
           </a:p>
+        </p:txBody>
+      </p:sp>
+      <p:sp>
+        <p:nvSpPr>
+          <p:cNvPr id="28" name="TextBox 27"/>
+          <p:cNvSpPr txBox="1"/>
+          <p:nvPr/>
+        </p:nvSpPr>
+        <p:spPr>
+          <a:xfrm>
+            <a:off x="5989320" y="1828800"/>
+            <a:ext cx="2679191" cy="566928"/>
+          </a:xfrm>
+          <a:prstGeom prst="rect">
+            <a:avLst/>
+          </a:prstGeom>
+          <a:noFill/>
+        </p:spPr>
+        <p:txBody>
+          <a:bodyPr wrap="square" lIns="27432" rIns="27432" tIns="9144" bIns="9144" anchor="ctr">
+            <a:spAutoFit/>
+          </a:bodyPr>
+          <a:lstStyle/>
           <a:p>
             <a:pPr algn="l">
               <a:lnSpc>
                 <a:spcPct val="110000"/>
               </a:lnSpc>
-              <a:spcBef>
-                <a:spcPts val="500"/>
-              </a:spcBef>
-            </a:pPr>
-            <a:r>
-              <a:rPr sz="850" b="0">
+            </a:pPr>
+            <a:r>
+              <a:rPr sz="800" b="0">
                 <a:solidFill>
                   <a:srgbClr val="5C5C56"/>
                 </a:solidFill>
@@ -4149,42 +4339,21 @@
                 <a:ea typeface="微软雅黑"/>
                 <a:cs typeface="微软雅黑"/>
               </a:rPr>
-              <a:t>仅允许与固定主机、固定网段通信，绑定静态路由与白名单</a:t>
-            </a:r>
-          </a:p>
-          <a:p>
-            <a:pPr algn="l">
-              <a:lnSpc>
-                <a:spcPct val="110000"/>
-              </a:lnSpc>
-              <a:spcBef>
-                <a:spcPts val="100"/>
-              </a:spcBef>
-            </a:pPr>
-            <a:r>
-              <a:rPr sz="850" b="0">
-                <a:solidFill>
-                  <a:srgbClr val="5C5C56"/>
-                </a:solidFill>
-                <a:latin typeface="微软雅黑"/>
-                <a:ea typeface="微软雅黑"/>
-                <a:cs typeface="微软雅黑"/>
-              </a:rPr>
-              <a:t>外部主机不可达，策略由供应商侧掌握</a:t>
-            </a:r>
-          </a:p>
-        </p:txBody>
-      </p:sp>
-      <p:sp>
-        <p:nvSpPr>
-          <p:cNvPr id="23" name="Rounded Rectangle 22"/>
+              <a:t>仅放行固定主机与网段，策略由供应商掌握</a:t>
+            </a:r>
+          </a:p>
+        </p:txBody>
+      </p:sp>
+      <p:sp>
+        <p:nvSpPr>
+          <p:cNvPr id="29" name="Rounded Rectangle 28"/>
           <p:cNvSpPr/>
           <p:nvPr/>
         </p:nvSpPr>
         <p:spPr>
           <a:xfrm>
-            <a:off x="3044952" y="2999232"/>
-            <a:ext cx="4279392" cy="1280160"/>
+            <a:off x="8887968" y="1463040"/>
+            <a:ext cx="2862072" cy="1024128"/>
           </a:xfrm>
           <a:prstGeom prst="roundRect">
             <a:avLst>
@@ -4225,14 +4394,14 @@
       </p:sp>
       <p:sp>
         <p:nvSpPr>
-          <p:cNvPr id="24" name="Oval 23"/>
+          <p:cNvPr id="30" name="Oval 29"/>
           <p:cNvSpPr/>
           <p:nvPr/>
         </p:nvSpPr>
         <p:spPr>
           <a:xfrm>
-            <a:off x="3163824" y="3118104"/>
-            <a:ext cx="219456" cy="219456"/>
+            <a:off x="8979408" y="1554480"/>
+            <a:ext cx="201168" cy="201168"/>
           </a:xfrm>
           <a:prstGeom prst="ellipse">
             <a:avLst/>
@@ -4269,7 +4438,7 @@
               </a:lnSpc>
             </a:pPr>
             <a:r>
-              <a:rPr sz="850" b="1">
+              <a:rPr sz="800" b="1">
                 <a:solidFill>
                   <a:srgbClr val="FFFFFF"/>
                 </a:solidFill>
@@ -4284,14 +4453,58 @@
       </p:sp>
       <p:sp>
         <p:nvSpPr>
-          <p:cNvPr id="25" name="TextBox 24"/>
+          <p:cNvPr id="31" name="Rectangle 30"/>
+          <p:cNvSpPr/>
+          <p:nvPr/>
+        </p:nvSpPr>
+        <p:spPr>
+          <a:xfrm>
+            <a:off x="11164824" y="1563624"/>
+            <a:ext cx="512064" cy="182880"/>
+          </a:xfrm>
+          <a:prstGeom prst="rect">
+            <a:avLst/>
+          </a:prstGeom>
+          <a:solidFill>
+            <a:srgbClr val="E8F0F7"/>
+          </a:solidFill>
+          <a:ln>
+            <a:noFill/>
+          </a:ln>
+          <a:effectLst/>
+        </p:spPr>
+        <p:style>
+          <a:lnRef idx="1">
+            <a:schemeClr val="accent1"/>
+          </a:lnRef>
+          <a:fillRef idx="3">
+            <a:schemeClr val="accent1"/>
+          </a:fillRef>
+          <a:effectRef idx="2">
+            <a:schemeClr val="accent1"/>
+          </a:effectRef>
+          <a:fontRef idx="minor">
+            <a:schemeClr val="lt1"/>
+          </a:fontRef>
+        </p:style>
+        <p:txBody>
+          <a:bodyPr rtlCol="0" anchor="ctr" wrap="square"/>
+          <a:lstStyle/>
+          <a:p>
+            <a:pPr algn="ctr"/>
+          </a:p>
+        </p:txBody>
+      </p:sp>
+      <p:sp>
+        <p:nvSpPr>
+          <p:cNvPr id="32" name="TextBox 31"/>
           <p:cNvSpPr txBox="1"/>
           <p:nvPr/>
         </p:nvSpPr>
         <p:spPr>
           <a:xfrm>
-            <a:off x="3483864" y="3072384"/>
-            <a:ext cx="3730752" cy="1133856"/>
+            <a:off x="11164824" y="1563624"/>
+            <a:ext cx="512064" cy="182880"/>
           </a:xfrm>
           <a:prstGeom prst="rect">
             <a:avLst/>
@@ -4304,13 +4517,54 @@
           </a:bodyPr>
           <a:lstStyle/>
           <a:p>
+            <a:pPr algn="ctr">
+              <a:lnSpc>
+                <a:spcPct val="110000"/>
+              </a:lnSpc>
+            </a:pPr>
+            <a:r>
+              <a:rPr sz="700" b="1">
+                <a:solidFill>
+                  <a:srgbClr val="0F4C81"/>
+                </a:solidFill>
+                <a:latin typeface="微软雅黑"/>
+                <a:ea typeface="微软雅黑"/>
+                <a:cs typeface="微软雅黑"/>
+              </a:rPr>
+              <a:t>网络</a:t>
+            </a:r>
+          </a:p>
+        </p:txBody>
+      </p:sp>
+      <p:sp>
+        <p:nvSpPr>
+          <p:cNvPr id="33" name="TextBox 32"/>
+          <p:cNvSpPr txBox="1"/>
+          <p:nvPr/>
+        </p:nvSpPr>
+        <p:spPr>
+          <a:xfrm>
+            <a:off x="9253728" y="1517904"/>
+            <a:ext cx="1856231" cy="256032"/>
+          </a:xfrm>
+          <a:prstGeom prst="rect">
+            <a:avLst/>
+          </a:prstGeom>
+          <a:noFill/>
+        </p:spPr>
+        <p:txBody>
+          <a:bodyPr wrap="square" lIns="27432" rIns="27432" tIns="9144" bIns="9144" anchor="ctr">
+            <a:spAutoFit/>
+          </a:bodyPr>
+          <a:lstStyle/>
+          <a:p>
             <a:pPr algn="l">
               <a:lnSpc>
                 <a:spcPct val="110000"/>
               </a:lnSpc>
             </a:pPr>
             <a:r>
-              <a:rPr sz="1050" b="1">
+              <a:rPr sz="950" b="1">
                 <a:solidFill>
                   <a:srgbClr val="141414"/>
                 </a:solidFill>
@@ -4318,20 +4572,40 @@
                 <a:ea typeface="微软雅黑"/>
                 <a:cs typeface="微软雅黑"/>
               </a:rPr>
-              <a:t>无法安装 Runner</a:t>
-            </a:r>
-          </a:p>
+              <a:t>跨网隔离与网闸</a:t>
+            </a:r>
+          </a:p>
+        </p:txBody>
+      </p:sp>
+      <p:sp>
+        <p:nvSpPr>
+          <p:cNvPr id="34" name="TextBox 33"/>
+          <p:cNvSpPr txBox="1"/>
+          <p:nvPr/>
+        </p:nvSpPr>
+        <p:spPr>
+          <a:xfrm>
+            <a:off x="8979408" y="1828800"/>
+            <a:ext cx="2679191" cy="566928"/>
+          </a:xfrm>
+          <a:prstGeom prst="rect">
+            <a:avLst/>
+          </a:prstGeom>
+          <a:noFill/>
+        </p:spPr>
+        <p:txBody>
+          <a:bodyPr wrap="square" lIns="27432" rIns="27432" tIns="9144" bIns="9144" anchor="ctr">
+            <a:spAutoFit/>
+          </a:bodyPr>
+          <a:lstStyle/>
           <a:p>
             <a:pPr algn="l">
               <a:lnSpc>
                 <a:spcPct val="110000"/>
               </a:lnSpc>
-              <a:spcBef>
-                <a:spcPts val="500"/>
-              </a:spcBef>
-            </a:pPr>
-            <a:r>
-              <a:rPr sz="850" b="0">
+            </a:pPr>
+            <a:r>
+              <a:rPr sz="800" b="0">
                 <a:solidFill>
                   <a:srgbClr val="5C5C56"/>
                 </a:solidFill>
@@ -4339,42 +4613,21 @@
                 <a:ea typeface="微软雅黑"/>
                 <a:cs typeface="微软雅黑"/>
               </a:rPr>
-              <a:t>交付封闭系统或受控工控机，禁止安装第三方程序</a:t>
-            </a:r>
-          </a:p>
-          <a:p>
-            <a:pPr algn="l">
-              <a:lnSpc>
-                <a:spcPct val="110000"/>
-              </a:lnSpc>
-              <a:spcBef>
-                <a:spcPts val="100"/>
-              </a:spcBef>
-            </a:pPr>
-            <a:r>
-              <a:rPr sz="850" b="0">
-                <a:solidFill>
-                  <a:srgbClr val="5C5C56"/>
-                </a:solidFill>
-                <a:latin typeface="微软雅黑"/>
-                <a:ea typeface="微软雅黑"/>
-                <a:cs typeface="微软雅黑"/>
-              </a:rPr>
-              <a:t>执行代理无法落地，也无法常驻</a:t>
-            </a:r>
-          </a:p>
-        </p:txBody>
-      </p:sp>
-      <p:sp>
-        <p:nvSpPr>
-          <p:cNvPr id="26" name="Rounded Rectangle 25"/>
+              <a:t>跨网只允许单向、指定端口，无法下发指令</a:t>
+            </a:r>
+          </a:p>
+        </p:txBody>
+      </p:sp>
+      <p:sp>
+        <p:nvSpPr>
+          <p:cNvPr id="35" name="Rounded Rectangle 34"/>
           <p:cNvSpPr/>
           <p:nvPr/>
         </p:nvSpPr>
         <p:spPr>
           <a:xfrm>
-            <a:off x="7516367" y="2999232"/>
-            <a:ext cx="4279392" cy="1280160"/>
+            <a:off x="2907792" y="2578608"/>
+            <a:ext cx="2862072" cy="1024128"/>
           </a:xfrm>
           <a:prstGeom prst="roundRect">
             <a:avLst>
@@ -4415,14 +4668,14 @@
       </p:sp>
       <p:sp>
         <p:nvSpPr>
-          <p:cNvPr id="27" name="Oval 26"/>
+          <p:cNvPr id="36" name="Oval 35"/>
           <p:cNvSpPr/>
           <p:nvPr/>
         </p:nvSpPr>
         <p:spPr>
           <a:xfrm>
-            <a:off x="7635240" y="3118104"/>
-            <a:ext cx="219456" cy="219456"/>
+            <a:off x="2999232" y="2670048"/>
+            <a:ext cx="201168" cy="201168"/>
           </a:xfrm>
           <a:prstGeom prst="ellipse">
             <a:avLst/>
@@ -4459,7 +4712,7 @@
               </a:lnSpc>
             </a:pPr>
             <a:r>
-              <a:rPr sz="850" b="1">
+              <a:rPr sz="800" b="1">
                 <a:solidFill>
                   <a:srgbClr val="FFFFFF"/>
                 </a:solidFill>
@@ -4474,14 +4727,58 @@
       </p:sp>
       <p:sp>
         <p:nvSpPr>
-          <p:cNvPr id="28" name="TextBox 27"/>
+          <p:cNvPr id="37" name="Rectangle 36"/>
+          <p:cNvSpPr/>
+          <p:nvPr/>
+        </p:nvSpPr>
+        <p:spPr>
+          <a:xfrm>
+            <a:off x="5184648" y="2679192"/>
+            <a:ext cx="512064" cy="182880"/>
+          </a:xfrm>
+          <a:prstGeom prst="rect">
+            <a:avLst/>
+          </a:prstGeom>
+          <a:solidFill>
+            <a:srgbClr val="E8F0F7"/>
+          </a:solidFill>
+          <a:ln>
+            <a:noFill/>
+          </a:ln>
+          <a:effectLst/>
+        </p:spPr>
+        <p:style>
+          <a:lnRef idx="1">
+            <a:schemeClr val="accent1"/>
+          </a:lnRef>
+          <a:fillRef idx="3">
+            <a:schemeClr val="accent1"/>
+          </a:fillRef>
+          <a:effectRef idx="2">
+            <a:schemeClr val="accent1"/>
+          </a:effectRef>
+          <a:fontRef idx="minor">
+            <a:schemeClr val="lt1"/>
+          </a:fontRef>
+        </p:style>
+        <p:txBody>
+          <a:bodyPr rtlCol="0" anchor="ctr" wrap="square"/>
+          <a:lstStyle/>
+          <a:p>
+            <a:pPr algn="ctr"/>
+          </a:p>
+        </p:txBody>
+      </p:sp>
+      <p:sp>
+        <p:nvSpPr>
+          <p:cNvPr id="38" name="TextBox 37"/>
           <p:cNvSpPr txBox="1"/>
           <p:nvPr/>
         </p:nvSpPr>
         <p:spPr>
           <a:xfrm>
-            <a:off x="7955279" y="3072384"/>
-            <a:ext cx="3730752" cy="1133856"/>
+            <a:off x="5184648" y="2679192"/>
+            <a:ext cx="512064" cy="182880"/>
           </a:xfrm>
           <a:prstGeom prst="rect">
             <a:avLst/>
@@ -4494,13 +4791,54 @@
           </a:bodyPr>
           <a:lstStyle/>
           <a:p>
+            <a:pPr algn="ctr">
+              <a:lnSpc>
+                <a:spcPct val="110000"/>
+              </a:lnSpc>
+            </a:pPr>
+            <a:r>
+              <a:rPr sz="700" b="1">
+                <a:solidFill>
+                  <a:srgbClr val="0F4C81"/>
+                </a:solidFill>
+                <a:latin typeface="微软雅黑"/>
+                <a:ea typeface="微软雅黑"/>
+                <a:cs typeface="微软雅黑"/>
+              </a:rPr>
+              <a:t>接口</a:t>
+            </a:r>
+          </a:p>
+        </p:txBody>
+      </p:sp>
+      <p:sp>
+        <p:nvSpPr>
+          <p:cNvPr id="39" name="TextBox 38"/>
+          <p:cNvSpPr txBox="1"/>
+          <p:nvPr/>
+        </p:nvSpPr>
+        <p:spPr>
+          <a:xfrm>
+            <a:off x="3273552" y="2633472"/>
+            <a:ext cx="1856231" cy="256032"/>
+          </a:xfrm>
+          <a:prstGeom prst="rect">
+            <a:avLst/>
+          </a:prstGeom>
+          <a:noFill/>
+        </p:spPr>
+        <p:txBody>
+          <a:bodyPr wrap="square" lIns="27432" rIns="27432" tIns="9144" bIns="9144" anchor="ctr">
+            <a:spAutoFit/>
+          </a:bodyPr>
+          <a:lstStyle/>
+          <a:p>
             <a:pPr algn="l">
               <a:lnSpc>
                 <a:spcPct val="110000"/>
               </a:lnSpc>
             </a:pPr>
             <a:r>
-              <a:rPr sz="1050" b="1">
+              <a:rPr sz="950" b="1">
                 <a:solidFill>
                   <a:srgbClr val="141414"/>
                 </a:solidFill>
@@ -4511,17 +4849,37 @@
               <a:t>无对外接口</a:t>
             </a:r>
           </a:p>
+        </p:txBody>
+      </p:sp>
+      <p:sp>
+        <p:nvSpPr>
+          <p:cNvPr id="40" name="TextBox 39"/>
+          <p:cNvSpPr txBox="1"/>
+          <p:nvPr/>
+        </p:nvSpPr>
+        <p:spPr>
+          <a:xfrm>
+            <a:off x="2999232" y="2944368"/>
+            <a:ext cx="2679191" cy="566928"/>
+          </a:xfrm>
+          <a:prstGeom prst="rect">
+            <a:avLst/>
+          </a:prstGeom>
+          <a:noFill/>
+        </p:spPr>
+        <p:txBody>
+          <a:bodyPr wrap="square" lIns="27432" rIns="27432" tIns="9144" bIns="9144" anchor="ctr">
+            <a:spAutoFit/>
+          </a:bodyPr>
+          <a:lstStyle/>
           <a:p>
             <a:pPr algn="l">
               <a:lnSpc>
                 <a:spcPct val="110000"/>
               </a:lnSpc>
-              <a:spcBef>
-                <a:spcPts val="500"/>
-              </a:spcBef>
-            </a:pPr>
-            <a:r>
-              <a:rPr sz="850" b="0">
+            </a:pPr>
+            <a:r>
+              <a:rPr sz="800" b="0">
                 <a:solidFill>
                   <a:srgbClr val="5C5C56"/>
                 </a:solidFill>
@@ -4529,42 +4887,21 @@
                 <a:ea typeface="微软雅黑"/>
                 <a:cs typeface="微软雅黑"/>
               </a:rPr>
-              <a:t>仅提供图形界面，无 CLI、API 或协议文档</a:t>
-            </a:r>
-          </a:p>
-          <a:p>
-            <a:pPr algn="l">
-              <a:lnSpc>
-                <a:spcPct val="110000"/>
-              </a:lnSpc>
-              <a:spcBef>
-                <a:spcPts val="100"/>
-              </a:spcBef>
-            </a:pPr>
-            <a:r>
-              <a:rPr sz="850" b="0">
-                <a:solidFill>
-                  <a:srgbClr val="5C5C56"/>
-                </a:solidFill>
-                <a:latin typeface="微软雅黑"/>
-                <a:ea typeface="微软雅黑"/>
-                <a:cs typeface="微软雅黑"/>
-              </a:rPr>
-              <a:t>外部脚本无法驱动其动作，也取不回数据</a:t>
-            </a:r>
-          </a:p>
-        </p:txBody>
-      </p:sp>
-      <p:sp>
-        <p:nvSpPr>
-          <p:cNvPr id="29" name="Rounded Rectangle 28"/>
+              <a:t>仅图形界面，无 CLI / API / 协议文档</a:t>
+            </a:r>
+          </a:p>
+        </p:txBody>
+      </p:sp>
+      <p:sp>
+        <p:nvSpPr>
+          <p:cNvPr id="41" name="Rounded Rectangle 40"/>
           <p:cNvSpPr/>
           <p:nvPr/>
         </p:nvSpPr>
         <p:spPr>
           <a:xfrm>
-            <a:off x="3044952" y="4480560"/>
-            <a:ext cx="4279392" cy="1280160"/>
+            <a:off x="5897880" y="2578608"/>
+            <a:ext cx="2862072" cy="1024128"/>
           </a:xfrm>
           <a:prstGeom prst="roundRect">
             <a:avLst>
@@ -4605,14 +4942,14 @@
       </p:sp>
       <p:sp>
         <p:nvSpPr>
-          <p:cNvPr id="30" name="Oval 29"/>
+          <p:cNvPr id="42" name="Oval 41"/>
           <p:cNvSpPr/>
           <p:nvPr/>
         </p:nvSpPr>
         <p:spPr>
           <a:xfrm>
-            <a:off x="3163824" y="4599432"/>
-            <a:ext cx="219456" cy="219456"/>
+            <a:off x="5989320" y="2670048"/>
+            <a:ext cx="201168" cy="201168"/>
           </a:xfrm>
           <a:prstGeom prst="ellipse">
             <a:avLst/>
@@ -4649,7 +4986,7 @@
               </a:lnSpc>
             </a:pPr>
             <a:r>
-              <a:rPr sz="850" b="1">
+              <a:rPr sz="800" b="1">
                 <a:solidFill>
                   <a:srgbClr val="FFFFFF"/>
                 </a:solidFill>
@@ -4664,14 +5001,58 @@
       </p:sp>
       <p:sp>
         <p:nvSpPr>
-          <p:cNvPr id="31" name="TextBox 30"/>
+          <p:cNvPr id="43" name="Rectangle 42"/>
+          <p:cNvSpPr/>
+          <p:nvPr/>
+        </p:nvSpPr>
+        <p:spPr>
+          <a:xfrm>
+            <a:off x="8174736" y="2679192"/>
+            <a:ext cx="512064" cy="182880"/>
+          </a:xfrm>
+          <a:prstGeom prst="rect">
+            <a:avLst/>
+          </a:prstGeom>
+          <a:solidFill>
+            <a:srgbClr val="E8F0F7"/>
+          </a:solidFill>
+          <a:ln>
+            <a:noFill/>
+          </a:ln>
+          <a:effectLst/>
+        </p:spPr>
+        <p:style>
+          <a:lnRef idx="1">
+            <a:schemeClr val="accent1"/>
+          </a:lnRef>
+          <a:fillRef idx="3">
+            <a:schemeClr val="accent1"/>
+          </a:fillRef>
+          <a:effectRef idx="2">
+            <a:schemeClr val="accent1"/>
+          </a:effectRef>
+          <a:fontRef idx="minor">
+            <a:schemeClr val="lt1"/>
+          </a:fontRef>
+        </p:style>
+        <p:txBody>
+          <a:bodyPr rtlCol="0" anchor="ctr" wrap="square"/>
+          <a:lstStyle/>
+          <a:p>
+            <a:pPr algn="ctr"/>
+          </a:p>
+        </p:txBody>
+      </p:sp>
+      <p:sp>
+        <p:nvSpPr>
+          <p:cNvPr id="44" name="TextBox 43"/>
           <p:cNvSpPr txBox="1"/>
           <p:nvPr/>
         </p:nvSpPr>
         <p:spPr>
           <a:xfrm>
-            <a:off x="3483864" y="4553712"/>
-            <a:ext cx="3730752" cy="1133856"/>
+            <a:off x="8174736" y="2679192"/>
+            <a:ext cx="512064" cy="182880"/>
           </a:xfrm>
           <a:prstGeom prst="rect">
             <a:avLst/>
@@ -4684,13 +5065,54 @@
           </a:bodyPr>
           <a:lstStyle/>
           <a:p>
+            <a:pPr algn="ctr">
+              <a:lnSpc>
+                <a:spcPct val="110000"/>
+              </a:lnSpc>
+            </a:pPr>
+            <a:r>
+              <a:rPr sz="700" b="1">
+                <a:solidFill>
+                  <a:srgbClr val="0F4C81"/>
+                </a:solidFill>
+                <a:latin typeface="微软雅黑"/>
+                <a:ea typeface="微软雅黑"/>
+                <a:cs typeface="微软雅黑"/>
+              </a:rPr>
+              <a:t>接口</a:t>
+            </a:r>
+          </a:p>
+        </p:txBody>
+      </p:sp>
+      <p:sp>
+        <p:nvSpPr>
+          <p:cNvPr id="45" name="TextBox 44"/>
+          <p:cNvSpPr txBox="1"/>
+          <p:nvPr/>
+        </p:nvSpPr>
+        <p:spPr>
+          <a:xfrm>
+            <a:off x="6263640" y="2633472"/>
+            <a:ext cx="1856231" cy="256032"/>
+          </a:xfrm>
+          <a:prstGeom prst="rect">
+            <a:avLst/>
+          </a:prstGeom>
+          <a:noFill/>
+        </p:spPr>
+        <p:txBody>
+          <a:bodyPr wrap="square" lIns="27432" rIns="27432" tIns="9144" bIns="9144" anchor="ctr">
+            <a:spAutoFit/>
+          </a:bodyPr>
+          <a:lstStyle/>
+          <a:p>
             <a:pPr algn="l">
               <a:lnSpc>
                 <a:spcPct val="110000"/>
               </a:lnSpc>
             </a:pPr>
             <a:r>
-              <a:rPr sz="1050" b="1">
+              <a:rPr sz="950" b="1">
                 <a:solidFill>
                   <a:srgbClr val="141414"/>
                 </a:solidFill>
@@ -4698,20 +5120,40 @@
                 <a:ea typeface="微软雅黑"/>
                 <a:cs typeface="微软雅黑"/>
               </a:rPr>
-              <a:t>授权绑定 MAC</a:t>
-            </a:r>
-          </a:p>
+              <a:t>物理接口不匹配</a:t>
+            </a:r>
+          </a:p>
+        </p:txBody>
+      </p:sp>
+      <p:sp>
+        <p:nvSpPr>
+          <p:cNvPr id="46" name="TextBox 45"/>
+          <p:cNvSpPr txBox="1"/>
+          <p:nvPr/>
+        </p:nvSpPr>
+        <p:spPr>
+          <a:xfrm>
+            <a:off x="5989320" y="2944368"/>
+            <a:ext cx="2679191" cy="566928"/>
+          </a:xfrm>
+          <a:prstGeom prst="rect">
+            <a:avLst/>
+          </a:prstGeom>
+          <a:noFill/>
+        </p:spPr>
+        <p:txBody>
+          <a:bodyPr wrap="square" lIns="27432" rIns="27432" tIns="9144" bIns="9144" anchor="ctr">
+            <a:spAutoFit/>
+          </a:bodyPr>
+          <a:lstStyle/>
           <a:p>
             <a:pPr algn="l">
               <a:lnSpc>
                 <a:spcPct val="110000"/>
               </a:lnSpc>
-              <a:spcBef>
-                <a:spcPts val="500"/>
-              </a:spcBef>
-            </a:pPr>
-            <a:r>
-              <a:rPr sz="850" b="0">
+            </a:pPr>
+            <a:r>
+              <a:rPr sz="800" b="0">
                 <a:solidFill>
                   <a:srgbClr val="5C5C56"/>
                 </a:solidFill>
@@ -4719,42 +5161,21 @@
                 <a:ea typeface="微软雅黑"/>
                 <a:cs typeface="微软雅黑"/>
               </a:rPr>
-              <a:t>许可证与网卡 MAC、机器指纹绑定</a:t>
-            </a:r>
-          </a:p>
-          <a:p>
-            <a:pPr algn="l">
-              <a:lnSpc>
-                <a:spcPct val="110000"/>
-              </a:lnSpc>
-              <a:spcBef>
-                <a:spcPts val="100"/>
-              </a:spcBef>
-            </a:pPr>
-            <a:r>
-              <a:rPr sz="850" b="0">
-                <a:solidFill>
-                  <a:srgbClr val="5C5C56"/>
-                </a:solidFill>
-                <a:latin typeface="微软雅黑"/>
-                <a:ea typeface="微软雅黑"/>
-                <a:cs typeface="微软雅黑"/>
-              </a:rPr>
-              <a:t>迁机、换网卡或重装系统即失效</a:t>
-            </a:r>
-          </a:p>
-        </p:txBody>
-      </p:sp>
-      <p:sp>
-        <p:nvSpPr>
-          <p:cNvPr id="32" name="Rounded Rectangle 31"/>
+              <a:t>设备只有 GPIB / RS232，机箱无对应接口卡</a:t>
+            </a:r>
+          </a:p>
+        </p:txBody>
+      </p:sp>
+      <p:sp>
+        <p:nvSpPr>
+          <p:cNvPr id="47" name="Rounded Rectangle 46"/>
           <p:cNvSpPr/>
           <p:nvPr/>
         </p:nvSpPr>
         <p:spPr>
           <a:xfrm>
-            <a:off x="7516367" y="4480560"/>
-            <a:ext cx="4279392" cy="1280160"/>
+            <a:off x="8887968" y="2578608"/>
+            <a:ext cx="2862072" cy="1024128"/>
           </a:xfrm>
           <a:prstGeom prst="roundRect">
             <a:avLst>
@@ -4795,14 +5216,14 @@
       </p:sp>
       <p:sp>
         <p:nvSpPr>
-          <p:cNvPr id="33" name="Oval 32"/>
+          <p:cNvPr id="48" name="Oval 47"/>
           <p:cNvSpPr/>
           <p:nvPr/>
         </p:nvSpPr>
         <p:spPr>
           <a:xfrm>
-            <a:off x="7635240" y="4599432"/>
-            <a:ext cx="219456" cy="219456"/>
+            <a:off x="8979408" y="2670048"/>
+            <a:ext cx="201168" cy="201168"/>
           </a:xfrm>
           <a:prstGeom prst="ellipse">
             <a:avLst/>
@@ -4839,7 +5260,7 @@
               </a:lnSpc>
             </a:pPr>
             <a:r>
-              <a:rPr sz="850" b="1">
+              <a:rPr sz="800" b="1">
                 <a:solidFill>
                   <a:srgbClr val="FFFFFF"/>
                 </a:solidFill>
@@ -4854,14 +5275,58 @@
       </p:sp>
       <p:sp>
         <p:nvSpPr>
-          <p:cNvPr id="34" name="TextBox 33"/>
+          <p:cNvPr id="49" name="Rectangle 48"/>
+          <p:cNvSpPr/>
+          <p:nvPr/>
+        </p:nvSpPr>
+        <p:spPr>
+          <a:xfrm>
+            <a:off x="11164824" y="2679192"/>
+            <a:ext cx="512064" cy="182880"/>
+          </a:xfrm>
+          <a:prstGeom prst="rect">
+            <a:avLst/>
+          </a:prstGeom>
+          <a:solidFill>
+            <a:srgbClr val="E8F0F7"/>
+          </a:solidFill>
+          <a:ln>
+            <a:noFill/>
+          </a:ln>
+          <a:effectLst/>
+        </p:spPr>
+        <p:style>
+          <a:lnRef idx="1">
+            <a:schemeClr val="accent1"/>
+          </a:lnRef>
+          <a:fillRef idx="3">
+            <a:schemeClr val="accent1"/>
+          </a:fillRef>
+          <a:effectRef idx="2">
+            <a:schemeClr val="accent1"/>
+          </a:effectRef>
+          <a:fontRef idx="minor">
+            <a:schemeClr val="lt1"/>
+          </a:fontRef>
+        </p:style>
+        <p:txBody>
+          <a:bodyPr rtlCol="0" anchor="ctr" wrap="square"/>
+          <a:lstStyle/>
+          <a:p>
+            <a:pPr algn="ctr"/>
+          </a:p>
+        </p:txBody>
+      </p:sp>
+      <p:sp>
+        <p:nvSpPr>
+          <p:cNvPr id="50" name="TextBox 49"/>
           <p:cNvSpPr txBox="1"/>
           <p:nvPr/>
         </p:nvSpPr>
         <p:spPr>
           <a:xfrm>
-            <a:off x="7955279" y="4553712"/>
-            <a:ext cx="3730752" cy="1133856"/>
+            <a:off x="11164824" y="2679192"/>
+            <a:ext cx="512064" cy="182880"/>
           </a:xfrm>
           <a:prstGeom prst="rect">
             <a:avLst/>
@@ -4874,13 +5339,54 @@
           </a:bodyPr>
           <a:lstStyle/>
           <a:p>
+            <a:pPr algn="ctr">
+              <a:lnSpc>
+                <a:spcPct val="110000"/>
+              </a:lnSpc>
+            </a:pPr>
+            <a:r>
+              <a:rPr sz="700" b="1">
+                <a:solidFill>
+                  <a:srgbClr val="0F4C81"/>
+                </a:solidFill>
+                <a:latin typeface="微软雅黑"/>
+                <a:ea typeface="微软雅黑"/>
+                <a:cs typeface="微软雅黑"/>
+              </a:rPr>
+              <a:t>环境</a:t>
+            </a:r>
+          </a:p>
+        </p:txBody>
+      </p:sp>
+      <p:sp>
+        <p:nvSpPr>
+          <p:cNvPr id="51" name="TextBox 50"/>
+          <p:cNvSpPr txBox="1"/>
+          <p:nvPr/>
+        </p:nvSpPr>
+        <p:spPr>
+          <a:xfrm>
+            <a:off x="9253728" y="2633472"/>
+            <a:ext cx="1856231" cy="256032"/>
+          </a:xfrm>
+          <a:prstGeom prst="rect">
+            <a:avLst/>
+          </a:prstGeom>
+          <a:noFill/>
+        </p:spPr>
+        <p:txBody>
+          <a:bodyPr wrap="square" lIns="27432" rIns="27432" tIns="9144" bIns="9144" anchor="ctr">
+            <a:spAutoFit/>
+          </a:bodyPr>
+          <a:lstStyle/>
+          <a:p>
             <a:pPr algn="l">
               <a:lnSpc>
                 <a:spcPct val="110000"/>
               </a:lnSpc>
             </a:pPr>
             <a:r>
-              <a:rPr sz="1050" b="1">
+              <a:rPr sz="950" b="1">
                 <a:solidFill>
                   <a:srgbClr val="141414"/>
                 </a:solidFill>
@@ -4888,20 +5394,1410 @@
                 <a:ea typeface="微软雅黑"/>
                 <a:cs typeface="微软雅黑"/>
               </a:rPr>
+              <a:t>无法安装 Runner</a:t>
+            </a:r>
+          </a:p>
+        </p:txBody>
+      </p:sp>
+      <p:sp>
+        <p:nvSpPr>
+          <p:cNvPr id="52" name="TextBox 51"/>
+          <p:cNvSpPr txBox="1"/>
+          <p:nvPr/>
+        </p:nvSpPr>
+        <p:spPr>
+          <a:xfrm>
+            <a:off x="8979408" y="2944368"/>
+            <a:ext cx="2679191" cy="566928"/>
+          </a:xfrm>
+          <a:prstGeom prst="rect">
+            <a:avLst/>
+          </a:prstGeom>
+          <a:noFill/>
+        </p:spPr>
+        <p:txBody>
+          <a:bodyPr wrap="square" lIns="27432" rIns="27432" tIns="9144" bIns="9144" anchor="ctr">
+            <a:spAutoFit/>
+          </a:bodyPr>
+          <a:lstStyle/>
+          <a:p>
+            <a:pPr algn="l">
+              <a:lnSpc>
+                <a:spcPct val="110000"/>
+              </a:lnSpc>
+            </a:pPr>
+            <a:r>
+              <a:rPr sz="800" b="0">
+                <a:solidFill>
+                  <a:srgbClr val="5C5C56"/>
+                </a:solidFill>
+                <a:latin typeface="微软雅黑"/>
+                <a:ea typeface="微软雅黑"/>
+                <a:cs typeface="微软雅黑"/>
+              </a:rPr>
+              <a:t>封闭系统或只读镜像，禁止第三方程序</a:t>
+            </a:r>
+          </a:p>
+        </p:txBody>
+      </p:sp>
+      <p:sp>
+        <p:nvSpPr>
+          <p:cNvPr id="53" name="Rounded Rectangle 52"/>
+          <p:cNvSpPr/>
+          <p:nvPr/>
+        </p:nvSpPr>
+        <p:spPr>
+          <a:xfrm>
+            <a:off x="2907792" y="3694176"/>
+            <a:ext cx="2862072" cy="1024128"/>
+          </a:xfrm>
+          <a:prstGeom prst="roundRect">
+            <a:avLst>
+              <a:gd name="adj" fmla="val 5000"/>
+            </a:avLst>
+          </a:prstGeom>
+          <a:solidFill>
+            <a:srgbClr val="FFFFFF"/>
+          </a:solidFill>
+          <a:ln w="12700">
+            <a:solidFill>
+              <a:srgbClr val="C9C9C2"/>
+            </a:solidFill>
+          </a:ln>
+          <a:effectLst/>
+        </p:spPr>
+        <p:style>
+          <a:lnRef idx="1">
+            <a:schemeClr val="accent1"/>
+          </a:lnRef>
+          <a:fillRef idx="3">
+            <a:schemeClr val="accent1"/>
+          </a:fillRef>
+          <a:effectRef idx="2">
+            <a:schemeClr val="accent1"/>
+          </a:effectRef>
+          <a:fontRef idx="minor">
+            <a:schemeClr val="lt1"/>
+          </a:fontRef>
+        </p:style>
+        <p:txBody>
+          <a:bodyPr rtlCol="0" anchor="ctr" wrap="square"/>
+          <a:lstStyle/>
+          <a:p>
+            <a:pPr algn="ctr"/>
+          </a:p>
+        </p:txBody>
+      </p:sp>
+      <p:sp>
+        <p:nvSpPr>
+          <p:cNvPr id="54" name="Oval 53"/>
+          <p:cNvSpPr/>
+          <p:nvPr/>
+        </p:nvSpPr>
+        <p:spPr>
+          <a:xfrm>
+            <a:off x="2999232" y="3785616"/>
+            <a:ext cx="201168" cy="201168"/>
+          </a:xfrm>
+          <a:prstGeom prst="ellipse">
+            <a:avLst/>
+          </a:prstGeom>
+          <a:solidFill>
+            <a:srgbClr val="8B0F1A"/>
+          </a:solidFill>
+          <a:ln>
+            <a:noFill/>
+          </a:ln>
+          <a:effectLst/>
+        </p:spPr>
+        <p:style>
+          <a:lnRef idx="1">
+            <a:schemeClr val="accent1"/>
+          </a:lnRef>
+          <a:fillRef idx="3">
+            <a:schemeClr val="accent1"/>
+          </a:fillRef>
+          <a:effectRef idx="2">
+            <a:schemeClr val="accent1"/>
+          </a:effectRef>
+          <a:fontRef idx="minor">
+            <a:schemeClr val="lt1"/>
+          </a:fontRef>
+        </p:style>
+        <p:txBody>
+          <a:bodyPr rtlCol="0" anchor="ctr" lIns="18288" rIns="18288" tIns="0" bIns="0"/>
+          <a:lstStyle/>
+          <a:p>
+            <a:pPr algn="ctr">
+              <a:lnSpc>
+                <a:spcPct val="100000"/>
+              </a:lnSpc>
+            </a:pPr>
+            <a:r>
+              <a:rPr sz="800" b="1">
+                <a:solidFill>
+                  <a:srgbClr val="FFFFFF"/>
+                </a:solidFill>
+                <a:latin typeface="微软雅黑"/>
+                <a:ea typeface="微软雅黑"/>
+                <a:cs typeface="微软雅黑"/>
+              </a:rPr>
+              <a:t>7</a:t>
+            </a:r>
+          </a:p>
+        </p:txBody>
+      </p:sp>
+      <p:sp>
+        <p:nvSpPr>
+          <p:cNvPr id="55" name="Rectangle 54"/>
+          <p:cNvSpPr/>
+          <p:nvPr/>
+        </p:nvSpPr>
+        <p:spPr>
+          <a:xfrm>
+            <a:off x="5184648" y="3794760"/>
+            <a:ext cx="512064" cy="182880"/>
+          </a:xfrm>
+          <a:prstGeom prst="rect">
+            <a:avLst/>
+          </a:prstGeom>
+          <a:solidFill>
+            <a:srgbClr val="E8F0F7"/>
+          </a:solidFill>
+          <a:ln>
+            <a:noFill/>
+          </a:ln>
+          <a:effectLst/>
+        </p:spPr>
+        <p:style>
+          <a:lnRef idx="1">
+            <a:schemeClr val="accent1"/>
+          </a:lnRef>
+          <a:fillRef idx="3">
+            <a:schemeClr val="accent1"/>
+          </a:fillRef>
+          <a:effectRef idx="2">
+            <a:schemeClr val="accent1"/>
+          </a:effectRef>
+          <a:fontRef idx="minor">
+            <a:schemeClr val="lt1"/>
+          </a:fontRef>
+        </p:style>
+        <p:txBody>
+          <a:bodyPr rtlCol="0" anchor="ctr" wrap="square"/>
+          <a:lstStyle/>
+          <a:p>
+            <a:pPr algn="ctr"/>
+          </a:p>
+        </p:txBody>
+      </p:sp>
+      <p:sp>
+        <p:nvSpPr>
+          <p:cNvPr id="56" name="TextBox 55"/>
+          <p:cNvSpPr txBox="1"/>
+          <p:nvPr/>
+        </p:nvSpPr>
+        <p:spPr>
+          <a:xfrm>
+            <a:off x="5184648" y="3794760"/>
+            <a:ext cx="512064" cy="182880"/>
+          </a:xfrm>
+          <a:prstGeom prst="rect">
+            <a:avLst/>
+          </a:prstGeom>
+          <a:noFill/>
+        </p:spPr>
+        <p:txBody>
+          <a:bodyPr wrap="square" lIns="27432" rIns="27432" tIns="9144" bIns="9144" anchor="ctr">
+            <a:spAutoFit/>
+          </a:bodyPr>
+          <a:lstStyle/>
+          <a:p>
+            <a:pPr algn="ctr">
+              <a:lnSpc>
+                <a:spcPct val="110000"/>
+              </a:lnSpc>
+            </a:pPr>
+            <a:r>
+              <a:rPr sz="700" b="1">
+                <a:solidFill>
+                  <a:srgbClr val="0F4C81"/>
+                </a:solidFill>
+                <a:latin typeface="微软雅黑"/>
+                <a:ea typeface="微软雅黑"/>
+                <a:cs typeface="微软雅黑"/>
+              </a:rPr>
+              <a:t>环境</a:t>
+            </a:r>
+          </a:p>
+        </p:txBody>
+      </p:sp>
+      <p:sp>
+        <p:nvSpPr>
+          <p:cNvPr id="57" name="TextBox 56"/>
+          <p:cNvSpPr txBox="1"/>
+          <p:nvPr/>
+        </p:nvSpPr>
+        <p:spPr>
+          <a:xfrm>
+            <a:off x="3273552" y="3749040"/>
+            <a:ext cx="1856231" cy="256032"/>
+          </a:xfrm>
+          <a:prstGeom prst="rect">
+            <a:avLst/>
+          </a:prstGeom>
+          <a:noFill/>
+        </p:spPr>
+        <p:txBody>
+          <a:bodyPr wrap="square" lIns="27432" rIns="27432" tIns="9144" bIns="9144" anchor="ctr">
+            <a:spAutoFit/>
+          </a:bodyPr>
+          <a:lstStyle/>
+          <a:p>
+            <a:pPr algn="l">
+              <a:lnSpc>
+                <a:spcPct val="110000"/>
+              </a:lnSpc>
+            </a:pPr>
+            <a:r>
+              <a:rPr sz="950" b="1">
+                <a:solidFill>
+                  <a:srgbClr val="141414"/>
+                </a:solidFill>
+                <a:latin typeface="微软雅黑"/>
+                <a:ea typeface="微软雅黑"/>
+                <a:cs typeface="微软雅黑"/>
+              </a:rPr>
+              <a:t>系统与位数锁定</a:t>
+            </a:r>
+          </a:p>
+        </p:txBody>
+      </p:sp>
+      <p:sp>
+        <p:nvSpPr>
+          <p:cNvPr id="58" name="TextBox 57"/>
+          <p:cNvSpPr txBox="1"/>
+          <p:nvPr/>
+        </p:nvSpPr>
+        <p:spPr>
+          <a:xfrm>
+            <a:off x="2999232" y="4059936"/>
+            <a:ext cx="2679191" cy="566928"/>
+          </a:xfrm>
+          <a:prstGeom prst="rect">
+            <a:avLst/>
+          </a:prstGeom>
+          <a:noFill/>
+        </p:spPr>
+        <p:txBody>
+          <a:bodyPr wrap="square" lIns="27432" rIns="27432" tIns="9144" bIns="9144" anchor="ctr">
+            <a:spAutoFit/>
+          </a:bodyPr>
+          <a:lstStyle/>
+          <a:p>
+            <a:pPr algn="l">
+              <a:lnSpc>
+                <a:spcPct val="110000"/>
+              </a:lnSpc>
+            </a:pPr>
+            <a:r>
+              <a:rPr sz="800" b="0">
+                <a:solidFill>
+                  <a:srgbClr val="5C5C56"/>
+                </a:solidFill>
+                <a:latin typeface="微软雅黑"/>
+                <a:ea typeface="微软雅黑"/>
+                <a:cs typeface="微软雅黑"/>
+              </a:rPr>
+              <a:t>仅支持 Win7 / 32 位，与 Runner 环境冲突</a:t>
+            </a:r>
+          </a:p>
+        </p:txBody>
+      </p:sp>
+      <p:sp>
+        <p:nvSpPr>
+          <p:cNvPr id="59" name="Rounded Rectangle 58"/>
+          <p:cNvSpPr/>
+          <p:nvPr/>
+        </p:nvSpPr>
+        <p:spPr>
+          <a:xfrm>
+            <a:off x="5897880" y="3694176"/>
+            <a:ext cx="2862072" cy="1024128"/>
+          </a:xfrm>
+          <a:prstGeom prst="roundRect">
+            <a:avLst>
+              <a:gd name="adj" fmla="val 5000"/>
+            </a:avLst>
+          </a:prstGeom>
+          <a:solidFill>
+            <a:srgbClr val="FFFFFF"/>
+          </a:solidFill>
+          <a:ln w="12700">
+            <a:solidFill>
+              <a:srgbClr val="C9C9C2"/>
+            </a:solidFill>
+          </a:ln>
+          <a:effectLst/>
+        </p:spPr>
+        <p:style>
+          <a:lnRef idx="1">
+            <a:schemeClr val="accent1"/>
+          </a:lnRef>
+          <a:fillRef idx="3">
+            <a:schemeClr val="accent1"/>
+          </a:fillRef>
+          <a:effectRef idx="2">
+            <a:schemeClr val="accent1"/>
+          </a:effectRef>
+          <a:fontRef idx="minor">
+            <a:schemeClr val="lt1"/>
+          </a:fontRef>
+        </p:style>
+        <p:txBody>
+          <a:bodyPr rtlCol="0" anchor="ctr" wrap="square"/>
+          <a:lstStyle/>
+          <a:p>
+            <a:pPr algn="ctr"/>
+          </a:p>
+        </p:txBody>
+      </p:sp>
+      <p:sp>
+        <p:nvSpPr>
+          <p:cNvPr id="60" name="Oval 59"/>
+          <p:cNvSpPr/>
+          <p:nvPr/>
+        </p:nvSpPr>
+        <p:spPr>
+          <a:xfrm>
+            <a:off x="5989320" y="3785616"/>
+            <a:ext cx="201168" cy="201168"/>
+          </a:xfrm>
+          <a:prstGeom prst="ellipse">
+            <a:avLst/>
+          </a:prstGeom>
+          <a:solidFill>
+            <a:srgbClr val="8B0F1A"/>
+          </a:solidFill>
+          <a:ln>
+            <a:noFill/>
+          </a:ln>
+          <a:effectLst/>
+        </p:spPr>
+        <p:style>
+          <a:lnRef idx="1">
+            <a:schemeClr val="accent1"/>
+          </a:lnRef>
+          <a:fillRef idx="3">
+            <a:schemeClr val="accent1"/>
+          </a:fillRef>
+          <a:effectRef idx="2">
+            <a:schemeClr val="accent1"/>
+          </a:effectRef>
+          <a:fontRef idx="minor">
+            <a:schemeClr val="lt1"/>
+          </a:fontRef>
+        </p:style>
+        <p:txBody>
+          <a:bodyPr rtlCol="0" anchor="ctr" lIns="18288" rIns="18288" tIns="0" bIns="0"/>
+          <a:lstStyle/>
+          <a:p>
+            <a:pPr algn="ctr">
+              <a:lnSpc>
+                <a:spcPct val="100000"/>
+              </a:lnSpc>
+            </a:pPr>
+            <a:r>
+              <a:rPr sz="800" b="1">
+                <a:solidFill>
+                  <a:srgbClr val="FFFFFF"/>
+                </a:solidFill>
+                <a:latin typeface="微软雅黑"/>
+                <a:ea typeface="微软雅黑"/>
+                <a:cs typeface="微软雅黑"/>
+              </a:rPr>
+              <a:t>8</a:t>
+            </a:r>
+          </a:p>
+        </p:txBody>
+      </p:sp>
+      <p:sp>
+        <p:nvSpPr>
+          <p:cNvPr id="61" name="Rectangle 60"/>
+          <p:cNvSpPr/>
+          <p:nvPr/>
+        </p:nvSpPr>
+        <p:spPr>
+          <a:xfrm>
+            <a:off x="8174736" y="3794760"/>
+            <a:ext cx="512064" cy="182880"/>
+          </a:xfrm>
+          <a:prstGeom prst="rect">
+            <a:avLst/>
+          </a:prstGeom>
+          <a:solidFill>
+            <a:srgbClr val="E8F0F7"/>
+          </a:solidFill>
+          <a:ln>
+            <a:noFill/>
+          </a:ln>
+          <a:effectLst/>
+        </p:spPr>
+        <p:style>
+          <a:lnRef idx="1">
+            <a:schemeClr val="accent1"/>
+          </a:lnRef>
+          <a:fillRef idx="3">
+            <a:schemeClr val="accent1"/>
+          </a:fillRef>
+          <a:effectRef idx="2">
+            <a:schemeClr val="accent1"/>
+          </a:effectRef>
+          <a:fontRef idx="minor">
+            <a:schemeClr val="lt1"/>
+          </a:fontRef>
+        </p:style>
+        <p:txBody>
+          <a:bodyPr rtlCol="0" anchor="ctr" wrap="square"/>
+          <a:lstStyle/>
+          <a:p>
+            <a:pPr algn="ctr"/>
+          </a:p>
+        </p:txBody>
+      </p:sp>
+      <p:sp>
+        <p:nvSpPr>
+          <p:cNvPr id="62" name="TextBox 61"/>
+          <p:cNvSpPr txBox="1"/>
+          <p:nvPr/>
+        </p:nvSpPr>
+        <p:spPr>
+          <a:xfrm>
+            <a:off x="8174736" y="3794760"/>
+            <a:ext cx="512064" cy="182880"/>
+          </a:xfrm>
+          <a:prstGeom prst="rect">
+            <a:avLst/>
+          </a:prstGeom>
+          <a:noFill/>
+        </p:spPr>
+        <p:txBody>
+          <a:bodyPr wrap="square" lIns="27432" rIns="27432" tIns="9144" bIns="9144" anchor="ctr">
+            <a:spAutoFit/>
+          </a:bodyPr>
+          <a:lstStyle/>
+          <a:p>
+            <a:pPr algn="ctr">
+              <a:lnSpc>
+                <a:spcPct val="110000"/>
+              </a:lnSpc>
+            </a:pPr>
+            <a:r>
+              <a:rPr sz="700" b="1">
+                <a:solidFill>
+                  <a:srgbClr val="0F4C81"/>
+                </a:solidFill>
+                <a:latin typeface="微软雅黑"/>
+                <a:ea typeface="微软雅黑"/>
+                <a:cs typeface="微软雅黑"/>
+              </a:rPr>
+              <a:t>环境</a:t>
+            </a:r>
+          </a:p>
+        </p:txBody>
+      </p:sp>
+      <p:sp>
+        <p:nvSpPr>
+          <p:cNvPr id="63" name="TextBox 62"/>
+          <p:cNvSpPr txBox="1"/>
+          <p:nvPr/>
+        </p:nvSpPr>
+        <p:spPr>
+          <a:xfrm>
+            <a:off x="6263640" y="3749040"/>
+            <a:ext cx="1856231" cy="256032"/>
+          </a:xfrm>
+          <a:prstGeom prst="rect">
+            <a:avLst/>
+          </a:prstGeom>
+          <a:noFill/>
+        </p:spPr>
+        <p:txBody>
+          <a:bodyPr wrap="square" lIns="27432" rIns="27432" tIns="9144" bIns="9144" anchor="ctr">
+            <a:spAutoFit/>
+          </a:bodyPr>
+          <a:lstStyle/>
+          <a:p>
+            <a:pPr algn="l">
+              <a:lnSpc>
+                <a:spcPct val="110000"/>
+              </a:lnSpc>
+            </a:pPr>
+            <a:r>
+              <a:rPr sz="950" b="1">
+                <a:solidFill>
+                  <a:srgbClr val="141414"/>
+                </a:solidFill>
+                <a:latin typeface="微软雅黑"/>
+                <a:ea typeface="微软雅黑"/>
+                <a:cs typeface="微软雅黑"/>
+              </a:rPr>
+              <a:t>必须人工交互</a:t>
+            </a:r>
+          </a:p>
+        </p:txBody>
+      </p:sp>
+      <p:sp>
+        <p:nvSpPr>
+          <p:cNvPr id="64" name="TextBox 63"/>
+          <p:cNvSpPr txBox="1"/>
+          <p:nvPr/>
+        </p:nvSpPr>
+        <p:spPr>
+          <a:xfrm>
+            <a:off x="5989320" y="4059936"/>
+            <a:ext cx="2679191" cy="566928"/>
+          </a:xfrm>
+          <a:prstGeom prst="rect">
+            <a:avLst/>
+          </a:prstGeom>
+          <a:noFill/>
+        </p:spPr>
+        <p:txBody>
+          <a:bodyPr wrap="square" lIns="27432" rIns="27432" tIns="9144" bIns="9144" anchor="ctr">
+            <a:spAutoFit/>
+          </a:bodyPr>
+          <a:lstStyle/>
+          <a:p>
+            <a:pPr algn="l">
+              <a:lnSpc>
+                <a:spcPct val="110000"/>
+              </a:lnSpc>
+            </a:pPr>
+            <a:r>
+              <a:rPr sz="800" b="0">
+                <a:solidFill>
+                  <a:srgbClr val="5C5C56"/>
+                </a:solidFill>
+                <a:latin typeface="微软雅黑"/>
+                <a:ea typeface="微软雅黑"/>
+                <a:cs typeface="微软雅黑"/>
+              </a:rPr>
+              <a:t>需人工点击确认，无法无人值守长期运行</a:t>
+            </a:r>
+          </a:p>
+        </p:txBody>
+      </p:sp>
+      <p:sp>
+        <p:nvSpPr>
+          <p:cNvPr id="65" name="Rounded Rectangle 64"/>
+          <p:cNvSpPr/>
+          <p:nvPr/>
+        </p:nvSpPr>
+        <p:spPr>
+          <a:xfrm>
+            <a:off x="8887968" y="3694176"/>
+            <a:ext cx="2862072" cy="1024128"/>
+          </a:xfrm>
+          <a:prstGeom prst="roundRect">
+            <a:avLst>
+              <a:gd name="adj" fmla="val 5000"/>
+            </a:avLst>
+          </a:prstGeom>
+          <a:solidFill>
+            <a:srgbClr val="FFFFFF"/>
+          </a:solidFill>
+          <a:ln w="12700">
+            <a:solidFill>
+              <a:srgbClr val="C9C9C2"/>
+            </a:solidFill>
+          </a:ln>
+          <a:effectLst/>
+        </p:spPr>
+        <p:style>
+          <a:lnRef idx="1">
+            <a:schemeClr val="accent1"/>
+          </a:lnRef>
+          <a:fillRef idx="3">
+            <a:schemeClr val="accent1"/>
+          </a:fillRef>
+          <a:effectRef idx="2">
+            <a:schemeClr val="accent1"/>
+          </a:effectRef>
+          <a:fontRef idx="minor">
+            <a:schemeClr val="lt1"/>
+          </a:fontRef>
+        </p:style>
+        <p:txBody>
+          <a:bodyPr rtlCol="0" anchor="ctr" wrap="square"/>
+          <a:lstStyle/>
+          <a:p>
+            <a:pPr algn="ctr"/>
+          </a:p>
+        </p:txBody>
+      </p:sp>
+      <p:sp>
+        <p:nvSpPr>
+          <p:cNvPr id="66" name="Oval 65"/>
+          <p:cNvSpPr/>
+          <p:nvPr/>
+        </p:nvSpPr>
+        <p:spPr>
+          <a:xfrm>
+            <a:off x="8979408" y="3785616"/>
+            <a:ext cx="201168" cy="201168"/>
+          </a:xfrm>
+          <a:prstGeom prst="ellipse">
+            <a:avLst/>
+          </a:prstGeom>
+          <a:solidFill>
+            <a:srgbClr val="8B0F1A"/>
+          </a:solidFill>
+          <a:ln>
+            <a:noFill/>
+          </a:ln>
+          <a:effectLst/>
+        </p:spPr>
+        <p:style>
+          <a:lnRef idx="1">
+            <a:schemeClr val="accent1"/>
+          </a:lnRef>
+          <a:fillRef idx="3">
+            <a:schemeClr val="accent1"/>
+          </a:fillRef>
+          <a:effectRef idx="2">
+            <a:schemeClr val="accent1"/>
+          </a:effectRef>
+          <a:fontRef idx="minor">
+            <a:schemeClr val="lt1"/>
+          </a:fontRef>
+        </p:style>
+        <p:txBody>
+          <a:bodyPr rtlCol="0" anchor="ctr" lIns="18288" rIns="18288" tIns="0" bIns="0"/>
+          <a:lstStyle/>
+          <a:p>
+            <a:pPr algn="ctr">
+              <a:lnSpc>
+                <a:spcPct val="100000"/>
+              </a:lnSpc>
+            </a:pPr>
+            <a:r>
+              <a:rPr sz="800" b="1">
+                <a:solidFill>
+                  <a:srgbClr val="FFFFFF"/>
+                </a:solidFill>
+                <a:latin typeface="微软雅黑"/>
+                <a:ea typeface="微软雅黑"/>
+                <a:cs typeface="微软雅黑"/>
+              </a:rPr>
+              <a:t>9</a:t>
+            </a:r>
+          </a:p>
+        </p:txBody>
+      </p:sp>
+      <p:sp>
+        <p:nvSpPr>
+          <p:cNvPr id="67" name="Rectangle 66"/>
+          <p:cNvSpPr/>
+          <p:nvPr/>
+        </p:nvSpPr>
+        <p:spPr>
+          <a:xfrm>
+            <a:off x="11164824" y="3794760"/>
+            <a:ext cx="512064" cy="182880"/>
+          </a:xfrm>
+          <a:prstGeom prst="rect">
+            <a:avLst/>
+          </a:prstGeom>
+          <a:solidFill>
+            <a:srgbClr val="E8F0F7"/>
+          </a:solidFill>
+          <a:ln>
+            <a:noFill/>
+          </a:ln>
+          <a:effectLst/>
+        </p:spPr>
+        <p:style>
+          <a:lnRef idx="1">
+            <a:schemeClr val="accent1"/>
+          </a:lnRef>
+          <a:fillRef idx="3">
+            <a:schemeClr val="accent1"/>
+          </a:fillRef>
+          <a:effectRef idx="2">
+            <a:schemeClr val="accent1"/>
+          </a:effectRef>
+          <a:fontRef idx="minor">
+            <a:schemeClr val="lt1"/>
+          </a:fontRef>
+        </p:style>
+        <p:txBody>
+          <a:bodyPr rtlCol="0" anchor="ctr" wrap="square"/>
+          <a:lstStyle/>
+          <a:p>
+            <a:pPr algn="ctr"/>
+          </a:p>
+        </p:txBody>
+      </p:sp>
+      <p:sp>
+        <p:nvSpPr>
+          <p:cNvPr id="68" name="TextBox 67"/>
+          <p:cNvSpPr txBox="1"/>
+          <p:nvPr/>
+        </p:nvSpPr>
+        <p:spPr>
+          <a:xfrm>
+            <a:off x="11164824" y="3794760"/>
+            <a:ext cx="512064" cy="182880"/>
+          </a:xfrm>
+          <a:prstGeom prst="rect">
+            <a:avLst/>
+          </a:prstGeom>
+          <a:noFill/>
+        </p:spPr>
+        <p:txBody>
+          <a:bodyPr wrap="square" lIns="27432" rIns="27432" tIns="9144" bIns="9144" anchor="ctr">
+            <a:spAutoFit/>
+          </a:bodyPr>
+          <a:lstStyle/>
+          <a:p>
+            <a:pPr algn="ctr">
+              <a:lnSpc>
+                <a:spcPct val="110000"/>
+              </a:lnSpc>
+            </a:pPr>
+            <a:r>
+              <a:rPr sz="700" b="1">
+                <a:solidFill>
+                  <a:srgbClr val="0F4C81"/>
+                </a:solidFill>
+                <a:latin typeface="微软雅黑"/>
+                <a:ea typeface="微软雅黑"/>
+                <a:cs typeface="微软雅黑"/>
+              </a:rPr>
+              <a:t>授权</a:t>
+            </a:r>
+          </a:p>
+        </p:txBody>
+      </p:sp>
+      <p:sp>
+        <p:nvSpPr>
+          <p:cNvPr id="69" name="TextBox 68"/>
+          <p:cNvSpPr txBox="1"/>
+          <p:nvPr/>
+        </p:nvSpPr>
+        <p:spPr>
+          <a:xfrm>
+            <a:off x="9253728" y="3749040"/>
+            <a:ext cx="1856231" cy="256032"/>
+          </a:xfrm>
+          <a:prstGeom prst="rect">
+            <a:avLst/>
+          </a:prstGeom>
+          <a:noFill/>
+        </p:spPr>
+        <p:txBody>
+          <a:bodyPr wrap="square" lIns="27432" rIns="27432" tIns="9144" bIns="9144" anchor="ctr">
+            <a:spAutoFit/>
+          </a:bodyPr>
+          <a:lstStyle/>
+          <a:p>
+            <a:pPr algn="l">
+              <a:lnSpc>
+                <a:spcPct val="110000"/>
+              </a:lnSpc>
+            </a:pPr>
+            <a:r>
+              <a:rPr sz="950" b="1">
+                <a:solidFill>
+                  <a:srgbClr val="141414"/>
+                </a:solidFill>
+                <a:latin typeface="微软雅黑"/>
+                <a:ea typeface="微软雅黑"/>
+                <a:cs typeface="微软雅黑"/>
+              </a:rPr>
+              <a:t>授权绑定 MAC</a:t>
+            </a:r>
+          </a:p>
+        </p:txBody>
+      </p:sp>
+      <p:sp>
+        <p:nvSpPr>
+          <p:cNvPr id="70" name="TextBox 69"/>
+          <p:cNvSpPr txBox="1"/>
+          <p:nvPr/>
+        </p:nvSpPr>
+        <p:spPr>
+          <a:xfrm>
+            <a:off x="8979408" y="4059936"/>
+            <a:ext cx="2679191" cy="566928"/>
+          </a:xfrm>
+          <a:prstGeom prst="rect">
+            <a:avLst/>
+          </a:prstGeom>
+          <a:noFill/>
+        </p:spPr>
+        <p:txBody>
+          <a:bodyPr wrap="square" lIns="27432" rIns="27432" tIns="9144" bIns="9144" anchor="ctr">
+            <a:spAutoFit/>
+          </a:bodyPr>
+          <a:lstStyle/>
+          <a:p>
+            <a:pPr algn="l">
+              <a:lnSpc>
+                <a:spcPct val="110000"/>
+              </a:lnSpc>
+            </a:pPr>
+            <a:r>
+              <a:rPr sz="800" b="0">
+                <a:solidFill>
+                  <a:srgbClr val="5C5C56"/>
+                </a:solidFill>
+                <a:latin typeface="微软雅黑"/>
+                <a:ea typeface="微软雅黑"/>
+                <a:cs typeface="微软雅黑"/>
+              </a:rPr>
+              <a:t>绑定网卡 MAC 与机器指纹，迁机即失效</a:t>
+            </a:r>
+          </a:p>
+        </p:txBody>
+      </p:sp>
+      <p:sp>
+        <p:nvSpPr>
+          <p:cNvPr id="71" name="Rounded Rectangle 70"/>
+          <p:cNvSpPr/>
+          <p:nvPr/>
+        </p:nvSpPr>
+        <p:spPr>
+          <a:xfrm>
+            <a:off x="2907792" y="4809744"/>
+            <a:ext cx="2862072" cy="1024128"/>
+          </a:xfrm>
+          <a:prstGeom prst="roundRect">
+            <a:avLst>
+              <a:gd name="adj" fmla="val 5000"/>
+            </a:avLst>
+          </a:prstGeom>
+          <a:solidFill>
+            <a:srgbClr val="FFFFFF"/>
+          </a:solidFill>
+          <a:ln w="12700">
+            <a:solidFill>
+              <a:srgbClr val="C9C9C2"/>
+            </a:solidFill>
+          </a:ln>
+          <a:effectLst/>
+        </p:spPr>
+        <p:style>
+          <a:lnRef idx="1">
+            <a:schemeClr val="accent1"/>
+          </a:lnRef>
+          <a:fillRef idx="3">
+            <a:schemeClr val="accent1"/>
+          </a:fillRef>
+          <a:effectRef idx="2">
+            <a:schemeClr val="accent1"/>
+          </a:effectRef>
+          <a:fontRef idx="minor">
+            <a:schemeClr val="lt1"/>
+          </a:fontRef>
+        </p:style>
+        <p:txBody>
+          <a:bodyPr rtlCol="0" anchor="ctr" wrap="square"/>
+          <a:lstStyle/>
+          <a:p>
+            <a:pPr algn="ctr"/>
+          </a:p>
+        </p:txBody>
+      </p:sp>
+      <p:sp>
+        <p:nvSpPr>
+          <p:cNvPr id="72" name="Oval 71"/>
+          <p:cNvSpPr/>
+          <p:nvPr/>
+        </p:nvSpPr>
+        <p:spPr>
+          <a:xfrm>
+            <a:off x="2999232" y="4901184"/>
+            <a:ext cx="201168" cy="201168"/>
+          </a:xfrm>
+          <a:prstGeom prst="ellipse">
+            <a:avLst/>
+          </a:prstGeom>
+          <a:solidFill>
+            <a:srgbClr val="8B0F1A"/>
+          </a:solidFill>
+          <a:ln>
+            <a:noFill/>
+          </a:ln>
+          <a:effectLst/>
+        </p:spPr>
+        <p:style>
+          <a:lnRef idx="1">
+            <a:schemeClr val="accent1"/>
+          </a:lnRef>
+          <a:fillRef idx="3">
+            <a:schemeClr val="accent1"/>
+          </a:fillRef>
+          <a:effectRef idx="2">
+            <a:schemeClr val="accent1"/>
+          </a:effectRef>
+          <a:fontRef idx="minor">
+            <a:schemeClr val="lt1"/>
+          </a:fontRef>
+        </p:style>
+        <p:txBody>
+          <a:bodyPr rtlCol="0" anchor="ctr" lIns="18288" rIns="18288" tIns="0" bIns="0"/>
+          <a:lstStyle/>
+          <a:p>
+            <a:pPr algn="ctr">
+              <a:lnSpc>
+                <a:spcPct val="100000"/>
+              </a:lnSpc>
+            </a:pPr>
+            <a:r>
+              <a:rPr sz="800" b="1">
+                <a:solidFill>
+                  <a:srgbClr val="FFFFFF"/>
+                </a:solidFill>
+                <a:latin typeface="微软雅黑"/>
+                <a:ea typeface="微软雅黑"/>
+                <a:cs typeface="微软雅黑"/>
+              </a:rPr>
+              <a:t>10</a:t>
+            </a:r>
+          </a:p>
+        </p:txBody>
+      </p:sp>
+      <p:sp>
+        <p:nvSpPr>
+          <p:cNvPr id="73" name="Rectangle 72"/>
+          <p:cNvSpPr/>
+          <p:nvPr/>
+        </p:nvSpPr>
+        <p:spPr>
+          <a:xfrm>
+            <a:off x="5184648" y="4910328"/>
+            <a:ext cx="512064" cy="182880"/>
+          </a:xfrm>
+          <a:prstGeom prst="rect">
+            <a:avLst/>
+          </a:prstGeom>
+          <a:solidFill>
+            <a:srgbClr val="E8F0F7"/>
+          </a:solidFill>
+          <a:ln>
+            <a:noFill/>
+          </a:ln>
+          <a:effectLst/>
+        </p:spPr>
+        <p:style>
+          <a:lnRef idx="1">
+            <a:schemeClr val="accent1"/>
+          </a:lnRef>
+          <a:fillRef idx="3">
+            <a:schemeClr val="accent1"/>
+          </a:fillRef>
+          <a:effectRef idx="2">
+            <a:schemeClr val="accent1"/>
+          </a:effectRef>
+          <a:fontRef idx="minor">
+            <a:schemeClr val="lt1"/>
+          </a:fontRef>
+        </p:style>
+        <p:txBody>
+          <a:bodyPr rtlCol="0" anchor="ctr" wrap="square"/>
+          <a:lstStyle/>
+          <a:p>
+            <a:pPr algn="ctr"/>
+          </a:p>
+        </p:txBody>
+      </p:sp>
+      <p:sp>
+        <p:nvSpPr>
+          <p:cNvPr id="74" name="TextBox 73"/>
+          <p:cNvSpPr txBox="1"/>
+          <p:nvPr/>
+        </p:nvSpPr>
+        <p:spPr>
+          <a:xfrm>
+            <a:off x="5184648" y="4910328"/>
+            <a:ext cx="512064" cy="182880"/>
+          </a:xfrm>
+          <a:prstGeom prst="rect">
+            <a:avLst/>
+          </a:prstGeom>
+          <a:noFill/>
+        </p:spPr>
+        <p:txBody>
+          <a:bodyPr wrap="square" lIns="27432" rIns="27432" tIns="9144" bIns="9144" anchor="ctr">
+            <a:spAutoFit/>
+          </a:bodyPr>
+          <a:lstStyle/>
+          <a:p>
+            <a:pPr algn="ctr">
+              <a:lnSpc>
+                <a:spcPct val="110000"/>
+              </a:lnSpc>
+            </a:pPr>
+            <a:r>
+              <a:rPr sz="700" b="1">
+                <a:solidFill>
+                  <a:srgbClr val="0F4C81"/>
+                </a:solidFill>
+                <a:latin typeface="微软雅黑"/>
+                <a:ea typeface="微软雅黑"/>
+                <a:cs typeface="微软雅黑"/>
+              </a:rPr>
+              <a:t>授权</a:t>
+            </a:r>
+          </a:p>
+        </p:txBody>
+      </p:sp>
+      <p:sp>
+        <p:nvSpPr>
+          <p:cNvPr id="75" name="TextBox 74"/>
+          <p:cNvSpPr txBox="1"/>
+          <p:nvPr/>
+        </p:nvSpPr>
+        <p:spPr>
+          <a:xfrm>
+            <a:off x="3273552" y="4864608"/>
+            <a:ext cx="1856231" cy="256032"/>
+          </a:xfrm>
+          <a:prstGeom prst="rect">
+            <a:avLst/>
+          </a:prstGeom>
+          <a:noFill/>
+        </p:spPr>
+        <p:txBody>
+          <a:bodyPr wrap="square" lIns="27432" rIns="27432" tIns="9144" bIns="9144" anchor="ctr">
+            <a:spAutoFit/>
+          </a:bodyPr>
+          <a:lstStyle/>
+          <a:p>
+            <a:pPr algn="l">
+              <a:lnSpc>
+                <a:spcPct val="110000"/>
+              </a:lnSpc>
+            </a:pPr>
+            <a:r>
+              <a:rPr sz="950" b="1">
+                <a:solidFill>
+                  <a:srgbClr val="141414"/>
+                </a:solidFill>
+                <a:latin typeface="微软雅黑"/>
+                <a:ea typeface="微软雅黑"/>
+                <a:cs typeface="微软雅黑"/>
+              </a:rPr>
+              <a:t>授权并发不足</a:t>
+            </a:r>
+          </a:p>
+        </p:txBody>
+      </p:sp>
+      <p:sp>
+        <p:nvSpPr>
+          <p:cNvPr id="76" name="TextBox 75"/>
+          <p:cNvSpPr txBox="1"/>
+          <p:nvPr/>
+        </p:nvSpPr>
+        <p:spPr>
+          <a:xfrm>
+            <a:off x="2999232" y="5175504"/>
+            <a:ext cx="2679191" cy="566928"/>
+          </a:xfrm>
+          <a:prstGeom prst="rect">
+            <a:avLst/>
+          </a:prstGeom>
+          <a:noFill/>
+        </p:spPr>
+        <p:txBody>
+          <a:bodyPr wrap="square" lIns="27432" rIns="27432" tIns="9144" bIns="9144" anchor="ctr">
+            <a:spAutoFit/>
+          </a:bodyPr>
+          <a:lstStyle/>
+          <a:p>
+            <a:pPr algn="l">
+              <a:lnSpc>
+                <a:spcPct val="110000"/>
+              </a:lnSpc>
+            </a:pPr>
+            <a:r>
+              <a:rPr sz="800" b="0">
+                <a:solidFill>
+                  <a:srgbClr val="5C5C56"/>
+                </a:solidFill>
+                <a:latin typeface="微软雅黑"/>
+                <a:ea typeface="微软雅黑"/>
+                <a:cs typeface="微软雅黑"/>
+              </a:rPr>
+              <a:t>加密狗或单机授权少于测试台数，无法并行</a:t>
+            </a:r>
+          </a:p>
+        </p:txBody>
+      </p:sp>
+      <p:sp>
+        <p:nvSpPr>
+          <p:cNvPr id="77" name="Rounded Rectangle 76"/>
+          <p:cNvSpPr/>
+          <p:nvPr/>
+        </p:nvSpPr>
+        <p:spPr>
+          <a:xfrm>
+            <a:off x="5897880" y="4809744"/>
+            <a:ext cx="2862072" cy="1024128"/>
+          </a:xfrm>
+          <a:prstGeom prst="roundRect">
+            <a:avLst>
+              <a:gd name="adj" fmla="val 5000"/>
+            </a:avLst>
+          </a:prstGeom>
+          <a:solidFill>
+            <a:srgbClr val="FFFFFF"/>
+          </a:solidFill>
+          <a:ln w="12700">
+            <a:solidFill>
+              <a:srgbClr val="C9C9C2"/>
+            </a:solidFill>
+          </a:ln>
+          <a:effectLst/>
+        </p:spPr>
+        <p:style>
+          <a:lnRef idx="1">
+            <a:schemeClr val="accent1"/>
+          </a:lnRef>
+          <a:fillRef idx="3">
+            <a:schemeClr val="accent1"/>
+          </a:fillRef>
+          <a:effectRef idx="2">
+            <a:schemeClr val="accent1"/>
+          </a:effectRef>
+          <a:fontRef idx="minor">
+            <a:schemeClr val="lt1"/>
+          </a:fontRef>
+        </p:style>
+        <p:txBody>
+          <a:bodyPr rtlCol="0" anchor="ctr" wrap="square"/>
+          <a:lstStyle/>
+          <a:p>
+            <a:pPr algn="ctr"/>
+          </a:p>
+        </p:txBody>
+      </p:sp>
+      <p:sp>
+        <p:nvSpPr>
+          <p:cNvPr id="78" name="Oval 77"/>
+          <p:cNvSpPr/>
+          <p:nvPr/>
+        </p:nvSpPr>
+        <p:spPr>
+          <a:xfrm>
+            <a:off x="5989320" y="4901184"/>
+            <a:ext cx="201168" cy="201168"/>
+          </a:xfrm>
+          <a:prstGeom prst="ellipse">
+            <a:avLst/>
+          </a:prstGeom>
+          <a:solidFill>
+            <a:srgbClr val="8B0F1A"/>
+          </a:solidFill>
+          <a:ln>
+            <a:noFill/>
+          </a:ln>
+          <a:effectLst/>
+        </p:spPr>
+        <p:style>
+          <a:lnRef idx="1">
+            <a:schemeClr val="accent1"/>
+          </a:lnRef>
+          <a:fillRef idx="3">
+            <a:schemeClr val="accent1"/>
+          </a:fillRef>
+          <a:effectRef idx="2">
+            <a:schemeClr val="accent1"/>
+          </a:effectRef>
+          <a:fontRef idx="minor">
+            <a:schemeClr val="lt1"/>
+          </a:fontRef>
+        </p:style>
+        <p:txBody>
+          <a:bodyPr rtlCol="0" anchor="ctr" lIns="18288" rIns="18288" tIns="0" bIns="0"/>
+          <a:lstStyle/>
+          <a:p>
+            <a:pPr algn="ctr">
+              <a:lnSpc>
+                <a:spcPct val="100000"/>
+              </a:lnSpc>
+            </a:pPr>
+            <a:r>
+              <a:rPr sz="800" b="1">
+                <a:solidFill>
+                  <a:srgbClr val="FFFFFF"/>
+                </a:solidFill>
+                <a:latin typeface="微软雅黑"/>
+                <a:ea typeface="微软雅黑"/>
+                <a:cs typeface="微软雅黑"/>
+              </a:rPr>
+              <a:t>11</a:t>
+            </a:r>
+          </a:p>
+        </p:txBody>
+      </p:sp>
+      <p:sp>
+        <p:nvSpPr>
+          <p:cNvPr id="79" name="Rectangle 78"/>
+          <p:cNvSpPr/>
+          <p:nvPr/>
+        </p:nvSpPr>
+        <p:spPr>
+          <a:xfrm>
+            <a:off x="8174736" y="4910328"/>
+            <a:ext cx="512064" cy="182880"/>
+          </a:xfrm>
+          <a:prstGeom prst="rect">
+            <a:avLst/>
+          </a:prstGeom>
+          <a:solidFill>
+            <a:srgbClr val="E8F0F7"/>
+          </a:solidFill>
+          <a:ln>
+            <a:noFill/>
+          </a:ln>
+          <a:effectLst/>
+        </p:spPr>
+        <p:style>
+          <a:lnRef idx="1">
+            <a:schemeClr val="accent1"/>
+          </a:lnRef>
+          <a:fillRef idx="3">
+            <a:schemeClr val="accent1"/>
+          </a:fillRef>
+          <a:effectRef idx="2">
+            <a:schemeClr val="accent1"/>
+          </a:effectRef>
+          <a:fontRef idx="minor">
+            <a:schemeClr val="lt1"/>
+          </a:fontRef>
+        </p:style>
+        <p:txBody>
+          <a:bodyPr rtlCol="0" anchor="ctr" wrap="square"/>
+          <a:lstStyle/>
+          <a:p>
+            <a:pPr algn="ctr"/>
+          </a:p>
+        </p:txBody>
+      </p:sp>
+      <p:sp>
+        <p:nvSpPr>
+          <p:cNvPr id="80" name="TextBox 79"/>
+          <p:cNvSpPr txBox="1"/>
+          <p:nvPr/>
+        </p:nvSpPr>
+        <p:spPr>
+          <a:xfrm>
+            <a:off x="8174736" y="4910328"/>
+            <a:ext cx="512064" cy="182880"/>
+          </a:xfrm>
+          <a:prstGeom prst="rect">
+            <a:avLst/>
+          </a:prstGeom>
+          <a:noFill/>
+        </p:spPr>
+        <p:txBody>
+          <a:bodyPr wrap="square" lIns="27432" rIns="27432" tIns="9144" bIns="9144" anchor="ctr">
+            <a:spAutoFit/>
+          </a:bodyPr>
+          <a:lstStyle/>
+          <a:p>
+            <a:pPr algn="ctr">
+              <a:lnSpc>
+                <a:spcPct val="110000"/>
+              </a:lnSpc>
+            </a:pPr>
+            <a:r>
+              <a:rPr sz="700" b="1">
+                <a:solidFill>
+                  <a:srgbClr val="0F4C81"/>
+                </a:solidFill>
+                <a:latin typeface="微软雅黑"/>
+                <a:ea typeface="微软雅黑"/>
+                <a:cs typeface="微软雅黑"/>
+              </a:rPr>
+              <a:t>合规</a:t>
+            </a:r>
+          </a:p>
+        </p:txBody>
+      </p:sp>
+      <p:sp>
+        <p:nvSpPr>
+          <p:cNvPr id="81" name="TextBox 80"/>
+          <p:cNvSpPr txBox="1"/>
+          <p:nvPr/>
+        </p:nvSpPr>
+        <p:spPr>
+          <a:xfrm>
+            <a:off x="6263640" y="4864608"/>
+            <a:ext cx="1856231" cy="256032"/>
+          </a:xfrm>
+          <a:prstGeom prst="rect">
+            <a:avLst/>
+          </a:prstGeom>
+          <a:noFill/>
+        </p:spPr>
+        <p:txBody>
+          <a:bodyPr wrap="square" lIns="27432" rIns="27432" tIns="9144" bIns="9144" anchor="ctr">
+            <a:spAutoFit/>
+          </a:bodyPr>
+          <a:lstStyle/>
+          <a:p>
+            <a:pPr algn="l">
+              <a:lnSpc>
+                <a:spcPct val="110000"/>
+              </a:lnSpc>
+            </a:pPr>
+            <a:r>
+              <a:rPr sz="950" b="1">
+                <a:solidFill>
+                  <a:srgbClr val="141414"/>
+                </a:solidFill>
+                <a:latin typeface="微软雅黑"/>
+                <a:ea typeface="微软雅黑"/>
+                <a:cs typeface="微软雅黑"/>
+              </a:rPr>
               <a:t>合规不允许接入</a:t>
             </a:r>
           </a:p>
+        </p:txBody>
+      </p:sp>
+      <p:sp>
+        <p:nvSpPr>
+          <p:cNvPr id="82" name="TextBox 81"/>
+          <p:cNvSpPr txBox="1"/>
+          <p:nvPr/>
+        </p:nvSpPr>
+        <p:spPr>
+          <a:xfrm>
+            <a:off x="5989320" y="5175504"/>
+            <a:ext cx="2679191" cy="566928"/>
+          </a:xfrm>
+          <a:prstGeom prst="rect">
+            <a:avLst/>
+          </a:prstGeom>
+          <a:noFill/>
+        </p:spPr>
+        <p:txBody>
+          <a:bodyPr wrap="square" lIns="27432" rIns="27432" tIns="9144" bIns="9144" anchor="ctr">
+            <a:spAutoFit/>
+          </a:bodyPr>
+          <a:lstStyle/>
           <a:p>
             <a:pPr algn="l">
               <a:lnSpc>
                 <a:spcPct val="110000"/>
               </a:lnSpc>
-              <a:spcBef>
-                <a:spcPts val="500"/>
-              </a:spcBef>
-            </a:pPr>
-            <a:r>
-              <a:rPr sz="850" b="0">
+            </a:pPr>
+            <a:r>
+              <a:rPr sz="800" b="0">
                 <a:solidFill>
                   <a:srgbClr val="5C5C56"/>
                 </a:solidFill>
@@ -4909,20 +6805,273 @@
                 <a:ea typeface="微软雅黑"/>
                 <a:cs typeface="微软雅黑"/>
               </a:rPr>
-              <a:t>无代码签名、驱动未认证、开放高危端口</a:t>
-            </a:r>
-          </a:p>
+              <a:t>无签名驱动、高危端口，IT 策略拒绝入网</a:t>
+            </a:r>
+          </a:p>
+        </p:txBody>
+      </p:sp>
+      <p:sp>
+        <p:nvSpPr>
+          <p:cNvPr id="83" name="Rounded Rectangle 82"/>
+          <p:cNvSpPr/>
+          <p:nvPr/>
+        </p:nvSpPr>
+        <p:spPr>
+          <a:xfrm>
+            <a:off x="8887968" y="4809744"/>
+            <a:ext cx="2862072" cy="1024128"/>
+          </a:xfrm>
+          <a:prstGeom prst="roundRect">
+            <a:avLst>
+              <a:gd name="adj" fmla="val 5000"/>
+            </a:avLst>
+          </a:prstGeom>
+          <a:solidFill>
+            <a:srgbClr val="FFFFFF"/>
+          </a:solidFill>
+          <a:ln w="12700">
+            <a:solidFill>
+              <a:srgbClr val="C9C9C2"/>
+            </a:solidFill>
+          </a:ln>
+          <a:effectLst/>
+        </p:spPr>
+        <p:style>
+          <a:lnRef idx="1">
+            <a:schemeClr val="accent1"/>
+          </a:lnRef>
+          <a:fillRef idx="3">
+            <a:schemeClr val="accent1"/>
+          </a:fillRef>
+          <a:effectRef idx="2">
+            <a:schemeClr val="accent1"/>
+          </a:effectRef>
+          <a:fontRef idx="minor">
+            <a:schemeClr val="lt1"/>
+          </a:fontRef>
+        </p:style>
+        <p:txBody>
+          <a:bodyPr rtlCol="0" anchor="ctr" wrap="square"/>
+          <a:lstStyle/>
+          <a:p>
+            <a:pPr algn="ctr"/>
+          </a:p>
+        </p:txBody>
+      </p:sp>
+      <p:sp>
+        <p:nvSpPr>
+          <p:cNvPr id="84" name="Oval 83"/>
+          <p:cNvSpPr/>
+          <p:nvPr/>
+        </p:nvSpPr>
+        <p:spPr>
+          <a:xfrm>
+            <a:off x="8979408" y="4901184"/>
+            <a:ext cx="201168" cy="201168"/>
+          </a:xfrm>
+          <a:prstGeom prst="ellipse">
+            <a:avLst/>
+          </a:prstGeom>
+          <a:solidFill>
+            <a:srgbClr val="8B0F1A"/>
+          </a:solidFill>
+          <a:ln>
+            <a:noFill/>
+          </a:ln>
+          <a:effectLst/>
+        </p:spPr>
+        <p:style>
+          <a:lnRef idx="1">
+            <a:schemeClr val="accent1"/>
+          </a:lnRef>
+          <a:fillRef idx="3">
+            <a:schemeClr val="accent1"/>
+          </a:fillRef>
+          <a:effectRef idx="2">
+            <a:schemeClr val="accent1"/>
+          </a:effectRef>
+          <a:fontRef idx="minor">
+            <a:schemeClr val="lt1"/>
+          </a:fontRef>
+        </p:style>
+        <p:txBody>
+          <a:bodyPr rtlCol="0" anchor="ctr" lIns="18288" rIns="18288" tIns="0" bIns="0"/>
+          <a:lstStyle/>
+          <a:p>
+            <a:pPr algn="ctr">
+              <a:lnSpc>
+                <a:spcPct val="100000"/>
+              </a:lnSpc>
+            </a:pPr>
+            <a:r>
+              <a:rPr sz="800" b="1">
+                <a:solidFill>
+                  <a:srgbClr val="FFFFFF"/>
+                </a:solidFill>
+                <a:latin typeface="微软雅黑"/>
+                <a:ea typeface="微软雅黑"/>
+                <a:cs typeface="微软雅黑"/>
+              </a:rPr>
+              <a:t>12</a:t>
+            </a:r>
+          </a:p>
+        </p:txBody>
+      </p:sp>
+      <p:sp>
+        <p:nvSpPr>
+          <p:cNvPr id="85" name="Rectangle 84"/>
+          <p:cNvSpPr/>
+          <p:nvPr/>
+        </p:nvSpPr>
+        <p:spPr>
+          <a:xfrm>
+            <a:off x="11164824" y="4910328"/>
+            <a:ext cx="512064" cy="182880"/>
+          </a:xfrm>
+          <a:prstGeom prst="rect">
+            <a:avLst/>
+          </a:prstGeom>
+          <a:solidFill>
+            <a:srgbClr val="E8F0F7"/>
+          </a:solidFill>
+          <a:ln>
+            <a:noFill/>
+          </a:ln>
+          <a:effectLst/>
+        </p:spPr>
+        <p:style>
+          <a:lnRef idx="1">
+            <a:schemeClr val="accent1"/>
+          </a:lnRef>
+          <a:fillRef idx="3">
+            <a:schemeClr val="accent1"/>
+          </a:fillRef>
+          <a:effectRef idx="2">
+            <a:schemeClr val="accent1"/>
+          </a:effectRef>
+          <a:fontRef idx="minor">
+            <a:schemeClr val="lt1"/>
+          </a:fontRef>
+        </p:style>
+        <p:txBody>
+          <a:bodyPr rtlCol="0" anchor="ctr" wrap="square"/>
+          <a:lstStyle/>
+          <a:p>
+            <a:pPr algn="ctr"/>
+          </a:p>
+        </p:txBody>
+      </p:sp>
+      <p:sp>
+        <p:nvSpPr>
+          <p:cNvPr id="86" name="TextBox 85"/>
+          <p:cNvSpPr txBox="1"/>
+          <p:nvPr/>
+        </p:nvSpPr>
+        <p:spPr>
+          <a:xfrm>
+            <a:off x="11164824" y="4910328"/>
+            <a:ext cx="512064" cy="182880"/>
+          </a:xfrm>
+          <a:prstGeom prst="rect">
+            <a:avLst/>
+          </a:prstGeom>
+          <a:noFill/>
+        </p:spPr>
+        <p:txBody>
+          <a:bodyPr wrap="square" lIns="27432" rIns="27432" tIns="9144" bIns="9144" anchor="ctr">
+            <a:spAutoFit/>
+          </a:bodyPr>
+          <a:lstStyle/>
+          <a:p>
+            <a:pPr algn="ctr">
+              <a:lnSpc>
+                <a:spcPct val="110000"/>
+              </a:lnSpc>
+            </a:pPr>
+            <a:r>
+              <a:rPr sz="700" b="1">
+                <a:solidFill>
+                  <a:srgbClr val="0F4C81"/>
+                </a:solidFill>
+                <a:latin typeface="微软雅黑"/>
+                <a:ea typeface="微软雅黑"/>
+                <a:cs typeface="微软雅黑"/>
+              </a:rPr>
+              <a:t>合规</a:t>
+            </a:r>
+          </a:p>
+        </p:txBody>
+      </p:sp>
+      <p:sp>
+        <p:nvSpPr>
+          <p:cNvPr id="87" name="TextBox 86"/>
+          <p:cNvSpPr txBox="1"/>
+          <p:nvPr/>
+        </p:nvSpPr>
+        <p:spPr>
+          <a:xfrm>
+            <a:off x="9253728" y="4864608"/>
+            <a:ext cx="1856231" cy="256032"/>
+          </a:xfrm>
+          <a:prstGeom prst="rect">
+            <a:avLst/>
+          </a:prstGeom>
+          <a:noFill/>
+        </p:spPr>
+        <p:txBody>
+          <a:bodyPr wrap="square" lIns="27432" rIns="27432" tIns="9144" bIns="9144" anchor="ctr">
+            <a:spAutoFit/>
+          </a:bodyPr>
+          <a:lstStyle/>
           <a:p>
             <a:pPr algn="l">
               <a:lnSpc>
                 <a:spcPct val="110000"/>
               </a:lnSpc>
-              <a:spcBef>
-                <a:spcPts val="100"/>
-              </a:spcBef>
-            </a:pPr>
-            <a:r>
-              <a:rPr sz="850" b="0">
+            </a:pPr>
+            <a:r>
+              <a:rPr sz="950" b="1">
+                <a:solidFill>
+                  <a:srgbClr val="141414"/>
+                </a:solidFill>
+                <a:latin typeface="微软雅黑"/>
+                <a:ea typeface="微软雅黑"/>
+                <a:cs typeface="微软雅黑"/>
+              </a:rPr>
+              <a:t>外网校验与回传</a:t>
+            </a:r>
+          </a:p>
+        </p:txBody>
+      </p:sp>
+      <p:sp>
+        <p:nvSpPr>
+          <p:cNvPr id="88" name="TextBox 87"/>
+          <p:cNvSpPr txBox="1"/>
+          <p:nvPr/>
+        </p:nvSpPr>
+        <p:spPr>
+          <a:xfrm>
+            <a:off x="8979408" y="5175504"/>
+            <a:ext cx="2679191" cy="566928"/>
+          </a:xfrm>
+          <a:prstGeom prst="rect">
+            <a:avLst/>
+          </a:prstGeom>
+          <a:noFill/>
+        </p:spPr>
+        <p:txBody>
+          <a:bodyPr wrap="square" lIns="27432" rIns="27432" tIns="9144" bIns="9144" anchor="ctr">
+            <a:spAutoFit/>
+          </a:bodyPr>
+          <a:lstStyle/>
+          <a:p>
+            <a:pPr algn="l">
+              <a:lnSpc>
+                <a:spcPct val="110000"/>
+              </a:lnSpc>
+            </a:pPr>
+            <a:r>
+              <a:rPr sz="800" b="0">
                 <a:solidFill>
                   <a:srgbClr val="5C5C56"/>
                 </a:solidFill>
@@ -4930,14 +7079,14 @@
                 <a:ea typeface="微软雅黑"/>
                 <a:cs typeface="微软雅黑"/>
               </a:rPr>
-              <a:t>触发我方 IT 安全策略，入网审批不通过</a:t>
-            </a:r>
-          </a:p>
-        </p:txBody>
-      </p:sp>
-      <p:sp>
-        <p:nvSpPr>
-          <p:cNvPr id="35" name="Rectangle 34"/>
+              <a:t>需连供应商云激活并回传数据，产线无外网</a:t>
+            </a:r>
+          </a:p>
+        </p:txBody>
+      </p:sp>
+      <p:sp>
+        <p:nvSpPr>
+          <p:cNvPr id="89" name="Rectangle 88"/>
           <p:cNvSpPr/>
           <p:nvPr/>
         </p:nvSpPr>
@@ -4981,14 +7130,14 @@
       </p:sp>
       <p:sp>
         <p:nvSpPr>
-          <p:cNvPr id="36" name="TextBox 35"/>
+          <p:cNvPr id="90" name="TextBox 89"/>
           <p:cNvSpPr txBox="1"/>
           <p:nvPr/>
         </p:nvSpPr>
         <p:spPr>
           <a:xfrm>
             <a:off x="274320" y="6446520"/>
-            <a:ext cx="6675120" cy="274320"/>
+            <a:ext cx="6858000" cy="274320"/>
           </a:xfrm>
           <a:prstGeom prst="rect">
             <a:avLst/>
@@ -5015,21 +7164,21 @@
                 <a:ea typeface="微软雅黑"/>
                 <a:cs typeface="微软雅黑"/>
               </a:rPr>
-              <a:t>红色虚线为我方无法单方面突破的接入边界；边界右侧的问题多需供应商配合或在我方侧改造</a:t>
-            </a:r>
-          </a:p>
-        </p:txBody>
-      </p:sp>
-      <p:sp>
-        <p:nvSpPr>
-          <p:cNvPr id="37" name="TextBox 36"/>
+              <a:t>十二个阻断点中，网络类 3 项、接口类 2 项、环境类 3 项、授权类 2 项、合规类 2 项</a:t>
+            </a:r>
+          </a:p>
+        </p:txBody>
+      </p:sp>
+      <p:sp>
+        <p:nvSpPr>
+          <p:cNvPr id="91" name="TextBox 90"/>
           <p:cNvSpPr txBox="1"/>
           <p:nvPr/>
         </p:nvSpPr>
         <p:spPr>
           <a:xfrm>
-            <a:off x="7040880" y="6446520"/>
-            <a:ext cx="4873752" cy="274320"/>
+            <a:off x="7223760" y="6446520"/>
+            <a:ext cx="4690872" cy="274320"/>
           </a:xfrm>
           <a:prstGeom prst="rect">
             <a:avLst/>
@@ -5056,7 +7205,7 @@
                 <a:ea typeface="微软雅黑"/>
                 <a:cs typeface="微软雅黑"/>
               </a:rPr>
-              <a:t>六类问题常叠加出现，同一套供应商软件通常同时命中 2 项以上</a:t>
+              <a:t>红色虚线为我方无法单方面突破的接入边界</a:t>
             </a:r>
           </a:p>
         </p:txBody>
@@ -5115,7 +7264,7 @@
                 <a:ea typeface="微软雅黑"/>
                 <a:cs typeface="微软雅黑"/>
               </a:rPr>
-              <a:t>问题背景（二）· 六类问题的机理图解</a:t>
+              <a:t>问题背景（二）· 阻断机理图解 ①–⑥</a:t>
             </a:r>
           </a:p>
         </p:txBody>
@@ -5156,7 +7305,7 @@
                 <a:ea typeface="微软雅黑"/>
                 <a:cs typeface="微软雅黑"/>
               </a:rPr>
-              <a:t>逐项还原阻断发生的环节：端口被占、策略拒绝、装不了代理、没有接口、授权绑机、合规不通过</a:t>
+              <a:t>逐项还原阻断发生的环节：端口被占、策略拒绝、单向网闸、无接口、接口不匹配、装不了代理</a:t>
             </a:r>
           </a:p>
         </p:txBody>
@@ -5569,7 +7718,7 @@
               </a:lnSpc>
             </a:pPr>
             <a:r>
-              <a:rPr sz="1500" b="1">
+              <a:rPr sz="1400" b="1">
                 <a:solidFill>
                   <a:srgbClr val="8B0F1A"/>
                 </a:solidFill>
@@ -5943,7 +8092,7 @@
               </a:lnSpc>
             </a:pPr>
             <a:r>
-              <a:rPr sz="1500" b="1">
+              <a:rPr sz="1400" b="1">
                 <a:solidFill>
                   <a:srgbClr val="8B0F1A"/>
                 </a:solidFill>
@@ -6081,7 +8230,7 @@
                 <a:ea typeface="微软雅黑"/>
                 <a:cs typeface="微软雅黑"/>
               </a:rPr>
-              <a:t>③ 无法安装 Runner</a:t>
+              <a:t>③ 跨网隔离与网闸</a:t>
             </a:r>
           </a:p>
         </p:txBody>
@@ -6122,7 +8271,7 @@
                 <a:ea typeface="微软雅黑"/>
                 <a:cs typeface="微软雅黑"/>
               </a:rPr>
-              <a:t>交付系统封闭或镜像只读、无管理员权限，第三方执行代理无法安装与常驻</a:t>
+              <a:t>两网之间串接单向隔离装置，只允许设备侧数据上报，ATE 的下发指令到不了设备</a:t>
             </a:r>
           </a:p>
         </p:txBody>
@@ -6135,8 +8284,8 @@
         </p:nvSpPr>
         <p:spPr>
           <a:xfrm>
-            <a:off x="8284463" y="1920240"/>
-            <a:ext cx="1481328" cy="502920"/>
+            <a:off x="8284463" y="1901952"/>
+            <a:ext cx="868680" cy="548640"/>
           </a:xfrm>
           <a:prstGeom prst="roundRect">
             <a:avLst>
@@ -6177,7 +8326,7 @@
               </a:lnSpc>
             </a:pPr>
             <a:r>
-              <a:rPr sz="800" b="0">
+              <a:rPr sz="750" b="0">
                 <a:solidFill>
                   <a:srgbClr val="141414"/>
                 </a:solidFill>
@@ -6185,21 +8334,629 @@
                 <a:ea typeface="微软雅黑"/>
                 <a:cs typeface="微软雅黑"/>
               </a:rPr>
-              <a:t>封闭系统 / 只读镜像</a:t>
+              <a:t>设备网段</a:t>
+            </a:r>
+          </a:p>
+        </p:txBody>
+      </p:sp>
+      <p:sp>
+        <p:nvSpPr>
+          <p:cNvPr id="26" name="Rounded Rectangle 25"/>
+          <p:cNvSpPr/>
+          <p:nvPr/>
+        </p:nvSpPr>
+        <p:spPr>
+          <a:xfrm>
+            <a:off x="10204703" y="1901952"/>
+            <a:ext cx="1097280" cy="548640"/>
+          </a:xfrm>
+          <a:prstGeom prst="roundRect">
+            <a:avLst>
+              <a:gd name="adj" fmla="val 5000"/>
+            </a:avLst>
+          </a:prstGeom>
+          <a:solidFill>
+            <a:srgbClr val="ECECEC"/>
+          </a:solidFill>
+          <a:ln w="11430">
+            <a:solidFill>
+              <a:srgbClr val="C9C9C2"/>
+            </a:solidFill>
+          </a:ln>
+          <a:effectLst/>
+        </p:spPr>
+        <p:style>
+          <a:lnRef idx="1">
+            <a:schemeClr val="accent1"/>
+          </a:lnRef>
+          <a:fillRef idx="3">
+            <a:schemeClr val="accent1"/>
+          </a:fillRef>
+          <a:effectRef idx="2">
+            <a:schemeClr val="accent1"/>
+          </a:effectRef>
+          <a:fontRef idx="minor">
+            <a:schemeClr val="lt1"/>
+          </a:fontRef>
+        </p:style>
+        <p:txBody>
+          <a:bodyPr rtlCol="0" anchor="ctr" wrap="square" lIns="18288" rIns="18288" tIns="0" bIns="0"/>
+          <a:lstStyle/>
+          <a:p>
+            <a:pPr algn="ctr">
+              <a:lnSpc>
+                <a:spcPct val="100000"/>
+              </a:lnSpc>
+            </a:pPr>
+            <a:r>
+              <a:rPr sz="750" b="0">
+                <a:solidFill>
+                  <a:srgbClr val="141414"/>
+                </a:solidFill>
+                <a:latin typeface="微软雅黑"/>
+                <a:ea typeface="微软雅黑"/>
+                <a:cs typeface="微软雅黑"/>
+              </a:rPr>
+              <a:t>测试网段</a:t>
+            </a:r>
+          </a:p>
+        </p:txBody>
+      </p:sp>
+      <p:sp>
+        <p:nvSpPr>
+          <p:cNvPr id="27" name="Rectangle 26"/>
+          <p:cNvSpPr/>
+          <p:nvPr/>
+        </p:nvSpPr>
+        <p:spPr>
+          <a:xfrm>
+            <a:off x="9610343" y="1847088"/>
+            <a:ext cx="365760" cy="658368"/>
+          </a:xfrm>
+          <a:prstGeom prst="rect">
+            <a:avLst/>
+          </a:prstGeom>
+          <a:solidFill>
+            <a:srgbClr val="2B2B28"/>
+          </a:solidFill>
+          <a:ln>
+            <a:noFill/>
+          </a:ln>
+          <a:effectLst/>
+        </p:spPr>
+        <p:style>
+          <a:lnRef idx="1">
+            <a:schemeClr val="accent1"/>
+          </a:lnRef>
+          <a:fillRef idx="3">
+            <a:schemeClr val="accent1"/>
+          </a:fillRef>
+          <a:effectRef idx="2">
+            <a:schemeClr val="accent1"/>
+          </a:effectRef>
+          <a:fontRef idx="minor">
+            <a:schemeClr val="lt1"/>
+          </a:fontRef>
+        </p:style>
+        <p:txBody>
+          <a:bodyPr rtlCol="0" anchor="ctr" wrap="square" lIns="18288" rIns="18288" tIns="0" bIns="0"/>
+          <a:lstStyle/>
+          <a:p>
+            <a:pPr algn="ctr">
+              <a:lnSpc>
+                <a:spcPct val="100000"/>
+              </a:lnSpc>
+            </a:pPr>
+            <a:r>
+              <a:rPr sz="700" b="0">
+                <a:solidFill>
+                  <a:srgbClr val="FFFFFF"/>
+                </a:solidFill>
+                <a:latin typeface="微软雅黑"/>
+                <a:ea typeface="微软雅黑"/>
+                <a:cs typeface="微软雅黑"/>
+              </a:rPr>
+              <a:t>网闸</a:t>
             </a:r>
           </a:p>
         </p:txBody>
       </p:sp>
       <p:cxnSp>
         <p:nvCxnSpPr>
-          <p:cNvPr id="26" name="Connector 25"/>
+          <p:cNvPr id="28" name="Connector 27"/>
           <p:cNvCxnSpPr/>
           <p:nvPr/>
         </p:nvCxnSpPr>
         <p:spPr>
           <a:xfrm>
-            <a:off x="9765792" y="2167128"/>
-            <a:ext cx="621792" cy="0"/>
+            <a:off x="9153143" y="2066543"/>
+            <a:ext cx="457200" cy="0"/>
+          </a:xfrm>
+          <a:prstGeom prst="line">
+            <a:avLst/>
+          </a:prstGeom>
+          <a:ln w="13970">
+            <a:solidFill>
+              <a:srgbClr val="5C5C56"/>
+            </a:solidFill>
+          </a:ln>
+        </p:spPr>
+        <p:style>
+          <a:lnRef idx="2">
+            <a:schemeClr val="accent1"/>
+          </a:lnRef>
+          <a:fillRef idx="0">
+            <a:schemeClr val="accent1"/>
+          </a:fillRef>
+          <a:effectRef idx="1">
+            <a:schemeClr val="accent1"/>
+          </a:effectRef>
+          <a:fontRef idx="minor">
+            <a:schemeClr val="tx1"/>
+          </a:fontRef>
+        </p:style>
+      </p:cxnSp>
+      <p:cxnSp>
+        <p:nvCxnSpPr>
+          <p:cNvPr id="29" name="Connector 28"/>
+          <p:cNvCxnSpPr/>
+          <p:nvPr/>
+        </p:nvCxnSpPr>
+        <p:spPr>
+          <a:xfrm>
+            <a:off x="9976103" y="2066543"/>
+            <a:ext cx="228600" cy="0"/>
+          </a:xfrm>
+          <a:prstGeom prst="line">
+            <a:avLst/>
+          </a:prstGeom>
+          <a:ln w="13970">
+            <a:solidFill>
+              <a:srgbClr val="5C5C56"/>
+            </a:solidFill>
+          </a:ln>
+        </p:spPr>
+        <p:style>
+          <a:lnRef idx="2">
+            <a:schemeClr val="accent1"/>
+          </a:lnRef>
+          <a:fillRef idx="0">
+            <a:schemeClr val="accent1"/>
+          </a:fillRef>
+          <a:effectRef idx="1">
+            <a:schemeClr val="accent1"/>
+          </a:effectRef>
+          <a:fontRef idx="minor">
+            <a:schemeClr val="tx1"/>
+          </a:fontRef>
+        </p:style>
+      </p:cxnSp>
+      <p:cxnSp>
+        <p:nvCxnSpPr>
+          <p:cNvPr id="30" name="Connector 29"/>
+          <p:cNvCxnSpPr/>
+          <p:nvPr/>
+        </p:nvCxnSpPr>
+        <p:spPr>
+          <a:xfrm flipH="1">
+            <a:off x="9153143" y="2322576"/>
+            <a:ext cx="1051560" cy="0"/>
+          </a:xfrm>
+          <a:prstGeom prst="line">
+            <a:avLst/>
+          </a:prstGeom>
+          <a:ln w="13970">
+            <a:solidFill>
+              <a:srgbClr val="5C5C56"/>
+            </a:solidFill>
+            <a:prstDash val="dash"/>
+          </a:ln>
+        </p:spPr>
+        <p:style>
+          <a:lnRef idx="2">
+            <a:schemeClr val="accent1"/>
+          </a:lnRef>
+          <a:fillRef idx="0">
+            <a:schemeClr val="accent1"/>
+          </a:fillRef>
+          <a:effectRef idx="1">
+            <a:schemeClr val="accent1"/>
+          </a:effectRef>
+          <a:fontRef idx="minor">
+            <a:schemeClr val="tx1"/>
+          </a:fontRef>
+        </p:style>
+      </p:cxnSp>
+      <p:sp>
+        <p:nvSpPr>
+          <p:cNvPr id="31" name="TextBox 30"/>
+          <p:cNvSpPr txBox="1"/>
+          <p:nvPr/>
+        </p:nvSpPr>
+        <p:spPr>
+          <a:xfrm>
+            <a:off x="9235439" y="2185416"/>
+            <a:ext cx="256032" cy="274320"/>
+          </a:xfrm>
+          <a:prstGeom prst="rect">
+            <a:avLst/>
+          </a:prstGeom>
+          <a:noFill/>
+        </p:spPr>
+        <p:txBody>
+          <a:bodyPr wrap="square" lIns="27432" rIns="27432" tIns="9144" bIns="9144" anchor="ctr">
+            <a:spAutoFit/>
+          </a:bodyPr>
+          <a:lstStyle/>
+          <a:p>
+            <a:pPr algn="ctr">
+              <a:lnSpc>
+                <a:spcPct val="110000"/>
+              </a:lnSpc>
+            </a:pPr>
+            <a:r>
+              <a:rPr sz="1200" b="1">
+                <a:solidFill>
+                  <a:srgbClr val="8B0F1A"/>
+                </a:solidFill>
+                <a:latin typeface="微软雅黑"/>
+                <a:ea typeface="微软雅黑"/>
+                <a:cs typeface="微软雅黑"/>
+              </a:rPr>
+              <a:t>×</a:t>
+            </a:r>
+          </a:p>
+        </p:txBody>
+      </p:sp>
+      <p:sp>
+        <p:nvSpPr>
+          <p:cNvPr id="32" name="TextBox 31"/>
+          <p:cNvSpPr txBox="1"/>
+          <p:nvPr/>
+        </p:nvSpPr>
+        <p:spPr>
+          <a:xfrm>
+            <a:off x="9153143" y="2542032"/>
+            <a:ext cx="1737360" cy="182880"/>
+          </a:xfrm>
+          <a:prstGeom prst="rect">
+            <a:avLst/>
+          </a:prstGeom>
+          <a:noFill/>
+        </p:spPr>
+        <p:txBody>
+          <a:bodyPr wrap="square" lIns="27432" rIns="27432" tIns="9144" bIns="9144" anchor="ctr">
+            <a:spAutoFit/>
+          </a:bodyPr>
+          <a:lstStyle/>
+          <a:p>
+            <a:pPr algn="ctr">
+              <a:lnSpc>
+                <a:spcPct val="110000"/>
+              </a:lnSpc>
+            </a:pPr>
+            <a:r>
+              <a:rPr sz="750" b="0">
+                <a:solidFill>
+                  <a:srgbClr val="8B0F1A"/>
+                </a:solidFill>
+                <a:latin typeface="微软雅黑"/>
+                <a:ea typeface="微软雅黑"/>
+                <a:cs typeface="微软雅黑"/>
+              </a:rPr>
+              <a:t>反向指令被网闸阻断</a:t>
+            </a:r>
+          </a:p>
+        </p:txBody>
+      </p:sp>
+      <p:sp>
+        <p:nvSpPr>
+          <p:cNvPr id="33" name="Rounded Rectangle 32"/>
+          <p:cNvSpPr/>
+          <p:nvPr/>
+        </p:nvSpPr>
+        <p:spPr>
+          <a:xfrm>
+            <a:off x="274320" y="3703320"/>
+            <a:ext cx="3694176" cy="2240280"/>
+          </a:xfrm>
+          <a:prstGeom prst="roundRect">
+            <a:avLst>
+              <a:gd name="adj" fmla="val 4000"/>
+            </a:avLst>
+          </a:prstGeom>
+          <a:solidFill>
+            <a:srgbClr val="FFFFFF"/>
+          </a:solidFill>
+          <a:ln w="12700">
+            <a:solidFill>
+              <a:srgbClr val="C9C9C2"/>
+            </a:solidFill>
+          </a:ln>
+          <a:effectLst/>
+        </p:spPr>
+        <p:style>
+          <a:lnRef idx="1">
+            <a:schemeClr val="accent1"/>
+          </a:lnRef>
+          <a:fillRef idx="3">
+            <a:schemeClr val="accent1"/>
+          </a:fillRef>
+          <a:effectRef idx="2">
+            <a:schemeClr val="accent1"/>
+          </a:effectRef>
+          <a:fontRef idx="minor">
+            <a:schemeClr val="lt1"/>
+          </a:fontRef>
+        </p:style>
+        <p:txBody>
+          <a:bodyPr rtlCol="0" anchor="ctr" wrap="square"/>
+          <a:lstStyle/>
+          <a:p>
+            <a:pPr algn="ctr"/>
+          </a:p>
+        </p:txBody>
+      </p:sp>
+      <p:sp>
+        <p:nvSpPr>
+          <p:cNvPr id="34" name="TextBox 33"/>
+          <p:cNvSpPr txBox="1"/>
+          <p:nvPr/>
+        </p:nvSpPr>
+        <p:spPr>
+          <a:xfrm>
+            <a:off x="384048" y="3776472"/>
+            <a:ext cx="3474720" cy="274320"/>
+          </a:xfrm>
+          <a:prstGeom prst="rect">
+            <a:avLst/>
+          </a:prstGeom>
+          <a:noFill/>
+        </p:spPr>
+        <p:txBody>
+          <a:bodyPr wrap="square" lIns="27432" rIns="27432" tIns="9144" bIns="9144" anchor="ctr">
+            <a:spAutoFit/>
+          </a:bodyPr>
+          <a:lstStyle/>
+          <a:p>
+            <a:pPr algn="l">
+              <a:lnSpc>
+                <a:spcPct val="110000"/>
+              </a:lnSpc>
+            </a:pPr>
+            <a:r>
+              <a:rPr sz="1000" b="1">
+                <a:solidFill>
+                  <a:srgbClr val="141414"/>
+                </a:solidFill>
+                <a:latin typeface="微软雅黑"/>
+                <a:ea typeface="微软雅黑"/>
+                <a:cs typeface="微软雅黑"/>
+              </a:rPr>
+              <a:t>④ 无对外接口</a:t>
+            </a:r>
+          </a:p>
+        </p:txBody>
+      </p:sp>
+      <p:sp>
+        <p:nvSpPr>
+          <p:cNvPr id="35" name="TextBox 34"/>
+          <p:cNvSpPr txBox="1"/>
+          <p:nvPr/>
+        </p:nvSpPr>
+        <p:spPr>
+          <a:xfrm>
+            <a:off x="384048" y="5166360"/>
+            <a:ext cx="3474720" cy="694944"/>
+          </a:xfrm>
+          <a:prstGeom prst="rect">
+            <a:avLst/>
+          </a:prstGeom>
+          <a:noFill/>
+        </p:spPr>
+        <p:txBody>
+          <a:bodyPr wrap="square" lIns="27432" rIns="27432" tIns="9144" bIns="9144" anchor="t">
+            <a:spAutoFit/>
+          </a:bodyPr>
+          <a:lstStyle/>
+          <a:p>
+            <a:pPr algn="l">
+              <a:lnSpc>
+                <a:spcPct val="110000"/>
+              </a:lnSpc>
+            </a:pPr>
+            <a:r>
+              <a:rPr sz="850" b="0">
+                <a:solidFill>
+                  <a:srgbClr val="5C5C56"/>
+                </a:solidFill>
+                <a:latin typeface="微软雅黑"/>
+                <a:ea typeface="微软雅黑"/>
+                <a:cs typeface="微软雅黑"/>
+              </a:rPr>
+              <a:t>软件只有图形界面，无 CLI、API、协议文档；外部脚本无法触发动作、也无法取回数据</a:t>
+            </a:r>
+          </a:p>
+        </p:txBody>
+      </p:sp>
+      <p:sp>
+        <p:nvSpPr>
+          <p:cNvPr id="36" name="Rounded Rectangle 35"/>
+          <p:cNvSpPr/>
+          <p:nvPr/>
+        </p:nvSpPr>
+        <p:spPr>
+          <a:xfrm>
+            <a:off x="384048" y="4233672"/>
+            <a:ext cx="1298448" cy="530352"/>
+          </a:xfrm>
+          <a:prstGeom prst="roundRect">
+            <a:avLst>
+              <a:gd name="adj" fmla="val 4000"/>
+            </a:avLst>
+          </a:prstGeom>
+          <a:solidFill>
+            <a:srgbClr val="2B2B28"/>
+          </a:solidFill>
+          <a:ln>
+            <a:noFill/>
+          </a:ln>
+          <a:effectLst/>
+        </p:spPr>
+        <p:style>
+          <a:lnRef idx="1">
+            <a:schemeClr val="accent1"/>
+          </a:lnRef>
+          <a:fillRef idx="3">
+            <a:schemeClr val="accent1"/>
+          </a:fillRef>
+          <a:effectRef idx="2">
+            <a:schemeClr val="accent1"/>
+          </a:effectRef>
+          <a:fontRef idx="minor">
+            <a:schemeClr val="lt1"/>
+          </a:fontRef>
+        </p:style>
+        <p:txBody>
+          <a:bodyPr rtlCol="0" anchor="ctr" wrap="square" lIns="18288" rIns="18288" tIns="0" bIns="0"/>
+          <a:lstStyle/>
+          <a:p>
+            <a:pPr algn="ctr">
+              <a:lnSpc>
+                <a:spcPct val="100000"/>
+              </a:lnSpc>
+            </a:pPr>
+            <a:r>
+              <a:rPr sz="800" b="0">
+                <a:solidFill>
+                  <a:srgbClr val="FFFFFF"/>
+                </a:solidFill>
+                <a:latin typeface="微软雅黑"/>
+                <a:ea typeface="微软雅黑"/>
+                <a:cs typeface="微软雅黑"/>
+              </a:rPr>
+              <a:t>供应商软件（仅 GUI）</a:t>
+            </a:r>
+          </a:p>
+        </p:txBody>
+      </p:sp>
+      <p:sp>
+        <p:nvSpPr>
+          <p:cNvPr id="37" name="Rectangle 36"/>
+          <p:cNvSpPr/>
+          <p:nvPr/>
+        </p:nvSpPr>
+        <p:spPr>
+          <a:xfrm>
+            <a:off x="1956816" y="4142231"/>
+            <a:ext cx="54864" cy="603504"/>
+          </a:xfrm>
+          <a:prstGeom prst="rect">
+            <a:avLst/>
+          </a:prstGeom>
+          <a:solidFill>
+            <a:srgbClr val="8B0F1A"/>
+          </a:solidFill>
+          <a:ln>
+            <a:noFill/>
+          </a:ln>
+          <a:effectLst/>
+        </p:spPr>
+        <p:style>
+          <a:lnRef idx="1">
+            <a:schemeClr val="accent1"/>
+          </a:lnRef>
+          <a:fillRef idx="3">
+            <a:schemeClr val="accent1"/>
+          </a:fillRef>
+          <a:effectRef idx="2">
+            <a:schemeClr val="accent1"/>
+          </a:effectRef>
+          <a:fontRef idx="minor">
+            <a:schemeClr val="lt1"/>
+          </a:fontRef>
+        </p:style>
+        <p:txBody>
+          <a:bodyPr rtlCol="0" anchor="ctr" wrap="square"/>
+          <a:lstStyle/>
+          <a:p>
+            <a:pPr algn="ctr"/>
+          </a:p>
+        </p:txBody>
+      </p:sp>
+      <p:sp>
+        <p:nvSpPr>
+          <p:cNvPr id="38" name="Rounded Rectangle 37"/>
+          <p:cNvSpPr/>
+          <p:nvPr/>
+        </p:nvSpPr>
+        <p:spPr>
+          <a:xfrm>
+            <a:off x="2304288" y="4233672"/>
+            <a:ext cx="1298448" cy="530352"/>
+          </a:xfrm>
+          <a:prstGeom prst="roundRect">
+            <a:avLst>
+              <a:gd name="adj" fmla="val 5000"/>
+            </a:avLst>
+          </a:prstGeom>
+          <a:solidFill>
+            <a:srgbClr val="FFFFFF"/>
+          </a:solidFill>
+          <a:ln w="11430">
+            <a:solidFill>
+              <a:srgbClr val="C9C9C2"/>
+            </a:solidFill>
+          </a:ln>
+          <a:effectLst/>
+        </p:spPr>
+        <p:style>
+          <a:lnRef idx="1">
+            <a:schemeClr val="accent1"/>
+          </a:lnRef>
+          <a:fillRef idx="3">
+            <a:schemeClr val="accent1"/>
+          </a:fillRef>
+          <a:effectRef idx="2">
+            <a:schemeClr val="accent1"/>
+          </a:effectRef>
+          <a:fontRef idx="minor">
+            <a:schemeClr val="lt1"/>
+          </a:fontRef>
+        </p:style>
+        <p:txBody>
+          <a:bodyPr rtlCol="0" anchor="ctr" wrap="square" lIns="18288" rIns="18288" tIns="0" bIns="0"/>
+          <a:lstStyle/>
+          <a:p>
+            <a:pPr algn="ctr">
+              <a:lnSpc>
+                <a:spcPct val="100000"/>
+              </a:lnSpc>
+            </a:pPr>
+            <a:r>
+              <a:rPr sz="800" b="0">
+                <a:solidFill>
+                  <a:srgbClr val="141414"/>
+                </a:solidFill>
+                <a:latin typeface="微软雅黑"/>
+                <a:ea typeface="微软雅黑"/>
+                <a:cs typeface="微软雅黑"/>
+              </a:rPr>
+              <a:t>外部脚本 / 自动化</a:t>
+            </a:r>
+          </a:p>
+        </p:txBody>
+      </p:sp>
+      <p:cxnSp>
+        <p:nvCxnSpPr>
+          <p:cNvPr id="39" name="Connector 38"/>
+          <p:cNvCxnSpPr/>
+          <p:nvPr/>
+        </p:nvCxnSpPr>
+        <p:spPr>
+          <a:xfrm flipH="1">
+            <a:off x="2011680" y="4507992"/>
+            <a:ext cx="292608" cy="0"/>
           </a:xfrm>
           <a:prstGeom prst="line">
             <a:avLst/>
@@ -6228,13 +8985,698 @@
       </p:cxnSp>
       <p:sp>
         <p:nvSpPr>
-          <p:cNvPr id="27" name="Rectangle 26"/>
+          <p:cNvPr id="40" name="TextBox 39"/>
+          <p:cNvSpPr txBox="1"/>
+          <p:nvPr/>
+        </p:nvSpPr>
+        <p:spPr>
+          <a:xfrm>
+            <a:off x="1700784" y="4224527"/>
+            <a:ext cx="256032" cy="274320"/>
+          </a:xfrm>
+          <a:prstGeom prst="rect">
+            <a:avLst/>
+          </a:prstGeom>
+          <a:noFill/>
+        </p:spPr>
+        <p:txBody>
+          <a:bodyPr wrap="square" lIns="27432" rIns="27432" tIns="9144" bIns="9144" anchor="ctr">
+            <a:spAutoFit/>
+          </a:bodyPr>
+          <a:lstStyle/>
+          <a:p>
+            <a:pPr algn="ctr">
+              <a:lnSpc>
+                <a:spcPct val="110000"/>
+              </a:lnSpc>
+            </a:pPr>
+            <a:r>
+              <a:rPr sz="1300" b="1">
+                <a:solidFill>
+                  <a:srgbClr val="8B0F1A"/>
+                </a:solidFill>
+                <a:latin typeface="微软雅黑"/>
+                <a:ea typeface="微软雅黑"/>
+                <a:cs typeface="微软雅黑"/>
+              </a:rPr>
+              <a:t>×</a:t>
+            </a:r>
+          </a:p>
+        </p:txBody>
+      </p:sp>
+      <p:sp>
+        <p:nvSpPr>
+          <p:cNvPr id="41" name="TextBox 40"/>
+          <p:cNvSpPr txBox="1"/>
+          <p:nvPr/>
+        </p:nvSpPr>
+        <p:spPr>
+          <a:xfrm>
+            <a:off x="1773936" y="4818888"/>
+            <a:ext cx="1737360" cy="182880"/>
+          </a:xfrm>
+          <a:prstGeom prst="rect">
+            <a:avLst/>
+          </a:prstGeom>
+          <a:noFill/>
+        </p:spPr>
+        <p:txBody>
+          <a:bodyPr wrap="square" lIns="27432" rIns="27432" tIns="9144" bIns="9144" anchor="ctr">
+            <a:spAutoFit/>
+          </a:bodyPr>
+          <a:lstStyle/>
+          <a:p>
+            <a:pPr algn="ctr">
+              <a:lnSpc>
+                <a:spcPct val="110000"/>
+              </a:lnSpc>
+            </a:pPr>
+            <a:r>
+              <a:rPr sz="750" b="0">
+                <a:solidFill>
+                  <a:srgbClr val="8B0F1A"/>
+                </a:solidFill>
+                <a:latin typeface="微软雅黑"/>
+                <a:ea typeface="微软雅黑"/>
+                <a:cs typeface="微软雅黑"/>
+              </a:rPr>
+              <a:t>无 CLI / API / 协议文档</a:t>
+            </a:r>
+          </a:p>
+        </p:txBody>
+      </p:sp>
+      <p:sp>
+        <p:nvSpPr>
+          <p:cNvPr id="42" name="Rounded Rectangle 41"/>
           <p:cNvSpPr/>
           <p:nvPr/>
         </p:nvSpPr>
         <p:spPr>
           <a:xfrm>
-            <a:off x="10387584" y="1956816"/>
+            <a:off x="4224528" y="3703320"/>
+            <a:ext cx="3694176" cy="2240280"/>
+          </a:xfrm>
+          <a:prstGeom prst="roundRect">
+            <a:avLst>
+              <a:gd name="adj" fmla="val 4000"/>
+            </a:avLst>
+          </a:prstGeom>
+          <a:solidFill>
+            <a:srgbClr val="FFFFFF"/>
+          </a:solidFill>
+          <a:ln w="12700">
+            <a:solidFill>
+              <a:srgbClr val="C9C9C2"/>
+            </a:solidFill>
+          </a:ln>
+          <a:effectLst/>
+        </p:spPr>
+        <p:style>
+          <a:lnRef idx="1">
+            <a:schemeClr val="accent1"/>
+          </a:lnRef>
+          <a:fillRef idx="3">
+            <a:schemeClr val="accent1"/>
+          </a:fillRef>
+          <a:effectRef idx="2">
+            <a:schemeClr val="accent1"/>
+          </a:effectRef>
+          <a:fontRef idx="minor">
+            <a:schemeClr val="lt1"/>
+          </a:fontRef>
+        </p:style>
+        <p:txBody>
+          <a:bodyPr rtlCol="0" anchor="ctr" wrap="square"/>
+          <a:lstStyle/>
+          <a:p>
+            <a:pPr algn="ctr"/>
+          </a:p>
+        </p:txBody>
+      </p:sp>
+      <p:sp>
+        <p:nvSpPr>
+          <p:cNvPr id="43" name="TextBox 42"/>
+          <p:cNvSpPr txBox="1"/>
+          <p:nvPr/>
+        </p:nvSpPr>
+        <p:spPr>
+          <a:xfrm>
+            <a:off x="4334256" y="3776472"/>
+            <a:ext cx="3474720" cy="274320"/>
+          </a:xfrm>
+          <a:prstGeom prst="rect">
+            <a:avLst/>
+          </a:prstGeom>
+          <a:noFill/>
+        </p:spPr>
+        <p:txBody>
+          <a:bodyPr wrap="square" lIns="27432" rIns="27432" tIns="9144" bIns="9144" anchor="ctr">
+            <a:spAutoFit/>
+          </a:bodyPr>
+          <a:lstStyle/>
+          <a:p>
+            <a:pPr algn="l">
+              <a:lnSpc>
+                <a:spcPct val="110000"/>
+              </a:lnSpc>
+            </a:pPr>
+            <a:r>
+              <a:rPr sz="1000" b="1">
+                <a:solidFill>
+                  <a:srgbClr val="141414"/>
+                </a:solidFill>
+                <a:latin typeface="微软雅黑"/>
+                <a:ea typeface="微软雅黑"/>
+                <a:cs typeface="微软雅黑"/>
+              </a:rPr>
+              <a:t>⑤ 物理接口不匹配</a:t>
+            </a:r>
+          </a:p>
+        </p:txBody>
+      </p:sp>
+      <p:sp>
+        <p:nvSpPr>
+          <p:cNvPr id="44" name="TextBox 43"/>
+          <p:cNvSpPr txBox="1"/>
+          <p:nvPr/>
+        </p:nvSpPr>
+        <p:spPr>
+          <a:xfrm>
+            <a:off x="4334256" y="5166360"/>
+            <a:ext cx="3474720" cy="694944"/>
+          </a:xfrm>
+          <a:prstGeom prst="rect">
+            <a:avLst/>
+          </a:prstGeom>
+          <a:noFill/>
+        </p:spPr>
+        <p:txBody>
+          <a:bodyPr wrap="square" lIns="27432" rIns="27432" tIns="9144" bIns="9144" anchor="t">
+            <a:spAutoFit/>
+          </a:bodyPr>
+          <a:lstStyle/>
+          <a:p>
+            <a:pPr algn="l">
+              <a:lnSpc>
+                <a:spcPct val="110000"/>
+              </a:lnSpc>
+            </a:pPr>
+            <a:r>
+              <a:rPr sz="850" b="0">
+                <a:solidFill>
+                  <a:srgbClr val="5C5C56"/>
+                </a:solidFill>
+                <a:latin typeface="微软雅黑"/>
+                <a:ea typeface="微软雅黑"/>
+                <a:cs typeface="微软雅黑"/>
+              </a:rPr>
+              <a:t>设备只提供 GPIB / RS232 等专用口，产线工控机没有对应接口卡与驱动</a:t>
+            </a:r>
+          </a:p>
+        </p:txBody>
+      </p:sp>
+      <p:sp>
+        <p:nvSpPr>
+          <p:cNvPr id="45" name="Rounded Rectangle 44"/>
+          <p:cNvSpPr/>
+          <p:nvPr/>
+        </p:nvSpPr>
+        <p:spPr>
+          <a:xfrm>
+            <a:off x="4334256" y="4251959"/>
+            <a:ext cx="1243584" cy="502920"/>
+          </a:xfrm>
+          <a:prstGeom prst="roundRect">
+            <a:avLst>
+              <a:gd name="adj" fmla="val 5000"/>
+            </a:avLst>
+          </a:prstGeom>
+          <a:solidFill>
+            <a:srgbClr val="ECECEC"/>
+          </a:solidFill>
+          <a:ln w="11430">
+            <a:solidFill>
+              <a:srgbClr val="C9C9C2"/>
+            </a:solidFill>
+          </a:ln>
+          <a:effectLst/>
+        </p:spPr>
+        <p:style>
+          <a:lnRef idx="1">
+            <a:schemeClr val="accent1"/>
+          </a:lnRef>
+          <a:fillRef idx="3">
+            <a:schemeClr val="accent1"/>
+          </a:fillRef>
+          <a:effectRef idx="2">
+            <a:schemeClr val="accent1"/>
+          </a:effectRef>
+          <a:fontRef idx="minor">
+            <a:schemeClr val="lt1"/>
+          </a:fontRef>
+        </p:style>
+        <p:txBody>
+          <a:bodyPr rtlCol="0" anchor="ctr" wrap="square" lIns="18288" rIns="18288" tIns="0" bIns="0"/>
+          <a:lstStyle/>
+          <a:p>
+            <a:pPr algn="ctr">
+              <a:lnSpc>
+                <a:spcPct val="100000"/>
+              </a:lnSpc>
+            </a:pPr>
+            <a:r>
+              <a:rPr sz="750" b="0">
+                <a:solidFill>
+                  <a:srgbClr val="141414"/>
+                </a:solidFill>
+                <a:latin typeface="微软雅黑"/>
+                <a:ea typeface="微软雅黑"/>
+                <a:cs typeface="微软雅黑"/>
+              </a:rPr>
+              <a:t>设备：GPIB / RS232</a:t>
+            </a:r>
+          </a:p>
+        </p:txBody>
+      </p:sp>
+      <p:cxnSp>
+        <p:nvCxnSpPr>
+          <p:cNvPr id="46" name="Connector 45"/>
+          <p:cNvCxnSpPr/>
+          <p:nvPr/>
+        </p:nvCxnSpPr>
+        <p:spPr>
+          <a:xfrm>
+            <a:off x="5577840" y="4498848"/>
+            <a:ext cx="640080" cy="0"/>
+          </a:xfrm>
+          <a:prstGeom prst="line">
+            <a:avLst/>
+          </a:prstGeom>
+          <a:ln w="12700">
+            <a:solidFill>
+              <a:srgbClr val="5C5C56"/>
+            </a:solidFill>
+            <a:prstDash val="dash"/>
+          </a:ln>
+        </p:spPr>
+        <p:style>
+          <a:lnRef idx="2">
+            <a:schemeClr val="accent1"/>
+          </a:lnRef>
+          <a:fillRef idx="0">
+            <a:schemeClr val="accent1"/>
+          </a:fillRef>
+          <a:effectRef idx="1">
+            <a:schemeClr val="accent1"/>
+          </a:effectRef>
+          <a:fontRef idx="minor">
+            <a:schemeClr val="tx1"/>
+          </a:fontRef>
+        </p:style>
+      </p:cxnSp>
+      <p:sp>
+        <p:nvSpPr>
+          <p:cNvPr id="47" name="Rounded Rectangle 46"/>
+          <p:cNvSpPr/>
+          <p:nvPr/>
+        </p:nvSpPr>
+        <p:spPr>
+          <a:xfrm>
+            <a:off x="6217920" y="4251959"/>
+            <a:ext cx="1444752" cy="502920"/>
+          </a:xfrm>
+          <a:prstGeom prst="roundRect">
+            <a:avLst>
+              <a:gd name="adj" fmla="val 5000"/>
+            </a:avLst>
+          </a:prstGeom>
+          <a:solidFill>
+            <a:srgbClr val="FFFFFF"/>
+          </a:solidFill>
+          <a:ln w="12700">
+            <a:solidFill>
+              <a:srgbClr val="8B0F1A"/>
+            </a:solidFill>
+          </a:ln>
+          <a:effectLst/>
+        </p:spPr>
+        <p:style>
+          <a:lnRef idx="1">
+            <a:schemeClr val="accent1"/>
+          </a:lnRef>
+          <a:fillRef idx="3">
+            <a:schemeClr val="accent1"/>
+          </a:fillRef>
+          <a:effectRef idx="2">
+            <a:schemeClr val="accent1"/>
+          </a:effectRef>
+          <a:fontRef idx="minor">
+            <a:schemeClr val="lt1"/>
+          </a:fontRef>
+        </p:style>
+        <p:txBody>
+          <a:bodyPr rtlCol="0" anchor="ctr" wrap="square" lIns="18288" rIns="18288" tIns="0" bIns="0"/>
+          <a:lstStyle/>
+          <a:p>
+            <a:pPr algn="ctr">
+              <a:lnSpc>
+                <a:spcPct val="100000"/>
+              </a:lnSpc>
+            </a:pPr>
+            <a:r>
+              <a:rPr sz="750" b="0">
+                <a:solidFill>
+                  <a:srgbClr val="141414"/>
+                </a:solidFill>
+                <a:latin typeface="微软雅黑"/>
+                <a:ea typeface="微软雅黑"/>
+                <a:cs typeface="微软雅黑"/>
+              </a:rPr>
+              <a:t>工控机：仅 USB / 网口</a:t>
+            </a:r>
+          </a:p>
+        </p:txBody>
+      </p:sp>
+      <p:sp>
+        <p:nvSpPr>
+          <p:cNvPr id="48" name="TextBox 47"/>
+          <p:cNvSpPr txBox="1"/>
+          <p:nvPr/>
+        </p:nvSpPr>
+        <p:spPr>
+          <a:xfrm>
+            <a:off x="5769864" y="4224527"/>
+            <a:ext cx="256032" cy="274320"/>
+          </a:xfrm>
+          <a:prstGeom prst="rect">
+            <a:avLst/>
+          </a:prstGeom>
+          <a:noFill/>
+        </p:spPr>
+        <p:txBody>
+          <a:bodyPr wrap="square" lIns="27432" rIns="27432" tIns="9144" bIns="9144" anchor="ctr">
+            <a:spAutoFit/>
+          </a:bodyPr>
+          <a:lstStyle/>
+          <a:p>
+            <a:pPr algn="ctr">
+              <a:lnSpc>
+                <a:spcPct val="110000"/>
+              </a:lnSpc>
+            </a:pPr>
+            <a:r>
+              <a:rPr sz="1400" b="1">
+                <a:solidFill>
+                  <a:srgbClr val="8B0F1A"/>
+                </a:solidFill>
+                <a:latin typeface="微软雅黑"/>
+                <a:ea typeface="微软雅黑"/>
+                <a:cs typeface="微软雅黑"/>
+              </a:rPr>
+              <a:t>×</a:t>
+            </a:r>
+          </a:p>
+        </p:txBody>
+      </p:sp>
+      <p:sp>
+        <p:nvSpPr>
+          <p:cNvPr id="49" name="TextBox 48"/>
+          <p:cNvSpPr txBox="1"/>
+          <p:nvPr/>
+        </p:nvSpPr>
+        <p:spPr>
+          <a:xfrm>
+            <a:off x="5431536" y="4800600"/>
+            <a:ext cx="1188720" cy="182880"/>
+          </a:xfrm>
+          <a:prstGeom prst="rect">
+            <a:avLst/>
+          </a:prstGeom>
+          <a:noFill/>
+        </p:spPr>
+        <p:txBody>
+          <a:bodyPr wrap="square" lIns="27432" rIns="27432" tIns="9144" bIns="9144" anchor="ctr">
+            <a:spAutoFit/>
+          </a:bodyPr>
+          <a:lstStyle/>
+          <a:p>
+            <a:pPr algn="ctr">
+              <a:lnSpc>
+                <a:spcPct val="110000"/>
+              </a:lnSpc>
+            </a:pPr>
+            <a:r>
+              <a:rPr sz="750" b="0">
+                <a:solidFill>
+                  <a:srgbClr val="8B0F1A"/>
+                </a:solidFill>
+                <a:latin typeface="微软雅黑"/>
+                <a:ea typeface="微软雅黑"/>
+                <a:cs typeface="微软雅黑"/>
+              </a:rPr>
+              <a:t>无对应接口卡</a:t>
+            </a:r>
+          </a:p>
+        </p:txBody>
+      </p:sp>
+      <p:sp>
+        <p:nvSpPr>
+          <p:cNvPr id="50" name="Rounded Rectangle 49"/>
+          <p:cNvSpPr/>
+          <p:nvPr/>
+        </p:nvSpPr>
+        <p:spPr>
+          <a:xfrm>
+            <a:off x="8174736" y="3703320"/>
+            <a:ext cx="3694176" cy="2240280"/>
+          </a:xfrm>
+          <a:prstGeom prst="roundRect">
+            <a:avLst>
+              <a:gd name="adj" fmla="val 4000"/>
+            </a:avLst>
+          </a:prstGeom>
+          <a:solidFill>
+            <a:srgbClr val="FFFFFF"/>
+          </a:solidFill>
+          <a:ln w="12700">
+            <a:solidFill>
+              <a:srgbClr val="C9C9C2"/>
+            </a:solidFill>
+          </a:ln>
+          <a:effectLst/>
+        </p:spPr>
+        <p:style>
+          <a:lnRef idx="1">
+            <a:schemeClr val="accent1"/>
+          </a:lnRef>
+          <a:fillRef idx="3">
+            <a:schemeClr val="accent1"/>
+          </a:fillRef>
+          <a:effectRef idx="2">
+            <a:schemeClr val="accent1"/>
+          </a:effectRef>
+          <a:fontRef idx="minor">
+            <a:schemeClr val="lt1"/>
+          </a:fontRef>
+        </p:style>
+        <p:txBody>
+          <a:bodyPr rtlCol="0" anchor="ctr" wrap="square"/>
+          <a:lstStyle/>
+          <a:p>
+            <a:pPr algn="ctr"/>
+          </a:p>
+        </p:txBody>
+      </p:sp>
+      <p:sp>
+        <p:nvSpPr>
+          <p:cNvPr id="51" name="TextBox 50"/>
+          <p:cNvSpPr txBox="1"/>
+          <p:nvPr/>
+        </p:nvSpPr>
+        <p:spPr>
+          <a:xfrm>
+            <a:off x="8284463" y="3776472"/>
+            <a:ext cx="3474720" cy="274320"/>
+          </a:xfrm>
+          <a:prstGeom prst="rect">
+            <a:avLst/>
+          </a:prstGeom>
+          <a:noFill/>
+        </p:spPr>
+        <p:txBody>
+          <a:bodyPr wrap="square" lIns="27432" rIns="27432" tIns="9144" bIns="9144" anchor="ctr">
+            <a:spAutoFit/>
+          </a:bodyPr>
+          <a:lstStyle/>
+          <a:p>
+            <a:pPr algn="l">
+              <a:lnSpc>
+                <a:spcPct val="110000"/>
+              </a:lnSpc>
+            </a:pPr>
+            <a:r>
+              <a:rPr sz="1000" b="1">
+                <a:solidFill>
+                  <a:srgbClr val="141414"/>
+                </a:solidFill>
+                <a:latin typeface="微软雅黑"/>
+                <a:ea typeface="微软雅黑"/>
+                <a:cs typeface="微软雅黑"/>
+              </a:rPr>
+              <a:t>⑥ 无法安装 Runner</a:t>
+            </a:r>
+          </a:p>
+        </p:txBody>
+      </p:sp>
+      <p:sp>
+        <p:nvSpPr>
+          <p:cNvPr id="52" name="TextBox 51"/>
+          <p:cNvSpPr txBox="1"/>
+          <p:nvPr/>
+        </p:nvSpPr>
+        <p:spPr>
+          <a:xfrm>
+            <a:off x="8284463" y="5166360"/>
+            <a:ext cx="3474720" cy="694944"/>
+          </a:xfrm>
+          <a:prstGeom prst="rect">
+            <a:avLst/>
+          </a:prstGeom>
+          <a:noFill/>
+        </p:spPr>
+        <p:txBody>
+          <a:bodyPr wrap="square" lIns="27432" rIns="27432" tIns="9144" bIns="9144" anchor="t">
+            <a:spAutoFit/>
+          </a:bodyPr>
+          <a:lstStyle/>
+          <a:p>
+            <a:pPr algn="l">
+              <a:lnSpc>
+                <a:spcPct val="110000"/>
+              </a:lnSpc>
+            </a:pPr>
+            <a:r>
+              <a:rPr sz="850" b="0">
+                <a:solidFill>
+                  <a:srgbClr val="5C5C56"/>
+                </a:solidFill>
+                <a:latin typeface="微软雅黑"/>
+                <a:ea typeface="微软雅黑"/>
+                <a:cs typeface="微软雅黑"/>
+              </a:rPr>
+              <a:t>交付系统封闭或镜像只读、无管理员权限，第三方执行代理无法安装与常驻</a:t>
+            </a:r>
+          </a:p>
+        </p:txBody>
+      </p:sp>
+      <p:sp>
+        <p:nvSpPr>
+          <p:cNvPr id="53" name="Rounded Rectangle 52"/>
+          <p:cNvSpPr/>
+          <p:nvPr/>
+        </p:nvSpPr>
+        <p:spPr>
+          <a:xfrm>
+            <a:off x="8284463" y="4251959"/>
+            <a:ext cx="1481328" cy="502920"/>
+          </a:xfrm>
+          <a:prstGeom prst="roundRect">
+            <a:avLst>
+              <a:gd name="adj" fmla="val 5000"/>
+            </a:avLst>
+          </a:prstGeom>
+          <a:solidFill>
+            <a:srgbClr val="ECECEC"/>
+          </a:solidFill>
+          <a:ln w="11430">
+            <a:solidFill>
+              <a:srgbClr val="C9C9C2"/>
+            </a:solidFill>
+          </a:ln>
+          <a:effectLst/>
+        </p:spPr>
+        <p:style>
+          <a:lnRef idx="1">
+            <a:schemeClr val="accent1"/>
+          </a:lnRef>
+          <a:fillRef idx="3">
+            <a:schemeClr val="accent1"/>
+          </a:fillRef>
+          <a:effectRef idx="2">
+            <a:schemeClr val="accent1"/>
+          </a:effectRef>
+          <a:fontRef idx="minor">
+            <a:schemeClr val="lt1"/>
+          </a:fontRef>
+        </p:style>
+        <p:txBody>
+          <a:bodyPr rtlCol="0" anchor="ctr" wrap="square" lIns="18288" rIns="18288" tIns="0" bIns="0"/>
+          <a:lstStyle/>
+          <a:p>
+            <a:pPr algn="ctr">
+              <a:lnSpc>
+                <a:spcPct val="100000"/>
+              </a:lnSpc>
+            </a:pPr>
+            <a:r>
+              <a:rPr sz="800" b="0">
+                <a:solidFill>
+                  <a:srgbClr val="141414"/>
+                </a:solidFill>
+                <a:latin typeface="微软雅黑"/>
+                <a:ea typeface="微软雅黑"/>
+                <a:cs typeface="微软雅黑"/>
+              </a:rPr>
+              <a:t>封闭系统 / 只读镜像</a:t>
+            </a:r>
+          </a:p>
+        </p:txBody>
+      </p:sp>
+      <p:cxnSp>
+        <p:nvCxnSpPr>
+          <p:cNvPr id="54" name="Connector 53"/>
+          <p:cNvCxnSpPr/>
+          <p:nvPr/>
+        </p:nvCxnSpPr>
+        <p:spPr>
+          <a:xfrm>
+            <a:off x="9765792" y="4498848"/>
+            <a:ext cx="621792" cy="0"/>
+          </a:xfrm>
+          <a:prstGeom prst="line">
+            <a:avLst/>
+          </a:prstGeom>
+          <a:ln w="12700">
+            <a:solidFill>
+              <a:srgbClr val="5C5C56"/>
+            </a:solidFill>
+            <a:prstDash val="dash"/>
+          </a:ln>
+        </p:spPr>
+        <p:style>
+          <a:lnRef idx="2">
+            <a:schemeClr val="accent1"/>
+          </a:lnRef>
+          <a:fillRef idx="0">
+            <a:schemeClr val="accent1"/>
+          </a:fillRef>
+          <a:effectRef idx="1">
+            <a:schemeClr val="accent1"/>
+          </a:effectRef>
+          <a:fontRef idx="minor">
+            <a:schemeClr val="tx1"/>
+          </a:fontRef>
+        </p:style>
+      </p:cxnSp>
+      <p:sp>
+        <p:nvSpPr>
+          <p:cNvPr id="55" name="Rectangle 54"/>
+          <p:cNvSpPr/>
+          <p:nvPr/>
+        </p:nvSpPr>
+        <p:spPr>
+          <a:xfrm>
+            <a:off x="10387584" y="4288536"/>
             <a:ext cx="713232" cy="438912"/>
           </a:xfrm>
           <a:prstGeom prst="rect">
@@ -6289,13 +9731,13 @@
       </p:sp>
       <p:sp>
         <p:nvSpPr>
-          <p:cNvPr id="28" name="&quot;No&quot; Symbol 27"/>
+          <p:cNvPr id="56" name="&quot;No&quot; Symbol 55"/>
           <p:cNvSpPr/>
           <p:nvPr/>
         </p:nvSpPr>
         <p:spPr>
           <a:xfrm>
-            <a:off x="10332719" y="1865376"/>
+            <a:off x="10332719" y="4197096"/>
             <a:ext cx="841248" cy="841248"/>
           </a:xfrm>
           <a:prstGeom prst="noSmoking">
@@ -6333,13 +9775,13 @@
       </p:sp>
       <p:sp>
         <p:nvSpPr>
-          <p:cNvPr id="29" name="TextBox 28"/>
+          <p:cNvPr id="57" name="TextBox 56"/>
           <p:cNvSpPr txBox="1"/>
           <p:nvPr/>
         </p:nvSpPr>
         <p:spPr>
           <a:xfrm>
-            <a:off x="9966959" y="1874520"/>
+            <a:off x="9966959" y="4206240"/>
             <a:ext cx="256032" cy="274320"/>
           </a:xfrm>
           <a:prstGeom prst="rect">
@@ -6359,7 +9801,7 @@
               </a:lnSpc>
             </a:pPr>
             <a:r>
-              <a:rPr sz="1500" b="1">
+              <a:rPr sz="1400" b="1">
                 <a:solidFill>
                   <a:srgbClr val="8B0F1A"/>
                 </a:solidFill>
@@ -6374,13 +9816,13 @@
       </p:sp>
       <p:sp>
         <p:nvSpPr>
-          <p:cNvPr id="30" name="TextBox 29"/>
+          <p:cNvPr id="58" name="TextBox 57"/>
           <p:cNvSpPr txBox="1"/>
           <p:nvPr/>
         </p:nvSpPr>
         <p:spPr>
           <a:xfrm>
-            <a:off x="8302751" y="2487168"/>
+            <a:off x="8302751" y="4818888"/>
             <a:ext cx="1517904" cy="182880"/>
           </a:xfrm>
           <a:prstGeom prst="rect">
@@ -6415,1407 +9857,7 @@
       </p:sp>
       <p:sp>
         <p:nvSpPr>
-          <p:cNvPr id="31" name="Rounded Rectangle 30"/>
-          <p:cNvSpPr/>
-          <p:nvPr/>
-        </p:nvSpPr>
-        <p:spPr>
-          <a:xfrm>
-            <a:off x="274320" y="3703320"/>
-            <a:ext cx="3694176" cy="2240280"/>
-          </a:xfrm>
-          <a:prstGeom prst="roundRect">
-            <a:avLst>
-              <a:gd name="adj" fmla="val 4000"/>
-            </a:avLst>
-          </a:prstGeom>
-          <a:solidFill>
-            <a:srgbClr val="FFFFFF"/>
-          </a:solidFill>
-          <a:ln w="12700">
-            <a:solidFill>
-              <a:srgbClr val="C9C9C2"/>
-            </a:solidFill>
-          </a:ln>
-          <a:effectLst/>
-        </p:spPr>
-        <p:style>
-          <a:lnRef idx="1">
-            <a:schemeClr val="accent1"/>
-          </a:lnRef>
-          <a:fillRef idx="3">
-            <a:schemeClr val="accent1"/>
-          </a:fillRef>
-          <a:effectRef idx="2">
-            <a:schemeClr val="accent1"/>
-          </a:effectRef>
-          <a:fontRef idx="minor">
-            <a:schemeClr val="lt1"/>
-          </a:fontRef>
-        </p:style>
-        <p:txBody>
-          <a:bodyPr rtlCol="0" anchor="ctr" wrap="square"/>
-          <a:lstStyle/>
-          <a:p>
-            <a:pPr algn="ctr"/>
-          </a:p>
-        </p:txBody>
-      </p:sp>
-      <p:sp>
-        <p:nvSpPr>
-          <p:cNvPr id="32" name="TextBox 31"/>
-          <p:cNvSpPr txBox="1"/>
-          <p:nvPr/>
-        </p:nvSpPr>
-        <p:spPr>
-          <a:xfrm>
-            <a:off x="384048" y="3776472"/>
-            <a:ext cx="3474720" cy="274320"/>
-          </a:xfrm>
-          <a:prstGeom prst="rect">
-            <a:avLst/>
-          </a:prstGeom>
-          <a:noFill/>
-        </p:spPr>
-        <p:txBody>
-          <a:bodyPr wrap="square" lIns="27432" rIns="27432" tIns="9144" bIns="9144" anchor="ctr">
-            <a:spAutoFit/>
-          </a:bodyPr>
-          <a:lstStyle/>
-          <a:p>
-            <a:pPr algn="l">
-              <a:lnSpc>
-                <a:spcPct val="110000"/>
-              </a:lnSpc>
-            </a:pPr>
-            <a:r>
-              <a:rPr sz="1000" b="1">
-                <a:solidFill>
-                  <a:srgbClr val="141414"/>
-                </a:solidFill>
-                <a:latin typeface="微软雅黑"/>
-                <a:ea typeface="微软雅黑"/>
-                <a:cs typeface="微软雅黑"/>
-              </a:rPr>
-              <a:t>④ 无对外接口</a:t>
-            </a:r>
-          </a:p>
-        </p:txBody>
-      </p:sp>
-      <p:sp>
-        <p:nvSpPr>
-          <p:cNvPr id="33" name="TextBox 32"/>
-          <p:cNvSpPr txBox="1"/>
-          <p:nvPr/>
-        </p:nvSpPr>
-        <p:spPr>
-          <a:xfrm>
-            <a:off x="384048" y="5166360"/>
-            <a:ext cx="3474720" cy="694944"/>
-          </a:xfrm>
-          <a:prstGeom prst="rect">
-            <a:avLst/>
-          </a:prstGeom>
-          <a:noFill/>
-        </p:spPr>
-        <p:txBody>
-          <a:bodyPr wrap="square" lIns="27432" rIns="27432" tIns="9144" bIns="9144" anchor="t">
-            <a:spAutoFit/>
-          </a:bodyPr>
-          <a:lstStyle/>
-          <a:p>
-            <a:pPr algn="l">
-              <a:lnSpc>
-                <a:spcPct val="110000"/>
-              </a:lnSpc>
-            </a:pPr>
-            <a:r>
-              <a:rPr sz="850" b="0">
-                <a:solidFill>
-                  <a:srgbClr val="5C5C56"/>
-                </a:solidFill>
-                <a:latin typeface="微软雅黑"/>
-                <a:ea typeface="微软雅黑"/>
-                <a:cs typeface="微软雅黑"/>
-              </a:rPr>
-              <a:t>软件只有图形界面，无 CLI、API、协议文档；外部脚本无法触发动作、也无法取回数据</a:t>
-            </a:r>
-          </a:p>
-        </p:txBody>
-      </p:sp>
-      <p:sp>
-        <p:nvSpPr>
-          <p:cNvPr id="34" name="Rounded Rectangle 33"/>
-          <p:cNvSpPr/>
-          <p:nvPr/>
-        </p:nvSpPr>
-        <p:spPr>
-          <a:xfrm>
-            <a:off x="384048" y="4233672"/>
-            <a:ext cx="1298448" cy="548640"/>
-          </a:xfrm>
-          <a:prstGeom prst="roundRect">
-            <a:avLst>
-              <a:gd name="adj" fmla="val 4000"/>
-            </a:avLst>
-          </a:prstGeom>
-          <a:solidFill>
-            <a:srgbClr val="2B2B28"/>
-          </a:solidFill>
-          <a:ln>
-            <a:noFill/>
-          </a:ln>
-          <a:effectLst/>
-        </p:spPr>
-        <p:style>
-          <a:lnRef idx="1">
-            <a:schemeClr val="accent1"/>
-          </a:lnRef>
-          <a:fillRef idx="3">
-            <a:schemeClr val="accent1"/>
-          </a:fillRef>
-          <a:effectRef idx="2">
-            <a:schemeClr val="accent1"/>
-          </a:effectRef>
-          <a:fontRef idx="minor">
-            <a:schemeClr val="lt1"/>
-          </a:fontRef>
-        </p:style>
-        <p:txBody>
-          <a:bodyPr rtlCol="0" anchor="ctr" wrap="square" lIns="18288" rIns="18288" tIns="0" bIns="0"/>
-          <a:lstStyle/>
-          <a:p>
-            <a:pPr algn="ctr">
-              <a:lnSpc>
-                <a:spcPct val="100000"/>
-              </a:lnSpc>
-            </a:pPr>
-            <a:r>
-              <a:rPr sz="800" b="0">
-                <a:solidFill>
-                  <a:srgbClr val="FFFFFF"/>
-                </a:solidFill>
-                <a:latin typeface="微软雅黑"/>
-                <a:ea typeface="微软雅黑"/>
-                <a:cs typeface="微软雅黑"/>
-              </a:rPr>
-              <a:t>供应商软件（仅 GUI）</a:t>
-            </a:r>
-          </a:p>
-        </p:txBody>
-      </p:sp>
-      <p:sp>
-        <p:nvSpPr>
-          <p:cNvPr id="35" name="Rectangle 34"/>
-          <p:cNvSpPr/>
-          <p:nvPr/>
-        </p:nvSpPr>
-        <p:spPr>
-          <a:xfrm>
-            <a:off x="1956816" y="4142231"/>
-            <a:ext cx="54864" cy="621792"/>
-          </a:xfrm>
-          <a:prstGeom prst="rect">
-            <a:avLst/>
-          </a:prstGeom>
-          <a:solidFill>
-            <a:srgbClr val="8B0F1A"/>
-          </a:solidFill>
-          <a:ln>
-            <a:noFill/>
-          </a:ln>
-          <a:effectLst/>
-        </p:spPr>
-        <p:style>
-          <a:lnRef idx="1">
-            <a:schemeClr val="accent1"/>
-          </a:lnRef>
-          <a:fillRef idx="3">
-            <a:schemeClr val="accent1"/>
-          </a:fillRef>
-          <a:effectRef idx="2">
-            <a:schemeClr val="accent1"/>
-          </a:effectRef>
-          <a:fontRef idx="minor">
-            <a:schemeClr val="lt1"/>
-          </a:fontRef>
-        </p:style>
-        <p:txBody>
-          <a:bodyPr rtlCol="0" anchor="ctr" wrap="square"/>
-          <a:lstStyle/>
-          <a:p>
-            <a:pPr algn="ctr"/>
-          </a:p>
-        </p:txBody>
-      </p:sp>
-      <p:sp>
-        <p:nvSpPr>
-          <p:cNvPr id="36" name="Rounded Rectangle 35"/>
-          <p:cNvSpPr/>
-          <p:nvPr/>
-        </p:nvSpPr>
-        <p:spPr>
-          <a:xfrm>
-            <a:off x="2304288" y="4233672"/>
-            <a:ext cx="1298448" cy="548640"/>
-          </a:xfrm>
-          <a:prstGeom prst="roundRect">
-            <a:avLst>
-              <a:gd name="adj" fmla="val 5000"/>
-            </a:avLst>
-          </a:prstGeom>
-          <a:solidFill>
-            <a:srgbClr val="FFFFFF"/>
-          </a:solidFill>
-          <a:ln w="11430">
-            <a:solidFill>
-              <a:srgbClr val="C9C9C2"/>
-            </a:solidFill>
-          </a:ln>
-          <a:effectLst/>
-        </p:spPr>
-        <p:style>
-          <a:lnRef idx="1">
-            <a:schemeClr val="accent1"/>
-          </a:lnRef>
-          <a:fillRef idx="3">
-            <a:schemeClr val="accent1"/>
-          </a:fillRef>
-          <a:effectRef idx="2">
-            <a:schemeClr val="accent1"/>
-          </a:effectRef>
-          <a:fontRef idx="minor">
-            <a:schemeClr val="lt1"/>
-          </a:fontRef>
-        </p:style>
-        <p:txBody>
-          <a:bodyPr rtlCol="0" anchor="ctr" wrap="square" lIns="18288" rIns="18288" tIns="0" bIns="0"/>
-          <a:lstStyle/>
-          <a:p>
-            <a:pPr algn="ctr">
-              <a:lnSpc>
-                <a:spcPct val="100000"/>
-              </a:lnSpc>
-            </a:pPr>
-            <a:r>
-              <a:rPr sz="800" b="0">
-                <a:solidFill>
-                  <a:srgbClr val="141414"/>
-                </a:solidFill>
-                <a:latin typeface="微软雅黑"/>
-                <a:ea typeface="微软雅黑"/>
-                <a:cs typeface="微软雅黑"/>
-              </a:rPr>
-              <a:t>外部脚本 / 自动化</a:t>
-            </a:r>
-          </a:p>
-        </p:txBody>
-      </p:sp>
-      <p:cxnSp>
-        <p:nvCxnSpPr>
-          <p:cNvPr id="37" name="Connector 36"/>
-          <p:cNvCxnSpPr/>
-          <p:nvPr/>
-        </p:nvCxnSpPr>
-        <p:spPr>
-          <a:xfrm flipH="1">
-            <a:off x="2011680" y="4507992"/>
-            <a:ext cx="292608" cy="0"/>
-          </a:xfrm>
-          <a:prstGeom prst="line">
-            <a:avLst/>
-          </a:prstGeom>
-          <a:ln w="12700">
-            <a:solidFill>
-              <a:srgbClr val="5C5C56"/>
-            </a:solidFill>
-            <a:prstDash val="dash"/>
-          </a:ln>
-        </p:spPr>
-        <p:style>
-          <a:lnRef idx="2">
-            <a:schemeClr val="accent1"/>
-          </a:lnRef>
-          <a:fillRef idx="0">
-            <a:schemeClr val="accent1"/>
-          </a:fillRef>
-          <a:effectRef idx="1">
-            <a:schemeClr val="accent1"/>
-          </a:effectRef>
-          <a:fontRef idx="minor">
-            <a:schemeClr val="tx1"/>
-          </a:fontRef>
-        </p:style>
-      </p:cxnSp>
-      <p:sp>
-        <p:nvSpPr>
-          <p:cNvPr id="38" name="TextBox 37"/>
-          <p:cNvSpPr txBox="1"/>
-          <p:nvPr/>
-        </p:nvSpPr>
-        <p:spPr>
-          <a:xfrm>
-            <a:off x="1719072" y="4224527"/>
-            <a:ext cx="256032" cy="274320"/>
-          </a:xfrm>
-          <a:prstGeom prst="rect">
-            <a:avLst/>
-          </a:prstGeom>
-          <a:noFill/>
-        </p:spPr>
-        <p:txBody>
-          <a:bodyPr wrap="square" lIns="27432" rIns="27432" tIns="9144" bIns="9144" anchor="ctr">
-            <a:spAutoFit/>
-          </a:bodyPr>
-          <a:lstStyle/>
-          <a:p>
-            <a:pPr algn="ctr">
-              <a:lnSpc>
-                <a:spcPct val="110000"/>
-              </a:lnSpc>
-            </a:pPr>
-            <a:r>
-              <a:rPr sz="1300" b="1">
-                <a:solidFill>
-                  <a:srgbClr val="8B0F1A"/>
-                </a:solidFill>
-                <a:latin typeface="微软雅黑"/>
-                <a:ea typeface="微软雅黑"/>
-                <a:cs typeface="微软雅黑"/>
-              </a:rPr>
-              <a:t>×</a:t>
-            </a:r>
-          </a:p>
-        </p:txBody>
-      </p:sp>
-      <p:sp>
-        <p:nvSpPr>
-          <p:cNvPr id="39" name="TextBox 38"/>
-          <p:cNvSpPr txBox="1"/>
-          <p:nvPr/>
-        </p:nvSpPr>
-        <p:spPr>
-          <a:xfrm>
-            <a:off x="1773936" y="4818888"/>
-            <a:ext cx="1737360" cy="182880"/>
-          </a:xfrm>
-          <a:prstGeom prst="rect">
-            <a:avLst/>
-          </a:prstGeom>
-          <a:noFill/>
-        </p:spPr>
-        <p:txBody>
-          <a:bodyPr wrap="square" lIns="27432" rIns="27432" tIns="9144" bIns="9144" anchor="ctr">
-            <a:spAutoFit/>
-          </a:bodyPr>
-          <a:lstStyle/>
-          <a:p>
-            <a:pPr algn="ctr">
-              <a:lnSpc>
-                <a:spcPct val="110000"/>
-              </a:lnSpc>
-            </a:pPr>
-            <a:r>
-              <a:rPr sz="750" b="0">
-                <a:solidFill>
-                  <a:srgbClr val="8B0F1A"/>
-                </a:solidFill>
-                <a:latin typeface="微软雅黑"/>
-                <a:ea typeface="微软雅黑"/>
-                <a:cs typeface="微软雅黑"/>
-              </a:rPr>
-              <a:t>无 CLI / API / 协议文档</a:t>
-            </a:r>
-          </a:p>
-        </p:txBody>
-      </p:sp>
-      <p:sp>
-        <p:nvSpPr>
-          <p:cNvPr id="40" name="Rounded Rectangle 39"/>
-          <p:cNvSpPr/>
-          <p:nvPr/>
-        </p:nvSpPr>
-        <p:spPr>
-          <a:xfrm>
-            <a:off x="4224528" y="3703320"/>
-            <a:ext cx="3694176" cy="2240280"/>
-          </a:xfrm>
-          <a:prstGeom prst="roundRect">
-            <a:avLst>
-              <a:gd name="adj" fmla="val 4000"/>
-            </a:avLst>
-          </a:prstGeom>
-          <a:solidFill>
-            <a:srgbClr val="FFFFFF"/>
-          </a:solidFill>
-          <a:ln w="12700">
-            <a:solidFill>
-              <a:srgbClr val="C9C9C2"/>
-            </a:solidFill>
-          </a:ln>
-          <a:effectLst/>
-        </p:spPr>
-        <p:style>
-          <a:lnRef idx="1">
-            <a:schemeClr val="accent1"/>
-          </a:lnRef>
-          <a:fillRef idx="3">
-            <a:schemeClr val="accent1"/>
-          </a:fillRef>
-          <a:effectRef idx="2">
-            <a:schemeClr val="accent1"/>
-          </a:effectRef>
-          <a:fontRef idx="minor">
-            <a:schemeClr val="lt1"/>
-          </a:fontRef>
-        </p:style>
-        <p:txBody>
-          <a:bodyPr rtlCol="0" anchor="ctr" wrap="square"/>
-          <a:lstStyle/>
-          <a:p>
-            <a:pPr algn="ctr"/>
-          </a:p>
-        </p:txBody>
-      </p:sp>
-      <p:sp>
-        <p:nvSpPr>
-          <p:cNvPr id="41" name="TextBox 40"/>
-          <p:cNvSpPr txBox="1"/>
-          <p:nvPr/>
-        </p:nvSpPr>
-        <p:spPr>
-          <a:xfrm>
-            <a:off x="4334256" y="3776472"/>
-            <a:ext cx="3474720" cy="274320"/>
-          </a:xfrm>
-          <a:prstGeom prst="rect">
-            <a:avLst/>
-          </a:prstGeom>
-          <a:noFill/>
-        </p:spPr>
-        <p:txBody>
-          <a:bodyPr wrap="square" lIns="27432" rIns="27432" tIns="9144" bIns="9144" anchor="ctr">
-            <a:spAutoFit/>
-          </a:bodyPr>
-          <a:lstStyle/>
-          <a:p>
-            <a:pPr algn="l">
-              <a:lnSpc>
-                <a:spcPct val="110000"/>
-              </a:lnSpc>
-            </a:pPr>
-            <a:r>
-              <a:rPr sz="1000" b="1">
-                <a:solidFill>
-                  <a:srgbClr val="141414"/>
-                </a:solidFill>
-                <a:latin typeface="微软雅黑"/>
-                <a:ea typeface="微软雅黑"/>
-                <a:cs typeface="微软雅黑"/>
-              </a:rPr>
-              <a:t>⑤ 授权绑定 MAC</a:t>
-            </a:r>
-          </a:p>
-        </p:txBody>
-      </p:sp>
-      <p:sp>
-        <p:nvSpPr>
-          <p:cNvPr id="42" name="TextBox 41"/>
-          <p:cNvSpPr txBox="1"/>
-          <p:nvPr/>
-        </p:nvSpPr>
-        <p:spPr>
-          <a:xfrm>
-            <a:off x="4334256" y="5166360"/>
-            <a:ext cx="3474720" cy="694944"/>
-          </a:xfrm>
-          <a:prstGeom prst="rect">
-            <a:avLst/>
-          </a:prstGeom>
-          <a:noFill/>
-        </p:spPr>
-        <p:txBody>
-          <a:bodyPr wrap="square" lIns="27432" rIns="27432" tIns="9144" bIns="9144" anchor="t">
-            <a:spAutoFit/>
-          </a:bodyPr>
-          <a:lstStyle/>
-          <a:p>
-            <a:pPr algn="l">
-              <a:lnSpc>
-                <a:spcPct val="110000"/>
-              </a:lnSpc>
-            </a:pPr>
-            <a:r>
-              <a:rPr sz="850" b="0">
-                <a:solidFill>
-                  <a:srgbClr val="5C5C56"/>
-                </a:solidFill>
-                <a:latin typeface="微软雅黑"/>
-                <a:ea typeface="微软雅黑"/>
-                <a:cs typeface="微软雅黑"/>
-              </a:rPr>
-              <a:t>许可证绑定网卡 MAC 与机器指纹，迁机、换网卡、重装系统即失效，无法随平台部署</a:t>
-            </a:r>
-          </a:p>
-        </p:txBody>
-      </p:sp>
-      <p:sp>
-        <p:nvSpPr>
-          <p:cNvPr id="43" name="Rounded Rectangle 42"/>
-          <p:cNvSpPr/>
-          <p:nvPr/>
-        </p:nvSpPr>
-        <p:spPr>
-          <a:xfrm>
-            <a:off x="4334256" y="4215383"/>
-            <a:ext cx="877824" cy="585216"/>
-          </a:xfrm>
-          <a:prstGeom prst="roundRect">
-            <a:avLst>
-              <a:gd name="adj" fmla="val 5000"/>
-            </a:avLst>
-          </a:prstGeom>
-          <a:solidFill>
-            <a:srgbClr val="ECECEC"/>
-          </a:solidFill>
-          <a:ln w="11430">
-            <a:solidFill>
-              <a:srgbClr val="C9C9C2"/>
-            </a:solidFill>
-          </a:ln>
-          <a:effectLst/>
-        </p:spPr>
-        <p:style>
-          <a:lnRef idx="1">
-            <a:schemeClr val="accent1"/>
-          </a:lnRef>
-          <a:fillRef idx="3">
-            <a:schemeClr val="accent1"/>
-          </a:fillRef>
-          <a:effectRef idx="2">
-            <a:schemeClr val="accent1"/>
-          </a:effectRef>
-          <a:fontRef idx="minor">
-            <a:schemeClr val="lt1"/>
-          </a:fontRef>
-        </p:style>
-        <p:txBody>
-          <a:bodyPr rtlCol="0" anchor="ctr" wrap="square" lIns="18288" rIns="18288" tIns="0" bIns="0"/>
-          <a:lstStyle/>
-          <a:p>
-            <a:pPr algn="ctr">
-              <a:lnSpc>
-                <a:spcPct val="100000"/>
-              </a:lnSpc>
-            </a:pPr>
-            <a:r>
-              <a:rPr sz="800" b="1">
-                <a:solidFill>
-                  <a:srgbClr val="141414"/>
-                </a:solidFill>
-                <a:latin typeface="微软雅黑"/>
-                <a:ea typeface="微软雅黑"/>
-                <a:cs typeface="微软雅黑"/>
-              </a:rPr>
-              <a:t>机器 A</a:t>
-            </a:r>
-          </a:p>
-          <a:p>
-            <a:pPr algn="ctr"/>
-            <a:r>
-              <a:rPr sz="750">
-                <a:solidFill>
-                  <a:srgbClr val="5C5C56"/>
-                </a:solidFill>
-                <a:latin typeface="微软雅黑"/>
-                <a:ea typeface="微软雅黑"/>
-                <a:cs typeface="微软雅黑"/>
-              </a:rPr>
-              <a:t>MAC A1</a:t>
-            </a:r>
-          </a:p>
-        </p:txBody>
-      </p:sp>
-      <p:sp>
-        <p:nvSpPr>
-          <p:cNvPr id="44" name="Rounded Rectangle 43"/>
-          <p:cNvSpPr/>
-          <p:nvPr/>
-        </p:nvSpPr>
-        <p:spPr>
-          <a:xfrm>
-            <a:off x="5522976" y="4251959"/>
-            <a:ext cx="621792" cy="512064"/>
-          </a:xfrm>
-          <a:prstGeom prst="roundRect">
-            <a:avLst>
-              <a:gd name="adj" fmla="val 5000"/>
-            </a:avLst>
-          </a:prstGeom>
-          <a:solidFill>
-            <a:srgbClr val="FFFFFF"/>
-          </a:solidFill>
-          <a:ln w="13970">
-            <a:solidFill>
-              <a:srgbClr val="8B0F1A"/>
-            </a:solidFill>
-          </a:ln>
-          <a:effectLst/>
-        </p:spPr>
-        <p:style>
-          <a:lnRef idx="1">
-            <a:schemeClr val="accent1"/>
-          </a:lnRef>
-          <a:fillRef idx="3">
-            <a:schemeClr val="accent1"/>
-          </a:fillRef>
-          <a:effectRef idx="2">
-            <a:schemeClr val="accent1"/>
-          </a:effectRef>
-          <a:fontRef idx="minor">
-            <a:schemeClr val="lt1"/>
-          </a:fontRef>
-        </p:style>
-        <p:txBody>
-          <a:bodyPr rtlCol="0" anchor="ctr" wrap="square" lIns="18288" rIns="18288" tIns="0" bIns="0"/>
-          <a:lstStyle/>
-          <a:p>
-            <a:pPr algn="ctr">
-              <a:lnSpc>
-                <a:spcPct val="100000"/>
-              </a:lnSpc>
-            </a:pPr>
-            <a:r>
-              <a:rPr sz="800" b="0">
-                <a:solidFill>
-                  <a:srgbClr val="8B0F1A"/>
-                </a:solidFill>
-                <a:latin typeface="微软雅黑"/>
-                <a:ea typeface="微软雅黑"/>
-                <a:cs typeface="微软雅黑"/>
-              </a:rPr>
-              <a:t>许可证</a:t>
-            </a:r>
-          </a:p>
-        </p:txBody>
-      </p:sp>
-      <p:cxnSp>
-        <p:nvCxnSpPr>
-          <p:cNvPr id="45" name="Connector 44"/>
-          <p:cNvCxnSpPr/>
-          <p:nvPr/>
-        </p:nvCxnSpPr>
-        <p:spPr>
-          <a:xfrm flipH="1">
-            <a:off x="5212080" y="4507992"/>
-            <a:ext cx="310896" cy="0"/>
-          </a:xfrm>
-          <a:prstGeom prst="line">
-            <a:avLst/>
-          </a:prstGeom>
-          <a:ln w="13970">
-            <a:solidFill>
-              <a:srgbClr val="5C5C56"/>
-            </a:solidFill>
-          </a:ln>
-        </p:spPr>
-        <p:style>
-          <a:lnRef idx="2">
-            <a:schemeClr val="accent1"/>
-          </a:lnRef>
-          <a:fillRef idx="0">
-            <a:schemeClr val="accent1"/>
-          </a:fillRef>
-          <a:effectRef idx="1">
-            <a:schemeClr val="accent1"/>
-          </a:effectRef>
-          <a:fontRef idx="minor">
-            <a:schemeClr val="tx1"/>
-          </a:fontRef>
-        </p:style>
-      </p:cxnSp>
-      <p:sp>
-        <p:nvSpPr>
-          <p:cNvPr id="46" name="Rounded Rectangle 45"/>
-          <p:cNvSpPr/>
-          <p:nvPr/>
-        </p:nvSpPr>
-        <p:spPr>
-          <a:xfrm>
-            <a:off x="6528816" y="4215383"/>
-            <a:ext cx="1005840" cy="585216"/>
-          </a:xfrm>
-          <a:prstGeom prst="roundRect">
-            <a:avLst>
-              <a:gd name="adj" fmla="val 5000"/>
-            </a:avLst>
-          </a:prstGeom>
-          <a:solidFill>
-            <a:srgbClr val="ECECEC"/>
-          </a:solidFill>
-          <a:ln w="11430">
-            <a:solidFill>
-              <a:srgbClr val="C9C9C2"/>
-            </a:solidFill>
-          </a:ln>
-          <a:effectLst/>
-        </p:spPr>
-        <p:style>
-          <a:lnRef idx="1">
-            <a:schemeClr val="accent1"/>
-          </a:lnRef>
-          <a:fillRef idx="3">
-            <a:schemeClr val="accent1"/>
-          </a:fillRef>
-          <a:effectRef idx="2">
-            <a:schemeClr val="accent1"/>
-          </a:effectRef>
-          <a:fontRef idx="minor">
-            <a:schemeClr val="lt1"/>
-          </a:fontRef>
-        </p:style>
-        <p:txBody>
-          <a:bodyPr rtlCol="0" anchor="ctr" wrap="square" lIns="18288" rIns="18288" tIns="0" bIns="0"/>
-          <a:lstStyle/>
-          <a:p>
-            <a:pPr algn="ctr">
-              <a:lnSpc>
-                <a:spcPct val="100000"/>
-              </a:lnSpc>
-            </a:pPr>
-            <a:r>
-              <a:rPr sz="800" b="1">
-                <a:solidFill>
-                  <a:srgbClr val="141414"/>
-                </a:solidFill>
-                <a:latin typeface="微软雅黑"/>
-                <a:ea typeface="微软雅黑"/>
-                <a:cs typeface="微软雅黑"/>
-              </a:rPr>
-              <a:t>机器 B</a:t>
-            </a:r>
-          </a:p>
-          <a:p>
-            <a:pPr algn="ctr"/>
-            <a:r>
-              <a:rPr sz="750">
-                <a:solidFill>
-                  <a:srgbClr val="5C5C56"/>
-                </a:solidFill>
-                <a:latin typeface="微软雅黑"/>
-                <a:ea typeface="微软雅黑"/>
-                <a:cs typeface="微软雅黑"/>
-              </a:rPr>
-              <a:t>MAC B2</a:t>
-            </a:r>
-          </a:p>
-        </p:txBody>
-      </p:sp>
-      <p:cxnSp>
-        <p:nvCxnSpPr>
-          <p:cNvPr id="47" name="Connector 46"/>
-          <p:cNvCxnSpPr/>
-          <p:nvPr/>
-        </p:nvCxnSpPr>
-        <p:spPr>
-          <a:xfrm>
-            <a:off x="6144768" y="4507992"/>
-            <a:ext cx="384048" cy="0"/>
-          </a:xfrm>
-          <a:prstGeom prst="line">
-            <a:avLst/>
-          </a:prstGeom>
-          <a:ln w="13970">
-            <a:solidFill>
-              <a:srgbClr val="5C5C56"/>
-            </a:solidFill>
-            <a:prstDash val="dash"/>
-          </a:ln>
-        </p:spPr>
-        <p:style>
-          <a:lnRef idx="2">
-            <a:schemeClr val="accent1"/>
-          </a:lnRef>
-          <a:fillRef idx="0">
-            <a:schemeClr val="accent1"/>
-          </a:fillRef>
-          <a:effectRef idx="1">
-            <a:schemeClr val="accent1"/>
-          </a:effectRef>
-          <a:fontRef idx="minor">
-            <a:schemeClr val="tx1"/>
-          </a:fontRef>
-        </p:style>
-      </p:cxnSp>
-      <p:sp>
-        <p:nvSpPr>
-          <p:cNvPr id="48" name="TextBox 47"/>
-          <p:cNvSpPr txBox="1"/>
-          <p:nvPr/>
-        </p:nvSpPr>
-        <p:spPr>
-          <a:xfrm>
-            <a:off x="6208776" y="4224527"/>
-            <a:ext cx="256032" cy="274320"/>
-          </a:xfrm>
-          <a:prstGeom prst="rect">
-            <a:avLst/>
-          </a:prstGeom>
-          <a:noFill/>
-        </p:spPr>
-        <p:txBody>
-          <a:bodyPr wrap="square" lIns="27432" rIns="27432" tIns="9144" bIns="9144" anchor="ctr">
-            <a:spAutoFit/>
-          </a:bodyPr>
-          <a:lstStyle/>
-          <a:p>
-            <a:pPr algn="ctr">
-              <a:lnSpc>
-                <a:spcPct val="110000"/>
-              </a:lnSpc>
-            </a:pPr>
-            <a:r>
-              <a:rPr sz="1200" b="1">
-                <a:solidFill>
-                  <a:srgbClr val="8B0F1A"/>
-                </a:solidFill>
-                <a:latin typeface="微软雅黑"/>
-                <a:ea typeface="微软雅黑"/>
-                <a:cs typeface="微软雅黑"/>
-              </a:rPr>
-              <a:t>×</a:t>
-            </a:r>
-          </a:p>
-        </p:txBody>
-      </p:sp>
-      <p:sp>
-        <p:nvSpPr>
-          <p:cNvPr id="49" name="TextBox 48"/>
-          <p:cNvSpPr txBox="1"/>
-          <p:nvPr/>
-        </p:nvSpPr>
-        <p:spPr>
-          <a:xfrm>
-            <a:off x="4974336" y="4818888"/>
-            <a:ext cx="786384" cy="182880"/>
-          </a:xfrm>
-          <a:prstGeom prst="rect">
-            <a:avLst/>
-          </a:prstGeom>
-          <a:noFill/>
-        </p:spPr>
-        <p:txBody>
-          <a:bodyPr wrap="square" lIns="27432" rIns="27432" tIns="9144" bIns="9144" anchor="ctr">
-            <a:spAutoFit/>
-          </a:bodyPr>
-          <a:lstStyle/>
-          <a:p>
-            <a:pPr algn="ctr">
-              <a:lnSpc>
-                <a:spcPct val="110000"/>
-              </a:lnSpc>
-            </a:pPr>
-            <a:r>
-              <a:rPr sz="750" b="0">
-                <a:solidFill>
-                  <a:srgbClr val="0F4C81"/>
-                </a:solidFill>
-                <a:latin typeface="微软雅黑"/>
-                <a:ea typeface="微软雅黑"/>
-                <a:cs typeface="微软雅黑"/>
-              </a:rPr>
-              <a:t>授权有效</a:t>
-            </a:r>
-          </a:p>
-        </p:txBody>
-      </p:sp>
-      <p:sp>
-        <p:nvSpPr>
-          <p:cNvPr id="50" name="TextBox 49"/>
-          <p:cNvSpPr txBox="1"/>
-          <p:nvPr/>
-        </p:nvSpPr>
-        <p:spPr>
-          <a:xfrm>
-            <a:off x="6181344" y="4818888"/>
-            <a:ext cx="1005840" cy="182880"/>
-          </a:xfrm>
-          <a:prstGeom prst="rect">
-            <a:avLst/>
-          </a:prstGeom>
-          <a:noFill/>
-        </p:spPr>
-        <p:txBody>
-          <a:bodyPr wrap="square" lIns="27432" rIns="27432" tIns="9144" bIns="9144" anchor="ctr">
-            <a:spAutoFit/>
-          </a:bodyPr>
-          <a:lstStyle/>
-          <a:p>
-            <a:pPr algn="ctr">
-              <a:lnSpc>
-                <a:spcPct val="110000"/>
-              </a:lnSpc>
-            </a:pPr>
-            <a:r>
-              <a:rPr sz="750" b="0">
-                <a:solidFill>
-                  <a:srgbClr val="8B0F1A"/>
-                </a:solidFill>
-                <a:latin typeface="微软雅黑"/>
-                <a:ea typeface="微软雅黑"/>
-                <a:cs typeface="微软雅黑"/>
-              </a:rPr>
-              <a:t>迁机即失效</a:t>
-            </a:r>
-          </a:p>
-        </p:txBody>
-      </p:sp>
-      <p:sp>
-        <p:nvSpPr>
-          <p:cNvPr id="51" name="Rounded Rectangle 50"/>
-          <p:cNvSpPr/>
-          <p:nvPr/>
-        </p:nvSpPr>
-        <p:spPr>
-          <a:xfrm>
-            <a:off x="8174736" y="3703320"/>
-            <a:ext cx="3694176" cy="2240280"/>
-          </a:xfrm>
-          <a:prstGeom prst="roundRect">
-            <a:avLst>
-              <a:gd name="adj" fmla="val 4000"/>
-            </a:avLst>
-          </a:prstGeom>
-          <a:solidFill>
-            <a:srgbClr val="FFFFFF"/>
-          </a:solidFill>
-          <a:ln w="12700">
-            <a:solidFill>
-              <a:srgbClr val="C9C9C2"/>
-            </a:solidFill>
-          </a:ln>
-          <a:effectLst/>
-        </p:spPr>
-        <p:style>
-          <a:lnRef idx="1">
-            <a:schemeClr val="accent1"/>
-          </a:lnRef>
-          <a:fillRef idx="3">
-            <a:schemeClr val="accent1"/>
-          </a:fillRef>
-          <a:effectRef idx="2">
-            <a:schemeClr val="accent1"/>
-          </a:effectRef>
-          <a:fontRef idx="minor">
-            <a:schemeClr val="lt1"/>
-          </a:fontRef>
-        </p:style>
-        <p:txBody>
-          <a:bodyPr rtlCol="0" anchor="ctr" wrap="square"/>
-          <a:lstStyle/>
-          <a:p>
-            <a:pPr algn="ctr"/>
-          </a:p>
-        </p:txBody>
-      </p:sp>
-      <p:sp>
-        <p:nvSpPr>
-          <p:cNvPr id="52" name="TextBox 51"/>
-          <p:cNvSpPr txBox="1"/>
-          <p:nvPr/>
-        </p:nvSpPr>
-        <p:spPr>
-          <a:xfrm>
-            <a:off x="8284463" y="3776472"/>
-            <a:ext cx="3474720" cy="274320"/>
-          </a:xfrm>
-          <a:prstGeom prst="rect">
-            <a:avLst/>
-          </a:prstGeom>
-          <a:noFill/>
-        </p:spPr>
-        <p:txBody>
-          <a:bodyPr wrap="square" lIns="27432" rIns="27432" tIns="9144" bIns="9144" anchor="ctr">
-            <a:spAutoFit/>
-          </a:bodyPr>
-          <a:lstStyle/>
-          <a:p>
-            <a:pPr algn="l">
-              <a:lnSpc>
-                <a:spcPct val="110000"/>
-              </a:lnSpc>
-            </a:pPr>
-            <a:r>
-              <a:rPr sz="1000" b="1">
-                <a:solidFill>
-                  <a:srgbClr val="141414"/>
-                </a:solidFill>
-                <a:latin typeface="微软雅黑"/>
-                <a:ea typeface="微软雅黑"/>
-                <a:cs typeface="微软雅黑"/>
-              </a:rPr>
-              <a:t>⑥ 合规不允许接入</a:t>
-            </a:r>
-          </a:p>
-        </p:txBody>
-      </p:sp>
-      <p:sp>
-        <p:nvSpPr>
-          <p:cNvPr id="53" name="TextBox 52"/>
-          <p:cNvSpPr txBox="1"/>
-          <p:nvPr/>
-        </p:nvSpPr>
-        <p:spPr>
-          <a:xfrm>
-            <a:off x="8284463" y="5166360"/>
-            <a:ext cx="3474720" cy="694944"/>
-          </a:xfrm>
-          <a:prstGeom prst="rect">
-            <a:avLst/>
-          </a:prstGeom>
-          <a:noFill/>
-        </p:spPr>
-        <p:txBody>
-          <a:bodyPr wrap="square" lIns="27432" rIns="27432" tIns="9144" bIns="9144" anchor="t">
-            <a:spAutoFit/>
-          </a:bodyPr>
-          <a:lstStyle/>
-          <a:p>
-            <a:pPr algn="l">
-              <a:lnSpc>
-                <a:spcPct val="110000"/>
-              </a:lnSpc>
-            </a:pPr>
-            <a:r>
-              <a:rPr sz="850" b="0">
-                <a:solidFill>
-                  <a:srgbClr val="5C5C56"/>
-                </a:solidFill>
-                <a:latin typeface="微软雅黑"/>
-                <a:ea typeface="微软雅黑"/>
-                <a:cs typeface="微软雅黑"/>
-              </a:rPr>
-              <a:t>无代码签名、驱动未认证、开放高危端口或缺少审计日志，入网审批不通过</a:t>
-            </a:r>
-          </a:p>
-        </p:txBody>
-      </p:sp>
-      <p:sp>
-        <p:nvSpPr>
-          <p:cNvPr id="54" name="Rectangle 53"/>
-          <p:cNvSpPr/>
-          <p:nvPr/>
-        </p:nvSpPr>
-        <p:spPr>
-          <a:xfrm>
-            <a:off x="8284463" y="4105655"/>
-            <a:ext cx="1188720" cy="274320"/>
-          </a:xfrm>
-          <a:prstGeom prst="rect">
-            <a:avLst/>
-          </a:prstGeom>
-          <a:solidFill>
-            <a:srgbClr val="ECECEC"/>
-          </a:solidFill>
-          <a:ln>
-            <a:noFill/>
-          </a:ln>
-          <a:effectLst/>
-        </p:spPr>
-        <p:style>
-          <a:lnRef idx="1">
-            <a:schemeClr val="accent1"/>
-          </a:lnRef>
-          <a:fillRef idx="3">
-            <a:schemeClr val="accent1"/>
-          </a:fillRef>
-          <a:effectRef idx="2">
-            <a:schemeClr val="accent1"/>
-          </a:effectRef>
-          <a:fontRef idx="minor">
-            <a:schemeClr val="lt1"/>
-          </a:fontRef>
-        </p:style>
-        <p:txBody>
-          <a:bodyPr rtlCol="0" anchor="ctr" wrap="square" lIns="18288" rIns="18288" tIns="0" bIns="0"/>
-          <a:lstStyle/>
-          <a:p>
-            <a:pPr algn="ctr">
-              <a:lnSpc>
-                <a:spcPct val="100000"/>
-              </a:lnSpc>
-            </a:pPr>
-            <a:r>
-              <a:rPr sz="750" b="0">
-                <a:solidFill>
-                  <a:srgbClr val="3A3A35"/>
-                </a:solidFill>
-                <a:latin typeface="微软雅黑"/>
-                <a:ea typeface="微软雅黑"/>
-                <a:cs typeface="微软雅黑"/>
-              </a:rPr>
-              <a:t>无签名驱动</a:t>
-            </a:r>
-          </a:p>
-        </p:txBody>
-      </p:sp>
-      <p:sp>
-        <p:nvSpPr>
-          <p:cNvPr id="55" name="Rectangle 54"/>
-          <p:cNvSpPr/>
-          <p:nvPr/>
-        </p:nvSpPr>
-        <p:spPr>
-          <a:xfrm>
-            <a:off x="8284463" y="4434840"/>
-            <a:ext cx="1188720" cy="274320"/>
-          </a:xfrm>
-          <a:prstGeom prst="rect">
-            <a:avLst/>
-          </a:prstGeom>
-          <a:solidFill>
-            <a:srgbClr val="ECECEC"/>
-          </a:solidFill>
-          <a:ln>
-            <a:noFill/>
-          </a:ln>
-          <a:effectLst/>
-        </p:spPr>
-        <p:style>
-          <a:lnRef idx="1">
-            <a:schemeClr val="accent1"/>
-          </a:lnRef>
-          <a:fillRef idx="3">
-            <a:schemeClr val="accent1"/>
-          </a:fillRef>
-          <a:effectRef idx="2">
-            <a:schemeClr val="accent1"/>
-          </a:effectRef>
-          <a:fontRef idx="minor">
-            <a:schemeClr val="lt1"/>
-          </a:fontRef>
-        </p:style>
-        <p:txBody>
-          <a:bodyPr rtlCol="0" anchor="ctr" wrap="square" lIns="18288" rIns="18288" tIns="0" bIns="0"/>
-          <a:lstStyle/>
-          <a:p>
-            <a:pPr algn="ctr">
-              <a:lnSpc>
-                <a:spcPct val="100000"/>
-              </a:lnSpc>
-            </a:pPr>
-            <a:r>
-              <a:rPr sz="750" b="0">
-                <a:solidFill>
-                  <a:srgbClr val="3A3A35"/>
-                </a:solidFill>
-                <a:latin typeface="微软雅黑"/>
-                <a:ea typeface="微软雅黑"/>
-                <a:cs typeface="微软雅黑"/>
-              </a:rPr>
-              <a:t>开放高危端口</a:t>
-            </a:r>
-          </a:p>
-        </p:txBody>
-      </p:sp>
-      <p:sp>
-        <p:nvSpPr>
-          <p:cNvPr id="56" name="Rectangle 55"/>
-          <p:cNvSpPr/>
-          <p:nvPr/>
-        </p:nvSpPr>
-        <p:spPr>
-          <a:xfrm>
-            <a:off x="8284463" y="4764023"/>
-            <a:ext cx="1188720" cy="274320"/>
-          </a:xfrm>
-          <a:prstGeom prst="rect">
-            <a:avLst/>
-          </a:prstGeom>
-          <a:solidFill>
-            <a:srgbClr val="ECECEC"/>
-          </a:solidFill>
-          <a:ln>
-            <a:noFill/>
-          </a:ln>
-          <a:effectLst/>
-        </p:spPr>
-        <p:style>
-          <a:lnRef idx="1">
-            <a:schemeClr val="accent1"/>
-          </a:lnRef>
-          <a:fillRef idx="3">
-            <a:schemeClr val="accent1"/>
-          </a:fillRef>
-          <a:effectRef idx="2">
-            <a:schemeClr val="accent1"/>
-          </a:effectRef>
-          <a:fontRef idx="minor">
-            <a:schemeClr val="lt1"/>
-          </a:fontRef>
-        </p:style>
-        <p:txBody>
-          <a:bodyPr rtlCol="0" anchor="ctr" wrap="square" lIns="18288" rIns="18288" tIns="0" bIns="0"/>
-          <a:lstStyle/>
-          <a:p>
-            <a:pPr algn="ctr">
-              <a:lnSpc>
-                <a:spcPct val="100000"/>
-              </a:lnSpc>
-            </a:pPr>
-            <a:r>
-              <a:rPr sz="750" b="0">
-                <a:solidFill>
-                  <a:srgbClr val="3A3A35"/>
-                </a:solidFill>
-                <a:latin typeface="微软雅黑"/>
-                <a:ea typeface="微软雅黑"/>
-                <a:cs typeface="微软雅黑"/>
-              </a:rPr>
-              <a:t>无审计日志</a:t>
-            </a:r>
-          </a:p>
-        </p:txBody>
-      </p:sp>
-      <p:sp>
-        <p:nvSpPr>
-          <p:cNvPr id="57" name="Hexagon 56"/>
-          <p:cNvSpPr/>
-          <p:nvPr/>
-        </p:nvSpPr>
-        <p:spPr>
-          <a:xfrm>
-            <a:off x="10131551" y="4306824"/>
-            <a:ext cx="1325880" cy="640080"/>
-          </a:xfrm>
-          <a:prstGeom prst="hexagon">
-            <a:avLst/>
-          </a:prstGeom>
-          <a:solidFill>
-            <a:srgbClr val="2B2B28"/>
-          </a:solidFill>
-          <a:ln>
-            <a:noFill/>
-          </a:ln>
-          <a:effectLst/>
-        </p:spPr>
-        <p:style>
-          <a:lnRef idx="1">
-            <a:schemeClr val="accent1"/>
-          </a:lnRef>
-          <a:fillRef idx="3">
-            <a:schemeClr val="accent1"/>
-          </a:fillRef>
-          <a:effectRef idx="2">
-            <a:schemeClr val="accent1"/>
-          </a:effectRef>
-          <a:fontRef idx="minor">
-            <a:schemeClr val="lt1"/>
-          </a:fontRef>
-        </p:style>
-        <p:txBody>
-          <a:bodyPr rtlCol="0" anchor="ctr" lIns="18288" rIns="18288" tIns="0" bIns="0"/>
-          <a:lstStyle/>
-          <a:p>
-            <a:pPr algn="ctr">
-              <a:lnSpc>
-                <a:spcPct val="100000"/>
-              </a:lnSpc>
-            </a:pPr>
-            <a:r>
-              <a:rPr sz="850" b="1">
-                <a:solidFill>
-                  <a:srgbClr val="FFFFFF"/>
-                </a:solidFill>
-                <a:latin typeface="微软雅黑"/>
-                <a:ea typeface="微软雅黑"/>
-                <a:cs typeface="微软雅黑"/>
-              </a:rPr>
-              <a:t>IT 安全策略</a:t>
-            </a:r>
-          </a:p>
-        </p:txBody>
-      </p:sp>
-      <p:cxnSp>
-        <p:nvCxnSpPr>
-          <p:cNvPr id="58" name="Connector 57"/>
-          <p:cNvCxnSpPr/>
-          <p:nvPr/>
-        </p:nvCxnSpPr>
-        <p:spPr>
-          <a:xfrm>
-            <a:off x="9473184" y="4562856"/>
-            <a:ext cx="658367" cy="0"/>
-          </a:xfrm>
-          <a:prstGeom prst="line">
-            <a:avLst/>
-          </a:prstGeom>
-          <a:ln w="12700">
-            <a:solidFill>
-              <a:srgbClr val="5C5C56"/>
-            </a:solidFill>
-            <a:prstDash val="dash"/>
-          </a:ln>
-        </p:spPr>
-        <p:style>
-          <a:lnRef idx="2">
-            <a:schemeClr val="accent1"/>
-          </a:lnRef>
-          <a:fillRef idx="0">
-            <a:schemeClr val="accent1"/>
-          </a:fillRef>
-          <a:effectRef idx="1">
-            <a:schemeClr val="accent1"/>
-          </a:effectRef>
-          <a:fontRef idx="minor">
-            <a:schemeClr val="tx1"/>
-          </a:fontRef>
-        </p:style>
-      </p:cxnSp>
-      <p:sp>
-        <p:nvSpPr>
-          <p:cNvPr id="59" name="TextBox 58"/>
-          <p:cNvSpPr txBox="1"/>
-          <p:nvPr/>
-        </p:nvSpPr>
-        <p:spPr>
-          <a:xfrm>
-            <a:off x="9674351" y="4297679"/>
-            <a:ext cx="256032" cy="274320"/>
-          </a:xfrm>
-          <a:prstGeom prst="rect">
-            <a:avLst/>
-          </a:prstGeom>
-          <a:noFill/>
-        </p:spPr>
-        <p:txBody>
-          <a:bodyPr wrap="square" lIns="27432" rIns="27432" tIns="9144" bIns="9144" anchor="ctr">
-            <a:spAutoFit/>
-          </a:bodyPr>
-          <a:lstStyle/>
-          <a:p>
-            <a:pPr algn="ctr">
-              <a:lnSpc>
-                <a:spcPct val="110000"/>
-              </a:lnSpc>
-            </a:pPr>
-            <a:r>
-              <a:rPr sz="1300" b="1">
-                <a:solidFill>
-                  <a:srgbClr val="8B0F1A"/>
-                </a:solidFill>
-                <a:latin typeface="微软雅黑"/>
-                <a:ea typeface="微软雅黑"/>
-                <a:cs typeface="微软雅黑"/>
-              </a:rPr>
-              <a:t>×</a:t>
-            </a:r>
-          </a:p>
-        </p:txBody>
-      </p:sp>
-      <p:sp>
-        <p:nvSpPr>
-          <p:cNvPr id="60" name="Rectangle 59"/>
+          <p:cNvPr id="59" name="Rectangle 58"/>
           <p:cNvSpPr/>
           <p:nvPr/>
         </p:nvSpPr>
@@ -7859,14 +9901,14 @@
       </p:sp>
       <p:sp>
         <p:nvSpPr>
-          <p:cNvPr id="61" name="TextBox 60"/>
+          <p:cNvPr id="60" name="TextBox 59"/>
           <p:cNvSpPr txBox="1"/>
           <p:nvPr/>
         </p:nvSpPr>
         <p:spPr>
           <a:xfrm>
             <a:off x="274320" y="6446520"/>
-            <a:ext cx="6675120" cy="274320"/>
+            <a:ext cx="6858000" cy="274320"/>
           </a:xfrm>
           <a:prstGeom prst="rect">
             <a:avLst/>
@@ -7893,21 +9935,21 @@
                 <a:ea typeface="微软雅黑"/>
                 <a:cs typeface="微软雅黑"/>
               </a:rPr>
-              <a:t>① ② 属网络可达性，③ 属运行环境，④ 属接口能力，⑤ ⑥ 属授权与合规</a:t>
-            </a:r>
-          </a:p>
-        </p:txBody>
-      </p:sp>
-      <p:sp>
-        <p:nvSpPr>
-          <p:cNvPr id="62" name="TextBox 61"/>
+              <a:t>① ② ③ 属网络与链路，④ ⑤ 属接口能力，⑥ 属运行环境</a:t>
+            </a:r>
+          </a:p>
+        </p:txBody>
+      </p:sp>
+      <p:sp>
+        <p:nvSpPr>
+          <p:cNvPr id="61" name="TextBox 60"/>
           <p:cNvSpPr txBox="1"/>
           <p:nvPr/>
         </p:nvSpPr>
         <p:spPr>
           <a:xfrm>
-            <a:off x="7040880" y="6446520"/>
-            <a:ext cx="4873752" cy="274320"/>
+            <a:off x="7223760" y="6446520"/>
+            <a:ext cx="4690872" cy="274320"/>
           </a:xfrm>
           <a:prstGeom prst="rect">
             <a:avLst/>
@@ -7934,7 +9976,7 @@
                 <a:ea typeface="微软雅黑"/>
                 <a:cs typeface="微软雅黑"/>
               </a:rPr>
-              <a:t>除策略类问题可申请例外外，其余多需在我方侧以代理、旁路或协议适配方式绕开</a:t>
+              <a:t>红线为该格阻断发生的具体位置</a:t>
             </a:r>
           </a:p>
         </p:txBody>
@@ -7993,6 +10035,3124 @@
                 <a:ea typeface="微软雅黑"/>
                 <a:cs typeface="微软雅黑"/>
               </a:rPr>
+              <a:t>问题背景（三）· 阻断机理图解 ⑦–⑫</a:t>
+            </a:r>
+          </a:p>
+        </p:txBody>
+      </p:sp>
+      <p:sp>
+        <p:nvSpPr>
+          <p:cNvPr id="3" name="TextBox 2"/>
+          <p:cNvSpPr txBox="1"/>
+          <p:nvPr/>
+        </p:nvSpPr>
+        <p:spPr>
+          <a:xfrm>
+            <a:off x="274320" y="658368"/>
+            <a:ext cx="11155680" cy="310896"/>
+          </a:xfrm>
+          <a:prstGeom prst="rect">
+            <a:avLst/>
+          </a:prstGeom>
+          <a:noFill/>
+        </p:spPr>
+        <p:txBody>
+          <a:bodyPr wrap="square" lIns="27432" rIns="27432" tIns="9144" bIns="9144" anchor="ctr">
+            <a:spAutoFit/>
+          </a:bodyPr>
+          <a:lstStyle/>
+          <a:p>
+            <a:pPr algn="l">
+              <a:lnSpc>
+                <a:spcPct val="110000"/>
+              </a:lnSpc>
+            </a:pPr>
+            <a:r>
+              <a:rPr sz="1050" b="0">
+                <a:solidFill>
+                  <a:srgbClr val="5C5C56"/>
+                </a:solidFill>
+                <a:latin typeface="微软雅黑"/>
+                <a:ea typeface="微软雅黑"/>
+                <a:cs typeface="微软雅黑"/>
+              </a:rPr>
+              <a:t>运行环境的第二类冲突、人工依赖、授权与合规：能连上也未必跑得起来、跑得久、跑得起量</a:t>
+            </a:r>
+          </a:p>
+        </p:txBody>
+      </p:sp>
+      <p:sp>
+        <p:nvSpPr>
+          <p:cNvPr id="4" name="Rectangle 3"/>
+          <p:cNvSpPr/>
+          <p:nvPr/>
+        </p:nvSpPr>
+        <p:spPr>
+          <a:xfrm>
+            <a:off x="274320" y="987552"/>
+            <a:ext cx="11640312" cy="25603"/>
+          </a:xfrm>
+          <a:prstGeom prst="rect">
+            <a:avLst/>
+          </a:prstGeom>
+          <a:solidFill>
+            <a:srgbClr val="8B0F1A"/>
+          </a:solidFill>
+          <a:ln>
+            <a:noFill/>
+          </a:ln>
+          <a:effectLst/>
+        </p:spPr>
+        <p:style>
+          <a:lnRef idx="1">
+            <a:schemeClr val="accent1"/>
+          </a:lnRef>
+          <a:fillRef idx="3">
+            <a:schemeClr val="accent1"/>
+          </a:fillRef>
+          <a:effectRef idx="2">
+            <a:schemeClr val="accent1"/>
+          </a:effectRef>
+          <a:fontRef idx="minor">
+            <a:schemeClr val="lt1"/>
+          </a:fontRef>
+        </p:style>
+        <p:txBody>
+          <a:bodyPr rtlCol="0" anchor="ctr" wrap="square"/>
+          <a:lstStyle/>
+          <a:p>
+            <a:pPr algn="ctr"/>
+          </a:p>
+        </p:txBody>
+      </p:sp>
+      <p:sp>
+        <p:nvSpPr>
+          <p:cNvPr id="5" name="Rounded Rectangle 4"/>
+          <p:cNvSpPr/>
+          <p:nvPr/>
+        </p:nvSpPr>
+        <p:spPr>
+          <a:xfrm>
+            <a:off x="274320" y="1371600"/>
+            <a:ext cx="3694176" cy="2240280"/>
+          </a:xfrm>
+          <a:prstGeom prst="roundRect">
+            <a:avLst>
+              <a:gd name="adj" fmla="val 4000"/>
+            </a:avLst>
+          </a:prstGeom>
+          <a:solidFill>
+            <a:srgbClr val="FFFFFF"/>
+          </a:solidFill>
+          <a:ln w="12700">
+            <a:solidFill>
+              <a:srgbClr val="C9C9C2"/>
+            </a:solidFill>
+          </a:ln>
+          <a:effectLst/>
+        </p:spPr>
+        <p:style>
+          <a:lnRef idx="1">
+            <a:schemeClr val="accent1"/>
+          </a:lnRef>
+          <a:fillRef idx="3">
+            <a:schemeClr val="accent1"/>
+          </a:fillRef>
+          <a:effectRef idx="2">
+            <a:schemeClr val="accent1"/>
+          </a:effectRef>
+          <a:fontRef idx="minor">
+            <a:schemeClr val="lt1"/>
+          </a:fontRef>
+        </p:style>
+        <p:txBody>
+          <a:bodyPr rtlCol="0" anchor="ctr" wrap="square"/>
+          <a:lstStyle/>
+          <a:p>
+            <a:pPr algn="ctr"/>
+          </a:p>
+        </p:txBody>
+      </p:sp>
+      <p:sp>
+        <p:nvSpPr>
+          <p:cNvPr id="6" name="TextBox 5"/>
+          <p:cNvSpPr txBox="1"/>
+          <p:nvPr/>
+        </p:nvSpPr>
+        <p:spPr>
+          <a:xfrm>
+            <a:off x="384048" y="1444752"/>
+            <a:ext cx="3474720" cy="274320"/>
+          </a:xfrm>
+          <a:prstGeom prst="rect">
+            <a:avLst/>
+          </a:prstGeom>
+          <a:noFill/>
+        </p:spPr>
+        <p:txBody>
+          <a:bodyPr wrap="square" lIns="27432" rIns="27432" tIns="9144" bIns="9144" anchor="ctr">
+            <a:spAutoFit/>
+          </a:bodyPr>
+          <a:lstStyle/>
+          <a:p>
+            <a:pPr algn="l">
+              <a:lnSpc>
+                <a:spcPct val="110000"/>
+              </a:lnSpc>
+            </a:pPr>
+            <a:r>
+              <a:rPr sz="1000" b="1">
+                <a:solidFill>
+                  <a:srgbClr val="141414"/>
+                </a:solidFill>
+                <a:latin typeface="微软雅黑"/>
+                <a:ea typeface="微软雅黑"/>
+                <a:cs typeface="微软雅黑"/>
+              </a:rPr>
+              <a:t>⑦ 系统与位数锁定</a:t>
+            </a:r>
+          </a:p>
+        </p:txBody>
+      </p:sp>
+      <p:sp>
+        <p:nvSpPr>
+          <p:cNvPr id="7" name="TextBox 6"/>
+          <p:cNvSpPr txBox="1"/>
+          <p:nvPr/>
+        </p:nvSpPr>
+        <p:spPr>
+          <a:xfrm>
+            <a:off x="384048" y="2834640"/>
+            <a:ext cx="3474720" cy="694944"/>
+          </a:xfrm>
+          <a:prstGeom prst="rect">
+            <a:avLst/>
+          </a:prstGeom>
+          <a:noFill/>
+        </p:spPr>
+        <p:txBody>
+          <a:bodyPr wrap="square" lIns="27432" rIns="27432" tIns="9144" bIns="9144" anchor="t">
+            <a:spAutoFit/>
+          </a:bodyPr>
+          <a:lstStyle/>
+          <a:p>
+            <a:pPr algn="l">
+              <a:lnSpc>
+                <a:spcPct val="110000"/>
+              </a:lnSpc>
+            </a:pPr>
+            <a:r>
+              <a:rPr sz="850" b="0">
+                <a:solidFill>
+                  <a:srgbClr val="5C5C56"/>
+                </a:solidFill>
+                <a:latin typeface="微软雅黑"/>
+                <a:ea typeface="微软雅黑"/>
+                <a:cs typeface="微软雅黑"/>
+              </a:rPr>
+              <a:t>软件只支持 Win7 / 32 位或特定内核版本，与 Runner 的 Win10 / 64 位环境不兼容</a:t>
+            </a:r>
+          </a:p>
+        </p:txBody>
+      </p:sp>
+      <p:sp>
+        <p:nvSpPr>
+          <p:cNvPr id="8" name="Rounded Rectangle 7"/>
+          <p:cNvSpPr/>
+          <p:nvPr/>
+        </p:nvSpPr>
+        <p:spPr>
+          <a:xfrm>
+            <a:off x="384048" y="1920240"/>
+            <a:ext cx="1298448" cy="502920"/>
+          </a:xfrm>
+          <a:prstGeom prst="roundRect">
+            <a:avLst>
+              <a:gd name="adj" fmla="val 5000"/>
+            </a:avLst>
+          </a:prstGeom>
+          <a:solidFill>
+            <a:srgbClr val="ECECEC"/>
+          </a:solidFill>
+          <a:ln w="11430">
+            <a:solidFill>
+              <a:srgbClr val="C9C9C2"/>
+            </a:solidFill>
+          </a:ln>
+          <a:effectLst/>
+        </p:spPr>
+        <p:style>
+          <a:lnRef idx="1">
+            <a:schemeClr val="accent1"/>
+          </a:lnRef>
+          <a:fillRef idx="3">
+            <a:schemeClr val="accent1"/>
+          </a:fillRef>
+          <a:effectRef idx="2">
+            <a:schemeClr val="accent1"/>
+          </a:effectRef>
+          <a:fontRef idx="minor">
+            <a:schemeClr val="lt1"/>
+          </a:fontRef>
+        </p:style>
+        <p:txBody>
+          <a:bodyPr rtlCol="0" anchor="ctr" wrap="square" lIns="18288" rIns="18288" tIns="0" bIns="0"/>
+          <a:lstStyle/>
+          <a:p>
+            <a:pPr algn="ctr">
+              <a:lnSpc>
+                <a:spcPct val="100000"/>
+              </a:lnSpc>
+            </a:pPr>
+            <a:r>
+              <a:rPr sz="800" b="0">
+                <a:solidFill>
+                  <a:srgbClr val="141414"/>
+                </a:solidFill>
+                <a:latin typeface="微软雅黑"/>
+                <a:ea typeface="微软雅黑"/>
+                <a:cs typeface="微软雅黑"/>
+              </a:rPr>
+              <a:t>Win7 / 32 位</a:t>
+            </a:r>
+          </a:p>
+        </p:txBody>
+      </p:sp>
+      <p:cxnSp>
+        <p:nvCxnSpPr>
+          <p:cNvPr id="9" name="Connector 8"/>
+          <p:cNvCxnSpPr/>
+          <p:nvPr/>
+        </p:nvCxnSpPr>
+        <p:spPr>
+          <a:xfrm>
+            <a:off x="1682495" y="2167128"/>
+            <a:ext cx="548641" cy="0"/>
+          </a:xfrm>
+          <a:prstGeom prst="line">
+            <a:avLst/>
+          </a:prstGeom>
+          <a:ln w="12700">
+            <a:solidFill>
+              <a:srgbClr val="5C5C56"/>
+            </a:solidFill>
+            <a:prstDash val="dash"/>
+          </a:ln>
+        </p:spPr>
+        <p:style>
+          <a:lnRef idx="2">
+            <a:schemeClr val="accent1"/>
+          </a:lnRef>
+          <a:fillRef idx="0">
+            <a:schemeClr val="accent1"/>
+          </a:fillRef>
+          <a:effectRef idx="1">
+            <a:schemeClr val="accent1"/>
+          </a:effectRef>
+          <a:fontRef idx="minor">
+            <a:schemeClr val="tx1"/>
+          </a:fontRef>
+        </p:style>
+      </p:cxnSp>
+      <p:sp>
+        <p:nvSpPr>
+          <p:cNvPr id="10" name="Rounded Rectangle 9"/>
+          <p:cNvSpPr/>
+          <p:nvPr/>
+        </p:nvSpPr>
+        <p:spPr>
+          <a:xfrm>
+            <a:off x="2231136" y="1920240"/>
+            <a:ext cx="1481328" cy="502920"/>
+          </a:xfrm>
+          <a:prstGeom prst="roundRect">
+            <a:avLst>
+              <a:gd name="adj" fmla="val 5000"/>
+            </a:avLst>
+          </a:prstGeom>
+          <a:solidFill>
+            <a:srgbClr val="FFFFFF"/>
+          </a:solidFill>
+          <a:ln w="12700">
+            <a:solidFill>
+              <a:srgbClr val="8B0F1A"/>
+            </a:solidFill>
+          </a:ln>
+          <a:effectLst/>
+        </p:spPr>
+        <p:style>
+          <a:lnRef idx="1">
+            <a:schemeClr val="accent1"/>
+          </a:lnRef>
+          <a:fillRef idx="3">
+            <a:schemeClr val="accent1"/>
+          </a:fillRef>
+          <a:effectRef idx="2">
+            <a:schemeClr val="accent1"/>
+          </a:effectRef>
+          <a:fontRef idx="minor">
+            <a:schemeClr val="lt1"/>
+          </a:fontRef>
+        </p:style>
+        <p:txBody>
+          <a:bodyPr rtlCol="0" anchor="ctr" wrap="square" lIns="18288" rIns="18288" tIns="0" bIns="0"/>
+          <a:lstStyle/>
+          <a:p>
+            <a:pPr algn="ctr">
+              <a:lnSpc>
+                <a:spcPct val="100000"/>
+              </a:lnSpc>
+            </a:pPr>
+            <a:r>
+              <a:rPr sz="800" b="0">
+                <a:solidFill>
+                  <a:srgbClr val="141414"/>
+                </a:solidFill>
+                <a:latin typeface="微软雅黑"/>
+                <a:ea typeface="微软雅黑"/>
+                <a:cs typeface="微软雅黑"/>
+              </a:rPr>
+              <a:t>Win10 / 64 位</a:t>
+            </a:r>
+          </a:p>
+        </p:txBody>
+      </p:sp>
+      <p:sp>
+        <p:nvSpPr>
+          <p:cNvPr id="11" name="TextBox 10"/>
+          <p:cNvSpPr txBox="1"/>
+          <p:nvPr/>
+        </p:nvSpPr>
+        <p:spPr>
+          <a:xfrm>
+            <a:off x="1828800" y="1892807"/>
+            <a:ext cx="256032" cy="274320"/>
+          </a:xfrm>
+          <a:prstGeom prst="rect">
+            <a:avLst/>
+          </a:prstGeom>
+          <a:noFill/>
+        </p:spPr>
+        <p:txBody>
+          <a:bodyPr wrap="square" lIns="27432" rIns="27432" tIns="9144" bIns="9144" anchor="ctr">
+            <a:spAutoFit/>
+          </a:bodyPr>
+          <a:lstStyle/>
+          <a:p>
+            <a:pPr algn="ctr">
+              <a:lnSpc>
+                <a:spcPct val="110000"/>
+              </a:lnSpc>
+            </a:pPr>
+            <a:r>
+              <a:rPr sz="1400" b="1">
+                <a:solidFill>
+                  <a:srgbClr val="8B0F1A"/>
+                </a:solidFill>
+                <a:latin typeface="微软雅黑"/>
+                <a:ea typeface="微软雅黑"/>
+                <a:cs typeface="微软雅黑"/>
+              </a:rPr>
+              <a:t>×</a:t>
+            </a:r>
+          </a:p>
+        </p:txBody>
+      </p:sp>
+      <p:sp>
+        <p:nvSpPr>
+          <p:cNvPr id="12" name="TextBox 11"/>
+          <p:cNvSpPr txBox="1"/>
+          <p:nvPr/>
+        </p:nvSpPr>
+        <p:spPr>
+          <a:xfrm>
+            <a:off x="1444751" y="2468880"/>
+            <a:ext cx="1325880" cy="182880"/>
+          </a:xfrm>
+          <a:prstGeom prst="rect">
+            <a:avLst/>
+          </a:prstGeom>
+          <a:noFill/>
+        </p:spPr>
+        <p:txBody>
+          <a:bodyPr wrap="square" lIns="27432" rIns="27432" tIns="9144" bIns="9144" anchor="ctr">
+            <a:spAutoFit/>
+          </a:bodyPr>
+          <a:lstStyle/>
+          <a:p>
+            <a:pPr algn="ctr">
+              <a:lnSpc>
+                <a:spcPct val="110000"/>
+              </a:lnSpc>
+            </a:pPr>
+            <a:r>
+              <a:rPr sz="750" b="0">
+                <a:solidFill>
+                  <a:srgbClr val="8B0F1A"/>
+                </a:solidFill>
+                <a:latin typeface="微软雅黑"/>
+                <a:ea typeface="微软雅黑"/>
+                <a:cs typeface="微软雅黑"/>
+              </a:rPr>
+              <a:t>运行时环境冲突</a:t>
+            </a:r>
+          </a:p>
+        </p:txBody>
+      </p:sp>
+      <p:sp>
+        <p:nvSpPr>
+          <p:cNvPr id="13" name="Rounded Rectangle 12"/>
+          <p:cNvSpPr/>
+          <p:nvPr/>
+        </p:nvSpPr>
+        <p:spPr>
+          <a:xfrm>
+            <a:off x="4224528" y="1371600"/>
+            <a:ext cx="3694176" cy="2240280"/>
+          </a:xfrm>
+          <a:prstGeom prst="roundRect">
+            <a:avLst>
+              <a:gd name="adj" fmla="val 4000"/>
+            </a:avLst>
+          </a:prstGeom>
+          <a:solidFill>
+            <a:srgbClr val="FFFFFF"/>
+          </a:solidFill>
+          <a:ln w="12700">
+            <a:solidFill>
+              <a:srgbClr val="C9C9C2"/>
+            </a:solidFill>
+          </a:ln>
+          <a:effectLst/>
+        </p:spPr>
+        <p:style>
+          <a:lnRef idx="1">
+            <a:schemeClr val="accent1"/>
+          </a:lnRef>
+          <a:fillRef idx="3">
+            <a:schemeClr val="accent1"/>
+          </a:fillRef>
+          <a:effectRef idx="2">
+            <a:schemeClr val="accent1"/>
+          </a:effectRef>
+          <a:fontRef idx="minor">
+            <a:schemeClr val="lt1"/>
+          </a:fontRef>
+        </p:style>
+        <p:txBody>
+          <a:bodyPr rtlCol="0" anchor="ctr" wrap="square"/>
+          <a:lstStyle/>
+          <a:p>
+            <a:pPr algn="ctr"/>
+          </a:p>
+        </p:txBody>
+      </p:sp>
+      <p:sp>
+        <p:nvSpPr>
+          <p:cNvPr id="14" name="TextBox 13"/>
+          <p:cNvSpPr txBox="1"/>
+          <p:nvPr/>
+        </p:nvSpPr>
+        <p:spPr>
+          <a:xfrm>
+            <a:off x="4334256" y="1444752"/>
+            <a:ext cx="3474720" cy="274320"/>
+          </a:xfrm>
+          <a:prstGeom prst="rect">
+            <a:avLst/>
+          </a:prstGeom>
+          <a:noFill/>
+        </p:spPr>
+        <p:txBody>
+          <a:bodyPr wrap="square" lIns="27432" rIns="27432" tIns="9144" bIns="9144" anchor="ctr">
+            <a:spAutoFit/>
+          </a:bodyPr>
+          <a:lstStyle/>
+          <a:p>
+            <a:pPr algn="l">
+              <a:lnSpc>
+                <a:spcPct val="110000"/>
+              </a:lnSpc>
+            </a:pPr>
+            <a:r>
+              <a:rPr sz="1000" b="1">
+                <a:solidFill>
+                  <a:srgbClr val="141414"/>
+                </a:solidFill>
+                <a:latin typeface="微软雅黑"/>
+                <a:ea typeface="微软雅黑"/>
+                <a:cs typeface="微软雅黑"/>
+              </a:rPr>
+              <a:t>⑧ 必须人工交互</a:t>
+            </a:r>
+          </a:p>
+        </p:txBody>
+      </p:sp>
+      <p:sp>
+        <p:nvSpPr>
+          <p:cNvPr id="15" name="TextBox 14"/>
+          <p:cNvSpPr txBox="1"/>
+          <p:nvPr/>
+        </p:nvSpPr>
+        <p:spPr>
+          <a:xfrm>
+            <a:off x="4334256" y="2834640"/>
+            <a:ext cx="3474720" cy="694944"/>
+          </a:xfrm>
+          <a:prstGeom prst="rect">
+            <a:avLst/>
+          </a:prstGeom>
+          <a:noFill/>
+        </p:spPr>
+        <p:txBody>
+          <a:bodyPr wrap="square" lIns="27432" rIns="27432" tIns="9144" bIns="9144" anchor="t">
+            <a:spAutoFit/>
+          </a:bodyPr>
+          <a:lstStyle/>
+          <a:p>
+            <a:pPr algn="l">
+              <a:lnSpc>
+                <a:spcPct val="110000"/>
+              </a:lnSpc>
+            </a:pPr>
+            <a:r>
+              <a:rPr sz="850" b="0">
+                <a:solidFill>
+                  <a:srgbClr val="5C5C56"/>
+                </a:solidFill>
+                <a:latin typeface="微软雅黑"/>
+                <a:ea typeface="微软雅黑"/>
+                <a:cs typeface="微软雅黑"/>
+              </a:rPr>
+              <a:t>软件无批处理模式，必须人工点击确认；无法作为服务常驻，产线做不到无人值守</a:t>
+            </a:r>
+          </a:p>
+        </p:txBody>
+      </p:sp>
+      <p:sp>
+        <p:nvSpPr>
+          <p:cNvPr id="16" name="Rounded Rectangle 15"/>
+          <p:cNvSpPr/>
+          <p:nvPr/>
+        </p:nvSpPr>
+        <p:spPr>
+          <a:xfrm>
+            <a:off x="4334256" y="1920240"/>
+            <a:ext cx="1389888" cy="502920"/>
+          </a:xfrm>
+          <a:prstGeom prst="roundRect">
+            <a:avLst>
+              <a:gd name="adj" fmla="val 5000"/>
+            </a:avLst>
+          </a:prstGeom>
+          <a:solidFill>
+            <a:srgbClr val="ECECEC"/>
+          </a:solidFill>
+          <a:ln w="11430">
+            <a:solidFill>
+              <a:srgbClr val="C9C9C2"/>
+            </a:solidFill>
+          </a:ln>
+          <a:effectLst/>
+        </p:spPr>
+        <p:style>
+          <a:lnRef idx="1">
+            <a:schemeClr val="accent1"/>
+          </a:lnRef>
+          <a:fillRef idx="3">
+            <a:schemeClr val="accent1"/>
+          </a:fillRef>
+          <a:effectRef idx="2">
+            <a:schemeClr val="accent1"/>
+          </a:effectRef>
+          <a:fontRef idx="minor">
+            <a:schemeClr val="lt1"/>
+          </a:fontRef>
+        </p:style>
+        <p:txBody>
+          <a:bodyPr rtlCol="0" anchor="ctr" wrap="square" lIns="18288" rIns="18288" tIns="0" bIns="0"/>
+          <a:lstStyle/>
+          <a:p>
+            <a:pPr algn="ctr">
+              <a:lnSpc>
+                <a:spcPct val="100000"/>
+              </a:lnSpc>
+            </a:pPr>
+            <a:r>
+              <a:rPr sz="750" b="0">
+                <a:solidFill>
+                  <a:srgbClr val="141414"/>
+                </a:solidFill>
+                <a:latin typeface="微软雅黑"/>
+                <a:ea typeface="微软雅黑"/>
+                <a:cs typeface="微软雅黑"/>
+              </a:rPr>
+              <a:t>软件界面（人工确认）</a:t>
+            </a:r>
+          </a:p>
+        </p:txBody>
+      </p:sp>
+      <p:cxnSp>
+        <p:nvCxnSpPr>
+          <p:cNvPr id="17" name="Connector 16"/>
+          <p:cNvCxnSpPr/>
+          <p:nvPr/>
+        </p:nvCxnSpPr>
+        <p:spPr>
+          <a:xfrm>
+            <a:off x="5724144" y="2167128"/>
+            <a:ext cx="530352" cy="0"/>
+          </a:xfrm>
+          <a:prstGeom prst="line">
+            <a:avLst/>
+          </a:prstGeom>
+          <a:ln w="12700">
+            <a:solidFill>
+              <a:srgbClr val="5C5C56"/>
+            </a:solidFill>
+            <a:prstDash val="dash"/>
+          </a:ln>
+        </p:spPr>
+        <p:style>
+          <a:lnRef idx="2">
+            <a:schemeClr val="accent1"/>
+          </a:lnRef>
+          <a:fillRef idx="0">
+            <a:schemeClr val="accent1"/>
+          </a:fillRef>
+          <a:effectRef idx="1">
+            <a:schemeClr val="accent1"/>
+          </a:effectRef>
+          <a:fontRef idx="minor">
+            <a:schemeClr val="tx1"/>
+          </a:fontRef>
+        </p:style>
+      </p:cxnSp>
+      <p:sp>
+        <p:nvSpPr>
+          <p:cNvPr id="18" name="Rounded Rectangle 17"/>
+          <p:cNvSpPr/>
+          <p:nvPr/>
+        </p:nvSpPr>
+        <p:spPr>
+          <a:xfrm>
+            <a:off x="6254496" y="1920240"/>
+            <a:ext cx="1408176" cy="502920"/>
+          </a:xfrm>
+          <a:prstGeom prst="roundRect">
+            <a:avLst>
+              <a:gd name="adj" fmla="val 5000"/>
+            </a:avLst>
+          </a:prstGeom>
+          <a:solidFill>
+            <a:srgbClr val="FFFFFF"/>
+          </a:solidFill>
+          <a:ln w="12700">
+            <a:solidFill>
+              <a:srgbClr val="8B0F1A"/>
+            </a:solidFill>
+          </a:ln>
+          <a:effectLst/>
+        </p:spPr>
+        <p:style>
+          <a:lnRef idx="1">
+            <a:schemeClr val="accent1"/>
+          </a:lnRef>
+          <a:fillRef idx="3">
+            <a:schemeClr val="accent1"/>
+          </a:fillRef>
+          <a:effectRef idx="2">
+            <a:schemeClr val="accent1"/>
+          </a:effectRef>
+          <a:fontRef idx="minor">
+            <a:schemeClr val="lt1"/>
+          </a:fontRef>
+        </p:style>
+        <p:txBody>
+          <a:bodyPr rtlCol="0" anchor="ctr" wrap="square" lIns="18288" rIns="18288" tIns="0" bIns="0"/>
+          <a:lstStyle/>
+          <a:p>
+            <a:pPr algn="ctr">
+              <a:lnSpc>
+                <a:spcPct val="100000"/>
+              </a:lnSpc>
+            </a:pPr>
+            <a:r>
+              <a:rPr sz="750" b="0">
+                <a:solidFill>
+                  <a:srgbClr val="141414"/>
+                </a:solidFill>
+                <a:latin typeface="微软雅黑"/>
+                <a:ea typeface="微软雅黑"/>
+                <a:cs typeface="微软雅黑"/>
+              </a:rPr>
+              <a:t>无人值守 / 后台</a:t>
+            </a:r>
+          </a:p>
+        </p:txBody>
+      </p:sp>
+      <p:sp>
+        <p:nvSpPr>
+          <p:cNvPr id="19" name="TextBox 18"/>
+          <p:cNvSpPr txBox="1"/>
+          <p:nvPr/>
+        </p:nvSpPr>
+        <p:spPr>
+          <a:xfrm>
+            <a:off x="5861304" y="1892807"/>
+            <a:ext cx="256032" cy="274320"/>
+          </a:xfrm>
+          <a:prstGeom prst="rect">
+            <a:avLst/>
+          </a:prstGeom>
+          <a:noFill/>
+        </p:spPr>
+        <p:txBody>
+          <a:bodyPr wrap="square" lIns="27432" rIns="27432" tIns="9144" bIns="9144" anchor="ctr">
+            <a:spAutoFit/>
+          </a:bodyPr>
+          <a:lstStyle/>
+          <a:p>
+            <a:pPr algn="ctr">
+              <a:lnSpc>
+                <a:spcPct val="110000"/>
+              </a:lnSpc>
+            </a:pPr>
+            <a:r>
+              <a:rPr sz="1400" b="1">
+                <a:solidFill>
+                  <a:srgbClr val="8B0F1A"/>
+                </a:solidFill>
+                <a:latin typeface="微软雅黑"/>
+                <a:ea typeface="微软雅黑"/>
+                <a:cs typeface="微软雅黑"/>
+              </a:rPr>
+              <a:t>×</a:t>
+            </a:r>
+          </a:p>
+        </p:txBody>
+      </p:sp>
+      <p:sp>
+        <p:nvSpPr>
+          <p:cNvPr id="20" name="TextBox 19"/>
+          <p:cNvSpPr txBox="1"/>
+          <p:nvPr/>
+        </p:nvSpPr>
+        <p:spPr>
+          <a:xfrm>
+            <a:off x="5340096" y="2468880"/>
+            <a:ext cx="1417320" cy="182880"/>
+          </a:xfrm>
+          <a:prstGeom prst="rect">
+            <a:avLst/>
+          </a:prstGeom>
+          <a:noFill/>
+        </p:spPr>
+        <p:txBody>
+          <a:bodyPr wrap="square" lIns="27432" rIns="27432" tIns="9144" bIns="9144" anchor="ctr">
+            <a:spAutoFit/>
+          </a:bodyPr>
+          <a:lstStyle/>
+          <a:p>
+            <a:pPr algn="ctr">
+              <a:lnSpc>
+                <a:spcPct val="110000"/>
+              </a:lnSpc>
+            </a:pPr>
+            <a:r>
+              <a:rPr sz="750" b="0">
+                <a:solidFill>
+                  <a:srgbClr val="8B0F1A"/>
+                </a:solidFill>
+                <a:latin typeface="微软雅黑"/>
+                <a:ea typeface="微软雅黑"/>
+                <a:cs typeface="微软雅黑"/>
+              </a:rPr>
+              <a:t>无法 7×24 自动执行</a:t>
+            </a:r>
+          </a:p>
+        </p:txBody>
+      </p:sp>
+      <p:sp>
+        <p:nvSpPr>
+          <p:cNvPr id="21" name="Rounded Rectangle 20"/>
+          <p:cNvSpPr/>
+          <p:nvPr/>
+        </p:nvSpPr>
+        <p:spPr>
+          <a:xfrm>
+            <a:off x="8174736" y="1371600"/>
+            <a:ext cx="3694176" cy="2240280"/>
+          </a:xfrm>
+          <a:prstGeom prst="roundRect">
+            <a:avLst>
+              <a:gd name="adj" fmla="val 4000"/>
+            </a:avLst>
+          </a:prstGeom>
+          <a:solidFill>
+            <a:srgbClr val="FFFFFF"/>
+          </a:solidFill>
+          <a:ln w="12700">
+            <a:solidFill>
+              <a:srgbClr val="C9C9C2"/>
+            </a:solidFill>
+          </a:ln>
+          <a:effectLst/>
+        </p:spPr>
+        <p:style>
+          <a:lnRef idx="1">
+            <a:schemeClr val="accent1"/>
+          </a:lnRef>
+          <a:fillRef idx="3">
+            <a:schemeClr val="accent1"/>
+          </a:fillRef>
+          <a:effectRef idx="2">
+            <a:schemeClr val="accent1"/>
+          </a:effectRef>
+          <a:fontRef idx="minor">
+            <a:schemeClr val="lt1"/>
+          </a:fontRef>
+        </p:style>
+        <p:txBody>
+          <a:bodyPr rtlCol="0" anchor="ctr" wrap="square"/>
+          <a:lstStyle/>
+          <a:p>
+            <a:pPr algn="ctr"/>
+          </a:p>
+        </p:txBody>
+      </p:sp>
+      <p:sp>
+        <p:nvSpPr>
+          <p:cNvPr id="22" name="TextBox 21"/>
+          <p:cNvSpPr txBox="1"/>
+          <p:nvPr/>
+        </p:nvSpPr>
+        <p:spPr>
+          <a:xfrm>
+            <a:off x="8284463" y="1444752"/>
+            <a:ext cx="3474720" cy="274320"/>
+          </a:xfrm>
+          <a:prstGeom prst="rect">
+            <a:avLst/>
+          </a:prstGeom>
+          <a:noFill/>
+        </p:spPr>
+        <p:txBody>
+          <a:bodyPr wrap="square" lIns="27432" rIns="27432" tIns="9144" bIns="9144" anchor="ctr">
+            <a:spAutoFit/>
+          </a:bodyPr>
+          <a:lstStyle/>
+          <a:p>
+            <a:pPr algn="l">
+              <a:lnSpc>
+                <a:spcPct val="110000"/>
+              </a:lnSpc>
+            </a:pPr>
+            <a:r>
+              <a:rPr sz="1000" b="1">
+                <a:solidFill>
+                  <a:srgbClr val="141414"/>
+                </a:solidFill>
+                <a:latin typeface="微软雅黑"/>
+                <a:ea typeface="微软雅黑"/>
+                <a:cs typeface="微软雅黑"/>
+              </a:rPr>
+              <a:t>⑨ 授权绑定 MAC</a:t>
+            </a:r>
+          </a:p>
+        </p:txBody>
+      </p:sp>
+      <p:sp>
+        <p:nvSpPr>
+          <p:cNvPr id="23" name="TextBox 22"/>
+          <p:cNvSpPr txBox="1"/>
+          <p:nvPr/>
+        </p:nvSpPr>
+        <p:spPr>
+          <a:xfrm>
+            <a:off x="8284463" y="2834640"/>
+            <a:ext cx="3474720" cy="694944"/>
+          </a:xfrm>
+          <a:prstGeom prst="rect">
+            <a:avLst/>
+          </a:prstGeom>
+          <a:noFill/>
+        </p:spPr>
+        <p:txBody>
+          <a:bodyPr wrap="square" lIns="27432" rIns="27432" tIns="9144" bIns="9144" anchor="t">
+            <a:spAutoFit/>
+          </a:bodyPr>
+          <a:lstStyle/>
+          <a:p>
+            <a:pPr algn="l">
+              <a:lnSpc>
+                <a:spcPct val="110000"/>
+              </a:lnSpc>
+            </a:pPr>
+            <a:r>
+              <a:rPr sz="850" b="0">
+                <a:solidFill>
+                  <a:srgbClr val="5C5C56"/>
+                </a:solidFill>
+                <a:latin typeface="微软雅黑"/>
+                <a:ea typeface="微软雅黑"/>
+                <a:cs typeface="微软雅黑"/>
+              </a:rPr>
+              <a:t>许可证绑定网卡 MAC 与机器指纹，迁机、换网卡、重装系统即失效，无法随平台复制部署</a:t>
+            </a:r>
+          </a:p>
+        </p:txBody>
+      </p:sp>
+      <p:sp>
+        <p:nvSpPr>
+          <p:cNvPr id="24" name="Rounded Rectangle 23"/>
+          <p:cNvSpPr/>
+          <p:nvPr/>
+        </p:nvSpPr>
+        <p:spPr>
+          <a:xfrm>
+            <a:off x="8284463" y="1883664"/>
+            <a:ext cx="877824" cy="585216"/>
+          </a:xfrm>
+          <a:prstGeom prst="roundRect">
+            <a:avLst>
+              <a:gd name="adj" fmla="val 5000"/>
+            </a:avLst>
+          </a:prstGeom>
+          <a:solidFill>
+            <a:srgbClr val="ECECEC"/>
+          </a:solidFill>
+          <a:ln w="11430">
+            <a:solidFill>
+              <a:srgbClr val="C9C9C2"/>
+            </a:solidFill>
+          </a:ln>
+          <a:effectLst/>
+        </p:spPr>
+        <p:style>
+          <a:lnRef idx="1">
+            <a:schemeClr val="accent1"/>
+          </a:lnRef>
+          <a:fillRef idx="3">
+            <a:schemeClr val="accent1"/>
+          </a:fillRef>
+          <a:effectRef idx="2">
+            <a:schemeClr val="accent1"/>
+          </a:effectRef>
+          <a:fontRef idx="minor">
+            <a:schemeClr val="lt1"/>
+          </a:fontRef>
+        </p:style>
+        <p:txBody>
+          <a:bodyPr rtlCol="0" anchor="ctr" wrap="square" lIns="18288" rIns="18288" tIns="0" bIns="0"/>
+          <a:lstStyle/>
+          <a:p>
+            <a:pPr algn="ctr">
+              <a:lnSpc>
+                <a:spcPct val="100000"/>
+              </a:lnSpc>
+            </a:pPr>
+            <a:r>
+              <a:rPr sz="800" b="1">
+                <a:solidFill>
+                  <a:srgbClr val="141414"/>
+                </a:solidFill>
+                <a:latin typeface="微软雅黑"/>
+                <a:ea typeface="微软雅黑"/>
+                <a:cs typeface="微软雅黑"/>
+              </a:rPr>
+              <a:t>机器 A</a:t>
+            </a:r>
+          </a:p>
+          <a:p>
+            <a:pPr algn="ctr"/>
+            <a:r>
+              <a:rPr sz="750">
+                <a:solidFill>
+                  <a:srgbClr val="5C5C56"/>
+                </a:solidFill>
+                <a:latin typeface="微软雅黑"/>
+                <a:ea typeface="微软雅黑"/>
+                <a:cs typeface="微软雅黑"/>
+              </a:rPr>
+              <a:t>MAC A1</a:t>
+            </a:r>
+          </a:p>
+        </p:txBody>
+      </p:sp>
+      <p:sp>
+        <p:nvSpPr>
+          <p:cNvPr id="25" name="Rounded Rectangle 24"/>
+          <p:cNvSpPr/>
+          <p:nvPr/>
+        </p:nvSpPr>
+        <p:spPr>
+          <a:xfrm>
+            <a:off x="9473184" y="1920240"/>
+            <a:ext cx="621792" cy="512064"/>
+          </a:xfrm>
+          <a:prstGeom prst="roundRect">
+            <a:avLst>
+              <a:gd name="adj" fmla="val 5000"/>
+            </a:avLst>
+          </a:prstGeom>
+          <a:solidFill>
+            <a:srgbClr val="FFFFFF"/>
+          </a:solidFill>
+          <a:ln w="13970">
+            <a:solidFill>
+              <a:srgbClr val="8B0F1A"/>
+            </a:solidFill>
+          </a:ln>
+          <a:effectLst/>
+        </p:spPr>
+        <p:style>
+          <a:lnRef idx="1">
+            <a:schemeClr val="accent1"/>
+          </a:lnRef>
+          <a:fillRef idx="3">
+            <a:schemeClr val="accent1"/>
+          </a:fillRef>
+          <a:effectRef idx="2">
+            <a:schemeClr val="accent1"/>
+          </a:effectRef>
+          <a:fontRef idx="minor">
+            <a:schemeClr val="lt1"/>
+          </a:fontRef>
+        </p:style>
+        <p:txBody>
+          <a:bodyPr rtlCol="0" anchor="ctr" wrap="square" lIns="18288" rIns="18288" tIns="0" bIns="0"/>
+          <a:lstStyle/>
+          <a:p>
+            <a:pPr algn="ctr">
+              <a:lnSpc>
+                <a:spcPct val="100000"/>
+              </a:lnSpc>
+            </a:pPr>
+            <a:r>
+              <a:rPr sz="800" b="0">
+                <a:solidFill>
+                  <a:srgbClr val="8B0F1A"/>
+                </a:solidFill>
+                <a:latin typeface="微软雅黑"/>
+                <a:ea typeface="微软雅黑"/>
+                <a:cs typeface="微软雅黑"/>
+              </a:rPr>
+              <a:t>许可证</a:t>
+            </a:r>
+          </a:p>
+        </p:txBody>
+      </p:sp>
+      <p:cxnSp>
+        <p:nvCxnSpPr>
+          <p:cNvPr id="26" name="Connector 25"/>
+          <p:cNvCxnSpPr/>
+          <p:nvPr/>
+        </p:nvCxnSpPr>
+        <p:spPr>
+          <a:xfrm flipH="1">
+            <a:off x="9162288" y="2176272"/>
+            <a:ext cx="310896" cy="0"/>
+          </a:xfrm>
+          <a:prstGeom prst="line">
+            <a:avLst/>
+          </a:prstGeom>
+          <a:ln w="13970">
+            <a:solidFill>
+              <a:srgbClr val="5C5C56"/>
+            </a:solidFill>
+          </a:ln>
+        </p:spPr>
+        <p:style>
+          <a:lnRef idx="2">
+            <a:schemeClr val="accent1"/>
+          </a:lnRef>
+          <a:fillRef idx="0">
+            <a:schemeClr val="accent1"/>
+          </a:fillRef>
+          <a:effectRef idx="1">
+            <a:schemeClr val="accent1"/>
+          </a:effectRef>
+          <a:fontRef idx="minor">
+            <a:schemeClr val="tx1"/>
+          </a:fontRef>
+        </p:style>
+      </p:cxnSp>
+      <p:sp>
+        <p:nvSpPr>
+          <p:cNvPr id="27" name="Rounded Rectangle 26"/>
+          <p:cNvSpPr/>
+          <p:nvPr/>
+        </p:nvSpPr>
+        <p:spPr>
+          <a:xfrm>
+            <a:off x="10479024" y="1883664"/>
+            <a:ext cx="1005840" cy="585216"/>
+          </a:xfrm>
+          <a:prstGeom prst="roundRect">
+            <a:avLst>
+              <a:gd name="adj" fmla="val 5000"/>
+            </a:avLst>
+          </a:prstGeom>
+          <a:solidFill>
+            <a:srgbClr val="ECECEC"/>
+          </a:solidFill>
+          <a:ln w="11430">
+            <a:solidFill>
+              <a:srgbClr val="C9C9C2"/>
+            </a:solidFill>
+          </a:ln>
+          <a:effectLst/>
+        </p:spPr>
+        <p:style>
+          <a:lnRef idx="1">
+            <a:schemeClr val="accent1"/>
+          </a:lnRef>
+          <a:fillRef idx="3">
+            <a:schemeClr val="accent1"/>
+          </a:fillRef>
+          <a:effectRef idx="2">
+            <a:schemeClr val="accent1"/>
+          </a:effectRef>
+          <a:fontRef idx="minor">
+            <a:schemeClr val="lt1"/>
+          </a:fontRef>
+        </p:style>
+        <p:txBody>
+          <a:bodyPr rtlCol="0" anchor="ctr" wrap="square" lIns="18288" rIns="18288" tIns="0" bIns="0"/>
+          <a:lstStyle/>
+          <a:p>
+            <a:pPr algn="ctr">
+              <a:lnSpc>
+                <a:spcPct val="100000"/>
+              </a:lnSpc>
+            </a:pPr>
+            <a:r>
+              <a:rPr sz="800" b="1">
+                <a:solidFill>
+                  <a:srgbClr val="141414"/>
+                </a:solidFill>
+                <a:latin typeface="微软雅黑"/>
+                <a:ea typeface="微软雅黑"/>
+                <a:cs typeface="微软雅黑"/>
+              </a:rPr>
+              <a:t>机器 B</a:t>
+            </a:r>
+          </a:p>
+          <a:p>
+            <a:pPr algn="ctr"/>
+            <a:r>
+              <a:rPr sz="750">
+                <a:solidFill>
+                  <a:srgbClr val="5C5C56"/>
+                </a:solidFill>
+                <a:latin typeface="微软雅黑"/>
+                <a:ea typeface="微软雅黑"/>
+                <a:cs typeface="微软雅黑"/>
+              </a:rPr>
+              <a:t>MAC B2</a:t>
+            </a:r>
+          </a:p>
+        </p:txBody>
+      </p:sp>
+      <p:cxnSp>
+        <p:nvCxnSpPr>
+          <p:cNvPr id="28" name="Connector 27"/>
+          <p:cNvCxnSpPr/>
+          <p:nvPr/>
+        </p:nvCxnSpPr>
+        <p:spPr>
+          <a:xfrm>
+            <a:off x="10094976" y="2176272"/>
+            <a:ext cx="384048" cy="0"/>
+          </a:xfrm>
+          <a:prstGeom prst="line">
+            <a:avLst/>
+          </a:prstGeom>
+          <a:ln w="13970">
+            <a:solidFill>
+              <a:srgbClr val="5C5C56"/>
+            </a:solidFill>
+            <a:prstDash val="dash"/>
+          </a:ln>
+        </p:spPr>
+        <p:style>
+          <a:lnRef idx="2">
+            <a:schemeClr val="accent1"/>
+          </a:lnRef>
+          <a:fillRef idx="0">
+            <a:schemeClr val="accent1"/>
+          </a:fillRef>
+          <a:effectRef idx="1">
+            <a:schemeClr val="accent1"/>
+          </a:effectRef>
+          <a:fontRef idx="minor">
+            <a:schemeClr val="tx1"/>
+          </a:fontRef>
+        </p:style>
+      </p:cxnSp>
+      <p:sp>
+        <p:nvSpPr>
+          <p:cNvPr id="29" name="TextBox 28"/>
+          <p:cNvSpPr txBox="1"/>
+          <p:nvPr/>
+        </p:nvSpPr>
+        <p:spPr>
+          <a:xfrm>
+            <a:off x="10158983" y="1892807"/>
+            <a:ext cx="256032" cy="274320"/>
+          </a:xfrm>
+          <a:prstGeom prst="rect">
+            <a:avLst/>
+          </a:prstGeom>
+          <a:noFill/>
+        </p:spPr>
+        <p:txBody>
+          <a:bodyPr wrap="square" lIns="27432" rIns="27432" tIns="9144" bIns="9144" anchor="ctr">
+            <a:spAutoFit/>
+          </a:bodyPr>
+          <a:lstStyle/>
+          <a:p>
+            <a:pPr algn="ctr">
+              <a:lnSpc>
+                <a:spcPct val="110000"/>
+              </a:lnSpc>
+            </a:pPr>
+            <a:r>
+              <a:rPr sz="1200" b="1">
+                <a:solidFill>
+                  <a:srgbClr val="8B0F1A"/>
+                </a:solidFill>
+                <a:latin typeface="微软雅黑"/>
+                <a:ea typeface="微软雅黑"/>
+                <a:cs typeface="微软雅黑"/>
+              </a:rPr>
+              <a:t>×</a:t>
+            </a:r>
+          </a:p>
+        </p:txBody>
+      </p:sp>
+      <p:sp>
+        <p:nvSpPr>
+          <p:cNvPr id="30" name="TextBox 29"/>
+          <p:cNvSpPr txBox="1"/>
+          <p:nvPr/>
+        </p:nvSpPr>
+        <p:spPr>
+          <a:xfrm>
+            <a:off x="8924543" y="2487168"/>
+            <a:ext cx="786384" cy="182880"/>
+          </a:xfrm>
+          <a:prstGeom prst="rect">
+            <a:avLst/>
+          </a:prstGeom>
+          <a:noFill/>
+        </p:spPr>
+        <p:txBody>
+          <a:bodyPr wrap="square" lIns="27432" rIns="27432" tIns="9144" bIns="9144" anchor="ctr">
+            <a:spAutoFit/>
+          </a:bodyPr>
+          <a:lstStyle/>
+          <a:p>
+            <a:pPr algn="ctr">
+              <a:lnSpc>
+                <a:spcPct val="110000"/>
+              </a:lnSpc>
+            </a:pPr>
+            <a:r>
+              <a:rPr sz="750" b="0">
+                <a:solidFill>
+                  <a:srgbClr val="0F4C81"/>
+                </a:solidFill>
+                <a:latin typeface="微软雅黑"/>
+                <a:ea typeface="微软雅黑"/>
+                <a:cs typeface="微软雅黑"/>
+              </a:rPr>
+              <a:t>授权有效</a:t>
+            </a:r>
+          </a:p>
+        </p:txBody>
+      </p:sp>
+      <p:sp>
+        <p:nvSpPr>
+          <p:cNvPr id="31" name="TextBox 30"/>
+          <p:cNvSpPr txBox="1"/>
+          <p:nvPr/>
+        </p:nvSpPr>
+        <p:spPr>
+          <a:xfrm>
+            <a:off x="10131551" y="2487168"/>
+            <a:ext cx="1005840" cy="182880"/>
+          </a:xfrm>
+          <a:prstGeom prst="rect">
+            <a:avLst/>
+          </a:prstGeom>
+          <a:noFill/>
+        </p:spPr>
+        <p:txBody>
+          <a:bodyPr wrap="square" lIns="27432" rIns="27432" tIns="9144" bIns="9144" anchor="ctr">
+            <a:spAutoFit/>
+          </a:bodyPr>
+          <a:lstStyle/>
+          <a:p>
+            <a:pPr algn="ctr">
+              <a:lnSpc>
+                <a:spcPct val="110000"/>
+              </a:lnSpc>
+            </a:pPr>
+            <a:r>
+              <a:rPr sz="750" b="0">
+                <a:solidFill>
+                  <a:srgbClr val="8B0F1A"/>
+                </a:solidFill>
+                <a:latin typeface="微软雅黑"/>
+                <a:ea typeface="微软雅黑"/>
+                <a:cs typeface="微软雅黑"/>
+              </a:rPr>
+              <a:t>迁机即失效</a:t>
+            </a:r>
+          </a:p>
+        </p:txBody>
+      </p:sp>
+      <p:sp>
+        <p:nvSpPr>
+          <p:cNvPr id="32" name="Rounded Rectangle 31"/>
+          <p:cNvSpPr/>
+          <p:nvPr/>
+        </p:nvSpPr>
+        <p:spPr>
+          <a:xfrm>
+            <a:off x="274320" y="3703320"/>
+            <a:ext cx="3694176" cy="2240280"/>
+          </a:xfrm>
+          <a:prstGeom prst="roundRect">
+            <a:avLst>
+              <a:gd name="adj" fmla="val 4000"/>
+            </a:avLst>
+          </a:prstGeom>
+          <a:solidFill>
+            <a:srgbClr val="FFFFFF"/>
+          </a:solidFill>
+          <a:ln w="12700">
+            <a:solidFill>
+              <a:srgbClr val="C9C9C2"/>
+            </a:solidFill>
+          </a:ln>
+          <a:effectLst/>
+        </p:spPr>
+        <p:style>
+          <a:lnRef idx="1">
+            <a:schemeClr val="accent1"/>
+          </a:lnRef>
+          <a:fillRef idx="3">
+            <a:schemeClr val="accent1"/>
+          </a:fillRef>
+          <a:effectRef idx="2">
+            <a:schemeClr val="accent1"/>
+          </a:effectRef>
+          <a:fontRef idx="minor">
+            <a:schemeClr val="lt1"/>
+          </a:fontRef>
+        </p:style>
+        <p:txBody>
+          <a:bodyPr rtlCol="0" anchor="ctr" wrap="square"/>
+          <a:lstStyle/>
+          <a:p>
+            <a:pPr algn="ctr"/>
+          </a:p>
+        </p:txBody>
+      </p:sp>
+      <p:sp>
+        <p:nvSpPr>
+          <p:cNvPr id="33" name="TextBox 32"/>
+          <p:cNvSpPr txBox="1"/>
+          <p:nvPr/>
+        </p:nvSpPr>
+        <p:spPr>
+          <a:xfrm>
+            <a:off x="384048" y="3776472"/>
+            <a:ext cx="3474720" cy="274320"/>
+          </a:xfrm>
+          <a:prstGeom prst="rect">
+            <a:avLst/>
+          </a:prstGeom>
+          <a:noFill/>
+        </p:spPr>
+        <p:txBody>
+          <a:bodyPr wrap="square" lIns="27432" rIns="27432" tIns="9144" bIns="9144" anchor="ctr">
+            <a:spAutoFit/>
+          </a:bodyPr>
+          <a:lstStyle/>
+          <a:p>
+            <a:pPr algn="l">
+              <a:lnSpc>
+                <a:spcPct val="110000"/>
+              </a:lnSpc>
+            </a:pPr>
+            <a:r>
+              <a:rPr sz="1000" b="1">
+                <a:solidFill>
+                  <a:srgbClr val="141414"/>
+                </a:solidFill>
+                <a:latin typeface="微软雅黑"/>
+                <a:ea typeface="微软雅黑"/>
+                <a:cs typeface="微软雅黑"/>
+              </a:rPr>
+              <a:t>⑩ 授权并发不足</a:t>
+            </a:r>
+          </a:p>
+        </p:txBody>
+      </p:sp>
+      <p:sp>
+        <p:nvSpPr>
+          <p:cNvPr id="34" name="TextBox 33"/>
+          <p:cNvSpPr txBox="1"/>
+          <p:nvPr/>
+        </p:nvSpPr>
+        <p:spPr>
+          <a:xfrm>
+            <a:off x="384048" y="5166360"/>
+            <a:ext cx="3474720" cy="694944"/>
+          </a:xfrm>
+          <a:prstGeom prst="rect">
+            <a:avLst/>
+          </a:prstGeom>
+          <a:noFill/>
+        </p:spPr>
+        <p:txBody>
+          <a:bodyPr wrap="square" lIns="27432" rIns="27432" tIns="9144" bIns="9144" anchor="t">
+            <a:spAutoFit/>
+          </a:bodyPr>
+          <a:lstStyle/>
+          <a:p>
+            <a:pPr algn="l">
+              <a:lnSpc>
+                <a:spcPct val="110000"/>
+              </a:lnSpc>
+            </a:pPr>
+            <a:r>
+              <a:rPr sz="850" b="0">
+                <a:solidFill>
+                  <a:srgbClr val="5C5C56"/>
+                </a:solidFill>
+                <a:latin typeface="微软雅黑"/>
+                <a:ea typeface="微软雅黑"/>
+                <a:cs typeface="微软雅黑"/>
+              </a:rPr>
+              <a:t>单机授权或加密狗数量少于测试台数量，多台并行时只有一台能拿到许可</a:t>
+            </a:r>
+          </a:p>
+        </p:txBody>
+      </p:sp>
+      <p:sp>
+        <p:nvSpPr>
+          <p:cNvPr id="35" name="Rounded Rectangle 34"/>
+          <p:cNvSpPr/>
+          <p:nvPr/>
+        </p:nvSpPr>
+        <p:spPr>
+          <a:xfrm>
+            <a:off x="384048" y="4123944"/>
+            <a:ext cx="768096" cy="274320"/>
+          </a:xfrm>
+          <a:prstGeom prst="roundRect">
+            <a:avLst>
+              <a:gd name="adj" fmla="val 4000"/>
+            </a:avLst>
+          </a:prstGeom>
+          <a:solidFill>
+            <a:srgbClr val="ECECEC"/>
+          </a:solidFill>
+          <a:ln w="11430">
+            <a:solidFill>
+              <a:srgbClr val="C9C9C2"/>
+            </a:solidFill>
+          </a:ln>
+          <a:effectLst/>
+        </p:spPr>
+        <p:style>
+          <a:lnRef idx="1">
+            <a:schemeClr val="accent1"/>
+          </a:lnRef>
+          <a:fillRef idx="3">
+            <a:schemeClr val="accent1"/>
+          </a:fillRef>
+          <a:effectRef idx="2">
+            <a:schemeClr val="accent1"/>
+          </a:effectRef>
+          <a:fontRef idx="minor">
+            <a:schemeClr val="lt1"/>
+          </a:fontRef>
+        </p:style>
+        <p:txBody>
+          <a:bodyPr rtlCol="0" anchor="ctr" wrap="square" lIns="18288" rIns="18288" tIns="0" bIns="0"/>
+          <a:lstStyle/>
+          <a:p>
+            <a:pPr algn="ctr">
+              <a:lnSpc>
+                <a:spcPct val="100000"/>
+              </a:lnSpc>
+            </a:pPr>
+            <a:r>
+              <a:rPr sz="700" b="0">
+                <a:solidFill>
+                  <a:srgbClr val="141414"/>
+                </a:solidFill>
+                <a:latin typeface="微软雅黑"/>
+                <a:ea typeface="微软雅黑"/>
+                <a:cs typeface="微软雅黑"/>
+              </a:rPr>
+              <a:t>测试台 1</a:t>
+            </a:r>
+          </a:p>
+        </p:txBody>
+      </p:sp>
+      <p:cxnSp>
+        <p:nvCxnSpPr>
+          <p:cNvPr id="36" name="Connector 35"/>
+          <p:cNvCxnSpPr/>
+          <p:nvPr/>
+        </p:nvCxnSpPr>
+        <p:spPr>
+          <a:xfrm>
+            <a:off x="768096" y="4398264"/>
+            <a:ext cx="0" cy="292608"/>
+          </a:xfrm>
+          <a:prstGeom prst="line">
+            <a:avLst/>
+          </a:prstGeom>
+          <a:ln w="12700">
+            <a:solidFill>
+              <a:srgbClr val="5C5C56"/>
+            </a:solidFill>
+            <a:prstDash val="dash"/>
+          </a:ln>
+        </p:spPr>
+        <p:style>
+          <a:lnRef idx="2">
+            <a:schemeClr val="accent1"/>
+          </a:lnRef>
+          <a:fillRef idx="0">
+            <a:schemeClr val="accent1"/>
+          </a:fillRef>
+          <a:effectRef idx="1">
+            <a:schemeClr val="accent1"/>
+          </a:effectRef>
+          <a:fontRef idx="minor">
+            <a:schemeClr val="tx1"/>
+          </a:fontRef>
+        </p:style>
+      </p:cxnSp>
+      <p:sp>
+        <p:nvSpPr>
+          <p:cNvPr id="37" name="Rounded Rectangle 36"/>
+          <p:cNvSpPr/>
+          <p:nvPr/>
+        </p:nvSpPr>
+        <p:spPr>
+          <a:xfrm>
+            <a:off x="1252728" y="4123944"/>
+            <a:ext cx="768096" cy="274320"/>
+          </a:xfrm>
+          <a:prstGeom prst="roundRect">
+            <a:avLst>
+              <a:gd name="adj" fmla="val 4000"/>
+            </a:avLst>
+          </a:prstGeom>
+          <a:solidFill>
+            <a:srgbClr val="ECECEC"/>
+          </a:solidFill>
+          <a:ln w="11430">
+            <a:solidFill>
+              <a:srgbClr val="C9C9C2"/>
+            </a:solidFill>
+          </a:ln>
+          <a:effectLst/>
+        </p:spPr>
+        <p:style>
+          <a:lnRef idx="1">
+            <a:schemeClr val="accent1"/>
+          </a:lnRef>
+          <a:fillRef idx="3">
+            <a:schemeClr val="accent1"/>
+          </a:fillRef>
+          <a:effectRef idx="2">
+            <a:schemeClr val="accent1"/>
+          </a:effectRef>
+          <a:fontRef idx="minor">
+            <a:schemeClr val="lt1"/>
+          </a:fontRef>
+        </p:style>
+        <p:txBody>
+          <a:bodyPr rtlCol="0" anchor="ctr" wrap="square" lIns="18288" rIns="18288" tIns="0" bIns="0"/>
+          <a:lstStyle/>
+          <a:p>
+            <a:pPr algn="ctr">
+              <a:lnSpc>
+                <a:spcPct val="100000"/>
+              </a:lnSpc>
+            </a:pPr>
+            <a:r>
+              <a:rPr sz="700" b="0">
+                <a:solidFill>
+                  <a:srgbClr val="141414"/>
+                </a:solidFill>
+                <a:latin typeface="微软雅黑"/>
+                <a:ea typeface="微软雅黑"/>
+                <a:cs typeface="微软雅黑"/>
+              </a:rPr>
+              <a:t>测试台 2</a:t>
+            </a:r>
+          </a:p>
+        </p:txBody>
+      </p:sp>
+      <p:cxnSp>
+        <p:nvCxnSpPr>
+          <p:cNvPr id="38" name="Connector 37"/>
+          <p:cNvCxnSpPr/>
+          <p:nvPr/>
+        </p:nvCxnSpPr>
+        <p:spPr>
+          <a:xfrm>
+            <a:off x="1636776" y="4398264"/>
+            <a:ext cx="0" cy="292608"/>
+          </a:xfrm>
+          <a:prstGeom prst="line">
+            <a:avLst/>
+          </a:prstGeom>
+          <a:ln w="12700">
+            <a:solidFill>
+              <a:srgbClr val="5C5C56"/>
+            </a:solidFill>
+            <a:prstDash val="dash"/>
+          </a:ln>
+        </p:spPr>
+        <p:style>
+          <a:lnRef idx="2">
+            <a:schemeClr val="accent1"/>
+          </a:lnRef>
+          <a:fillRef idx="0">
+            <a:schemeClr val="accent1"/>
+          </a:fillRef>
+          <a:effectRef idx="1">
+            <a:schemeClr val="accent1"/>
+          </a:effectRef>
+          <a:fontRef idx="minor">
+            <a:schemeClr val="tx1"/>
+          </a:fontRef>
+        </p:style>
+      </p:cxnSp>
+      <p:sp>
+        <p:nvSpPr>
+          <p:cNvPr id="39" name="Rounded Rectangle 38"/>
+          <p:cNvSpPr/>
+          <p:nvPr/>
+        </p:nvSpPr>
+        <p:spPr>
+          <a:xfrm>
+            <a:off x="2121408" y="4123944"/>
+            <a:ext cx="768096" cy="274320"/>
+          </a:xfrm>
+          <a:prstGeom prst="roundRect">
+            <a:avLst>
+              <a:gd name="adj" fmla="val 4000"/>
+            </a:avLst>
+          </a:prstGeom>
+          <a:solidFill>
+            <a:srgbClr val="ECECEC"/>
+          </a:solidFill>
+          <a:ln w="11430">
+            <a:solidFill>
+              <a:srgbClr val="C9C9C2"/>
+            </a:solidFill>
+          </a:ln>
+          <a:effectLst/>
+        </p:spPr>
+        <p:style>
+          <a:lnRef idx="1">
+            <a:schemeClr val="accent1"/>
+          </a:lnRef>
+          <a:fillRef idx="3">
+            <a:schemeClr val="accent1"/>
+          </a:fillRef>
+          <a:effectRef idx="2">
+            <a:schemeClr val="accent1"/>
+          </a:effectRef>
+          <a:fontRef idx="minor">
+            <a:schemeClr val="lt1"/>
+          </a:fontRef>
+        </p:style>
+        <p:txBody>
+          <a:bodyPr rtlCol="0" anchor="ctr" wrap="square" lIns="18288" rIns="18288" tIns="0" bIns="0"/>
+          <a:lstStyle/>
+          <a:p>
+            <a:pPr algn="ctr">
+              <a:lnSpc>
+                <a:spcPct val="100000"/>
+              </a:lnSpc>
+            </a:pPr>
+            <a:r>
+              <a:rPr sz="700" b="0">
+                <a:solidFill>
+                  <a:srgbClr val="141414"/>
+                </a:solidFill>
+                <a:latin typeface="微软雅黑"/>
+                <a:ea typeface="微软雅黑"/>
+                <a:cs typeface="微软雅黑"/>
+              </a:rPr>
+              <a:t>测试台 3</a:t>
+            </a:r>
+          </a:p>
+        </p:txBody>
+      </p:sp>
+      <p:cxnSp>
+        <p:nvCxnSpPr>
+          <p:cNvPr id="40" name="Connector 39"/>
+          <p:cNvCxnSpPr/>
+          <p:nvPr/>
+        </p:nvCxnSpPr>
+        <p:spPr>
+          <a:xfrm>
+            <a:off x="2505456" y="4398264"/>
+            <a:ext cx="0" cy="292608"/>
+          </a:xfrm>
+          <a:prstGeom prst="line">
+            <a:avLst/>
+          </a:prstGeom>
+          <a:ln w="12700">
+            <a:solidFill>
+              <a:srgbClr val="5C5C56"/>
+            </a:solidFill>
+            <a:prstDash val="dash"/>
+          </a:ln>
+        </p:spPr>
+        <p:style>
+          <a:lnRef idx="2">
+            <a:schemeClr val="accent1"/>
+          </a:lnRef>
+          <a:fillRef idx="0">
+            <a:schemeClr val="accent1"/>
+          </a:fillRef>
+          <a:effectRef idx="1">
+            <a:schemeClr val="accent1"/>
+          </a:effectRef>
+          <a:fontRef idx="minor">
+            <a:schemeClr val="tx1"/>
+          </a:fontRef>
+        </p:style>
+      </p:cxnSp>
+      <p:cxnSp>
+        <p:nvCxnSpPr>
+          <p:cNvPr id="41" name="Connector 40"/>
+          <p:cNvCxnSpPr/>
+          <p:nvPr/>
+        </p:nvCxnSpPr>
+        <p:spPr>
+          <a:xfrm>
+            <a:off x="768096" y="4690872"/>
+            <a:ext cx="1737360" cy="0"/>
+          </a:xfrm>
+          <a:prstGeom prst="line">
+            <a:avLst/>
+          </a:prstGeom>
+          <a:ln w="12700">
+            <a:solidFill>
+              <a:srgbClr val="5C5C56"/>
+            </a:solidFill>
+          </a:ln>
+        </p:spPr>
+        <p:style>
+          <a:lnRef idx="2">
+            <a:schemeClr val="accent1"/>
+          </a:lnRef>
+          <a:fillRef idx="0">
+            <a:schemeClr val="accent1"/>
+          </a:fillRef>
+          <a:effectRef idx="1">
+            <a:schemeClr val="accent1"/>
+          </a:effectRef>
+          <a:fontRef idx="minor">
+            <a:schemeClr val="tx1"/>
+          </a:fontRef>
+        </p:style>
+      </p:cxnSp>
+      <p:cxnSp>
+        <p:nvCxnSpPr>
+          <p:cNvPr id="42" name="Connector 41"/>
+          <p:cNvCxnSpPr/>
+          <p:nvPr/>
+        </p:nvCxnSpPr>
+        <p:spPr>
+          <a:xfrm>
+            <a:off x="1636776" y="4690872"/>
+            <a:ext cx="0" cy="73152"/>
+          </a:xfrm>
+          <a:prstGeom prst="line">
+            <a:avLst/>
+          </a:prstGeom>
+          <a:ln w="12700">
+            <a:solidFill>
+              <a:srgbClr val="5C5C56"/>
+            </a:solidFill>
+          </a:ln>
+        </p:spPr>
+        <p:style>
+          <a:lnRef idx="2">
+            <a:schemeClr val="accent1"/>
+          </a:lnRef>
+          <a:fillRef idx="0">
+            <a:schemeClr val="accent1"/>
+          </a:fillRef>
+          <a:effectRef idx="1">
+            <a:schemeClr val="accent1"/>
+          </a:effectRef>
+          <a:fontRef idx="minor">
+            <a:schemeClr val="tx1"/>
+          </a:fontRef>
+        </p:style>
+      </p:cxnSp>
+      <p:sp>
+        <p:nvSpPr>
+          <p:cNvPr id="43" name="Rounded Rectangle 42"/>
+          <p:cNvSpPr/>
+          <p:nvPr/>
+        </p:nvSpPr>
+        <p:spPr>
+          <a:xfrm>
+            <a:off x="1179576" y="4764024"/>
+            <a:ext cx="914400" cy="310896"/>
+          </a:xfrm>
+          <a:prstGeom prst="roundRect">
+            <a:avLst>
+              <a:gd name="adj" fmla="val 5000"/>
+            </a:avLst>
+          </a:prstGeom>
+          <a:solidFill>
+            <a:srgbClr val="FFFFFF"/>
+          </a:solidFill>
+          <a:ln w="13970">
+            <a:solidFill>
+              <a:srgbClr val="8B0F1A"/>
+            </a:solidFill>
+          </a:ln>
+          <a:effectLst/>
+        </p:spPr>
+        <p:style>
+          <a:lnRef idx="1">
+            <a:schemeClr val="accent1"/>
+          </a:lnRef>
+          <a:fillRef idx="3">
+            <a:schemeClr val="accent1"/>
+          </a:fillRef>
+          <a:effectRef idx="2">
+            <a:schemeClr val="accent1"/>
+          </a:effectRef>
+          <a:fontRef idx="minor">
+            <a:schemeClr val="lt1"/>
+          </a:fontRef>
+        </p:style>
+        <p:txBody>
+          <a:bodyPr rtlCol="0" anchor="ctr" wrap="square" lIns="18288" rIns="18288" tIns="0" bIns="0"/>
+          <a:lstStyle/>
+          <a:p>
+            <a:pPr algn="ctr">
+              <a:lnSpc>
+                <a:spcPct val="100000"/>
+              </a:lnSpc>
+            </a:pPr>
+            <a:r>
+              <a:rPr sz="750" b="0">
+                <a:solidFill>
+                  <a:srgbClr val="8B0F1A"/>
+                </a:solidFill>
+                <a:latin typeface="微软雅黑"/>
+                <a:ea typeface="微软雅黑"/>
+                <a:cs typeface="微软雅黑"/>
+              </a:rPr>
+              <a:t>1 个加密狗</a:t>
+            </a:r>
+          </a:p>
+        </p:txBody>
+      </p:sp>
+      <p:sp>
+        <p:nvSpPr>
+          <p:cNvPr id="44" name="TextBox 43"/>
+          <p:cNvSpPr txBox="1"/>
+          <p:nvPr/>
+        </p:nvSpPr>
+        <p:spPr>
+          <a:xfrm>
+            <a:off x="640080" y="4407407"/>
+            <a:ext cx="256032" cy="274320"/>
+          </a:xfrm>
+          <a:prstGeom prst="rect">
+            <a:avLst/>
+          </a:prstGeom>
+          <a:noFill/>
+        </p:spPr>
+        <p:txBody>
+          <a:bodyPr wrap="square" lIns="27432" rIns="27432" tIns="9144" bIns="9144" anchor="ctr">
+            <a:spAutoFit/>
+          </a:bodyPr>
+          <a:lstStyle/>
+          <a:p>
+            <a:pPr algn="ctr">
+              <a:lnSpc>
+                <a:spcPct val="110000"/>
+              </a:lnSpc>
+            </a:pPr>
+            <a:r>
+              <a:rPr sz="1100" b="1">
+                <a:solidFill>
+                  <a:srgbClr val="8B0F1A"/>
+                </a:solidFill>
+                <a:latin typeface="微软雅黑"/>
+                <a:ea typeface="微软雅黑"/>
+                <a:cs typeface="微软雅黑"/>
+              </a:rPr>
+              <a:t>×</a:t>
+            </a:r>
+          </a:p>
+        </p:txBody>
+      </p:sp>
+      <p:sp>
+        <p:nvSpPr>
+          <p:cNvPr id="45" name="TextBox 44"/>
+          <p:cNvSpPr txBox="1"/>
+          <p:nvPr/>
+        </p:nvSpPr>
+        <p:spPr>
+          <a:xfrm>
+            <a:off x="2377439" y="4407407"/>
+            <a:ext cx="256032" cy="274320"/>
+          </a:xfrm>
+          <a:prstGeom prst="rect">
+            <a:avLst/>
+          </a:prstGeom>
+          <a:noFill/>
+        </p:spPr>
+        <p:txBody>
+          <a:bodyPr wrap="square" lIns="27432" rIns="27432" tIns="9144" bIns="9144" anchor="ctr">
+            <a:spAutoFit/>
+          </a:bodyPr>
+          <a:lstStyle/>
+          <a:p>
+            <a:pPr algn="ctr">
+              <a:lnSpc>
+                <a:spcPct val="110000"/>
+              </a:lnSpc>
+            </a:pPr>
+            <a:r>
+              <a:rPr sz="1100" b="1">
+                <a:solidFill>
+                  <a:srgbClr val="8B0F1A"/>
+                </a:solidFill>
+                <a:latin typeface="微软雅黑"/>
+                <a:ea typeface="微软雅黑"/>
+                <a:cs typeface="微软雅黑"/>
+              </a:rPr>
+              <a:t>×</a:t>
+            </a:r>
+          </a:p>
+        </p:txBody>
+      </p:sp>
+      <p:sp>
+        <p:nvSpPr>
+          <p:cNvPr id="46" name="TextBox 45"/>
+          <p:cNvSpPr txBox="1"/>
+          <p:nvPr/>
+        </p:nvSpPr>
+        <p:spPr>
+          <a:xfrm>
+            <a:off x="2231136" y="4818888"/>
+            <a:ext cx="1005840" cy="182880"/>
+          </a:xfrm>
+          <a:prstGeom prst="rect">
+            <a:avLst/>
+          </a:prstGeom>
+          <a:noFill/>
+        </p:spPr>
+        <p:txBody>
+          <a:bodyPr wrap="square" lIns="27432" rIns="27432" tIns="9144" bIns="9144" anchor="ctr">
+            <a:spAutoFit/>
+          </a:bodyPr>
+          <a:lstStyle/>
+          <a:p>
+            <a:pPr algn="l">
+              <a:lnSpc>
+                <a:spcPct val="110000"/>
+              </a:lnSpc>
+            </a:pPr>
+            <a:r>
+              <a:rPr sz="750" b="0">
+                <a:solidFill>
+                  <a:srgbClr val="8B0F1A"/>
+                </a:solidFill>
+                <a:latin typeface="微软雅黑"/>
+                <a:ea typeface="微软雅黑"/>
+                <a:cs typeface="微软雅黑"/>
+              </a:rPr>
+              <a:t>无法并行</a:t>
+            </a:r>
+          </a:p>
+        </p:txBody>
+      </p:sp>
+      <p:sp>
+        <p:nvSpPr>
+          <p:cNvPr id="47" name="Rounded Rectangle 46"/>
+          <p:cNvSpPr/>
+          <p:nvPr/>
+        </p:nvSpPr>
+        <p:spPr>
+          <a:xfrm>
+            <a:off x="4224528" y="3703320"/>
+            <a:ext cx="3694176" cy="2240280"/>
+          </a:xfrm>
+          <a:prstGeom prst="roundRect">
+            <a:avLst>
+              <a:gd name="adj" fmla="val 4000"/>
+            </a:avLst>
+          </a:prstGeom>
+          <a:solidFill>
+            <a:srgbClr val="FFFFFF"/>
+          </a:solidFill>
+          <a:ln w="12700">
+            <a:solidFill>
+              <a:srgbClr val="C9C9C2"/>
+            </a:solidFill>
+          </a:ln>
+          <a:effectLst/>
+        </p:spPr>
+        <p:style>
+          <a:lnRef idx="1">
+            <a:schemeClr val="accent1"/>
+          </a:lnRef>
+          <a:fillRef idx="3">
+            <a:schemeClr val="accent1"/>
+          </a:fillRef>
+          <a:effectRef idx="2">
+            <a:schemeClr val="accent1"/>
+          </a:effectRef>
+          <a:fontRef idx="minor">
+            <a:schemeClr val="lt1"/>
+          </a:fontRef>
+        </p:style>
+        <p:txBody>
+          <a:bodyPr rtlCol="0" anchor="ctr" wrap="square"/>
+          <a:lstStyle/>
+          <a:p>
+            <a:pPr algn="ctr"/>
+          </a:p>
+        </p:txBody>
+      </p:sp>
+      <p:sp>
+        <p:nvSpPr>
+          <p:cNvPr id="48" name="TextBox 47"/>
+          <p:cNvSpPr txBox="1"/>
+          <p:nvPr/>
+        </p:nvSpPr>
+        <p:spPr>
+          <a:xfrm>
+            <a:off x="4334256" y="3776472"/>
+            <a:ext cx="3474720" cy="274320"/>
+          </a:xfrm>
+          <a:prstGeom prst="rect">
+            <a:avLst/>
+          </a:prstGeom>
+          <a:noFill/>
+        </p:spPr>
+        <p:txBody>
+          <a:bodyPr wrap="square" lIns="27432" rIns="27432" tIns="9144" bIns="9144" anchor="ctr">
+            <a:spAutoFit/>
+          </a:bodyPr>
+          <a:lstStyle/>
+          <a:p>
+            <a:pPr algn="l">
+              <a:lnSpc>
+                <a:spcPct val="110000"/>
+              </a:lnSpc>
+            </a:pPr>
+            <a:r>
+              <a:rPr sz="1000" b="1">
+                <a:solidFill>
+                  <a:srgbClr val="141414"/>
+                </a:solidFill>
+                <a:latin typeface="微软雅黑"/>
+                <a:ea typeface="微软雅黑"/>
+                <a:cs typeface="微软雅黑"/>
+              </a:rPr>
+              <a:t>⑪ 合规不允许接入</a:t>
+            </a:r>
+          </a:p>
+        </p:txBody>
+      </p:sp>
+      <p:sp>
+        <p:nvSpPr>
+          <p:cNvPr id="49" name="TextBox 48"/>
+          <p:cNvSpPr txBox="1"/>
+          <p:nvPr/>
+        </p:nvSpPr>
+        <p:spPr>
+          <a:xfrm>
+            <a:off x="4334256" y="5166360"/>
+            <a:ext cx="3474720" cy="694944"/>
+          </a:xfrm>
+          <a:prstGeom prst="rect">
+            <a:avLst/>
+          </a:prstGeom>
+          <a:noFill/>
+        </p:spPr>
+        <p:txBody>
+          <a:bodyPr wrap="square" lIns="27432" rIns="27432" tIns="9144" bIns="9144" anchor="t">
+            <a:spAutoFit/>
+          </a:bodyPr>
+          <a:lstStyle/>
+          <a:p>
+            <a:pPr algn="l">
+              <a:lnSpc>
+                <a:spcPct val="110000"/>
+              </a:lnSpc>
+            </a:pPr>
+            <a:r>
+              <a:rPr sz="850" b="0">
+                <a:solidFill>
+                  <a:srgbClr val="5C5C56"/>
+                </a:solidFill>
+                <a:latin typeface="微软雅黑"/>
+                <a:ea typeface="微软雅黑"/>
+                <a:cs typeface="微软雅黑"/>
+              </a:rPr>
+              <a:t>无代码签名、驱动未认证、开放高危端口或缺少审计日志，入网审批不通过</a:t>
+            </a:r>
+          </a:p>
+        </p:txBody>
+      </p:sp>
+      <p:sp>
+        <p:nvSpPr>
+          <p:cNvPr id="50" name="Rectangle 49"/>
+          <p:cNvSpPr/>
+          <p:nvPr/>
+        </p:nvSpPr>
+        <p:spPr>
+          <a:xfrm>
+            <a:off x="4334256" y="4105655"/>
+            <a:ext cx="1188720" cy="274320"/>
+          </a:xfrm>
+          <a:prstGeom prst="rect">
+            <a:avLst/>
+          </a:prstGeom>
+          <a:solidFill>
+            <a:srgbClr val="ECECEC"/>
+          </a:solidFill>
+          <a:ln>
+            <a:noFill/>
+          </a:ln>
+          <a:effectLst/>
+        </p:spPr>
+        <p:style>
+          <a:lnRef idx="1">
+            <a:schemeClr val="accent1"/>
+          </a:lnRef>
+          <a:fillRef idx="3">
+            <a:schemeClr val="accent1"/>
+          </a:fillRef>
+          <a:effectRef idx="2">
+            <a:schemeClr val="accent1"/>
+          </a:effectRef>
+          <a:fontRef idx="minor">
+            <a:schemeClr val="lt1"/>
+          </a:fontRef>
+        </p:style>
+        <p:txBody>
+          <a:bodyPr rtlCol="0" anchor="ctr" wrap="square" lIns="18288" rIns="18288" tIns="0" bIns="0"/>
+          <a:lstStyle/>
+          <a:p>
+            <a:pPr algn="ctr">
+              <a:lnSpc>
+                <a:spcPct val="100000"/>
+              </a:lnSpc>
+            </a:pPr>
+            <a:r>
+              <a:rPr sz="750" b="0">
+                <a:solidFill>
+                  <a:srgbClr val="3A3A35"/>
+                </a:solidFill>
+                <a:latin typeface="微软雅黑"/>
+                <a:ea typeface="微软雅黑"/>
+                <a:cs typeface="微软雅黑"/>
+              </a:rPr>
+              <a:t>无签名驱动</a:t>
+            </a:r>
+          </a:p>
+        </p:txBody>
+      </p:sp>
+      <p:sp>
+        <p:nvSpPr>
+          <p:cNvPr id="51" name="Rectangle 50"/>
+          <p:cNvSpPr/>
+          <p:nvPr/>
+        </p:nvSpPr>
+        <p:spPr>
+          <a:xfrm>
+            <a:off x="4334256" y="4434840"/>
+            <a:ext cx="1188720" cy="274320"/>
+          </a:xfrm>
+          <a:prstGeom prst="rect">
+            <a:avLst/>
+          </a:prstGeom>
+          <a:solidFill>
+            <a:srgbClr val="ECECEC"/>
+          </a:solidFill>
+          <a:ln>
+            <a:noFill/>
+          </a:ln>
+          <a:effectLst/>
+        </p:spPr>
+        <p:style>
+          <a:lnRef idx="1">
+            <a:schemeClr val="accent1"/>
+          </a:lnRef>
+          <a:fillRef idx="3">
+            <a:schemeClr val="accent1"/>
+          </a:fillRef>
+          <a:effectRef idx="2">
+            <a:schemeClr val="accent1"/>
+          </a:effectRef>
+          <a:fontRef idx="minor">
+            <a:schemeClr val="lt1"/>
+          </a:fontRef>
+        </p:style>
+        <p:txBody>
+          <a:bodyPr rtlCol="0" anchor="ctr" wrap="square" lIns="18288" rIns="18288" tIns="0" bIns="0"/>
+          <a:lstStyle/>
+          <a:p>
+            <a:pPr algn="ctr">
+              <a:lnSpc>
+                <a:spcPct val="100000"/>
+              </a:lnSpc>
+            </a:pPr>
+            <a:r>
+              <a:rPr sz="750" b="0">
+                <a:solidFill>
+                  <a:srgbClr val="3A3A35"/>
+                </a:solidFill>
+                <a:latin typeface="微软雅黑"/>
+                <a:ea typeface="微软雅黑"/>
+                <a:cs typeface="微软雅黑"/>
+              </a:rPr>
+              <a:t>开放高危端口</a:t>
+            </a:r>
+          </a:p>
+        </p:txBody>
+      </p:sp>
+      <p:sp>
+        <p:nvSpPr>
+          <p:cNvPr id="52" name="Rectangle 51"/>
+          <p:cNvSpPr/>
+          <p:nvPr/>
+        </p:nvSpPr>
+        <p:spPr>
+          <a:xfrm>
+            <a:off x="4334256" y="4764023"/>
+            <a:ext cx="1188720" cy="274320"/>
+          </a:xfrm>
+          <a:prstGeom prst="rect">
+            <a:avLst/>
+          </a:prstGeom>
+          <a:solidFill>
+            <a:srgbClr val="ECECEC"/>
+          </a:solidFill>
+          <a:ln>
+            <a:noFill/>
+          </a:ln>
+          <a:effectLst/>
+        </p:spPr>
+        <p:style>
+          <a:lnRef idx="1">
+            <a:schemeClr val="accent1"/>
+          </a:lnRef>
+          <a:fillRef idx="3">
+            <a:schemeClr val="accent1"/>
+          </a:fillRef>
+          <a:effectRef idx="2">
+            <a:schemeClr val="accent1"/>
+          </a:effectRef>
+          <a:fontRef idx="minor">
+            <a:schemeClr val="lt1"/>
+          </a:fontRef>
+        </p:style>
+        <p:txBody>
+          <a:bodyPr rtlCol="0" anchor="ctr" wrap="square" lIns="18288" rIns="18288" tIns="0" bIns="0"/>
+          <a:lstStyle/>
+          <a:p>
+            <a:pPr algn="ctr">
+              <a:lnSpc>
+                <a:spcPct val="100000"/>
+              </a:lnSpc>
+            </a:pPr>
+            <a:r>
+              <a:rPr sz="750" b="0">
+                <a:solidFill>
+                  <a:srgbClr val="3A3A35"/>
+                </a:solidFill>
+                <a:latin typeface="微软雅黑"/>
+                <a:ea typeface="微软雅黑"/>
+                <a:cs typeface="微软雅黑"/>
+              </a:rPr>
+              <a:t>无审计日志</a:t>
+            </a:r>
+          </a:p>
+        </p:txBody>
+      </p:sp>
+      <p:sp>
+        <p:nvSpPr>
+          <p:cNvPr id="53" name="Hexagon 52"/>
+          <p:cNvSpPr/>
+          <p:nvPr/>
+        </p:nvSpPr>
+        <p:spPr>
+          <a:xfrm>
+            <a:off x="6181344" y="4306824"/>
+            <a:ext cx="1325880" cy="640080"/>
+          </a:xfrm>
+          <a:prstGeom prst="hexagon">
+            <a:avLst/>
+          </a:prstGeom>
+          <a:solidFill>
+            <a:srgbClr val="2B2B28"/>
+          </a:solidFill>
+          <a:ln>
+            <a:noFill/>
+          </a:ln>
+          <a:effectLst/>
+        </p:spPr>
+        <p:style>
+          <a:lnRef idx="1">
+            <a:schemeClr val="accent1"/>
+          </a:lnRef>
+          <a:fillRef idx="3">
+            <a:schemeClr val="accent1"/>
+          </a:fillRef>
+          <a:effectRef idx="2">
+            <a:schemeClr val="accent1"/>
+          </a:effectRef>
+          <a:fontRef idx="minor">
+            <a:schemeClr val="lt1"/>
+          </a:fontRef>
+        </p:style>
+        <p:txBody>
+          <a:bodyPr rtlCol="0" anchor="ctr" lIns="18288" rIns="18288" tIns="0" bIns="0"/>
+          <a:lstStyle/>
+          <a:p>
+            <a:pPr algn="ctr">
+              <a:lnSpc>
+                <a:spcPct val="100000"/>
+              </a:lnSpc>
+            </a:pPr>
+            <a:r>
+              <a:rPr sz="850" b="1">
+                <a:solidFill>
+                  <a:srgbClr val="FFFFFF"/>
+                </a:solidFill>
+                <a:latin typeface="微软雅黑"/>
+                <a:ea typeface="微软雅黑"/>
+                <a:cs typeface="微软雅黑"/>
+              </a:rPr>
+              <a:t>IT 安全策略</a:t>
+            </a:r>
+          </a:p>
+        </p:txBody>
+      </p:sp>
+      <p:cxnSp>
+        <p:nvCxnSpPr>
+          <p:cNvPr id="54" name="Connector 53"/>
+          <p:cNvCxnSpPr/>
+          <p:nvPr/>
+        </p:nvCxnSpPr>
+        <p:spPr>
+          <a:xfrm>
+            <a:off x="5522976" y="4562856"/>
+            <a:ext cx="658368" cy="0"/>
+          </a:xfrm>
+          <a:prstGeom prst="line">
+            <a:avLst/>
+          </a:prstGeom>
+          <a:ln w="12700">
+            <a:solidFill>
+              <a:srgbClr val="5C5C56"/>
+            </a:solidFill>
+            <a:prstDash val="dash"/>
+          </a:ln>
+        </p:spPr>
+        <p:style>
+          <a:lnRef idx="2">
+            <a:schemeClr val="accent1"/>
+          </a:lnRef>
+          <a:fillRef idx="0">
+            <a:schemeClr val="accent1"/>
+          </a:fillRef>
+          <a:effectRef idx="1">
+            <a:schemeClr val="accent1"/>
+          </a:effectRef>
+          <a:fontRef idx="minor">
+            <a:schemeClr val="tx1"/>
+          </a:fontRef>
+        </p:style>
+      </p:cxnSp>
+      <p:sp>
+        <p:nvSpPr>
+          <p:cNvPr id="55" name="TextBox 54"/>
+          <p:cNvSpPr txBox="1"/>
+          <p:nvPr/>
+        </p:nvSpPr>
+        <p:spPr>
+          <a:xfrm>
+            <a:off x="5724144" y="4297679"/>
+            <a:ext cx="256032" cy="274320"/>
+          </a:xfrm>
+          <a:prstGeom prst="rect">
+            <a:avLst/>
+          </a:prstGeom>
+          <a:noFill/>
+        </p:spPr>
+        <p:txBody>
+          <a:bodyPr wrap="square" lIns="27432" rIns="27432" tIns="9144" bIns="9144" anchor="ctr">
+            <a:spAutoFit/>
+          </a:bodyPr>
+          <a:lstStyle/>
+          <a:p>
+            <a:pPr algn="ctr">
+              <a:lnSpc>
+                <a:spcPct val="110000"/>
+              </a:lnSpc>
+            </a:pPr>
+            <a:r>
+              <a:rPr sz="1300" b="1">
+                <a:solidFill>
+                  <a:srgbClr val="8B0F1A"/>
+                </a:solidFill>
+                <a:latin typeface="微软雅黑"/>
+                <a:ea typeface="微软雅黑"/>
+                <a:cs typeface="微软雅黑"/>
+              </a:rPr>
+              <a:t>×</a:t>
+            </a:r>
+          </a:p>
+        </p:txBody>
+      </p:sp>
+      <p:sp>
+        <p:nvSpPr>
+          <p:cNvPr id="56" name="Rounded Rectangle 55"/>
+          <p:cNvSpPr/>
+          <p:nvPr/>
+        </p:nvSpPr>
+        <p:spPr>
+          <a:xfrm>
+            <a:off x="8174736" y="3703320"/>
+            <a:ext cx="3694176" cy="2240280"/>
+          </a:xfrm>
+          <a:prstGeom prst="roundRect">
+            <a:avLst>
+              <a:gd name="adj" fmla="val 4000"/>
+            </a:avLst>
+          </a:prstGeom>
+          <a:solidFill>
+            <a:srgbClr val="FFFFFF"/>
+          </a:solidFill>
+          <a:ln w="12700">
+            <a:solidFill>
+              <a:srgbClr val="C9C9C2"/>
+            </a:solidFill>
+          </a:ln>
+          <a:effectLst/>
+        </p:spPr>
+        <p:style>
+          <a:lnRef idx="1">
+            <a:schemeClr val="accent1"/>
+          </a:lnRef>
+          <a:fillRef idx="3">
+            <a:schemeClr val="accent1"/>
+          </a:fillRef>
+          <a:effectRef idx="2">
+            <a:schemeClr val="accent1"/>
+          </a:effectRef>
+          <a:fontRef idx="minor">
+            <a:schemeClr val="lt1"/>
+          </a:fontRef>
+        </p:style>
+        <p:txBody>
+          <a:bodyPr rtlCol="0" anchor="ctr" wrap="square"/>
+          <a:lstStyle/>
+          <a:p>
+            <a:pPr algn="ctr"/>
+          </a:p>
+        </p:txBody>
+      </p:sp>
+      <p:sp>
+        <p:nvSpPr>
+          <p:cNvPr id="57" name="TextBox 56"/>
+          <p:cNvSpPr txBox="1"/>
+          <p:nvPr/>
+        </p:nvSpPr>
+        <p:spPr>
+          <a:xfrm>
+            <a:off x="8284463" y="3776472"/>
+            <a:ext cx="3474720" cy="274320"/>
+          </a:xfrm>
+          <a:prstGeom prst="rect">
+            <a:avLst/>
+          </a:prstGeom>
+          <a:noFill/>
+        </p:spPr>
+        <p:txBody>
+          <a:bodyPr wrap="square" lIns="27432" rIns="27432" tIns="9144" bIns="9144" anchor="ctr">
+            <a:spAutoFit/>
+          </a:bodyPr>
+          <a:lstStyle/>
+          <a:p>
+            <a:pPr algn="l">
+              <a:lnSpc>
+                <a:spcPct val="110000"/>
+              </a:lnSpc>
+            </a:pPr>
+            <a:r>
+              <a:rPr sz="1000" b="1">
+                <a:solidFill>
+                  <a:srgbClr val="141414"/>
+                </a:solidFill>
+                <a:latin typeface="微软雅黑"/>
+                <a:ea typeface="微软雅黑"/>
+                <a:cs typeface="微软雅黑"/>
+              </a:rPr>
+              <a:t>⑫ 外网校验与回传</a:t>
+            </a:r>
+          </a:p>
+        </p:txBody>
+      </p:sp>
+      <p:sp>
+        <p:nvSpPr>
+          <p:cNvPr id="58" name="TextBox 57"/>
+          <p:cNvSpPr txBox="1"/>
+          <p:nvPr/>
+        </p:nvSpPr>
+        <p:spPr>
+          <a:xfrm>
+            <a:off x="8284463" y="5166360"/>
+            <a:ext cx="3474720" cy="694944"/>
+          </a:xfrm>
+          <a:prstGeom prst="rect">
+            <a:avLst/>
+          </a:prstGeom>
+          <a:noFill/>
+        </p:spPr>
+        <p:txBody>
+          <a:bodyPr wrap="square" lIns="27432" rIns="27432" tIns="9144" bIns="9144" anchor="t">
+            <a:spAutoFit/>
+          </a:bodyPr>
+          <a:lstStyle/>
+          <a:p>
+            <a:pPr algn="l">
+              <a:lnSpc>
+                <a:spcPct val="110000"/>
+              </a:lnSpc>
+            </a:pPr>
+            <a:r>
+              <a:rPr sz="850" b="0">
+                <a:solidFill>
+                  <a:srgbClr val="5C5C56"/>
+                </a:solidFill>
+                <a:latin typeface="微软雅黑"/>
+                <a:ea typeface="微软雅黑"/>
+                <a:cs typeface="微软雅黑"/>
+              </a:rPr>
+              <a:t>需连供应商云完成激活，并把工艺数据回传云端；产线无外网，数据也不允许出境</a:t>
+            </a:r>
+          </a:p>
+        </p:txBody>
+      </p:sp>
+      <p:sp>
+        <p:nvSpPr>
+          <p:cNvPr id="59" name="Rounded Rectangle 58"/>
+          <p:cNvSpPr/>
+          <p:nvPr/>
+        </p:nvSpPr>
+        <p:spPr>
+          <a:xfrm>
+            <a:off x="8284463" y="4251959"/>
+            <a:ext cx="1051560" cy="502920"/>
+          </a:xfrm>
+          <a:prstGeom prst="roundRect">
+            <a:avLst>
+              <a:gd name="adj" fmla="val 5000"/>
+            </a:avLst>
+          </a:prstGeom>
+          <a:solidFill>
+            <a:srgbClr val="ECECEC"/>
+          </a:solidFill>
+          <a:ln w="11430">
+            <a:solidFill>
+              <a:srgbClr val="C9C9C2"/>
+            </a:solidFill>
+          </a:ln>
+          <a:effectLst/>
+        </p:spPr>
+        <p:style>
+          <a:lnRef idx="1">
+            <a:schemeClr val="accent1"/>
+          </a:lnRef>
+          <a:fillRef idx="3">
+            <a:schemeClr val="accent1"/>
+          </a:fillRef>
+          <a:effectRef idx="2">
+            <a:schemeClr val="accent1"/>
+          </a:effectRef>
+          <a:fontRef idx="minor">
+            <a:schemeClr val="lt1"/>
+          </a:fontRef>
+        </p:style>
+        <p:txBody>
+          <a:bodyPr rtlCol="0" anchor="ctr" wrap="square" lIns="18288" rIns="18288" tIns="0" bIns="0"/>
+          <a:lstStyle/>
+          <a:p>
+            <a:pPr algn="ctr">
+              <a:lnSpc>
+                <a:spcPct val="100000"/>
+              </a:lnSpc>
+            </a:pPr>
+            <a:r>
+              <a:rPr sz="750" b="0">
+                <a:solidFill>
+                  <a:srgbClr val="141414"/>
+                </a:solidFill>
+                <a:latin typeface="微软雅黑"/>
+                <a:ea typeface="微软雅黑"/>
+                <a:cs typeface="微软雅黑"/>
+              </a:rPr>
+              <a:t>供应商软件</a:t>
+            </a:r>
+          </a:p>
+        </p:txBody>
+      </p:sp>
+      <p:cxnSp>
+        <p:nvCxnSpPr>
+          <p:cNvPr id="60" name="Connector 59"/>
+          <p:cNvCxnSpPr/>
+          <p:nvPr/>
+        </p:nvCxnSpPr>
+        <p:spPr>
+          <a:xfrm>
+            <a:off x="9336024" y="4498848"/>
+            <a:ext cx="393191" cy="0"/>
+          </a:xfrm>
+          <a:prstGeom prst="line">
+            <a:avLst/>
+          </a:prstGeom>
+          <a:ln w="12700">
+            <a:solidFill>
+              <a:srgbClr val="5C5C56"/>
+            </a:solidFill>
+            <a:prstDash val="dash"/>
+          </a:ln>
+        </p:spPr>
+        <p:style>
+          <a:lnRef idx="2">
+            <a:schemeClr val="accent1"/>
+          </a:lnRef>
+          <a:fillRef idx="0">
+            <a:schemeClr val="accent1"/>
+          </a:fillRef>
+          <a:effectRef idx="1">
+            <a:schemeClr val="accent1"/>
+          </a:effectRef>
+          <a:fontRef idx="minor">
+            <a:schemeClr val="tx1"/>
+          </a:fontRef>
+        </p:style>
+      </p:cxnSp>
+      <p:sp>
+        <p:nvSpPr>
+          <p:cNvPr id="61" name="Rectangle 60"/>
+          <p:cNvSpPr/>
+          <p:nvPr/>
+        </p:nvSpPr>
+        <p:spPr>
+          <a:xfrm>
+            <a:off x="9729215" y="4160520"/>
+            <a:ext cx="274320" cy="658368"/>
+          </a:xfrm>
+          <a:prstGeom prst="rect">
+            <a:avLst/>
+          </a:prstGeom>
+          <a:solidFill>
+            <a:srgbClr val="8B0F1A"/>
+          </a:solidFill>
+          <a:ln>
+            <a:noFill/>
+          </a:ln>
+          <a:effectLst/>
+        </p:spPr>
+        <p:style>
+          <a:lnRef idx="1">
+            <a:schemeClr val="accent1"/>
+          </a:lnRef>
+          <a:fillRef idx="3">
+            <a:schemeClr val="accent1"/>
+          </a:fillRef>
+          <a:effectRef idx="2">
+            <a:schemeClr val="accent1"/>
+          </a:effectRef>
+          <a:fontRef idx="minor">
+            <a:schemeClr val="lt1"/>
+          </a:fontRef>
+        </p:style>
+        <p:txBody>
+          <a:bodyPr rtlCol="0" anchor="ctr" wrap="square" lIns="18288" rIns="18288" tIns="0" bIns="0"/>
+          <a:lstStyle/>
+          <a:p>
+            <a:pPr algn="ctr">
+              <a:lnSpc>
+                <a:spcPct val="100000"/>
+              </a:lnSpc>
+            </a:pPr>
+            <a:r>
+              <a:rPr sz="650" b="0">
+                <a:solidFill>
+                  <a:srgbClr val="FFFFFF"/>
+                </a:solidFill>
+                <a:latin typeface="微软雅黑"/>
+                <a:ea typeface="微软雅黑"/>
+                <a:cs typeface="微软雅黑"/>
+              </a:rPr>
+              <a:t>无
+外
+网</a:t>
+            </a:r>
+          </a:p>
+        </p:txBody>
+      </p:sp>
+      <p:sp>
+        <p:nvSpPr>
+          <p:cNvPr id="62" name="Cloud 61"/>
+          <p:cNvSpPr/>
+          <p:nvPr/>
+        </p:nvSpPr>
+        <p:spPr>
+          <a:xfrm>
+            <a:off x="10204703" y="4215383"/>
+            <a:ext cx="1371600" cy="566928"/>
+          </a:xfrm>
+          <a:prstGeom prst="cloud">
+            <a:avLst/>
+          </a:prstGeom>
+          <a:solidFill>
+            <a:srgbClr val="ECECEC"/>
+          </a:solidFill>
+          <a:ln w="11430">
+            <a:solidFill>
+              <a:srgbClr val="C9C9C2"/>
+            </a:solidFill>
+          </a:ln>
+          <a:effectLst/>
+        </p:spPr>
+        <p:style>
+          <a:lnRef idx="1">
+            <a:schemeClr val="accent1"/>
+          </a:lnRef>
+          <a:fillRef idx="3">
+            <a:schemeClr val="accent1"/>
+          </a:fillRef>
+          <a:effectRef idx="2">
+            <a:schemeClr val="accent1"/>
+          </a:effectRef>
+          <a:fontRef idx="minor">
+            <a:schemeClr val="lt1"/>
+          </a:fontRef>
+        </p:style>
+        <p:txBody>
+          <a:bodyPr rtlCol="0" anchor="ctr" lIns="18288" rIns="18288" tIns="0" bIns="0"/>
+          <a:lstStyle/>
+          <a:p>
+            <a:pPr algn="ctr">
+              <a:lnSpc>
+                <a:spcPct val="100000"/>
+              </a:lnSpc>
+            </a:pPr>
+            <a:r>
+              <a:rPr sz="750" b="0">
+                <a:solidFill>
+                  <a:srgbClr val="141414"/>
+                </a:solidFill>
+                <a:latin typeface="微软雅黑"/>
+                <a:ea typeface="微软雅黑"/>
+                <a:cs typeface="微软雅黑"/>
+              </a:rPr>
+              <a:t>供应商云</a:t>
+            </a:r>
+          </a:p>
+        </p:txBody>
+      </p:sp>
+      <p:sp>
+        <p:nvSpPr>
+          <p:cNvPr id="63" name="TextBox 62"/>
+          <p:cNvSpPr txBox="1"/>
+          <p:nvPr/>
+        </p:nvSpPr>
+        <p:spPr>
+          <a:xfrm>
+            <a:off x="9473183" y="4206240"/>
+            <a:ext cx="256032" cy="274320"/>
+          </a:xfrm>
+          <a:prstGeom prst="rect">
+            <a:avLst/>
+          </a:prstGeom>
+          <a:noFill/>
+        </p:spPr>
+        <p:txBody>
+          <a:bodyPr wrap="square" lIns="27432" rIns="27432" tIns="9144" bIns="9144" anchor="ctr">
+            <a:spAutoFit/>
+          </a:bodyPr>
+          <a:lstStyle/>
+          <a:p>
+            <a:pPr algn="ctr">
+              <a:lnSpc>
+                <a:spcPct val="110000"/>
+              </a:lnSpc>
+            </a:pPr>
+            <a:r>
+              <a:rPr sz="1200" b="1">
+                <a:solidFill>
+                  <a:srgbClr val="8B0F1A"/>
+                </a:solidFill>
+                <a:latin typeface="微软雅黑"/>
+                <a:ea typeface="微软雅黑"/>
+                <a:cs typeface="微软雅黑"/>
+              </a:rPr>
+              <a:t>×</a:t>
+            </a:r>
+          </a:p>
+        </p:txBody>
+      </p:sp>
+      <p:sp>
+        <p:nvSpPr>
+          <p:cNvPr id="64" name="TextBox 63"/>
+          <p:cNvSpPr txBox="1"/>
+          <p:nvPr/>
+        </p:nvSpPr>
+        <p:spPr>
+          <a:xfrm>
+            <a:off x="9701784" y="4855464"/>
+            <a:ext cx="1874519" cy="182880"/>
+          </a:xfrm>
+          <a:prstGeom prst="rect">
+            <a:avLst/>
+          </a:prstGeom>
+          <a:noFill/>
+        </p:spPr>
+        <p:txBody>
+          <a:bodyPr wrap="square" lIns="27432" rIns="27432" tIns="9144" bIns="9144" anchor="ctr">
+            <a:spAutoFit/>
+          </a:bodyPr>
+          <a:lstStyle/>
+          <a:p>
+            <a:pPr algn="ctr">
+              <a:lnSpc>
+                <a:spcPct val="110000"/>
+              </a:lnSpc>
+            </a:pPr>
+            <a:r>
+              <a:rPr sz="750" b="0">
+                <a:solidFill>
+                  <a:srgbClr val="8B0F1A"/>
+                </a:solidFill>
+                <a:latin typeface="微软雅黑"/>
+                <a:ea typeface="微软雅黑"/>
+                <a:cs typeface="微软雅黑"/>
+              </a:rPr>
+              <a:t>无法激活 / 工艺数据外传</a:t>
+            </a:r>
+          </a:p>
+        </p:txBody>
+      </p:sp>
+      <p:sp>
+        <p:nvSpPr>
+          <p:cNvPr id="65" name="Rectangle 64"/>
+          <p:cNvSpPr/>
+          <p:nvPr/>
+        </p:nvSpPr>
+        <p:spPr>
+          <a:xfrm>
+            <a:off x="274320" y="6400800"/>
+            <a:ext cx="11640312" cy="12801"/>
+          </a:xfrm>
+          <a:prstGeom prst="rect">
+            <a:avLst/>
+          </a:prstGeom>
+          <a:solidFill>
+            <a:srgbClr val="D9D6CD"/>
+          </a:solidFill>
+          <a:ln>
+            <a:noFill/>
+          </a:ln>
+          <a:effectLst/>
+        </p:spPr>
+        <p:style>
+          <a:lnRef idx="1">
+            <a:schemeClr val="accent1"/>
+          </a:lnRef>
+          <a:fillRef idx="3">
+            <a:schemeClr val="accent1"/>
+          </a:fillRef>
+          <a:effectRef idx="2">
+            <a:schemeClr val="accent1"/>
+          </a:effectRef>
+          <a:fontRef idx="minor">
+            <a:schemeClr val="lt1"/>
+          </a:fontRef>
+        </p:style>
+        <p:txBody>
+          <a:bodyPr rtlCol="0" anchor="ctr" wrap="square"/>
+          <a:lstStyle/>
+          <a:p>
+            <a:pPr algn="ctr"/>
+          </a:p>
+        </p:txBody>
+      </p:sp>
+      <p:sp>
+        <p:nvSpPr>
+          <p:cNvPr id="66" name="TextBox 65"/>
+          <p:cNvSpPr txBox="1"/>
+          <p:nvPr/>
+        </p:nvSpPr>
+        <p:spPr>
+          <a:xfrm>
+            <a:off x="274320" y="6446520"/>
+            <a:ext cx="6858000" cy="274320"/>
+          </a:xfrm>
+          <a:prstGeom prst="rect">
+            <a:avLst/>
+          </a:prstGeom>
+          <a:noFill/>
+        </p:spPr>
+        <p:txBody>
+          <a:bodyPr wrap="square" lIns="27432" rIns="27432" tIns="9144" bIns="9144" anchor="ctr">
+            <a:spAutoFit/>
+          </a:bodyPr>
+          <a:lstStyle/>
+          <a:p>
+            <a:pPr algn="l">
+              <a:lnSpc>
+                <a:spcPct val="110000"/>
+              </a:lnSpc>
+            </a:pPr>
+            <a:r>
+              <a:rPr sz="850" b="0">
+                <a:solidFill>
+                  <a:srgbClr val="5C5C56"/>
+                </a:solidFill>
+                <a:latin typeface="微软雅黑"/>
+                <a:ea typeface="微软雅黑"/>
+                <a:cs typeface="微软雅黑"/>
+              </a:rPr>
+              <a:t>⑦ ⑧ 属运行环境，⑨ ⑩ 属授权与商务，⑪ ⑫ 属合规与数据</a:t>
+            </a:r>
+          </a:p>
+        </p:txBody>
+      </p:sp>
+      <p:sp>
+        <p:nvSpPr>
+          <p:cNvPr id="67" name="TextBox 66"/>
+          <p:cNvSpPr txBox="1"/>
+          <p:nvPr/>
+        </p:nvSpPr>
+        <p:spPr>
+          <a:xfrm>
+            <a:off x="7223760" y="6446520"/>
+            <a:ext cx="4690872" cy="274320"/>
+          </a:xfrm>
+          <a:prstGeom prst="rect">
+            <a:avLst/>
+          </a:prstGeom>
+          <a:noFill/>
+        </p:spPr>
+        <p:txBody>
+          <a:bodyPr wrap="square" lIns="27432" rIns="27432" tIns="9144" bIns="9144" anchor="ctr">
+            <a:spAutoFit/>
+          </a:bodyPr>
+          <a:lstStyle/>
+          <a:p>
+            <a:pPr algn="r">
+              <a:lnSpc>
+                <a:spcPct val="110000"/>
+              </a:lnSpc>
+            </a:pPr>
+            <a:r>
+              <a:rPr sz="850" b="0">
+                <a:solidFill>
+                  <a:srgbClr val="5C5C56"/>
+                </a:solidFill>
+                <a:latin typeface="微软雅黑"/>
+                <a:ea typeface="微软雅黑"/>
+                <a:cs typeface="微软雅黑"/>
+              </a:rPr>
+              <a:t>红线为该格阻断发生的具体位置</a:t>
+            </a:r>
+          </a:p>
+        </p:txBody>
+      </p:sp>
+    </p:spTree>
+  </p:cSld>
+  <p:clrMapOvr>
+    <a:masterClrMapping/>
+  </p:clrMapOvr>
+</p:sld>
+</file>
+
+<file path=ppt/slides/slide4.xml><?xml version="1.0" encoding="utf-8"?>
+<p:sld xmlns:a="http://schemas.openxmlformats.org/drawingml/2006/main" xmlns:p="http://schemas.openxmlformats.org/presentationml/2006/main" xmlns:r="http://schemas.openxmlformats.org/officeDocument/2006/relationships">
+  <p:cSld>
+    <p:spTree>
+      <p:nvGrpSpPr>
+        <p:cNvPr id="1" name=""/>
+        <p:cNvGrpSpPr/>
+        <p:nvPr/>
+      </p:nvGrpSpPr>
+      <p:grpSpPr/>
+      <p:sp>
+        <p:nvSpPr>
+          <p:cNvPr id="2" name="TextBox 1"/>
+          <p:cNvSpPr txBox="1"/>
+          <p:nvPr/>
+        </p:nvSpPr>
+        <p:spPr>
+          <a:xfrm>
+            <a:off x="274320" y="201168"/>
+            <a:ext cx="10881360" cy="457200"/>
+          </a:xfrm>
+          <a:prstGeom prst="rect">
+            <a:avLst/>
+          </a:prstGeom>
+          <a:noFill/>
+        </p:spPr>
+        <p:txBody>
+          <a:bodyPr wrap="square" lIns="27432" rIns="27432" tIns="9144" bIns="9144" anchor="ctr">
+            <a:spAutoFit/>
+          </a:bodyPr>
+          <a:lstStyle/>
+          <a:p>
+            <a:pPr algn="l">
+              <a:lnSpc>
+                <a:spcPct val="110000"/>
+              </a:lnSpc>
+            </a:pPr>
+            <a:r>
+              <a:rPr sz="2400" b="1">
+                <a:solidFill>
+                  <a:srgbClr val="141414"/>
+                </a:solidFill>
+                <a:latin typeface="微软雅黑"/>
+                <a:ea typeface="微软雅黑"/>
+                <a:cs typeface="微软雅黑"/>
+              </a:rPr>
               <a:t>供应商设备软件的形态与 ATE 接入方式</a:t>
             </a:r>
           </a:p>
@@ -11942,7 +17102,7 @@
         <p:spPr>
           <a:xfrm>
             <a:off x="274320" y="6446520"/>
-            <a:ext cx="6675120" cy="274320"/>
+            <a:ext cx="6858000" cy="274320"/>
           </a:xfrm>
           <a:prstGeom prst="rect">
             <a:avLst/>
@@ -11982,8 +17142,8 @@
         </p:nvSpPr>
         <p:spPr>
           <a:xfrm>
-            <a:off x="7040880" y="6446520"/>
-            <a:ext cx="4873752" cy="274320"/>
+            <a:off x="7223760" y="6446520"/>
+            <a:ext cx="4690872" cy="274320"/>
           </a:xfrm>
           <a:prstGeom prst="rect">
             <a:avLst/>

--- a/docs/装备软件/供应商软件形态与ATE接入.pptx
+++ b/docs/装备软件/供应商软件形态与ATE接入.pptx
@@ -9,6 +9,7 @@
     <p:sldId id="257" r:id="rId8"/>
     <p:sldId id="258" r:id="rId9"/>
     <p:sldId id="259" r:id="rId10"/>
+    <p:sldId id="260" r:id="rId11"/>
   </p:sldIdLst>
   <p:sldSz cx="12191695" cy="6858000" type="screen4x3"/>
   <p:notesSz cx="6858000" cy="9144000"/>
@@ -17171,6 +17172,3421 @@
                 <a:cs typeface="微软雅黑"/>
               </a:rPr>
               <a:t>形态越靠「文档」，封装工作量越大；同一设备多形态时优先选二进制接口或官方 Python 库</a:t>
+            </a:r>
+          </a:p>
+        </p:txBody>
+      </p:sp>
+    </p:spTree>
+  </p:cSld>
+  <p:clrMapOvr>
+    <a:masterClrMapping/>
+  </p:clrMapOvr>
+</p:sld>
+</file>
+
+<file path=ppt/slides/slide5.xml><?xml version="1.0" encoding="utf-8"?>
+<p:sld xmlns:a="http://schemas.openxmlformats.org/drawingml/2006/main" xmlns:p="http://schemas.openxmlformats.org/presentationml/2006/main" xmlns:r="http://schemas.openxmlformats.org/officeDocument/2006/relationships">
+  <p:cSld>
+    <p:spTree>
+      <p:nvGrpSpPr>
+        <p:cNvPr id="1" name=""/>
+        <p:cNvGrpSpPr/>
+        <p:nvPr/>
+      </p:nvGrpSpPr>
+      <p:grpSpPr/>
+      <p:sp>
+        <p:nvSpPr>
+          <p:cNvPr id="2" name="TextBox 1"/>
+          <p:cNvSpPr txBox="1"/>
+          <p:nvPr/>
+        </p:nvSpPr>
+        <p:spPr>
+          <a:xfrm>
+            <a:off x="274320" y="201168"/>
+            <a:ext cx="10881360" cy="457200"/>
+          </a:xfrm>
+          <a:prstGeom prst="rect">
+            <a:avLst/>
+          </a:prstGeom>
+          <a:noFill/>
+        </p:spPr>
+        <p:txBody>
+          <a:bodyPr wrap="square" lIns="27432" rIns="27432" tIns="9144" bIns="9144" anchor="ctr">
+            <a:spAutoFit/>
+          </a:bodyPr>
+          <a:lstStyle/>
+          <a:p>
+            <a:pPr algn="l">
+              <a:lnSpc>
+                <a:spcPct val="110000"/>
+              </a:lnSpc>
+            </a:pPr>
+            <a:r>
+              <a:rPr sz="2400" b="1">
+                <a:solidFill>
+                  <a:srgbClr val="141414"/>
+                </a:solidFill>
+                <a:latin typeface="微软雅黑"/>
+                <a:ea typeface="微软雅黑"/>
+                <a:cs typeface="微软雅黑"/>
+              </a:rPr>
+              <a:t>整体运行流程 · 任务令驱动的测试闭环</a:t>
+            </a:r>
+          </a:p>
+        </p:txBody>
+      </p:sp>
+      <p:sp>
+        <p:nvSpPr>
+          <p:cNvPr id="3" name="TextBox 2"/>
+          <p:cNvSpPr txBox="1"/>
+          <p:nvPr/>
+        </p:nvSpPr>
+        <p:spPr>
+          <a:xfrm>
+            <a:off x="274320" y="658368"/>
+            <a:ext cx="11155680" cy="310896"/>
+          </a:xfrm>
+          <a:prstGeom prst="rect">
+            <a:avLst/>
+          </a:prstGeom>
+          <a:noFill/>
+        </p:spPr>
+        <p:txBody>
+          <a:bodyPr wrap="square" lIns="27432" rIns="27432" tIns="9144" bIns="9144" anchor="ctr">
+            <a:spAutoFit/>
+          </a:bodyPr>
+          <a:lstStyle/>
+          <a:p>
+            <a:pPr algn="l">
+              <a:lnSpc>
+                <a:spcPct val="110000"/>
+              </a:lnSpc>
+            </a:pPr>
+            <a:r>
+              <a:rPr sz="1050" b="0">
+                <a:solidFill>
+                  <a:srgbClr val="5C5C56"/>
+                </a:solidFill>
+                <a:latin typeface="微软雅黑"/>
+                <a:ea typeface="微软雅黑"/>
+                <a:cs typeface="微软雅黑"/>
+              </a:rPr>
+              <a:t>任务令下达 → 物料身份确认 → 用例自动执行 → 结果标准化 → MES 回传；每一环节写入同一追溯码，形成单件级可追溯闭环</a:t>
+            </a:r>
+          </a:p>
+        </p:txBody>
+      </p:sp>
+      <p:sp>
+        <p:nvSpPr>
+          <p:cNvPr id="4" name="Rectangle 3"/>
+          <p:cNvSpPr/>
+          <p:nvPr/>
+        </p:nvSpPr>
+        <p:spPr>
+          <a:xfrm>
+            <a:off x="274320" y="987552"/>
+            <a:ext cx="11640312" cy="25603"/>
+          </a:xfrm>
+          <a:prstGeom prst="rect">
+            <a:avLst/>
+          </a:prstGeom>
+          <a:solidFill>
+            <a:srgbClr val="8B0F1A"/>
+          </a:solidFill>
+          <a:ln>
+            <a:noFill/>
+          </a:ln>
+          <a:effectLst/>
+        </p:spPr>
+        <p:style>
+          <a:lnRef idx="1">
+            <a:schemeClr val="accent1"/>
+          </a:lnRef>
+          <a:fillRef idx="3">
+            <a:schemeClr val="accent1"/>
+          </a:fillRef>
+          <a:effectRef idx="2">
+            <a:schemeClr val="accent1"/>
+          </a:effectRef>
+          <a:fontRef idx="minor">
+            <a:schemeClr val="lt1"/>
+          </a:fontRef>
+        </p:style>
+        <p:txBody>
+          <a:bodyPr rtlCol="0" anchor="ctr" wrap="square"/>
+          <a:lstStyle/>
+          <a:p>
+            <a:pPr algn="ctr"/>
+          </a:p>
+        </p:txBody>
+      </p:sp>
+      <p:sp>
+        <p:nvSpPr>
+          <p:cNvPr id="5" name="Rectangle 4"/>
+          <p:cNvSpPr/>
+          <p:nvPr/>
+        </p:nvSpPr>
+        <p:spPr>
+          <a:xfrm>
+            <a:off x="1600200" y="1188720"/>
+            <a:ext cx="2066543" cy="329184"/>
+          </a:xfrm>
+          <a:prstGeom prst="rect">
+            <a:avLst/>
+          </a:prstGeom>
+          <a:solidFill>
+            <a:srgbClr val="E8F0F7"/>
+          </a:solidFill>
+          <a:ln>
+            <a:noFill/>
+          </a:ln>
+          <a:effectLst/>
+        </p:spPr>
+        <p:style>
+          <a:lnRef idx="1">
+            <a:schemeClr val="accent1"/>
+          </a:lnRef>
+          <a:fillRef idx="3">
+            <a:schemeClr val="accent1"/>
+          </a:fillRef>
+          <a:effectRef idx="2">
+            <a:schemeClr val="accent1"/>
+          </a:effectRef>
+          <a:fontRef idx="minor">
+            <a:schemeClr val="lt1"/>
+          </a:fontRef>
+        </p:style>
+        <p:txBody>
+          <a:bodyPr rtlCol="0" anchor="ctr" wrap="square"/>
+          <a:lstStyle/>
+          <a:p>
+            <a:pPr algn="ctr"/>
+          </a:p>
+        </p:txBody>
+      </p:sp>
+      <p:sp>
+        <p:nvSpPr>
+          <p:cNvPr id="6" name="TextBox 5"/>
+          <p:cNvSpPr txBox="1"/>
+          <p:nvPr/>
+        </p:nvSpPr>
+        <p:spPr>
+          <a:xfrm>
+            <a:off x="1600200" y="1188720"/>
+            <a:ext cx="2066543" cy="329184"/>
+          </a:xfrm>
+          <a:prstGeom prst="rect">
+            <a:avLst/>
+          </a:prstGeom>
+          <a:noFill/>
+        </p:spPr>
+        <p:txBody>
+          <a:bodyPr wrap="square" lIns="27432" rIns="27432" tIns="9144" bIns="9144" anchor="ctr">
+            <a:spAutoFit/>
+          </a:bodyPr>
+          <a:lstStyle/>
+          <a:p>
+            <a:pPr algn="ctr">
+              <a:lnSpc>
+                <a:spcPct val="110000"/>
+              </a:lnSpc>
+            </a:pPr>
+            <a:r>
+              <a:rPr sz="950" b="1">
+                <a:solidFill>
+                  <a:srgbClr val="0F4C81"/>
+                </a:solidFill>
+                <a:latin typeface="微软雅黑"/>
+                <a:ea typeface="微软雅黑"/>
+                <a:cs typeface="微软雅黑"/>
+              </a:rPr>
+              <a:t>① 任务令下达</a:t>
+            </a:r>
+          </a:p>
+        </p:txBody>
+      </p:sp>
+      <p:sp>
+        <p:nvSpPr>
+          <p:cNvPr id="7" name="Rectangle 6"/>
+          <p:cNvSpPr/>
+          <p:nvPr/>
+        </p:nvSpPr>
+        <p:spPr>
+          <a:xfrm>
+            <a:off x="3666744" y="1188720"/>
+            <a:ext cx="2066543" cy="329184"/>
+          </a:xfrm>
+          <a:prstGeom prst="rect">
+            <a:avLst/>
+          </a:prstGeom>
+          <a:solidFill>
+            <a:srgbClr val="E8F0F7"/>
+          </a:solidFill>
+          <a:ln>
+            <a:noFill/>
+          </a:ln>
+          <a:effectLst/>
+        </p:spPr>
+        <p:style>
+          <a:lnRef idx="1">
+            <a:schemeClr val="accent1"/>
+          </a:lnRef>
+          <a:fillRef idx="3">
+            <a:schemeClr val="accent1"/>
+          </a:fillRef>
+          <a:effectRef idx="2">
+            <a:schemeClr val="accent1"/>
+          </a:effectRef>
+          <a:fontRef idx="minor">
+            <a:schemeClr val="lt1"/>
+          </a:fontRef>
+        </p:style>
+        <p:txBody>
+          <a:bodyPr rtlCol="0" anchor="ctr" wrap="square"/>
+          <a:lstStyle/>
+          <a:p>
+            <a:pPr algn="ctr"/>
+          </a:p>
+        </p:txBody>
+      </p:sp>
+      <p:sp>
+        <p:nvSpPr>
+          <p:cNvPr id="8" name="TextBox 7"/>
+          <p:cNvSpPr txBox="1"/>
+          <p:nvPr/>
+        </p:nvSpPr>
+        <p:spPr>
+          <a:xfrm>
+            <a:off x="3666744" y="1188720"/>
+            <a:ext cx="2066543" cy="329184"/>
+          </a:xfrm>
+          <a:prstGeom prst="rect">
+            <a:avLst/>
+          </a:prstGeom>
+          <a:noFill/>
+        </p:spPr>
+        <p:txBody>
+          <a:bodyPr wrap="square" lIns="27432" rIns="27432" tIns="9144" bIns="9144" anchor="ctr">
+            <a:spAutoFit/>
+          </a:bodyPr>
+          <a:lstStyle/>
+          <a:p>
+            <a:pPr algn="ctr">
+              <a:lnSpc>
+                <a:spcPct val="110000"/>
+              </a:lnSpc>
+            </a:pPr>
+            <a:r>
+              <a:rPr sz="950" b="1">
+                <a:solidFill>
+                  <a:srgbClr val="0F4C81"/>
+                </a:solidFill>
+                <a:latin typeface="微软雅黑"/>
+                <a:ea typeface="微软雅黑"/>
+                <a:cs typeface="微软雅黑"/>
+              </a:rPr>
+              <a:t>② 物料确认</a:t>
+            </a:r>
+          </a:p>
+        </p:txBody>
+      </p:sp>
+      <p:sp>
+        <p:nvSpPr>
+          <p:cNvPr id="9" name="Rectangle 8"/>
+          <p:cNvSpPr/>
+          <p:nvPr/>
+        </p:nvSpPr>
+        <p:spPr>
+          <a:xfrm>
+            <a:off x="5733288" y="1188720"/>
+            <a:ext cx="2066543" cy="329184"/>
+          </a:xfrm>
+          <a:prstGeom prst="rect">
+            <a:avLst/>
+          </a:prstGeom>
+          <a:solidFill>
+            <a:srgbClr val="E8F0F7"/>
+          </a:solidFill>
+          <a:ln>
+            <a:noFill/>
+          </a:ln>
+          <a:effectLst/>
+        </p:spPr>
+        <p:style>
+          <a:lnRef idx="1">
+            <a:schemeClr val="accent1"/>
+          </a:lnRef>
+          <a:fillRef idx="3">
+            <a:schemeClr val="accent1"/>
+          </a:fillRef>
+          <a:effectRef idx="2">
+            <a:schemeClr val="accent1"/>
+          </a:effectRef>
+          <a:fontRef idx="minor">
+            <a:schemeClr val="lt1"/>
+          </a:fontRef>
+        </p:style>
+        <p:txBody>
+          <a:bodyPr rtlCol="0" anchor="ctr" wrap="square"/>
+          <a:lstStyle/>
+          <a:p>
+            <a:pPr algn="ctr"/>
+          </a:p>
+        </p:txBody>
+      </p:sp>
+      <p:sp>
+        <p:nvSpPr>
+          <p:cNvPr id="10" name="TextBox 9"/>
+          <p:cNvSpPr txBox="1"/>
+          <p:nvPr/>
+        </p:nvSpPr>
+        <p:spPr>
+          <a:xfrm>
+            <a:off x="5733288" y="1188720"/>
+            <a:ext cx="2066543" cy="329184"/>
+          </a:xfrm>
+          <a:prstGeom prst="rect">
+            <a:avLst/>
+          </a:prstGeom>
+          <a:noFill/>
+        </p:spPr>
+        <p:txBody>
+          <a:bodyPr wrap="square" lIns="27432" rIns="27432" tIns="9144" bIns="9144" anchor="ctr">
+            <a:spAutoFit/>
+          </a:bodyPr>
+          <a:lstStyle/>
+          <a:p>
+            <a:pPr algn="ctr">
+              <a:lnSpc>
+                <a:spcPct val="110000"/>
+              </a:lnSpc>
+            </a:pPr>
+            <a:r>
+              <a:rPr sz="950" b="1">
+                <a:solidFill>
+                  <a:srgbClr val="0F4C81"/>
+                </a:solidFill>
+                <a:latin typeface="微软雅黑"/>
+                <a:ea typeface="微软雅黑"/>
+                <a:cs typeface="微软雅黑"/>
+              </a:rPr>
+              <a:t>③ 任务派发</a:t>
+            </a:r>
+          </a:p>
+        </p:txBody>
+      </p:sp>
+      <p:sp>
+        <p:nvSpPr>
+          <p:cNvPr id="11" name="Rectangle 10"/>
+          <p:cNvSpPr/>
+          <p:nvPr/>
+        </p:nvSpPr>
+        <p:spPr>
+          <a:xfrm>
+            <a:off x="7799831" y="1188720"/>
+            <a:ext cx="2066543" cy="329184"/>
+          </a:xfrm>
+          <a:prstGeom prst="rect">
+            <a:avLst/>
+          </a:prstGeom>
+          <a:solidFill>
+            <a:srgbClr val="E8F0F7"/>
+          </a:solidFill>
+          <a:ln>
+            <a:noFill/>
+          </a:ln>
+          <a:effectLst/>
+        </p:spPr>
+        <p:style>
+          <a:lnRef idx="1">
+            <a:schemeClr val="accent1"/>
+          </a:lnRef>
+          <a:fillRef idx="3">
+            <a:schemeClr val="accent1"/>
+          </a:fillRef>
+          <a:effectRef idx="2">
+            <a:schemeClr val="accent1"/>
+          </a:effectRef>
+          <a:fontRef idx="minor">
+            <a:schemeClr val="lt1"/>
+          </a:fontRef>
+        </p:style>
+        <p:txBody>
+          <a:bodyPr rtlCol="0" anchor="ctr" wrap="square"/>
+          <a:lstStyle/>
+          <a:p>
+            <a:pPr algn="ctr"/>
+          </a:p>
+        </p:txBody>
+      </p:sp>
+      <p:sp>
+        <p:nvSpPr>
+          <p:cNvPr id="12" name="TextBox 11"/>
+          <p:cNvSpPr txBox="1"/>
+          <p:nvPr/>
+        </p:nvSpPr>
+        <p:spPr>
+          <a:xfrm>
+            <a:off x="7799831" y="1188720"/>
+            <a:ext cx="2066543" cy="329184"/>
+          </a:xfrm>
+          <a:prstGeom prst="rect">
+            <a:avLst/>
+          </a:prstGeom>
+          <a:noFill/>
+        </p:spPr>
+        <p:txBody>
+          <a:bodyPr wrap="square" lIns="27432" rIns="27432" tIns="9144" bIns="9144" anchor="ctr">
+            <a:spAutoFit/>
+          </a:bodyPr>
+          <a:lstStyle/>
+          <a:p>
+            <a:pPr algn="ctr">
+              <a:lnSpc>
+                <a:spcPct val="110000"/>
+              </a:lnSpc>
+            </a:pPr>
+            <a:r>
+              <a:rPr sz="950" b="1">
+                <a:solidFill>
+                  <a:srgbClr val="0F4C81"/>
+                </a:solidFill>
+                <a:latin typeface="微软雅黑"/>
+                <a:ea typeface="微软雅黑"/>
+                <a:cs typeface="微软雅黑"/>
+              </a:rPr>
+              <a:t>④ 用例执行</a:t>
+            </a:r>
+          </a:p>
+        </p:txBody>
+      </p:sp>
+      <p:sp>
+        <p:nvSpPr>
+          <p:cNvPr id="13" name="Rectangle 12"/>
+          <p:cNvSpPr/>
+          <p:nvPr/>
+        </p:nvSpPr>
+        <p:spPr>
+          <a:xfrm>
+            <a:off x="9866376" y="1188720"/>
+            <a:ext cx="2066543" cy="329184"/>
+          </a:xfrm>
+          <a:prstGeom prst="rect">
+            <a:avLst/>
+          </a:prstGeom>
+          <a:solidFill>
+            <a:srgbClr val="E8F0F7"/>
+          </a:solidFill>
+          <a:ln>
+            <a:noFill/>
+          </a:ln>
+          <a:effectLst/>
+        </p:spPr>
+        <p:style>
+          <a:lnRef idx="1">
+            <a:schemeClr val="accent1"/>
+          </a:lnRef>
+          <a:fillRef idx="3">
+            <a:schemeClr val="accent1"/>
+          </a:fillRef>
+          <a:effectRef idx="2">
+            <a:schemeClr val="accent1"/>
+          </a:effectRef>
+          <a:fontRef idx="minor">
+            <a:schemeClr val="lt1"/>
+          </a:fontRef>
+        </p:style>
+        <p:txBody>
+          <a:bodyPr rtlCol="0" anchor="ctr" wrap="square"/>
+          <a:lstStyle/>
+          <a:p>
+            <a:pPr algn="ctr"/>
+          </a:p>
+        </p:txBody>
+      </p:sp>
+      <p:sp>
+        <p:nvSpPr>
+          <p:cNvPr id="14" name="TextBox 13"/>
+          <p:cNvSpPr txBox="1"/>
+          <p:nvPr/>
+        </p:nvSpPr>
+        <p:spPr>
+          <a:xfrm>
+            <a:off x="9866376" y="1188720"/>
+            <a:ext cx="2066543" cy="329184"/>
+          </a:xfrm>
+          <a:prstGeom prst="rect">
+            <a:avLst/>
+          </a:prstGeom>
+          <a:noFill/>
+        </p:spPr>
+        <p:txBody>
+          <a:bodyPr wrap="square" lIns="27432" rIns="27432" tIns="9144" bIns="9144" anchor="ctr">
+            <a:spAutoFit/>
+          </a:bodyPr>
+          <a:lstStyle/>
+          <a:p>
+            <a:pPr algn="ctr">
+              <a:lnSpc>
+                <a:spcPct val="110000"/>
+              </a:lnSpc>
+            </a:pPr>
+            <a:r>
+              <a:rPr sz="950" b="1">
+                <a:solidFill>
+                  <a:srgbClr val="0F4C81"/>
+                </a:solidFill>
+                <a:latin typeface="微软雅黑"/>
+                <a:ea typeface="微软雅黑"/>
+                <a:cs typeface="微软雅黑"/>
+              </a:rPr>
+              <a:t>⑤ 结果与回传</a:t>
+            </a:r>
+          </a:p>
+        </p:txBody>
+      </p:sp>
+      <p:sp>
+        <p:nvSpPr>
+          <p:cNvPr id="15" name="Rectangle 14"/>
+          <p:cNvSpPr/>
+          <p:nvPr/>
+        </p:nvSpPr>
+        <p:spPr>
+          <a:xfrm>
+            <a:off x="274320" y="1572768"/>
+            <a:ext cx="1298448" cy="914400"/>
+          </a:xfrm>
+          <a:prstGeom prst="rect">
+            <a:avLst/>
+          </a:prstGeom>
+          <a:solidFill>
+            <a:srgbClr val="ECECEC"/>
+          </a:solidFill>
+          <a:ln w="10160">
+            <a:solidFill>
+              <a:srgbClr val="D9D6CD"/>
+            </a:solidFill>
+          </a:ln>
+          <a:effectLst/>
+        </p:spPr>
+        <p:style>
+          <a:lnRef idx="1">
+            <a:schemeClr val="accent1"/>
+          </a:lnRef>
+          <a:fillRef idx="3">
+            <a:schemeClr val="accent1"/>
+          </a:fillRef>
+          <a:effectRef idx="2">
+            <a:schemeClr val="accent1"/>
+          </a:effectRef>
+          <a:fontRef idx="minor">
+            <a:schemeClr val="lt1"/>
+          </a:fontRef>
+        </p:style>
+        <p:txBody>
+          <a:bodyPr rtlCol="0" anchor="ctr" wrap="square"/>
+          <a:lstStyle/>
+          <a:p>
+            <a:pPr algn="ctr"/>
+          </a:p>
+        </p:txBody>
+      </p:sp>
+      <p:sp>
+        <p:nvSpPr>
+          <p:cNvPr id="16" name="TextBox 15"/>
+          <p:cNvSpPr txBox="1"/>
+          <p:nvPr/>
+        </p:nvSpPr>
+        <p:spPr>
+          <a:xfrm>
+            <a:off x="292608" y="1572768"/>
+            <a:ext cx="1261872" cy="914400"/>
+          </a:xfrm>
+          <a:prstGeom prst="rect">
+            <a:avLst/>
+          </a:prstGeom>
+          <a:noFill/>
+        </p:spPr>
+        <p:txBody>
+          <a:bodyPr wrap="square" lIns="27432" rIns="27432" tIns="9144" bIns="9144" anchor="ctr">
+            <a:spAutoFit/>
+          </a:bodyPr>
+          <a:lstStyle/>
+          <a:p>
+            <a:pPr algn="ctr">
+              <a:lnSpc>
+                <a:spcPct val="110000"/>
+              </a:lnSpc>
+            </a:pPr>
+            <a:r>
+              <a:rPr sz="900" b="1">
+                <a:solidFill>
+                  <a:srgbClr val="141414"/>
+                </a:solidFill>
+                <a:latin typeface="微软雅黑"/>
+                <a:ea typeface="微软雅黑"/>
+                <a:cs typeface="微软雅黑"/>
+              </a:rPr>
+              <a:t>制造 IT / MES</a:t>
+            </a:r>
+          </a:p>
+        </p:txBody>
+      </p:sp>
+      <p:sp>
+        <p:nvSpPr>
+          <p:cNvPr id="17" name="Rectangle 16"/>
+          <p:cNvSpPr/>
+          <p:nvPr/>
+        </p:nvSpPr>
+        <p:spPr>
+          <a:xfrm>
+            <a:off x="1600200" y="1572768"/>
+            <a:ext cx="10332720" cy="914400"/>
+          </a:xfrm>
+          <a:prstGeom prst="rect">
+            <a:avLst/>
+          </a:prstGeom>
+          <a:solidFill>
+            <a:srgbClr val="FFFFFF"/>
+          </a:solidFill>
+          <a:ln w="10160">
+            <a:solidFill>
+              <a:srgbClr val="D9D6CD"/>
+            </a:solidFill>
+          </a:ln>
+          <a:effectLst/>
+        </p:spPr>
+        <p:style>
+          <a:lnRef idx="1">
+            <a:schemeClr val="accent1"/>
+          </a:lnRef>
+          <a:fillRef idx="3">
+            <a:schemeClr val="accent1"/>
+          </a:fillRef>
+          <a:effectRef idx="2">
+            <a:schemeClr val="accent1"/>
+          </a:effectRef>
+          <a:fontRef idx="minor">
+            <a:schemeClr val="lt1"/>
+          </a:fontRef>
+        </p:style>
+        <p:txBody>
+          <a:bodyPr rtlCol="0" anchor="ctr" wrap="square"/>
+          <a:lstStyle/>
+          <a:p>
+            <a:pPr algn="ctr"/>
+          </a:p>
+        </p:txBody>
+      </p:sp>
+      <p:sp>
+        <p:nvSpPr>
+          <p:cNvPr id="18" name="Rectangle 17"/>
+          <p:cNvSpPr/>
+          <p:nvPr/>
+        </p:nvSpPr>
+        <p:spPr>
+          <a:xfrm>
+            <a:off x="274320" y="2487168"/>
+            <a:ext cx="1298448" cy="914400"/>
+          </a:xfrm>
+          <a:prstGeom prst="rect">
+            <a:avLst/>
+          </a:prstGeom>
+          <a:solidFill>
+            <a:srgbClr val="ECECEC"/>
+          </a:solidFill>
+          <a:ln w="10160">
+            <a:solidFill>
+              <a:srgbClr val="D9D6CD"/>
+            </a:solidFill>
+          </a:ln>
+          <a:effectLst/>
+        </p:spPr>
+        <p:style>
+          <a:lnRef idx="1">
+            <a:schemeClr val="accent1"/>
+          </a:lnRef>
+          <a:fillRef idx="3">
+            <a:schemeClr val="accent1"/>
+          </a:fillRef>
+          <a:effectRef idx="2">
+            <a:schemeClr val="accent1"/>
+          </a:effectRef>
+          <a:fontRef idx="minor">
+            <a:schemeClr val="lt1"/>
+          </a:fontRef>
+        </p:style>
+        <p:txBody>
+          <a:bodyPr rtlCol="0" anchor="ctr" wrap="square"/>
+          <a:lstStyle/>
+          <a:p>
+            <a:pPr algn="ctr"/>
+          </a:p>
+        </p:txBody>
+      </p:sp>
+      <p:sp>
+        <p:nvSpPr>
+          <p:cNvPr id="19" name="TextBox 18"/>
+          <p:cNvSpPr txBox="1"/>
+          <p:nvPr/>
+        </p:nvSpPr>
+        <p:spPr>
+          <a:xfrm>
+            <a:off x="292608" y="2487168"/>
+            <a:ext cx="1261872" cy="914400"/>
+          </a:xfrm>
+          <a:prstGeom prst="rect">
+            <a:avLst/>
+          </a:prstGeom>
+          <a:noFill/>
+        </p:spPr>
+        <p:txBody>
+          <a:bodyPr wrap="square" lIns="27432" rIns="27432" tIns="9144" bIns="9144" anchor="ctr">
+            <a:spAutoFit/>
+          </a:bodyPr>
+          <a:lstStyle/>
+          <a:p>
+            <a:pPr algn="ctr">
+              <a:lnSpc>
+                <a:spcPct val="110000"/>
+              </a:lnSpc>
+            </a:pPr>
+            <a:r>
+              <a:rPr sz="900" b="1">
+                <a:solidFill>
+                  <a:srgbClr val="141414"/>
+                </a:solidFill>
+                <a:latin typeface="微软雅黑"/>
+                <a:ea typeface="微软雅黑"/>
+                <a:cs typeface="微软雅黑"/>
+              </a:rPr>
+              <a:t>产线终端</a:t>
+            </a:r>
+          </a:p>
+        </p:txBody>
+      </p:sp>
+      <p:sp>
+        <p:nvSpPr>
+          <p:cNvPr id="20" name="Rectangle 19"/>
+          <p:cNvSpPr/>
+          <p:nvPr/>
+        </p:nvSpPr>
+        <p:spPr>
+          <a:xfrm>
+            <a:off x="1600200" y="2487168"/>
+            <a:ext cx="10332720" cy="914400"/>
+          </a:xfrm>
+          <a:prstGeom prst="rect">
+            <a:avLst/>
+          </a:prstGeom>
+          <a:solidFill>
+            <a:srgbClr val="FBFBF9"/>
+          </a:solidFill>
+          <a:ln w="10160">
+            <a:solidFill>
+              <a:srgbClr val="D9D6CD"/>
+            </a:solidFill>
+          </a:ln>
+          <a:effectLst/>
+        </p:spPr>
+        <p:style>
+          <a:lnRef idx="1">
+            <a:schemeClr val="accent1"/>
+          </a:lnRef>
+          <a:fillRef idx="3">
+            <a:schemeClr val="accent1"/>
+          </a:fillRef>
+          <a:effectRef idx="2">
+            <a:schemeClr val="accent1"/>
+          </a:effectRef>
+          <a:fontRef idx="minor">
+            <a:schemeClr val="lt1"/>
+          </a:fontRef>
+        </p:style>
+        <p:txBody>
+          <a:bodyPr rtlCol="0" anchor="ctr" wrap="square"/>
+          <a:lstStyle/>
+          <a:p>
+            <a:pPr algn="ctr"/>
+          </a:p>
+        </p:txBody>
+      </p:sp>
+      <p:sp>
+        <p:nvSpPr>
+          <p:cNvPr id="21" name="Rectangle 20"/>
+          <p:cNvSpPr/>
+          <p:nvPr/>
+        </p:nvSpPr>
+        <p:spPr>
+          <a:xfrm>
+            <a:off x="274320" y="3401568"/>
+            <a:ext cx="1298448" cy="914400"/>
+          </a:xfrm>
+          <a:prstGeom prst="rect">
+            <a:avLst/>
+          </a:prstGeom>
+          <a:solidFill>
+            <a:srgbClr val="ECECEC"/>
+          </a:solidFill>
+          <a:ln w="10160">
+            <a:solidFill>
+              <a:srgbClr val="D9D6CD"/>
+            </a:solidFill>
+          </a:ln>
+          <a:effectLst/>
+        </p:spPr>
+        <p:style>
+          <a:lnRef idx="1">
+            <a:schemeClr val="accent1"/>
+          </a:lnRef>
+          <a:fillRef idx="3">
+            <a:schemeClr val="accent1"/>
+          </a:fillRef>
+          <a:effectRef idx="2">
+            <a:schemeClr val="accent1"/>
+          </a:effectRef>
+          <a:fontRef idx="minor">
+            <a:schemeClr val="lt1"/>
+          </a:fontRef>
+        </p:style>
+        <p:txBody>
+          <a:bodyPr rtlCol="0" anchor="ctr" wrap="square"/>
+          <a:lstStyle/>
+          <a:p>
+            <a:pPr algn="ctr"/>
+          </a:p>
+        </p:txBody>
+      </p:sp>
+      <p:sp>
+        <p:nvSpPr>
+          <p:cNvPr id="22" name="TextBox 21"/>
+          <p:cNvSpPr txBox="1"/>
+          <p:nvPr/>
+        </p:nvSpPr>
+        <p:spPr>
+          <a:xfrm>
+            <a:off x="292608" y="3401568"/>
+            <a:ext cx="1261872" cy="914400"/>
+          </a:xfrm>
+          <a:prstGeom prst="rect">
+            <a:avLst/>
+          </a:prstGeom>
+          <a:noFill/>
+        </p:spPr>
+        <p:txBody>
+          <a:bodyPr wrap="square" lIns="27432" rIns="27432" tIns="9144" bIns="9144" anchor="ctr">
+            <a:spAutoFit/>
+          </a:bodyPr>
+          <a:lstStyle/>
+          <a:p>
+            <a:pPr algn="ctr">
+              <a:lnSpc>
+                <a:spcPct val="110000"/>
+              </a:lnSpc>
+            </a:pPr>
+            <a:r>
+              <a:rPr sz="900" b="1">
+                <a:solidFill>
+                  <a:srgbClr val="141414"/>
+                </a:solidFill>
+                <a:latin typeface="微软雅黑"/>
+                <a:ea typeface="微软雅黑"/>
+                <a:cs typeface="微软雅黑"/>
+              </a:rPr>
+              <a:t>ATE Controller</a:t>
+            </a:r>
+          </a:p>
+        </p:txBody>
+      </p:sp>
+      <p:sp>
+        <p:nvSpPr>
+          <p:cNvPr id="23" name="Rectangle 22"/>
+          <p:cNvSpPr/>
+          <p:nvPr/>
+        </p:nvSpPr>
+        <p:spPr>
+          <a:xfrm>
+            <a:off x="1600200" y="3401568"/>
+            <a:ext cx="10332720" cy="914400"/>
+          </a:xfrm>
+          <a:prstGeom prst="rect">
+            <a:avLst/>
+          </a:prstGeom>
+          <a:solidFill>
+            <a:srgbClr val="FFFFFF"/>
+          </a:solidFill>
+          <a:ln w="10160">
+            <a:solidFill>
+              <a:srgbClr val="D9D6CD"/>
+            </a:solidFill>
+          </a:ln>
+          <a:effectLst/>
+        </p:spPr>
+        <p:style>
+          <a:lnRef idx="1">
+            <a:schemeClr val="accent1"/>
+          </a:lnRef>
+          <a:fillRef idx="3">
+            <a:schemeClr val="accent1"/>
+          </a:fillRef>
+          <a:effectRef idx="2">
+            <a:schemeClr val="accent1"/>
+          </a:effectRef>
+          <a:fontRef idx="minor">
+            <a:schemeClr val="lt1"/>
+          </a:fontRef>
+        </p:style>
+        <p:txBody>
+          <a:bodyPr rtlCol="0" anchor="ctr" wrap="square"/>
+          <a:lstStyle/>
+          <a:p>
+            <a:pPr algn="ctr"/>
+          </a:p>
+        </p:txBody>
+      </p:sp>
+      <p:sp>
+        <p:nvSpPr>
+          <p:cNvPr id="24" name="Rectangle 23"/>
+          <p:cNvSpPr/>
+          <p:nvPr/>
+        </p:nvSpPr>
+        <p:spPr>
+          <a:xfrm>
+            <a:off x="274320" y="4315968"/>
+            <a:ext cx="1298448" cy="914400"/>
+          </a:xfrm>
+          <a:prstGeom prst="rect">
+            <a:avLst/>
+          </a:prstGeom>
+          <a:solidFill>
+            <a:srgbClr val="ECECEC"/>
+          </a:solidFill>
+          <a:ln w="10160">
+            <a:solidFill>
+              <a:srgbClr val="D9D6CD"/>
+            </a:solidFill>
+          </a:ln>
+          <a:effectLst/>
+        </p:spPr>
+        <p:style>
+          <a:lnRef idx="1">
+            <a:schemeClr val="accent1"/>
+          </a:lnRef>
+          <a:fillRef idx="3">
+            <a:schemeClr val="accent1"/>
+          </a:fillRef>
+          <a:effectRef idx="2">
+            <a:schemeClr val="accent1"/>
+          </a:effectRef>
+          <a:fontRef idx="minor">
+            <a:schemeClr val="lt1"/>
+          </a:fontRef>
+        </p:style>
+        <p:txBody>
+          <a:bodyPr rtlCol="0" anchor="ctr" wrap="square"/>
+          <a:lstStyle/>
+          <a:p>
+            <a:pPr algn="ctr"/>
+          </a:p>
+        </p:txBody>
+      </p:sp>
+      <p:sp>
+        <p:nvSpPr>
+          <p:cNvPr id="25" name="TextBox 24"/>
+          <p:cNvSpPr txBox="1"/>
+          <p:nvPr/>
+        </p:nvSpPr>
+        <p:spPr>
+          <a:xfrm>
+            <a:off x="292608" y="4315968"/>
+            <a:ext cx="1261872" cy="914400"/>
+          </a:xfrm>
+          <a:prstGeom prst="rect">
+            <a:avLst/>
+          </a:prstGeom>
+          <a:noFill/>
+        </p:spPr>
+        <p:txBody>
+          <a:bodyPr wrap="square" lIns="27432" rIns="27432" tIns="9144" bIns="9144" anchor="ctr">
+            <a:spAutoFit/>
+          </a:bodyPr>
+          <a:lstStyle/>
+          <a:p>
+            <a:pPr algn="ctr">
+              <a:lnSpc>
+                <a:spcPct val="110000"/>
+              </a:lnSpc>
+            </a:pPr>
+            <a:r>
+              <a:rPr sz="900" b="1">
+                <a:solidFill>
+                  <a:srgbClr val="141414"/>
+                </a:solidFill>
+                <a:latin typeface="微软雅黑"/>
+                <a:ea typeface="微软雅黑"/>
+                <a:cs typeface="微软雅黑"/>
+              </a:rPr>
+              <a:t>Runner 执行机</a:t>
+            </a:r>
+          </a:p>
+        </p:txBody>
+      </p:sp>
+      <p:sp>
+        <p:nvSpPr>
+          <p:cNvPr id="26" name="Rectangle 25"/>
+          <p:cNvSpPr/>
+          <p:nvPr/>
+        </p:nvSpPr>
+        <p:spPr>
+          <a:xfrm>
+            <a:off x="1600200" y="4315968"/>
+            <a:ext cx="10332720" cy="914400"/>
+          </a:xfrm>
+          <a:prstGeom prst="rect">
+            <a:avLst/>
+          </a:prstGeom>
+          <a:solidFill>
+            <a:srgbClr val="FBFBF9"/>
+          </a:solidFill>
+          <a:ln w="10160">
+            <a:solidFill>
+              <a:srgbClr val="D9D6CD"/>
+            </a:solidFill>
+          </a:ln>
+          <a:effectLst/>
+        </p:spPr>
+        <p:style>
+          <a:lnRef idx="1">
+            <a:schemeClr val="accent1"/>
+          </a:lnRef>
+          <a:fillRef idx="3">
+            <a:schemeClr val="accent1"/>
+          </a:fillRef>
+          <a:effectRef idx="2">
+            <a:schemeClr val="accent1"/>
+          </a:effectRef>
+          <a:fontRef idx="minor">
+            <a:schemeClr val="lt1"/>
+          </a:fontRef>
+        </p:style>
+        <p:txBody>
+          <a:bodyPr rtlCol="0" anchor="ctr" wrap="square"/>
+          <a:lstStyle/>
+          <a:p>
+            <a:pPr algn="ctr"/>
+          </a:p>
+        </p:txBody>
+      </p:sp>
+      <p:sp>
+        <p:nvSpPr>
+          <p:cNvPr id="27" name="Rectangle 26"/>
+          <p:cNvSpPr/>
+          <p:nvPr/>
+        </p:nvSpPr>
+        <p:spPr>
+          <a:xfrm>
+            <a:off x="274320" y="5230368"/>
+            <a:ext cx="1298448" cy="914400"/>
+          </a:xfrm>
+          <a:prstGeom prst="rect">
+            <a:avLst/>
+          </a:prstGeom>
+          <a:solidFill>
+            <a:srgbClr val="ECECEC"/>
+          </a:solidFill>
+          <a:ln w="10160">
+            <a:solidFill>
+              <a:srgbClr val="D9D6CD"/>
+            </a:solidFill>
+          </a:ln>
+          <a:effectLst/>
+        </p:spPr>
+        <p:style>
+          <a:lnRef idx="1">
+            <a:schemeClr val="accent1"/>
+          </a:lnRef>
+          <a:fillRef idx="3">
+            <a:schemeClr val="accent1"/>
+          </a:fillRef>
+          <a:effectRef idx="2">
+            <a:schemeClr val="accent1"/>
+          </a:effectRef>
+          <a:fontRef idx="minor">
+            <a:schemeClr val="lt1"/>
+          </a:fontRef>
+        </p:style>
+        <p:txBody>
+          <a:bodyPr rtlCol="0" anchor="ctr" wrap="square"/>
+          <a:lstStyle/>
+          <a:p>
+            <a:pPr algn="ctr"/>
+          </a:p>
+        </p:txBody>
+      </p:sp>
+      <p:sp>
+        <p:nvSpPr>
+          <p:cNvPr id="28" name="TextBox 27"/>
+          <p:cNvSpPr txBox="1"/>
+          <p:nvPr/>
+        </p:nvSpPr>
+        <p:spPr>
+          <a:xfrm>
+            <a:off x="292608" y="5230368"/>
+            <a:ext cx="1261872" cy="914400"/>
+          </a:xfrm>
+          <a:prstGeom prst="rect">
+            <a:avLst/>
+          </a:prstGeom>
+          <a:noFill/>
+        </p:spPr>
+        <p:txBody>
+          <a:bodyPr wrap="square" lIns="27432" rIns="27432" tIns="9144" bIns="9144" anchor="ctr">
+            <a:spAutoFit/>
+          </a:bodyPr>
+          <a:lstStyle/>
+          <a:p>
+            <a:pPr algn="ctr">
+              <a:lnSpc>
+                <a:spcPct val="110000"/>
+              </a:lnSpc>
+            </a:pPr>
+            <a:r>
+              <a:rPr sz="900" b="1">
+                <a:solidFill>
+                  <a:srgbClr val="141414"/>
+                </a:solidFill>
+                <a:latin typeface="微软雅黑"/>
+                <a:ea typeface="微软雅黑"/>
+                <a:cs typeface="微软雅黑"/>
+              </a:rPr>
+              <a:t>测试数据中心</a:t>
+            </a:r>
+          </a:p>
+        </p:txBody>
+      </p:sp>
+      <p:sp>
+        <p:nvSpPr>
+          <p:cNvPr id="29" name="Rectangle 28"/>
+          <p:cNvSpPr/>
+          <p:nvPr/>
+        </p:nvSpPr>
+        <p:spPr>
+          <a:xfrm>
+            <a:off x="1600200" y="5230368"/>
+            <a:ext cx="10332720" cy="914400"/>
+          </a:xfrm>
+          <a:prstGeom prst="rect">
+            <a:avLst/>
+          </a:prstGeom>
+          <a:solidFill>
+            <a:srgbClr val="FFFFFF"/>
+          </a:solidFill>
+          <a:ln w="10160">
+            <a:solidFill>
+              <a:srgbClr val="D9D6CD"/>
+            </a:solidFill>
+          </a:ln>
+          <a:effectLst/>
+        </p:spPr>
+        <p:style>
+          <a:lnRef idx="1">
+            <a:schemeClr val="accent1"/>
+          </a:lnRef>
+          <a:fillRef idx="3">
+            <a:schemeClr val="accent1"/>
+          </a:fillRef>
+          <a:effectRef idx="2">
+            <a:schemeClr val="accent1"/>
+          </a:effectRef>
+          <a:fontRef idx="minor">
+            <a:schemeClr val="lt1"/>
+          </a:fontRef>
+        </p:style>
+        <p:txBody>
+          <a:bodyPr rtlCol="0" anchor="ctr" wrap="square"/>
+          <a:lstStyle/>
+          <a:p>
+            <a:pPr algn="ctr"/>
+          </a:p>
+        </p:txBody>
+      </p:sp>
+      <p:sp>
+        <p:nvSpPr>
+          <p:cNvPr id="30" name="Rounded Rectangle 29"/>
+          <p:cNvSpPr/>
+          <p:nvPr/>
+        </p:nvSpPr>
+        <p:spPr>
+          <a:xfrm>
+            <a:off x="1741932" y="1746504"/>
+            <a:ext cx="1783080" cy="566928"/>
+          </a:xfrm>
+          <a:prstGeom prst="roundRect">
+            <a:avLst>
+              <a:gd name="adj" fmla="val 5000"/>
+            </a:avLst>
+          </a:prstGeom>
+          <a:solidFill>
+            <a:srgbClr val="FFFFFF"/>
+          </a:solidFill>
+          <a:ln w="12700">
+            <a:solidFill>
+              <a:srgbClr val="C9C9C2"/>
+            </a:solidFill>
+          </a:ln>
+          <a:effectLst/>
+        </p:spPr>
+        <p:style>
+          <a:lnRef idx="1">
+            <a:schemeClr val="accent1"/>
+          </a:lnRef>
+          <a:fillRef idx="3">
+            <a:schemeClr val="accent1"/>
+          </a:fillRef>
+          <a:effectRef idx="2">
+            <a:schemeClr val="accent1"/>
+          </a:effectRef>
+          <a:fontRef idx="minor">
+            <a:schemeClr val="lt1"/>
+          </a:fontRef>
+        </p:style>
+        <p:txBody>
+          <a:bodyPr rtlCol="0" anchor="ctr" wrap="square"/>
+          <a:lstStyle/>
+          <a:p>
+            <a:pPr algn="ctr"/>
+          </a:p>
+        </p:txBody>
+      </p:sp>
+      <p:sp>
+        <p:nvSpPr>
+          <p:cNvPr id="31" name="Oval 30"/>
+          <p:cNvSpPr/>
+          <p:nvPr/>
+        </p:nvSpPr>
+        <p:spPr>
+          <a:xfrm>
+            <a:off x="1805940" y="1938528"/>
+            <a:ext cx="182880" cy="182880"/>
+          </a:xfrm>
+          <a:prstGeom prst="ellipse">
+            <a:avLst/>
+          </a:prstGeom>
+          <a:solidFill>
+            <a:srgbClr val="8B0F1A"/>
+          </a:solidFill>
+          <a:ln>
+            <a:noFill/>
+          </a:ln>
+          <a:effectLst/>
+        </p:spPr>
+        <p:style>
+          <a:lnRef idx="1">
+            <a:schemeClr val="accent1"/>
+          </a:lnRef>
+          <a:fillRef idx="3">
+            <a:schemeClr val="accent1"/>
+          </a:fillRef>
+          <a:effectRef idx="2">
+            <a:schemeClr val="accent1"/>
+          </a:effectRef>
+          <a:fontRef idx="minor">
+            <a:schemeClr val="lt1"/>
+          </a:fontRef>
+        </p:style>
+        <p:txBody>
+          <a:bodyPr rtlCol="0" anchor="ctr" lIns="18288" rIns="18288" tIns="0" bIns="0"/>
+          <a:lstStyle/>
+          <a:p>
+            <a:pPr algn="ctr">
+              <a:lnSpc>
+                <a:spcPct val="100000"/>
+              </a:lnSpc>
+            </a:pPr>
+            <a:r>
+              <a:rPr sz="750" b="1">
+                <a:solidFill>
+                  <a:srgbClr val="FFFFFF"/>
+                </a:solidFill>
+                <a:latin typeface="微软雅黑"/>
+                <a:ea typeface="微软雅黑"/>
+                <a:cs typeface="微软雅黑"/>
+              </a:rPr>
+              <a:t>1</a:t>
+            </a:r>
+          </a:p>
+        </p:txBody>
+      </p:sp>
+      <p:sp>
+        <p:nvSpPr>
+          <p:cNvPr id="32" name="TextBox 31"/>
+          <p:cNvSpPr txBox="1"/>
+          <p:nvPr/>
+        </p:nvSpPr>
+        <p:spPr>
+          <a:xfrm>
+            <a:off x="1997964" y="1783080"/>
+            <a:ext cx="1481328" cy="493776"/>
+          </a:xfrm>
+          <a:prstGeom prst="rect">
+            <a:avLst/>
+          </a:prstGeom>
+          <a:noFill/>
+        </p:spPr>
+        <p:txBody>
+          <a:bodyPr wrap="square" lIns="27432" rIns="27432" tIns="9144" bIns="9144" anchor="ctr">
+            <a:spAutoFit/>
+          </a:bodyPr>
+          <a:lstStyle/>
+          <a:p>
+            <a:pPr algn="l">
+              <a:lnSpc>
+                <a:spcPct val="110000"/>
+              </a:lnSpc>
+            </a:pPr>
+            <a:r>
+              <a:rPr sz="900" b="1">
+                <a:solidFill>
+                  <a:srgbClr val="141414"/>
+                </a:solidFill>
+                <a:latin typeface="微软雅黑"/>
+                <a:ea typeface="微软雅黑"/>
+                <a:cs typeface="微软雅黑"/>
+              </a:rPr>
+              <a:t>任务令下发</a:t>
+            </a:r>
+          </a:p>
+          <a:p>
+            <a:pPr algn="l">
+              <a:lnSpc>
+                <a:spcPct val="110000"/>
+              </a:lnSpc>
+              <a:spcBef>
+                <a:spcPts val="100"/>
+              </a:spcBef>
+            </a:pPr>
+            <a:r>
+              <a:rPr sz="800" b="0">
+                <a:solidFill>
+                  <a:srgbClr val="5C5C56"/>
+                </a:solidFill>
+                <a:latin typeface="微软雅黑"/>
+                <a:ea typeface="微软雅黑"/>
+                <a:cs typeface="微软雅黑"/>
+              </a:rPr>
+              <a:t>MES 生成工单待测清单</a:t>
+            </a:r>
+          </a:p>
+        </p:txBody>
+      </p:sp>
+      <p:sp>
+        <p:nvSpPr>
+          <p:cNvPr id="33" name="Rounded Rectangle 32"/>
+          <p:cNvSpPr/>
+          <p:nvPr/>
+        </p:nvSpPr>
+        <p:spPr>
+          <a:xfrm>
+            <a:off x="1741932" y="2660904"/>
+            <a:ext cx="1783080" cy="566928"/>
+          </a:xfrm>
+          <a:prstGeom prst="roundRect">
+            <a:avLst>
+              <a:gd name="adj" fmla="val 5000"/>
+            </a:avLst>
+          </a:prstGeom>
+          <a:solidFill>
+            <a:srgbClr val="FFFFFF"/>
+          </a:solidFill>
+          <a:ln w="12700">
+            <a:solidFill>
+              <a:srgbClr val="C9C9C2"/>
+            </a:solidFill>
+          </a:ln>
+          <a:effectLst/>
+        </p:spPr>
+        <p:style>
+          <a:lnRef idx="1">
+            <a:schemeClr val="accent1"/>
+          </a:lnRef>
+          <a:fillRef idx="3">
+            <a:schemeClr val="accent1"/>
+          </a:fillRef>
+          <a:effectRef idx="2">
+            <a:schemeClr val="accent1"/>
+          </a:effectRef>
+          <a:fontRef idx="minor">
+            <a:schemeClr val="lt1"/>
+          </a:fontRef>
+        </p:style>
+        <p:txBody>
+          <a:bodyPr rtlCol="0" anchor="ctr" wrap="square"/>
+          <a:lstStyle/>
+          <a:p>
+            <a:pPr algn="ctr"/>
+          </a:p>
+        </p:txBody>
+      </p:sp>
+      <p:sp>
+        <p:nvSpPr>
+          <p:cNvPr id="34" name="Oval 33"/>
+          <p:cNvSpPr/>
+          <p:nvPr/>
+        </p:nvSpPr>
+        <p:spPr>
+          <a:xfrm>
+            <a:off x="1805940" y="2852928"/>
+            <a:ext cx="182880" cy="182880"/>
+          </a:xfrm>
+          <a:prstGeom prst="ellipse">
+            <a:avLst/>
+          </a:prstGeom>
+          <a:solidFill>
+            <a:srgbClr val="8B0F1A"/>
+          </a:solidFill>
+          <a:ln>
+            <a:noFill/>
+          </a:ln>
+          <a:effectLst/>
+        </p:spPr>
+        <p:style>
+          <a:lnRef idx="1">
+            <a:schemeClr val="accent1"/>
+          </a:lnRef>
+          <a:fillRef idx="3">
+            <a:schemeClr val="accent1"/>
+          </a:fillRef>
+          <a:effectRef idx="2">
+            <a:schemeClr val="accent1"/>
+          </a:effectRef>
+          <a:fontRef idx="minor">
+            <a:schemeClr val="lt1"/>
+          </a:fontRef>
+        </p:style>
+        <p:txBody>
+          <a:bodyPr rtlCol="0" anchor="ctr" lIns="18288" rIns="18288" tIns="0" bIns="0"/>
+          <a:lstStyle/>
+          <a:p>
+            <a:pPr algn="ctr">
+              <a:lnSpc>
+                <a:spcPct val="100000"/>
+              </a:lnSpc>
+            </a:pPr>
+            <a:r>
+              <a:rPr sz="750" b="1">
+                <a:solidFill>
+                  <a:srgbClr val="FFFFFF"/>
+                </a:solidFill>
+                <a:latin typeface="微软雅黑"/>
+                <a:ea typeface="微软雅黑"/>
+                <a:cs typeface="微软雅黑"/>
+              </a:rPr>
+              <a:t>2</a:t>
+            </a:r>
+          </a:p>
+        </p:txBody>
+      </p:sp>
+      <p:sp>
+        <p:nvSpPr>
+          <p:cNvPr id="35" name="TextBox 34"/>
+          <p:cNvSpPr txBox="1"/>
+          <p:nvPr/>
+        </p:nvSpPr>
+        <p:spPr>
+          <a:xfrm>
+            <a:off x="1997964" y="2697480"/>
+            <a:ext cx="1481328" cy="493776"/>
+          </a:xfrm>
+          <a:prstGeom prst="rect">
+            <a:avLst/>
+          </a:prstGeom>
+          <a:noFill/>
+        </p:spPr>
+        <p:txBody>
+          <a:bodyPr wrap="square" lIns="27432" rIns="27432" tIns="9144" bIns="9144" anchor="ctr">
+            <a:spAutoFit/>
+          </a:bodyPr>
+          <a:lstStyle/>
+          <a:p>
+            <a:pPr algn="l">
+              <a:lnSpc>
+                <a:spcPct val="110000"/>
+              </a:lnSpc>
+            </a:pPr>
+            <a:r>
+              <a:rPr sz="900" b="1">
+                <a:solidFill>
+                  <a:srgbClr val="141414"/>
+                </a:solidFill>
+                <a:latin typeface="微软雅黑"/>
+                <a:ea typeface="微软雅黑"/>
+                <a:cs typeface="微软雅黑"/>
+              </a:rPr>
+              <a:t>工位领取</a:t>
+            </a:r>
+          </a:p>
+          <a:p>
+            <a:pPr algn="l">
+              <a:lnSpc>
+                <a:spcPct val="110000"/>
+              </a:lnSpc>
+              <a:spcBef>
+                <a:spcPts val="100"/>
+              </a:spcBef>
+            </a:pPr>
+            <a:r>
+              <a:rPr sz="800" b="0">
+                <a:solidFill>
+                  <a:srgbClr val="5C5C56"/>
+                </a:solidFill>
+                <a:latin typeface="微软雅黑"/>
+                <a:ea typeface="微软雅黑"/>
+                <a:cs typeface="微软雅黑"/>
+              </a:rPr>
+              <a:t>终端拉取任务令明细</a:t>
+            </a:r>
+          </a:p>
+        </p:txBody>
+      </p:sp>
+      <p:sp>
+        <p:nvSpPr>
+          <p:cNvPr id="36" name="Rounded Rectangle 35"/>
+          <p:cNvSpPr/>
+          <p:nvPr/>
+        </p:nvSpPr>
+        <p:spPr>
+          <a:xfrm>
+            <a:off x="3808476" y="2660904"/>
+            <a:ext cx="1783080" cy="566928"/>
+          </a:xfrm>
+          <a:prstGeom prst="roundRect">
+            <a:avLst>
+              <a:gd name="adj" fmla="val 5000"/>
+            </a:avLst>
+          </a:prstGeom>
+          <a:solidFill>
+            <a:srgbClr val="FFFFFF"/>
+          </a:solidFill>
+          <a:ln w="12700">
+            <a:solidFill>
+              <a:srgbClr val="C9C9C2"/>
+            </a:solidFill>
+          </a:ln>
+          <a:effectLst/>
+        </p:spPr>
+        <p:style>
+          <a:lnRef idx="1">
+            <a:schemeClr val="accent1"/>
+          </a:lnRef>
+          <a:fillRef idx="3">
+            <a:schemeClr val="accent1"/>
+          </a:fillRef>
+          <a:effectRef idx="2">
+            <a:schemeClr val="accent1"/>
+          </a:effectRef>
+          <a:fontRef idx="minor">
+            <a:schemeClr val="lt1"/>
+          </a:fontRef>
+        </p:style>
+        <p:txBody>
+          <a:bodyPr rtlCol="0" anchor="ctr" wrap="square"/>
+          <a:lstStyle/>
+          <a:p>
+            <a:pPr algn="ctr"/>
+          </a:p>
+        </p:txBody>
+      </p:sp>
+      <p:sp>
+        <p:nvSpPr>
+          <p:cNvPr id="37" name="Oval 36"/>
+          <p:cNvSpPr/>
+          <p:nvPr/>
+        </p:nvSpPr>
+        <p:spPr>
+          <a:xfrm>
+            <a:off x="3872484" y="2852928"/>
+            <a:ext cx="182880" cy="182880"/>
+          </a:xfrm>
+          <a:prstGeom prst="ellipse">
+            <a:avLst/>
+          </a:prstGeom>
+          <a:solidFill>
+            <a:srgbClr val="8B0F1A"/>
+          </a:solidFill>
+          <a:ln>
+            <a:noFill/>
+          </a:ln>
+          <a:effectLst/>
+        </p:spPr>
+        <p:style>
+          <a:lnRef idx="1">
+            <a:schemeClr val="accent1"/>
+          </a:lnRef>
+          <a:fillRef idx="3">
+            <a:schemeClr val="accent1"/>
+          </a:fillRef>
+          <a:effectRef idx="2">
+            <a:schemeClr val="accent1"/>
+          </a:effectRef>
+          <a:fontRef idx="minor">
+            <a:schemeClr val="lt1"/>
+          </a:fontRef>
+        </p:style>
+        <p:txBody>
+          <a:bodyPr rtlCol="0" anchor="ctr" lIns="18288" rIns="18288" tIns="0" bIns="0"/>
+          <a:lstStyle/>
+          <a:p>
+            <a:pPr algn="ctr">
+              <a:lnSpc>
+                <a:spcPct val="100000"/>
+              </a:lnSpc>
+            </a:pPr>
+            <a:r>
+              <a:rPr sz="750" b="1">
+                <a:solidFill>
+                  <a:srgbClr val="FFFFFF"/>
+                </a:solidFill>
+                <a:latin typeface="微软雅黑"/>
+                <a:ea typeface="微软雅黑"/>
+                <a:cs typeface="微软雅黑"/>
+              </a:rPr>
+              <a:t>3</a:t>
+            </a:r>
+          </a:p>
+        </p:txBody>
+      </p:sp>
+      <p:sp>
+        <p:nvSpPr>
+          <p:cNvPr id="38" name="TextBox 37"/>
+          <p:cNvSpPr txBox="1"/>
+          <p:nvPr/>
+        </p:nvSpPr>
+        <p:spPr>
+          <a:xfrm>
+            <a:off x="4064508" y="2697480"/>
+            <a:ext cx="1481328" cy="493776"/>
+          </a:xfrm>
+          <a:prstGeom prst="rect">
+            <a:avLst/>
+          </a:prstGeom>
+          <a:noFill/>
+        </p:spPr>
+        <p:txBody>
+          <a:bodyPr wrap="square" lIns="27432" rIns="27432" tIns="9144" bIns="9144" anchor="ctr">
+            <a:spAutoFit/>
+          </a:bodyPr>
+          <a:lstStyle/>
+          <a:p>
+            <a:pPr algn="l">
+              <a:lnSpc>
+                <a:spcPct val="110000"/>
+              </a:lnSpc>
+            </a:pPr>
+            <a:r>
+              <a:rPr sz="900" b="1">
+                <a:solidFill>
+                  <a:srgbClr val="141414"/>
+                </a:solidFill>
+                <a:latin typeface="微软雅黑"/>
+                <a:ea typeface="微软雅黑"/>
+                <a:cs typeface="微软雅黑"/>
+              </a:rPr>
+              <a:t>扫码确认</a:t>
+            </a:r>
+          </a:p>
+          <a:p>
+            <a:pPr algn="l">
+              <a:lnSpc>
+                <a:spcPct val="110000"/>
+              </a:lnSpc>
+              <a:spcBef>
+                <a:spcPts val="100"/>
+              </a:spcBef>
+            </a:pPr>
+            <a:r>
+              <a:rPr sz="800" b="0">
+                <a:solidFill>
+                  <a:srgbClr val="5C5C56"/>
+                </a:solidFill>
+                <a:latin typeface="微软雅黑"/>
+                <a:ea typeface="微软雅黑"/>
+                <a:cs typeface="微软雅黑"/>
+              </a:rPr>
+              <a:t>扫序列号，校验一致性</a:t>
+            </a:r>
+          </a:p>
+        </p:txBody>
+      </p:sp>
+      <p:sp>
+        <p:nvSpPr>
+          <p:cNvPr id="39" name="Rounded Rectangle 38"/>
+          <p:cNvSpPr/>
+          <p:nvPr/>
+        </p:nvSpPr>
+        <p:spPr>
+          <a:xfrm>
+            <a:off x="3808476" y="3575304"/>
+            <a:ext cx="1783080" cy="566928"/>
+          </a:xfrm>
+          <a:prstGeom prst="roundRect">
+            <a:avLst>
+              <a:gd name="adj" fmla="val 5000"/>
+            </a:avLst>
+          </a:prstGeom>
+          <a:solidFill>
+            <a:srgbClr val="FFFFFF"/>
+          </a:solidFill>
+          <a:ln w="12700">
+            <a:solidFill>
+              <a:srgbClr val="C9C9C2"/>
+            </a:solidFill>
+          </a:ln>
+          <a:effectLst/>
+        </p:spPr>
+        <p:style>
+          <a:lnRef idx="1">
+            <a:schemeClr val="accent1"/>
+          </a:lnRef>
+          <a:fillRef idx="3">
+            <a:schemeClr val="accent1"/>
+          </a:fillRef>
+          <a:effectRef idx="2">
+            <a:schemeClr val="accent1"/>
+          </a:effectRef>
+          <a:fontRef idx="minor">
+            <a:schemeClr val="lt1"/>
+          </a:fontRef>
+        </p:style>
+        <p:txBody>
+          <a:bodyPr rtlCol="0" anchor="ctr" wrap="square"/>
+          <a:lstStyle/>
+          <a:p>
+            <a:pPr algn="ctr"/>
+          </a:p>
+        </p:txBody>
+      </p:sp>
+      <p:sp>
+        <p:nvSpPr>
+          <p:cNvPr id="40" name="Oval 39"/>
+          <p:cNvSpPr/>
+          <p:nvPr/>
+        </p:nvSpPr>
+        <p:spPr>
+          <a:xfrm>
+            <a:off x="3872484" y="3767328"/>
+            <a:ext cx="182880" cy="182880"/>
+          </a:xfrm>
+          <a:prstGeom prst="ellipse">
+            <a:avLst/>
+          </a:prstGeom>
+          <a:solidFill>
+            <a:srgbClr val="8B0F1A"/>
+          </a:solidFill>
+          <a:ln>
+            <a:noFill/>
+          </a:ln>
+          <a:effectLst/>
+        </p:spPr>
+        <p:style>
+          <a:lnRef idx="1">
+            <a:schemeClr val="accent1"/>
+          </a:lnRef>
+          <a:fillRef idx="3">
+            <a:schemeClr val="accent1"/>
+          </a:fillRef>
+          <a:effectRef idx="2">
+            <a:schemeClr val="accent1"/>
+          </a:effectRef>
+          <a:fontRef idx="minor">
+            <a:schemeClr val="lt1"/>
+          </a:fontRef>
+        </p:style>
+        <p:txBody>
+          <a:bodyPr rtlCol="0" anchor="ctr" lIns="18288" rIns="18288" tIns="0" bIns="0"/>
+          <a:lstStyle/>
+          <a:p>
+            <a:pPr algn="ctr">
+              <a:lnSpc>
+                <a:spcPct val="100000"/>
+              </a:lnSpc>
+            </a:pPr>
+            <a:r>
+              <a:rPr sz="750" b="1">
+                <a:solidFill>
+                  <a:srgbClr val="FFFFFF"/>
+                </a:solidFill>
+                <a:latin typeface="微软雅黑"/>
+                <a:ea typeface="微软雅黑"/>
+                <a:cs typeface="微软雅黑"/>
+              </a:rPr>
+              <a:t>4</a:t>
+            </a:r>
+          </a:p>
+        </p:txBody>
+      </p:sp>
+      <p:sp>
+        <p:nvSpPr>
+          <p:cNvPr id="41" name="TextBox 40"/>
+          <p:cNvSpPr txBox="1"/>
+          <p:nvPr/>
+        </p:nvSpPr>
+        <p:spPr>
+          <a:xfrm>
+            <a:off x="4064508" y="3611880"/>
+            <a:ext cx="1481328" cy="493776"/>
+          </a:xfrm>
+          <a:prstGeom prst="rect">
+            <a:avLst/>
+          </a:prstGeom>
+          <a:noFill/>
+        </p:spPr>
+        <p:txBody>
+          <a:bodyPr wrap="square" lIns="27432" rIns="27432" tIns="9144" bIns="9144" anchor="ctr">
+            <a:spAutoFit/>
+          </a:bodyPr>
+          <a:lstStyle/>
+          <a:p>
+            <a:pPr algn="l">
+              <a:lnSpc>
+                <a:spcPct val="110000"/>
+              </a:lnSpc>
+            </a:pPr>
+            <a:r>
+              <a:rPr sz="900" b="1">
+                <a:solidFill>
+                  <a:srgbClr val="141414"/>
+                </a:solidFill>
+                <a:latin typeface="微软雅黑"/>
+                <a:ea typeface="微软雅黑"/>
+                <a:cs typeface="微软雅黑"/>
+              </a:rPr>
+              <a:t>防错校验</a:t>
+            </a:r>
+          </a:p>
+          <a:p>
+            <a:pPr algn="l">
+              <a:lnSpc>
+                <a:spcPct val="110000"/>
+              </a:lnSpc>
+              <a:spcBef>
+                <a:spcPts val="100"/>
+              </a:spcBef>
+            </a:pPr>
+            <a:r>
+              <a:rPr sz="800" b="0">
+                <a:solidFill>
+                  <a:srgbClr val="5C5C56"/>
+                </a:solidFill>
+                <a:latin typeface="微软雅黑"/>
+                <a:ea typeface="微软雅黑"/>
+                <a:cs typeface="微软雅黑"/>
+              </a:rPr>
+              <a:t>序列号 ↔ 工单 ↔ 台位</a:t>
+            </a:r>
+          </a:p>
+        </p:txBody>
+      </p:sp>
+      <p:sp>
+        <p:nvSpPr>
+          <p:cNvPr id="42" name="Rounded Rectangle 41"/>
+          <p:cNvSpPr/>
+          <p:nvPr/>
+        </p:nvSpPr>
+        <p:spPr>
+          <a:xfrm>
+            <a:off x="5875020" y="3575304"/>
+            <a:ext cx="1783080" cy="566928"/>
+          </a:xfrm>
+          <a:prstGeom prst="roundRect">
+            <a:avLst>
+              <a:gd name="adj" fmla="val 5000"/>
+            </a:avLst>
+          </a:prstGeom>
+          <a:solidFill>
+            <a:srgbClr val="FFFFFF"/>
+          </a:solidFill>
+          <a:ln w="12700">
+            <a:solidFill>
+              <a:srgbClr val="C9C9C2"/>
+            </a:solidFill>
+          </a:ln>
+          <a:effectLst/>
+        </p:spPr>
+        <p:style>
+          <a:lnRef idx="1">
+            <a:schemeClr val="accent1"/>
+          </a:lnRef>
+          <a:fillRef idx="3">
+            <a:schemeClr val="accent1"/>
+          </a:fillRef>
+          <a:effectRef idx="2">
+            <a:schemeClr val="accent1"/>
+          </a:effectRef>
+          <a:fontRef idx="minor">
+            <a:schemeClr val="lt1"/>
+          </a:fontRef>
+        </p:style>
+        <p:txBody>
+          <a:bodyPr rtlCol="0" anchor="ctr" wrap="square"/>
+          <a:lstStyle/>
+          <a:p>
+            <a:pPr algn="ctr"/>
+          </a:p>
+        </p:txBody>
+      </p:sp>
+      <p:sp>
+        <p:nvSpPr>
+          <p:cNvPr id="43" name="Oval 42"/>
+          <p:cNvSpPr/>
+          <p:nvPr/>
+        </p:nvSpPr>
+        <p:spPr>
+          <a:xfrm>
+            <a:off x="5939028" y="3767328"/>
+            <a:ext cx="182880" cy="182880"/>
+          </a:xfrm>
+          <a:prstGeom prst="ellipse">
+            <a:avLst/>
+          </a:prstGeom>
+          <a:solidFill>
+            <a:srgbClr val="8B0F1A"/>
+          </a:solidFill>
+          <a:ln>
+            <a:noFill/>
+          </a:ln>
+          <a:effectLst/>
+        </p:spPr>
+        <p:style>
+          <a:lnRef idx="1">
+            <a:schemeClr val="accent1"/>
+          </a:lnRef>
+          <a:fillRef idx="3">
+            <a:schemeClr val="accent1"/>
+          </a:fillRef>
+          <a:effectRef idx="2">
+            <a:schemeClr val="accent1"/>
+          </a:effectRef>
+          <a:fontRef idx="minor">
+            <a:schemeClr val="lt1"/>
+          </a:fontRef>
+        </p:style>
+        <p:txBody>
+          <a:bodyPr rtlCol="0" anchor="ctr" lIns="18288" rIns="18288" tIns="0" bIns="0"/>
+          <a:lstStyle/>
+          <a:p>
+            <a:pPr algn="ctr">
+              <a:lnSpc>
+                <a:spcPct val="100000"/>
+              </a:lnSpc>
+            </a:pPr>
+            <a:r>
+              <a:rPr sz="750" b="1">
+                <a:solidFill>
+                  <a:srgbClr val="FFFFFF"/>
+                </a:solidFill>
+                <a:latin typeface="微软雅黑"/>
+                <a:ea typeface="微软雅黑"/>
+                <a:cs typeface="微软雅黑"/>
+              </a:rPr>
+              <a:t>5</a:t>
+            </a:r>
+          </a:p>
+        </p:txBody>
+      </p:sp>
+      <p:sp>
+        <p:nvSpPr>
+          <p:cNvPr id="44" name="TextBox 43"/>
+          <p:cNvSpPr txBox="1"/>
+          <p:nvPr/>
+        </p:nvSpPr>
+        <p:spPr>
+          <a:xfrm>
+            <a:off x="6131052" y="3611880"/>
+            <a:ext cx="1481328" cy="493776"/>
+          </a:xfrm>
+          <a:prstGeom prst="rect">
+            <a:avLst/>
+          </a:prstGeom>
+          <a:noFill/>
+        </p:spPr>
+        <p:txBody>
+          <a:bodyPr wrap="square" lIns="27432" rIns="27432" tIns="9144" bIns="9144" anchor="ctr">
+            <a:spAutoFit/>
+          </a:bodyPr>
+          <a:lstStyle/>
+          <a:p>
+            <a:pPr algn="l">
+              <a:lnSpc>
+                <a:spcPct val="110000"/>
+              </a:lnSpc>
+            </a:pPr>
+            <a:r>
+              <a:rPr sz="900" b="1">
+                <a:solidFill>
+                  <a:srgbClr val="141414"/>
+                </a:solidFill>
+                <a:latin typeface="微软雅黑"/>
+                <a:ea typeface="微软雅黑"/>
+                <a:cs typeface="微软雅黑"/>
+              </a:rPr>
+              <a:t>任务派发</a:t>
+            </a:r>
+          </a:p>
+          <a:p>
+            <a:pPr algn="l">
+              <a:lnSpc>
+                <a:spcPct val="110000"/>
+              </a:lnSpc>
+              <a:spcBef>
+                <a:spcPts val="100"/>
+              </a:spcBef>
+            </a:pPr>
+            <a:r>
+              <a:rPr sz="800" b="0">
+                <a:solidFill>
+                  <a:srgbClr val="5C5C56"/>
+                </a:solidFill>
+                <a:latin typeface="微软雅黑"/>
+                <a:ea typeface="微软雅黑"/>
+                <a:cs typeface="微软雅黑"/>
+              </a:rPr>
+              <a:t>按台位下发测试任务</a:t>
+            </a:r>
+          </a:p>
+        </p:txBody>
+      </p:sp>
+      <p:sp>
+        <p:nvSpPr>
+          <p:cNvPr id="45" name="Rounded Rectangle 44"/>
+          <p:cNvSpPr/>
+          <p:nvPr/>
+        </p:nvSpPr>
+        <p:spPr>
+          <a:xfrm>
+            <a:off x="5875020" y="4489704"/>
+            <a:ext cx="1783080" cy="566928"/>
+          </a:xfrm>
+          <a:prstGeom prst="roundRect">
+            <a:avLst>
+              <a:gd name="adj" fmla="val 5000"/>
+            </a:avLst>
+          </a:prstGeom>
+          <a:solidFill>
+            <a:srgbClr val="FFFFFF"/>
+          </a:solidFill>
+          <a:ln w="12700">
+            <a:solidFill>
+              <a:srgbClr val="C9C9C2"/>
+            </a:solidFill>
+          </a:ln>
+          <a:effectLst/>
+        </p:spPr>
+        <p:style>
+          <a:lnRef idx="1">
+            <a:schemeClr val="accent1"/>
+          </a:lnRef>
+          <a:fillRef idx="3">
+            <a:schemeClr val="accent1"/>
+          </a:fillRef>
+          <a:effectRef idx="2">
+            <a:schemeClr val="accent1"/>
+          </a:effectRef>
+          <a:fontRef idx="minor">
+            <a:schemeClr val="lt1"/>
+          </a:fontRef>
+        </p:style>
+        <p:txBody>
+          <a:bodyPr rtlCol="0" anchor="ctr" wrap="square"/>
+          <a:lstStyle/>
+          <a:p>
+            <a:pPr algn="ctr"/>
+          </a:p>
+        </p:txBody>
+      </p:sp>
+      <p:sp>
+        <p:nvSpPr>
+          <p:cNvPr id="46" name="Oval 45"/>
+          <p:cNvSpPr/>
+          <p:nvPr/>
+        </p:nvSpPr>
+        <p:spPr>
+          <a:xfrm>
+            <a:off x="5939028" y="4681728"/>
+            <a:ext cx="182880" cy="182880"/>
+          </a:xfrm>
+          <a:prstGeom prst="ellipse">
+            <a:avLst/>
+          </a:prstGeom>
+          <a:solidFill>
+            <a:srgbClr val="8B0F1A"/>
+          </a:solidFill>
+          <a:ln>
+            <a:noFill/>
+          </a:ln>
+          <a:effectLst/>
+        </p:spPr>
+        <p:style>
+          <a:lnRef idx="1">
+            <a:schemeClr val="accent1"/>
+          </a:lnRef>
+          <a:fillRef idx="3">
+            <a:schemeClr val="accent1"/>
+          </a:fillRef>
+          <a:effectRef idx="2">
+            <a:schemeClr val="accent1"/>
+          </a:effectRef>
+          <a:fontRef idx="minor">
+            <a:schemeClr val="lt1"/>
+          </a:fontRef>
+        </p:style>
+        <p:txBody>
+          <a:bodyPr rtlCol="0" anchor="ctr" lIns="18288" rIns="18288" tIns="0" bIns="0"/>
+          <a:lstStyle/>
+          <a:p>
+            <a:pPr algn="ctr">
+              <a:lnSpc>
+                <a:spcPct val="100000"/>
+              </a:lnSpc>
+            </a:pPr>
+            <a:r>
+              <a:rPr sz="750" b="1">
+                <a:solidFill>
+                  <a:srgbClr val="FFFFFF"/>
+                </a:solidFill>
+                <a:latin typeface="微软雅黑"/>
+                <a:ea typeface="微软雅黑"/>
+                <a:cs typeface="微软雅黑"/>
+              </a:rPr>
+              <a:t>6</a:t>
+            </a:r>
+          </a:p>
+        </p:txBody>
+      </p:sp>
+      <p:sp>
+        <p:nvSpPr>
+          <p:cNvPr id="47" name="TextBox 46"/>
+          <p:cNvSpPr txBox="1"/>
+          <p:nvPr/>
+        </p:nvSpPr>
+        <p:spPr>
+          <a:xfrm>
+            <a:off x="6131052" y="4526280"/>
+            <a:ext cx="1481328" cy="493776"/>
+          </a:xfrm>
+          <a:prstGeom prst="rect">
+            <a:avLst/>
+          </a:prstGeom>
+          <a:noFill/>
+        </p:spPr>
+        <p:txBody>
+          <a:bodyPr wrap="square" lIns="27432" rIns="27432" tIns="9144" bIns="9144" anchor="ctr">
+            <a:spAutoFit/>
+          </a:bodyPr>
+          <a:lstStyle/>
+          <a:p>
+            <a:pPr algn="l">
+              <a:lnSpc>
+                <a:spcPct val="110000"/>
+              </a:lnSpc>
+            </a:pPr>
+            <a:r>
+              <a:rPr sz="900" b="1">
+                <a:solidFill>
+                  <a:srgbClr val="141414"/>
+                </a:solidFill>
+                <a:latin typeface="微软雅黑"/>
+                <a:ea typeface="微软雅黑"/>
+                <a:cs typeface="微软雅黑"/>
+              </a:rPr>
+              <a:t>用例执行</a:t>
+            </a:r>
+          </a:p>
+          <a:p>
+            <a:pPr algn="l">
+              <a:lnSpc>
+                <a:spcPct val="110000"/>
+              </a:lnSpc>
+              <a:spcBef>
+                <a:spcPts val="100"/>
+              </a:spcBef>
+            </a:pPr>
+            <a:r>
+              <a:rPr sz="800" b="0">
+                <a:solidFill>
+                  <a:srgbClr val="5C5C56"/>
+                </a:solidFill>
+                <a:latin typeface="微软雅黑"/>
+                <a:ea typeface="微软雅黑"/>
+                <a:cs typeface="微软雅黑"/>
+              </a:rPr>
+              <a:t>TPS / pytest 驱动设备</a:t>
+            </a:r>
+          </a:p>
+        </p:txBody>
+      </p:sp>
+      <p:sp>
+        <p:nvSpPr>
+          <p:cNvPr id="48" name="Rounded Rectangle 47"/>
+          <p:cNvSpPr/>
+          <p:nvPr/>
+        </p:nvSpPr>
+        <p:spPr>
+          <a:xfrm>
+            <a:off x="7941564" y="4489704"/>
+            <a:ext cx="1783080" cy="566928"/>
+          </a:xfrm>
+          <a:prstGeom prst="roundRect">
+            <a:avLst>
+              <a:gd name="adj" fmla="val 5000"/>
+            </a:avLst>
+          </a:prstGeom>
+          <a:solidFill>
+            <a:srgbClr val="FFFFFF"/>
+          </a:solidFill>
+          <a:ln w="12700">
+            <a:solidFill>
+              <a:srgbClr val="C9C9C2"/>
+            </a:solidFill>
+          </a:ln>
+          <a:effectLst/>
+        </p:spPr>
+        <p:style>
+          <a:lnRef idx="1">
+            <a:schemeClr val="accent1"/>
+          </a:lnRef>
+          <a:fillRef idx="3">
+            <a:schemeClr val="accent1"/>
+          </a:fillRef>
+          <a:effectRef idx="2">
+            <a:schemeClr val="accent1"/>
+          </a:effectRef>
+          <a:fontRef idx="minor">
+            <a:schemeClr val="lt1"/>
+          </a:fontRef>
+        </p:style>
+        <p:txBody>
+          <a:bodyPr rtlCol="0" anchor="ctr" wrap="square"/>
+          <a:lstStyle/>
+          <a:p>
+            <a:pPr algn="ctr"/>
+          </a:p>
+        </p:txBody>
+      </p:sp>
+      <p:sp>
+        <p:nvSpPr>
+          <p:cNvPr id="49" name="Oval 48"/>
+          <p:cNvSpPr/>
+          <p:nvPr/>
+        </p:nvSpPr>
+        <p:spPr>
+          <a:xfrm>
+            <a:off x="8005572" y="4681728"/>
+            <a:ext cx="182880" cy="182880"/>
+          </a:xfrm>
+          <a:prstGeom prst="ellipse">
+            <a:avLst/>
+          </a:prstGeom>
+          <a:solidFill>
+            <a:srgbClr val="8B0F1A"/>
+          </a:solidFill>
+          <a:ln>
+            <a:noFill/>
+          </a:ln>
+          <a:effectLst/>
+        </p:spPr>
+        <p:style>
+          <a:lnRef idx="1">
+            <a:schemeClr val="accent1"/>
+          </a:lnRef>
+          <a:fillRef idx="3">
+            <a:schemeClr val="accent1"/>
+          </a:fillRef>
+          <a:effectRef idx="2">
+            <a:schemeClr val="accent1"/>
+          </a:effectRef>
+          <a:fontRef idx="minor">
+            <a:schemeClr val="lt1"/>
+          </a:fontRef>
+        </p:style>
+        <p:txBody>
+          <a:bodyPr rtlCol="0" anchor="ctr" lIns="18288" rIns="18288" tIns="0" bIns="0"/>
+          <a:lstStyle/>
+          <a:p>
+            <a:pPr algn="ctr">
+              <a:lnSpc>
+                <a:spcPct val="100000"/>
+              </a:lnSpc>
+            </a:pPr>
+            <a:r>
+              <a:rPr sz="750" b="1">
+                <a:solidFill>
+                  <a:srgbClr val="FFFFFF"/>
+                </a:solidFill>
+                <a:latin typeface="微软雅黑"/>
+                <a:ea typeface="微软雅黑"/>
+                <a:cs typeface="微软雅黑"/>
+              </a:rPr>
+              <a:t>7</a:t>
+            </a:r>
+          </a:p>
+        </p:txBody>
+      </p:sp>
+      <p:sp>
+        <p:nvSpPr>
+          <p:cNvPr id="50" name="TextBox 49"/>
+          <p:cNvSpPr txBox="1"/>
+          <p:nvPr/>
+        </p:nvSpPr>
+        <p:spPr>
+          <a:xfrm>
+            <a:off x="8197596" y="4526280"/>
+            <a:ext cx="1481328" cy="493776"/>
+          </a:xfrm>
+          <a:prstGeom prst="rect">
+            <a:avLst/>
+          </a:prstGeom>
+          <a:noFill/>
+        </p:spPr>
+        <p:txBody>
+          <a:bodyPr wrap="square" lIns="27432" rIns="27432" tIns="9144" bIns="9144" anchor="ctr">
+            <a:spAutoFit/>
+          </a:bodyPr>
+          <a:lstStyle/>
+          <a:p>
+            <a:pPr algn="l">
+              <a:lnSpc>
+                <a:spcPct val="110000"/>
+              </a:lnSpc>
+            </a:pPr>
+            <a:r>
+              <a:rPr sz="900" b="1">
+                <a:solidFill>
+                  <a:srgbClr val="141414"/>
+                </a:solidFill>
+                <a:latin typeface="微软雅黑"/>
+                <a:ea typeface="微软雅黑"/>
+                <a:cs typeface="微软雅黑"/>
+              </a:rPr>
+              <a:t>原始结果</a:t>
+            </a:r>
+          </a:p>
+          <a:p>
+            <a:pPr algn="l">
+              <a:lnSpc>
+                <a:spcPct val="110000"/>
+              </a:lnSpc>
+              <a:spcBef>
+                <a:spcPts val="100"/>
+              </a:spcBef>
+            </a:pPr>
+            <a:r>
+              <a:rPr sz="800" b="0">
+                <a:solidFill>
+                  <a:srgbClr val="5C5C56"/>
+                </a:solidFill>
+                <a:latin typeface="微软雅黑"/>
+                <a:ea typeface="微软雅黑"/>
+                <a:cs typeface="微软雅黑"/>
+              </a:rPr>
+              <a:t>测量值 / 判定 / 日志</a:t>
+            </a:r>
+          </a:p>
+        </p:txBody>
+      </p:sp>
+      <p:sp>
+        <p:nvSpPr>
+          <p:cNvPr id="51" name="Rounded Rectangle 50"/>
+          <p:cNvSpPr/>
+          <p:nvPr/>
+        </p:nvSpPr>
+        <p:spPr>
+          <a:xfrm>
+            <a:off x="7941564" y="5404104"/>
+            <a:ext cx="1783080" cy="566928"/>
+          </a:xfrm>
+          <a:prstGeom prst="roundRect">
+            <a:avLst>
+              <a:gd name="adj" fmla="val 5000"/>
+            </a:avLst>
+          </a:prstGeom>
+          <a:solidFill>
+            <a:srgbClr val="FFFFFF"/>
+          </a:solidFill>
+          <a:ln w="12700">
+            <a:solidFill>
+              <a:srgbClr val="C9C9C2"/>
+            </a:solidFill>
+          </a:ln>
+          <a:effectLst/>
+        </p:spPr>
+        <p:style>
+          <a:lnRef idx="1">
+            <a:schemeClr val="accent1"/>
+          </a:lnRef>
+          <a:fillRef idx="3">
+            <a:schemeClr val="accent1"/>
+          </a:fillRef>
+          <a:effectRef idx="2">
+            <a:schemeClr val="accent1"/>
+          </a:effectRef>
+          <a:fontRef idx="minor">
+            <a:schemeClr val="lt1"/>
+          </a:fontRef>
+        </p:style>
+        <p:txBody>
+          <a:bodyPr rtlCol="0" anchor="ctr" wrap="square"/>
+          <a:lstStyle/>
+          <a:p>
+            <a:pPr algn="ctr"/>
+          </a:p>
+        </p:txBody>
+      </p:sp>
+      <p:sp>
+        <p:nvSpPr>
+          <p:cNvPr id="52" name="Oval 51"/>
+          <p:cNvSpPr/>
+          <p:nvPr/>
+        </p:nvSpPr>
+        <p:spPr>
+          <a:xfrm>
+            <a:off x="8005572" y="5596128"/>
+            <a:ext cx="182880" cy="182880"/>
+          </a:xfrm>
+          <a:prstGeom prst="ellipse">
+            <a:avLst/>
+          </a:prstGeom>
+          <a:solidFill>
+            <a:srgbClr val="8B0F1A"/>
+          </a:solidFill>
+          <a:ln>
+            <a:noFill/>
+          </a:ln>
+          <a:effectLst/>
+        </p:spPr>
+        <p:style>
+          <a:lnRef idx="1">
+            <a:schemeClr val="accent1"/>
+          </a:lnRef>
+          <a:fillRef idx="3">
+            <a:schemeClr val="accent1"/>
+          </a:fillRef>
+          <a:effectRef idx="2">
+            <a:schemeClr val="accent1"/>
+          </a:effectRef>
+          <a:fontRef idx="minor">
+            <a:schemeClr val="lt1"/>
+          </a:fontRef>
+        </p:style>
+        <p:txBody>
+          <a:bodyPr rtlCol="0" anchor="ctr" lIns="18288" rIns="18288" tIns="0" bIns="0"/>
+          <a:lstStyle/>
+          <a:p>
+            <a:pPr algn="ctr">
+              <a:lnSpc>
+                <a:spcPct val="100000"/>
+              </a:lnSpc>
+            </a:pPr>
+            <a:r>
+              <a:rPr sz="750" b="1">
+                <a:solidFill>
+                  <a:srgbClr val="FFFFFF"/>
+                </a:solidFill>
+                <a:latin typeface="微软雅黑"/>
+                <a:ea typeface="微软雅黑"/>
+                <a:cs typeface="微软雅黑"/>
+              </a:rPr>
+              <a:t>8</a:t>
+            </a:r>
+          </a:p>
+        </p:txBody>
+      </p:sp>
+      <p:sp>
+        <p:nvSpPr>
+          <p:cNvPr id="53" name="TextBox 52"/>
+          <p:cNvSpPr txBox="1"/>
+          <p:nvPr/>
+        </p:nvSpPr>
+        <p:spPr>
+          <a:xfrm>
+            <a:off x="8197596" y="5440680"/>
+            <a:ext cx="1481328" cy="493776"/>
+          </a:xfrm>
+          <a:prstGeom prst="rect">
+            <a:avLst/>
+          </a:prstGeom>
+          <a:noFill/>
+        </p:spPr>
+        <p:txBody>
+          <a:bodyPr wrap="square" lIns="27432" rIns="27432" tIns="9144" bIns="9144" anchor="ctr">
+            <a:spAutoFit/>
+          </a:bodyPr>
+          <a:lstStyle/>
+          <a:p>
+            <a:pPr algn="l">
+              <a:lnSpc>
+                <a:spcPct val="110000"/>
+              </a:lnSpc>
+            </a:pPr>
+            <a:r>
+              <a:rPr sz="900" b="1">
+                <a:solidFill>
+                  <a:srgbClr val="141414"/>
+                </a:solidFill>
+                <a:latin typeface="微软雅黑"/>
+                <a:ea typeface="微软雅黑"/>
+                <a:cs typeface="微软雅黑"/>
+              </a:rPr>
+              <a:t>结果标准化</a:t>
+            </a:r>
+          </a:p>
+          <a:p>
+            <a:pPr algn="l">
+              <a:lnSpc>
+                <a:spcPct val="110000"/>
+              </a:lnSpc>
+              <a:spcBef>
+                <a:spcPts val="100"/>
+              </a:spcBef>
+            </a:pPr>
+            <a:r>
+              <a:rPr sz="800" b="0">
+                <a:solidFill>
+                  <a:srgbClr val="5C5C56"/>
+                </a:solidFill>
+                <a:latin typeface="微软雅黑"/>
+                <a:ea typeface="微软雅黑"/>
+                <a:cs typeface="微软雅黑"/>
+              </a:rPr>
+              <a:t>统一字段 / 单位 / 追溯码</a:t>
+            </a:r>
+          </a:p>
+        </p:txBody>
+      </p:sp>
+      <p:sp>
+        <p:nvSpPr>
+          <p:cNvPr id="54" name="Rounded Rectangle 53"/>
+          <p:cNvSpPr/>
+          <p:nvPr/>
+        </p:nvSpPr>
+        <p:spPr>
+          <a:xfrm>
+            <a:off x="10008108" y="5404104"/>
+            <a:ext cx="1783080" cy="566928"/>
+          </a:xfrm>
+          <a:prstGeom prst="roundRect">
+            <a:avLst>
+              <a:gd name="adj" fmla="val 5000"/>
+            </a:avLst>
+          </a:prstGeom>
+          <a:solidFill>
+            <a:srgbClr val="FFFFFF"/>
+          </a:solidFill>
+          <a:ln w="12700">
+            <a:solidFill>
+              <a:srgbClr val="C9C9C2"/>
+            </a:solidFill>
+          </a:ln>
+          <a:effectLst/>
+        </p:spPr>
+        <p:style>
+          <a:lnRef idx="1">
+            <a:schemeClr val="accent1"/>
+          </a:lnRef>
+          <a:fillRef idx="3">
+            <a:schemeClr val="accent1"/>
+          </a:fillRef>
+          <a:effectRef idx="2">
+            <a:schemeClr val="accent1"/>
+          </a:effectRef>
+          <a:fontRef idx="minor">
+            <a:schemeClr val="lt1"/>
+          </a:fontRef>
+        </p:style>
+        <p:txBody>
+          <a:bodyPr rtlCol="0" anchor="ctr" wrap="square"/>
+          <a:lstStyle/>
+          <a:p>
+            <a:pPr algn="ctr"/>
+          </a:p>
+        </p:txBody>
+      </p:sp>
+      <p:sp>
+        <p:nvSpPr>
+          <p:cNvPr id="55" name="Oval 54"/>
+          <p:cNvSpPr/>
+          <p:nvPr/>
+        </p:nvSpPr>
+        <p:spPr>
+          <a:xfrm>
+            <a:off x="10072116" y="5596128"/>
+            <a:ext cx="182880" cy="182880"/>
+          </a:xfrm>
+          <a:prstGeom prst="ellipse">
+            <a:avLst/>
+          </a:prstGeom>
+          <a:solidFill>
+            <a:srgbClr val="8B0F1A"/>
+          </a:solidFill>
+          <a:ln>
+            <a:noFill/>
+          </a:ln>
+          <a:effectLst/>
+        </p:spPr>
+        <p:style>
+          <a:lnRef idx="1">
+            <a:schemeClr val="accent1"/>
+          </a:lnRef>
+          <a:fillRef idx="3">
+            <a:schemeClr val="accent1"/>
+          </a:fillRef>
+          <a:effectRef idx="2">
+            <a:schemeClr val="accent1"/>
+          </a:effectRef>
+          <a:fontRef idx="minor">
+            <a:schemeClr val="lt1"/>
+          </a:fontRef>
+        </p:style>
+        <p:txBody>
+          <a:bodyPr rtlCol="0" anchor="ctr" lIns="18288" rIns="18288" tIns="0" bIns="0"/>
+          <a:lstStyle/>
+          <a:p>
+            <a:pPr algn="ctr">
+              <a:lnSpc>
+                <a:spcPct val="100000"/>
+              </a:lnSpc>
+            </a:pPr>
+            <a:r>
+              <a:rPr sz="750" b="1">
+                <a:solidFill>
+                  <a:srgbClr val="FFFFFF"/>
+                </a:solidFill>
+                <a:latin typeface="微软雅黑"/>
+                <a:ea typeface="微软雅黑"/>
+                <a:cs typeface="微软雅黑"/>
+              </a:rPr>
+              <a:t>9</a:t>
+            </a:r>
+          </a:p>
+        </p:txBody>
+      </p:sp>
+      <p:sp>
+        <p:nvSpPr>
+          <p:cNvPr id="56" name="TextBox 55"/>
+          <p:cNvSpPr txBox="1"/>
+          <p:nvPr/>
+        </p:nvSpPr>
+        <p:spPr>
+          <a:xfrm>
+            <a:off x="10264140" y="5440680"/>
+            <a:ext cx="1481328" cy="493776"/>
+          </a:xfrm>
+          <a:prstGeom prst="rect">
+            <a:avLst/>
+          </a:prstGeom>
+          <a:noFill/>
+        </p:spPr>
+        <p:txBody>
+          <a:bodyPr wrap="square" lIns="27432" rIns="27432" tIns="9144" bIns="9144" anchor="ctr">
+            <a:spAutoFit/>
+          </a:bodyPr>
+          <a:lstStyle/>
+          <a:p>
+            <a:pPr algn="l">
+              <a:lnSpc>
+                <a:spcPct val="110000"/>
+              </a:lnSpc>
+            </a:pPr>
+            <a:r>
+              <a:rPr sz="900" b="1">
+                <a:solidFill>
+                  <a:srgbClr val="141414"/>
+                </a:solidFill>
+                <a:latin typeface="微软雅黑"/>
+                <a:ea typeface="微软雅黑"/>
+                <a:cs typeface="微软雅黑"/>
+              </a:rPr>
+              <a:t>任务令汇总</a:t>
+            </a:r>
+          </a:p>
+          <a:p>
+            <a:pPr algn="l">
+              <a:lnSpc>
+                <a:spcPct val="110000"/>
+              </a:lnSpc>
+              <a:spcBef>
+                <a:spcPts val="100"/>
+              </a:spcBef>
+            </a:pPr>
+            <a:r>
+              <a:rPr sz="800" b="0">
+                <a:solidFill>
+                  <a:srgbClr val="5C5C56"/>
+                </a:solidFill>
+                <a:latin typeface="微软雅黑"/>
+                <a:ea typeface="微软雅黑"/>
+                <a:cs typeface="微软雅黑"/>
+              </a:rPr>
+              <a:t>按工单聚合单件结论</a:t>
+            </a:r>
+          </a:p>
+        </p:txBody>
+      </p:sp>
+      <p:sp>
+        <p:nvSpPr>
+          <p:cNvPr id="57" name="Rounded Rectangle 56"/>
+          <p:cNvSpPr/>
+          <p:nvPr/>
+        </p:nvSpPr>
+        <p:spPr>
+          <a:xfrm>
+            <a:off x="10008108" y="1746504"/>
+            <a:ext cx="1783080" cy="566928"/>
+          </a:xfrm>
+          <a:prstGeom prst="roundRect">
+            <a:avLst>
+              <a:gd name="adj" fmla="val 5000"/>
+            </a:avLst>
+          </a:prstGeom>
+          <a:solidFill>
+            <a:srgbClr val="FFFFFF"/>
+          </a:solidFill>
+          <a:ln w="12700">
+            <a:solidFill>
+              <a:srgbClr val="C9C9C2"/>
+            </a:solidFill>
+          </a:ln>
+          <a:effectLst/>
+        </p:spPr>
+        <p:style>
+          <a:lnRef idx="1">
+            <a:schemeClr val="accent1"/>
+          </a:lnRef>
+          <a:fillRef idx="3">
+            <a:schemeClr val="accent1"/>
+          </a:fillRef>
+          <a:effectRef idx="2">
+            <a:schemeClr val="accent1"/>
+          </a:effectRef>
+          <a:fontRef idx="minor">
+            <a:schemeClr val="lt1"/>
+          </a:fontRef>
+        </p:style>
+        <p:txBody>
+          <a:bodyPr rtlCol="0" anchor="ctr" wrap="square"/>
+          <a:lstStyle/>
+          <a:p>
+            <a:pPr algn="ctr"/>
+          </a:p>
+        </p:txBody>
+      </p:sp>
+      <p:sp>
+        <p:nvSpPr>
+          <p:cNvPr id="58" name="Oval 57"/>
+          <p:cNvSpPr/>
+          <p:nvPr/>
+        </p:nvSpPr>
+        <p:spPr>
+          <a:xfrm>
+            <a:off x="10072116" y="1938528"/>
+            <a:ext cx="182880" cy="182880"/>
+          </a:xfrm>
+          <a:prstGeom prst="ellipse">
+            <a:avLst/>
+          </a:prstGeom>
+          <a:solidFill>
+            <a:srgbClr val="8B0F1A"/>
+          </a:solidFill>
+          <a:ln>
+            <a:noFill/>
+          </a:ln>
+          <a:effectLst/>
+        </p:spPr>
+        <p:style>
+          <a:lnRef idx="1">
+            <a:schemeClr val="accent1"/>
+          </a:lnRef>
+          <a:fillRef idx="3">
+            <a:schemeClr val="accent1"/>
+          </a:fillRef>
+          <a:effectRef idx="2">
+            <a:schemeClr val="accent1"/>
+          </a:effectRef>
+          <a:fontRef idx="minor">
+            <a:schemeClr val="lt1"/>
+          </a:fontRef>
+        </p:style>
+        <p:txBody>
+          <a:bodyPr rtlCol="0" anchor="ctr" lIns="18288" rIns="18288" tIns="0" bIns="0"/>
+          <a:lstStyle/>
+          <a:p>
+            <a:pPr algn="ctr">
+              <a:lnSpc>
+                <a:spcPct val="100000"/>
+              </a:lnSpc>
+            </a:pPr>
+            <a:r>
+              <a:rPr sz="750" b="1">
+                <a:solidFill>
+                  <a:srgbClr val="FFFFFF"/>
+                </a:solidFill>
+                <a:latin typeface="微软雅黑"/>
+                <a:ea typeface="微软雅黑"/>
+                <a:cs typeface="微软雅黑"/>
+              </a:rPr>
+              <a:t>10</a:t>
+            </a:r>
+          </a:p>
+        </p:txBody>
+      </p:sp>
+      <p:sp>
+        <p:nvSpPr>
+          <p:cNvPr id="59" name="TextBox 58"/>
+          <p:cNvSpPr txBox="1"/>
+          <p:nvPr/>
+        </p:nvSpPr>
+        <p:spPr>
+          <a:xfrm>
+            <a:off x="10264140" y="1783080"/>
+            <a:ext cx="1481328" cy="493776"/>
+          </a:xfrm>
+          <a:prstGeom prst="rect">
+            <a:avLst/>
+          </a:prstGeom>
+          <a:noFill/>
+        </p:spPr>
+        <p:txBody>
+          <a:bodyPr wrap="square" lIns="27432" rIns="27432" tIns="9144" bIns="9144" anchor="ctr">
+            <a:spAutoFit/>
+          </a:bodyPr>
+          <a:lstStyle/>
+          <a:p>
+            <a:pPr algn="l">
+              <a:lnSpc>
+                <a:spcPct val="110000"/>
+              </a:lnSpc>
+            </a:pPr>
+            <a:r>
+              <a:rPr sz="900" b="1">
+                <a:solidFill>
+                  <a:srgbClr val="141414"/>
+                </a:solidFill>
+                <a:latin typeface="微软雅黑"/>
+                <a:ea typeface="微软雅黑"/>
+                <a:cs typeface="微软雅黑"/>
+              </a:rPr>
+              <a:t>MES 回传</a:t>
+            </a:r>
+          </a:p>
+          <a:p>
+            <a:pPr algn="l">
+              <a:lnSpc>
+                <a:spcPct val="110000"/>
+              </a:lnSpc>
+              <a:spcBef>
+                <a:spcPts val="100"/>
+              </a:spcBef>
+            </a:pPr>
+            <a:r>
+              <a:rPr sz="800" b="0">
+                <a:solidFill>
+                  <a:srgbClr val="5C5C56"/>
+                </a:solidFill>
+                <a:latin typeface="微软雅黑"/>
+                <a:ea typeface="微软雅黑"/>
+                <a:cs typeface="微软雅黑"/>
+              </a:rPr>
+              <a:t>结果回传、任务令结案</a:t>
+            </a:r>
+          </a:p>
+        </p:txBody>
+      </p:sp>
+      <p:cxnSp>
+        <p:nvCxnSpPr>
+          <p:cNvPr id="60" name="Connector 59"/>
+          <p:cNvCxnSpPr/>
+          <p:nvPr/>
+        </p:nvCxnSpPr>
+        <p:spPr>
+          <a:xfrm>
+            <a:off x="2633472" y="2313432"/>
+            <a:ext cx="0" cy="347472"/>
+          </a:xfrm>
+          <a:prstGeom prst="line">
+            <a:avLst/>
+          </a:prstGeom>
+          <a:ln w="19050">
+            <a:solidFill>
+              <a:srgbClr val="5C5C56"/>
+            </a:solidFill>
+            <a:tailEnd type="triangle" w="lg" len="lg"/>
+          </a:ln>
+        </p:spPr>
+        <p:style>
+          <a:lnRef idx="2">
+            <a:schemeClr val="accent1"/>
+          </a:lnRef>
+          <a:fillRef idx="0">
+            <a:schemeClr val="accent1"/>
+          </a:fillRef>
+          <a:effectRef idx="1">
+            <a:schemeClr val="accent1"/>
+          </a:effectRef>
+          <a:fontRef idx="minor">
+            <a:schemeClr val="tx1"/>
+          </a:fontRef>
+        </p:style>
+      </p:cxnSp>
+      <p:cxnSp>
+        <p:nvCxnSpPr>
+          <p:cNvPr id="61" name="Connector 60"/>
+          <p:cNvCxnSpPr/>
+          <p:nvPr/>
+        </p:nvCxnSpPr>
+        <p:spPr>
+          <a:xfrm>
+            <a:off x="3525012" y="2944368"/>
+            <a:ext cx="283464" cy="0"/>
+          </a:xfrm>
+          <a:prstGeom prst="line">
+            <a:avLst/>
+          </a:prstGeom>
+          <a:ln w="19050">
+            <a:solidFill>
+              <a:srgbClr val="5C5C56"/>
+            </a:solidFill>
+            <a:tailEnd type="triangle" w="lg" len="lg"/>
+          </a:ln>
+        </p:spPr>
+        <p:style>
+          <a:lnRef idx="2">
+            <a:schemeClr val="accent1"/>
+          </a:lnRef>
+          <a:fillRef idx="0">
+            <a:schemeClr val="accent1"/>
+          </a:fillRef>
+          <a:effectRef idx="1">
+            <a:schemeClr val="accent1"/>
+          </a:effectRef>
+          <a:fontRef idx="minor">
+            <a:schemeClr val="tx1"/>
+          </a:fontRef>
+        </p:style>
+      </p:cxnSp>
+      <p:cxnSp>
+        <p:nvCxnSpPr>
+          <p:cNvPr id="62" name="Connector 61"/>
+          <p:cNvCxnSpPr/>
+          <p:nvPr/>
+        </p:nvCxnSpPr>
+        <p:spPr>
+          <a:xfrm>
+            <a:off x="4700016" y="3227832"/>
+            <a:ext cx="0" cy="347472"/>
+          </a:xfrm>
+          <a:prstGeom prst="line">
+            <a:avLst/>
+          </a:prstGeom>
+          <a:ln w="19050">
+            <a:solidFill>
+              <a:srgbClr val="5C5C56"/>
+            </a:solidFill>
+            <a:tailEnd type="triangle" w="lg" len="lg"/>
+          </a:ln>
+        </p:spPr>
+        <p:style>
+          <a:lnRef idx="2">
+            <a:schemeClr val="accent1"/>
+          </a:lnRef>
+          <a:fillRef idx="0">
+            <a:schemeClr val="accent1"/>
+          </a:fillRef>
+          <a:effectRef idx="1">
+            <a:schemeClr val="accent1"/>
+          </a:effectRef>
+          <a:fontRef idx="minor">
+            <a:schemeClr val="tx1"/>
+          </a:fontRef>
+        </p:style>
+      </p:cxnSp>
+      <p:cxnSp>
+        <p:nvCxnSpPr>
+          <p:cNvPr id="63" name="Connector 62"/>
+          <p:cNvCxnSpPr/>
+          <p:nvPr/>
+        </p:nvCxnSpPr>
+        <p:spPr>
+          <a:xfrm>
+            <a:off x="5591556" y="3858768"/>
+            <a:ext cx="283464" cy="0"/>
+          </a:xfrm>
+          <a:prstGeom prst="line">
+            <a:avLst/>
+          </a:prstGeom>
+          <a:ln w="19050">
+            <a:solidFill>
+              <a:srgbClr val="5C5C56"/>
+            </a:solidFill>
+            <a:tailEnd type="triangle" w="lg" len="lg"/>
+          </a:ln>
+        </p:spPr>
+        <p:style>
+          <a:lnRef idx="2">
+            <a:schemeClr val="accent1"/>
+          </a:lnRef>
+          <a:fillRef idx="0">
+            <a:schemeClr val="accent1"/>
+          </a:fillRef>
+          <a:effectRef idx="1">
+            <a:schemeClr val="accent1"/>
+          </a:effectRef>
+          <a:fontRef idx="minor">
+            <a:schemeClr val="tx1"/>
+          </a:fontRef>
+        </p:style>
+      </p:cxnSp>
+      <p:cxnSp>
+        <p:nvCxnSpPr>
+          <p:cNvPr id="64" name="Connector 63"/>
+          <p:cNvCxnSpPr/>
+          <p:nvPr/>
+        </p:nvCxnSpPr>
+        <p:spPr>
+          <a:xfrm>
+            <a:off x="6766559" y="4142232"/>
+            <a:ext cx="0" cy="347472"/>
+          </a:xfrm>
+          <a:prstGeom prst="line">
+            <a:avLst/>
+          </a:prstGeom>
+          <a:ln w="19050">
+            <a:solidFill>
+              <a:srgbClr val="5C5C56"/>
+            </a:solidFill>
+            <a:tailEnd type="triangle" w="lg" len="lg"/>
+          </a:ln>
+        </p:spPr>
+        <p:style>
+          <a:lnRef idx="2">
+            <a:schemeClr val="accent1"/>
+          </a:lnRef>
+          <a:fillRef idx="0">
+            <a:schemeClr val="accent1"/>
+          </a:fillRef>
+          <a:effectRef idx="1">
+            <a:schemeClr val="accent1"/>
+          </a:effectRef>
+          <a:fontRef idx="minor">
+            <a:schemeClr val="tx1"/>
+          </a:fontRef>
+        </p:style>
+      </p:cxnSp>
+      <p:cxnSp>
+        <p:nvCxnSpPr>
+          <p:cNvPr id="65" name="Connector 64"/>
+          <p:cNvCxnSpPr/>
+          <p:nvPr/>
+        </p:nvCxnSpPr>
+        <p:spPr>
+          <a:xfrm>
+            <a:off x="7658100" y="4773168"/>
+            <a:ext cx="283464" cy="0"/>
+          </a:xfrm>
+          <a:prstGeom prst="line">
+            <a:avLst/>
+          </a:prstGeom>
+          <a:ln w="19050">
+            <a:solidFill>
+              <a:srgbClr val="5C5C56"/>
+            </a:solidFill>
+            <a:tailEnd type="triangle" w="lg" len="lg"/>
+          </a:ln>
+        </p:spPr>
+        <p:style>
+          <a:lnRef idx="2">
+            <a:schemeClr val="accent1"/>
+          </a:lnRef>
+          <a:fillRef idx="0">
+            <a:schemeClr val="accent1"/>
+          </a:fillRef>
+          <a:effectRef idx="1">
+            <a:schemeClr val="accent1"/>
+          </a:effectRef>
+          <a:fontRef idx="minor">
+            <a:schemeClr val="tx1"/>
+          </a:fontRef>
+        </p:style>
+      </p:cxnSp>
+      <p:cxnSp>
+        <p:nvCxnSpPr>
+          <p:cNvPr id="66" name="Connector 65"/>
+          <p:cNvCxnSpPr/>
+          <p:nvPr/>
+        </p:nvCxnSpPr>
+        <p:spPr>
+          <a:xfrm>
+            <a:off x="8833104" y="5056632"/>
+            <a:ext cx="0" cy="347472"/>
+          </a:xfrm>
+          <a:prstGeom prst="line">
+            <a:avLst/>
+          </a:prstGeom>
+          <a:ln w="19050">
+            <a:solidFill>
+              <a:srgbClr val="5C5C56"/>
+            </a:solidFill>
+            <a:tailEnd type="triangle" w="lg" len="lg"/>
+          </a:ln>
+        </p:spPr>
+        <p:style>
+          <a:lnRef idx="2">
+            <a:schemeClr val="accent1"/>
+          </a:lnRef>
+          <a:fillRef idx="0">
+            <a:schemeClr val="accent1"/>
+          </a:fillRef>
+          <a:effectRef idx="1">
+            <a:schemeClr val="accent1"/>
+          </a:effectRef>
+          <a:fontRef idx="minor">
+            <a:schemeClr val="tx1"/>
+          </a:fontRef>
+        </p:style>
+      </p:cxnSp>
+      <p:cxnSp>
+        <p:nvCxnSpPr>
+          <p:cNvPr id="67" name="Connector 66"/>
+          <p:cNvCxnSpPr/>
+          <p:nvPr/>
+        </p:nvCxnSpPr>
+        <p:spPr>
+          <a:xfrm>
+            <a:off x="9724644" y="5687568"/>
+            <a:ext cx="283464" cy="0"/>
+          </a:xfrm>
+          <a:prstGeom prst="line">
+            <a:avLst/>
+          </a:prstGeom>
+          <a:ln w="19050">
+            <a:solidFill>
+              <a:srgbClr val="5C5C56"/>
+            </a:solidFill>
+            <a:tailEnd type="triangle" w="lg" len="lg"/>
+          </a:ln>
+        </p:spPr>
+        <p:style>
+          <a:lnRef idx="2">
+            <a:schemeClr val="accent1"/>
+          </a:lnRef>
+          <a:fillRef idx="0">
+            <a:schemeClr val="accent1"/>
+          </a:fillRef>
+          <a:effectRef idx="1">
+            <a:schemeClr val="accent1"/>
+          </a:effectRef>
+          <a:fontRef idx="minor">
+            <a:schemeClr val="tx1"/>
+          </a:fontRef>
+        </p:style>
+      </p:cxnSp>
+      <p:cxnSp>
+        <p:nvCxnSpPr>
+          <p:cNvPr id="68" name="Connector 67"/>
+          <p:cNvCxnSpPr/>
+          <p:nvPr/>
+        </p:nvCxnSpPr>
+        <p:spPr>
+          <a:xfrm flipV="1">
+            <a:off x="10899648" y="2313432"/>
+            <a:ext cx="0" cy="3090672"/>
+          </a:xfrm>
+          <a:prstGeom prst="line">
+            <a:avLst/>
+          </a:prstGeom>
+          <a:ln w="19050">
+            <a:solidFill>
+              <a:srgbClr val="5C5C56"/>
+            </a:solidFill>
+            <a:tailEnd type="triangle" w="lg" len="lg"/>
+          </a:ln>
+        </p:spPr>
+        <p:style>
+          <a:lnRef idx="2">
+            <a:schemeClr val="accent1"/>
+          </a:lnRef>
+          <a:fillRef idx="0">
+            <a:schemeClr val="accent1"/>
+          </a:fillRef>
+          <a:effectRef idx="1">
+            <a:schemeClr val="accent1"/>
+          </a:effectRef>
+          <a:fontRef idx="minor">
+            <a:schemeClr val="tx1"/>
+          </a:fontRef>
+        </p:style>
+      </p:cxnSp>
+      <p:sp>
+        <p:nvSpPr>
+          <p:cNvPr id="69" name="TextBox 68"/>
+          <p:cNvSpPr txBox="1"/>
+          <p:nvPr/>
+        </p:nvSpPr>
+        <p:spPr>
+          <a:xfrm>
+            <a:off x="1600200" y="6199632"/>
+            <a:ext cx="10332720" cy="201168"/>
+          </a:xfrm>
+          <a:prstGeom prst="rect">
+            <a:avLst/>
+          </a:prstGeom>
+          <a:noFill/>
+        </p:spPr>
+        <p:txBody>
+          <a:bodyPr wrap="square" lIns="27432" rIns="27432" tIns="9144" bIns="9144" anchor="ctr">
+            <a:spAutoFit/>
+          </a:bodyPr>
+          <a:lstStyle/>
+          <a:p>
+            <a:pPr algn="l">
+              <a:lnSpc>
+                <a:spcPct val="110000"/>
+              </a:lnSpc>
+            </a:pPr>
+            <a:r>
+              <a:rPr sz="850" b="0">
+                <a:solidFill>
+                  <a:srgbClr val="5C5C56"/>
+                </a:solidFill>
+                <a:latin typeface="微软雅黑"/>
+                <a:ea typeface="微软雅黑"/>
+                <a:cs typeface="微软雅黑"/>
+              </a:rPr>
+              <a:t>追溯链：单件序列号为唯一主键，串联任务令、扫码记录、执行日志、标准化结果与回传回执</a:t>
+            </a:r>
+          </a:p>
+        </p:txBody>
+      </p:sp>
+      <p:sp>
+        <p:nvSpPr>
+          <p:cNvPr id="70" name="Rectangle 69"/>
+          <p:cNvSpPr/>
+          <p:nvPr/>
+        </p:nvSpPr>
+        <p:spPr>
+          <a:xfrm>
+            <a:off x="274320" y="6400800"/>
+            <a:ext cx="11640312" cy="12801"/>
+          </a:xfrm>
+          <a:prstGeom prst="rect">
+            <a:avLst/>
+          </a:prstGeom>
+          <a:solidFill>
+            <a:srgbClr val="D9D6CD"/>
+          </a:solidFill>
+          <a:ln>
+            <a:noFill/>
+          </a:ln>
+          <a:effectLst/>
+        </p:spPr>
+        <p:style>
+          <a:lnRef idx="1">
+            <a:schemeClr val="accent1"/>
+          </a:lnRef>
+          <a:fillRef idx="3">
+            <a:schemeClr val="accent1"/>
+          </a:fillRef>
+          <a:effectRef idx="2">
+            <a:schemeClr val="accent1"/>
+          </a:effectRef>
+          <a:fontRef idx="minor">
+            <a:schemeClr val="lt1"/>
+          </a:fontRef>
+        </p:style>
+        <p:txBody>
+          <a:bodyPr rtlCol="0" anchor="ctr" wrap="square"/>
+          <a:lstStyle/>
+          <a:p>
+            <a:pPr algn="ctr"/>
+          </a:p>
+        </p:txBody>
+      </p:sp>
+      <p:sp>
+        <p:nvSpPr>
+          <p:cNvPr id="71" name="TextBox 70"/>
+          <p:cNvSpPr txBox="1"/>
+          <p:nvPr/>
+        </p:nvSpPr>
+        <p:spPr>
+          <a:xfrm>
+            <a:off x="274320" y="6446520"/>
+            <a:ext cx="6858000" cy="274320"/>
+          </a:xfrm>
+          <a:prstGeom prst="rect">
+            <a:avLst/>
+          </a:prstGeom>
+          <a:noFill/>
+        </p:spPr>
+        <p:txBody>
+          <a:bodyPr wrap="square" lIns="27432" rIns="27432" tIns="9144" bIns="9144" anchor="ctr">
+            <a:spAutoFit/>
+          </a:bodyPr>
+          <a:lstStyle/>
+          <a:p>
+            <a:pPr algn="l">
+              <a:lnSpc>
+                <a:spcPct val="110000"/>
+              </a:lnSpc>
+            </a:pPr>
+            <a:r>
+              <a:rPr sz="850" b="0">
+                <a:solidFill>
+                  <a:srgbClr val="5C5C56"/>
+                </a:solidFill>
+                <a:latin typeface="微软雅黑"/>
+                <a:ea typeface="微软雅黑"/>
+                <a:cs typeface="微软雅黑"/>
+              </a:rPr>
+              <a:t>闭环要点：任务令唯一标识贯穿扫码、执行、结果与回传；任一异常台位可按追溯码反查到单件与具体工步</a:t>
+            </a:r>
+          </a:p>
+        </p:txBody>
+      </p:sp>
+      <p:sp>
+        <p:nvSpPr>
+          <p:cNvPr id="72" name="TextBox 71"/>
+          <p:cNvSpPr txBox="1"/>
+          <p:nvPr/>
+        </p:nvSpPr>
+        <p:spPr>
+          <a:xfrm>
+            <a:off x="7223760" y="6446520"/>
+            <a:ext cx="4690872" cy="274320"/>
+          </a:xfrm>
+          <a:prstGeom prst="rect">
+            <a:avLst/>
+          </a:prstGeom>
+          <a:noFill/>
+        </p:spPr>
+        <p:txBody>
+          <a:bodyPr wrap="square" lIns="27432" rIns="27432" tIns="9144" bIns="9144" anchor="ctr">
+            <a:spAutoFit/>
+          </a:bodyPr>
+          <a:lstStyle/>
+          <a:p>
+            <a:pPr algn="r">
+              <a:lnSpc>
+                <a:spcPct val="110000"/>
+              </a:lnSpc>
+            </a:pPr>
+            <a:r>
+              <a:rPr sz="850" b="0">
+                <a:solidFill>
+                  <a:srgbClr val="5C5C56"/>
+                </a:solidFill>
+                <a:latin typeface="微软雅黑"/>
+                <a:ea typeface="微软雅黑"/>
+                <a:cs typeface="微软雅黑"/>
+              </a:rPr>
+              <a:t>回传失败进入重试队列，不阻塞下一件流转</a:t>
             </a:r>
           </a:p>
         </p:txBody>

--- a/docs/装备软件/供应商软件形态与ATE接入.pptx
+++ b/docs/装备软件/供应商软件形态与ATE接入.pptx
@@ -10,6 +10,7 @@
     <p:sldId id="258" r:id="rId9"/>
     <p:sldId id="259" r:id="rId10"/>
     <p:sldId id="260" r:id="rId11"/>
+    <p:sldId id="261" r:id="rId12"/>
   </p:sldIdLst>
   <p:sldSz cx="12191695" cy="6858000" type="screen4x3"/>
   <p:notesSz cx="6858000" cy="9144000"/>
@@ -20587,6 +20588,3097 @@
                 <a:cs typeface="微软雅黑"/>
               </a:rPr>
               <a:t>回传失败进入重试队列，不阻塞下一件流转</a:t>
+            </a:r>
+          </a:p>
+        </p:txBody>
+      </p:sp>
+    </p:spTree>
+  </p:cSld>
+  <p:clrMapOvr>
+    <a:masterClrMapping/>
+  </p:clrMapOvr>
+</p:sld>
+</file>
+
+<file path=ppt/slides/slide6.xml><?xml version="1.0" encoding="utf-8"?>
+<p:sld xmlns:a="http://schemas.openxmlformats.org/drawingml/2006/main" xmlns:p="http://schemas.openxmlformats.org/presentationml/2006/main" xmlns:r="http://schemas.openxmlformats.org/officeDocument/2006/relationships">
+  <p:cSld>
+    <p:spTree>
+      <p:nvGrpSpPr>
+        <p:cNvPr id="1" name=""/>
+        <p:cNvGrpSpPr/>
+        <p:nvPr/>
+      </p:nvGrpSpPr>
+      <p:grpSpPr/>
+      <p:sp>
+        <p:nvSpPr>
+          <p:cNvPr id="2" name="TextBox 1"/>
+          <p:cNvSpPr txBox="1"/>
+          <p:nvPr/>
+        </p:nvSpPr>
+        <p:spPr>
+          <a:xfrm>
+            <a:off x="274320" y="201168"/>
+            <a:ext cx="10881360" cy="457200"/>
+          </a:xfrm>
+          <a:prstGeom prst="rect">
+            <a:avLst/>
+          </a:prstGeom>
+          <a:noFill/>
+        </p:spPr>
+        <p:txBody>
+          <a:bodyPr wrap="square" lIns="27432" rIns="27432" tIns="9144" bIns="9144" anchor="ctr">
+            <a:spAutoFit/>
+          </a:bodyPr>
+          <a:lstStyle/>
+          <a:p>
+            <a:pPr algn="l">
+              <a:lnSpc>
+                <a:spcPct val="110000"/>
+              </a:lnSpc>
+            </a:pPr>
+            <a:r>
+              <a:rPr sz="2400" b="1">
+                <a:solidFill>
+                  <a:srgbClr val="141414"/>
+                </a:solidFill>
+                <a:latin typeface="微软雅黑"/>
+                <a:ea typeface="微软雅黑"/>
+                <a:cs typeface="微软雅黑"/>
+              </a:rPr>
+              <a:t>执行自动化原理 · 脚本化、环境、生命周期与人工介入</a:t>
+            </a:r>
+          </a:p>
+        </p:txBody>
+      </p:sp>
+      <p:sp>
+        <p:nvSpPr>
+          <p:cNvPr id="3" name="TextBox 2"/>
+          <p:cNvSpPr txBox="1"/>
+          <p:nvPr/>
+        </p:nvSpPr>
+        <p:spPr>
+          <a:xfrm>
+            <a:off x="274320" y="658368"/>
+            <a:ext cx="11155680" cy="310896"/>
+          </a:xfrm>
+          <a:prstGeom prst="rect">
+            <a:avLst/>
+          </a:prstGeom>
+          <a:noFill/>
+        </p:spPr>
+        <p:txBody>
+          <a:bodyPr wrap="square" lIns="27432" rIns="27432" tIns="9144" bIns="9144" anchor="ctr">
+            <a:spAutoFit/>
+          </a:bodyPr>
+          <a:lstStyle/>
+          <a:p>
+            <a:pPr algn="l">
+              <a:lnSpc>
+                <a:spcPct val="110000"/>
+              </a:lnSpc>
+            </a:pPr>
+            <a:r>
+              <a:rPr sz="1050" b="0">
+                <a:solidFill>
+                  <a:srgbClr val="5C5C56"/>
+                </a:solidFill>
+                <a:latin typeface="微软雅黑"/>
+                <a:ea typeface="微软雅黑"/>
+                <a:cs typeface="微软雅黑"/>
+              </a:rPr>
+              <a:t>流程自动化解决「按什么顺序做什么」，执行自动化解决「由谁、在什么环境里、把它跑对」</a:t>
+            </a:r>
+          </a:p>
+        </p:txBody>
+      </p:sp>
+      <p:sp>
+        <p:nvSpPr>
+          <p:cNvPr id="4" name="Rectangle 3"/>
+          <p:cNvSpPr/>
+          <p:nvPr/>
+        </p:nvSpPr>
+        <p:spPr>
+          <a:xfrm>
+            <a:off x="274320" y="987552"/>
+            <a:ext cx="11640312" cy="25603"/>
+          </a:xfrm>
+          <a:prstGeom prst="rect">
+            <a:avLst/>
+          </a:prstGeom>
+          <a:solidFill>
+            <a:srgbClr val="8B0F1A"/>
+          </a:solidFill>
+          <a:ln>
+            <a:noFill/>
+          </a:ln>
+          <a:effectLst/>
+        </p:spPr>
+        <p:style>
+          <a:lnRef idx="1">
+            <a:schemeClr val="accent1"/>
+          </a:lnRef>
+          <a:fillRef idx="3">
+            <a:schemeClr val="accent1"/>
+          </a:fillRef>
+          <a:effectRef idx="2">
+            <a:schemeClr val="accent1"/>
+          </a:effectRef>
+          <a:fontRef idx="minor">
+            <a:schemeClr val="lt1"/>
+          </a:fontRef>
+        </p:style>
+        <p:txBody>
+          <a:bodyPr rtlCol="0" anchor="ctr" wrap="square"/>
+          <a:lstStyle/>
+          <a:p>
+            <a:pPr algn="ctr"/>
+          </a:p>
+        </p:txBody>
+      </p:sp>
+      <p:sp>
+        <p:nvSpPr>
+          <p:cNvPr id="5" name="Pentagon 4"/>
+          <p:cNvSpPr/>
+          <p:nvPr/>
+        </p:nvSpPr>
+        <p:spPr>
+          <a:xfrm>
+            <a:off x="274320" y="1188720"/>
+            <a:ext cx="1664208" cy="457200"/>
+          </a:xfrm>
+          <a:prstGeom prst="homePlate">
+            <a:avLst>
+              <a:gd name="adj" fmla="val 28000"/>
+            </a:avLst>
+          </a:prstGeom>
+          <a:solidFill>
+            <a:srgbClr val="F8EDEC"/>
+          </a:solidFill>
+          <a:ln w="12700">
+            <a:solidFill>
+              <a:srgbClr val="8B0F1A"/>
+            </a:solidFill>
+          </a:ln>
+          <a:effectLst/>
+        </p:spPr>
+        <p:style>
+          <a:lnRef idx="1">
+            <a:schemeClr val="accent1"/>
+          </a:lnRef>
+          <a:fillRef idx="3">
+            <a:schemeClr val="accent1"/>
+          </a:fillRef>
+          <a:effectRef idx="2">
+            <a:schemeClr val="accent1"/>
+          </a:effectRef>
+          <a:fontRef idx="minor">
+            <a:schemeClr val="lt1"/>
+          </a:fontRef>
+        </p:style>
+        <p:txBody>
+          <a:bodyPr rtlCol="0" anchor="ctr" wrap="square" lIns="18288" rIns="18288" tIns="0" bIns="0"/>
+          <a:lstStyle/>
+          <a:p>
+            <a:pPr algn="ctr">
+              <a:lnSpc>
+                <a:spcPct val="100000"/>
+              </a:lnSpc>
+            </a:pPr>
+            <a:r>
+              <a:rPr sz="850" b="1">
+                <a:solidFill>
+                  <a:srgbClr val="8B0F1A"/>
+                </a:solidFill>
+                <a:latin typeface="微软雅黑"/>
+                <a:ea typeface="微软雅黑"/>
+                <a:cs typeface="微软雅黑"/>
+              </a:rPr>
+              <a:t>① 编排</a:t>
+            </a:r>
+          </a:p>
+        </p:txBody>
+      </p:sp>
+      <p:sp>
+        <p:nvSpPr>
+          <p:cNvPr id="6" name="TextBox 5"/>
+          <p:cNvSpPr txBox="1"/>
+          <p:nvPr/>
+        </p:nvSpPr>
+        <p:spPr>
+          <a:xfrm>
+            <a:off x="402336" y="1700784"/>
+            <a:ext cx="1481328" cy="256032"/>
+          </a:xfrm>
+          <a:prstGeom prst="rect">
+            <a:avLst/>
+          </a:prstGeom>
+          <a:noFill/>
+        </p:spPr>
+        <p:txBody>
+          <a:bodyPr wrap="square" lIns="27432" rIns="27432" tIns="9144" bIns="9144" anchor="ctr">
+            <a:spAutoFit/>
+          </a:bodyPr>
+          <a:lstStyle/>
+          <a:p>
+            <a:pPr algn="ctr">
+              <a:lnSpc>
+                <a:spcPct val="110000"/>
+              </a:lnSpc>
+            </a:pPr>
+            <a:r>
+              <a:rPr sz="750" b="0">
+                <a:solidFill>
+                  <a:srgbClr val="5C5C56"/>
+                </a:solidFill>
+                <a:latin typeface="微软雅黑"/>
+                <a:ea typeface="微软雅黑"/>
+                <a:cs typeface="微软雅黑"/>
+              </a:rPr>
+              <a:t>脚本化</a:t>
+            </a:r>
+          </a:p>
+        </p:txBody>
+      </p:sp>
+      <p:sp>
+        <p:nvSpPr>
+          <p:cNvPr id="7" name="Chevron 6"/>
+          <p:cNvSpPr/>
+          <p:nvPr/>
+        </p:nvSpPr>
+        <p:spPr>
+          <a:xfrm>
+            <a:off x="1920240" y="1188720"/>
+            <a:ext cx="1664208" cy="457200"/>
+          </a:xfrm>
+          <a:prstGeom prst="chevron">
+            <a:avLst>
+              <a:gd name="adj" fmla="val 28000"/>
+            </a:avLst>
+          </a:prstGeom>
+          <a:solidFill>
+            <a:srgbClr val="F8EDEC"/>
+          </a:solidFill>
+          <a:ln w="12700">
+            <a:solidFill>
+              <a:srgbClr val="8B0F1A"/>
+            </a:solidFill>
+          </a:ln>
+          <a:effectLst/>
+        </p:spPr>
+        <p:style>
+          <a:lnRef idx="1">
+            <a:schemeClr val="accent1"/>
+          </a:lnRef>
+          <a:fillRef idx="3">
+            <a:schemeClr val="accent1"/>
+          </a:fillRef>
+          <a:effectRef idx="2">
+            <a:schemeClr val="accent1"/>
+          </a:effectRef>
+          <a:fontRef idx="minor">
+            <a:schemeClr val="lt1"/>
+          </a:fontRef>
+        </p:style>
+        <p:txBody>
+          <a:bodyPr rtlCol="0" anchor="ctr" wrap="square" lIns="18288" rIns="18288" tIns="0" bIns="0"/>
+          <a:lstStyle/>
+          <a:p>
+            <a:pPr algn="ctr">
+              <a:lnSpc>
+                <a:spcPct val="100000"/>
+              </a:lnSpc>
+            </a:pPr>
+            <a:r>
+              <a:rPr sz="850" b="1">
+                <a:solidFill>
+                  <a:srgbClr val="8B0F1A"/>
+                </a:solidFill>
+                <a:latin typeface="微软雅黑"/>
+                <a:ea typeface="微软雅黑"/>
+                <a:cs typeface="微软雅黑"/>
+              </a:rPr>
+              <a:t>② 部署</a:t>
+            </a:r>
+          </a:p>
+        </p:txBody>
+      </p:sp>
+      <p:sp>
+        <p:nvSpPr>
+          <p:cNvPr id="8" name="TextBox 7"/>
+          <p:cNvSpPr txBox="1"/>
+          <p:nvPr/>
+        </p:nvSpPr>
+        <p:spPr>
+          <a:xfrm>
+            <a:off x="2048256" y="1700784"/>
+            <a:ext cx="1481328" cy="256032"/>
+          </a:xfrm>
+          <a:prstGeom prst="rect">
+            <a:avLst/>
+          </a:prstGeom>
+          <a:noFill/>
+        </p:spPr>
+        <p:txBody>
+          <a:bodyPr wrap="square" lIns="27432" rIns="27432" tIns="9144" bIns="9144" anchor="ctr">
+            <a:spAutoFit/>
+          </a:bodyPr>
+          <a:lstStyle/>
+          <a:p>
+            <a:pPr algn="ctr">
+              <a:lnSpc>
+                <a:spcPct val="110000"/>
+              </a:lnSpc>
+            </a:pPr>
+            <a:r>
+              <a:rPr sz="750" b="0">
+                <a:solidFill>
+                  <a:srgbClr val="5C5C56"/>
+                </a:solidFill>
+                <a:latin typeface="微软雅黑"/>
+                <a:ea typeface="微软雅黑"/>
+                <a:cs typeface="微软雅黑"/>
+              </a:rPr>
+              <a:t>自动部署</a:t>
+            </a:r>
+          </a:p>
+        </p:txBody>
+      </p:sp>
+      <p:sp>
+        <p:nvSpPr>
+          <p:cNvPr id="9" name="Chevron 8"/>
+          <p:cNvSpPr/>
+          <p:nvPr/>
+        </p:nvSpPr>
+        <p:spPr>
+          <a:xfrm>
+            <a:off x="3566160" y="1188720"/>
+            <a:ext cx="1664208" cy="457200"/>
+          </a:xfrm>
+          <a:prstGeom prst="chevron">
+            <a:avLst>
+              <a:gd name="adj" fmla="val 28000"/>
+            </a:avLst>
+          </a:prstGeom>
+          <a:solidFill>
+            <a:srgbClr val="F8EDEC"/>
+          </a:solidFill>
+          <a:ln w="12700">
+            <a:solidFill>
+              <a:srgbClr val="8B0F1A"/>
+            </a:solidFill>
+          </a:ln>
+          <a:effectLst/>
+        </p:spPr>
+        <p:style>
+          <a:lnRef idx="1">
+            <a:schemeClr val="accent1"/>
+          </a:lnRef>
+          <a:fillRef idx="3">
+            <a:schemeClr val="accent1"/>
+          </a:fillRef>
+          <a:effectRef idx="2">
+            <a:schemeClr val="accent1"/>
+          </a:effectRef>
+          <a:fontRef idx="minor">
+            <a:schemeClr val="lt1"/>
+          </a:fontRef>
+        </p:style>
+        <p:txBody>
+          <a:bodyPr rtlCol="0" anchor="ctr" wrap="square" lIns="18288" rIns="18288" tIns="0" bIns="0"/>
+          <a:lstStyle/>
+          <a:p>
+            <a:pPr algn="ctr">
+              <a:lnSpc>
+                <a:spcPct val="100000"/>
+              </a:lnSpc>
+            </a:pPr>
+            <a:r>
+              <a:rPr sz="850" b="1">
+                <a:solidFill>
+                  <a:srgbClr val="8B0F1A"/>
+                </a:solidFill>
+                <a:latin typeface="微软雅黑"/>
+                <a:ea typeface="微软雅黑"/>
+                <a:cs typeface="微软雅黑"/>
+              </a:rPr>
+              <a:t>③ 初始化</a:t>
+            </a:r>
+          </a:p>
+        </p:txBody>
+      </p:sp>
+      <p:sp>
+        <p:nvSpPr>
+          <p:cNvPr id="10" name="TextBox 9"/>
+          <p:cNvSpPr txBox="1"/>
+          <p:nvPr/>
+        </p:nvSpPr>
+        <p:spPr>
+          <a:xfrm>
+            <a:off x="3694176" y="1700784"/>
+            <a:ext cx="1481328" cy="256032"/>
+          </a:xfrm>
+          <a:prstGeom prst="rect">
+            <a:avLst/>
+          </a:prstGeom>
+          <a:noFill/>
+        </p:spPr>
+        <p:txBody>
+          <a:bodyPr wrap="square" lIns="27432" rIns="27432" tIns="9144" bIns="9144" anchor="ctr">
+            <a:spAutoFit/>
+          </a:bodyPr>
+          <a:lstStyle/>
+          <a:p>
+            <a:pPr algn="ctr">
+              <a:lnSpc>
+                <a:spcPct val="110000"/>
+              </a:lnSpc>
+            </a:pPr>
+            <a:r>
+              <a:rPr sz="750" b="0">
+                <a:solidFill>
+                  <a:srgbClr val="5C5C56"/>
+                </a:solidFill>
+                <a:latin typeface="微软雅黑"/>
+                <a:ea typeface="微软雅黑"/>
+                <a:cs typeface="微软雅黑"/>
+              </a:rPr>
+              <a:t>建连 / 复位</a:t>
+            </a:r>
+          </a:p>
+        </p:txBody>
+      </p:sp>
+      <p:sp>
+        <p:nvSpPr>
+          <p:cNvPr id="11" name="Chevron 10"/>
+          <p:cNvSpPr/>
+          <p:nvPr/>
+        </p:nvSpPr>
+        <p:spPr>
+          <a:xfrm>
+            <a:off x="5212080" y="1188720"/>
+            <a:ext cx="1664208" cy="457200"/>
+          </a:xfrm>
+          <a:prstGeom prst="chevron">
+            <a:avLst>
+              <a:gd name="adj" fmla="val 28000"/>
+            </a:avLst>
+          </a:prstGeom>
+          <a:solidFill>
+            <a:srgbClr val="F8EDEC"/>
+          </a:solidFill>
+          <a:ln w="12700">
+            <a:solidFill>
+              <a:srgbClr val="8B0F1A"/>
+            </a:solidFill>
+          </a:ln>
+          <a:effectLst/>
+        </p:spPr>
+        <p:style>
+          <a:lnRef idx="1">
+            <a:schemeClr val="accent1"/>
+          </a:lnRef>
+          <a:fillRef idx="3">
+            <a:schemeClr val="accent1"/>
+          </a:fillRef>
+          <a:effectRef idx="2">
+            <a:schemeClr val="accent1"/>
+          </a:effectRef>
+          <a:fontRef idx="minor">
+            <a:schemeClr val="lt1"/>
+          </a:fontRef>
+        </p:style>
+        <p:txBody>
+          <a:bodyPr rtlCol="0" anchor="ctr" wrap="square" lIns="18288" rIns="18288" tIns="0" bIns="0"/>
+          <a:lstStyle/>
+          <a:p>
+            <a:pPr algn="ctr">
+              <a:lnSpc>
+                <a:spcPct val="100000"/>
+              </a:lnSpc>
+            </a:pPr>
+            <a:r>
+              <a:rPr sz="850" b="1">
+                <a:solidFill>
+                  <a:srgbClr val="8B0F1A"/>
+                </a:solidFill>
+                <a:latin typeface="微软雅黑"/>
+                <a:ea typeface="微软雅黑"/>
+                <a:cs typeface="微软雅黑"/>
+              </a:rPr>
+              <a:t>④ 执行</a:t>
+            </a:r>
+          </a:p>
+        </p:txBody>
+      </p:sp>
+      <p:sp>
+        <p:nvSpPr>
+          <p:cNvPr id="12" name="TextBox 11"/>
+          <p:cNvSpPr txBox="1"/>
+          <p:nvPr/>
+        </p:nvSpPr>
+        <p:spPr>
+          <a:xfrm>
+            <a:off x="5340096" y="1700784"/>
+            <a:ext cx="1481328" cy="256032"/>
+          </a:xfrm>
+          <a:prstGeom prst="rect">
+            <a:avLst/>
+          </a:prstGeom>
+          <a:noFill/>
+        </p:spPr>
+        <p:txBody>
+          <a:bodyPr wrap="square" lIns="27432" rIns="27432" tIns="9144" bIns="9144" anchor="ctr">
+            <a:spAutoFit/>
+          </a:bodyPr>
+          <a:lstStyle/>
+          <a:p>
+            <a:pPr algn="ctr">
+              <a:lnSpc>
+                <a:spcPct val="110000"/>
+              </a:lnSpc>
+            </a:pPr>
+            <a:r>
+              <a:rPr sz="750" b="0">
+                <a:solidFill>
+                  <a:srgbClr val="5C5C56"/>
+                </a:solidFill>
+                <a:latin typeface="微软雅黑"/>
+                <a:ea typeface="微软雅黑"/>
+                <a:cs typeface="微软雅黑"/>
+              </a:rPr>
+              <a:t>驱动 + 人工</a:t>
+            </a:r>
+          </a:p>
+        </p:txBody>
+      </p:sp>
+      <p:sp>
+        <p:nvSpPr>
+          <p:cNvPr id="13" name="Chevron 12"/>
+          <p:cNvSpPr/>
+          <p:nvPr/>
+        </p:nvSpPr>
+        <p:spPr>
+          <a:xfrm>
+            <a:off x="6858000" y="1188720"/>
+            <a:ext cx="1664208" cy="457200"/>
+          </a:xfrm>
+          <a:prstGeom prst="chevron">
+            <a:avLst>
+              <a:gd name="adj" fmla="val 28000"/>
+            </a:avLst>
+          </a:prstGeom>
+          <a:solidFill>
+            <a:srgbClr val="F8EDEC"/>
+          </a:solidFill>
+          <a:ln w="12700">
+            <a:solidFill>
+              <a:srgbClr val="8B0F1A"/>
+            </a:solidFill>
+          </a:ln>
+          <a:effectLst/>
+        </p:spPr>
+        <p:style>
+          <a:lnRef idx="1">
+            <a:schemeClr val="accent1"/>
+          </a:lnRef>
+          <a:fillRef idx="3">
+            <a:schemeClr val="accent1"/>
+          </a:fillRef>
+          <a:effectRef idx="2">
+            <a:schemeClr val="accent1"/>
+          </a:effectRef>
+          <a:fontRef idx="minor">
+            <a:schemeClr val="lt1"/>
+          </a:fontRef>
+        </p:style>
+        <p:txBody>
+          <a:bodyPr rtlCol="0" anchor="ctr" wrap="square" lIns="18288" rIns="18288" tIns="0" bIns="0"/>
+          <a:lstStyle/>
+          <a:p>
+            <a:pPr algn="ctr">
+              <a:lnSpc>
+                <a:spcPct val="100000"/>
+              </a:lnSpc>
+            </a:pPr>
+            <a:r>
+              <a:rPr sz="850" b="1">
+                <a:solidFill>
+                  <a:srgbClr val="8B0F1A"/>
+                </a:solidFill>
+                <a:latin typeface="微软雅黑"/>
+                <a:ea typeface="微软雅黑"/>
+                <a:cs typeface="微软雅黑"/>
+              </a:rPr>
+              <a:t>⑤ 判定</a:t>
+            </a:r>
+          </a:p>
+        </p:txBody>
+      </p:sp>
+      <p:sp>
+        <p:nvSpPr>
+          <p:cNvPr id="14" name="TextBox 13"/>
+          <p:cNvSpPr txBox="1"/>
+          <p:nvPr/>
+        </p:nvSpPr>
+        <p:spPr>
+          <a:xfrm>
+            <a:off x="6986016" y="1700784"/>
+            <a:ext cx="1481328" cy="256032"/>
+          </a:xfrm>
+          <a:prstGeom prst="rect">
+            <a:avLst/>
+          </a:prstGeom>
+          <a:noFill/>
+        </p:spPr>
+        <p:txBody>
+          <a:bodyPr wrap="square" lIns="27432" rIns="27432" tIns="9144" bIns="9144" anchor="ctr">
+            <a:spAutoFit/>
+          </a:bodyPr>
+          <a:lstStyle/>
+          <a:p>
+            <a:pPr algn="ctr">
+              <a:lnSpc>
+                <a:spcPct val="110000"/>
+              </a:lnSpc>
+            </a:pPr>
+            <a:r>
+              <a:rPr sz="750" b="0">
+                <a:solidFill>
+                  <a:srgbClr val="5C5C56"/>
+                </a:solidFill>
+                <a:latin typeface="微软雅黑"/>
+                <a:ea typeface="微软雅黑"/>
+                <a:cs typeface="微软雅黑"/>
+              </a:rPr>
+              <a:t>阈值 / 断言</a:t>
+            </a:r>
+          </a:p>
+        </p:txBody>
+      </p:sp>
+      <p:sp>
+        <p:nvSpPr>
+          <p:cNvPr id="15" name="Chevron 14"/>
+          <p:cNvSpPr/>
+          <p:nvPr/>
+        </p:nvSpPr>
+        <p:spPr>
+          <a:xfrm>
+            <a:off x="8503920" y="1188720"/>
+            <a:ext cx="1664208" cy="457200"/>
+          </a:xfrm>
+          <a:prstGeom prst="chevron">
+            <a:avLst>
+              <a:gd name="adj" fmla="val 28000"/>
+            </a:avLst>
+          </a:prstGeom>
+          <a:solidFill>
+            <a:srgbClr val="F8EDEC"/>
+          </a:solidFill>
+          <a:ln w="12700">
+            <a:solidFill>
+              <a:srgbClr val="8B0F1A"/>
+            </a:solidFill>
+          </a:ln>
+          <a:effectLst/>
+        </p:spPr>
+        <p:style>
+          <a:lnRef idx="1">
+            <a:schemeClr val="accent1"/>
+          </a:lnRef>
+          <a:fillRef idx="3">
+            <a:schemeClr val="accent1"/>
+          </a:fillRef>
+          <a:effectRef idx="2">
+            <a:schemeClr val="accent1"/>
+          </a:effectRef>
+          <a:fontRef idx="minor">
+            <a:schemeClr val="lt1"/>
+          </a:fontRef>
+        </p:style>
+        <p:txBody>
+          <a:bodyPr rtlCol="0" anchor="ctr" wrap="square" lIns="18288" rIns="18288" tIns="0" bIns="0"/>
+          <a:lstStyle/>
+          <a:p>
+            <a:pPr algn="ctr">
+              <a:lnSpc>
+                <a:spcPct val="100000"/>
+              </a:lnSpc>
+            </a:pPr>
+            <a:r>
+              <a:rPr sz="850" b="1">
+                <a:solidFill>
+                  <a:srgbClr val="8B0F1A"/>
+                </a:solidFill>
+                <a:latin typeface="微软雅黑"/>
+                <a:ea typeface="微软雅黑"/>
+                <a:cs typeface="微软雅黑"/>
+              </a:rPr>
+              <a:t>⑥ 终止</a:t>
+            </a:r>
+          </a:p>
+        </p:txBody>
+      </p:sp>
+      <p:sp>
+        <p:nvSpPr>
+          <p:cNvPr id="16" name="TextBox 15"/>
+          <p:cNvSpPr txBox="1"/>
+          <p:nvPr/>
+        </p:nvSpPr>
+        <p:spPr>
+          <a:xfrm>
+            <a:off x="8631936" y="1700784"/>
+            <a:ext cx="1481328" cy="256032"/>
+          </a:xfrm>
+          <a:prstGeom prst="rect">
+            <a:avLst/>
+          </a:prstGeom>
+          <a:noFill/>
+        </p:spPr>
+        <p:txBody>
+          <a:bodyPr wrap="square" lIns="27432" rIns="27432" tIns="9144" bIns="9144" anchor="ctr">
+            <a:spAutoFit/>
+          </a:bodyPr>
+          <a:lstStyle/>
+          <a:p>
+            <a:pPr algn="ctr">
+              <a:lnSpc>
+                <a:spcPct val="110000"/>
+              </a:lnSpc>
+            </a:pPr>
+            <a:r>
+              <a:rPr sz="750" b="0">
+                <a:solidFill>
+                  <a:srgbClr val="5C5C56"/>
+                </a:solidFill>
+                <a:latin typeface="微软雅黑"/>
+                <a:ea typeface="微软雅黑"/>
+                <a:cs typeface="微软雅黑"/>
+              </a:rPr>
+              <a:t>释放 / 下电</a:t>
+            </a:r>
+          </a:p>
+        </p:txBody>
+      </p:sp>
+      <p:sp>
+        <p:nvSpPr>
+          <p:cNvPr id="17" name="Chevron 16"/>
+          <p:cNvSpPr/>
+          <p:nvPr/>
+        </p:nvSpPr>
+        <p:spPr>
+          <a:xfrm>
+            <a:off x="10149840" y="1188720"/>
+            <a:ext cx="1664208" cy="457200"/>
+          </a:xfrm>
+          <a:prstGeom prst="chevron">
+            <a:avLst>
+              <a:gd name="adj" fmla="val 28000"/>
+            </a:avLst>
+          </a:prstGeom>
+          <a:solidFill>
+            <a:srgbClr val="F8EDEC"/>
+          </a:solidFill>
+          <a:ln w="12700">
+            <a:solidFill>
+              <a:srgbClr val="8B0F1A"/>
+            </a:solidFill>
+          </a:ln>
+          <a:effectLst/>
+        </p:spPr>
+        <p:style>
+          <a:lnRef idx="1">
+            <a:schemeClr val="accent1"/>
+          </a:lnRef>
+          <a:fillRef idx="3">
+            <a:schemeClr val="accent1"/>
+          </a:fillRef>
+          <a:effectRef idx="2">
+            <a:schemeClr val="accent1"/>
+          </a:effectRef>
+          <a:fontRef idx="minor">
+            <a:schemeClr val="lt1"/>
+          </a:fontRef>
+        </p:style>
+        <p:txBody>
+          <a:bodyPr rtlCol="0" anchor="ctr" wrap="square" lIns="18288" rIns="18288" tIns="0" bIns="0"/>
+          <a:lstStyle/>
+          <a:p>
+            <a:pPr algn="ctr">
+              <a:lnSpc>
+                <a:spcPct val="100000"/>
+              </a:lnSpc>
+            </a:pPr>
+            <a:r>
+              <a:rPr sz="850" b="1">
+                <a:solidFill>
+                  <a:srgbClr val="8B0F1A"/>
+                </a:solidFill>
+                <a:latin typeface="微软雅黑"/>
+                <a:ea typeface="微软雅黑"/>
+                <a:cs typeface="微软雅黑"/>
+              </a:rPr>
+              <a:t>⑦ 归档</a:t>
+            </a:r>
+          </a:p>
+        </p:txBody>
+      </p:sp>
+      <p:sp>
+        <p:nvSpPr>
+          <p:cNvPr id="18" name="TextBox 17"/>
+          <p:cNvSpPr txBox="1"/>
+          <p:nvPr/>
+        </p:nvSpPr>
+        <p:spPr>
+          <a:xfrm>
+            <a:off x="10277856" y="1700784"/>
+            <a:ext cx="1481328" cy="256032"/>
+          </a:xfrm>
+          <a:prstGeom prst="rect">
+            <a:avLst/>
+          </a:prstGeom>
+          <a:noFill/>
+        </p:spPr>
+        <p:txBody>
+          <a:bodyPr wrap="square" lIns="27432" rIns="27432" tIns="9144" bIns="9144" anchor="ctr">
+            <a:spAutoFit/>
+          </a:bodyPr>
+          <a:lstStyle/>
+          <a:p>
+            <a:pPr algn="ctr">
+              <a:lnSpc>
+                <a:spcPct val="110000"/>
+              </a:lnSpc>
+            </a:pPr>
+            <a:r>
+              <a:rPr sz="750" b="0">
+                <a:solidFill>
+                  <a:srgbClr val="5C5C56"/>
+                </a:solidFill>
+                <a:latin typeface="微软雅黑"/>
+                <a:ea typeface="微软雅黑"/>
+                <a:cs typeface="微软雅黑"/>
+              </a:rPr>
+              <a:t>结果标准化</a:t>
+            </a:r>
+          </a:p>
+        </p:txBody>
+      </p:sp>
+      <p:sp>
+        <p:nvSpPr>
+          <p:cNvPr id="19" name="TextBox 18"/>
+          <p:cNvSpPr txBox="1"/>
+          <p:nvPr/>
+        </p:nvSpPr>
+        <p:spPr>
+          <a:xfrm>
+            <a:off x="274320" y="2029968"/>
+            <a:ext cx="5486400" cy="237744"/>
+          </a:xfrm>
+          <a:prstGeom prst="rect">
+            <a:avLst/>
+          </a:prstGeom>
+          <a:noFill/>
+        </p:spPr>
+        <p:txBody>
+          <a:bodyPr wrap="square" lIns="27432" rIns="27432" tIns="9144" bIns="9144" anchor="ctr">
+            <a:spAutoFit/>
+          </a:bodyPr>
+          <a:lstStyle/>
+          <a:p>
+            <a:pPr algn="l">
+              <a:lnSpc>
+                <a:spcPct val="110000"/>
+              </a:lnSpc>
+            </a:pPr>
+            <a:r>
+              <a:rPr sz="900" b="1">
+                <a:solidFill>
+                  <a:srgbClr val="8B0F1A"/>
+                </a:solidFill>
+                <a:latin typeface="微软雅黑"/>
+                <a:ea typeface="微软雅黑"/>
+                <a:cs typeface="微软雅黑"/>
+              </a:rPr>
+              <a:t>一次执行的生命周期（时间轴）</a:t>
+            </a:r>
+          </a:p>
+        </p:txBody>
+      </p:sp>
+      <p:sp>
+        <p:nvSpPr>
+          <p:cNvPr id="20" name="Rounded Rectangle 19"/>
+          <p:cNvSpPr/>
+          <p:nvPr/>
+        </p:nvSpPr>
+        <p:spPr>
+          <a:xfrm>
+            <a:off x="274320" y="2304288"/>
+            <a:ext cx="2770632" cy="3566160"/>
+          </a:xfrm>
+          <a:prstGeom prst="roundRect">
+            <a:avLst>
+              <a:gd name="adj" fmla="val 4000"/>
+            </a:avLst>
+          </a:prstGeom>
+          <a:solidFill>
+            <a:srgbClr val="FFFFFF"/>
+          </a:solidFill>
+          <a:ln w="12700">
+            <a:solidFill>
+              <a:srgbClr val="C9C9C2"/>
+            </a:solidFill>
+          </a:ln>
+          <a:effectLst/>
+        </p:spPr>
+        <p:style>
+          <a:lnRef idx="1">
+            <a:schemeClr val="accent1"/>
+          </a:lnRef>
+          <a:fillRef idx="3">
+            <a:schemeClr val="accent1"/>
+          </a:fillRef>
+          <a:effectRef idx="2">
+            <a:schemeClr val="accent1"/>
+          </a:effectRef>
+          <a:fontRef idx="minor">
+            <a:schemeClr val="lt1"/>
+          </a:fontRef>
+        </p:style>
+        <p:txBody>
+          <a:bodyPr rtlCol="0" anchor="ctr" wrap="square"/>
+          <a:lstStyle/>
+          <a:p>
+            <a:pPr algn="ctr"/>
+          </a:p>
+        </p:txBody>
+      </p:sp>
+      <p:sp>
+        <p:nvSpPr>
+          <p:cNvPr id="21" name="Oval 20"/>
+          <p:cNvSpPr/>
+          <p:nvPr/>
+        </p:nvSpPr>
+        <p:spPr>
+          <a:xfrm>
+            <a:off x="384048" y="2414016"/>
+            <a:ext cx="219456" cy="219456"/>
+          </a:xfrm>
+          <a:prstGeom prst="ellipse">
+            <a:avLst/>
+          </a:prstGeom>
+          <a:solidFill>
+            <a:srgbClr val="8B0F1A"/>
+          </a:solidFill>
+          <a:ln>
+            <a:noFill/>
+          </a:ln>
+          <a:effectLst/>
+        </p:spPr>
+        <p:style>
+          <a:lnRef idx="1">
+            <a:schemeClr val="accent1"/>
+          </a:lnRef>
+          <a:fillRef idx="3">
+            <a:schemeClr val="accent1"/>
+          </a:fillRef>
+          <a:effectRef idx="2">
+            <a:schemeClr val="accent1"/>
+          </a:effectRef>
+          <a:fontRef idx="minor">
+            <a:schemeClr val="lt1"/>
+          </a:fontRef>
+        </p:style>
+        <p:txBody>
+          <a:bodyPr rtlCol="0" anchor="ctr" lIns="18288" rIns="18288" tIns="0" bIns="0"/>
+          <a:lstStyle/>
+          <a:p>
+            <a:pPr algn="ctr">
+              <a:lnSpc>
+                <a:spcPct val="100000"/>
+              </a:lnSpc>
+            </a:pPr>
+            <a:r>
+              <a:rPr sz="850" b="1">
+                <a:solidFill>
+                  <a:srgbClr val="FFFFFF"/>
+                </a:solidFill>
+                <a:latin typeface="微软雅黑"/>
+                <a:ea typeface="微软雅黑"/>
+                <a:cs typeface="微软雅黑"/>
+              </a:rPr>
+              <a:t>1</a:t>
+            </a:r>
+          </a:p>
+        </p:txBody>
+      </p:sp>
+      <p:sp>
+        <p:nvSpPr>
+          <p:cNvPr id="22" name="TextBox 21"/>
+          <p:cNvSpPr txBox="1"/>
+          <p:nvPr/>
+        </p:nvSpPr>
+        <p:spPr>
+          <a:xfrm>
+            <a:off x="676656" y="2395728"/>
+            <a:ext cx="2276856" cy="274320"/>
+          </a:xfrm>
+          <a:prstGeom prst="rect">
+            <a:avLst/>
+          </a:prstGeom>
+          <a:noFill/>
+        </p:spPr>
+        <p:txBody>
+          <a:bodyPr wrap="square" lIns="27432" rIns="27432" tIns="9144" bIns="9144" anchor="ctr">
+            <a:spAutoFit/>
+          </a:bodyPr>
+          <a:lstStyle/>
+          <a:p>
+            <a:pPr algn="l">
+              <a:lnSpc>
+                <a:spcPct val="110000"/>
+              </a:lnSpc>
+            </a:pPr>
+            <a:r>
+              <a:rPr sz="1100" b="1">
+                <a:solidFill>
+                  <a:srgbClr val="141414"/>
+                </a:solidFill>
+                <a:latin typeface="微软雅黑"/>
+                <a:ea typeface="微软雅黑"/>
+                <a:cs typeface="微软雅黑"/>
+              </a:rPr>
+              <a:t>测试流程脚本化</a:t>
+            </a:r>
+          </a:p>
+        </p:txBody>
+      </p:sp>
+      <p:sp>
+        <p:nvSpPr>
+          <p:cNvPr id="23" name="TextBox 22"/>
+          <p:cNvSpPr txBox="1"/>
+          <p:nvPr/>
+        </p:nvSpPr>
+        <p:spPr>
+          <a:xfrm>
+            <a:off x="384048" y="2724912"/>
+            <a:ext cx="2551176" cy="475488"/>
+          </a:xfrm>
+          <a:prstGeom prst="rect">
+            <a:avLst/>
+          </a:prstGeom>
+          <a:noFill/>
+        </p:spPr>
+        <p:txBody>
+          <a:bodyPr wrap="square" lIns="27432" rIns="27432" tIns="9144" bIns="9144" anchor="t">
+            <a:spAutoFit/>
+          </a:bodyPr>
+          <a:lstStyle/>
+          <a:p>
+            <a:pPr algn="l">
+              <a:lnSpc>
+                <a:spcPct val="110000"/>
+              </a:lnSpc>
+            </a:pPr>
+            <a:r>
+              <a:rPr sz="850" b="0">
+                <a:solidFill>
+                  <a:srgbClr val="5C5C56"/>
+                </a:solidFill>
+                <a:latin typeface="微软雅黑"/>
+                <a:ea typeface="微软雅黑"/>
+                <a:cs typeface="微软雅黑"/>
+              </a:rPr>
+              <a:t>把测试意图写成可执行、可版本化的声明，而非口头工艺</a:t>
+            </a:r>
+          </a:p>
+        </p:txBody>
+      </p:sp>
+      <p:sp>
+        <p:nvSpPr>
+          <p:cNvPr id="24" name="Rounded Rectangle 23"/>
+          <p:cNvSpPr/>
+          <p:nvPr/>
+        </p:nvSpPr>
+        <p:spPr>
+          <a:xfrm>
+            <a:off x="365760" y="3236976"/>
+            <a:ext cx="2587751" cy="786384"/>
+          </a:xfrm>
+          <a:prstGeom prst="roundRect">
+            <a:avLst>
+              <a:gd name="adj" fmla="val 5000"/>
+            </a:avLst>
+          </a:prstGeom>
+          <a:solidFill>
+            <a:srgbClr val="ECECEC"/>
+          </a:solidFill>
+          <a:ln>
+            <a:noFill/>
+          </a:ln>
+          <a:effectLst/>
+        </p:spPr>
+        <p:style>
+          <a:lnRef idx="1">
+            <a:schemeClr val="accent1"/>
+          </a:lnRef>
+          <a:fillRef idx="3">
+            <a:schemeClr val="accent1"/>
+          </a:fillRef>
+          <a:effectRef idx="2">
+            <a:schemeClr val="accent1"/>
+          </a:effectRef>
+          <a:fontRef idx="minor">
+            <a:schemeClr val="lt1"/>
+          </a:fontRef>
+        </p:style>
+        <p:txBody>
+          <a:bodyPr rtlCol="0" anchor="ctr" wrap="square"/>
+          <a:lstStyle/>
+          <a:p>
+            <a:pPr algn="ctr"/>
+          </a:p>
+        </p:txBody>
+      </p:sp>
+      <p:sp>
+        <p:nvSpPr>
+          <p:cNvPr id="25" name="TextBox 24"/>
+          <p:cNvSpPr txBox="1"/>
+          <p:nvPr/>
+        </p:nvSpPr>
+        <p:spPr>
+          <a:xfrm>
+            <a:off x="438912" y="3291840"/>
+            <a:ext cx="2441448" cy="676656"/>
+          </a:xfrm>
+          <a:prstGeom prst="rect">
+            <a:avLst/>
+          </a:prstGeom>
+          <a:noFill/>
+        </p:spPr>
+        <p:txBody>
+          <a:bodyPr wrap="square" lIns="27432" rIns="27432" tIns="9144" bIns="9144" anchor="t">
+            <a:spAutoFit/>
+          </a:bodyPr>
+          <a:lstStyle/>
+          <a:p>
+            <a:pPr algn="l">
+              <a:lnSpc>
+                <a:spcPct val="110000"/>
+              </a:lnSpc>
+            </a:pPr>
+            <a:r>
+              <a:rPr sz="800" b="1">
+                <a:solidFill>
+                  <a:srgbClr val="0F4C81"/>
+                </a:solidFill>
+                <a:latin typeface="微软雅黑"/>
+                <a:ea typeface="微软雅黑"/>
+                <a:cs typeface="微软雅黑"/>
+              </a:rPr>
+              <a:t>工步声明</a:t>
+            </a:r>
+          </a:p>
+          <a:p>
+            <a:pPr algn="l">
+              <a:lnSpc>
+                <a:spcPct val="110000"/>
+              </a:lnSpc>
+              <a:spcBef>
+                <a:spcPts val="200"/>
+              </a:spcBef>
+            </a:pPr>
+            <a:r>
+              <a:rPr sz="800" b="0">
+                <a:solidFill>
+                  <a:srgbClr val="3A3A35"/>
+                </a:solidFill>
+                <a:latin typeface="微软雅黑"/>
+                <a:ea typeface="微软雅黑"/>
+                <a:cs typeface="微软雅黑"/>
+              </a:rPr>
+              <a:t>TPS 声明工步顺序、参数与判定条件，逻辑不进代码</a:t>
+            </a:r>
+          </a:p>
+        </p:txBody>
+      </p:sp>
+      <p:sp>
+        <p:nvSpPr>
+          <p:cNvPr id="26" name="Rounded Rectangle 25"/>
+          <p:cNvSpPr/>
+          <p:nvPr/>
+        </p:nvSpPr>
+        <p:spPr>
+          <a:xfrm>
+            <a:off x="365760" y="4114800"/>
+            <a:ext cx="2587751" cy="786384"/>
+          </a:xfrm>
+          <a:prstGeom prst="roundRect">
+            <a:avLst>
+              <a:gd name="adj" fmla="val 5000"/>
+            </a:avLst>
+          </a:prstGeom>
+          <a:solidFill>
+            <a:srgbClr val="ECECEC"/>
+          </a:solidFill>
+          <a:ln>
+            <a:noFill/>
+          </a:ln>
+          <a:effectLst/>
+        </p:spPr>
+        <p:style>
+          <a:lnRef idx="1">
+            <a:schemeClr val="accent1"/>
+          </a:lnRef>
+          <a:fillRef idx="3">
+            <a:schemeClr val="accent1"/>
+          </a:fillRef>
+          <a:effectRef idx="2">
+            <a:schemeClr val="accent1"/>
+          </a:effectRef>
+          <a:fontRef idx="minor">
+            <a:schemeClr val="lt1"/>
+          </a:fontRef>
+        </p:style>
+        <p:txBody>
+          <a:bodyPr rtlCol="0" anchor="ctr" wrap="square"/>
+          <a:lstStyle/>
+          <a:p>
+            <a:pPr algn="ctr"/>
+          </a:p>
+        </p:txBody>
+      </p:sp>
+      <p:sp>
+        <p:nvSpPr>
+          <p:cNvPr id="27" name="TextBox 26"/>
+          <p:cNvSpPr txBox="1"/>
+          <p:nvPr/>
+        </p:nvSpPr>
+        <p:spPr>
+          <a:xfrm>
+            <a:off x="438912" y="4169663"/>
+            <a:ext cx="2441448" cy="676656"/>
+          </a:xfrm>
+          <a:prstGeom prst="rect">
+            <a:avLst/>
+          </a:prstGeom>
+          <a:noFill/>
+        </p:spPr>
+        <p:txBody>
+          <a:bodyPr wrap="square" lIns="27432" rIns="27432" tIns="9144" bIns="9144" anchor="t">
+            <a:spAutoFit/>
+          </a:bodyPr>
+          <a:lstStyle/>
+          <a:p>
+            <a:pPr algn="l">
+              <a:lnSpc>
+                <a:spcPct val="110000"/>
+              </a:lnSpc>
+            </a:pPr>
+            <a:r>
+              <a:rPr sz="800" b="1">
+                <a:solidFill>
+                  <a:srgbClr val="0F4C81"/>
+                </a:solidFill>
+                <a:latin typeface="微软雅黑"/>
+                <a:ea typeface="微软雅黑"/>
+                <a:cs typeface="微软雅黑"/>
+              </a:rPr>
+              <a:t>用例生成</a:t>
+            </a:r>
+          </a:p>
+          <a:p>
+            <a:pPr algn="l">
+              <a:lnSpc>
+                <a:spcPct val="110000"/>
+              </a:lnSpc>
+              <a:spcBef>
+                <a:spcPts val="200"/>
+              </a:spcBef>
+            </a:pPr>
+            <a:r>
+              <a:rPr sz="800" b="0">
+                <a:solidFill>
+                  <a:srgbClr val="3A3A35"/>
+                </a:solidFill>
+                <a:latin typeface="微软雅黑"/>
+                <a:ea typeface="微软雅黑"/>
+                <a:cs typeface="微软雅黑"/>
+              </a:rPr>
+              <a:t>平台按模板渲染 pytest 用例文件，减少手写与漂移</a:t>
+            </a:r>
+          </a:p>
+        </p:txBody>
+      </p:sp>
+      <p:sp>
+        <p:nvSpPr>
+          <p:cNvPr id="28" name="Rounded Rectangle 27"/>
+          <p:cNvSpPr/>
+          <p:nvPr/>
+        </p:nvSpPr>
+        <p:spPr>
+          <a:xfrm>
+            <a:off x="365760" y="4992624"/>
+            <a:ext cx="2587751" cy="786384"/>
+          </a:xfrm>
+          <a:prstGeom prst="roundRect">
+            <a:avLst>
+              <a:gd name="adj" fmla="val 5000"/>
+            </a:avLst>
+          </a:prstGeom>
+          <a:solidFill>
+            <a:srgbClr val="ECECEC"/>
+          </a:solidFill>
+          <a:ln>
+            <a:noFill/>
+          </a:ln>
+          <a:effectLst/>
+        </p:spPr>
+        <p:style>
+          <a:lnRef idx="1">
+            <a:schemeClr val="accent1"/>
+          </a:lnRef>
+          <a:fillRef idx="3">
+            <a:schemeClr val="accent1"/>
+          </a:fillRef>
+          <a:effectRef idx="2">
+            <a:schemeClr val="accent1"/>
+          </a:effectRef>
+          <a:fontRef idx="minor">
+            <a:schemeClr val="lt1"/>
+          </a:fontRef>
+        </p:style>
+        <p:txBody>
+          <a:bodyPr rtlCol="0" anchor="ctr" wrap="square"/>
+          <a:lstStyle/>
+          <a:p>
+            <a:pPr algn="ctr"/>
+          </a:p>
+        </p:txBody>
+      </p:sp>
+      <p:sp>
+        <p:nvSpPr>
+          <p:cNvPr id="29" name="TextBox 28"/>
+          <p:cNvSpPr txBox="1"/>
+          <p:nvPr/>
+        </p:nvSpPr>
+        <p:spPr>
+          <a:xfrm>
+            <a:off x="438912" y="5047488"/>
+            <a:ext cx="2441448" cy="676656"/>
+          </a:xfrm>
+          <a:prstGeom prst="rect">
+            <a:avLst/>
+          </a:prstGeom>
+          <a:noFill/>
+        </p:spPr>
+        <p:txBody>
+          <a:bodyPr wrap="square" lIns="27432" rIns="27432" tIns="9144" bIns="9144" anchor="t">
+            <a:spAutoFit/>
+          </a:bodyPr>
+          <a:lstStyle/>
+          <a:p>
+            <a:pPr algn="l">
+              <a:lnSpc>
+                <a:spcPct val="110000"/>
+              </a:lnSpc>
+            </a:pPr>
+            <a:r>
+              <a:rPr sz="800" b="1">
+                <a:solidFill>
+                  <a:srgbClr val="0F4C81"/>
+                </a:solidFill>
+                <a:latin typeface="微软雅黑"/>
+                <a:ea typeface="微软雅黑"/>
+                <a:cs typeface="微软雅黑"/>
+              </a:rPr>
+              <a:t>参数注入</a:t>
+            </a:r>
+          </a:p>
+          <a:p>
+            <a:pPr algn="l">
+              <a:lnSpc>
+                <a:spcPct val="110000"/>
+              </a:lnSpc>
+              <a:spcBef>
+                <a:spcPts val="200"/>
+              </a:spcBef>
+            </a:pPr>
+            <a:r>
+              <a:rPr sz="800" b="0">
+                <a:solidFill>
+                  <a:srgbClr val="3A3A35"/>
+                </a:solidFill>
+                <a:latin typeface="微软雅黑"/>
+                <a:ea typeface="微软雅黑"/>
+                <a:cs typeface="微软雅黑"/>
+              </a:rPr>
+              <a:t>设备连接、仿真模式、环境变量运行时注入，脚本不写死</a:t>
+            </a:r>
+          </a:p>
+        </p:txBody>
+      </p:sp>
+      <p:sp>
+        <p:nvSpPr>
+          <p:cNvPr id="30" name="Rounded Rectangle 29"/>
+          <p:cNvSpPr/>
+          <p:nvPr/>
+        </p:nvSpPr>
+        <p:spPr>
+          <a:xfrm>
+            <a:off x="3227832" y="2304288"/>
+            <a:ext cx="2770632" cy="3566160"/>
+          </a:xfrm>
+          <a:prstGeom prst="roundRect">
+            <a:avLst>
+              <a:gd name="adj" fmla="val 4000"/>
+            </a:avLst>
+          </a:prstGeom>
+          <a:solidFill>
+            <a:srgbClr val="FFFFFF"/>
+          </a:solidFill>
+          <a:ln w="12700">
+            <a:solidFill>
+              <a:srgbClr val="C9C9C2"/>
+            </a:solidFill>
+          </a:ln>
+          <a:effectLst/>
+        </p:spPr>
+        <p:style>
+          <a:lnRef idx="1">
+            <a:schemeClr val="accent1"/>
+          </a:lnRef>
+          <a:fillRef idx="3">
+            <a:schemeClr val="accent1"/>
+          </a:fillRef>
+          <a:effectRef idx="2">
+            <a:schemeClr val="accent1"/>
+          </a:effectRef>
+          <a:fontRef idx="minor">
+            <a:schemeClr val="lt1"/>
+          </a:fontRef>
+        </p:style>
+        <p:txBody>
+          <a:bodyPr rtlCol="0" anchor="ctr" wrap="square"/>
+          <a:lstStyle/>
+          <a:p>
+            <a:pPr algn="ctr"/>
+          </a:p>
+        </p:txBody>
+      </p:sp>
+      <p:sp>
+        <p:nvSpPr>
+          <p:cNvPr id="31" name="Oval 30"/>
+          <p:cNvSpPr/>
+          <p:nvPr/>
+        </p:nvSpPr>
+        <p:spPr>
+          <a:xfrm>
+            <a:off x="3337560" y="2414016"/>
+            <a:ext cx="219456" cy="219456"/>
+          </a:xfrm>
+          <a:prstGeom prst="ellipse">
+            <a:avLst/>
+          </a:prstGeom>
+          <a:solidFill>
+            <a:srgbClr val="8B0F1A"/>
+          </a:solidFill>
+          <a:ln>
+            <a:noFill/>
+          </a:ln>
+          <a:effectLst/>
+        </p:spPr>
+        <p:style>
+          <a:lnRef idx="1">
+            <a:schemeClr val="accent1"/>
+          </a:lnRef>
+          <a:fillRef idx="3">
+            <a:schemeClr val="accent1"/>
+          </a:fillRef>
+          <a:effectRef idx="2">
+            <a:schemeClr val="accent1"/>
+          </a:effectRef>
+          <a:fontRef idx="minor">
+            <a:schemeClr val="lt1"/>
+          </a:fontRef>
+        </p:style>
+        <p:txBody>
+          <a:bodyPr rtlCol="0" anchor="ctr" lIns="18288" rIns="18288" tIns="0" bIns="0"/>
+          <a:lstStyle/>
+          <a:p>
+            <a:pPr algn="ctr">
+              <a:lnSpc>
+                <a:spcPct val="100000"/>
+              </a:lnSpc>
+            </a:pPr>
+            <a:r>
+              <a:rPr sz="850" b="1">
+                <a:solidFill>
+                  <a:srgbClr val="FFFFFF"/>
+                </a:solidFill>
+                <a:latin typeface="微软雅黑"/>
+                <a:ea typeface="微软雅黑"/>
+                <a:cs typeface="微软雅黑"/>
+              </a:rPr>
+              <a:t>2</a:t>
+            </a:r>
+          </a:p>
+        </p:txBody>
+      </p:sp>
+      <p:sp>
+        <p:nvSpPr>
+          <p:cNvPr id="32" name="TextBox 31"/>
+          <p:cNvSpPr txBox="1"/>
+          <p:nvPr/>
+        </p:nvSpPr>
+        <p:spPr>
+          <a:xfrm>
+            <a:off x="3630168" y="2395728"/>
+            <a:ext cx="2276856" cy="274320"/>
+          </a:xfrm>
+          <a:prstGeom prst="rect">
+            <a:avLst/>
+          </a:prstGeom>
+          <a:noFill/>
+        </p:spPr>
+        <p:txBody>
+          <a:bodyPr wrap="square" lIns="27432" rIns="27432" tIns="9144" bIns="9144" anchor="ctr">
+            <a:spAutoFit/>
+          </a:bodyPr>
+          <a:lstStyle/>
+          <a:p>
+            <a:pPr algn="l">
+              <a:lnSpc>
+                <a:spcPct val="110000"/>
+              </a:lnSpc>
+            </a:pPr>
+            <a:r>
+              <a:rPr sz="1100" b="1">
+                <a:solidFill>
+                  <a:srgbClr val="141414"/>
+                </a:solidFill>
+                <a:latin typeface="微软雅黑"/>
+                <a:ea typeface="微软雅黑"/>
+                <a:cs typeface="微软雅黑"/>
+              </a:rPr>
+              <a:t>软件与环境自动部署</a:t>
+            </a:r>
+          </a:p>
+        </p:txBody>
+      </p:sp>
+      <p:sp>
+        <p:nvSpPr>
+          <p:cNvPr id="33" name="TextBox 32"/>
+          <p:cNvSpPr txBox="1"/>
+          <p:nvPr/>
+        </p:nvSpPr>
+        <p:spPr>
+          <a:xfrm>
+            <a:off x="3337560" y="2724912"/>
+            <a:ext cx="2551176" cy="475488"/>
+          </a:xfrm>
+          <a:prstGeom prst="rect">
+            <a:avLst/>
+          </a:prstGeom>
+          <a:noFill/>
+        </p:spPr>
+        <p:txBody>
+          <a:bodyPr wrap="square" lIns="27432" rIns="27432" tIns="9144" bIns="9144" anchor="t">
+            <a:spAutoFit/>
+          </a:bodyPr>
+          <a:lstStyle/>
+          <a:p>
+            <a:pPr algn="l">
+              <a:lnSpc>
+                <a:spcPct val="110000"/>
+              </a:lnSpc>
+            </a:pPr>
+            <a:r>
+              <a:rPr sz="850" b="0">
+                <a:solidFill>
+                  <a:srgbClr val="5C5C56"/>
+                </a:solidFill>
+                <a:latin typeface="微软雅黑"/>
+                <a:ea typeface="微软雅黑"/>
+                <a:cs typeface="微软雅黑"/>
+              </a:rPr>
+              <a:t>执行前把「跑什么」与「在哪跑」一次性准备到位</a:t>
+            </a:r>
+          </a:p>
+        </p:txBody>
+      </p:sp>
+      <p:sp>
+        <p:nvSpPr>
+          <p:cNvPr id="34" name="Rounded Rectangle 33"/>
+          <p:cNvSpPr/>
+          <p:nvPr/>
+        </p:nvSpPr>
+        <p:spPr>
+          <a:xfrm>
+            <a:off x="3319272" y="3236976"/>
+            <a:ext cx="2587751" cy="786384"/>
+          </a:xfrm>
+          <a:prstGeom prst="roundRect">
+            <a:avLst>
+              <a:gd name="adj" fmla="val 5000"/>
+            </a:avLst>
+          </a:prstGeom>
+          <a:solidFill>
+            <a:srgbClr val="ECECEC"/>
+          </a:solidFill>
+          <a:ln>
+            <a:noFill/>
+          </a:ln>
+          <a:effectLst/>
+        </p:spPr>
+        <p:style>
+          <a:lnRef idx="1">
+            <a:schemeClr val="accent1"/>
+          </a:lnRef>
+          <a:fillRef idx="3">
+            <a:schemeClr val="accent1"/>
+          </a:fillRef>
+          <a:effectRef idx="2">
+            <a:schemeClr val="accent1"/>
+          </a:effectRef>
+          <a:fontRef idx="minor">
+            <a:schemeClr val="lt1"/>
+          </a:fontRef>
+        </p:style>
+        <p:txBody>
+          <a:bodyPr rtlCol="0" anchor="ctr" wrap="square"/>
+          <a:lstStyle/>
+          <a:p>
+            <a:pPr algn="ctr"/>
+          </a:p>
+        </p:txBody>
+      </p:sp>
+      <p:sp>
+        <p:nvSpPr>
+          <p:cNvPr id="35" name="TextBox 34"/>
+          <p:cNvSpPr txBox="1"/>
+          <p:nvPr/>
+        </p:nvSpPr>
+        <p:spPr>
+          <a:xfrm>
+            <a:off x="3392424" y="3291840"/>
+            <a:ext cx="2441448" cy="676656"/>
+          </a:xfrm>
+          <a:prstGeom prst="rect">
+            <a:avLst/>
+          </a:prstGeom>
+          <a:noFill/>
+        </p:spPr>
+        <p:txBody>
+          <a:bodyPr wrap="square" lIns="27432" rIns="27432" tIns="9144" bIns="9144" anchor="t">
+            <a:spAutoFit/>
+          </a:bodyPr>
+          <a:lstStyle/>
+          <a:p>
+            <a:pPr algn="l">
+              <a:lnSpc>
+                <a:spcPct val="110000"/>
+              </a:lnSpc>
+            </a:pPr>
+            <a:r>
+              <a:rPr sz="800" b="1">
+                <a:solidFill>
+                  <a:srgbClr val="0F4C81"/>
+                </a:solidFill>
+                <a:latin typeface="微软雅黑"/>
+                <a:ea typeface="微软雅黑"/>
+                <a:cs typeface="微软雅黑"/>
+              </a:rPr>
+              <a:t>随包分发</a:t>
+            </a:r>
+          </a:p>
+          <a:p>
+            <a:pPr algn="l">
+              <a:lnSpc>
+                <a:spcPct val="110000"/>
+              </a:lnSpc>
+              <a:spcBef>
+                <a:spcPts val="200"/>
+              </a:spcBef>
+            </a:pPr>
+            <a:r>
+              <a:rPr sz="800" b="0">
+                <a:solidFill>
+                  <a:srgbClr val="3A3A35"/>
+                </a:solidFill>
+                <a:latin typeface="微软雅黑"/>
+                <a:ea typeface="微软雅黑"/>
+                <a:cs typeface="微软雅黑"/>
+              </a:rPr>
+              <a:t>Runner、驱动包与依赖随安装包下发，现场免搭建</a:t>
+            </a:r>
+          </a:p>
+        </p:txBody>
+      </p:sp>
+      <p:sp>
+        <p:nvSpPr>
+          <p:cNvPr id="36" name="Rounded Rectangle 35"/>
+          <p:cNvSpPr/>
+          <p:nvPr/>
+        </p:nvSpPr>
+        <p:spPr>
+          <a:xfrm>
+            <a:off x="3319272" y="4114800"/>
+            <a:ext cx="2587751" cy="786384"/>
+          </a:xfrm>
+          <a:prstGeom prst="roundRect">
+            <a:avLst>
+              <a:gd name="adj" fmla="val 5000"/>
+            </a:avLst>
+          </a:prstGeom>
+          <a:solidFill>
+            <a:srgbClr val="ECECEC"/>
+          </a:solidFill>
+          <a:ln>
+            <a:noFill/>
+          </a:ln>
+          <a:effectLst/>
+        </p:spPr>
+        <p:style>
+          <a:lnRef idx="1">
+            <a:schemeClr val="accent1"/>
+          </a:lnRef>
+          <a:fillRef idx="3">
+            <a:schemeClr val="accent1"/>
+          </a:fillRef>
+          <a:effectRef idx="2">
+            <a:schemeClr val="accent1"/>
+          </a:effectRef>
+          <a:fontRef idx="minor">
+            <a:schemeClr val="lt1"/>
+          </a:fontRef>
+        </p:style>
+        <p:txBody>
+          <a:bodyPr rtlCol="0" anchor="ctr" wrap="square"/>
+          <a:lstStyle/>
+          <a:p>
+            <a:pPr algn="ctr"/>
+          </a:p>
+        </p:txBody>
+      </p:sp>
+      <p:sp>
+        <p:nvSpPr>
+          <p:cNvPr id="37" name="TextBox 36"/>
+          <p:cNvSpPr txBox="1"/>
+          <p:nvPr/>
+        </p:nvSpPr>
+        <p:spPr>
+          <a:xfrm>
+            <a:off x="3392424" y="4169663"/>
+            <a:ext cx="2441448" cy="676656"/>
+          </a:xfrm>
+          <a:prstGeom prst="rect">
+            <a:avLst/>
+          </a:prstGeom>
+          <a:noFill/>
+        </p:spPr>
+        <p:txBody>
+          <a:bodyPr wrap="square" lIns="27432" rIns="27432" tIns="9144" bIns="9144" anchor="t">
+            <a:spAutoFit/>
+          </a:bodyPr>
+          <a:lstStyle/>
+          <a:p>
+            <a:pPr algn="l">
+              <a:lnSpc>
+                <a:spcPct val="110000"/>
+              </a:lnSpc>
+            </a:pPr>
+            <a:r>
+              <a:rPr sz="800" b="1">
+                <a:solidFill>
+                  <a:srgbClr val="0F4C81"/>
+                </a:solidFill>
+                <a:latin typeface="微软雅黑"/>
+                <a:ea typeface="微软雅黑"/>
+                <a:cs typeface="微软雅黑"/>
+              </a:rPr>
+              <a:t>版本与指纹</a:t>
+            </a:r>
+          </a:p>
+          <a:p>
+            <a:pPr algn="l">
+              <a:lnSpc>
+                <a:spcPct val="110000"/>
+              </a:lnSpc>
+              <a:spcBef>
+                <a:spcPts val="200"/>
+              </a:spcBef>
+            </a:pPr>
+            <a:r>
+              <a:rPr sz="800" b="0">
+                <a:solidFill>
+                  <a:srgbClr val="3A3A35"/>
+                </a:solidFill>
+                <a:latin typeface="微软雅黑"/>
+                <a:ea typeface="微软雅黑"/>
+                <a:cs typeface="微软雅黑"/>
+              </a:rPr>
+              <a:t>启动校验版本、驱动与解释器指纹，不一致即拒绝执行</a:t>
+            </a:r>
+          </a:p>
+        </p:txBody>
+      </p:sp>
+      <p:sp>
+        <p:nvSpPr>
+          <p:cNvPr id="38" name="Rounded Rectangle 37"/>
+          <p:cNvSpPr/>
+          <p:nvPr/>
+        </p:nvSpPr>
+        <p:spPr>
+          <a:xfrm>
+            <a:off x="3319272" y="4992624"/>
+            <a:ext cx="2587751" cy="786384"/>
+          </a:xfrm>
+          <a:prstGeom prst="roundRect">
+            <a:avLst>
+              <a:gd name="adj" fmla="val 5000"/>
+            </a:avLst>
+          </a:prstGeom>
+          <a:solidFill>
+            <a:srgbClr val="ECECEC"/>
+          </a:solidFill>
+          <a:ln>
+            <a:noFill/>
+          </a:ln>
+          <a:effectLst/>
+        </p:spPr>
+        <p:style>
+          <a:lnRef idx="1">
+            <a:schemeClr val="accent1"/>
+          </a:lnRef>
+          <a:fillRef idx="3">
+            <a:schemeClr val="accent1"/>
+          </a:fillRef>
+          <a:effectRef idx="2">
+            <a:schemeClr val="accent1"/>
+          </a:effectRef>
+          <a:fontRef idx="minor">
+            <a:schemeClr val="lt1"/>
+          </a:fontRef>
+        </p:style>
+        <p:txBody>
+          <a:bodyPr rtlCol="0" anchor="ctr" wrap="square"/>
+          <a:lstStyle/>
+          <a:p>
+            <a:pPr algn="ctr"/>
+          </a:p>
+        </p:txBody>
+      </p:sp>
+      <p:sp>
+        <p:nvSpPr>
+          <p:cNvPr id="39" name="TextBox 38"/>
+          <p:cNvSpPr txBox="1"/>
+          <p:nvPr/>
+        </p:nvSpPr>
+        <p:spPr>
+          <a:xfrm>
+            <a:off x="3392424" y="5047488"/>
+            <a:ext cx="2441448" cy="676656"/>
+          </a:xfrm>
+          <a:prstGeom prst="rect">
+            <a:avLst/>
+          </a:prstGeom>
+          <a:noFill/>
+        </p:spPr>
+        <p:txBody>
+          <a:bodyPr wrap="square" lIns="27432" rIns="27432" tIns="9144" bIns="9144" anchor="t">
+            <a:spAutoFit/>
+          </a:bodyPr>
+          <a:lstStyle/>
+          <a:p>
+            <a:pPr algn="l">
+              <a:lnSpc>
+                <a:spcPct val="110000"/>
+              </a:lnSpc>
+            </a:pPr>
+            <a:r>
+              <a:rPr sz="800" b="1">
+                <a:solidFill>
+                  <a:srgbClr val="0F4C81"/>
+                </a:solidFill>
+                <a:latin typeface="微软雅黑"/>
+                <a:ea typeface="微软雅黑"/>
+                <a:cs typeface="微软雅黑"/>
+              </a:rPr>
+              <a:t>运行隔离</a:t>
+            </a:r>
+          </a:p>
+          <a:p>
+            <a:pPr algn="l">
+              <a:lnSpc>
+                <a:spcPct val="110000"/>
+              </a:lnSpc>
+              <a:spcBef>
+                <a:spcPts val="200"/>
+              </a:spcBef>
+            </a:pPr>
+            <a:r>
+              <a:rPr sz="800" b="0">
+                <a:solidFill>
+                  <a:srgbClr val="3A3A35"/>
+                </a:solidFill>
+                <a:latin typeface="微软雅黑"/>
+                <a:ea typeface="微软雅黑"/>
+                <a:cs typeface="微软雅黑"/>
+              </a:rPr>
+              <a:t>每任务独立运行目录，互不污染，执行后可完整回溯</a:t>
+            </a:r>
+          </a:p>
+        </p:txBody>
+      </p:sp>
+      <p:sp>
+        <p:nvSpPr>
+          <p:cNvPr id="40" name="Rounded Rectangle 39"/>
+          <p:cNvSpPr/>
+          <p:nvPr/>
+        </p:nvSpPr>
+        <p:spPr>
+          <a:xfrm>
+            <a:off x="6181344" y="2304288"/>
+            <a:ext cx="2770632" cy="3566160"/>
+          </a:xfrm>
+          <a:prstGeom prst="roundRect">
+            <a:avLst>
+              <a:gd name="adj" fmla="val 4000"/>
+            </a:avLst>
+          </a:prstGeom>
+          <a:solidFill>
+            <a:srgbClr val="FFFFFF"/>
+          </a:solidFill>
+          <a:ln w="12700">
+            <a:solidFill>
+              <a:srgbClr val="C9C9C2"/>
+            </a:solidFill>
+          </a:ln>
+          <a:effectLst/>
+        </p:spPr>
+        <p:style>
+          <a:lnRef idx="1">
+            <a:schemeClr val="accent1"/>
+          </a:lnRef>
+          <a:fillRef idx="3">
+            <a:schemeClr val="accent1"/>
+          </a:fillRef>
+          <a:effectRef idx="2">
+            <a:schemeClr val="accent1"/>
+          </a:effectRef>
+          <a:fontRef idx="minor">
+            <a:schemeClr val="lt1"/>
+          </a:fontRef>
+        </p:style>
+        <p:txBody>
+          <a:bodyPr rtlCol="0" anchor="ctr" wrap="square"/>
+          <a:lstStyle/>
+          <a:p>
+            <a:pPr algn="ctr"/>
+          </a:p>
+        </p:txBody>
+      </p:sp>
+      <p:sp>
+        <p:nvSpPr>
+          <p:cNvPr id="41" name="Oval 40"/>
+          <p:cNvSpPr/>
+          <p:nvPr/>
+        </p:nvSpPr>
+        <p:spPr>
+          <a:xfrm>
+            <a:off x="6291072" y="2414016"/>
+            <a:ext cx="219456" cy="219456"/>
+          </a:xfrm>
+          <a:prstGeom prst="ellipse">
+            <a:avLst/>
+          </a:prstGeom>
+          <a:solidFill>
+            <a:srgbClr val="8B0F1A"/>
+          </a:solidFill>
+          <a:ln>
+            <a:noFill/>
+          </a:ln>
+          <a:effectLst/>
+        </p:spPr>
+        <p:style>
+          <a:lnRef idx="1">
+            <a:schemeClr val="accent1"/>
+          </a:lnRef>
+          <a:fillRef idx="3">
+            <a:schemeClr val="accent1"/>
+          </a:fillRef>
+          <a:effectRef idx="2">
+            <a:schemeClr val="accent1"/>
+          </a:effectRef>
+          <a:fontRef idx="minor">
+            <a:schemeClr val="lt1"/>
+          </a:fontRef>
+        </p:style>
+        <p:txBody>
+          <a:bodyPr rtlCol="0" anchor="ctr" lIns="18288" rIns="18288" tIns="0" bIns="0"/>
+          <a:lstStyle/>
+          <a:p>
+            <a:pPr algn="ctr">
+              <a:lnSpc>
+                <a:spcPct val="100000"/>
+              </a:lnSpc>
+            </a:pPr>
+            <a:r>
+              <a:rPr sz="850" b="1">
+                <a:solidFill>
+                  <a:srgbClr val="FFFFFF"/>
+                </a:solidFill>
+                <a:latin typeface="微软雅黑"/>
+                <a:ea typeface="微软雅黑"/>
+                <a:cs typeface="微软雅黑"/>
+              </a:rPr>
+              <a:t>3</a:t>
+            </a:r>
+          </a:p>
+        </p:txBody>
+      </p:sp>
+      <p:sp>
+        <p:nvSpPr>
+          <p:cNvPr id="42" name="TextBox 41"/>
+          <p:cNvSpPr txBox="1"/>
+          <p:nvPr/>
+        </p:nvSpPr>
+        <p:spPr>
+          <a:xfrm>
+            <a:off x="6583680" y="2395728"/>
+            <a:ext cx="2276856" cy="274320"/>
+          </a:xfrm>
+          <a:prstGeom prst="rect">
+            <a:avLst/>
+          </a:prstGeom>
+          <a:noFill/>
+        </p:spPr>
+        <p:txBody>
+          <a:bodyPr wrap="square" lIns="27432" rIns="27432" tIns="9144" bIns="9144" anchor="ctr">
+            <a:spAutoFit/>
+          </a:bodyPr>
+          <a:lstStyle/>
+          <a:p>
+            <a:pPr algn="l">
+              <a:lnSpc>
+                <a:spcPct val="110000"/>
+              </a:lnSpc>
+            </a:pPr>
+            <a:r>
+              <a:rPr sz="1100" b="1">
+                <a:solidFill>
+                  <a:srgbClr val="141414"/>
+                </a:solidFill>
+                <a:latin typeface="微软雅黑"/>
+                <a:ea typeface="微软雅黑"/>
+                <a:cs typeface="微软雅黑"/>
+              </a:rPr>
+              <a:t>初始化与终止</a:t>
+            </a:r>
+          </a:p>
+        </p:txBody>
+      </p:sp>
+      <p:sp>
+        <p:nvSpPr>
+          <p:cNvPr id="43" name="TextBox 42"/>
+          <p:cNvSpPr txBox="1"/>
+          <p:nvPr/>
+        </p:nvSpPr>
+        <p:spPr>
+          <a:xfrm>
+            <a:off x="6291072" y="2724912"/>
+            <a:ext cx="2551176" cy="475488"/>
+          </a:xfrm>
+          <a:prstGeom prst="rect">
+            <a:avLst/>
+          </a:prstGeom>
+          <a:noFill/>
+        </p:spPr>
+        <p:txBody>
+          <a:bodyPr wrap="square" lIns="27432" rIns="27432" tIns="9144" bIns="9144" anchor="t">
+            <a:spAutoFit/>
+          </a:bodyPr>
+          <a:lstStyle/>
+          <a:p>
+            <a:pPr algn="l">
+              <a:lnSpc>
+                <a:spcPct val="110000"/>
+              </a:lnSpc>
+            </a:pPr>
+            <a:r>
+              <a:rPr sz="850" b="0">
+                <a:solidFill>
+                  <a:srgbClr val="5C5C56"/>
+                </a:solidFill>
+                <a:latin typeface="微软雅黑"/>
+                <a:ea typeface="微软雅黑"/>
+                <a:cs typeface="微软雅黑"/>
+              </a:rPr>
+              <a:t>让每次执行都从确定状态开始、回到安全状态结束</a:t>
+            </a:r>
+          </a:p>
+        </p:txBody>
+      </p:sp>
+      <p:sp>
+        <p:nvSpPr>
+          <p:cNvPr id="44" name="Rounded Rectangle 43"/>
+          <p:cNvSpPr/>
+          <p:nvPr/>
+        </p:nvSpPr>
+        <p:spPr>
+          <a:xfrm>
+            <a:off x="6272783" y="3236976"/>
+            <a:ext cx="2587751" cy="786384"/>
+          </a:xfrm>
+          <a:prstGeom prst="roundRect">
+            <a:avLst>
+              <a:gd name="adj" fmla="val 5000"/>
+            </a:avLst>
+          </a:prstGeom>
+          <a:solidFill>
+            <a:srgbClr val="ECECEC"/>
+          </a:solidFill>
+          <a:ln>
+            <a:noFill/>
+          </a:ln>
+          <a:effectLst/>
+        </p:spPr>
+        <p:style>
+          <a:lnRef idx="1">
+            <a:schemeClr val="accent1"/>
+          </a:lnRef>
+          <a:fillRef idx="3">
+            <a:schemeClr val="accent1"/>
+          </a:fillRef>
+          <a:effectRef idx="2">
+            <a:schemeClr val="accent1"/>
+          </a:effectRef>
+          <a:fontRef idx="minor">
+            <a:schemeClr val="lt1"/>
+          </a:fontRef>
+        </p:style>
+        <p:txBody>
+          <a:bodyPr rtlCol="0" anchor="ctr" wrap="square"/>
+          <a:lstStyle/>
+          <a:p>
+            <a:pPr algn="ctr"/>
+          </a:p>
+        </p:txBody>
+      </p:sp>
+      <p:sp>
+        <p:nvSpPr>
+          <p:cNvPr id="45" name="TextBox 44"/>
+          <p:cNvSpPr txBox="1"/>
+          <p:nvPr/>
+        </p:nvSpPr>
+        <p:spPr>
+          <a:xfrm>
+            <a:off x="6345936" y="3291840"/>
+            <a:ext cx="2441448" cy="676656"/>
+          </a:xfrm>
+          <a:prstGeom prst="rect">
+            <a:avLst/>
+          </a:prstGeom>
+          <a:noFill/>
+        </p:spPr>
+        <p:txBody>
+          <a:bodyPr wrap="square" lIns="27432" rIns="27432" tIns="9144" bIns="9144" anchor="t">
+            <a:spAutoFit/>
+          </a:bodyPr>
+          <a:lstStyle/>
+          <a:p>
+            <a:pPr algn="l">
+              <a:lnSpc>
+                <a:spcPct val="110000"/>
+              </a:lnSpc>
+            </a:pPr>
+            <a:r>
+              <a:rPr sz="800" b="1">
+                <a:solidFill>
+                  <a:srgbClr val="0F4C81"/>
+                </a:solidFill>
+                <a:latin typeface="微软雅黑"/>
+                <a:ea typeface="微软雅黑"/>
+                <a:cs typeface="微软雅黑"/>
+              </a:rPr>
+              <a:t>初始化</a:t>
+            </a:r>
+          </a:p>
+          <a:p>
+            <a:pPr algn="l">
+              <a:lnSpc>
+                <a:spcPct val="110000"/>
+              </a:lnSpc>
+              <a:spcBef>
+                <a:spcPts val="200"/>
+              </a:spcBef>
+            </a:pPr>
+            <a:r>
+              <a:rPr sz="800" b="0">
+                <a:solidFill>
+                  <a:srgbClr val="3A3A35"/>
+                </a:solidFill>
+                <a:latin typeface="微软雅黑"/>
+                <a:ea typeface="微软雅黑"/>
+                <a:cs typeface="微软雅黑"/>
+              </a:rPr>
+              <a:t>建连、复位、量程与校准装载、仿真模式注入</a:t>
+            </a:r>
+          </a:p>
+        </p:txBody>
+      </p:sp>
+      <p:sp>
+        <p:nvSpPr>
+          <p:cNvPr id="46" name="Rounded Rectangle 45"/>
+          <p:cNvSpPr/>
+          <p:nvPr/>
+        </p:nvSpPr>
+        <p:spPr>
+          <a:xfrm>
+            <a:off x="6272783" y="4114800"/>
+            <a:ext cx="2587751" cy="786384"/>
+          </a:xfrm>
+          <a:prstGeom prst="roundRect">
+            <a:avLst>
+              <a:gd name="adj" fmla="val 5000"/>
+            </a:avLst>
+          </a:prstGeom>
+          <a:solidFill>
+            <a:srgbClr val="ECECEC"/>
+          </a:solidFill>
+          <a:ln>
+            <a:noFill/>
+          </a:ln>
+          <a:effectLst/>
+        </p:spPr>
+        <p:style>
+          <a:lnRef idx="1">
+            <a:schemeClr val="accent1"/>
+          </a:lnRef>
+          <a:fillRef idx="3">
+            <a:schemeClr val="accent1"/>
+          </a:fillRef>
+          <a:effectRef idx="2">
+            <a:schemeClr val="accent1"/>
+          </a:effectRef>
+          <a:fontRef idx="minor">
+            <a:schemeClr val="lt1"/>
+          </a:fontRef>
+        </p:style>
+        <p:txBody>
+          <a:bodyPr rtlCol="0" anchor="ctr" wrap="square"/>
+          <a:lstStyle/>
+          <a:p>
+            <a:pPr algn="ctr"/>
+          </a:p>
+        </p:txBody>
+      </p:sp>
+      <p:sp>
+        <p:nvSpPr>
+          <p:cNvPr id="47" name="TextBox 46"/>
+          <p:cNvSpPr txBox="1"/>
+          <p:nvPr/>
+        </p:nvSpPr>
+        <p:spPr>
+          <a:xfrm>
+            <a:off x="6345936" y="4169663"/>
+            <a:ext cx="2441448" cy="676656"/>
+          </a:xfrm>
+          <a:prstGeom prst="rect">
+            <a:avLst/>
+          </a:prstGeom>
+          <a:noFill/>
+        </p:spPr>
+        <p:txBody>
+          <a:bodyPr wrap="square" lIns="27432" rIns="27432" tIns="9144" bIns="9144" anchor="t">
+            <a:spAutoFit/>
+          </a:bodyPr>
+          <a:lstStyle/>
+          <a:p>
+            <a:pPr algn="l">
+              <a:lnSpc>
+                <a:spcPct val="110000"/>
+              </a:lnSpc>
+            </a:pPr>
+            <a:r>
+              <a:rPr sz="800" b="1">
+                <a:solidFill>
+                  <a:srgbClr val="0F4C81"/>
+                </a:solidFill>
+                <a:latin typeface="微软雅黑"/>
+                <a:ea typeface="微软雅黑"/>
+                <a:cs typeface="微软雅黑"/>
+              </a:rPr>
+              <a:t>终止</a:t>
+            </a:r>
+          </a:p>
+          <a:p>
+            <a:pPr algn="l">
+              <a:lnSpc>
+                <a:spcPct val="110000"/>
+              </a:lnSpc>
+              <a:spcBef>
+                <a:spcPts val="200"/>
+              </a:spcBef>
+            </a:pPr>
+            <a:r>
+              <a:rPr sz="800" b="0">
+                <a:solidFill>
+                  <a:srgbClr val="3A3A35"/>
+                </a:solidFill>
+                <a:latin typeface="微软雅黑"/>
+                <a:ea typeface="微软雅黑"/>
+                <a:cs typeface="微软雅黑"/>
+              </a:rPr>
+              <a:t>用例后置与会话收尾统一释放连接、下电、还原配置</a:t>
+            </a:r>
+          </a:p>
+        </p:txBody>
+      </p:sp>
+      <p:sp>
+        <p:nvSpPr>
+          <p:cNvPr id="48" name="Rounded Rectangle 47"/>
+          <p:cNvSpPr/>
+          <p:nvPr/>
+        </p:nvSpPr>
+        <p:spPr>
+          <a:xfrm>
+            <a:off x="6272783" y="4992624"/>
+            <a:ext cx="2587751" cy="786384"/>
+          </a:xfrm>
+          <a:prstGeom prst="roundRect">
+            <a:avLst>
+              <a:gd name="adj" fmla="val 5000"/>
+            </a:avLst>
+          </a:prstGeom>
+          <a:solidFill>
+            <a:srgbClr val="ECECEC"/>
+          </a:solidFill>
+          <a:ln>
+            <a:noFill/>
+          </a:ln>
+          <a:effectLst/>
+        </p:spPr>
+        <p:style>
+          <a:lnRef idx="1">
+            <a:schemeClr val="accent1"/>
+          </a:lnRef>
+          <a:fillRef idx="3">
+            <a:schemeClr val="accent1"/>
+          </a:fillRef>
+          <a:effectRef idx="2">
+            <a:schemeClr val="accent1"/>
+          </a:effectRef>
+          <a:fontRef idx="minor">
+            <a:schemeClr val="lt1"/>
+          </a:fontRef>
+        </p:style>
+        <p:txBody>
+          <a:bodyPr rtlCol="0" anchor="ctr" wrap="square"/>
+          <a:lstStyle/>
+          <a:p>
+            <a:pPr algn="ctr"/>
+          </a:p>
+        </p:txBody>
+      </p:sp>
+      <p:sp>
+        <p:nvSpPr>
+          <p:cNvPr id="49" name="TextBox 48"/>
+          <p:cNvSpPr txBox="1"/>
+          <p:nvPr/>
+        </p:nvSpPr>
+        <p:spPr>
+          <a:xfrm>
+            <a:off x="6345936" y="5047488"/>
+            <a:ext cx="2441448" cy="676656"/>
+          </a:xfrm>
+          <a:prstGeom prst="rect">
+            <a:avLst/>
+          </a:prstGeom>
+          <a:noFill/>
+        </p:spPr>
+        <p:txBody>
+          <a:bodyPr wrap="square" lIns="27432" rIns="27432" tIns="9144" bIns="9144" anchor="t">
+            <a:spAutoFit/>
+          </a:bodyPr>
+          <a:lstStyle/>
+          <a:p>
+            <a:pPr algn="l">
+              <a:lnSpc>
+                <a:spcPct val="110000"/>
+              </a:lnSpc>
+            </a:pPr>
+            <a:r>
+              <a:rPr sz="800" b="1">
+                <a:solidFill>
+                  <a:srgbClr val="0F4C81"/>
+                </a:solidFill>
+                <a:latin typeface="微软雅黑"/>
+                <a:ea typeface="微软雅黑"/>
+                <a:cs typeface="微软雅黑"/>
+              </a:rPr>
+              <a:t>异常兜底</a:t>
+            </a:r>
+          </a:p>
+          <a:p>
+            <a:pPr algn="l">
+              <a:lnSpc>
+                <a:spcPct val="110000"/>
+              </a:lnSpc>
+              <a:spcBef>
+                <a:spcPts val="200"/>
+              </a:spcBef>
+            </a:pPr>
+            <a:r>
+              <a:rPr sz="800" b="0">
+                <a:solidFill>
+                  <a:srgbClr val="3A3A35"/>
+                </a:solidFill>
+                <a:latin typeface="微软雅黑"/>
+                <a:ea typeface="微软雅黑"/>
+                <a:cs typeface="微软雅黑"/>
+              </a:rPr>
+              <a:t>失败与超时同样触发终止，避免设备被长期占用</a:t>
+            </a:r>
+          </a:p>
+        </p:txBody>
+      </p:sp>
+      <p:sp>
+        <p:nvSpPr>
+          <p:cNvPr id="50" name="Rounded Rectangle 49"/>
+          <p:cNvSpPr/>
+          <p:nvPr/>
+        </p:nvSpPr>
+        <p:spPr>
+          <a:xfrm>
+            <a:off x="9134856" y="2304288"/>
+            <a:ext cx="2770632" cy="3566160"/>
+          </a:xfrm>
+          <a:prstGeom prst="roundRect">
+            <a:avLst>
+              <a:gd name="adj" fmla="val 4000"/>
+            </a:avLst>
+          </a:prstGeom>
+          <a:solidFill>
+            <a:srgbClr val="FFFFFF"/>
+          </a:solidFill>
+          <a:ln w="12700">
+            <a:solidFill>
+              <a:srgbClr val="C9C9C2"/>
+            </a:solidFill>
+          </a:ln>
+          <a:effectLst/>
+        </p:spPr>
+        <p:style>
+          <a:lnRef idx="1">
+            <a:schemeClr val="accent1"/>
+          </a:lnRef>
+          <a:fillRef idx="3">
+            <a:schemeClr val="accent1"/>
+          </a:fillRef>
+          <a:effectRef idx="2">
+            <a:schemeClr val="accent1"/>
+          </a:effectRef>
+          <a:fontRef idx="minor">
+            <a:schemeClr val="lt1"/>
+          </a:fontRef>
+        </p:style>
+        <p:txBody>
+          <a:bodyPr rtlCol="0" anchor="ctr" wrap="square"/>
+          <a:lstStyle/>
+          <a:p>
+            <a:pPr algn="ctr"/>
+          </a:p>
+        </p:txBody>
+      </p:sp>
+      <p:sp>
+        <p:nvSpPr>
+          <p:cNvPr id="51" name="Oval 50"/>
+          <p:cNvSpPr/>
+          <p:nvPr/>
+        </p:nvSpPr>
+        <p:spPr>
+          <a:xfrm>
+            <a:off x="9244584" y="2414016"/>
+            <a:ext cx="219456" cy="219456"/>
+          </a:xfrm>
+          <a:prstGeom prst="ellipse">
+            <a:avLst/>
+          </a:prstGeom>
+          <a:solidFill>
+            <a:srgbClr val="8B0F1A"/>
+          </a:solidFill>
+          <a:ln>
+            <a:noFill/>
+          </a:ln>
+          <a:effectLst/>
+        </p:spPr>
+        <p:style>
+          <a:lnRef idx="1">
+            <a:schemeClr val="accent1"/>
+          </a:lnRef>
+          <a:fillRef idx="3">
+            <a:schemeClr val="accent1"/>
+          </a:fillRef>
+          <a:effectRef idx="2">
+            <a:schemeClr val="accent1"/>
+          </a:effectRef>
+          <a:fontRef idx="minor">
+            <a:schemeClr val="lt1"/>
+          </a:fontRef>
+        </p:style>
+        <p:txBody>
+          <a:bodyPr rtlCol="0" anchor="ctr" lIns="18288" rIns="18288" tIns="0" bIns="0"/>
+          <a:lstStyle/>
+          <a:p>
+            <a:pPr algn="ctr">
+              <a:lnSpc>
+                <a:spcPct val="100000"/>
+              </a:lnSpc>
+            </a:pPr>
+            <a:r>
+              <a:rPr sz="850" b="1">
+                <a:solidFill>
+                  <a:srgbClr val="FFFFFF"/>
+                </a:solidFill>
+                <a:latin typeface="微软雅黑"/>
+                <a:ea typeface="微软雅黑"/>
+                <a:cs typeface="微软雅黑"/>
+              </a:rPr>
+              <a:t>4</a:t>
+            </a:r>
+          </a:p>
+        </p:txBody>
+      </p:sp>
+      <p:sp>
+        <p:nvSpPr>
+          <p:cNvPr id="52" name="TextBox 51"/>
+          <p:cNvSpPr txBox="1"/>
+          <p:nvPr/>
+        </p:nvSpPr>
+        <p:spPr>
+          <a:xfrm>
+            <a:off x="9537192" y="2395728"/>
+            <a:ext cx="2276856" cy="274320"/>
+          </a:xfrm>
+          <a:prstGeom prst="rect">
+            <a:avLst/>
+          </a:prstGeom>
+          <a:noFill/>
+        </p:spPr>
+        <p:txBody>
+          <a:bodyPr wrap="square" lIns="27432" rIns="27432" tIns="9144" bIns="9144" anchor="ctr">
+            <a:spAutoFit/>
+          </a:bodyPr>
+          <a:lstStyle/>
+          <a:p>
+            <a:pPr algn="l">
+              <a:lnSpc>
+                <a:spcPct val="110000"/>
+              </a:lnSpc>
+            </a:pPr>
+            <a:r>
+              <a:rPr sz="1100" b="1">
+                <a:solidFill>
+                  <a:srgbClr val="141414"/>
+                </a:solidFill>
+                <a:latin typeface="微软雅黑"/>
+                <a:ea typeface="微软雅黑"/>
+                <a:cs typeface="微软雅黑"/>
+              </a:rPr>
+              <a:t>人工参与</a:t>
+            </a:r>
+          </a:p>
+        </p:txBody>
+      </p:sp>
+      <p:sp>
+        <p:nvSpPr>
+          <p:cNvPr id="53" name="TextBox 52"/>
+          <p:cNvSpPr txBox="1"/>
+          <p:nvPr/>
+        </p:nvSpPr>
+        <p:spPr>
+          <a:xfrm>
+            <a:off x="9244584" y="2724912"/>
+            <a:ext cx="2551176" cy="475488"/>
+          </a:xfrm>
+          <a:prstGeom prst="rect">
+            <a:avLst/>
+          </a:prstGeom>
+          <a:noFill/>
+        </p:spPr>
+        <p:txBody>
+          <a:bodyPr wrap="square" lIns="27432" rIns="27432" tIns="9144" bIns="9144" anchor="t">
+            <a:spAutoFit/>
+          </a:bodyPr>
+          <a:lstStyle/>
+          <a:p>
+            <a:pPr algn="l">
+              <a:lnSpc>
+                <a:spcPct val="110000"/>
+              </a:lnSpc>
+            </a:pPr>
+            <a:r>
+              <a:rPr sz="850" b="0">
+                <a:solidFill>
+                  <a:srgbClr val="5C5C56"/>
+                </a:solidFill>
+                <a:latin typeface="微软雅黑"/>
+                <a:ea typeface="微软雅黑"/>
+                <a:cs typeface="微软雅黑"/>
+              </a:rPr>
+              <a:t>把必须由人完成的动作变成流程里的显式节点，而非隐含操作</a:t>
+            </a:r>
+          </a:p>
+        </p:txBody>
+      </p:sp>
+      <p:sp>
+        <p:nvSpPr>
+          <p:cNvPr id="54" name="Rounded Rectangle 53"/>
+          <p:cNvSpPr/>
+          <p:nvPr/>
+        </p:nvSpPr>
+        <p:spPr>
+          <a:xfrm>
+            <a:off x="9226296" y="3236976"/>
+            <a:ext cx="2587751" cy="786384"/>
+          </a:xfrm>
+          <a:prstGeom prst="roundRect">
+            <a:avLst>
+              <a:gd name="adj" fmla="val 5000"/>
+            </a:avLst>
+          </a:prstGeom>
+          <a:solidFill>
+            <a:srgbClr val="ECECEC"/>
+          </a:solidFill>
+          <a:ln>
+            <a:noFill/>
+          </a:ln>
+          <a:effectLst/>
+        </p:spPr>
+        <p:style>
+          <a:lnRef idx="1">
+            <a:schemeClr val="accent1"/>
+          </a:lnRef>
+          <a:fillRef idx="3">
+            <a:schemeClr val="accent1"/>
+          </a:fillRef>
+          <a:effectRef idx="2">
+            <a:schemeClr val="accent1"/>
+          </a:effectRef>
+          <a:fontRef idx="minor">
+            <a:schemeClr val="lt1"/>
+          </a:fontRef>
+        </p:style>
+        <p:txBody>
+          <a:bodyPr rtlCol="0" anchor="ctr" wrap="square"/>
+          <a:lstStyle/>
+          <a:p>
+            <a:pPr algn="ctr"/>
+          </a:p>
+        </p:txBody>
+      </p:sp>
+      <p:sp>
+        <p:nvSpPr>
+          <p:cNvPr id="55" name="TextBox 54"/>
+          <p:cNvSpPr txBox="1"/>
+          <p:nvPr/>
+        </p:nvSpPr>
+        <p:spPr>
+          <a:xfrm>
+            <a:off x="9299448" y="3291840"/>
+            <a:ext cx="2441448" cy="676656"/>
+          </a:xfrm>
+          <a:prstGeom prst="rect">
+            <a:avLst/>
+          </a:prstGeom>
+          <a:noFill/>
+        </p:spPr>
+        <p:txBody>
+          <a:bodyPr wrap="square" lIns="27432" rIns="27432" tIns="9144" bIns="9144" anchor="t">
+            <a:spAutoFit/>
+          </a:bodyPr>
+          <a:lstStyle/>
+          <a:p>
+            <a:pPr algn="l">
+              <a:lnSpc>
+                <a:spcPct val="110000"/>
+              </a:lnSpc>
+            </a:pPr>
+            <a:r>
+              <a:rPr sz="800" b="1">
+                <a:solidFill>
+                  <a:srgbClr val="0F4C81"/>
+                </a:solidFill>
+                <a:latin typeface="微软雅黑"/>
+                <a:ea typeface="微软雅黑"/>
+                <a:cs typeface="微软雅黑"/>
+              </a:rPr>
+              <a:t>人工工步</a:t>
+            </a:r>
+          </a:p>
+          <a:p>
+            <a:pPr algn="l">
+              <a:lnSpc>
+                <a:spcPct val="110000"/>
+              </a:lnSpc>
+              <a:spcBef>
+                <a:spcPts val="200"/>
+              </a:spcBef>
+            </a:pPr>
+            <a:r>
+              <a:rPr sz="800" b="0">
+                <a:solidFill>
+                  <a:srgbClr val="3A3A35"/>
+                </a:solidFill>
+                <a:latin typeface="微软雅黑"/>
+                <a:ea typeface="微软雅黑"/>
+                <a:cs typeface="微软雅黑"/>
+              </a:rPr>
+              <a:t>扫码、装夹、目视判定以独立工步插入，不嵌进脚本</a:t>
+            </a:r>
+          </a:p>
+        </p:txBody>
+      </p:sp>
+      <p:sp>
+        <p:nvSpPr>
+          <p:cNvPr id="56" name="Rounded Rectangle 55"/>
+          <p:cNvSpPr/>
+          <p:nvPr/>
+        </p:nvSpPr>
+        <p:spPr>
+          <a:xfrm>
+            <a:off x="9226296" y="4114800"/>
+            <a:ext cx="2587751" cy="786384"/>
+          </a:xfrm>
+          <a:prstGeom prst="roundRect">
+            <a:avLst>
+              <a:gd name="adj" fmla="val 5000"/>
+            </a:avLst>
+          </a:prstGeom>
+          <a:solidFill>
+            <a:srgbClr val="ECECEC"/>
+          </a:solidFill>
+          <a:ln>
+            <a:noFill/>
+          </a:ln>
+          <a:effectLst/>
+        </p:spPr>
+        <p:style>
+          <a:lnRef idx="1">
+            <a:schemeClr val="accent1"/>
+          </a:lnRef>
+          <a:fillRef idx="3">
+            <a:schemeClr val="accent1"/>
+          </a:fillRef>
+          <a:effectRef idx="2">
+            <a:schemeClr val="accent1"/>
+          </a:effectRef>
+          <a:fontRef idx="minor">
+            <a:schemeClr val="lt1"/>
+          </a:fontRef>
+        </p:style>
+        <p:txBody>
+          <a:bodyPr rtlCol="0" anchor="ctr" wrap="square"/>
+          <a:lstStyle/>
+          <a:p>
+            <a:pPr algn="ctr"/>
+          </a:p>
+        </p:txBody>
+      </p:sp>
+      <p:sp>
+        <p:nvSpPr>
+          <p:cNvPr id="57" name="TextBox 56"/>
+          <p:cNvSpPr txBox="1"/>
+          <p:nvPr/>
+        </p:nvSpPr>
+        <p:spPr>
+          <a:xfrm>
+            <a:off x="9299448" y="4169663"/>
+            <a:ext cx="2441448" cy="676656"/>
+          </a:xfrm>
+          <a:prstGeom prst="rect">
+            <a:avLst/>
+          </a:prstGeom>
+          <a:noFill/>
+        </p:spPr>
+        <p:txBody>
+          <a:bodyPr wrap="square" lIns="27432" rIns="27432" tIns="9144" bIns="9144" anchor="t">
+            <a:spAutoFit/>
+          </a:bodyPr>
+          <a:lstStyle/>
+          <a:p>
+            <a:pPr algn="l">
+              <a:lnSpc>
+                <a:spcPct val="110000"/>
+              </a:lnSpc>
+            </a:pPr>
+            <a:r>
+              <a:rPr sz="800" b="1">
+                <a:solidFill>
+                  <a:srgbClr val="0F4C81"/>
+                </a:solidFill>
+                <a:latin typeface="微软雅黑"/>
+                <a:ea typeface="微软雅黑"/>
+                <a:cs typeface="微软雅黑"/>
+              </a:rPr>
+              <a:t>等待与放行</a:t>
+            </a:r>
+          </a:p>
+          <a:p>
+            <a:pPr algn="l">
+              <a:lnSpc>
+                <a:spcPct val="110000"/>
+              </a:lnSpc>
+              <a:spcBef>
+                <a:spcPts val="200"/>
+              </a:spcBef>
+            </a:pPr>
+            <a:r>
+              <a:rPr sz="800" b="0">
+                <a:solidFill>
+                  <a:srgbClr val="3A3A35"/>
+                </a:solidFill>
+                <a:latin typeface="微软雅黑"/>
+                <a:ea typeface="微软雅黑"/>
+                <a:cs typeface="微软雅黑"/>
+              </a:rPr>
+              <a:t>平台等待人工确认信号，超时按策略挂起或判失败</a:t>
+            </a:r>
+          </a:p>
+        </p:txBody>
+      </p:sp>
+      <p:sp>
+        <p:nvSpPr>
+          <p:cNvPr id="58" name="Rounded Rectangle 57"/>
+          <p:cNvSpPr/>
+          <p:nvPr/>
+        </p:nvSpPr>
+        <p:spPr>
+          <a:xfrm>
+            <a:off x="9226296" y="4992624"/>
+            <a:ext cx="2587751" cy="786384"/>
+          </a:xfrm>
+          <a:prstGeom prst="roundRect">
+            <a:avLst>
+              <a:gd name="adj" fmla="val 5000"/>
+            </a:avLst>
+          </a:prstGeom>
+          <a:solidFill>
+            <a:srgbClr val="ECECEC"/>
+          </a:solidFill>
+          <a:ln>
+            <a:noFill/>
+          </a:ln>
+          <a:effectLst/>
+        </p:spPr>
+        <p:style>
+          <a:lnRef idx="1">
+            <a:schemeClr val="accent1"/>
+          </a:lnRef>
+          <a:fillRef idx="3">
+            <a:schemeClr val="accent1"/>
+          </a:fillRef>
+          <a:effectRef idx="2">
+            <a:schemeClr val="accent1"/>
+          </a:effectRef>
+          <a:fontRef idx="minor">
+            <a:schemeClr val="lt1"/>
+          </a:fontRef>
+        </p:style>
+        <p:txBody>
+          <a:bodyPr rtlCol="0" anchor="ctr" wrap="square"/>
+          <a:lstStyle/>
+          <a:p>
+            <a:pPr algn="ctr"/>
+          </a:p>
+        </p:txBody>
+      </p:sp>
+      <p:sp>
+        <p:nvSpPr>
+          <p:cNvPr id="59" name="TextBox 58"/>
+          <p:cNvSpPr txBox="1"/>
+          <p:nvPr/>
+        </p:nvSpPr>
+        <p:spPr>
+          <a:xfrm>
+            <a:off x="9299448" y="5047488"/>
+            <a:ext cx="2441448" cy="676656"/>
+          </a:xfrm>
+          <a:prstGeom prst="rect">
+            <a:avLst/>
+          </a:prstGeom>
+          <a:noFill/>
+        </p:spPr>
+        <p:txBody>
+          <a:bodyPr wrap="square" lIns="27432" rIns="27432" tIns="9144" bIns="9144" anchor="t">
+            <a:spAutoFit/>
+          </a:bodyPr>
+          <a:lstStyle/>
+          <a:p>
+            <a:pPr algn="l">
+              <a:lnSpc>
+                <a:spcPct val="110000"/>
+              </a:lnSpc>
+            </a:pPr>
+            <a:r>
+              <a:rPr sz="800" b="1">
+                <a:solidFill>
+                  <a:srgbClr val="0F4C81"/>
+                </a:solidFill>
+                <a:latin typeface="微软雅黑"/>
+                <a:ea typeface="微软雅黑"/>
+                <a:cs typeface="微软雅黑"/>
+              </a:rPr>
+              <a:t>异常接管</a:t>
+            </a:r>
+          </a:p>
+          <a:p>
+            <a:pPr algn="l">
+              <a:lnSpc>
+                <a:spcPct val="110000"/>
+              </a:lnSpc>
+              <a:spcBef>
+                <a:spcPts val="200"/>
+              </a:spcBef>
+            </a:pPr>
+            <a:r>
+              <a:rPr sz="800" b="0">
+                <a:solidFill>
+                  <a:srgbClr val="3A3A35"/>
+                </a:solidFill>
+                <a:latin typeface="微软雅黑"/>
+                <a:ea typeface="微软雅黑"/>
+                <a:cs typeface="微软雅黑"/>
+              </a:rPr>
+              <a:t>自动步骤失败可转人工处置，并记录处置人与时间</a:t>
+            </a:r>
+          </a:p>
+        </p:txBody>
+      </p:sp>
+      <p:sp>
+        <p:nvSpPr>
+          <p:cNvPr id="60" name="Rectangle 59"/>
+          <p:cNvSpPr/>
+          <p:nvPr/>
+        </p:nvSpPr>
+        <p:spPr>
+          <a:xfrm>
+            <a:off x="274320" y="5961888"/>
+            <a:ext cx="11640312" cy="12801"/>
+          </a:xfrm>
+          <a:prstGeom prst="rect">
+            <a:avLst/>
+          </a:prstGeom>
+          <a:solidFill>
+            <a:srgbClr val="D9D6CD"/>
+          </a:solidFill>
+          <a:ln>
+            <a:noFill/>
+          </a:ln>
+          <a:effectLst/>
+        </p:spPr>
+        <p:style>
+          <a:lnRef idx="1">
+            <a:schemeClr val="accent1"/>
+          </a:lnRef>
+          <a:fillRef idx="3">
+            <a:schemeClr val="accent1"/>
+          </a:fillRef>
+          <a:effectRef idx="2">
+            <a:schemeClr val="accent1"/>
+          </a:effectRef>
+          <a:fontRef idx="minor">
+            <a:schemeClr val="lt1"/>
+          </a:fontRef>
+        </p:style>
+        <p:txBody>
+          <a:bodyPr rtlCol="0" anchor="ctr" wrap="square"/>
+          <a:lstStyle/>
+          <a:p>
+            <a:pPr algn="ctr"/>
+          </a:p>
+        </p:txBody>
+      </p:sp>
+      <p:sp>
+        <p:nvSpPr>
+          <p:cNvPr id="61" name="TextBox 60"/>
+          <p:cNvSpPr txBox="1"/>
+          <p:nvPr/>
+        </p:nvSpPr>
+        <p:spPr>
+          <a:xfrm>
+            <a:off x="274320" y="6035040"/>
+            <a:ext cx="6720840" cy="256032"/>
+          </a:xfrm>
+          <a:prstGeom prst="rect">
+            <a:avLst/>
+          </a:prstGeom>
+          <a:noFill/>
+        </p:spPr>
+        <p:txBody>
+          <a:bodyPr wrap="square" lIns="27432" rIns="27432" tIns="9144" bIns="9144" anchor="ctr">
+            <a:spAutoFit/>
+          </a:bodyPr>
+          <a:lstStyle/>
+          <a:p>
+            <a:pPr algn="l">
+              <a:lnSpc>
+                <a:spcPct val="110000"/>
+              </a:lnSpc>
+            </a:pPr>
+            <a:r>
+              <a:rPr sz="900" b="1">
+                <a:solidFill>
+                  <a:srgbClr val="141414"/>
+                </a:solidFill>
+                <a:latin typeface="微软雅黑"/>
+                <a:ea typeface="微软雅黑"/>
+                <a:cs typeface="微软雅黑"/>
+              </a:rPr>
+              <a:t>四类机制共同保证：脚本可版本化、环境可复制、执行可终止、人工可插拔</a:t>
+            </a:r>
+          </a:p>
+        </p:txBody>
+      </p:sp>
+      <p:sp>
+        <p:nvSpPr>
+          <p:cNvPr id="62" name="TextBox 61"/>
+          <p:cNvSpPr txBox="1"/>
+          <p:nvPr/>
+        </p:nvSpPr>
+        <p:spPr>
+          <a:xfrm>
+            <a:off x="7223760" y="6035040"/>
+            <a:ext cx="4690872" cy="256032"/>
+          </a:xfrm>
+          <a:prstGeom prst="rect">
+            <a:avLst/>
+          </a:prstGeom>
+          <a:noFill/>
+        </p:spPr>
+        <p:txBody>
+          <a:bodyPr wrap="square" lIns="27432" rIns="27432" tIns="9144" bIns="9144" anchor="ctr">
+            <a:spAutoFit/>
+          </a:bodyPr>
+          <a:lstStyle/>
+          <a:p>
+            <a:pPr algn="r">
+              <a:lnSpc>
+                <a:spcPct val="110000"/>
+              </a:lnSpc>
+            </a:pPr>
+            <a:r>
+              <a:rPr sz="850" b="0">
+                <a:solidFill>
+                  <a:srgbClr val="5C5C56"/>
+                </a:solidFill>
+                <a:latin typeface="微软雅黑"/>
+                <a:ea typeface="微软雅黑"/>
+                <a:cs typeface="微软雅黑"/>
+              </a:rPr>
+              <a:t>任一机制缺失，自动化都会退化为人工点检</a:t>
             </a:r>
           </a:p>
         </p:txBody>

--- a/docs/装备软件/供应商软件形态与ATE接入.pptx
+++ b/docs/装备软件/供应商软件形态与ATE接入.pptx
@@ -11,6 +11,8 @@
     <p:sldId id="259" r:id="rId10"/>
     <p:sldId id="260" r:id="rId11"/>
     <p:sldId id="261" r:id="rId12"/>
+    <p:sldId id="262" r:id="rId13"/>
+    <p:sldId id="263" r:id="rId14"/>
   </p:sldIdLst>
   <p:sldSz cx="12191695" cy="6858000" type="screen4x3"/>
   <p:notesSz cx="6858000" cy="9144000"/>
@@ -23679,6 +23681,6173 @@
                 <a:cs typeface="微软雅黑"/>
               </a:rPr>
               <a:t>任一机制缺失，自动化都会退化为人工点检</a:t>
+            </a:r>
+          </a:p>
+        </p:txBody>
+      </p:sp>
+    </p:spTree>
+  </p:cSld>
+  <p:clrMapOvr>
+    <a:masterClrMapping/>
+  </p:clrMapOvr>
+</p:sld>
+</file>
+
+<file path=ppt/slides/slide7.xml><?xml version="1.0" encoding="utf-8"?>
+<p:sld xmlns:a="http://schemas.openxmlformats.org/drawingml/2006/main" xmlns:p="http://schemas.openxmlformats.org/presentationml/2006/main" xmlns:r="http://schemas.openxmlformats.org/officeDocument/2006/relationships">
+  <p:cSld>
+    <p:spTree>
+      <p:nvGrpSpPr>
+        <p:cNvPr id="1" name=""/>
+        <p:cNvGrpSpPr/>
+        <p:nvPr/>
+      </p:nvGrpSpPr>
+      <p:grpSpPr/>
+      <p:sp>
+        <p:nvSpPr>
+          <p:cNvPr id="2" name="TextBox 1"/>
+          <p:cNvSpPr txBox="1"/>
+          <p:nvPr/>
+        </p:nvSpPr>
+        <p:spPr>
+          <a:xfrm>
+            <a:off x="274320" y="201168"/>
+            <a:ext cx="10881360" cy="457200"/>
+          </a:xfrm>
+          <a:prstGeom prst="rect">
+            <a:avLst/>
+          </a:prstGeom>
+          <a:noFill/>
+        </p:spPr>
+        <p:txBody>
+          <a:bodyPr wrap="square" lIns="27432" rIns="27432" tIns="9144" bIns="9144" anchor="ctr">
+            <a:spAutoFit/>
+          </a:bodyPr>
+          <a:lstStyle/>
+          <a:p>
+            <a:pPr algn="l">
+              <a:lnSpc>
+                <a:spcPct val="110000"/>
+              </a:lnSpc>
+            </a:pPr>
+            <a:r>
+              <a:rPr sz="2400" b="1">
+                <a:solidFill>
+                  <a:srgbClr val="141414"/>
+                </a:solidFill>
+                <a:latin typeface="微软雅黑"/>
+                <a:ea typeface="微软雅黑"/>
+                <a:cs typeface="微软雅黑"/>
+              </a:rPr>
+              <a:t>测试设备授权方式 · 一拖多场景下的供应商授权</a:t>
+            </a:r>
+          </a:p>
+        </p:txBody>
+      </p:sp>
+      <p:sp>
+        <p:nvSpPr>
+          <p:cNvPr id="3" name="TextBox 2"/>
+          <p:cNvSpPr txBox="1"/>
+          <p:nvPr/>
+        </p:nvSpPr>
+        <p:spPr>
+          <a:xfrm>
+            <a:off x="274320" y="658368"/>
+            <a:ext cx="11155680" cy="310896"/>
+          </a:xfrm>
+          <a:prstGeom prst="rect">
+            <a:avLst/>
+          </a:prstGeom>
+          <a:noFill/>
+        </p:spPr>
+        <p:txBody>
+          <a:bodyPr wrap="square" lIns="27432" rIns="27432" tIns="9144" bIns="9144" anchor="ctr">
+            <a:spAutoFit/>
+          </a:bodyPr>
+          <a:lstStyle/>
+          <a:p>
+            <a:pPr algn="l">
+              <a:lnSpc>
+                <a:spcPct val="110000"/>
+              </a:lnSpc>
+            </a:pPr>
+            <a:r>
+              <a:rPr sz="1050" b="0">
+                <a:solidFill>
+                  <a:srgbClr val="5C5C56"/>
+                </a:solidFill>
+                <a:latin typeface="微软雅黑"/>
+                <a:ea typeface="微软雅黑"/>
+                <a:cs typeface="微软雅黑"/>
+              </a:rPr>
+              <a:t>一对多时授权能否共享，取决于供应商的计费口径：按机器、按并发、按仪器序列号，还是按物理加密狗</a:t>
+            </a:r>
+          </a:p>
+        </p:txBody>
+      </p:sp>
+      <p:sp>
+        <p:nvSpPr>
+          <p:cNvPr id="4" name="Rectangle 3"/>
+          <p:cNvSpPr/>
+          <p:nvPr/>
+        </p:nvSpPr>
+        <p:spPr>
+          <a:xfrm>
+            <a:off x="274320" y="987552"/>
+            <a:ext cx="11640312" cy="25603"/>
+          </a:xfrm>
+          <a:prstGeom prst="rect">
+            <a:avLst/>
+          </a:prstGeom>
+          <a:solidFill>
+            <a:srgbClr val="8B0F1A"/>
+          </a:solidFill>
+          <a:ln>
+            <a:noFill/>
+          </a:ln>
+          <a:effectLst/>
+        </p:spPr>
+        <p:style>
+          <a:lnRef idx="1">
+            <a:schemeClr val="accent1"/>
+          </a:lnRef>
+          <a:fillRef idx="3">
+            <a:schemeClr val="accent1"/>
+          </a:fillRef>
+          <a:effectRef idx="2">
+            <a:schemeClr val="accent1"/>
+          </a:effectRef>
+          <a:fontRef idx="minor">
+            <a:schemeClr val="lt1"/>
+          </a:fontRef>
+        </p:style>
+        <p:txBody>
+          <a:bodyPr rtlCol="0" anchor="ctr" wrap="square"/>
+          <a:lstStyle/>
+          <a:p>
+            <a:pPr algn="ctr"/>
+          </a:p>
+        </p:txBody>
+      </p:sp>
+      <p:sp>
+        <p:nvSpPr>
+          <p:cNvPr id="5" name="TextBox 4"/>
+          <p:cNvSpPr txBox="1"/>
+          <p:nvPr/>
+        </p:nvSpPr>
+        <p:spPr>
+          <a:xfrm>
+            <a:off x="274320" y="1078992"/>
+            <a:ext cx="5577840" cy="237744"/>
+          </a:xfrm>
+          <a:prstGeom prst="rect">
+            <a:avLst/>
+          </a:prstGeom>
+          <a:noFill/>
+        </p:spPr>
+        <p:txBody>
+          <a:bodyPr wrap="square" lIns="27432" rIns="27432" tIns="9144" bIns="9144" anchor="ctr">
+            <a:spAutoFit/>
+          </a:bodyPr>
+          <a:lstStyle/>
+          <a:p>
+            <a:pPr algn="l">
+              <a:lnSpc>
+                <a:spcPct val="110000"/>
+              </a:lnSpc>
+            </a:pPr>
+            <a:r>
+              <a:rPr sz="1000" b="1">
+                <a:solidFill>
+                  <a:srgbClr val="8B0F1A"/>
+                </a:solidFill>
+                <a:latin typeface="微软雅黑"/>
+                <a:ea typeface="微软雅黑"/>
+                <a:cs typeface="微软雅黑"/>
+              </a:rPr>
+              <a:t>授权形态与一拖多下的处理</a:t>
+            </a:r>
+          </a:p>
+        </p:txBody>
+      </p:sp>
+      <p:sp>
+        <p:nvSpPr>
+          <p:cNvPr id="6" name="Rectangle 5"/>
+          <p:cNvSpPr/>
+          <p:nvPr/>
+        </p:nvSpPr>
+        <p:spPr>
+          <a:xfrm>
+            <a:off x="274320" y="1316736"/>
+            <a:ext cx="1417320" cy="292608"/>
+          </a:xfrm>
+          <a:prstGeom prst="rect">
+            <a:avLst/>
+          </a:prstGeom>
+          <a:solidFill>
+            <a:srgbClr val="E8F0F7"/>
+          </a:solidFill>
+          <a:ln w="8890">
+            <a:solidFill>
+              <a:srgbClr val="D9D6CD"/>
+            </a:solidFill>
+          </a:ln>
+          <a:effectLst/>
+        </p:spPr>
+        <p:style>
+          <a:lnRef idx="1">
+            <a:schemeClr val="accent1"/>
+          </a:lnRef>
+          <a:fillRef idx="3">
+            <a:schemeClr val="accent1"/>
+          </a:fillRef>
+          <a:effectRef idx="2">
+            <a:schemeClr val="accent1"/>
+          </a:effectRef>
+          <a:fontRef idx="minor">
+            <a:schemeClr val="lt1"/>
+          </a:fontRef>
+        </p:style>
+        <p:txBody>
+          <a:bodyPr rtlCol="0" anchor="ctr" wrap="square"/>
+          <a:lstStyle/>
+          <a:p>
+            <a:pPr algn="ctr"/>
+          </a:p>
+        </p:txBody>
+      </p:sp>
+      <p:sp>
+        <p:nvSpPr>
+          <p:cNvPr id="7" name="TextBox 6"/>
+          <p:cNvSpPr txBox="1"/>
+          <p:nvPr/>
+        </p:nvSpPr>
+        <p:spPr>
+          <a:xfrm>
+            <a:off x="329184" y="1335024"/>
+            <a:ext cx="1307592" cy="256032"/>
+          </a:xfrm>
+          <a:prstGeom prst="rect">
+            <a:avLst/>
+          </a:prstGeom>
+          <a:noFill/>
+        </p:spPr>
+        <p:txBody>
+          <a:bodyPr wrap="square" lIns="27432" rIns="27432" tIns="9144" bIns="9144" anchor="ctr">
+            <a:spAutoFit/>
+          </a:bodyPr>
+          <a:lstStyle/>
+          <a:p>
+            <a:pPr algn="l">
+              <a:lnSpc>
+                <a:spcPct val="110000"/>
+              </a:lnSpc>
+            </a:pPr>
+            <a:r>
+              <a:rPr sz="800" b="1">
+                <a:solidFill>
+                  <a:srgbClr val="0F4C81"/>
+                </a:solidFill>
+                <a:latin typeface="微软雅黑"/>
+                <a:ea typeface="微软雅黑"/>
+                <a:cs typeface="微软雅黑"/>
+              </a:rPr>
+              <a:t>授权形态</a:t>
+            </a:r>
+          </a:p>
+        </p:txBody>
+      </p:sp>
+      <p:sp>
+        <p:nvSpPr>
+          <p:cNvPr id="8" name="Rectangle 7"/>
+          <p:cNvSpPr/>
+          <p:nvPr/>
+        </p:nvSpPr>
+        <p:spPr>
+          <a:xfrm>
+            <a:off x="1691640" y="1316736"/>
+            <a:ext cx="1097280" cy="292608"/>
+          </a:xfrm>
+          <a:prstGeom prst="rect">
+            <a:avLst/>
+          </a:prstGeom>
+          <a:solidFill>
+            <a:srgbClr val="E8F0F7"/>
+          </a:solidFill>
+          <a:ln w="8890">
+            <a:solidFill>
+              <a:srgbClr val="D9D6CD"/>
+            </a:solidFill>
+          </a:ln>
+          <a:effectLst/>
+        </p:spPr>
+        <p:style>
+          <a:lnRef idx="1">
+            <a:schemeClr val="accent1"/>
+          </a:lnRef>
+          <a:fillRef idx="3">
+            <a:schemeClr val="accent1"/>
+          </a:fillRef>
+          <a:effectRef idx="2">
+            <a:schemeClr val="accent1"/>
+          </a:effectRef>
+          <a:fontRef idx="minor">
+            <a:schemeClr val="lt1"/>
+          </a:fontRef>
+        </p:style>
+        <p:txBody>
+          <a:bodyPr rtlCol="0" anchor="ctr" wrap="square"/>
+          <a:lstStyle/>
+          <a:p>
+            <a:pPr algn="ctr"/>
+          </a:p>
+        </p:txBody>
+      </p:sp>
+      <p:sp>
+        <p:nvSpPr>
+          <p:cNvPr id="9" name="TextBox 8"/>
+          <p:cNvSpPr txBox="1"/>
+          <p:nvPr/>
+        </p:nvSpPr>
+        <p:spPr>
+          <a:xfrm>
+            <a:off x="1746504" y="1335024"/>
+            <a:ext cx="987552" cy="256032"/>
+          </a:xfrm>
+          <a:prstGeom prst="rect">
+            <a:avLst/>
+          </a:prstGeom>
+          <a:noFill/>
+        </p:spPr>
+        <p:txBody>
+          <a:bodyPr wrap="square" lIns="27432" rIns="27432" tIns="9144" bIns="9144" anchor="ctr">
+            <a:spAutoFit/>
+          </a:bodyPr>
+          <a:lstStyle/>
+          <a:p>
+            <a:pPr algn="l">
+              <a:lnSpc>
+                <a:spcPct val="110000"/>
+              </a:lnSpc>
+            </a:pPr>
+            <a:r>
+              <a:rPr sz="800" b="1">
+                <a:solidFill>
+                  <a:srgbClr val="0F4C81"/>
+                </a:solidFill>
+                <a:latin typeface="微软雅黑"/>
+                <a:ea typeface="微软雅黑"/>
+                <a:cs typeface="微软雅黑"/>
+              </a:rPr>
+              <a:t>计费口径</a:t>
+            </a:r>
+          </a:p>
+        </p:txBody>
+      </p:sp>
+      <p:sp>
+        <p:nvSpPr>
+          <p:cNvPr id="10" name="Rectangle 9"/>
+          <p:cNvSpPr/>
+          <p:nvPr/>
+        </p:nvSpPr>
+        <p:spPr>
+          <a:xfrm>
+            <a:off x="2788920" y="1316736"/>
+            <a:ext cx="3108960" cy="292608"/>
+          </a:xfrm>
+          <a:prstGeom prst="rect">
+            <a:avLst/>
+          </a:prstGeom>
+          <a:solidFill>
+            <a:srgbClr val="E8F0F7"/>
+          </a:solidFill>
+          <a:ln w="8890">
+            <a:solidFill>
+              <a:srgbClr val="D9D6CD"/>
+            </a:solidFill>
+          </a:ln>
+          <a:effectLst/>
+        </p:spPr>
+        <p:style>
+          <a:lnRef idx="1">
+            <a:schemeClr val="accent1"/>
+          </a:lnRef>
+          <a:fillRef idx="3">
+            <a:schemeClr val="accent1"/>
+          </a:fillRef>
+          <a:effectRef idx="2">
+            <a:schemeClr val="accent1"/>
+          </a:effectRef>
+          <a:fontRef idx="minor">
+            <a:schemeClr val="lt1"/>
+          </a:fontRef>
+        </p:style>
+        <p:txBody>
+          <a:bodyPr rtlCol="0" anchor="ctr" wrap="square"/>
+          <a:lstStyle/>
+          <a:p>
+            <a:pPr algn="ctr"/>
+          </a:p>
+        </p:txBody>
+      </p:sp>
+      <p:sp>
+        <p:nvSpPr>
+          <p:cNvPr id="11" name="TextBox 10"/>
+          <p:cNvSpPr txBox="1"/>
+          <p:nvPr/>
+        </p:nvSpPr>
+        <p:spPr>
+          <a:xfrm>
+            <a:off x="2843784" y="1335024"/>
+            <a:ext cx="2999232" cy="256032"/>
+          </a:xfrm>
+          <a:prstGeom prst="rect">
+            <a:avLst/>
+          </a:prstGeom>
+          <a:noFill/>
+        </p:spPr>
+        <p:txBody>
+          <a:bodyPr wrap="square" lIns="27432" rIns="27432" tIns="9144" bIns="9144" anchor="ctr">
+            <a:spAutoFit/>
+          </a:bodyPr>
+          <a:lstStyle/>
+          <a:p>
+            <a:pPr algn="l">
+              <a:lnSpc>
+                <a:spcPct val="110000"/>
+              </a:lnSpc>
+            </a:pPr>
+            <a:r>
+              <a:rPr sz="800" b="1">
+                <a:solidFill>
+                  <a:srgbClr val="0F4C81"/>
+                </a:solidFill>
+                <a:latin typeface="微软雅黑"/>
+                <a:ea typeface="微软雅黑"/>
+                <a:cs typeface="微软雅黑"/>
+              </a:rPr>
+              <a:t>一拖多下的处理</a:t>
+            </a:r>
+          </a:p>
+        </p:txBody>
+      </p:sp>
+      <p:sp>
+        <p:nvSpPr>
+          <p:cNvPr id="12" name="Rectangle 11"/>
+          <p:cNvSpPr/>
+          <p:nvPr/>
+        </p:nvSpPr>
+        <p:spPr>
+          <a:xfrm>
+            <a:off x="274320" y="1609344"/>
+            <a:ext cx="1417320" cy="566928"/>
+          </a:xfrm>
+          <a:prstGeom prst="rect">
+            <a:avLst/>
+          </a:prstGeom>
+          <a:solidFill>
+            <a:srgbClr val="FFFFFF"/>
+          </a:solidFill>
+          <a:ln w="8890">
+            <a:solidFill>
+              <a:srgbClr val="D9D6CD"/>
+            </a:solidFill>
+          </a:ln>
+          <a:effectLst/>
+        </p:spPr>
+        <p:style>
+          <a:lnRef idx="1">
+            <a:schemeClr val="accent1"/>
+          </a:lnRef>
+          <a:fillRef idx="3">
+            <a:schemeClr val="accent1"/>
+          </a:fillRef>
+          <a:effectRef idx="2">
+            <a:schemeClr val="accent1"/>
+          </a:effectRef>
+          <a:fontRef idx="minor">
+            <a:schemeClr val="lt1"/>
+          </a:fontRef>
+        </p:style>
+        <p:txBody>
+          <a:bodyPr rtlCol="0" anchor="ctr" wrap="square"/>
+          <a:lstStyle/>
+          <a:p>
+            <a:pPr algn="ctr"/>
+          </a:p>
+        </p:txBody>
+      </p:sp>
+      <p:sp>
+        <p:nvSpPr>
+          <p:cNvPr id="13" name="TextBox 12"/>
+          <p:cNvSpPr txBox="1"/>
+          <p:nvPr/>
+        </p:nvSpPr>
+        <p:spPr>
+          <a:xfrm>
+            <a:off x="329184" y="1627632"/>
+            <a:ext cx="1307592" cy="530352"/>
+          </a:xfrm>
+          <a:prstGeom prst="rect">
+            <a:avLst/>
+          </a:prstGeom>
+          <a:noFill/>
+        </p:spPr>
+        <p:txBody>
+          <a:bodyPr wrap="square" lIns="27432" rIns="27432" tIns="9144" bIns="9144" anchor="ctr">
+            <a:spAutoFit/>
+          </a:bodyPr>
+          <a:lstStyle/>
+          <a:p>
+            <a:pPr algn="l">
+              <a:lnSpc>
+                <a:spcPct val="110000"/>
+              </a:lnSpc>
+            </a:pPr>
+            <a:r>
+              <a:rPr sz="750" b="0">
+                <a:solidFill>
+                  <a:srgbClr val="141414"/>
+                </a:solidFill>
+                <a:latin typeface="微软雅黑"/>
+                <a:ea typeface="微软雅黑"/>
+                <a:cs typeface="微软雅黑"/>
+              </a:rPr>
+              <a:t>节点锁定（绑主机 / MAC）</a:t>
+            </a:r>
+          </a:p>
+        </p:txBody>
+      </p:sp>
+      <p:sp>
+        <p:nvSpPr>
+          <p:cNvPr id="14" name="Rectangle 13"/>
+          <p:cNvSpPr/>
+          <p:nvPr/>
+        </p:nvSpPr>
+        <p:spPr>
+          <a:xfrm>
+            <a:off x="1691640" y="1609344"/>
+            <a:ext cx="1097280" cy="566928"/>
+          </a:xfrm>
+          <a:prstGeom prst="rect">
+            <a:avLst/>
+          </a:prstGeom>
+          <a:solidFill>
+            <a:srgbClr val="FFFFFF"/>
+          </a:solidFill>
+          <a:ln w="8890">
+            <a:solidFill>
+              <a:srgbClr val="D9D6CD"/>
+            </a:solidFill>
+          </a:ln>
+          <a:effectLst/>
+        </p:spPr>
+        <p:style>
+          <a:lnRef idx="1">
+            <a:schemeClr val="accent1"/>
+          </a:lnRef>
+          <a:fillRef idx="3">
+            <a:schemeClr val="accent1"/>
+          </a:fillRef>
+          <a:effectRef idx="2">
+            <a:schemeClr val="accent1"/>
+          </a:effectRef>
+          <a:fontRef idx="minor">
+            <a:schemeClr val="lt1"/>
+          </a:fontRef>
+        </p:style>
+        <p:txBody>
+          <a:bodyPr rtlCol="0" anchor="ctr" wrap="square"/>
+          <a:lstStyle/>
+          <a:p>
+            <a:pPr algn="ctr"/>
+          </a:p>
+        </p:txBody>
+      </p:sp>
+      <p:sp>
+        <p:nvSpPr>
+          <p:cNvPr id="15" name="TextBox 14"/>
+          <p:cNvSpPr txBox="1"/>
+          <p:nvPr/>
+        </p:nvSpPr>
+        <p:spPr>
+          <a:xfrm>
+            <a:off x="1746504" y="1627632"/>
+            <a:ext cx="987552" cy="530352"/>
+          </a:xfrm>
+          <a:prstGeom prst="rect">
+            <a:avLst/>
+          </a:prstGeom>
+          <a:noFill/>
+        </p:spPr>
+        <p:txBody>
+          <a:bodyPr wrap="square" lIns="27432" rIns="27432" tIns="9144" bIns="9144" anchor="ctr">
+            <a:spAutoFit/>
+          </a:bodyPr>
+          <a:lstStyle/>
+          <a:p>
+            <a:pPr algn="l">
+              <a:lnSpc>
+                <a:spcPct val="110000"/>
+              </a:lnSpc>
+            </a:pPr>
+            <a:r>
+              <a:rPr sz="750" b="0">
+                <a:solidFill>
+                  <a:srgbClr val="141414"/>
+                </a:solidFill>
+                <a:latin typeface="微软雅黑"/>
+                <a:ea typeface="微软雅黑"/>
+                <a:cs typeface="微软雅黑"/>
+              </a:rPr>
+              <a:t>按控制机</a:t>
+            </a:r>
+          </a:p>
+        </p:txBody>
+      </p:sp>
+      <p:sp>
+        <p:nvSpPr>
+          <p:cNvPr id="16" name="Rectangle 15"/>
+          <p:cNvSpPr/>
+          <p:nvPr/>
+        </p:nvSpPr>
+        <p:spPr>
+          <a:xfrm>
+            <a:off x="2788920" y="1609344"/>
+            <a:ext cx="3108960" cy="566928"/>
+          </a:xfrm>
+          <a:prstGeom prst="rect">
+            <a:avLst/>
+          </a:prstGeom>
+          <a:solidFill>
+            <a:srgbClr val="FFFFFF"/>
+          </a:solidFill>
+          <a:ln w="8890">
+            <a:solidFill>
+              <a:srgbClr val="D9D6CD"/>
+            </a:solidFill>
+          </a:ln>
+          <a:effectLst/>
+        </p:spPr>
+        <p:style>
+          <a:lnRef idx="1">
+            <a:schemeClr val="accent1"/>
+          </a:lnRef>
+          <a:fillRef idx="3">
+            <a:schemeClr val="accent1"/>
+          </a:fillRef>
+          <a:effectRef idx="2">
+            <a:schemeClr val="accent1"/>
+          </a:effectRef>
+          <a:fontRef idx="minor">
+            <a:schemeClr val="lt1"/>
+          </a:fontRef>
+        </p:style>
+        <p:txBody>
+          <a:bodyPr rtlCol="0" anchor="ctr" wrap="square"/>
+          <a:lstStyle/>
+          <a:p>
+            <a:pPr algn="ctr"/>
+          </a:p>
+        </p:txBody>
+      </p:sp>
+      <p:sp>
+        <p:nvSpPr>
+          <p:cNvPr id="17" name="TextBox 16"/>
+          <p:cNvSpPr txBox="1"/>
+          <p:nvPr/>
+        </p:nvSpPr>
+        <p:spPr>
+          <a:xfrm>
+            <a:off x="2843784" y="1627632"/>
+            <a:ext cx="2999232" cy="530352"/>
+          </a:xfrm>
+          <a:prstGeom prst="rect">
+            <a:avLst/>
+          </a:prstGeom>
+          <a:noFill/>
+        </p:spPr>
+        <p:txBody>
+          <a:bodyPr wrap="square" lIns="27432" rIns="27432" tIns="9144" bIns="9144" anchor="ctr">
+            <a:spAutoFit/>
+          </a:bodyPr>
+          <a:lstStyle/>
+          <a:p>
+            <a:pPr algn="l">
+              <a:lnSpc>
+                <a:spcPct val="110000"/>
+              </a:lnSpc>
+            </a:pPr>
+            <a:r>
+              <a:rPr sz="750" b="0">
+                <a:solidFill>
+                  <a:srgbClr val="141414"/>
+                </a:solidFill>
+                <a:latin typeface="微软雅黑"/>
+                <a:ea typeface="微软雅黑"/>
+                <a:cs typeface="微软雅黑"/>
+              </a:rPr>
+              <a:t>集中部署在一台设备服务机上即可共享；分散到多台工控机则按机器数采购</a:t>
+            </a:r>
+          </a:p>
+        </p:txBody>
+      </p:sp>
+      <p:sp>
+        <p:nvSpPr>
+          <p:cNvPr id="18" name="Rectangle 17"/>
+          <p:cNvSpPr/>
+          <p:nvPr/>
+        </p:nvSpPr>
+        <p:spPr>
+          <a:xfrm>
+            <a:off x="274320" y="2176272"/>
+            <a:ext cx="1417320" cy="566928"/>
+          </a:xfrm>
+          <a:prstGeom prst="rect">
+            <a:avLst/>
+          </a:prstGeom>
+          <a:solidFill>
+            <a:srgbClr val="FFFFFF"/>
+          </a:solidFill>
+          <a:ln w="8890">
+            <a:solidFill>
+              <a:srgbClr val="D9D6CD"/>
+            </a:solidFill>
+          </a:ln>
+          <a:effectLst/>
+        </p:spPr>
+        <p:style>
+          <a:lnRef idx="1">
+            <a:schemeClr val="accent1"/>
+          </a:lnRef>
+          <a:fillRef idx="3">
+            <a:schemeClr val="accent1"/>
+          </a:fillRef>
+          <a:effectRef idx="2">
+            <a:schemeClr val="accent1"/>
+          </a:effectRef>
+          <a:fontRef idx="minor">
+            <a:schemeClr val="lt1"/>
+          </a:fontRef>
+        </p:style>
+        <p:txBody>
+          <a:bodyPr rtlCol="0" anchor="ctr" wrap="square"/>
+          <a:lstStyle/>
+          <a:p>
+            <a:pPr algn="ctr"/>
+          </a:p>
+        </p:txBody>
+      </p:sp>
+      <p:sp>
+        <p:nvSpPr>
+          <p:cNvPr id="19" name="TextBox 18"/>
+          <p:cNvSpPr txBox="1"/>
+          <p:nvPr/>
+        </p:nvSpPr>
+        <p:spPr>
+          <a:xfrm>
+            <a:off x="329184" y="2194560"/>
+            <a:ext cx="1307592" cy="530352"/>
+          </a:xfrm>
+          <a:prstGeom prst="rect">
+            <a:avLst/>
+          </a:prstGeom>
+          <a:noFill/>
+        </p:spPr>
+        <p:txBody>
+          <a:bodyPr wrap="square" lIns="27432" rIns="27432" tIns="9144" bIns="9144" anchor="ctr">
+            <a:spAutoFit/>
+          </a:bodyPr>
+          <a:lstStyle/>
+          <a:p>
+            <a:pPr algn="l">
+              <a:lnSpc>
+                <a:spcPct val="110000"/>
+              </a:lnSpc>
+            </a:pPr>
+            <a:r>
+              <a:rPr sz="750" b="0">
+                <a:solidFill>
+                  <a:srgbClr val="141414"/>
+                </a:solidFill>
+                <a:latin typeface="微软雅黑"/>
+                <a:ea typeface="微软雅黑"/>
+                <a:cs typeface="微软雅黑"/>
+              </a:rPr>
+              <a:t>浮动许可（并发令牌）</a:t>
+            </a:r>
+          </a:p>
+        </p:txBody>
+      </p:sp>
+      <p:sp>
+        <p:nvSpPr>
+          <p:cNvPr id="20" name="Rectangle 19"/>
+          <p:cNvSpPr/>
+          <p:nvPr/>
+        </p:nvSpPr>
+        <p:spPr>
+          <a:xfrm>
+            <a:off x="1691640" y="2176272"/>
+            <a:ext cx="1097280" cy="566928"/>
+          </a:xfrm>
+          <a:prstGeom prst="rect">
+            <a:avLst/>
+          </a:prstGeom>
+          <a:solidFill>
+            <a:srgbClr val="FFFFFF"/>
+          </a:solidFill>
+          <a:ln w="8890">
+            <a:solidFill>
+              <a:srgbClr val="D9D6CD"/>
+            </a:solidFill>
+          </a:ln>
+          <a:effectLst/>
+        </p:spPr>
+        <p:style>
+          <a:lnRef idx="1">
+            <a:schemeClr val="accent1"/>
+          </a:lnRef>
+          <a:fillRef idx="3">
+            <a:schemeClr val="accent1"/>
+          </a:fillRef>
+          <a:effectRef idx="2">
+            <a:schemeClr val="accent1"/>
+          </a:effectRef>
+          <a:fontRef idx="minor">
+            <a:schemeClr val="lt1"/>
+          </a:fontRef>
+        </p:style>
+        <p:txBody>
+          <a:bodyPr rtlCol="0" anchor="ctr" wrap="square"/>
+          <a:lstStyle/>
+          <a:p>
+            <a:pPr algn="ctr"/>
+          </a:p>
+        </p:txBody>
+      </p:sp>
+      <p:sp>
+        <p:nvSpPr>
+          <p:cNvPr id="21" name="TextBox 20"/>
+          <p:cNvSpPr txBox="1"/>
+          <p:nvPr/>
+        </p:nvSpPr>
+        <p:spPr>
+          <a:xfrm>
+            <a:off x="1746504" y="2194560"/>
+            <a:ext cx="987552" cy="530352"/>
+          </a:xfrm>
+          <a:prstGeom prst="rect">
+            <a:avLst/>
+          </a:prstGeom>
+          <a:noFill/>
+        </p:spPr>
+        <p:txBody>
+          <a:bodyPr wrap="square" lIns="27432" rIns="27432" tIns="9144" bIns="9144" anchor="ctr">
+            <a:spAutoFit/>
+          </a:bodyPr>
+          <a:lstStyle/>
+          <a:p>
+            <a:pPr algn="l">
+              <a:lnSpc>
+                <a:spcPct val="110000"/>
+              </a:lnSpc>
+            </a:pPr>
+            <a:r>
+              <a:rPr sz="750" b="0">
+                <a:solidFill>
+                  <a:srgbClr val="141414"/>
+                </a:solidFill>
+                <a:latin typeface="微软雅黑"/>
+                <a:ea typeface="微软雅黑"/>
+                <a:cs typeface="微软雅黑"/>
+              </a:rPr>
+              <a:t>按并发实例</a:t>
+            </a:r>
+          </a:p>
+        </p:txBody>
+      </p:sp>
+      <p:sp>
+        <p:nvSpPr>
+          <p:cNvPr id="22" name="Rectangle 21"/>
+          <p:cNvSpPr/>
+          <p:nvPr/>
+        </p:nvSpPr>
+        <p:spPr>
+          <a:xfrm>
+            <a:off x="2788920" y="2176272"/>
+            <a:ext cx="3108960" cy="566928"/>
+          </a:xfrm>
+          <a:prstGeom prst="rect">
+            <a:avLst/>
+          </a:prstGeom>
+          <a:solidFill>
+            <a:srgbClr val="FFFFFF"/>
+          </a:solidFill>
+          <a:ln w="8890">
+            <a:solidFill>
+              <a:srgbClr val="D9D6CD"/>
+            </a:solidFill>
+          </a:ln>
+          <a:effectLst/>
+        </p:spPr>
+        <p:style>
+          <a:lnRef idx="1">
+            <a:schemeClr val="accent1"/>
+          </a:lnRef>
+          <a:fillRef idx="3">
+            <a:schemeClr val="accent1"/>
+          </a:fillRef>
+          <a:effectRef idx="2">
+            <a:schemeClr val="accent1"/>
+          </a:effectRef>
+          <a:fontRef idx="minor">
+            <a:schemeClr val="lt1"/>
+          </a:fontRef>
+        </p:style>
+        <p:txBody>
+          <a:bodyPr rtlCol="0" anchor="ctr" wrap="square"/>
+          <a:lstStyle/>
+          <a:p>
+            <a:pPr algn="ctr"/>
+          </a:p>
+        </p:txBody>
+      </p:sp>
+      <p:sp>
+        <p:nvSpPr>
+          <p:cNvPr id="23" name="TextBox 22"/>
+          <p:cNvSpPr txBox="1"/>
+          <p:nvPr/>
+        </p:nvSpPr>
+        <p:spPr>
+          <a:xfrm>
+            <a:off x="2843784" y="2194560"/>
+            <a:ext cx="2999232" cy="530352"/>
+          </a:xfrm>
+          <a:prstGeom prst="rect">
+            <a:avLst/>
+          </a:prstGeom>
+          <a:noFill/>
+        </p:spPr>
+        <p:txBody>
+          <a:bodyPr wrap="square" lIns="27432" rIns="27432" tIns="9144" bIns="9144" anchor="ctr">
+            <a:spAutoFit/>
+          </a:bodyPr>
+          <a:lstStyle/>
+          <a:p>
+            <a:pPr algn="l">
+              <a:lnSpc>
+                <a:spcPct val="110000"/>
+              </a:lnSpc>
+            </a:pPr>
+            <a:r>
+              <a:rPr sz="750" b="0">
+                <a:solidFill>
+                  <a:srgbClr val="141414"/>
+                </a:solidFill>
+                <a:latin typeface="微软雅黑"/>
+                <a:ea typeface="微软雅黑"/>
+                <a:cs typeface="微软雅黑"/>
+              </a:rPr>
+              <a:t>最适合一拖多：按同时执行的台数占用，排队即可复用少量许可</a:t>
+            </a:r>
+          </a:p>
+        </p:txBody>
+      </p:sp>
+      <p:sp>
+        <p:nvSpPr>
+          <p:cNvPr id="24" name="Rectangle 23"/>
+          <p:cNvSpPr/>
+          <p:nvPr/>
+        </p:nvSpPr>
+        <p:spPr>
+          <a:xfrm>
+            <a:off x="274320" y="2743200"/>
+            <a:ext cx="1417320" cy="566928"/>
+          </a:xfrm>
+          <a:prstGeom prst="rect">
+            <a:avLst/>
+          </a:prstGeom>
+          <a:solidFill>
+            <a:srgbClr val="FFFFFF"/>
+          </a:solidFill>
+          <a:ln w="8890">
+            <a:solidFill>
+              <a:srgbClr val="D9D6CD"/>
+            </a:solidFill>
+          </a:ln>
+          <a:effectLst/>
+        </p:spPr>
+        <p:style>
+          <a:lnRef idx="1">
+            <a:schemeClr val="accent1"/>
+          </a:lnRef>
+          <a:fillRef idx="3">
+            <a:schemeClr val="accent1"/>
+          </a:fillRef>
+          <a:effectRef idx="2">
+            <a:schemeClr val="accent1"/>
+          </a:effectRef>
+          <a:fontRef idx="minor">
+            <a:schemeClr val="lt1"/>
+          </a:fontRef>
+        </p:style>
+        <p:txBody>
+          <a:bodyPr rtlCol="0" anchor="ctr" wrap="square"/>
+          <a:lstStyle/>
+          <a:p>
+            <a:pPr algn="ctr"/>
+          </a:p>
+        </p:txBody>
+      </p:sp>
+      <p:sp>
+        <p:nvSpPr>
+          <p:cNvPr id="25" name="TextBox 24"/>
+          <p:cNvSpPr txBox="1"/>
+          <p:nvPr/>
+        </p:nvSpPr>
+        <p:spPr>
+          <a:xfrm>
+            <a:off x="329184" y="2761488"/>
+            <a:ext cx="1307592" cy="530352"/>
+          </a:xfrm>
+          <a:prstGeom prst="rect">
+            <a:avLst/>
+          </a:prstGeom>
+          <a:noFill/>
+        </p:spPr>
+        <p:txBody>
+          <a:bodyPr wrap="square" lIns="27432" rIns="27432" tIns="9144" bIns="9144" anchor="ctr">
+            <a:spAutoFit/>
+          </a:bodyPr>
+          <a:lstStyle/>
+          <a:p>
+            <a:pPr algn="l">
+              <a:lnSpc>
+                <a:spcPct val="110000"/>
+              </a:lnSpc>
+            </a:pPr>
+            <a:r>
+              <a:rPr sz="750" b="0">
+                <a:solidFill>
+                  <a:srgbClr val="141414"/>
+                </a:solidFill>
+                <a:latin typeface="微软雅黑"/>
+                <a:ea typeface="微软雅黑"/>
+                <a:cs typeface="微软雅黑"/>
+              </a:rPr>
+              <a:t>仪器序列号绑定</a:t>
+            </a:r>
+          </a:p>
+        </p:txBody>
+      </p:sp>
+      <p:sp>
+        <p:nvSpPr>
+          <p:cNvPr id="26" name="Rectangle 25"/>
+          <p:cNvSpPr/>
+          <p:nvPr/>
+        </p:nvSpPr>
+        <p:spPr>
+          <a:xfrm>
+            <a:off x="1691640" y="2743200"/>
+            <a:ext cx="1097280" cy="566928"/>
+          </a:xfrm>
+          <a:prstGeom prst="rect">
+            <a:avLst/>
+          </a:prstGeom>
+          <a:solidFill>
+            <a:srgbClr val="FFFFFF"/>
+          </a:solidFill>
+          <a:ln w="8890">
+            <a:solidFill>
+              <a:srgbClr val="D9D6CD"/>
+            </a:solidFill>
+          </a:ln>
+          <a:effectLst/>
+        </p:spPr>
+        <p:style>
+          <a:lnRef idx="1">
+            <a:schemeClr val="accent1"/>
+          </a:lnRef>
+          <a:fillRef idx="3">
+            <a:schemeClr val="accent1"/>
+          </a:fillRef>
+          <a:effectRef idx="2">
+            <a:schemeClr val="accent1"/>
+          </a:effectRef>
+          <a:fontRef idx="minor">
+            <a:schemeClr val="lt1"/>
+          </a:fontRef>
+        </p:style>
+        <p:txBody>
+          <a:bodyPr rtlCol="0" anchor="ctr" wrap="square"/>
+          <a:lstStyle/>
+          <a:p>
+            <a:pPr algn="ctr"/>
+          </a:p>
+        </p:txBody>
+      </p:sp>
+      <p:sp>
+        <p:nvSpPr>
+          <p:cNvPr id="27" name="TextBox 26"/>
+          <p:cNvSpPr txBox="1"/>
+          <p:nvPr/>
+        </p:nvSpPr>
+        <p:spPr>
+          <a:xfrm>
+            <a:off x="1746504" y="2761488"/>
+            <a:ext cx="987552" cy="530352"/>
+          </a:xfrm>
+          <a:prstGeom prst="rect">
+            <a:avLst/>
+          </a:prstGeom>
+          <a:noFill/>
+        </p:spPr>
+        <p:txBody>
+          <a:bodyPr wrap="square" lIns="27432" rIns="27432" tIns="9144" bIns="9144" anchor="ctr">
+            <a:spAutoFit/>
+          </a:bodyPr>
+          <a:lstStyle/>
+          <a:p>
+            <a:pPr algn="l">
+              <a:lnSpc>
+                <a:spcPct val="110000"/>
+              </a:lnSpc>
+            </a:pPr>
+            <a:r>
+              <a:rPr sz="750" b="0">
+                <a:solidFill>
+                  <a:srgbClr val="141414"/>
+                </a:solidFill>
+                <a:latin typeface="微软雅黑"/>
+                <a:ea typeface="微软雅黑"/>
+                <a:cs typeface="微软雅黑"/>
+              </a:rPr>
+              <a:t>按仪器台数</a:t>
+            </a:r>
+          </a:p>
+        </p:txBody>
+      </p:sp>
+      <p:sp>
+        <p:nvSpPr>
+          <p:cNvPr id="28" name="Rectangle 27"/>
+          <p:cNvSpPr/>
+          <p:nvPr/>
+        </p:nvSpPr>
+        <p:spPr>
+          <a:xfrm>
+            <a:off x="2788920" y="2743200"/>
+            <a:ext cx="3108960" cy="566928"/>
+          </a:xfrm>
+          <a:prstGeom prst="rect">
+            <a:avLst/>
+          </a:prstGeom>
+          <a:solidFill>
+            <a:srgbClr val="FFFFFF"/>
+          </a:solidFill>
+          <a:ln w="8890">
+            <a:solidFill>
+              <a:srgbClr val="D9D6CD"/>
+            </a:solidFill>
+          </a:ln>
+          <a:effectLst/>
+        </p:spPr>
+        <p:style>
+          <a:lnRef idx="1">
+            <a:schemeClr val="accent1"/>
+          </a:lnRef>
+          <a:fillRef idx="3">
+            <a:schemeClr val="accent1"/>
+          </a:fillRef>
+          <a:effectRef idx="2">
+            <a:schemeClr val="accent1"/>
+          </a:effectRef>
+          <a:fontRef idx="minor">
+            <a:schemeClr val="lt1"/>
+          </a:fontRef>
+        </p:style>
+        <p:txBody>
+          <a:bodyPr rtlCol="0" anchor="ctr" wrap="square"/>
+          <a:lstStyle/>
+          <a:p>
+            <a:pPr algn="ctr"/>
+          </a:p>
+        </p:txBody>
+      </p:sp>
+      <p:sp>
+        <p:nvSpPr>
+          <p:cNvPr id="29" name="TextBox 28"/>
+          <p:cNvSpPr txBox="1"/>
+          <p:nvPr/>
+        </p:nvSpPr>
+        <p:spPr>
+          <a:xfrm>
+            <a:off x="2843784" y="2761488"/>
+            <a:ext cx="2999232" cy="530352"/>
+          </a:xfrm>
+          <a:prstGeom prst="rect">
+            <a:avLst/>
+          </a:prstGeom>
+          <a:noFill/>
+        </p:spPr>
+        <p:txBody>
+          <a:bodyPr wrap="square" lIns="27432" rIns="27432" tIns="9144" bIns="9144" anchor="ctr">
+            <a:spAutoFit/>
+          </a:bodyPr>
+          <a:lstStyle/>
+          <a:p>
+            <a:pPr algn="l">
+              <a:lnSpc>
+                <a:spcPct val="110000"/>
+              </a:lnSpc>
+            </a:pPr>
+            <a:r>
+              <a:rPr sz="750" b="0">
+                <a:solidFill>
+                  <a:srgbClr val="141414"/>
+                </a:solidFill>
+                <a:latin typeface="微软雅黑"/>
+                <a:ea typeface="微软雅黑"/>
+                <a:cs typeface="微软雅黑"/>
+              </a:rPr>
+              <a:t>不可共享，几台仪器几份；一拖多采购需按最大台数申报</a:t>
+            </a:r>
+          </a:p>
+        </p:txBody>
+      </p:sp>
+      <p:sp>
+        <p:nvSpPr>
+          <p:cNvPr id="30" name="Rectangle 29"/>
+          <p:cNvSpPr/>
+          <p:nvPr/>
+        </p:nvSpPr>
+        <p:spPr>
+          <a:xfrm>
+            <a:off x="274320" y="3310128"/>
+            <a:ext cx="1417320" cy="566928"/>
+          </a:xfrm>
+          <a:prstGeom prst="rect">
+            <a:avLst/>
+          </a:prstGeom>
+          <a:solidFill>
+            <a:srgbClr val="FFFFFF"/>
+          </a:solidFill>
+          <a:ln w="8890">
+            <a:solidFill>
+              <a:srgbClr val="D9D6CD"/>
+            </a:solidFill>
+          </a:ln>
+          <a:effectLst/>
+        </p:spPr>
+        <p:style>
+          <a:lnRef idx="1">
+            <a:schemeClr val="accent1"/>
+          </a:lnRef>
+          <a:fillRef idx="3">
+            <a:schemeClr val="accent1"/>
+          </a:fillRef>
+          <a:effectRef idx="2">
+            <a:schemeClr val="accent1"/>
+          </a:effectRef>
+          <a:fontRef idx="minor">
+            <a:schemeClr val="lt1"/>
+          </a:fontRef>
+        </p:style>
+        <p:txBody>
+          <a:bodyPr rtlCol="0" anchor="ctr" wrap="square"/>
+          <a:lstStyle/>
+          <a:p>
+            <a:pPr algn="ctr"/>
+          </a:p>
+        </p:txBody>
+      </p:sp>
+      <p:sp>
+        <p:nvSpPr>
+          <p:cNvPr id="31" name="TextBox 30"/>
+          <p:cNvSpPr txBox="1"/>
+          <p:nvPr/>
+        </p:nvSpPr>
+        <p:spPr>
+          <a:xfrm>
+            <a:off x="329184" y="3328416"/>
+            <a:ext cx="1307592" cy="530352"/>
+          </a:xfrm>
+          <a:prstGeom prst="rect">
+            <a:avLst/>
+          </a:prstGeom>
+          <a:noFill/>
+        </p:spPr>
+        <p:txBody>
+          <a:bodyPr wrap="square" lIns="27432" rIns="27432" tIns="9144" bIns="9144" anchor="ctr">
+            <a:spAutoFit/>
+          </a:bodyPr>
+          <a:lstStyle/>
+          <a:p>
+            <a:pPr algn="l">
+              <a:lnSpc>
+                <a:spcPct val="110000"/>
+              </a:lnSpc>
+            </a:pPr>
+            <a:r>
+              <a:rPr sz="750" b="0">
+                <a:solidFill>
+                  <a:srgbClr val="141414"/>
+                </a:solidFill>
+                <a:latin typeface="微软雅黑"/>
+                <a:ea typeface="微软雅黑"/>
+                <a:cs typeface="微软雅黑"/>
+              </a:rPr>
+              <a:t>加密狗（USB Key）</a:t>
+            </a:r>
+          </a:p>
+        </p:txBody>
+      </p:sp>
+      <p:sp>
+        <p:nvSpPr>
+          <p:cNvPr id="32" name="Rectangle 31"/>
+          <p:cNvSpPr/>
+          <p:nvPr/>
+        </p:nvSpPr>
+        <p:spPr>
+          <a:xfrm>
+            <a:off x="1691640" y="3310128"/>
+            <a:ext cx="1097280" cy="566928"/>
+          </a:xfrm>
+          <a:prstGeom prst="rect">
+            <a:avLst/>
+          </a:prstGeom>
+          <a:solidFill>
+            <a:srgbClr val="FFFFFF"/>
+          </a:solidFill>
+          <a:ln w="8890">
+            <a:solidFill>
+              <a:srgbClr val="D9D6CD"/>
+            </a:solidFill>
+          </a:ln>
+          <a:effectLst/>
+        </p:spPr>
+        <p:style>
+          <a:lnRef idx="1">
+            <a:schemeClr val="accent1"/>
+          </a:lnRef>
+          <a:fillRef idx="3">
+            <a:schemeClr val="accent1"/>
+          </a:fillRef>
+          <a:effectRef idx="2">
+            <a:schemeClr val="accent1"/>
+          </a:effectRef>
+          <a:fontRef idx="minor">
+            <a:schemeClr val="lt1"/>
+          </a:fontRef>
+        </p:style>
+        <p:txBody>
+          <a:bodyPr rtlCol="0" anchor="ctr" wrap="square"/>
+          <a:lstStyle/>
+          <a:p>
+            <a:pPr algn="ctr"/>
+          </a:p>
+        </p:txBody>
+      </p:sp>
+      <p:sp>
+        <p:nvSpPr>
+          <p:cNvPr id="33" name="TextBox 32"/>
+          <p:cNvSpPr txBox="1"/>
+          <p:nvPr/>
+        </p:nvSpPr>
+        <p:spPr>
+          <a:xfrm>
+            <a:off x="1746504" y="3328416"/>
+            <a:ext cx="987552" cy="530352"/>
+          </a:xfrm>
+          <a:prstGeom prst="rect">
+            <a:avLst/>
+          </a:prstGeom>
+          <a:noFill/>
+        </p:spPr>
+        <p:txBody>
+          <a:bodyPr wrap="square" lIns="27432" rIns="27432" tIns="9144" bIns="9144" anchor="ctr">
+            <a:spAutoFit/>
+          </a:bodyPr>
+          <a:lstStyle/>
+          <a:p>
+            <a:pPr algn="l">
+              <a:lnSpc>
+                <a:spcPct val="110000"/>
+              </a:lnSpc>
+            </a:pPr>
+            <a:r>
+              <a:rPr sz="750" b="0">
+                <a:solidFill>
+                  <a:srgbClr val="141414"/>
+                </a:solidFill>
+                <a:latin typeface="微软雅黑"/>
+                <a:ea typeface="微软雅黑"/>
+                <a:cs typeface="微软雅黑"/>
+              </a:rPr>
+              <a:t>按物理狗数</a:t>
+            </a:r>
+          </a:p>
+        </p:txBody>
+      </p:sp>
+      <p:sp>
+        <p:nvSpPr>
+          <p:cNvPr id="34" name="Rectangle 33"/>
+          <p:cNvSpPr/>
+          <p:nvPr/>
+        </p:nvSpPr>
+        <p:spPr>
+          <a:xfrm>
+            <a:off x="2788920" y="3310128"/>
+            <a:ext cx="3108960" cy="566928"/>
+          </a:xfrm>
+          <a:prstGeom prst="rect">
+            <a:avLst/>
+          </a:prstGeom>
+          <a:solidFill>
+            <a:srgbClr val="FFFFFF"/>
+          </a:solidFill>
+          <a:ln w="8890">
+            <a:solidFill>
+              <a:srgbClr val="D9D6CD"/>
+            </a:solidFill>
+          </a:ln>
+          <a:effectLst/>
+        </p:spPr>
+        <p:style>
+          <a:lnRef idx="1">
+            <a:schemeClr val="accent1"/>
+          </a:lnRef>
+          <a:fillRef idx="3">
+            <a:schemeClr val="accent1"/>
+          </a:fillRef>
+          <a:effectRef idx="2">
+            <a:schemeClr val="accent1"/>
+          </a:effectRef>
+          <a:fontRef idx="minor">
+            <a:schemeClr val="lt1"/>
+          </a:fontRef>
+        </p:style>
+        <p:txBody>
+          <a:bodyPr rtlCol="0" anchor="ctr" wrap="square"/>
+          <a:lstStyle/>
+          <a:p>
+            <a:pPr algn="ctr"/>
+          </a:p>
+        </p:txBody>
+      </p:sp>
+      <p:sp>
+        <p:nvSpPr>
+          <p:cNvPr id="35" name="TextBox 34"/>
+          <p:cNvSpPr txBox="1"/>
+          <p:nvPr/>
+        </p:nvSpPr>
+        <p:spPr>
+          <a:xfrm>
+            <a:off x="2843784" y="3328416"/>
+            <a:ext cx="2999232" cy="530352"/>
+          </a:xfrm>
+          <a:prstGeom prst="rect">
+            <a:avLst/>
+          </a:prstGeom>
+          <a:noFill/>
+        </p:spPr>
+        <p:txBody>
+          <a:bodyPr wrap="square" lIns="27432" rIns="27432" tIns="9144" bIns="9144" anchor="ctr">
+            <a:spAutoFit/>
+          </a:bodyPr>
+          <a:lstStyle/>
+          <a:p>
+            <a:pPr algn="l">
+              <a:lnSpc>
+                <a:spcPct val="110000"/>
+              </a:lnSpc>
+            </a:pPr>
+            <a:r>
+              <a:rPr sz="750" b="0">
+                <a:solidFill>
+                  <a:srgbClr val="141414"/>
+                </a:solidFill>
+                <a:latin typeface="微软雅黑"/>
+                <a:ea typeface="微软雅黑"/>
+                <a:cs typeface="微软雅黑"/>
+              </a:rPr>
+              <a:t>用网络狗服务器集中托管，避免逐台插拔、丢失与 USB 口占用</a:t>
+            </a:r>
+          </a:p>
+        </p:txBody>
+      </p:sp>
+      <p:sp>
+        <p:nvSpPr>
+          <p:cNvPr id="36" name="Rectangle 35"/>
+          <p:cNvSpPr/>
+          <p:nvPr/>
+        </p:nvSpPr>
+        <p:spPr>
+          <a:xfrm>
+            <a:off x="274320" y="3877056"/>
+            <a:ext cx="1417320" cy="566928"/>
+          </a:xfrm>
+          <a:prstGeom prst="rect">
+            <a:avLst/>
+          </a:prstGeom>
+          <a:solidFill>
+            <a:srgbClr val="FFFFFF"/>
+          </a:solidFill>
+          <a:ln w="8890">
+            <a:solidFill>
+              <a:srgbClr val="D9D6CD"/>
+            </a:solidFill>
+          </a:ln>
+          <a:effectLst/>
+        </p:spPr>
+        <p:style>
+          <a:lnRef idx="1">
+            <a:schemeClr val="accent1"/>
+          </a:lnRef>
+          <a:fillRef idx="3">
+            <a:schemeClr val="accent1"/>
+          </a:fillRef>
+          <a:effectRef idx="2">
+            <a:schemeClr val="accent1"/>
+          </a:effectRef>
+          <a:fontRef idx="minor">
+            <a:schemeClr val="lt1"/>
+          </a:fontRef>
+        </p:style>
+        <p:txBody>
+          <a:bodyPr rtlCol="0" anchor="ctr" wrap="square"/>
+          <a:lstStyle/>
+          <a:p>
+            <a:pPr algn="ctr"/>
+          </a:p>
+        </p:txBody>
+      </p:sp>
+      <p:sp>
+        <p:nvSpPr>
+          <p:cNvPr id="37" name="TextBox 36"/>
+          <p:cNvSpPr txBox="1"/>
+          <p:nvPr/>
+        </p:nvSpPr>
+        <p:spPr>
+          <a:xfrm>
+            <a:off x="329184" y="3895344"/>
+            <a:ext cx="1307592" cy="530352"/>
+          </a:xfrm>
+          <a:prstGeom prst="rect">
+            <a:avLst/>
+          </a:prstGeom>
+          <a:noFill/>
+        </p:spPr>
+        <p:txBody>
+          <a:bodyPr wrap="square" lIns="27432" rIns="27432" tIns="9144" bIns="9144" anchor="ctr">
+            <a:spAutoFit/>
+          </a:bodyPr>
+          <a:lstStyle/>
+          <a:p>
+            <a:pPr algn="l">
+              <a:lnSpc>
+                <a:spcPct val="110000"/>
+              </a:lnSpc>
+            </a:pPr>
+            <a:r>
+              <a:rPr sz="750" b="0">
+                <a:solidFill>
+                  <a:srgbClr val="141414"/>
+                </a:solidFill>
+                <a:latin typeface="微软雅黑"/>
+                <a:ea typeface="微软雅黑"/>
+                <a:cs typeface="微软雅黑"/>
+              </a:rPr>
+              <a:t>通道 / 端口数授权</a:t>
+            </a:r>
+          </a:p>
+        </p:txBody>
+      </p:sp>
+      <p:sp>
+        <p:nvSpPr>
+          <p:cNvPr id="38" name="Rectangle 37"/>
+          <p:cNvSpPr/>
+          <p:nvPr/>
+        </p:nvSpPr>
+        <p:spPr>
+          <a:xfrm>
+            <a:off x="1691640" y="3877056"/>
+            <a:ext cx="1097280" cy="566928"/>
+          </a:xfrm>
+          <a:prstGeom prst="rect">
+            <a:avLst/>
+          </a:prstGeom>
+          <a:solidFill>
+            <a:srgbClr val="FFFFFF"/>
+          </a:solidFill>
+          <a:ln w="8890">
+            <a:solidFill>
+              <a:srgbClr val="D9D6CD"/>
+            </a:solidFill>
+          </a:ln>
+          <a:effectLst/>
+        </p:spPr>
+        <p:style>
+          <a:lnRef idx="1">
+            <a:schemeClr val="accent1"/>
+          </a:lnRef>
+          <a:fillRef idx="3">
+            <a:schemeClr val="accent1"/>
+          </a:fillRef>
+          <a:effectRef idx="2">
+            <a:schemeClr val="accent1"/>
+          </a:effectRef>
+          <a:fontRef idx="minor">
+            <a:schemeClr val="lt1"/>
+          </a:fontRef>
+        </p:style>
+        <p:txBody>
+          <a:bodyPr rtlCol="0" anchor="ctr" wrap="square"/>
+          <a:lstStyle/>
+          <a:p>
+            <a:pPr algn="ctr"/>
+          </a:p>
+        </p:txBody>
+      </p:sp>
+      <p:sp>
+        <p:nvSpPr>
+          <p:cNvPr id="39" name="TextBox 38"/>
+          <p:cNvSpPr txBox="1"/>
+          <p:nvPr/>
+        </p:nvSpPr>
+        <p:spPr>
+          <a:xfrm>
+            <a:off x="1746504" y="3895344"/>
+            <a:ext cx="987552" cy="530352"/>
+          </a:xfrm>
+          <a:prstGeom prst="rect">
+            <a:avLst/>
+          </a:prstGeom>
+          <a:noFill/>
+        </p:spPr>
+        <p:txBody>
+          <a:bodyPr wrap="square" lIns="27432" rIns="27432" tIns="9144" bIns="9144" anchor="ctr">
+            <a:spAutoFit/>
+          </a:bodyPr>
+          <a:lstStyle/>
+          <a:p>
+            <a:pPr algn="l">
+              <a:lnSpc>
+                <a:spcPct val="110000"/>
+              </a:lnSpc>
+            </a:pPr>
+            <a:r>
+              <a:rPr sz="750" b="0">
+                <a:solidFill>
+                  <a:srgbClr val="141414"/>
+                </a:solidFill>
+                <a:latin typeface="微软雅黑"/>
+                <a:ea typeface="微软雅黑"/>
+                <a:cs typeface="微软雅黑"/>
+              </a:rPr>
+              <a:t>按通道</a:t>
+            </a:r>
+          </a:p>
+        </p:txBody>
+      </p:sp>
+      <p:sp>
+        <p:nvSpPr>
+          <p:cNvPr id="40" name="Rectangle 39"/>
+          <p:cNvSpPr/>
+          <p:nvPr/>
+        </p:nvSpPr>
+        <p:spPr>
+          <a:xfrm>
+            <a:off x="2788920" y="3877056"/>
+            <a:ext cx="3108960" cy="566928"/>
+          </a:xfrm>
+          <a:prstGeom prst="rect">
+            <a:avLst/>
+          </a:prstGeom>
+          <a:solidFill>
+            <a:srgbClr val="FFFFFF"/>
+          </a:solidFill>
+          <a:ln w="8890">
+            <a:solidFill>
+              <a:srgbClr val="D9D6CD"/>
+            </a:solidFill>
+          </a:ln>
+          <a:effectLst/>
+        </p:spPr>
+        <p:style>
+          <a:lnRef idx="1">
+            <a:schemeClr val="accent1"/>
+          </a:lnRef>
+          <a:fillRef idx="3">
+            <a:schemeClr val="accent1"/>
+          </a:fillRef>
+          <a:effectRef idx="2">
+            <a:schemeClr val="accent1"/>
+          </a:effectRef>
+          <a:fontRef idx="minor">
+            <a:schemeClr val="lt1"/>
+          </a:fontRef>
+        </p:style>
+        <p:txBody>
+          <a:bodyPr rtlCol="0" anchor="ctr" wrap="square"/>
+          <a:lstStyle/>
+          <a:p>
+            <a:pPr algn="ctr"/>
+          </a:p>
+        </p:txBody>
+      </p:sp>
+      <p:sp>
+        <p:nvSpPr>
+          <p:cNvPr id="41" name="TextBox 40"/>
+          <p:cNvSpPr txBox="1"/>
+          <p:nvPr/>
+        </p:nvSpPr>
+        <p:spPr>
+          <a:xfrm>
+            <a:off x="2843784" y="3895344"/>
+            <a:ext cx="2999232" cy="530352"/>
+          </a:xfrm>
+          <a:prstGeom prst="rect">
+            <a:avLst/>
+          </a:prstGeom>
+          <a:noFill/>
+        </p:spPr>
+        <p:txBody>
+          <a:bodyPr wrap="square" lIns="27432" rIns="27432" tIns="9144" bIns="9144" anchor="ctr">
+            <a:spAutoFit/>
+          </a:bodyPr>
+          <a:lstStyle/>
+          <a:p>
+            <a:pPr algn="l">
+              <a:lnSpc>
+                <a:spcPct val="110000"/>
+              </a:lnSpc>
+            </a:pPr>
+            <a:r>
+              <a:rPr sz="750" b="0">
+                <a:solidFill>
+                  <a:srgbClr val="141414"/>
+                </a:solidFill>
+                <a:latin typeface="微软雅黑"/>
+                <a:ea typeface="微软雅黑"/>
+                <a:cs typeface="微软雅黑"/>
+              </a:rPr>
+              <a:t>注意单机通道上限，一拖多并行时容易触顶，需预留余量</a:t>
+            </a:r>
+          </a:p>
+        </p:txBody>
+      </p:sp>
+      <p:sp>
+        <p:nvSpPr>
+          <p:cNvPr id="42" name="Rectangle 41"/>
+          <p:cNvSpPr/>
+          <p:nvPr/>
+        </p:nvSpPr>
+        <p:spPr>
+          <a:xfrm>
+            <a:off x="274320" y="4443984"/>
+            <a:ext cx="1417320" cy="566928"/>
+          </a:xfrm>
+          <a:prstGeom prst="rect">
+            <a:avLst/>
+          </a:prstGeom>
+          <a:solidFill>
+            <a:srgbClr val="FFFFFF"/>
+          </a:solidFill>
+          <a:ln w="8890">
+            <a:solidFill>
+              <a:srgbClr val="D9D6CD"/>
+            </a:solidFill>
+          </a:ln>
+          <a:effectLst/>
+        </p:spPr>
+        <p:style>
+          <a:lnRef idx="1">
+            <a:schemeClr val="accent1"/>
+          </a:lnRef>
+          <a:fillRef idx="3">
+            <a:schemeClr val="accent1"/>
+          </a:fillRef>
+          <a:effectRef idx="2">
+            <a:schemeClr val="accent1"/>
+          </a:effectRef>
+          <a:fontRef idx="minor">
+            <a:schemeClr val="lt1"/>
+          </a:fontRef>
+        </p:style>
+        <p:txBody>
+          <a:bodyPr rtlCol="0" anchor="ctr" wrap="square"/>
+          <a:lstStyle/>
+          <a:p>
+            <a:pPr algn="ctr"/>
+          </a:p>
+        </p:txBody>
+      </p:sp>
+      <p:sp>
+        <p:nvSpPr>
+          <p:cNvPr id="43" name="TextBox 42"/>
+          <p:cNvSpPr txBox="1"/>
+          <p:nvPr/>
+        </p:nvSpPr>
+        <p:spPr>
+          <a:xfrm>
+            <a:off x="329184" y="4462272"/>
+            <a:ext cx="1307592" cy="530352"/>
+          </a:xfrm>
+          <a:prstGeom prst="rect">
+            <a:avLst/>
+          </a:prstGeom>
+          <a:noFill/>
+        </p:spPr>
+        <p:txBody>
+          <a:bodyPr wrap="square" lIns="27432" rIns="27432" tIns="9144" bIns="9144" anchor="ctr">
+            <a:spAutoFit/>
+          </a:bodyPr>
+          <a:lstStyle/>
+          <a:p>
+            <a:pPr algn="l">
+              <a:lnSpc>
+                <a:spcPct val="110000"/>
+              </a:lnSpc>
+            </a:pPr>
+            <a:r>
+              <a:rPr sz="750" b="0">
+                <a:solidFill>
+                  <a:srgbClr val="141414"/>
+                </a:solidFill>
+                <a:latin typeface="微软雅黑"/>
+                <a:ea typeface="微软雅黑"/>
+                <a:cs typeface="微软雅黑"/>
+              </a:rPr>
+              <a:t>云订阅 / 在线校验</a:t>
+            </a:r>
+          </a:p>
+        </p:txBody>
+      </p:sp>
+      <p:sp>
+        <p:nvSpPr>
+          <p:cNvPr id="44" name="Rectangle 43"/>
+          <p:cNvSpPr/>
+          <p:nvPr/>
+        </p:nvSpPr>
+        <p:spPr>
+          <a:xfrm>
+            <a:off x="1691640" y="4443984"/>
+            <a:ext cx="1097280" cy="566928"/>
+          </a:xfrm>
+          <a:prstGeom prst="rect">
+            <a:avLst/>
+          </a:prstGeom>
+          <a:solidFill>
+            <a:srgbClr val="FFFFFF"/>
+          </a:solidFill>
+          <a:ln w="8890">
+            <a:solidFill>
+              <a:srgbClr val="D9D6CD"/>
+            </a:solidFill>
+          </a:ln>
+          <a:effectLst/>
+        </p:spPr>
+        <p:style>
+          <a:lnRef idx="1">
+            <a:schemeClr val="accent1"/>
+          </a:lnRef>
+          <a:fillRef idx="3">
+            <a:schemeClr val="accent1"/>
+          </a:fillRef>
+          <a:effectRef idx="2">
+            <a:schemeClr val="accent1"/>
+          </a:effectRef>
+          <a:fontRef idx="minor">
+            <a:schemeClr val="lt1"/>
+          </a:fontRef>
+        </p:style>
+        <p:txBody>
+          <a:bodyPr rtlCol="0" anchor="ctr" wrap="square"/>
+          <a:lstStyle/>
+          <a:p>
+            <a:pPr algn="ctr"/>
+          </a:p>
+        </p:txBody>
+      </p:sp>
+      <p:sp>
+        <p:nvSpPr>
+          <p:cNvPr id="45" name="TextBox 44"/>
+          <p:cNvSpPr txBox="1"/>
+          <p:nvPr/>
+        </p:nvSpPr>
+        <p:spPr>
+          <a:xfrm>
+            <a:off x="1746504" y="4462272"/>
+            <a:ext cx="987552" cy="530352"/>
+          </a:xfrm>
+          <a:prstGeom prst="rect">
+            <a:avLst/>
+          </a:prstGeom>
+          <a:noFill/>
+        </p:spPr>
+        <p:txBody>
+          <a:bodyPr wrap="square" lIns="27432" rIns="27432" tIns="9144" bIns="9144" anchor="ctr">
+            <a:spAutoFit/>
+          </a:bodyPr>
+          <a:lstStyle/>
+          <a:p>
+            <a:pPr algn="l">
+              <a:lnSpc>
+                <a:spcPct val="110000"/>
+              </a:lnSpc>
+            </a:pPr>
+            <a:r>
+              <a:rPr sz="750" b="0">
+                <a:solidFill>
+                  <a:srgbClr val="141414"/>
+                </a:solidFill>
+                <a:latin typeface="微软雅黑"/>
+                <a:ea typeface="微软雅黑"/>
+                <a:cs typeface="微软雅黑"/>
+              </a:rPr>
+              <a:t>按账号</a:t>
+            </a:r>
+          </a:p>
+        </p:txBody>
+      </p:sp>
+      <p:sp>
+        <p:nvSpPr>
+          <p:cNvPr id="46" name="Rectangle 45"/>
+          <p:cNvSpPr/>
+          <p:nvPr/>
+        </p:nvSpPr>
+        <p:spPr>
+          <a:xfrm>
+            <a:off x="2788920" y="4443984"/>
+            <a:ext cx="3108960" cy="566928"/>
+          </a:xfrm>
+          <a:prstGeom prst="rect">
+            <a:avLst/>
+          </a:prstGeom>
+          <a:solidFill>
+            <a:srgbClr val="FFFFFF"/>
+          </a:solidFill>
+          <a:ln w="8890">
+            <a:solidFill>
+              <a:srgbClr val="D9D6CD"/>
+            </a:solidFill>
+          </a:ln>
+          <a:effectLst/>
+        </p:spPr>
+        <p:style>
+          <a:lnRef idx="1">
+            <a:schemeClr val="accent1"/>
+          </a:lnRef>
+          <a:fillRef idx="3">
+            <a:schemeClr val="accent1"/>
+          </a:fillRef>
+          <a:effectRef idx="2">
+            <a:schemeClr val="accent1"/>
+          </a:effectRef>
+          <a:fontRef idx="minor">
+            <a:schemeClr val="lt1"/>
+          </a:fontRef>
+        </p:style>
+        <p:txBody>
+          <a:bodyPr rtlCol="0" anchor="ctr" wrap="square"/>
+          <a:lstStyle/>
+          <a:p>
+            <a:pPr algn="ctr"/>
+          </a:p>
+        </p:txBody>
+      </p:sp>
+      <p:sp>
+        <p:nvSpPr>
+          <p:cNvPr id="47" name="TextBox 46"/>
+          <p:cNvSpPr txBox="1"/>
+          <p:nvPr/>
+        </p:nvSpPr>
+        <p:spPr>
+          <a:xfrm>
+            <a:off x="2843784" y="4462272"/>
+            <a:ext cx="2999232" cy="530352"/>
+          </a:xfrm>
+          <a:prstGeom prst="rect">
+            <a:avLst/>
+          </a:prstGeom>
+          <a:noFill/>
+        </p:spPr>
+        <p:txBody>
+          <a:bodyPr wrap="square" lIns="27432" rIns="27432" tIns="9144" bIns="9144" anchor="ctr">
+            <a:spAutoFit/>
+          </a:bodyPr>
+          <a:lstStyle/>
+          <a:p>
+            <a:pPr algn="l">
+              <a:lnSpc>
+                <a:spcPct val="110000"/>
+              </a:lnSpc>
+            </a:pPr>
+            <a:r>
+              <a:rPr sz="750" b="0">
+                <a:solidFill>
+                  <a:srgbClr val="141414"/>
+                </a:solidFill>
+                <a:latin typeface="微软雅黑"/>
+                <a:ea typeface="微软雅黑"/>
+                <a:cs typeface="微软雅黑"/>
+              </a:rPr>
+              <a:t>需出网代理；离线环境改用离线激活文件或本地许可服务器</a:t>
+            </a:r>
+          </a:p>
+        </p:txBody>
+      </p:sp>
+      <p:sp>
+        <p:nvSpPr>
+          <p:cNvPr id="48" name="Rounded Rectangle 47"/>
+          <p:cNvSpPr/>
+          <p:nvPr/>
+        </p:nvSpPr>
+        <p:spPr>
+          <a:xfrm>
+            <a:off x="274320" y="5175504"/>
+            <a:ext cx="5623560" cy="731520"/>
+          </a:xfrm>
+          <a:prstGeom prst="roundRect">
+            <a:avLst>
+              <a:gd name="adj" fmla="val 4000"/>
+            </a:avLst>
+          </a:prstGeom>
+          <a:solidFill>
+            <a:srgbClr val="ECECEC"/>
+          </a:solidFill>
+          <a:ln>
+            <a:noFill/>
+          </a:ln>
+          <a:effectLst/>
+        </p:spPr>
+        <p:style>
+          <a:lnRef idx="1">
+            <a:schemeClr val="accent1"/>
+          </a:lnRef>
+          <a:fillRef idx="3">
+            <a:schemeClr val="accent1"/>
+          </a:fillRef>
+          <a:effectRef idx="2">
+            <a:schemeClr val="accent1"/>
+          </a:effectRef>
+          <a:fontRef idx="minor">
+            <a:schemeClr val="lt1"/>
+          </a:fontRef>
+        </p:style>
+        <p:txBody>
+          <a:bodyPr rtlCol="0" anchor="ctr" wrap="square"/>
+          <a:lstStyle/>
+          <a:p>
+            <a:pPr algn="ctr"/>
+          </a:p>
+        </p:txBody>
+      </p:sp>
+      <p:sp>
+        <p:nvSpPr>
+          <p:cNvPr id="49" name="TextBox 48"/>
+          <p:cNvSpPr txBox="1"/>
+          <p:nvPr/>
+        </p:nvSpPr>
+        <p:spPr>
+          <a:xfrm>
+            <a:off x="365760" y="5212080"/>
+            <a:ext cx="5440680" cy="658368"/>
+          </a:xfrm>
+          <a:prstGeom prst="rect">
+            <a:avLst/>
+          </a:prstGeom>
+          <a:noFill/>
+        </p:spPr>
+        <p:txBody>
+          <a:bodyPr wrap="square" lIns="27432" rIns="27432" tIns="9144" bIns="9144" anchor="ctr">
+            <a:spAutoFit/>
+          </a:bodyPr>
+          <a:lstStyle/>
+          <a:p>
+            <a:pPr algn="l">
+              <a:lnSpc>
+                <a:spcPct val="110000"/>
+              </a:lnSpc>
+            </a:pPr>
+            <a:r>
+              <a:rPr sz="750" b="0">
+                <a:solidFill>
+                  <a:srgbClr val="3A3A35"/>
+                </a:solidFill>
+                <a:latin typeface="微软雅黑"/>
+                <a:ea typeface="微软雅黑"/>
+                <a:cs typeface="微软雅黑"/>
+              </a:rPr>
+              <a:t>选型建议：优先争取浮动许可（按并发计费）；只能节点锁定时，把供应商软件集中到一台设备服务机，由代理进程对外提供能力；仪器序列号绑定的无法靠架构绕开，只能按台数采购。</a:t>
+            </a:r>
+          </a:p>
+        </p:txBody>
+      </p:sp>
+      <p:sp>
+        <p:nvSpPr>
+          <p:cNvPr id="50" name="Rounded Rectangle 49"/>
+          <p:cNvSpPr/>
+          <p:nvPr/>
+        </p:nvSpPr>
+        <p:spPr>
+          <a:xfrm>
+            <a:off x="6126480" y="1316736"/>
+            <a:ext cx="5788152" cy="4590288"/>
+          </a:xfrm>
+          <a:prstGeom prst="roundRect">
+            <a:avLst>
+              <a:gd name="adj" fmla="val 2000"/>
+            </a:avLst>
+          </a:prstGeom>
+          <a:solidFill>
+            <a:srgbClr val="FFFFFF"/>
+          </a:solidFill>
+          <a:ln w="11430">
+            <a:solidFill>
+              <a:srgbClr val="D9D6CD"/>
+            </a:solidFill>
+            <a:prstDash val="dash"/>
+          </a:ln>
+          <a:effectLst/>
+        </p:spPr>
+        <p:style>
+          <a:lnRef idx="1">
+            <a:schemeClr val="accent1"/>
+          </a:lnRef>
+          <a:fillRef idx="3">
+            <a:schemeClr val="accent1"/>
+          </a:fillRef>
+          <a:effectRef idx="2">
+            <a:schemeClr val="accent1"/>
+          </a:effectRef>
+          <a:fontRef idx="minor">
+            <a:schemeClr val="lt1"/>
+          </a:fontRef>
+        </p:style>
+        <p:txBody>
+          <a:bodyPr rtlCol="0" anchor="ctr" wrap="square"/>
+          <a:lstStyle/>
+          <a:p>
+            <a:pPr algn="ctr"/>
+          </a:p>
+        </p:txBody>
+      </p:sp>
+      <p:sp>
+        <p:nvSpPr>
+          <p:cNvPr id="51" name="TextBox 50"/>
+          <p:cNvSpPr txBox="1"/>
+          <p:nvPr/>
+        </p:nvSpPr>
+        <p:spPr>
+          <a:xfrm>
+            <a:off x="6254496" y="1389888"/>
+            <a:ext cx="5532120" cy="256032"/>
+          </a:xfrm>
+          <a:prstGeom prst="rect">
+            <a:avLst/>
+          </a:prstGeom>
+          <a:noFill/>
+        </p:spPr>
+        <p:txBody>
+          <a:bodyPr wrap="square" lIns="27432" rIns="27432" tIns="9144" bIns="9144" anchor="ctr">
+            <a:spAutoFit/>
+          </a:bodyPr>
+          <a:lstStyle/>
+          <a:p>
+            <a:pPr algn="l">
+              <a:lnSpc>
+                <a:spcPct val="110000"/>
+              </a:lnSpc>
+            </a:pPr>
+            <a:r>
+              <a:rPr sz="750" b="0">
+                <a:solidFill>
+                  <a:srgbClr val="A8A8A2"/>
+                </a:solidFill>
+                <a:latin typeface="微软雅黑"/>
+                <a:ea typeface="微软雅黑"/>
+                <a:cs typeface="微软雅黑"/>
+              </a:rPr>
+              <a:t>预留区：本项目各供应商的授权清单与确认结果</a:t>
+            </a:r>
+          </a:p>
+        </p:txBody>
+      </p:sp>
+      <p:sp>
+        <p:nvSpPr>
+          <p:cNvPr id="52" name="Rectangle 51"/>
+          <p:cNvSpPr/>
+          <p:nvPr/>
+        </p:nvSpPr>
+        <p:spPr>
+          <a:xfrm>
+            <a:off x="274320" y="6400800"/>
+            <a:ext cx="11640312" cy="12801"/>
+          </a:xfrm>
+          <a:prstGeom prst="rect">
+            <a:avLst/>
+          </a:prstGeom>
+          <a:solidFill>
+            <a:srgbClr val="D9D6CD"/>
+          </a:solidFill>
+          <a:ln>
+            <a:noFill/>
+          </a:ln>
+          <a:effectLst/>
+        </p:spPr>
+        <p:style>
+          <a:lnRef idx="1">
+            <a:schemeClr val="accent1"/>
+          </a:lnRef>
+          <a:fillRef idx="3">
+            <a:schemeClr val="accent1"/>
+          </a:fillRef>
+          <a:effectRef idx="2">
+            <a:schemeClr val="accent1"/>
+          </a:effectRef>
+          <a:fontRef idx="minor">
+            <a:schemeClr val="lt1"/>
+          </a:fontRef>
+        </p:style>
+        <p:txBody>
+          <a:bodyPr rtlCol="0" anchor="ctr" wrap="square"/>
+          <a:lstStyle/>
+          <a:p>
+            <a:pPr algn="ctr"/>
+          </a:p>
+        </p:txBody>
+      </p:sp>
+      <p:sp>
+        <p:nvSpPr>
+          <p:cNvPr id="53" name="TextBox 52"/>
+          <p:cNvSpPr txBox="1"/>
+          <p:nvPr/>
+        </p:nvSpPr>
+        <p:spPr>
+          <a:xfrm>
+            <a:off x="274320" y="6446520"/>
+            <a:ext cx="6858000" cy="274320"/>
+          </a:xfrm>
+          <a:prstGeom prst="rect">
+            <a:avLst/>
+          </a:prstGeom>
+          <a:noFill/>
+        </p:spPr>
+        <p:txBody>
+          <a:bodyPr wrap="square" lIns="27432" rIns="27432" tIns="9144" bIns="9144" anchor="ctr">
+            <a:spAutoFit/>
+          </a:bodyPr>
+          <a:lstStyle/>
+          <a:p>
+            <a:pPr algn="l">
+              <a:lnSpc>
+                <a:spcPct val="110000"/>
+              </a:lnSpc>
+            </a:pPr>
+            <a:r>
+              <a:rPr sz="850" b="0">
+                <a:solidFill>
+                  <a:srgbClr val="5C5C56"/>
+                </a:solidFill>
+                <a:latin typeface="微软雅黑"/>
+                <a:ea typeface="微软雅黑"/>
+                <a:cs typeface="微软雅黑"/>
+              </a:rPr>
+              <a:t>左侧为授权形态与一拖多下的可行性判断；右侧留白用于填写现场清单</a:t>
+            </a:r>
+          </a:p>
+        </p:txBody>
+      </p:sp>
+      <p:sp>
+        <p:nvSpPr>
+          <p:cNvPr id="54" name="TextBox 53"/>
+          <p:cNvSpPr txBox="1"/>
+          <p:nvPr/>
+        </p:nvSpPr>
+        <p:spPr>
+          <a:xfrm>
+            <a:off x="7223760" y="6446520"/>
+            <a:ext cx="4690872" cy="274320"/>
+          </a:xfrm>
+          <a:prstGeom prst="rect">
+            <a:avLst/>
+          </a:prstGeom>
+          <a:noFill/>
+        </p:spPr>
+        <p:txBody>
+          <a:bodyPr wrap="square" lIns="27432" rIns="27432" tIns="9144" bIns="9144" anchor="ctr">
+            <a:spAutoFit/>
+          </a:bodyPr>
+          <a:lstStyle/>
+          <a:p>
+            <a:pPr algn="r">
+              <a:lnSpc>
+                <a:spcPct val="110000"/>
+              </a:lnSpc>
+            </a:pPr>
+            <a:r>
+              <a:rPr sz="850" b="0">
+                <a:solidFill>
+                  <a:srgbClr val="5C5C56"/>
+                </a:solidFill>
+                <a:latin typeface="微软雅黑"/>
+                <a:ea typeface="微软雅黑"/>
+                <a:cs typeface="微软雅黑"/>
+              </a:rPr>
+              <a:t>计费口径决定架构：能共享的走集中部署，不能共享的只能按数量采购</a:t>
+            </a:r>
+          </a:p>
+        </p:txBody>
+      </p:sp>
+    </p:spTree>
+  </p:cSld>
+  <p:clrMapOvr>
+    <a:masterClrMapping/>
+  </p:clrMapOvr>
+</p:sld>
+</file>
+
+<file path=ppt/slides/slide8.xml><?xml version="1.0" encoding="utf-8"?>
+<p:sld xmlns:a="http://schemas.openxmlformats.org/drawingml/2006/main" xmlns:p="http://schemas.openxmlformats.org/presentationml/2006/main" xmlns:r="http://schemas.openxmlformats.org/officeDocument/2006/relationships">
+  <p:cSld>
+    <p:spTree>
+      <p:nvGrpSpPr>
+        <p:cNvPr id="1" name=""/>
+        <p:cNvGrpSpPr/>
+        <p:nvPr/>
+      </p:nvGrpSpPr>
+      <p:grpSpPr/>
+      <p:sp>
+        <p:nvSpPr>
+          <p:cNvPr id="2" name="TextBox 1"/>
+          <p:cNvSpPr txBox="1"/>
+          <p:nvPr/>
+        </p:nvSpPr>
+        <p:spPr>
+          <a:xfrm>
+            <a:off x="274320" y="201168"/>
+            <a:ext cx="10881360" cy="457200"/>
+          </a:xfrm>
+          <a:prstGeom prst="rect">
+            <a:avLst/>
+          </a:prstGeom>
+          <a:noFill/>
+        </p:spPr>
+        <p:txBody>
+          <a:bodyPr wrap="square" lIns="27432" rIns="27432" tIns="9144" bIns="9144" anchor="ctr">
+            <a:spAutoFit/>
+          </a:bodyPr>
+          <a:lstStyle/>
+          <a:p>
+            <a:pPr algn="l">
+              <a:lnSpc>
+                <a:spcPct val="110000"/>
+              </a:lnSpc>
+            </a:pPr>
+            <a:r>
+              <a:rPr sz="2400" b="1">
+                <a:solidFill>
+                  <a:srgbClr val="141414"/>
+                </a:solidFill>
+                <a:latin typeface="微软雅黑"/>
+                <a:ea typeface="微软雅黑"/>
+                <a:cs typeface="微软雅黑"/>
+              </a:rPr>
+              <a:t>调用链路与 Runner 内部逻辑视图</a:t>
+            </a:r>
+          </a:p>
+        </p:txBody>
+      </p:sp>
+      <p:sp>
+        <p:nvSpPr>
+          <p:cNvPr id="3" name="TextBox 2"/>
+          <p:cNvSpPr txBox="1"/>
+          <p:nvPr/>
+        </p:nvSpPr>
+        <p:spPr>
+          <a:xfrm>
+            <a:off x="274320" y="658368"/>
+            <a:ext cx="11155680" cy="310896"/>
+          </a:xfrm>
+          <a:prstGeom prst="rect">
+            <a:avLst/>
+          </a:prstGeom>
+          <a:noFill/>
+        </p:spPr>
+        <p:txBody>
+          <a:bodyPr wrap="square" lIns="27432" rIns="27432" tIns="9144" bIns="9144" anchor="ctr">
+            <a:spAutoFit/>
+          </a:bodyPr>
+          <a:lstStyle/>
+          <a:p>
+            <a:pPr algn="l">
+              <a:lnSpc>
+                <a:spcPct val="110000"/>
+              </a:lnSpc>
+            </a:pPr>
+            <a:r>
+              <a:rPr sz="1050" b="0">
+                <a:solidFill>
+                  <a:srgbClr val="5C5C56"/>
+                </a:solidFill>
+                <a:latin typeface="微软雅黑"/>
+                <a:ea typeface="微软雅黑"/>
+                <a:cs typeface="微软雅黑"/>
+              </a:rPr>
+              <a:t>三层边界一次看清：整个调用链路、Runner 内部分层、测试台拓扑；耦合只走接口与进程边界</a:t>
+            </a:r>
+          </a:p>
+        </p:txBody>
+      </p:sp>
+      <p:sp>
+        <p:nvSpPr>
+          <p:cNvPr id="4" name="Rectangle 3"/>
+          <p:cNvSpPr/>
+          <p:nvPr/>
+        </p:nvSpPr>
+        <p:spPr>
+          <a:xfrm>
+            <a:off x="274320" y="987552"/>
+            <a:ext cx="11640312" cy="25603"/>
+          </a:xfrm>
+          <a:prstGeom prst="rect">
+            <a:avLst/>
+          </a:prstGeom>
+          <a:solidFill>
+            <a:srgbClr val="8B0F1A"/>
+          </a:solidFill>
+          <a:ln>
+            <a:noFill/>
+          </a:ln>
+          <a:effectLst/>
+        </p:spPr>
+        <p:style>
+          <a:lnRef idx="1">
+            <a:schemeClr val="accent1"/>
+          </a:lnRef>
+          <a:fillRef idx="3">
+            <a:schemeClr val="accent1"/>
+          </a:fillRef>
+          <a:effectRef idx="2">
+            <a:schemeClr val="accent1"/>
+          </a:effectRef>
+          <a:fontRef idx="minor">
+            <a:schemeClr val="lt1"/>
+          </a:fontRef>
+        </p:style>
+        <p:txBody>
+          <a:bodyPr rtlCol="0" anchor="ctr" wrap="square"/>
+          <a:lstStyle/>
+          <a:p>
+            <a:pPr algn="ctr"/>
+          </a:p>
+        </p:txBody>
+      </p:sp>
+      <p:sp>
+        <p:nvSpPr>
+          <p:cNvPr id="5" name="TextBox 4"/>
+          <p:cNvSpPr txBox="1"/>
+          <p:nvPr/>
+        </p:nvSpPr>
+        <p:spPr>
+          <a:xfrm>
+            <a:off x="274320" y="1060704"/>
+            <a:ext cx="8046720" cy="237744"/>
+          </a:xfrm>
+          <a:prstGeom prst="rect">
+            <a:avLst/>
+          </a:prstGeom>
+          <a:noFill/>
+        </p:spPr>
+        <p:txBody>
+          <a:bodyPr wrap="square" lIns="27432" rIns="27432" tIns="9144" bIns="9144" anchor="ctr">
+            <a:spAutoFit/>
+          </a:bodyPr>
+          <a:lstStyle/>
+          <a:p>
+            <a:pPr algn="l">
+              <a:lnSpc>
+                <a:spcPct val="110000"/>
+              </a:lnSpc>
+            </a:pPr>
+            <a:r>
+              <a:rPr sz="950" b="1">
+                <a:solidFill>
+                  <a:srgbClr val="8B0F1A"/>
+                </a:solidFill>
+                <a:latin typeface="微软雅黑"/>
+                <a:ea typeface="微软雅黑"/>
+                <a:cs typeface="微软雅黑"/>
+              </a:rPr>
+              <a:t>① 整个调用链路（粗粒度）</a:t>
+            </a:r>
+          </a:p>
+        </p:txBody>
+      </p:sp>
+      <p:sp>
+        <p:nvSpPr>
+          <p:cNvPr id="6" name="Rounded Rectangle 5"/>
+          <p:cNvSpPr/>
+          <p:nvPr/>
+        </p:nvSpPr>
+        <p:spPr>
+          <a:xfrm>
+            <a:off x="274320" y="1335024"/>
+            <a:ext cx="1051560" cy="493776"/>
+          </a:xfrm>
+          <a:prstGeom prst="roundRect">
+            <a:avLst>
+              <a:gd name="adj" fmla="val 5000"/>
+            </a:avLst>
+          </a:prstGeom>
+          <a:solidFill>
+            <a:srgbClr val="FFFFFF"/>
+          </a:solidFill>
+          <a:ln w="12700">
+            <a:solidFill>
+              <a:srgbClr val="C9C9C2"/>
+            </a:solidFill>
+          </a:ln>
+          <a:effectLst/>
+        </p:spPr>
+        <p:style>
+          <a:lnRef idx="1">
+            <a:schemeClr val="accent1"/>
+          </a:lnRef>
+          <a:fillRef idx="3">
+            <a:schemeClr val="accent1"/>
+          </a:fillRef>
+          <a:effectRef idx="2">
+            <a:schemeClr val="accent1"/>
+          </a:effectRef>
+          <a:fontRef idx="minor">
+            <a:schemeClr val="lt1"/>
+          </a:fontRef>
+        </p:style>
+        <p:txBody>
+          <a:bodyPr rtlCol="0" anchor="ctr" wrap="square"/>
+          <a:lstStyle/>
+          <a:p>
+            <a:pPr algn="ctr"/>
+          </a:p>
+        </p:txBody>
+      </p:sp>
+      <p:sp>
+        <p:nvSpPr>
+          <p:cNvPr id="7" name="TextBox 6"/>
+          <p:cNvSpPr txBox="1"/>
+          <p:nvPr/>
+        </p:nvSpPr>
+        <p:spPr>
+          <a:xfrm>
+            <a:off x="310896" y="1353312"/>
+            <a:ext cx="978407" cy="457200"/>
+          </a:xfrm>
+          <a:prstGeom prst="rect">
+            <a:avLst/>
+          </a:prstGeom>
+          <a:noFill/>
+        </p:spPr>
+        <p:txBody>
+          <a:bodyPr wrap="square" lIns="27432" rIns="27432" tIns="9144" bIns="9144" anchor="ctr">
+            <a:spAutoFit/>
+          </a:bodyPr>
+          <a:lstStyle/>
+          <a:p>
+            <a:pPr algn="ctr">
+              <a:lnSpc>
+                <a:spcPct val="110000"/>
+              </a:lnSpc>
+            </a:pPr>
+            <a:r>
+              <a:rPr sz="850" b="1">
+                <a:solidFill>
+                  <a:srgbClr val="141414"/>
+                </a:solidFill>
+                <a:latin typeface="微软雅黑"/>
+                <a:ea typeface="微软雅黑"/>
+                <a:cs typeface="微软雅黑"/>
+              </a:rPr>
+              <a:t>前端 SPA</a:t>
+            </a:r>
+          </a:p>
+          <a:p>
+            <a:pPr algn="ctr">
+              <a:lnSpc>
+                <a:spcPct val="110000"/>
+              </a:lnSpc>
+              <a:spcBef>
+                <a:spcPts val="100"/>
+              </a:spcBef>
+            </a:pPr>
+            <a:r>
+              <a:rPr sz="700" b="0">
+                <a:solidFill>
+                  <a:srgbClr val="5C5C56"/>
+                </a:solidFill>
+                <a:latin typeface="微软雅黑"/>
+                <a:ea typeface="微软雅黑"/>
+                <a:cs typeface="微软雅黑"/>
+              </a:rPr>
+              <a:t>任务与执行界面</a:t>
+            </a:r>
+          </a:p>
+        </p:txBody>
+      </p:sp>
+      <p:sp>
+        <p:nvSpPr>
+          <p:cNvPr id="8" name="Rounded Rectangle 7"/>
+          <p:cNvSpPr/>
+          <p:nvPr/>
+        </p:nvSpPr>
+        <p:spPr>
+          <a:xfrm>
+            <a:off x="1600200" y="1335024"/>
+            <a:ext cx="1051560" cy="493776"/>
+          </a:xfrm>
+          <a:prstGeom prst="roundRect">
+            <a:avLst>
+              <a:gd name="adj" fmla="val 5000"/>
+            </a:avLst>
+          </a:prstGeom>
+          <a:solidFill>
+            <a:srgbClr val="FFFFFF"/>
+          </a:solidFill>
+          <a:ln w="12700">
+            <a:solidFill>
+              <a:srgbClr val="C9C9C2"/>
+            </a:solidFill>
+          </a:ln>
+          <a:effectLst/>
+        </p:spPr>
+        <p:style>
+          <a:lnRef idx="1">
+            <a:schemeClr val="accent1"/>
+          </a:lnRef>
+          <a:fillRef idx="3">
+            <a:schemeClr val="accent1"/>
+          </a:fillRef>
+          <a:effectRef idx="2">
+            <a:schemeClr val="accent1"/>
+          </a:effectRef>
+          <a:fontRef idx="minor">
+            <a:schemeClr val="lt1"/>
+          </a:fontRef>
+        </p:style>
+        <p:txBody>
+          <a:bodyPr rtlCol="0" anchor="ctr" wrap="square"/>
+          <a:lstStyle/>
+          <a:p>
+            <a:pPr algn="ctr"/>
+          </a:p>
+        </p:txBody>
+      </p:sp>
+      <p:sp>
+        <p:nvSpPr>
+          <p:cNvPr id="9" name="TextBox 8"/>
+          <p:cNvSpPr txBox="1"/>
+          <p:nvPr/>
+        </p:nvSpPr>
+        <p:spPr>
+          <a:xfrm>
+            <a:off x="1636776" y="1353312"/>
+            <a:ext cx="978407" cy="457200"/>
+          </a:xfrm>
+          <a:prstGeom prst="rect">
+            <a:avLst/>
+          </a:prstGeom>
+          <a:noFill/>
+        </p:spPr>
+        <p:txBody>
+          <a:bodyPr wrap="square" lIns="27432" rIns="27432" tIns="9144" bIns="9144" anchor="ctr">
+            <a:spAutoFit/>
+          </a:bodyPr>
+          <a:lstStyle/>
+          <a:p>
+            <a:pPr algn="ctr">
+              <a:lnSpc>
+                <a:spcPct val="110000"/>
+              </a:lnSpc>
+            </a:pPr>
+            <a:r>
+              <a:rPr sz="850" b="1">
+                <a:solidFill>
+                  <a:srgbClr val="141414"/>
+                </a:solidFill>
+                <a:latin typeface="微软雅黑"/>
+                <a:ea typeface="微软雅黑"/>
+                <a:cs typeface="微软雅黑"/>
+              </a:rPr>
+              <a:t>后端 API</a:t>
+            </a:r>
+          </a:p>
+          <a:p>
+            <a:pPr algn="ctr">
+              <a:lnSpc>
+                <a:spcPct val="110000"/>
+              </a:lnSpc>
+              <a:spcBef>
+                <a:spcPts val="100"/>
+              </a:spcBef>
+            </a:pPr>
+            <a:r>
+              <a:rPr sz="700" b="0">
+                <a:solidFill>
+                  <a:srgbClr val="5C5C56"/>
+                </a:solidFill>
+                <a:latin typeface="微软雅黑"/>
+                <a:ea typeface="微软雅黑"/>
+                <a:cs typeface="微软雅黑"/>
+              </a:rPr>
+              <a:t>FastAPI 路由</a:t>
+            </a:r>
+          </a:p>
+        </p:txBody>
+      </p:sp>
+      <p:sp>
+        <p:nvSpPr>
+          <p:cNvPr id="10" name="Rounded Rectangle 9"/>
+          <p:cNvSpPr/>
+          <p:nvPr/>
+        </p:nvSpPr>
+        <p:spPr>
+          <a:xfrm>
+            <a:off x="2926079" y="1335024"/>
+            <a:ext cx="1051560" cy="493776"/>
+          </a:xfrm>
+          <a:prstGeom prst="roundRect">
+            <a:avLst>
+              <a:gd name="adj" fmla="val 5000"/>
+            </a:avLst>
+          </a:prstGeom>
+          <a:solidFill>
+            <a:srgbClr val="FFFFFF"/>
+          </a:solidFill>
+          <a:ln w="12700">
+            <a:solidFill>
+              <a:srgbClr val="C9C9C2"/>
+            </a:solidFill>
+          </a:ln>
+          <a:effectLst/>
+        </p:spPr>
+        <p:style>
+          <a:lnRef idx="1">
+            <a:schemeClr val="accent1"/>
+          </a:lnRef>
+          <a:fillRef idx="3">
+            <a:schemeClr val="accent1"/>
+          </a:fillRef>
+          <a:effectRef idx="2">
+            <a:schemeClr val="accent1"/>
+          </a:effectRef>
+          <a:fontRef idx="minor">
+            <a:schemeClr val="lt1"/>
+          </a:fontRef>
+        </p:style>
+        <p:txBody>
+          <a:bodyPr rtlCol="0" anchor="ctr" wrap="square"/>
+          <a:lstStyle/>
+          <a:p>
+            <a:pPr algn="ctr"/>
+          </a:p>
+        </p:txBody>
+      </p:sp>
+      <p:sp>
+        <p:nvSpPr>
+          <p:cNvPr id="11" name="TextBox 10"/>
+          <p:cNvSpPr txBox="1"/>
+          <p:nvPr/>
+        </p:nvSpPr>
+        <p:spPr>
+          <a:xfrm>
+            <a:off x="2962656" y="1353312"/>
+            <a:ext cx="978407" cy="457200"/>
+          </a:xfrm>
+          <a:prstGeom prst="rect">
+            <a:avLst/>
+          </a:prstGeom>
+          <a:noFill/>
+        </p:spPr>
+        <p:txBody>
+          <a:bodyPr wrap="square" lIns="27432" rIns="27432" tIns="9144" bIns="9144" anchor="ctr">
+            <a:spAutoFit/>
+          </a:bodyPr>
+          <a:lstStyle/>
+          <a:p>
+            <a:pPr algn="ctr">
+              <a:lnSpc>
+                <a:spcPct val="110000"/>
+              </a:lnSpc>
+            </a:pPr>
+            <a:r>
+              <a:rPr sz="850" b="1">
+                <a:solidFill>
+                  <a:srgbClr val="141414"/>
+                </a:solidFill>
+                <a:latin typeface="微软雅黑"/>
+                <a:ea typeface="微软雅黑"/>
+                <a:cs typeface="微软雅黑"/>
+              </a:rPr>
+              <a:t>Controller</a:t>
+            </a:r>
+          </a:p>
+          <a:p>
+            <a:pPr algn="ctr">
+              <a:lnSpc>
+                <a:spcPct val="110000"/>
+              </a:lnSpc>
+              <a:spcBef>
+                <a:spcPts val="100"/>
+              </a:spcBef>
+            </a:pPr>
+            <a:r>
+              <a:rPr sz="700" b="0">
+                <a:solidFill>
+                  <a:srgbClr val="5C5C56"/>
+                </a:solidFill>
+                <a:latin typeface="微软雅黑"/>
+                <a:ea typeface="微软雅黑"/>
+                <a:cs typeface="微软雅黑"/>
+              </a:rPr>
+              <a:t>调度与占用</a:t>
+            </a:r>
+          </a:p>
+        </p:txBody>
+      </p:sp>
+      <p:sp>
+        <p:nvSpPr>
+          <p:cNvPr id="12" name="Rounded Rectangle 11"/>
+          <p:cNvSpPr/>
+          <p:nvPr/>
+        </p:nvSpPr>
+        <p:spPr>
+          <a:xfrm>
+            <a:off x="4251959" y="1335024"/>
+            <a:ext cx="1051560" cy="493776"/>
+          </a:xfrm>
+          <a:prstGeom prst="roundRect">
+            <a:avLst>
+              <a:gd name="adj" fmla="val 5000"/>
+            </a:avLst>
+          </a:prstGeom>
+          <a:solidFill>
+            <a:srgbClr val="FFFFFF"/>
+          </a:solidFill>
+          <a:ln w="12700">
+            <a:solidFill>
+              <a:srgbClr val="C9C9C2"/>
+            </a:solidFill>
+          </a:ln>
+          <a:effectLst/>
+        </p:spPr>
+        <p:style>
+          <a:lnRef idx="1">
+            <a:schemeClr val="accent1"/>
+          </a:lnRef>
+          <a:fillRef idx="3">
+            <a:schemeClr val="accent1"/>
+          </a:fillRef>
+          <a:effectRef idx="2">
+            <a:schemeClr val="accent1"/>
+          </a:effectRef>
+          <a:fontRef idx="minor">
+            <a:schemeClr val="lt1"/>
+          </a:fontRef>
+        </p:style>
+        <p:txBody>
+          <a:bodyPr rtlCol="0" anchor="ctr" wrap="square"/>
+          <a:lstStyle/>
+          <a:p>
+            <a:pPr algn="ctr"/>
+          </a:p>
+        </p:txBody>
+      </p:sp>
+      <p:sp>
+        <p:nvSpPr>
+          <p:cNvPr id="13" name="TextBox 12"/>
+          <p:cNvSpPr txBox="1"/>
+          <p:nvPr/>
+        </p:nvSpPr>
+        <p:spPr>
+          <a:xfrm>
+            <a:off x="4288536" y="1353312"/>
+            <a:ext cx="978407" cy="457200"/>
+          </a:xfrm>
+          <a:prstGeom prst="rect">
+            <a:avLst/>
+          </a:prstGeom>
+          <a:noFill/>
+        </p:spPr>
+        <p:txBody>
+          <a:bodyPr wrap="square" lIns="27432" rIns="27432" tIns="9144" bIns="9144" anchor="ctr">
+            <a:spAutoFit/>
+          </a:bodyPr>
+          <a:lstStyle/>
+          <a:p>
+            <a:pPr algn="ctr">
+              <a:lnSpc>
+                <a:spcPct val="110000"/>
+              </a:lnSpc>
+            </a:pPr>
+            <a:r>
+              <a:rPr sz="850" b="1">
+                <a:solidFill>
+                  <a:srgbClr val="141414"/>
+                </a:solidFill>
+                <a:latin typeface="微软雅黑"/>
+                <a:ea typeface="微软雅黑"/>
+                <a:cs typeface="微软雅黑"/>
+              </a:rPr>
+              <a:t>Runner 进程</a:t>
+            </a:r>
+          </a:p>
+          <a:p>
+            <a:pPr algn="ctr">
+              <a:lnSpc>
+                <a:spcPct val="110000"/>
+              </a:lnSpc>
+              <a:spcBef>
+                <a:spcPts val="100"/>
+              </a:spcBef>
+            </a:pPr>
+            <a:r>
+              <a:rPr sz="700" b="0">
+                <a:solidFill>
+                  <a:srgbClr val="5C5C56"/>
+                </a:solidFill>
+                <a:latin typeface="微软雅黑"/>
+                <a:ea typeface="微软雅黑"/>
+                <a:cs typeface="微软雅黑"/>
+              </a:rPr>
+              <a:t>执行代理</a:t>
+            </a:r>
+          </a:p>
+        </p:txBody>
+      </p:sp>
+      <p:sp>
+        <p:nvSpPr>
+          <p:cNvPr id="14" name="Rounded Rectangle 13"/>
+          <p:cNvSpPr/>
+          <p:nvPr/>
+        </p:nvSpPr>
+        <p:spPr>
+          <a:xfrm>
+            <a:off x="5577840" y="1335024"/>
+            <a:ext cx="1051560" cy="493776"/>
+          </a:xfrm>
+          <a:prstGeom prst="roundRect">
+            <a:avLst>
+              <a:gd name="adj" fmla="val 5000"/>
+            </a:avLst>
+          </a:prstGeom>
+          <a:solidFill>
+            <a:srgbClr val="FFFFFF"/>
+          </a:solidFill>
+          <a:ln w="12700">
+            <a:solidFill>
+              <a:srgbClr val="C9C9C2"/>
+            </a:solidFill>
+          </a:ln>
+          <a:effectLst/>
+        </p:spPr>
+        <p:style>
+          <a:lnRef idx="1">
+            <a:schemeClr val="accent1"/>
+          </a:lnRef>
+          <a:fillRef idx="3">
+            <a:schemeClr val="accent1"/>
+          </a:fillRef>
+          <a:effectRef idx="2">
+            <a:schemeClr val="accent1"/>
+          </a:effectRef>
+          <a:fontRef idx="minor">
+            <a:schemeClr val="lt1"/>
+          </a:fontRef>
+        </p:style>
+        <p:txBody>
+          <a:bodyPr rtlCol="0" anchor="ctr" wrap="square"/>
+          <a:lstStyle/>
+          <a:p>
+            <a:pPr algn="ctr"/>
+          </a:p>
+        </p:txBody>
+      </p:sp>
+      <p:sp>
+        <p:nvSpPr>
+          <p:cNvPr id="15" name="TextBox 14"/>
+          <p:cNvSpPr txBox="1"/>
+          <p:nvPr/>
+        </p:nvSpPr>
+        <p:spPr>
+          <a:xfrm>
+            <a:off x="5614416" y="1353312"/>
+            <a:ext cx="978407" cy="457200"/>
+          </a:xfrm>
+          <a:prstGeom prst="rect">
+            <a:avLst/>
+          </a:prstGeom>
+          <a:noFill/>
+        </p:spPr>
+        <p:txBody>
+          <a:bodyPr wrap="square" lIns="27432" rIns="27432" tIns="9144" bIns="9144" anchor="ctr">
+            <a:spAutoFit/>
+          </a:bodyPr>
+          <a:lstStyle/>
+          <a:p>
+            <a:pPr algn="ctr">
+              <a:lnSpc>
+                <a:spcPct val="110000"/>
+              </a:lnSpc>
+            </a:pPr>
+            <a:r>
+              <a:rPr sz="850" b="1">
+                <a:solidFill>
+                  <a:srgbClr val="141414"/>
+                </a:solidFill>
+                <a:latin typeface="微软雅黑"/>
+                <a:ea typeface="微软雅黑"/>
+                <a:cs typeface="微软雅黑"/>
+              </a:rPr>
+              <a:t>驱动适配层</a:t>
+            </a:r>
+          </a:p>
+          <a:p>
+            <a:pPr algn="ctr">
+              <a:lnSpc>
+                <a:spcPct val="110000"/>
+              </a:lnSpc>
+              <a:spcBef>
+                <a:spcPts val="100"/>
+              </a:spcBef>
+            </a:pPr>
+            <a:r>
+              <a:rPr sz="700" b="0">
+                <a:solidFill>
+                  <a:srgbClr val="5C5C56"/>
+                </a:solidFill>
+                <a:latin typeface="微软雅黑"/>
+                <a:ea typeface="微软雅黑"/>
+                <a:cs typeface="微软雅黑"/>
+              </a:rPr>
+              <a:t>统一能力接口</a:t>
+            </a:r>
+          </a:p>
+        </p:txBody>
+      </p:sp>
+      <p:sp>
+        <p:nvSpPr>
+          <p:cNvPr id="16" name="Rounded Rectangle 15"/>
+          <p:cNvSpPr/>
+          <p:nvPr/>
+        </p:nvSpPr>
+        <p:spPr>
+          <a:xfrm>
+            <a:off x="6903720" y="1335024"/>
+            <a:ext cx="1051560" cy="493776"/>
+          </a:xfrm>
+          <a:prstGeom prst="roundRect">
+            <a:avLst>
+              <a:gd name="adj" fmla="val 5000"/>
+            </a:avLst>
+          </a:prstGeom>
+          <a:solidFill>
+            <a:srgbClr val="FFFFFF"/>
+          </a:solidFill>
+          <a:ln w="12700">
+            <a:solidFill>
+              <a:srgbClr val="C9C9C2"/>
+            </a:solidFill>
+          </a:ln>
+          <a:effectLst/>
+        </p:spPr>
+        <p:style>
+          <a:lnRef idx="1">
+            <a:schemeClr val="accent1"/>
+          </a:lnRef>
+          <a:fillRef idx="3">
+            <a:schemeClr val="accent1"/>
+          </a:fillRef>
+          <a:effectRef idx="2">
+            <a:schemeClr val="accent1"/>
+          </a:effectRef>
+          <a:fontRef idx="minor">
+            <a:schemeClr val="lt1"/>
+          </a:fontRef>
+        </p:style>
+        <p:txBody>
+          <a:bodyPr rtlCol="0" anchor="ctr" wrap="square"/>
+          <a:lstStyle/>
+          <a:p>
+            <a:pPr algn="ctr"/>
+          </a:p>
+        </p:txBody>
+      </p:sp>
+      <p:sp>
+        <p:nvSpPr>
+          <p:cNvPr id="17" name="TextBox 16"/>
+          <p:cNvSpPr txBox="1"/>
+          <p:nvPr/>
+        </p:nvSpPr>
+        <p:spPr>
+          <a:xfrm>
+            <a:off x="6940296" y="1353312"/>
+            <a:ext cx="978407" cy="457200"/>
+          </a:xfrm>
+          <a:prstGeom prst="rect">
+            <a:avLst/>
+          </a:prstGeom>
+          <a:noFill/>
+        </p:spPr>
+        <p:txBody>
+          <a:bodyPr wrap="square" lIns="27432" rIns="27432" tIns="9144" bIns="9144" anchor="ctr">
+            <a:spAutoFit/>
+          </a:bodyPr>
+          <a:lstStyle/>
+          <a:p>
+            <a:pPr algn="ctr">
+              <a:lnSpc>
+                <a:spcPct val="110000"/>
+              </a:lnSpc>
+            </a:pPr>
+            <a:r>
+              <a:rPr sz="850" b="1">
+                <a:solidFill>
+                  <a:srgbClr val="141414"/>
+                </a:solidFill>
+                <a:latin typeface="微软雅黑"/>
+                <a:ea typeface="微软雅黑"/>
+                <a:cs typeface="微软雅黑"/>
+              </a:rPr>
+              <a:t>仪器</a:t>
+            </a:r>
+          </a:p>
+          <a:p>
+            <a:pPr algn="ctr">
+              <a:lnSpc>
+                <a:spcPct val="110000"/>
+              </a:lnSpc>
+              <a:spcBef>
+                <a:spcPts val="100"/>
+              </a:spcBef>
+            </a:pPr>
+            <a:r>
+              <a:rPr sz="700" b="0">
+                <a:solidFill>
+                  <a:srgbClr val="5C5C56"/>
+                </a:solidFill>
+                <a:latin typeface="微软雅黑"/>
+                <a:ea typeface="微软雅黑"/>
+                <a:cs typeface="微软雅黑"/>
+              </a:rPr>
+              <a:t>VISA / 串口 / CAN</a:t>
+            </a:r>
+          </a:p>
+        </p:txBody>
+      </p:sp>
+      <p:cxnSp>
+        <p:nvCxnSpPr>
+          <p:cNvPr id="18" name="Connector 17"/>
+          <p:cNvCxnSpPr/>
+          <p:nvPr/>
+        </p:nvCxnSpPr>
+        <p:spPr>
+          <a:xfrm>
+            <a:off x="1325880" y="1581912"/>
+            <a:ext cx="274320" cy="0"/>
+          </a:xfrm>
+          <a:prstGeom prst="line">
+            <a:avLst/>
+          </a:prstGeom>
+          <a:ln w="16510">
+            <a:solidFill>
+              <a:srgbClr val="5C5C56"/>
+            </a:solidFill>
+            <a:tailEnd type="triangle" w="lg" len="lg"/>
+          </a:ln>
+        </p:spPr>
+        <p:style>
+          <a:lnRef idx="2">
+            <a:schemeClr val="accent1"/>
+          </a:lnRef>
+          <a:fillRef idx="0">
+            <a:schemeClr val="accent1"/>
+          </a:fillRef>
+          <a:effectRef idx="1">
+            <a:schemeClr val="accent1"/>
+          </a:effectRef>
+          <a:fontRef idx="minor">
+            <a:schemeClr val="tx1"/>
+          </a:fontRef>
+        </p:style>
+      </p:cxnSp>
+      <p:sp>
+        <p:nvSpPr>
+          <p:cNvPr id="19" name="TextBox 18"/>
+          <p:cNvSpPr txBox="1"/>
+          <p:nvPr/>
+        </p:nvSpPr>
+        <p:spPr>
+          <a:xfrm>
+            <a:off x="1069848" y="1865376"/>
+            <a:ext cx="786384" cy="201168"/>
+          </a:xfrm>
+          <a:prstGeom prst="rect">
+            <a:avLst/>
+          </a:prstGeom>
+          <a:noFill/>
+        </p:spPr>
+        <p:txBody>
+          <a:bodyPr wrap="square" lIns="27432" rIns="27432" tIns="9144" bIns="9144" anchor="ctr">
+            <a:spAutoFit/>
+          </a:bodyPr>
+          <a:lstStyle/>
+          <a:p>
+            <a:pPr algn="ctr">
+              <a:lnSpc>
+                <a:spcPct val="110000"/>
+              </a:lnSpc>
+            </a:pPr>
+            <a:r>
+              <a:rPr sz="650" b="0">
+                <a:solidFill>
+                  <a:srgbClr val="5C5C56"/>
+                </a:solidFill>
+                <a:latin typeface="微软雅黑"/>
+                <a:ea typeface="微软雅黑"/>
+                <a:cs typeface="微软雅黑"/>
+              </a:rPr>
+              <a:t>HTTP / JSON</a:t>
+            </a:r>
+          </a:p>
+        </p:txBody>
+      </p:sp>
+      <p:cxnSp>
+        <p:nvCxnSpPr>
+          <p:cNvPr id="20" name="Connector 19"/>
+          <p:cNvCxnSpPr/>
+          <p:nvPr/>
+        </p:nvCxnSpPr>
+        <p:spPr>
+          <a:xfrm>
+            <a:off x="2651760" y="1581912"/>
+            <a:ext cx="274320" cy="0"/>
+          </a:xfrm>
+          <a:prstGeom prst="line">
+            <a:avLst/>
+          </a:prstGeom>
+          <a:ln w="16510">
+            <a:solidFill>
+              <a:srgbClr val="5C5C56"/>
+            </a:solidFill>
+            <a:tailEnd type="triangle" w="lg" len="lg"/>
+          </a:ln>
+        </p:spPr>
+        <p:style>
+          <a:lnRef idx="2">
+            <a:schemeClr val="accent1"/>
+          </a:lnRef>
+          <a:fillRef idx="0">
+            <a:schemeClr val="accent1"/>
+          </a:fillRef>
+          <a:effectRef idx="1">
+            <a:schemeClr val="accent1"/>
+          </a:effectRef>
+          <a:fontRef idx="minor">
+            <a:schemeClr val="tx1"/>
+          </a:fontRef>
+        </p:style>
+      </p:cxnSp>
+      <p:sp>
+        <p:nvSpPr>
+          <p:cNvPr id="21" name="TextBox 20"/>
+          <p:cNvSpPr txBox="1"/>
+          <p:nvPr/>
+        </p:nvSpPr>
+        <p:spPr>
+          <a:xfrm>
+            <a:off x="2395728" y="1865376"/>
+            <a:ext cx="786384" cy="201168"/>
+          </a:xfrm>
+          <a:prstGeom prst="rect">
+            <a:avLst/>
+          </a:prstGeom>
+          <a:noFill/>
+        </p:spPr>
+        <p:txBody>
+          <a:bodyPr wrap="square" lIns="27432" rIns="27432" tIns="9144" bIns="9144" anchor="ctr">
+            <a:spAutoFit/>
+          </a:bodyPr>
+          <a:lstStyle/>
+          <a:p>
+            <a:pPr algn="ctr">
+              <a:lnSpc>
+                <a:spcPct val="110000"/>
+              </a:lnSpc>
+            </a:pPr>
+            <a:r>
+              <a:rPr sz="650" b="0">
+                <a:solidFill>
+                  <a:srgbClr val="5C5C56"/>
+                </a:solidFill>
+                <a:latin typeface="微软雅黑"/>
+                <a:ea typeface="微软雅黑"/>
+                <a:cs typeface="微软雅黑"/>
+              </a:rPr>
+              <a:t>REST 调用</a:t>
+            </a:r>
+          </a:p>
+        </p:txBody>
+      </p:sp>
+      <p:cxnSp>
+        <p:nvCxnSpPr>
+          <p:cNvPr id="22" name="Connector 21"/>
+          <p:cNvCxnSpPr/>
+          <p:nvPr/>
+        </p:nvCxnSpPr>
+        <p:spPr>
+          <a:xfrm>
+            <a:off x="3977639" y="1581912"/>
+            <a:ext cx="274320" cy="0"/>
+          </a:xfrm>
+          <a:prstGeom prst="line">
+            <a:avLst/>
+          </a:prstGeom>
+          <a:ln w="16510">
+            <a:solidFill>
+              <a:srgbClr val="5C5C56"/>
+            </a:solidFill>
+            <a:tailEnd type="triangle" w="lg" len="lg"/>
+          </a:ln>
+        </p:spPr>
+        <p:style>
+          <a:lnRef idx="2">
+            <a:schemeClr val="accent1"/>
+          </a:lnRef>
+          <a:fillRef idx="0">
+            <a:schemeClr val="accent1"/>
+          </a:fillRef>
+          <a:effectRef idx="1">
+            <a:schemeClr val="accent1"/>
+          </a:effectRef>
+          <a:fontRef idx="minor">
+            <a:schemeClr val="tx1"/>
+          </a:fontRef>
+        </p:style>
+      </p:cxnSp>
+      <p:sp>
+        <p:nvSpPr>
+          <p:cNvPr id="23" name="TextBox 22"/>
+          <p:cNvSpPr txBox="1"/>
+          <p:nvPr/>
+        </p:nvSpPr>
+        <p:spPr>
+          <a:xfrm>
+            <a:off x="3721607" y="1865376"/>
+            <a:ext cx="786384" cy="201168"/>
+          </a:xfrm>
+          <a:prstGeom prst="rect">
+            <a:avLst/>
+          </a:prstGeom>
+          <a:noFill/>
+        </p:spPr>
+        <p:txBody>
+          <a:bodyPr wrap="square" lIns="27432" rIns="27432" tIns="9144" bIns="9144" anchor="ctr">
+            <a:spAutoFit/>
+          </a:bodyPr>
+          <a:lstStyle/>
+          <a:p>
+            <a:pPr algn="ctr">
+              <a:lnSpc>
+                <a:spcPct val="110000"/>
+              </a:lnSpc>
+            </a:pPr>
+            <a:r>
+              <a:rPr sz="650" b="0">
+                <a:solidFill>
+                  <a:srgbClr val="5C5C56"/>
+                </a:solidFill>
+                <a:latin typeface="微软雅黑"/>
+                <a:ea typeface="微软雅黑"/>
+                <a:cs typeface="微软雅黑"/>
+              </a:rPr>
+              <a:t>任务 + 参数</a:t>
+            </a:r>
+          </a:p>
+        </p:txBody>
+      </p:sp>
+      <p:cxnSp>
+        <p:nvCxnSpPr>
+          <p:cNvPr id="24" name="Connector 23"/>
+          <p:cNvCxnSpPr/>
+          <p:nvPr/>
+        </p:nvCxnSpPr>
+        <p:spPr>
+          <a:xfrm>
+            <a:off x="5303519" y="1581912"/>
+            <a:ext cx="274320" cy="0"/>
+          </a:xfrm>
+          <a:prstGeom prst="line">
+            <a:avLst/>
+          </a:prstGeom>
+          <a:ln w="16510">
+            <a:solidFill>
+              <a:srgbClr val="5C5C56"/>
+            </a:solidFill>
+            <a:tailEnd type="triangle" w="lg" len="lg"/>
+          </a:ln>
+        </p:spPr>
+        <p:style>
+          <a:lnRef idx="2">
+            <a:schemeClr val="accent1"/>
+          </a:lnRef>
+          <a:fillRef idx="0">
+            <a:schemeClr val="accent1"/>
+          </a:fillRef>
+          <a:effectRef idx="1">
+            <a:schemeClr val="accent1"/>
+          </a:effectRef>
+          <a:fontRef idx="minor">
+            <a:schemeClr val="tx1"/>
+          </a:fontRef>
+        </p:style>
+      </p:cxnSp>
+      <p:sp>
+        <p:nvSpPr>
+          <p:cNvPr id="25" name="TextBox 24"/>
+          <p:cNvSpPr txBox="1"/>
+          <p:nvPr/>
+        </p:nvSpPr>
+        <p:spPr>
+          <a:xfrm>
+            <a:off x="5047487" y="1865376"/>
+            <a:ext cx="786384" cy="201168"/>
+          </a:xfrm>
+          <a:prstGeom prst="rect">
+            <a:avLst/>
+          </a:prstGeom>
+          <a:noFill/>
+        </p:spPr>
+        <p:txBody>
+          <a:bodyPr wrap="square" lIns="27432" rIns="27432" tIns="9144" bIns="9144" anchor="ctr">
+            <a:spAutoFit/>
+          </a:bodyPr>
+          <a:lstStyle/>
+          <a:p>
+            <a:pPr algn="ctr">
+              <a:lnSpc>
+                <a:spcPct val="110000"/>
+              </a:lnSpc>
+            </a:pPr>
+            <a:r>
+              <a:rPr sz="650" b="0">
+                <a:solidFill>
+                  <a:srgbClr val="5C5C56"/>
+                </a:solidFill>
+                <a:latin typeface="微软雅黑"/>
+                <a:ea typeface="微软雅黑"/>
+                <a:cs typeface="微软雅黑"/>
+              </a:rPr>
+              <a:t>进程内 import</a:t>
+            </a:r>
+          </a:p>
+        </p:txBody>
+      </p:sp>
+      <p:cxnSp>
+        <p:nvCxnSpPr>
+          <p:cNvPr id="26" name="Connector 25"/>
+          <p:cNvCxnSpPr/>
+          <p:nvPr/>
+        </p:nvCxnSpPr>
+        <p:spPr>
+          <a:xfrm>
+            <a:off x="6629400" y="1581912"/>
+            <a:ext cx="274320" cy="0"/>
+          </a:xfrm>
+          <a:prstGeom prst="line">
+            <a:avLst/>
+          </a:prstGeom>
+          <a:ln w="16510">
+            <a:solidFill>
+              <a:srgbClr val="5C5C56"/>
+            </a:solidFill>
+            <a:tailEnd type="triangle" w="lg" len="lg"/>
+          </a:ln>
+        </p:spPr>
+        <p:style>
+          <a:lnRef idx="2">
+            <a:schemeClr val="accent1"/>
+          </a:lnRef>
+          <a:fillRef idx="0">
+            <a:schemeClr val="accent1"/>
+          </a:fillRef>
+          <a:effectRef idx="1">
+            <a:schemeClr val="accent1"/>
+          </a:effectRef>
+          <a:fontRef idx="minor">
+            <a:schemeClr val="tx1"/>
+          </a:fontRef>
+        </p:style>
+      </p:cxnSp>
+      <p:sp>
+        <p:nvSpPr>
+          <p:cNvPr id="27" name="TextBox 26"/>
+          <p:cNvSpPr txBox="1"/>
+          <p:nvPr/>
+        </p:nvSpPr>
+        <p:spPr>
+          <a:xfrm>
+            <a:off x="6373368" y="1865376"/>
+            <a:ext cx="786384" cy="201168"/>
+          </a:xfrm>
+          <a:prstGeom prst="rect">
+            <a:avLst/>
+          </a:prstGeom>
+          <a:noFill/>
+        </p:spPr>
+        <p:txBody>
+          <a:bodyPr wrap="square" lIns="27432" rIns="27432" tIns="9144" bIns="9144" anchor="ctr">
+            <a:spAutoFit/>
+          </a:bodyPr>
+          <a:lstStyle/>
+          <a:p>
+            <a:pPr algn="ctr">
+              <a:lnSpc>
+                <a:spcPct val="110000"/>
+              </a:lnSpc>
+            </a:pPr>
+            <a:r>
+              <a:rPr sz="650" b="0">
+                <a:solidFill>
+                  <a:srgbClr val="5C5C56"/>
+                </a:solidFill>
+                <a:latin typeface="微软雅黑"/>
+                <a:ea typeface="微软雅黑"/>
+                <a:cs typeface="微软雅黑"/>
+              </a:rPr>
+              <a:t>VISA / 串口</a:t>
+            </a:r>
+          </a:p>
+        </p:txBody>
+      </p:sp>
+      <p:sp>
+        <p:nvSpPr>
+          <p:cNvPr id="28" name="TextBox 27"/>
+          <p:cNvSpPr txBox="1"/>
+          <p:nvPr/>
+        </p:nvSpPr>
+        <p:spPr>
+          <a:xfrm>
+            <a:off x="274320" y="2157984"/>
+            <a:ext cx="8046720" cy="237744"/>
+          </a:xfrm>
+          <a:prstGeom prst="rect">
+            <a:avLst/>
+          </a:prstGeom>
+          <a:noFill/>
+        </p:spPr>
+        <p:txBody>
+          <a:bodyPr wrap="square" lIns="27432" rIns="27432" tIns="9144" bIns="9144" anchor="ctr">
+            <a:spAutoFit/>
+          </a:bodyPr>
+          <a:lstStyle/>
+          <a:p>
+            <a:pPr algn="l">
+              <a:lnSpc>
+                <a:spcPct val="110000"/>
+              </a:lnSpc>
+            </a:pPr>
+            <a:r>
+              <a:rPr sz="950" b="1">
+                <a:solidFill>
+                  <a:srgbClr val="8B0F1A"/>
+                </a:solidFill>
+                <a:latin typeface="微软雅黑"/>
+                <a:ea typeface="微软雅黑"/>
+                <a:cs typeface="微软雅黑"/>
+              </a:rPr>
+              <a:t>② ATE Runner 内部逻辑视图（自上而下五层）</a:t>
+            </a:r>
+          </a:p>
+        </p:txBody>
+      </p:sp>
+      <p:sp>
+        <p:nvSpPr>
+          <p:cNvPr id="29" name="Rounded Rectangle 28"/>
+          <p:cNvSpPr/>
+          <p:nvPr/>
+        </p:nvSpPr>
+        <p:spPr>
+          <a:xfrm>
+            <a:off x="274320" y="2432304"/>
+            <a:ext cx="1188720" cy="566928"/>
+          </a:xfrm>
+          <a:prstGeom prst="roundRect">
+            <a:avLst>
+              <a:gd name="adj" fmla="val 5000"/>
+            </a:avLst>
+          </a:prstGeom>
+          <a:solidFill>
+            <a:srgbClr val="ECECEC"/>
+          </a:solidFill>
+          <a:ln>
+            <a:noFill/>
+          </a:ln>
+          <a:effectLst/>
+        </p:spPr>
+        <p:style>
+          <a:lnRef idx="1">
+            <a:schemeClr val="accent1"/>
+          </a:lnRef>
+          <a:fillRef idx="3">
+            <a:schemeClr val="accent1"/>
+          </a:fillRef>
+          <a:effectRef idx="2">
+            <a:schemeClr val="accent1"/>
+          </a:effectRef>
+          <a:fontRef idx="minor">
+            <a:schemeClr val="lt1"/>
+          </a:fontRef>
+        </p:style>
+        <p:txBody>
+          <a:bodyPr rtlCol="0" anchor="ctr" wrap="square"/>
+          <a:lstStyle/>
+          <a:p>
+            <a:pPr algn="ctr"/>
+          </a:p>
+        </p:txBody>
+      </p:sp>
+      <p:sp>
+        <p:nvSpPr>
+          <p:cNvPr id="30" name="TextBox 29"/>
+          <p:cNvSpPr txBox="1"/>
+          <p:nvPr/>
+        </p:nvSpPr>
+        <p:spPr>
+          <a:xfrm>
+            <a:off x="310896" y="2432304"/>
+            <a:ext cx="1115568" cy="566928"/>
+          </a:xfrm>
+          <a:prstGeom prst="rect">
+            <a:avLst/>
+          </a:prstGeom>
+          <a:noFill/>
+        </p:spPr>
+        <p:txBody>
+          <a:bodyPr wrap="square" lIns="27432" rIns="27432" tIns="9144" bIns="9144" anchor="ctr">
+            <a:spAutoFit/>
+          </a:bodyPr>
+          <a:lstStyle/>
+          <a:p>
+            <a:pPr algn="ctr">
+              <a:lnSpc>
+                <a:spcPct val="110000"/>
+              </a:lnSpc>
+            </a:pPr>
+            <a:r>
+              <a:rPr sz="850" b="1">
+                <a:solidFill>
+                  <a:srgbClr val="141414"/>
+                </a:solidFill>
+                <a:latin typeface="微软雅黑"/>
+                <a:ea typeface="微软雅黑"/>
+                <a:cs typeface="微软雅黑"/>
+              </a:rPr>
+              <a:t>L5 入口层</a:t>
+            </a:r>
+          </a:p>
+        </p:txBody>
+      </p:sp>
+      <p:sp>
+        <p:nvSpPr>
+          <p:cNvPr id="31" name="Rounded Rectangle 30"/>
+          <p:cNvSpPr/>
+          <p:nvPr/>
+        </p:nvSpPr>
+        <p:spPr>
+          <a:xfrm>
+            <a:off x="1536192" y="2432304"/>
+            <a:ext cx="4160520" cy="566928"/>
+          </a:xfrm>
+          <a:prstGeom prst="roundRect">
+            <a:avLst>
+              <a:gd name="adj" fmla="val 5000"/>
+            </a:avLst>
+          </a:prstGeom>
+          <a:solidFill>
+            <a:srgbClr val="FFFFFF"/>
+          </a:solidFill>
+          <a:ln w="12700">
+            <a:solidFill>
+              <a:srgbClr val="C9C9C2"/>
+            </a:solidFill>
+          </a:ln>
+          <a:effectLst/>
+        </p:spPr>
+        <p:style>
+          <a:lnRef idx="1">
+            <a:schemeClr val="accent1"/>
+          </a:lnRef>
+          <a:fillRef idx="3">
+            <a:schemeClr val="accent1"/>
+          </a:fillRef>
+          <a:effectRef idx="2">
+            <a:schemeClr val="accent1"/>
+          </a:effectRef>
+          <a:fontRef idx="minor">
+            <a:schemeClr val="lt1"/>
+          </a:fontRef>
+        </p:style>
+        <p:txBody>
+          <a:bodyPr rtlCol="0" anchor="ctr" wrap="square"/>
+          <a:lstStyle/>
+          <a:p>
+            <a:pPr algn="ctr"/>
+          </a:p>
+        </p:txBody>
+      </p:sp>
+      <p:sp>
+        <p:nvSpPr>
+          <p:cNvPr id="32" name="TextBox 31"/>
+          <p:cNvSpPr txBox="1"/>
+          <p:nvPr/>
+        </p:nvSpPr>
+        <p:spPr>
+          <a:xfrm>
+            <a:off x="1591056" y="2450592"/>
+            <a:ext cx="4050791" cy="530352"/>
+          </a:xfrm>
+          <a:prstGeom prst="rect">
+            <a:avLst/>
+          </a:prstGeom>
+          <a:noFill/>
+        </p:spPr>
+        <p:txBody>
+          <a:bodyPr wrap="square" lIns="27432" rIns="27432" tIns="9144" bIns="9144" anchor="ctr">
+            <a:spAutoFit/>
+          </a:bodyPr>
+          <a:lstStyle/>
+          <a:p>
+            <a:pPr algn="l">
+              <a:lnSpc>
+                <a:spcPct val="110000"/>
+              </a:lnSpc>
+            </a:pPr>
+            <a:r>
+              <a:rPr sz="800" b="0">
+                <a:solidFill>
+                  <a:srgbClr val="5C5C56"/>
+                </a:solidFill>
+                <a:latin typeface="微软雅黑"/>
+                <a:ea typeface="微软雅黑"/>
+                <a:cs typeface="微软雅黑"/>
+              </a:rPr>
+              <a:t>task-agent / CLI：接收任务、校验版本与指纹、登记执行上下文</a:t>
+            </a:r>
+          </a:p>
+        </p:txBody>
+      </p:sp>
+      <p:sp>
+        <p:nvSpPr>
+          <p:cNvPr id="33" name="Rounded Rectangle 32"/>
+          <p:cNvSpPr/>
+          <p:nvPr/>
+        </p:nvSpPr>
+        <p:spPr>
+          <a:xfrm>
+            <a:off x="5769864" y="2432304"/>
+            <a:ext cx="2377440" cy="566928"/>
+          </a:xfrm>
+          <a:prstGeom prst="roundRect">
+            <a:avLst>
+              <a:gd name="adj" fmla="val 5000"/>
+            </a:avLst>
+          </a:prstGeom>
+          <a:solidFill>
+            <a:srgbClr val="E8F0F7"/>
+          </a:solidFill>
+          <a:ln>
+            <a:noFill/>
+          </a:ln>
+          <a:effectLst/>
+        </p:spPr>
+        <p:style>
+          <a:lnRef idx="1">
+            <a:schemeClr val="accent1"/>
+          </a:lnRef>
+          <a:fillRef idx="3">
+            <a:schemeClr val="accent1"/>
+          </a:fillRef>
+          <a:effectRef idx="2">
+            <a:schemeClr val="accent1"/>
+          </a:effectRef>
+          <a:fontRef idx="minor">
+            <a:schemeClr val="lt1"/>
+          </a:fontRef>
+        </p:style>
+        <p:txBody>
+          <a:bodyPr rtlCol="0" anchor="ctr" wrap="square"/>
+          <a:lstStyle/>
+          <a:p>
+            <a:pPr algn="ctr"/>
+          </a:p>
+        </p:txBody>
+      </p:sp>
+      <p:sp>
+        <p:nvSpPr>
+          <p:cNvPr id="34" name="TextBox 33"/>
+          <p:cNvSpPr txBox="1"/>
+          <p:nvPr/>
+        </p:nvSpPr>
+        <p:spPr>
+          <a:xfrm>
+            <a:off x="5824728" y="2450592"/>
+            <a:ext cx="2267712" cy="530352"/>
+          </a:xfrm>
+          <a:prstGeom prst="rect">
+            <a:avLst/>
+          </a:prstGeom>
+          <a:noFill/>
+        </p:spPr>
+        <p:txBody>
+          <a:bodyPr wrap="square" lIns="27432" rIns="27432" tIns="9144" bIns="9144" anchor="ctr">
+            <a:spAutoFit/>
+          </a:bodyPr>
+          <a:lstStyle/>
+          <a:p>
+            <a:pPr algn="l">
+              <a:lnSpc>
+                <a:spcPct val="110000"/>
+              </a:lnSpc>
+            </a:pPr>
+            <a:r>
+              <a:rPr sz="750" b="0">
+                <a:solidFill>
+                  <a:srgbClr val="0F4C81"/>
+                </a:solidFill>
+                <a:latin typeface="微软雅黑"/>
+                <a:ea typeface="微软雅黑"/>
+                <a:cs typeface="微软雅黑"/>
+              </a:rPr>
+              <a:t>耦合：同进程函数调用</a:t>
+            </a:r>
+          </a:p>
+        </p:txBody>
+      </p:sp>
+      <p:sp>
+        <p:nvSpPr>
+          <p:cNvPr id="35" name="Rounded Rectangle 34"/>
+          <p:cNvSpPr/>
+          <p:nvPr/>
+        </p:nvSpPr>
+        <p:spPr>
+          <a:xfrm>
+            <a:off x="274320" y="3090672"/>
+            <a:ext cx="1188720" cy="566928"/>
+          </a:xfrm>
+          <a:prstGeom prst="roundRect">
+            <a:avLst>
+              <a:gd name="adj" fmla="val 5000"/>
+            </a:avLst>
+          </a:prstGeom>
+          <a:solidFill>
+            <a:srgbClr val="ECECEC"/>
+          </a:solidFill>
+          <a:ln>
+            <a:noFill/>
+          </a:ln>
+          <a:effectLst/>
+        </p:spPr>
+        <p:style>
+          <a:lnRef idx="1">
+            <a:schemeClr val="accent1"/>
+          </a:lnRef>
+          <a:fillRef idx="3">
+            <a:schemeClr val="accent1"/>
+          </a:fillRef>
+          <a:effectRef idx="2">
+            <a:schemeClr val="accent1"/>
+          </a:effectRef>
+          <a:fontRef idx="minor">
+            <a:schemeClr val="lt1"/>
+          </a:fontRef>
+        </p:style>
+        <p:txBody>
+          <a:bodyPr rtlCol="0" anchor="ctr" wrap="square"/>
+          <a:lstStyle/>
+          <a:p>
+            <a:pPr algn="ctr"/>
+          </a:p>
+        </p:txBody>
+      </p:sp>
+      <p:sp>
+        <p:nvSpPr>
+          <p:cNvPr id="36" name="TextBox 35"/>
+          <p:cNvSpPr txBox="1"/>
+          <p:nvPr/>
+        </p:nvSpPr>
+        <p:spPr>
+          <a:xfrm>
+            <a:off x="310896" y="3090672"/>
+            <a:ext cx="1115568" cy="566928"/>
+          </a:xfrm>
+          <a:prstGeom prst="rect">
+            <a:avLst/>
+          </a:prstGeom>
+          <a:noFill/>
+        </p:spPr>
+        <p:txBody>
+          <a:bodyPr wrap="square" lIns="27432" rIns="27432" tIns="9144" bIns="9144" anchor="ctr">
+            <a:spAutoFit/>
+          </a:bodyPr>
+          <a:lstStyle/>
+          <a:p>
+            <a:pPr algn="ctr">
+              <a:lnSpc>
+                <a:spcPct val="110000"/>
+              </a:lnSpc>
+            </a:pPr>
+            <a:r>
+              <a:rPr sz="850" b="1">
+                <a:solidFill>
+                  <a:srgbClr val="141414"/>
+                </a:solidFill>
+                <a:latin typeface="微软雅黑"/>
+                <a:ea typeface="微软雅黑"/>
+                <a:cs typeface="微软雅黑"/>
+              </a:rPr>
+              <a:t>L4 编排层</a:t>
+            </a:r>
+          </a:p>
+        </p:txBody>
+      </p:sp>
+      <p:sp>
+        <p:nvSpPr>
+          <p:cNvPr id="37" name="Rounded Rectangle 36"/>
+          <p:cNvSpPr/>
+          <p:nvPr/>
+        </p:nvSpPr>
+        <p:spPr>
+          <a:xfrm>
+            <a:off x="1536192" y="3090672"/>
+            <a:ext cx="4160520" cy="566928"/>
+          </a:xfrm>
+          <a:prstGeom prst="roundRect">
+            <a:avLst>
+              <a:gd name="adj" fmla="val 5000"/>
+            </a:avLst>
+          </a:prstGeom>
+          <a:solidFill>
+            <a:srgbClr val="FFFFFF"/>
+          </a:solidFill>
+          <a:ln w="12700">
+            <a:solidFill>
+              <a:srgbClr val="C9C9C2"/>
+            </a:solidFill>
+          </a:ln>
+          <a:effectLst/>
+        </p:spPr>
+        <p:style>
+          <a:lnRef idx="1">
+            <a:schemeClr val="accent1"/>
+          </a:lnRef>
+          <a:fillRef idx="3">
+            <a:schemeClr val="accent1"/>
+          </a:fillRef>
+          <a:effectRef idx="2">
+            <a:schemeClr val="accent1"/>
+          </a:effectRef>
+          <a:fontRef idx="minor">
+            <a:schemeClr val="lt1"/>
+          </a:fontRef>
+        </p:style>
+        <p:txBody>
+          <a:bodyPr rtlCol="0" anchor="ctr" wrap="square"/>
+          <a:lstStyle/>
+          <a:p>
+            <a:pPr algn="ctr"/>
+          </a:p>
+        </p:txBody>
+      </p:sp>
+      <p:sp>
+        <p:nvSpPr>
+          <p:cNvPr id="38" name="TextBox 37"/>
+          <p:cNvSpPr txBox="1"/>
+          <p:nvPr/>
+        </p:nvSpPr>
+        <p:spPr>
+          <a:xfrm>
+            <a:off x="1591056" y="3108960"/>
+            <a:ext cx="4050791" cy="530352"/>
+          </a:xfrm>
+          <a:prstGeom prst="rect">
+            <a:avLst/>
+          </a:prstGeom>
+          <a:noFill/>
+        </p:spPr>
+        <p:txBody>
+          <a:bodyPr wrap="square" lIns="27432" rIns="27432" tIns="9144" bIns="9144" anchor="ctr">
+            <a:spAutoFit/>
+          </a:bodyPr>
+          <a:lstStyle/>
+          <a:p>
+            <a:pPr algn="l">
+              <a:lnSpc>
+                <a:spcPct val="110000"/>
+              </a:lnSpc>
+            </a:pPr>
+            <a:r>
+              <a:rPr sz="800" b="0">
+                <a:solidFill>
+                  <a:srgbClr val="5C5C56"/>
+                </a:solidFill>
+                <a:latin typeface="微软雅黑"/>
+                <a:ea typeface="微软雅黑"/>
+                <a:cs typeface="微软雅黑"/>
+              </a:rPr>
+              <a:t>workspace / manifest / 模板：建运行目录、渲染用例、注入环境变量</a:t>
+            </a:r>
+          </a:p>
+        </p:txBody>
+      </p:sp>
+      <p:sp>
+        <p:nvSpPr>
+          <p:cNvPr id="39" name="Rounded Rectangle 38"/>
+          <p:cNvSpPr/>
+          <p:nvPr/>
+        </p:nvSpPr>
+        <p:spPr>
+          <a:xfrm>
+            <a:off x="5769864" y="3090672"/>
+            <a:ext cx="2377440" cy="566928"/>
+          </a:xfrm>
+          <a:prstGeom prst="roundRect">
+            <a:avLst>
+              <a:gd name="adj" fmla="val 5000"/>
+            </a:avLst>
+          </a:prstGeom>
+          <a:solidFill>
+            <a:srgbClr val="E8F0F7"/>
+          </a:solidFill>
+          <a:ln>
+            <a:noFill/>
+          </a:ln>
+          <a:effectLst/>
+        </p:spPr>
+        <p:style>
+          <a:lnRef idx="1">
+            <a:schemeClr val="accent1"/>
+          </a:lnRef>
+          <a:fillRef idx="3">
+            <a:schemeClr val="accent1"/>
+          </a:fillRef>
+          <a:effectRef idx="2">
+            <a:schemeClr val="accent1"/>
+          </a:effectRef>
+          <a:fontRef idx="minor">
+            <a:schemeClr val="lt1"/>
+          </a:fontRef>
+        </p:style>
+        <p:txBody>
+          <a:bodyPr rtlCol="0" anchor="ctr" wrap="square"/>
+          <a:lstStyle/>
+          <a:p>
+            <a:pPr algn="ctr"/>
+          </a:p>
+        </p:txBody>
+      </p:sp>
+      <p:sp>
+        <p:nvSpPr>
+          <p:cNvPr id="40" name="TextBox 39"/>
+          <p:cNvSpPr txBox="1"/>
+          <p:nvPr/>
+        </p:nvSpPr>
+        <p:spPr>
+          <a:xfrm>
+            <a:off x="5824728" y="3108960"/>
+            <a:ext cx="2267712" cy="530352"/>
+          </a:xfrm>
+          <a:prstGeom prst="rect">
+            <a:avLst/>
+          </a:prstGeom>
+          <a:noFill/>
+        </p:spPr>
+        <p:txBody>
+          <a:bodyPr wrap="square" lIns="27432" rIns="27432" tIns="9144" bIns="9144" anchor="ctr">
+            <a:spAutoFit/>
+          </a:bodyPr>
+          <a:lstStyle/>
+          <a:p>
+            <a:pPr algn="l">
+              <a:lnSpc>
+                <a:spcPct val="110000"/>
+              </a:lnSpc>
+            </a:pPr>
+            <a:r>
+              <a:rPr sz="750" b="0">
+                <a:solidFill>
+                  <a:srgbClr val="0F4C81"/>
+                </a:solidFill>
+                <a:latin typeface="微软雅黑"/>
+                <a:ea typeface="微软雅黑"/>
+                <a:cs typeface="微软雅黑"/>
+              </a:rPr>
+              <a:t>耦合：子进程 python -m pytest</a:t>
+            </a:r>
+          </a:p>
+        </p:txBody>
+      </p:sp>
+      <p:sp>
+        <p:nvSpPr>
+          <p:cNvPr id="41" name="Rounded Rectangle 40"/>
+          <p:cNvSpPr/>
+          <p:nvPr/>
+        </p:nvSpPr>
+        <p:spPr>
+          <a:xfrm>
+            <a:off x="274320" y="3749039"/>
+            <a:ext cx="1188720" cy="566928"/>
+          </a:xfrm>
+          <a:prstGeom prst="roundRect">
+            <a:avLst>
+              <a:gd name="adj" fmla="val 5000"/>
+            </a:avLst>
+          </a:prstGeom>
+          <a:solidFill>
+            <a:srgbClr val="ECECEC"/>
+          </a:solidFill>
+          <a:ln>
+            <a:noFill/>
+          </a:ln>
+          <a:effectLst/>
+        </p:spPr>
+        <p:style>
+          <a:lnRef idx="1">
+            <a:schemeClr val="accent1"/>
+          </a:lnRef>
+          <a:fillRef idx="3">
+            <a:schemeClr val="accent1"/>
+          </a:fillRef>
+          <a:effectRef idx="2">
+            <a:schemeClr val="accent1"/>
+          </a:effectRef>
+          <a:fontRef idx="minor">
+            <a:schemeClr val="lt1"/>
+          </a:fontRef>
+        </p:style>
+        <p:txBody>
+          <a:bodyPr rtlCol="0" anchor="ctr" wrap="square"/>
+          <a:lstStyle/>
+          <a:p>
+            <a:pPr algn="ctr"/>
+          </a:p>
+        </p:txBody>
+      </p:sp>
+      <p:sp>
+        <p:nvSpPr>
+          <p:cNvPr id="42" name="TextBox 41"/>
+          <p:cNvSpPr txBox="1"/>
+          <p:nvPr/>
+        </p:nvSpPr>
+        <p:spPr>
+          <a:xfrm>
+            <a:off x="310896" y="3749039"/>
+            <a:ext cx="1115568" cy="566928"/>
+          </a:xfrm>
+          <a:prstGeom prst="rect">
+            <a:avLst/>
+          </a:prstGeom>
+          <a:noFill/>
+        </p:spPr>
+        <p:txBody>
+          <a:bodyPr wrap="square" lIns="27432" rIns="27432" tIns="9144" bIns="9144" anchor="ctr">
+            <a:spAutoFit/>
+          </a:bodyPr>
+          <a:lstStyle/>
+          <a:p>
+            <a:pPr algn="ctr">
+              <a:lnSpc>
+                <a:spcPct val="110000"/>
+              </a:lnSpc>
+            </a:pPr>
+            <a:r>
+              <a:rPr sz="850" b="1">
+                <a:solidFill>
+                  <a:srgbClr val="141414"/>
+                </a:solidFill>
+                <a:latin typeface="微软雅黑"/>
+                <a:ea typeface="微软雅黑"/>
+                <a:cs typeface="微软雅黑"/>
+              </a:rPr>
+              <a:t>L3 执行层</a:t>
+            </a:r>
+          </a:p>
+        </p:txBody>
+      </p:sp>
+      <p:sp>
+        <p:nvSpPr>
+          <p:cNvPr id="43" name="Rounded Rectangle 42"/>
+          <p:cNvSpPr/>
+          <p:nvPr/>
+        </p:nvSpPr>
+        <p:spPr>
+          <a:xfrm>
+            <a:off x="1536192" y="3749039"/>
+            <a:ext cx="4160520" cy="566928"/>
+          </a:xfrm>
+          <a:prstGeom prst="roundRect">
+            <a:avLst>
+              <a:gd name="adj" fmla="val 5000"/>
+            </a:avLst>
+          </a:prstGeom>
+          <a:solidFill>
+            <a:srgbClr val="FFFFFF"/>
+          </a:solidFill>
+          <a:ln w="12700">
+            <a:solidFill>
+              <a:srgbClr val="C9C9C2"/>
+            </a:solidFill>
+          </a:ln>
+          <a:effectLst/>
+        </p:spPr>
+        <p:style>
+          <a:lnRef idx="1">
+            <a:schemeClr val="accent1"/>
+          </a:lnRef>
+          <a:fillRef idx="3">
+            <a:schemeClr val="accent1"/>
+          </a:fillRef>
+          <a:effectRef idx="2">
+            <a:schemeClr val="accent1"/>
+          </a:effectRef>
+          <a:fontRef idx="minor">
+            <a:schemeClr val="lt1"/>
+          </a:fontRef>
+        </p:style>
+        <p:txBody>
+          <a:bodyPr rtlCol="0" anchor="ctr" wrap="square"/>
+          <a:lstStyle/>
+          <a:p>
+            <a:pPr algn="ctr"/>
+          </a:p>
+        </p:txBody>
+      </p:sp>
+      <p:sp>
+        <p:nvSpPr>
+          <p:cNvPr id="44" name="TextBox 43"/>
+          <p:cNvSpPr txBox="1"/>
+          <p:nvPr/>
+        </p:nvSpPr>
+        <p:spPr>
+          <a:xfrm>
+            <a:off x="1591056" y="3767327"/>
+            <a:ext cx="4050791" cy="530352"/>
+          </a:xfrm>
+          <a:prstGeom prst="rect">
+            <a:avLst/>
+          </a:prstGeom>
+          <a:noFill/>
+        </p:spPr>
+        <p:txBody>
+          <a:bodyPr wrap="square" lIns="27432" rIns="27432" tIns="9144" bIns="9144" anchor="ctr">
+            <a:spAutoFit/>
+          </a:bodyPr>
+          <a:lstStyle/>
+          <a:p>
+            <a:pPr algn="l">
+              <a:lnSpc>
+                <a:spcPct val="110000"/>
+              </a:lnSpc>
+            </a:pPr>
+            <a:r>
+              <a:rPr sz="800" b="0">
+                <a:solidFill>
+                  <a:srgbClr val="5C5C56"/>
+                </a:solidFill>
+                <a:latin typeface="微软雅黑"/>
+                <a:ea typeface="微软雅黑"/>
+                <a:cs typeface="微软雅黑"/>
+              </a:rPr>
+              <a:t>pytest 进程 + conftest 夹具：会话建连、用例前后置、结果聚合</a:t>
+            </a:r>
+          </a:p>
+        </p:txBody>
+      </p:sp>
+      <p:sp>
+        <p:nvSpPr>
+          <p:cNvPr id="45" name="Rounded Rectangle 44"/>
+          <p:cNvSpPr/>
+          <p:nvPr/>
+        </p:nvSpPr>
+        <p:spPr>
+          <a:xfrm>
+            <a:off x="5769864" y="3749039"/>
+            <a:ext cx="2377440" cy="566928"/>
+          </a:xfrm>
+          <a:prstGeom prst="roundRect">
+            <a:avLst>
+              <a:gd name="adj" fmla="val 5000"/>
+            </a:avLst>
+          </a:prstGeom>
+          <a:solidFill>
+            <a:srgbClr val="E8F0F7"/>
+          </a:solidFill>
+          <a:ln>
+            <a:noFill/>
+          </a:ln>
+          <a:effectLst/>
+        </p:spPr>
+        <p:style>
+          <a:lnRef idx="1">
+            <a:schemeClr val="accent1"/>
+          </a:lnRef>
+          <a:fillRef idx="3">
+            <a:schemeClr val="accent1"/>
+          </a:fillRef>
+          <a:effectRef idx="2">
+            <a:schemeClr val="accent1"/>
+          </a:effectRef>
+          <a:fontRef idx="minor">
+            <a:schemeClr val="lt1"/>
+          </a:fontRef>
+        </p:style>
+        <p:txBody>
+          <a:bodyPr rtlCol="0" anchor="ctr" wrap="square"/>
+          <a:lstStyle/>
+          <a:p>
+            <a:pPr algn="ctr"/>
+          </a:p>
+        </p:txBody>
+      </p:sp>
+      <p:sp>
+        <p:nvSpPr>
+          <p:cNvPr id="46" name="TextBox 45"/>
+          <p:cNvSpPr txBox="1"/>
+          <p:nvPr/>
+        </p:nvSpPr>
+        <p:spPr>
+          <a:xfrm>
+            <a:off x="5824728" y="3767327"/>
+            <a:ext cx="2267712" cy="530352"/>
+          </a:xfrm>
+          <a:prstGeom prst="rect">
+            <a:avLst/>
+          </a:prstGeom>
+          <a:noFill/>
+        </p:spPr>
+        <p:txBody>
+          <a:bodyPr wrap="square" lIns="27432" rIns="27432" tIns="9144" bIns="9144" anchor="ctr">
+            <a:spAutoFit/>
+          </a:bodyPr>
+          <a:lstStyle/>
+          <a:p>
+            <a:pPr algn="l">
+              <a:lnSpc>
+                <a:spcPct val="110000"/>
+              </a:lnSpc>
+            </a:pPr>
+            <a:r>
+              <a:rPr sz="750" b="0">
+                <a:solidFill>
+                  <a:srgbClr val="0F4C81"/>
+                </a:solidFill>
+                <a:latin typeface="微软雅黑"/>
+                <a:ea typeface="微软雅黑"/>
+                <a:cs typeface="微软雅黑"/>
+              </a:rPr>
+              <a:t>耦合：同进程 import（夹具注入）</a:t>
+            </a:r>
+          </a:p>
+        </p:txBody>
+      </p:sp>
+      <p:sp>
+        <p:nvSpPr>
+          <p:cNvPr id="47" name="Rounded Rectangle 46"/>
+          <p:cNvSpPr/>
+          <p:nvPr/>
+        </p:nvSpPr>
+        <p:spPr>
+          <a:xfrm>
+            <a:off x="274320" y="4407407"/>
+            <a:ext cx="1188720" cy="566928"/>
+          </a:xfrm>
+          <a:prstGeom prst="roundRect">
+            <a:avLst>
+              <a:gd name="adj" fmla="val 5000"/>
+            </a:avLst>
+          </a:prstGeom>
+          <a:solidFill>
+            <a:srgbClr val="ECECEC"/>
+          </a:solidFill>
+          <a:ln>
+            <a:noFill/>
+          </a:ln>
+          <a:effectLst/>
+        </p:spPr>
+        <p:style>
+          <a:lnRef idx="1">
+            <a:schemeClr val="accent1"/>
+          </a:lnRef>
+          <a:fillRef idx="3">
+            <a:schemeClr val="accent1"/>
+          </a:fillRef>
+          <a:effectRef idx="2">
+            <a:schemeClr val="accent1"/>
+          </a:effectRef>
+          <a:fontRef idx="minor">
+            <a:schemeClr val="lt1"/>
+          </a:fontRef>
+        </p:style>
+        <p:txBody>
+          <a:bodyPr rtlCol="0" anchor="ctr" wrap="square"/>
+          <a:lstStyle/>
+          <a:p>
+            <a:pPr algn="ctr"/>
+          </a:p>
+        </p:txBody>
+      </p:sp>
+      <p:sp>
+        <p:nvSpPr>
+          <p:cNvPr id="48" name="TextBox 47"/>
+          <p:cNvSpPr txBox="1"/>
+          <p:nvPr/>
+        </p:nvSpPr>
+        <p:spPr>
+          <a:xfrm>
+            <a:off x="310896" y="4407407"/>
+            <a:ext cx="1115568" cy="566928"/>
+          </a:xfrm>
+          <a:prstGeom prst="rect">
+            <a:avLst/>
+          </a:prstGeom>
+          <a:noFill/>
+        </p:spPr>
+        <p:txBody>
+          <a:bodyPr wrap="square" lIns="27432" rIns="27432" tIns="9144" bIns="9144" anchor="ctr">
+            <a:spAutoFit/>
+          </a:bodyPr>
+          <a:lstStyle/>
+          <a:p>
+            <a:pPr algn="ctr">
+              <a:lnSpc>
+                <a:spcPct val="110000"/>
+              </a:lnSpc>
+            </a:pPr>
+            <a:r>
+              <a:rPr sz="850" b="1">
+                <a:solidFill>
+                  <a:srgbClr val="141414"/>
+                </a:solidFill>
+                <a:latin typeface="微软雅黑"/>
+                <a:ea typeface="微软雅黑"/>
+                <a:cs typeface="微软雅黑"/>
+              </a:rPr>
+              <a:t>L2 适配层</a:t>
+            </a:r>
+          </a:p>
+        </p:txBody>
+      </p:sp>
+      <p:sp>
+        <p:nvSpPr>
+          <p:cNvPr id="49" name="Rounded Rectangle 48"/>
+          <p:cNvSpPr/>
+          <p:nvPr/>
+        </p:nvSpPr>
+        <p:spPr>
+          <a:xfrm>
+            <a:off x="1536192" y="4407407"/>
+            <a:ext cx="4160520" cy="566928"/>
+          </a:xfrm>
+          <a:prstGeom prst="roundRect">
+            <a:avLst>
+              <a:gd name="adj" fmla="val 5000"/>
+            </a:avLst>
+          </a:prstGeom>
+          <a:solidFill>
+            <a:srgbClr val="FFFFFF"/>
+          </a:solidFill>
+          <a:ln w="12700">
+            <a:solidFill>
+              <a:srgbClr val="C9C9C2"/>
+            </a:solidFill>
+          </a:ln>
+          <a:effectLst/>
+        </p:spPr>
+        <p:style>
+          <a:lnRef idx="1">
+            <a:schemeClr val="accent1"/>
+          </a:lnRef>
+          <a:fillRef idx="3">
+            <a:schemeClr val="accent1"/>
+          </a:fillRef>
+          <a:effectRef idx="2">
+            <a:schemeClr val="accent1"/>
+          </a:effectRef>
+          <a:fontRef idx="minor">
+            <a:schemeClr val="lt1"/>
+          </a:fontRef>
+        </p:style>
+        <p:txBody>
+          <a:bodyPr rtlCol="0" anchor="ctr" wrap="square"/>
+          <a:lstStyle/>
+          <a:p>
+            <a:pPr algn="ctr"/>
+          </a:p>
+        </p:txBody>
+      </p:sp>
+      <p:sp>
+        <p:nvSpPr>
+          <p:cNvPr id="50" name="TextBox 49"/>
+          <p:cNvSpPr txBox="1"/>
+          <p:nvPr/>
+        </p:nvSpPr>
+        <p:spPr>
+          <a:xfrm>
+            <a:off x="1591056" y="4425695"/>
+            <a:ext cx="4050791" cy="530352"/>
+          </a:xfrm>
+          <a:prstGeom prst="rect">
+            <a:avLst/>
+          </a:prstGeom>
+          <a:noFill/>
+        </p:spPr>
+        <p:txBody>
+          <a:bodyPr wrap="square" lIns="27432" rIns="27432" tIns="9144" bIns="9144" anchor="ctr">
+            <a:spAutoFit/>
+          </a:bodyPr>
+          <a:lstStyle/>
+          <a:p>
+            <a:pPr algn="l">
+              <a:lnSpc>
+                <a:spcPct val="110000"/>
+              </a:lnSpc>
+            </a:pPr>
+            <a:r>
+              <a:rPr sz="800" b="0">
+                <a:solidFill>
+                  <a:srgbClr val="5C5C56"/>
+                </a:solidFill>
+                <a:latin typeface="微软雅黑"/>
+                <a:ea typeface="微软雅黑"/>
+                <a:cs typeface="微软雅黑"/>
+              </a:rPr>
+              <a:t>drivers：factory / transport / scpi / models，统一能力接口与错误模型</a:t>
+            </a:r>
+          </a:p>
+        </p:txBody>
+      </p:sp>
+      <p:sp>
+        <p:nvSpPr>
+          <p:cNvPr id="51" name="Rounded Rectangle 50"/>
+          <p:cNvSpPr/>
+          <p:nvPr/>
+        </p:nvSpPr>
+        <p:spPr>
+          <a:xfrm>
+            <a:off x="5769864" y="4407407"/>
+            <a:ext cx="2377440" cy="566928"/>
+          </a:xfrm>
+          <a:prstGeom prst="roundRect">
+            <a:avLst>
+              <a:gd name="adj" fmla="val 5000"/>
+            </a:avLst>
+          </a:prstGeom>
+          <a:solidFill>
+            <a:srgbClr val="E8F0F7"/>
+          </a:solidFill>
+          <a:ln>
+            <a:noFill/>
+          </a:ln>
+          <a:effectLst/>
+        </p:spPr>
+        <p:style>
+          <a:lnRef idx="1">
+            <a:schemeClr val="accent1"/>
+          </a:lnRef>
+          <a:fillRef idx="3">
+            <a:schemeClr val="accent1"/>
+          </a:fillRef>
+          <a:effectRef idx="2">
+            <a:schemeClr val="accent1"/>
+          </a:effectRef>
+          <a:fontRef idx="minor">
+            <a:schemeClr val="lt1"/>
+          </a:fontRef>
+        </p:style>
+        <p:txBody>
+          <a:bodyPr rtlCol="0" anchor="ctr" wrap="square"/>
+          <a:lstStyle/>
+          <a:p>
+            <a:pPr algn="ctr"/>
+          </a:p>
+        </p:txBody>
+      </p:sp>
+      <p:sp>
+        <p:nvSpPr>
+          <p:cNvPr id="52" name="TextBox 51"/>
+          <p:cNvSpPr txBox="1"/>
+          <p:nvPr/>
+        </p:nvSpPr>
+        <p:spPr>
+          <a:xfrm>
+            <a:off x="5824728" y="4425695"/>
+            <a:ext cx="2267712" cy="530352"/>
+          </a:xfrm>
+          <a:prstGeom prst="rect">
+            <a:avLst/>
+          </a:prstGeom>
+          <a:noFill/>
+        </p:spPr>
+        <p:txBody>
+          <a:bodyPr wrap="square" lIns="27432" rIns="27432" tIns="9144" bIns="9144" anchor="ctr">
+            <a:spAutoFit/>
+          </a:bodyPr>
+          <a:lstStyle/>
+          <a:p>
+            <a:pPr algn="l">
+              <a:lnSpc>
+                <a:spcPct val="110000"/>
+              </a:lnSpc>
+            </a:pPr>
+            <a:r>
+              <a:rPr sz="750" b="0">
+                <a:solidFill>
+                  <a:srgbClr val="0F4C81"/>
+                </a:solidFill>
+                <a:latin typeface="微软雅黑"/>
+                <a:ea typeface="微软雅黑"/>
+                <a:cs typeface="微软雅黑"/>
+              </a:rPr>
+              <a:t>耦合：对象组合（transport 注入）</a:t>
+            </a:r>
+          </a:p>
+        </p:txBody>
+      </p:sp>
+      <p:sp>
+        <p:nvSpPr>
+          <p:cNvPr id="53" name="Rounded Rectangle 52"/>
+          <p:cNvSpPr/>
+          <p:nvPr/>
+        </p:nvSpPr>
+        <p:spPr>
+          <a:xfrm>
+            <a:off x="274320" y="5065775"/>
+            <a:ext cx="1188720" cy="566928"/>
+          </a:xfrm>
+          <a:prstGeom prst="roundRect">
+            <a:avLst>
+              <a:gd name="adj" fmla="val 5000"/>
+            </a:avLst>
+          </a:prstGeom>
+          <a:solidFill>
+            <a:srgbClr val="ECECEC"/>
+          </a:solidFill>
+          <a:ln>
+            <a:noFill/>
+          </a:ln>
+          <a:effectLst/>
+        </p:spPr>
+        <p:style>
+          <a:lnRef idx="1">
+            <a:schemeClr val="accent1"/>
+          </a:lnRef>
+          <a:fillRef idx="3">
+            <a:schemeClr val="accent1"/>
+          </a:fillRef>
+          <a:effectRef idx="2">
+            <a:schemeClr val="accent1"/>
+          </a:effectRef>
+          <a:fontRef idx="minor">
+            <a:schemeClr val="lt1"/>
+          </a:fontRef>
+        </p:style>
+        <p:txBody>
+          <a:bodyPr rtlCol="0" anchor="ctr" wrap="square"/>
+          <a:lstStyle/>
+          <a:p>
+            <a:pPr algn="ctr"/>
+          </a:p>
+        </p:txBody>
+      </p:sp>
+      <p:sp>
+        <p:nvSpPr>
+          <p:cNvPr id="54" name="TextBox 53"/>
+          <p:cNvSpPr txBox="1"/>
+          <p:nvPr/>
+        </p:nvSpPr>
+        <p:spPr>
+          <a:xfrm>
+            <a:off x="310896" y="5065775"/>
+            <a:ext cx="1115568" cy="566928"/>
+          </a:xfrm>
+          <a:prstGeom prst="rect">
+            <a:avLst/>
+          </a:prstGeom>
+          <a:noFill/>
+        </p:spPr>
+        <p:txBody>
+          <a:bodyPr wrap="square" lIns="27432" rIns="27432" tIns="9144" bIns="9144" anchor="ctr">
+            <a:spAutoFit/>
+          </a:bodyPr>
+          <a:lstStyle/>
+          <a:p>
+            <a:pPr algn="ctr">
+              <a:lnSpc>
+                <a:spcPct val="110000"/>
+              </a:lnSpc>
+            </a:pPr>
+            <a:r>
+              <a:rPr sz="850" b="1">
+                <a:solidFill>
+                  <a:srgbClr val="141414"/>
+                </a:solidFill>
+                <a:latin typeface="微软雅黑"/>
+                <a:ea typeface="微软雅黑"/>
+                <a:cs typeface="微软雅黑"/>
+              </a:rPr>
+              <a:t>L1 传输层</a:t>
+            </a:r>
+          </a:p>
+        </p:txBody>
+      </p:sp>
+      <p:sp>
+        <p:nvSpPr>
+          <p:cNvPr id="55" name="Rounded Rectangle 54"/>
+          <p:cNvSpPr/>
+          <p:nvPr/>
+        </p:nvSpPr>
+        <p:spPr>
+          <a:xfrm>
+            <a:off x="1536192" y="5065775"/>
+            <a:ext cx="4160520" cy="566928"/>
+          </a:xfrm>
+          <a:prstGeom prst="roundRect">
+            <a:avLst>
+              <a:gd name="adj" fmla="val 5000"/>
+            </a:avLst>
+          </a:prstGeom>
+          <a:solidFill>
+            <a:srgbClr val="FFFFFF"/>
+          </a:solidFill>
+          <a:ln w="12700">
+            <a:solidFill>
+              <a:srgbClr val="C9C9C2"/>
+            </a:solidFill>
+          </a:ln>
+          <a:effectLst/>
+        </p:spPr>
+        <p:style>
+          <a:lnRef idx="1">
+            <a:schemeClr val="accent1"/>
+          </a:lnRef>
+          <a:fillRef idx="3">
+            <a:schemeClr val="accent1"/>
+          </a:fillRef>
+          <a:effectRef idx="2">
+            <a:schemeClr val="accent1"/>
+          </a:effectRef>
+          <a:fontRef idx="minor">
+            <a:schemeClr val="lt1"/>
+          </a:fontRef>
+        </p:style>
+        <p:txBody>
+          <a:bodyPr rtlCol="0" anchor="ctr" wrap="square"/>
+          <a:lstStyle/>
+          <a:p>
+            <a:pPr algn="ctr"/>
+          </a:p>
+        </p:txBody>
+      </p:sp>
+      <p:sp>
+        <p:nvSpPr>
+          <p:cNvPr id="56" name="TextBox 55"/>
+          <p:cNvSpPr txBox="1"/>
+          <p:nvPr/>
+        </p:nvSpPr>
+        <p:spPr>
+          <a:xfrm>
+            <a:off x="1591056" y="5084063"/>
+            <a:ext cx="4050791" cy="530352"/>
+          </a:xfrm>
+          <a:prstGeom prst="rect">
+            <a:avLst/>
+          </a:prstGeom>
+          <a:noFill/>
+        </p:spPr>
+        <p:txBody>
+          <a:bodyPr wrap="square" lIns="27432" rIns="27432" tIns="9144" bIns="9144" anchor="ctr">
+            <a:spAutoFit/>
+          </a:bodyPr>
+          <a:lstStyle/>
+          <a:p>
+            <a:pPr algn="l">
+              <a:lnSpc>
+                <a:spcPct val="110000"/>
+              </a:lnSpc>
+            </a:pPr>
+            <a:r>
+              <a:rPr sz="800" b="0">
+                <a:solidFill>
+                  <a:srgbClr val="5C5C56"/>
+                </a:solidFill>
+                <a:latin typeface="微软雅黑"/>
+                <a:ea typeface="微软雅黑"/>
+                <a:cs typeface="微软雅黑"/>
+              </a:rPr>
+              <a:t>VISA / socket / serial / CAN：报文收发、超时、重试与粘包处理</a:t>
+            </a:r>
+          </a:p>
+        </p:txBody>
+      </p:sp>
+      <p:sp>
+        <p:nvSpPr>
+          <p:cNvPr id="57" name="Rounded Rectangle 56"/>
+          <p:cNvSpPr/>
+          <p:nvPr/>
+        </p:nvSpPr>
+        <p:spPr>
+          <a:xfrm>
+            <a:off x="5769864" y="5065775"/>
+            <a:ext cx="2377440" cy="566928"/>
+          </a:xfrm>
+          <a:prstGeom prst="roundRect">
+            <a:avLst>
+              <a:gd name="adj" fmla="val 5000"/>
+            </a:avLst>
+          </a:prstGeom>
+          <a:solidFill>
+            <a:srgbClr val="E8F0F7"/>
+          </a:solidFill>
+          <a:ln>
+            <a:noFill/>
+          </a:ln>
+          <a:effectLst/>
+        </p:spPr>
+        <p:style>
+          <a:lnRef idx="1">
+            <a:schemeClr val="accent1"/>
+          </a:lnRef>
+          <a:fillRef idx="3">
+            <a:schemeClr val="accent1"/>
+          </a:fillRef>
+          <a:effectRef idx="2">
+            <a:schemeClr val="accent1"/>
+          </a:effectRef>
+          <a:fontRef idx="minor">
+            <a:schemeClr val="lt1"/>
+          </a:fontRef>
+        </p:style>
+        <p:txBody>
+          <a:bodyPr rtlCol="0" anchor="ctr" wrap="square"/>
+          <a:lstStyle/>
+          <a:p>
+            <a:pPr algn="ctr"/>
+          </a:p>
+        </p:txBody>
+      </p:sp>
+      <p:sp>
+        <p:nvSpPr>
+          <p:cNvPr id="58" name="TextBox 57"/>
+          <p:cNvSpPr txBox="1"/>
+          <p:nvPr/>
+        </p:nvSpPr>
+        <p:spPr>
+          <a:xfrm>
+            <a:off x="5824728" y="5084063"/>
+            <a:ext cx="2267712" cy="530352"/>
+          </a:xfrm>
+          <a:prstGeom prst="rect">
+            <a:avLst/>
+          </a:prstGeom>
+          <a:noFill/>
+        </p:spPr>
+        <p:txBody>
+          <a:bodyPr wrap="square" lIns="27432" rIns="27432" tIns="9144" bIns="9144" anchor="ctr">
+            <a:spAutoFit/>
+          </a:bodyPr>
+          <a:lstStyle/>
+          <a:p>
+            <a:pPr algn="l">
+              <a:lnSpc>
+                <a:spcPct val="110000"/>
+              </a:lnSpc>
+            </a:pPr>
+            <a:r>
+              <a:rPr sz="750" b="0">
+                <a:solidFill>
+                  <a:srgbClr val="0F4C81"/>
+                </a:solidFill>
+                <a:latin typeface="微软雅黑"/>
+                <a:ea typeface="微软雅黑"/>
+                <a:cs typeface="微软雅黑"/>
+              </a:rPr>
+              <a:t>耦合：外部协议（至仪器）</a:t>
+            </a:r>
+          </a:p>
+        </p:txBody>
+      </p:sp>
+      <p:sp>
+        <p:nvSpPr>
+          <p:cNvPr id="59" name="TextBox 58"/>
+          <p:cNvSpPr txBox="1"/>
+          <p:nvPr/>
+        </p:nvSpPr>
+        <p:spPr>
+          <a:xfrm>
+            <a:off x="274320" y="5724144"/>
+            <a:ext cx="7863840" cy="384048"/>
+          </a:xfrm>
+          <a:prstGeom prst="rect">
+            <a:avLst/>
+          </a:prstGeom>
+          <a:noFill/>
+        </p:spPr>
+        <p:txBody>
+          <a:bodyPr wrap="square" lIns="27432" rIns="27432" tIns="9144" bIns="9144" anchor="t">
+            <a:spAutoFit/>
+          </a:bodyPr>
+          <a:lstStyle/>
+          <a:p>
+            <a:pPr algn="l">
+              <a:lnSpc>
+                <a:spcPct val="110000"/>
+              </a:lnSpc>
+            </a:pPr>
+            <a:r>
+              <a:rPr sz="800" b="0">
+                <a:solidFill>
+                  <a:srgbClr val="5C5C56"/>
+                </a:solidFill>
+                <a:latin typeface="微软雅黑"/>
+                <a:ea typeface="微软雅黑"/>
+                <a:cs typeface="微软雅黑"/>
+              </a:rPr>
+              <a:t>耦合原则：上层只依赖下层接口、不依赖实现；跨进程边界一律以「运行目录 + 环境变量 + 退出码」传递，便于替换与仿真</a:t>
+            </a:r>
+          </a:p>
+        </p:txBody>
+      </p:sp>
+      <p:sp>
+        <p:nvSpPr>
+          <p:cNvPr id="60" name="TextBox 59"/>
+          <p:cNvSpPr txBox="1"/>
+          <p:nvPr/>
+        </p:nvSpPr>
+        <p:spPr>
+          <a:xfrm>
+            <a:off x="8503920" y="1060704"/>
+            <a:ext cx="3383280" cy="237744"/>
+          </a:xfrm>
+          <a:prstGeom prst="rect">
+            <a:avLst/>
+          </a:prstGeom>
+          <a:noFill/>
+        </p:spPr>
+        <p:txBody>
+          <a:bodyPr wrap="square" lIns="27432" rIns="27432" tIns="9144" bIns="9144" anchor="ctr">
+            <a:spAutoFit/>
+          </a:bodyPr>
+          <a:lstStyle/>
+          <a:p>
+            <a:pPr algn="l">
+              <a:lnSpc>
+                <a:spcPct val="110000"/>
+              </a:lnSpc>
+            </a:pPr>
+            <a:r>
+              <a:rPr sz="950" b="1">
+                <a:solidFill>
+                  <a:srgbClr val="8B0F1A"/>
+                </a:solidFill>
+                <a:latin typeface="微软雅黑"/>
+                <a:ea typeface="微软雅黑"/>
+                <a:cs typeface="微软雅黑"/>
+              </a:rPr>
+              <a:t>③ 测试台可能拓扑</a:t>
+            </a:r>
+          </a:p>
+        </p:txBody>
+      </p:sp>
+      <p:sp>
+        <p:nvSpPr>
+          <p:cNvPr id="61" name="Rounded Rectangle 60"/>
+          <p:cNvSpPr/>
+          <p:nvPr/>
+        </p:nvSpPr>
+        <p:spPr>
+          <a:xfrm>
+            <a:off x="8503920" y="1335024"/>
+            <a:ext cx="3410712" cy="1417320"/>
+          </a:xfrm>
+          <a:prstGeom prst="roundRect">
+            <a:avLst>
+              <a:gd name="adj" fmla="val 5000"/>
+            </a:avLst>
+          </a:prstGeom>
+          <a:solidFill>
+            <a:srgbClr val="FFFFFF"/>
+          </a:solidFill>
+          <a:ln w="12700">
+            <a:solidFill>
+              <a:srgbClr val="C9C9C2"/>
+            </a:solidFill>
+          </a:ln>
+          <a:effectLst/>
+        </p:spPr>
+        <p:style>
+          <a:lnRef idx="1">
+            <a:schemeClr val="accent1"/>
+          </a:lnRef>
+          <a:fillRef idx="3">
+            <a:schemeClr val="accent1"/>
+          </a:fillRef>
+          <a:effectRef idx="2">
+            <a:schemeClr val="accent1"/>
+          </a:effectRef>
+          <a:fontRef idx="minor">
+            <a:schemeClr val="lt1"/>
+          </a:fontRef>
+        </p:style>
+        <p:txBody>
+          <a:bodyPr rtlCol="0" anchor="ctr" wrap="square"/>
+          <a:lstStyle/>
+          <a:p>
+            <a:pPr algn="ctr"/>
+          </a:p>
+        </p:txBody>
+      </p:sp>
+      <p:sp>
+        <p:nvSpPr>
+          <p:cNvPr id="62" name="TextBox 61"/>
+          <p:cNvSpPr txBox="1"/>
+          <p:nvPr/>
+        </p:nvSpPr>
+        <p:spPr>
+          <a:xfrm>
+            <a:off x="8613648" y="1408176"/>
+            <a:ext cx="3191256" cy="237744"/>
+          </a:xfrm>
+          <a:prstGeom prst="rect">
+            <a:avLst/>
+          </a:prstGeom>
+          <a:noFill/>
+        </p:spPr>
+        <p:txBody>
+          <a:bodyPr wrap="square" lIns="27432" rIns="27432" tIns="9144" bIns="9144" anchor="ctr">
+            <a:spAutoFit/>
+          </a:bodyPr>
+          <a:lstStyle/>
+          <a:p>
+            <a:pPr algn="l">
+              <a:lnSpc>
+                <a:spcPct val="110000"/>
+              </a:lnSpc>
+            </a:pPr>
+            <a:r>
+              <a:rPr sz="900" b="1">
+                <a:solidFill>
+                  <a:srgbClr val="141414"/>
+                </a:solidFill>
+                <a:latin typeface="微软雅黑"/>
+                <a:ea typeface="微软雅黑"/>
+                <a:cs typeface="微软雅黑"/>
+              </a:rPr>
+              <a:t>T1 单站单台</a:t>
+            </a:r>
+          </a:p>
+        </p:txBody>
+      </p:sp>
+      <p:sp>
+        <p:nvSpPr>
+          <p:cNvPr id="63" name="Rounded Rectangle 62"/>
+          <p:cNvSpPr/>
+          <p:nvPr/>
+        </p:nvSpPr>
+        <p:spPr>
+          <a:xfrm>
+            <a:off x="8613648" y="1737360"/>
+            <a:ext cx="932688" cy="347472"/>
+          </a:xfrm>
+          <a:prstGeom prst="roundRect">
+            <a:avLst>
+              <a:gd name="adj" fmla="val 4000"/>
+            </a:avLst>
+          </a:prstGeom>
+          <a:solidFill>
+            <a:srgbClr val="ECECEC"/>
+          </a:solidFill>
+          <a:ln>
+            <a:noFill/>
+          </a:ln>
+          <a:effectLst/>
+        </p:spPr>
+        <p:style>
+          <a:lnRef idx="1">
+            <a:schemeClr val="accent1"/>
+          </a:lnRef>
+          <a:fillRef idx="3">
+            <a:schemeClr val="accent1"/>
+          </a:fillRef>
+          <a:effectRef idx="2">
+            <a:schemeClr val="accent1"/>
+          </a:effectRef>
+          <a:fontRef idx="minor">
+            <a:schemeClr val="lt1"/>
+          </a:fontRef>
+        </p:style>
+        <p:txBody>
+          <a:bodyPr rtlCol="0" anchor="ctr" wrap="square" lIns="18288" rIns="18288" tIns="0" bIns="0"/>
+          <a:lstStyle/>
+          <a:p>
+            <a:pPr algn="ctr">
+              <a:lnSpc>
+                <a:spcPct val="100000"/>
+              </a:lnSpc>
+            </a:pPr>
+            <a:r>
+              <a:rPr sz="750" b="0">
+                <a:solidFill>
+                  <a:srgbClr val="141414"/>
+                </a:solidFill>
+                <a:latin typeface="微软雅黑"/>
+                <a:ea typeface="微软雅黑"/>
+                <a:cs typeface="微软雅黑"/>
+              </a:rPr>
+              <a:t>控制机</a:t>
+            </a:r>
+          </a:p>
+        </p:txBody>
+      </p:sp>
+      <p:cxnSp>
+        <p:nvCxnSpPr>
+          <p:cNvPr id="64" name="Connector 63"/>
+          <p:cNvCxnSpPr/>
+          <p:nvPr/>
+        </p:nvCxnSpPr>
+        <p:spPr>
+          <a:xfrm>
+            <a:off x="9564624" y="1911095"/>
+            <a:ext cx="109728" cy="0"/>
+          </a:xfrm>
+          <a:prstGeom prst="line">
+            <a:avLst/>
+          </a:prstGeom>
+          <a:ln w="13970">
+            <a:solidFill>
+              <a:srgbClr val="5C5C56"/>
+            </a:solidFill>
+            <a:tailEnd type="triangle" w="lg" len="lg"/>
+          </a:ln>
+        </p:spPr>
+        <p:style>
+          <a:lnRef idx="2">
+            <a:schemeClr val="accent1"/>
+          </a:lnRef>
+          <a:fillRef idx="0">
+            <a:schemeClr val="accent1"/>
+          </a:fillRef>
+          <a:effectRef idx="1">
+            <a:schemeClr val="accent1"/>
+          </a:effectRef>
+          <a:fontRef idx="minor">
+            <a:schemeClr val="tx1"/>
+          </a:fontRef>
+        </p:style>
+      </p:cxnSp>
+      <p:sp>
+        <p:nvSpPr>
+          <p:cNvPr id="65" name="Rounded Rectangle 64"/>
+          <p:cNvSpPr/>
+          <p:nvPr/>
+        </p:nvSpPr>
+        <p:spPr>
+          <a:xfrm>
+            <a:off x="9692640" y="1737360"/>
+            <a:ext cx="932688" cy="347472"/>
+          </a:xfrm>
+          <a:prstGeom prst="roundRect">
+            <a:avLst>
+              <a:gd name="adj" fmla="val 4000"/>
+            </a:avLst>
+          </a:prstGeom>
+          <a:solidFill>
+            <a:srgbClr val="ECECEC"/>
+          </a:solidFill>
+          <a:ln>
+            <a:noFill/>
+          </a:ln>
+          <a:effectLst/>
+        </p:spPr>
+        <p:style>
+          <a:lnRef idx="1">
+            <a:schemeClr val="accent1"/>
+          </a:lnRef>
+          <a:fillRef idx="3">
+            <a:schemeClr val="accent1"/>
+          </a:fillRef>
+          <a:effectRef idx="2">
+            <a:schemeClr val="accent1"/>
+          </a:effectRef>
+          <a:fontRef idx="minor">
+            <a:schemeClr val="lt1"/>
+          </a:fontRef>
+        </p:style>
+        <p:txBody>
+          <a:bodyPr rtlCol="0" anchor="ctr" wrap="square" lIns="18288" rIns="18288" tIns="0" bIns="0"/>
+          <a:lstStyle/>
+          <a:p>
+            <a:pPr algn="ctr">
+              <a:lnSpc>
+                <a:spcPct val="100000"/>
+              </a:lnSpc>
+            </a:pPr>
+            <a:r>
+              <a:rPr sz="750" b="0">
+                <a:solidFill>
+                  <a:srgbClr val="141414"/>
+                </a:solidFill>
+                <a:latin typeface="微软雅黑"/>
+                <a:ea typeface="微软雅黑"/>
+                <a:cs typeface="微软雅黑"/>
+              </a:rPr>
+              <a:t>测试台</a:t>
+            </a:r>
+          </a:p>
+        </p:txBody>
+      </p:sp>
+      <p:cxnSp>
+        <p:nvCxnSpPr>
+          <p:cNvPr id="66" name="Connector 65"/>
+          <p:cNvCxnSpPr/>
+          <p:nvPr/>
+        </p:nvCxnSpPr>
+        <p:spPr>
+          <a:xfrm>
+            <a:off x="10643615" y="1911095"/>
+            <a:ext cx="109729" cy="0"/>
+          </a:xfrm>
+          <a:prstGeom prst="line">
+            <a:avLst/>
+          </a:prstGeom>
+          <a:ln w="13970">
+            <a:solidFill>
+              <a:srgbClr val="5C5C56"/>
+            </a:solidFill>
+            <a:tailEnd type="triangle" w="lg" len="lg"/>
+          </a:ln>
+        </p:spPr>
+        <p:style>
+          <a:lnRef idx="2">
+            <a:schemeClr val="accent1"/>
+          </a:lnRef>
+          <a:fillRef idx="0">
+            <a:schemeClr val="accent1"/>
+          </a:fillRef>
+          <a:effectRef idx="1">
+            <a:schemeClr val="accent1"/>
+          </a:effectRef>
+          <a:fontRef idx="minor">
+            <a:schemeClr val="tx1"/>
+          </a:fontRef>
+        </p:style>
+      </p:cxnSp>
+      <p:sp>
+        <p:nvSpPr>
+          <p:cNvPr id="67" name="Rounded Rectangle 66"/>
+          <p:cNvSpPr/>
+          <p:nvPr/>
+        </p:nvSpPr>
+        <p:spPr>
+          <a:xfrm>
+            <a:off x="10771632" y="1737360"/>
+            <a:ext cx="932688" cy="347472"/>
+          </a:xfrm>
+          <a:prstGeom prst="roundRect">
+            <a:avLst>
+              <a:gd name="adj" fmla="val 4000"/>
+            </a:avLst>
+          </a:prstGeom>
+          <a:solidFill>
+            <a:srgbClr val="ECECEC"/>
+          </a:solidFill>
+          <a:ln>
+            <a:noFill/>
+          </a:ln>
+          <a:effectLst/>
+        </p:spPr>
+        <p:style>
+          <a:lnRef idx="1">
+            <a:schemeClr val="accent1"/>
+          </a:lnRef>
+          <a:fillRef idx="3">
+            <a:schemeClr val="accent1"/>
+          </a:fillRef>
+          <a:effectRef idx="2">
+            <a:schemeClr val="accent1"/>
+          </a:effectRef>
+          <a:fontRef idx="minor">
+            <a:schemeClr val="lt1"/>
+          </a:fontRef>
+        </p:style>
+        <p:txBody>
+          <a:bodyPr rtlCol="0" anchor="ctr" wrap="square" lIns="18288" rIns="18288" tIns="0" bIns="0"/>
+          <a:lstStyle/>
+          <a:p>
+            <a:pPr algn="ctr">
+              <a:lnSpc>
+                <a:spcPct val="100000"/>
+              </a:lnSpc>
+            </a:pPr>
+            <a:r>
+              <a:rPr sz="750" b="0">
+                <a:solidFill>
+                  <a:srgbClr val="141414"/>
+                </a:solidFill>
+                <a:latin typeface="微软雅黑"/>
+                <a:ea typeface="微软雅黑"/>
+                <a:cs typeface="微软雅黑"/>
+              </a:rPr>
+              <a:t>仪器 ×N</a:t>
+            </a:r>
+          </a:p>
+        </p:txBody>
+      </p:sp>
+      <p:sp>
+        <p:nvSpPr>
+          <p:cNvPr id="68" name="TextBox 67"/>
+          <p:cNvSpPr txBox="1"/>
+          <p:nvPr/>
+        </p:nvSpPr>
+        <p:spPr>
+          <a:xfrm>
+            <a:off x="8613648" y="2267712"/>
+            <a:ext cx="3191256" cy="420624"/>
+          </a:xfrm>
+          <a:prstGeom prst="rect">
+            <a:avLst/>
+          </a:prstGeom>
+          <a:noFill/>
+        </p:spPr>
+        <p:txBody>
+          <a:bodyPr wrap="square" lIns="27432" rIns="27432" tIns="9144" bIns="9144" anchor="t">
+            <a:spAutoFit/>
+          </a:bodyPr>
+          <a:lstStyle/>
+          <a:p>
+            <a:pPr algn="l">
+              <a:lnSpc>
+                <a:spcPct val="110000"/>
+              </a:lnSpc>
+            </a:pPr>
+            <a:r>
+              <a:rPr sz="750" b="0">
+                <a:solidFill>
+                  <a:srgbClr val="5C5C56"/>
+                </a:solidFill>
+                <a:latin typeface="微软雅黑"/>
+                <a:ea typeface="微软雅黑"/>
+                <a:cs typeface="微软雅黑"/>
+              </a:rPr>
+              <a:t>一台控制机带一个测试台，台内多台仪器共用一条链路</a:t>
+            </a:r>
+          </a:p>
+        </p:txBody>
+      </p:sp>
+      <p:sp>
+        <p:nvSpPr>
+          <p:cNvPr id="69" name="Rounded Rectangle 68"/>
+          <p:cNvSpPr/>
+          <p:nvPr/>
+        </p:nvSpPr>
+        <p:spPr>
+          <a:xfrm>
+            <a:off x="8503920" y="2862072"/>
+            <a:ext cx="3410712" cy="1417320"/>
+          </a:xfrm>
+          <a:prstGeom prst="roundRect">
+            <a:avLst>
+              <a:gd name="adj" fmla="val 5000"/>
+            </a:avLst>
+          </a:prstGeom>
+          <a:solidFill>
+            <a:srgbClr val="FFFFFF"/>
+          </a:solidFill>
+          <a:ln w="12700">
+            <a:solidFill>
+              <a:srgbClr val="C9C9C2"/>
+            </a:solidFill>
+          </a:ln>
+          <a:effectLst/>
+        </p:spPr>
+        <p:style>
+          <a:lnRef idx="1">
+            <a:schemeClr val="accent1"/>
+          </a:lnRef>
+          <a:fillRef idx="3">
+            <a:schemeClr val="accent1"/>
+          </a:fillRef>
+          <a:effectRef idx="2">
+            <a:schemeClr val="accent1"/>
+          </a:effectRef>
+          <a:fontRef idx="minor">
+            <a:schemeClr val="lt1"/>
+          </a:fontRef>
+        </p:style>
+        <p:txBody>
+          <a:bodyPr rtlCol="0" anchor="ctr" wrap="square"/>
+          <a:lstStyle/>
+          <a:p>
+            <a:pPr algn="ctr"/>
+          </a:p>
+        </p:txBody>
+      </p:sp>
+      <p:sp>
+        <p:nvSpPr>
+          <p:cNvPr id="70" name="TextBox 69"/>
+          <p:cNvSpPr txBox="1"/>
+          <p:nvPr/>
+        </p:nvSpPr>
+        <p:spPr>
+          <a:xfrm>
+            <a:off x="8613648" y="2935224"/>
+            <a:ext cx="3191256" cy="237744"/>
+          </a:xfrm>
+          <a:prstGeom prst="rect">
+            <a:avLst/>
+          </a:prstGeom>
+          <a:noFill/>
+        </p:spPr>
+        <p:txBody>
+          <a:bodyPr wrap="square" lIns="27432" rIns="27432" tIns="9144" bIns="9144" anchor="ctr">
+            <a:spAutoFit/>
+          </a:bodyPr>
+          <a:lstStyle/>
+          <a:p>
+            <a:pPr algn="l">
+              <a:lnSpc>
+                <a:spcPct val="110000"/>
+              </a:lnSpc>
+            </a:pPr>
+            <a:r>
+              <a:rPr sz="900" b="1">
+                <a:solidFill>
+                  <a:srgbClr val="141414"/>
+                </a:solidFill>
+                <a:latin typeface="微软雅黑"/>
+                <a:ea typeface="微软雅黑"/>
+                <a:cs typeface="微软雅黑"/>
+              </a:rPr>
+              <a:t>T2 一控多台</a:t>
+            </a:r>
+          </a:p>
+        </p:txBody>
+      </p:sp>
+      <p:sp>
+        <p:nvSpPr>
+          <p:cNvPr id="71" name="Rounded Rectangle 70"/>
+          <p:cNvSpPr/>
+          <p:nvPr/>
+        </p:nvSpPr>
+        <p:spPr>
+          <a:xfrm>
+            <a:off x="8613648" y="3264408"/>
+            <a:ext cx="1325880" cy="347472"/>
+          </a:xfrm>
+          <a:prstGeom prst="roundRect">
+            <a:avLst>
+              <a:gd name="adj" fmla="val 4000"/>
+            </a:avLst>
+          </a:prstGeom>
+          <a:solidFill>
+            <a:srgbClr val="ECECEC"/>
+          </a:solidFill>
+          <a:ln>
+            <a:noFill/>
+          </a:ln>
+          <a:effectLst/>
+        </p:spPr>
+        <p:style>
+          <a:lnRef idx="1">
+            <a:schemeClr val="accent1"/>
+          </a:lnRef>
+          <a:fillRef idx="3">
+            <a:schemeClr val="accent1"/>
+          </a:fillRef>
+          <a:effectRef idx="2">
+            <a:schemeClr val="accent1"/>
+          </a:effectRef>
+          <a:fontRef idx="minor">
+            <a:schemeClr val="lt1"/>
+          </a:fontRef>
+        </p:style>
+        <p:txBody>
+          <a:bodyPr rtlCol="0" anchor="ctr" wrap="square" lIns="18288" rIns="18288" tIns="0" bIns="0"/>
+          <a:lstStyle/>
+          <a:p>
+            <a:pPr algn="ctr">
+              <a:lnSpc>
+                <a:spcPct val="100000"/>
+              </a:lnSpc>
+            </a:pPr>
+            <a:r>
+              <a:rPr sz="750" b="0">
+                <a:solidFill>
+                  <a:srgbClr val="141414"/>
+                </a:solidFill>
+                <a:latin typeface="微软雅黑"/>
+                <a:ea typeface="微软雅黑"/>
+                <a:cs typeface="微软雅黑"/>
+              </a:rPr>
+              <a:t>控制机</a:t>
+            </a:r>
+          </a:p>
+        </p:txBody>
+      </p:sp>
+      <p:cxnSp>
+        <p:nvCxnSpPr>
+          <p:cNvPr id="72" name="Connector 71"/>
+          <p:cNvCxnSpPr/>
+          <p:nvPr/>
+        </p:nvCxnSpPr>
+        <p:spPr>
+          <a:xfrm>
+            <a:off x="9957815" y="3438144"/>
+            <a:ext cx="109729" cy="0"/>
+          </a:xfrm>
+          <a:prstGeom prst="line">
+            <a:avLst/>
+          </a:prstGeom>
+          <a:ln w="13970">
+            <a:solidFill>
+              <a:srgbClr val="5C5C56"/>
+            </a:solidFill>
+            <a:tailEnd type="triangle" w="lg" len="lg"/>
+          </a:ln>
+        </p:spPr>
+        <p:style>
+          <a:lnRef idx="2">
+            <a:schemeClr val="accent1"/>
+          </a:lnRef>
+          <a:fillRef idx="0">
+            <a:schemeClr val="accent1"/>
+          </a:fillRef>
+          <a:effectRef idx="1">
+            <a:schemeClr val="accent1"/>
+          </a:effectRef>
+          <a:fontRef idx="minor">
+            <a:schemeClr val="tx1"/>
+          </a:fontRef>
+        </p:style>
+      </p:cxnSp>
+      <p:sp>
+        <p:nvSpPr>
+          <p:cNvPr id="73" name="Rounded Rectangle 72"/>
+          <p:cNvSpPr/>
+          <p:nvPr/>
+        </p:nvSpPr>
+        <p:spPr>
+          <a:xfrm>
+            <a:off x="10085832" y="3264408"/>
+            <a:ext cx="1325880" cy="347472"/>
+          </a:xfrm>
+          <a:prstGeom prst="roundRect">
+            <a:avLst>
+              <a:gd name="adj" fmla="val 4000"/>
+            </a:avLst>
+          </a:prstGeom>
+          <a:solidFill>
+            <a:srgbClr val="ECECEC"/>
+          </a:solidFill>
+          <a:ln>
+            <a:noFill/>
+          </a:ln>
+          <a:effectLst/>
+        </p:spPr>
+        <p:style>
+          <a:lnRef idx="1">
+            <a:schemeClr val="accent1"/>
+          </a:lnRef>
+          <a:fillRef idx="3">
+            <a:schemeClr val="accent1"/>
+          </a:fillRef>
+          <a:effectRef idx="2">
+            <a:schemeClr val="accent1"/>
+          </a:effectRef>
+          <a:fontRef idx="minor">
+            <a:schemeClr val="lt1"/>
+          </a:fontRef>
+        </p:style>
+        <p:txBody>
+          <a:bodyPr rtlCol="0" anchor="ctr" wrap="square" lIns="18288" rIns="18288" tIns="0" bIns="0"/>
+          <a:lstStyle/>
+          <a:p>
+            <a:pPr algn="ctr">
+              <a:lnSpc>
+                <a:spcPct val="100000"/>
+              </a:lnSpc>
+            </a:pPr>
+            <a:r>
+              <a:rPr sz="750" b="0">
+                <a:solidFill>
+                  <a:srgbClr val="141414"/>
+                </a:solidFill>
+                <a:latin typeface="微软雅黑"/>
+                <a:ea typeface="微软雅黑"/>
+                <a:cs typeface="微软雅黑"/>
+              </a:rPr>
+              <a:t>测试台 ×3</a:t>
+            </a:r>
+          </a:p>
+        </p:txBody>
+      </p:sp>
+      <p:sp>
+        <p:nvSpPr>
+          <p:cNvPr id="74" name="TextBox 73"/>
+          <p:cNvSpPr txBox="1"/>
+          <p:nvPr/>
+        </p:nvSpPr>
+        <p:spPr>
+          <a:xfrm>
+            <a:off x="8613648" y="3794760"/>
+            <a:ext cx="3191256" cy="420624"/>
+          </a:xfrm>
+          <a:prstGeom prst="rect">
+            <a:avLst/>
+          </a:prstGeom>
+          <a:noFill/>
+        </p:spPr>
+        <p:txBody>
+          <a:bodyPr wrap="square" lIns="27432" rIns="27432" tIns="9144" bIns="9144" anchor="t">
+            <a:spAutoFit/>
+          </a:bodyPr>
+          <a:lstStyle/>
+          <a:p>
+            <a:pPr algn="l">
+              <a:lnSpc>
+                <a:spcPct val="110000"/>
+              </a:lnSpc>
+            </a:pPr>
+            <a:r>
+              <a:rPr sz="750" b="0">
+                <a:solidFill>
+                  <a:srgbClr val="5C5C56"/>
+                </a:solidFill>
+                <a:latin typeface="微软雅黑"/>
+                <a:ea typeface="微软雅黑"/>
+                <a:cs typeface="微软雅黑"/>
+              </a:rPr>
+              <a:t>多台并行或排队执行，Runner 多实例或单实例串行</a:t>
+            </a:r>
+          </a:p>
+        </p:txBody>
+      </p:sp>
+      <p:sp>
+        <p:nvSpPr>
+          <p:cNvPr id="75" name="Rounded Rectangle 74"/>
+          <p:cNvSpPr/>
+          <p:nvPr/>
+        </p:nvSpPr>
+        <p:spPr>
+          <a:xfrm>
+            <a:off x="8503920" y="4389120"/>
+            <a:ext cx="3410712" cy="1417320"/>
+          </a:xfrm>
+          <a:prstGeom prst="roundRect">
+            <a:avLst>
+              <a:gd name="adj" fmla="val 5000"/>
+            </a:avLst>
+          </a:prstGeom>
+          <a:solidFill>
+            <a:srgbClr val="FFFFFF"/>
+          </a:solidFill>
+          <a:ln w="12700">
+            <a:solidFill>
+              <a:srgbClr val="C9C9C2"/>
+            </a:solidFill>
+          </a:ln>
+          <a:effectLst/>
+        </p:spPr>
+        <p:style>
+          <a:lnRef idx="1">
+            <a:schemeClr val="accent1"/>
+          </a:lnRef>
+          <a:fillRef idx="3">
+            <a:schemeClr val="accent1"/>
+          </a:fillRef>
+          <a:effectRef idx="2">
+            <a:schemeClr val="accent1"/>
+          </a:effectRef>
+          <a:fontRef idx="minor">
+            <a:schemeClr val="lt1"/>
+          </a:fontRef>
+        </p:style>
+        <p:txBody>
+          <a:bodyPr rtlCol="0" anchor="ctr" wrap="square"/>
+          <a:lstStyle/>
+          <a:p>
+            <a:pPr algn="ctr"/>
+          </a:p>
+        </p:txBody>
+      </p:sp>
+      <p:sp>
+        <p:nvSpPr>
+          <p:cNvPr id="76" name="TextBox 75"/>
+          <p:cNvSpPr txBox="1"/>
+          <p:nvPr/>
+        </p:nvSpPr>
+        <p:spPr>
+          <a:xfrm>
+            <a:off x="8613648" y="4462272"/>
+            <a:ext cx="3191256" cy="237744"/>
+          </a:xfrm>
+          <a:prstGeom prst="rect">
+            <a:avLst/>
+          </a:prstGeom>
+          <a:noFill/>
+        </p:spPr>
+        <p:txBody>
+          <a:bodyPr wrap="square" lIns="27432" rIns="27432" tIns="9144" bIns="9144" anchor="ctr">
+            <a:spAutoFit/>
+          </a:bodyPr>
+          <a:lstStyle/>
+          <a:p>
+            <a:pPr algn="l">
+              <a:lnSpc>
+                <a:spcPct val="110000"/>
+              </a:lnSpc>
+            </a:pPr>
+            <a:r>
+              <a:rPr sz="900" b="1">
+                <a:solidFill>
+                  <a:srgbClr val="141414"/>
+                </a:solidFill>
+                <a:latin typeface="微软雅黑"/>
+                <a:ea typeface="微软雅黑"/>
+                <a:cs typeface="微软雅黑"/>
+              </a:rPr>
+              <a:t>T3 分布式</a:t>
+            </a:r>
+          </a:p>
+        </p:txBody>
+      </p:sp>
+      <p:sp>
+        <p:nvSpPr>
+          <p:cNvPr id="77" name="Rounded Rectangle 76"/>
+          <p:cNvSpPr/>
+          <p:nvPr/>
+        </p:nvSpPr>
+        <p:spPr>
+          <a:xfrm>
+            <a:off x="8613648" y="4791456"/>
+            <a:ext cx="932688" cy="347472"/>
+          </a:xfrm>
+          <a:prstGeom prst="roundRect">
+            <a:avLst>
+              <a:gd name="adj" fmla="val 4000"/>
+            </a:avLst>
+          </a:prstGeom>
+          <a:solidFill>
+            <a:srgbClr val="ECECEC"/>
+          </a:solidFill>
+          <a:ln>
+            <a:noFill/>
+          </a:ln>
+          <a:effectLst/>
+        </p:spPr>
+        <p:style>
+          <a:lnRef idx="1">
+            <a:schemeClr val="accent1"/>
+          </a:lnRef>
+          <a:fillRef idx="3">
+            <a:schemeClr val="accent1"/>
+          </a:fillRef>
+          <a:effectRef idx="2">
+            <a:schemeClr val="accent1"/>
+          </a:effectRef>
+          <a:fontRef idx="minor">
+            <a:schemeClr val="lt1"/>
+          </a:fontRef>
+        </p:style>
+        <p:txBody>
+          <a:bodyPr rtlCol="0" anchor="ctr" wrap="square" lIns="18288" rIns="18288" tIns="0" bIns="0"/>
+          <a:lstStyle/>
+          <a:p>
+            <a:pPr algn="ctr">
+              <a:lnSpc>
+                <a:spcPct val="100000"/>
+              </a:lnSpc>
+            </a:pPr>
+            <a:r>
+              <a:rPr sz="750" b="0">
+                <a:solidFill>
+                  <a:srgbClr val="141414"/>
+                </a:solidFill>
+                <a:latin typeface="微软雅黑"/>
+                <a:ea typeface="微软雅黑"/>
+                <a:cs typeface="微软雅黑"/>
+              </a:rPr>
+              <a:t>Controller</a:t>
+            </a:r>
+          </a:p>
+        </p:txBody>
+      </p:sp>
+      <p:cxnSp>
+        <p:nvCxnSpPr>
+          <p:cNvPr id="78" name="Connector 77"/>
+          <p:cNvCxnSpPr/>
+          <p:nvPr/>
+        </p:nvCxnSpPr>
+        <p:spPr>
+          <a:xfrm>
+            <a:off x="9564624" y="4965192"/>
+            <a:ext cx="109728" cy="0"/>
+          </a:xfrm>
+          <a:prstGeom prst="line">
+            <a:avLst/>
+          </a:prstGeom>
+          <a:ln w="13970">
+            <a:solidFill>
+              <a:srgbClr val="5C5C56"/>
+            </a:solidFill>
+            <a:tailEnd type="triangle" w="lg" len="lg"/>
+          </a:ln>
+        </p:spPr>
+        <p:style>
+          <a:lnRef idx="2">
+            <a:schemeClr val="accent1"/>
+          </a:lnRef>
+          <a:fillRef idx="0">
+            <a:schemeClr val="accent1"/>
+          </a:fillRef>
+          <a:effectRef idx="1">
+            <a:schemeClr val="accent1"/>
+          </a:effectRef>
+          <a:fontRef idx="minor">
+            <a:schemeClr val="tx1"/>
+          </a:fontRef>
+        </p:style>
+      </p:cxnSp>
+      <p:sp>
+        <p:nvSpPr>
+          <p:cNvPr id="79" name="Rounded Rectangle 78"/>
+          <p:cNvSpPr/>
+          <p:nvPr/>
+        </p:nvSpPr>
+        <p:spPr>
+          <a:xfrm>
+            <a:off x="9692640" y="4791456"/>
+            <a:ext cx="932688" cy="347472"/>
+          </a:xfrm>
+          <a:prstGeom prst="roundRect">
+            <a:avLst>
+              <a:gd name="adj" fmla="val 4000"/>
+            </a:avLst>
+          </a:prstGeom>
+          <a:solidFill>
+            <a:srgbClr val="ECECEC"/>
+          </a:solidFill>
+          <a:ln>
+            <a:noFill/>
+          </a:ln>
+          <a:effectLst/>
+        </p:spPr>
+        <p:style>
+          <a:lnRef idx="1">
+            <a:schemeClr val="accent1"/>
+          </a:lnRef>
+          <a:fillRef idx="3">
+            <a:schemeClr val="accent1"/>
+          </a:fillRef>
+          <a:effectRef idx="2">
+            <a:schemeClr val="accent1"/>
+          </a:effectRef>
+          <a:fontRef idx="minor">
+            <a:schemeClr val="lt1"/>
+          </a:fontRef>
+        </p:style>
+        <p:txBody>
+          <a:bodyPr rtlCol="0" anchor="ctr" wrap="square" lIns="18288" rIns="18288" tIns="0" bIns="0"/>
+          <a:lstStyle/>
+          <a:p>
+            <a:pPr algn="ctr">
+              <a:lnSpc>
+                <a:spcPct val="100000"/>
+              </a:lnSpc>
+            </a:pPr>
+            <a:r>
+              <a:rPr sz="750" b="0">
+                <a:solidFill>
+                  <a:srgbClr val="141414"/>
+                </a:solidFill>
+                <a:latin typeface="微软雅黑"/>
+                <a:ea typeface="微软雅黑"/>
+                <a:cs typeface="微软雅黑"/>
+              </a:rPr>
+              <a:t>Runner ×3</a:t>
+            </a:r>
+          </a:p>
+        </p:txBody>
+      </p:sp>
+      <p:cxnSp>
+        <p:nvCxnSpPr>
+          <p:cNvPr id="80" name="Connector 79"/>
+          <p:cNvCxnSpPr/>
+          <p:nvPr/>
+        </p:nvCxnSpPr>
+        <p:spPr>
+          <a:xfrm>
+            <a:off x="10643615" y="4965192"/>
+            <a:ext cx="109729" cy="0"/>
+          </a:xfrm>
+          <a:prstGeom prst="line">
+            <a:avLst/>
+          </a:prstGeom>
+          <a:ln w="13970">
+            <a:solidFill>
+              <a:srgbClr val="5C5C56"/>
+            </a:solidFill>
+            <a:tailEnd type="triangle" w="lg" len="lg"/>
+          </a:ln>
+        </p:spPr>
+        <p:style>
+          <a:lnRef idx="2">
+            <a:schemeClr val="accent1"/>
+          </a:lnRef>
+          <a:fillRef idx="0">
+            <a:schemeClr val="accent1"/>
+          </a:fillRef>
+          <a:effectRef idx="1">
+            <a:schemeClr val="accent1"/>
+          </a:effectRef>
+          <a:fontRef idx="minor">
+            <a:schemeClr val="tx1"/>
+          </a:fontRef>
+        </p:style>
+      </p:cxnSp>
+      <p:sp>
+        <p:nvSpPr>
+          <p:cNvPr id="81" name="Rounded Rectangle 80"/>
+          <p:cNvSpPr/>
+          <p:nvPr/>
+        </p:nvSpPr>
+        <p:spPr>
+          <a:xfrm>
+            <a:off x="10771632" y="4791456"/>
+            <a:ext cx="932688" cy="347472"/>
+          </a:xfrm>
+          <a:prstGeom prst="roundRect">
+            <a:avLst>
+              <a:gd name="adj" fmla="val 4000"/>
+            </a:avLst>
+          </a:prstGeom>
+          <a:solidFill>
+            <a:srgbClr val="ECECEC"/>
+          </a:solidFill>
+          <a:ln>
+            <a:noFill/>
+          </a:ln>
+          <a:effectLst/>
+        </p:spPr>
+        <p:style>
+          <a:lnRef idx="1">
+            <a:schemeClr val="accent1"/>
+          </a:lnRef>
+          <a:fillRef idx="3">
+            <a:schemeClr val="accent1"/>
+          </a:fillRef>
+          <a:effectRef idx="2">
+            <a:schemeClr val="accent1"/>
+          </a:effectRef>
+          <a:fontRef idx="minor">
+            <a:schemeClr val="lt1"/>
+          </a:fontRef>
+        </p:style>
+        <p:txBody>
+          <a:bodyPr rtlCol="0" anchor="ctr" wrap="square" lIns="18288" rIns="18288" tIns="0" bIns="0"/>
+          <a:lstStyle/>
+          <a:p>
+            <a:pPr algn="ctr">
+              <a:lnSpc>
+                <a:spcPct val="100000"/>
+              </a:lnSpc>
+            </a:pPr>
+            <a:r>
+              <a:rPr sz="750" b="0">
+                <a:solidFill>
+                  <a:srgbClr val="141414"/>
+                </a:solidFill>
+                <a:latin typeface="微软雅黑"/>
+                <a:ea typeface="微软雅黑"/>
+                <a:cs typeface="微软雅黑"/>
+              </a:rPr>
+              <a:t>仪器</a:t>
+            </a:r>
+          </a:p>
+        </p:txBody>
+      </p:sp>
+      <p:sp>
+        <p:nvSpPr>
+          <p:cNvPr id="82" name="TextBox 81"/>
+          <p:cNvSpPr txBox="1"/>
+          <p:nvPr/>
+        </p:nvSpPr>
+        <p:spPr>
+          <a:xfrm>
+            <a:off x="8613648" y="5321808"/>
+            <a:ext cx="3191256" cy="420624"/>
+          </a:xfrm>
+          <a:prstGeom prst="rect">
+            <a:avLst/>
+          </a:prstGeom>
+          <a:noFill/>
+        </p:spPr>
+        <p:txBody>
+          <a:bodyPr wrap="square" lIns="27432" rIns="27432" tIns="9144" bIns="9144" anchor="t">
+            <a:spAutoFit/>
+          </a:bodyPr>
+          <a:lstStyle/>
+          <a:p>
+            <a:pPr algn="l">
+              <a:lnSpc>
+                <a:spcPct val="110000"/>
+              </a:lnSpc>
+            </a:pPr>
+            <a:r>
+              <a:rPr sz="750" b="0">
+                <a:solidFill>
+                  <a:srgbClr val="5C5C56"/>
+                </a:solidFill>
+                <a:latin typeface="微软雅黑"/>
+                <a:ea typeface="微软雅黑"/>
+                <a:cs typeface="微软雅黑"/>
+              </a:rPr>
+              <a:t>各测试台独立工控机，Controller 统一调度与汇总</a:t>
+            </a:r>
+          </a:p>
+        </p:txBody>
+      </p:sp>
+      <p:sp>
+        <p:nvSpPr>
+          <p:cNvPr id="83" name="Rectangle 82"/>
+          <p:cNvSpPr/>
+          <p:nvPr/>
+        </p:nvSpPr>
+        <p:spPr>
+          <a:xfrm>
+            <a:off x="274320" y="6400800"/>
+            <a:ext cx="11640312" cy="12801"/>
+          </a:xfrm>
+          <a:prstGeom prst="rect">
+            <a:avLst/>
+          </a:prstGeom>
+          <a:solidFill>
+            <a:srgbClr val="D9D6CD"/>
+          </a:solidFill>
+          <a:ln>
+            <a:noFill/>
+          </a:ln>
+          <a:effectLst/>
+        </p:spPr>
+        <p:style>
+          <a:lnRef idx="1">
+            <a:schemeClr val="accent1"/>
+          </a:lnRef>
+          <a:fillRef idx="3">
+            <a:schemeClr val="accent1"/>
+          </a:fillRef>
+          <a:effectRef idx="2">
+            <a:schemeClr val="accent1"/>
+          </a:effectRef>
+          <a:fontRef idx="minor">
+            <a:schemeClr val="lt1"/>
+          </a:fontRef>
+        </p:style>
+        <p:txBody>
+          <a:bodyPr rtlCol="0" anchor="ctr" wrap="square"/>
+          <a:lstStyle/>
+          <a:p>
+            <a:pPr algn="ctr"/>
+          </a:p>
+        </p:txBody>
+      </p:sp>
+      <p:sp>
+        <p:nvSpPr>
+          <p:cNvPr id="84" name="TextBox 83"/>
+          <p:cNvSpPr txBox="1"/>
+          <p:nvPr/>
+        </p:nvSpPr>
+        <p:spPr>
+          <a:xfrm>
+            <a:off x="274320" y="6446520"/>
+            <a:ext cx="6858000" cy="274320"/>
+          </a:xfrm>
+          <a:prstGeom prst="rect">
+            <a:avLst/>
+          </a:prstGeom>
+          <a:noFill/>
+        </p:spPr>
+        <p:txBody>
+          <a:bodyPr wrap="square" lIns="27432" rIns="27432" tIns="9144" bIns="9144" anchor="ctr">
+            <a:spAutoFit/>
+          </a:bodyPr>
+          <a:lstStyle/>
+          <a:p>
+            <a:pPr algn="l">
+              <a:lnSpc>
+                <a:spcPct val="110000"/>
+              </a:lnSpc>
+            </a:pPr>
+            <a:r>
+              <a:rPr sz="850" b="0">
+                <a:solidFill>
+                  <a:srgbClr val="5C5C56"/>
+                </a:solidFill>
+                <a:latin typeface="微软雅黑"/>
+                <a:ea typeface="微软雅黑"/>
+                <a:cs typeface="微软雅黑"/>
+              </a:rPr>
+              <a:t>① 每段链路以显式接口收敛，便于替换；② 五层自上而下只向下依赖；③ 拓扑差异由实例数与部署位置吸收</a:t>
+            </a:r>
+          </a:p>
+        </p:txBody>
+      </p:sp>
+      <p:sp>
+        <p:nvSpPr>
+          <p:cNvPr id="85" name="TextBox 84"/>
+          <p:cNvSpPr txBox="1"/>
+          <p:nvPr/>
+        </p:nvSpPr>
+        <p:spPr>
+          <a:xfrm>
+            <a:off x="7223760" y="6446520"/>
+            <a:ext cx="4690872" cy="274320"/>
+          </a:xfrm>
+          <a:prstGeom prst="rect">
+            <a:avLst/>
+          </a:prstGeom>
+          <a:noFill/>
+        </p:spPr>
+        <p:txBody>
+          <a:bodyPr wrap="square" lIns="27432" rIns="27432" tIns="9144" bIns="9144" anchor="ctr">
+            <a:spAutoFit/>
+          </a:bodyPr>
+          <a:lstStyle/>
+          <a:p>
+            <a:pPr algn="r">
+              <a:lnSpc>
+                <a:spcPct val="110000"/>
+              </a:lnSpc>
+            </a:pPr>
+            <a:r>
+              <a:rPr sz="850" b="0">
+                <a:solidFill>
+                  <a:srgbClr val="5C5C56"/>
+                </a:solidFill>
+                <a:latin typeface="微软雅黑"/>
+                <a:ea typeface="微软雅黑"/>
+                <a:cs typeface="微软雅黑"/>
+              </a:rPr>
+              <a:t>同一份用例在三种拓扑下不改代码，只改部署参数</a:t>
             </a:r>
           </a:p>
         </p:txBody>

--- a/docs/装备软件/供应商软件形态与ATE接入.pptx
+++ b/docs/装备软件/供应商软件形态与ATE接入.pptx
@@ -13,6 +13,7 @@
     <p:sldId id="261" r:id="rId12"/>
     <p:sldId id="262" r:id="rId13"/>
     <p:sldId id="263" r:id="rId14"/>
+    <p:sldId id="264" r:id="rId15"/>
   </p:sldIdLst>
   <p:sldSz cx="12191695" cy="6858000" type="screen4x3"/>
   <p:notesSz cx="6858000" cy="9144000"/>
@@ -28663,7 +28664,7 @@
                 <a:ea typeface="微软雅黑"/>
                 <a:cs typeface="微软雅黑"/>
               </a:rPr>
-              <a:t>③ 测试台可能拓扑</a:t>
+              <a:t>③ 工控机之下的三类拓扑</a:t>
             </a:r>
           </a:p>
         </p:txBody>
@@ -28752,7 +28753,7 @@
                 <a:ea typeface="微软雅黑"/>
                 <a:cs typeface="微软雅黑"/>
               </a:rPr>
-              <a:t>T1 单站单台</a:t>
+              <a:t>T1 自有标准架构</a:t>
             </a:r>
           </a:p>
         </p:txBody>
@@ -28813,7 +28814,7 @@
                 <a:ea typeface="微软雅黑"/>
                 <a:cs typeface="微软雅黑"/>
               </a:rPr>
-              <a:t>控制机</a:t>
+              <a:t>工控机</a:t>
             </a:r>
           </a:p>
         </p:txBody>
@@ -28910,7 +28911,7 @@
                 <a:ea typeface="微软雅黑"/>
                 <a:cs typeface="微软雅黑"/>
               </a:rPr>
-              <a:t>测试台</a:t>
+              <a:t>SCH 上位机</a:t>
             </a:r>
           </a:p>
         </p:txBody>
@@ -29007,7 +29008,7 @@
                 <a:ea typeface="微软雅黑"/>
                 <a:cs typeface="微软雅黑"/>
               </a:rPr>
-              <a:t>仪器 ×N</a:t>
+              <a:t>LCH 下位机</a:t>
             </a:r>
           </a:p>
         </p:txBody>
@@ -29048,7 +29049,7 @@
                 <a:ea typeface="微软雅黑"/>
                 <a:cs typeface="微软雅黑"/>
               </a:rPr>
-              <a:t>一台控制机带一个测试台，台内多台仪器共用一条链路</a:t>
+              <a:t>全栈自主：接口、协议与授权均可控</a:t>
             </a:r>
           </a:p>
         </p:txBody>
@@ -29070,7 +29071,7 @@
             </a:avLst>
           </a:prstGeom>
           <a:solidFill>
-            <a:srgbClr val="FFFFFF"/>
+            <a:srgbClr val="F8EDEC"/>
           </a:solidFill>
           <a:ln w="12700">
             <a:solidFill>
@@ -29137,7 +29138,7 @@
                 <a:ea typeface="微软雅黑"/>
                 <a:cs typeface="微软雅黑"/>
               </a:rPr>
-              <a:t>T2 一控多台</a:t>
+              <a:t>T2 供应商测试台</a:t>
             </a:r>
           </a:p>
         </p:txBody>
@@ -29151,7 +29152,7 @@
         <p:spPr>
           <a:xfrm>
             <a:off x="8613648" y="3264408"/>
-            <a:ext cx="1325880" cy="347472"/>
+            <a:ext cx="932688" cy="347472"/>
           </a:xfrm>
           <a:prstGeom prst="roundRect">
             <a:avLst>
@@ -29198,7 +29199,7 @@
                 <a:ea typeface="微软雅黑"/>
                 <a:cs typeface="微软雅黑"/>
               </a:rPr>
-              <a:t>控制机</a:t>
+              <a:t>工控机</a:t>
             </a:r>
           </a:p>
         </p:txBody>
@@ -29211,8 +29212,8 @@
         </p:nvCxnSpPr>
         <p:spPr>
           <a:xfrm>
-            <a:off x="9957815" y="3438144"/>
-            <a:ext cx="109729" cy="0"/>
+            <a:off x="9564624" y="3438144"/>
+            <a:ext cx="109728" cy="0"/>
           </a:xfrm>
           <a:prstGeom prst="line">
             <a:avLst/>
@@ -29247,8 +29248,8 @@
         </p:nvSpPr>
         <p:spPr>
           <a:xfrm>
-            <a:off x="10085832" y="3264408"/>
-            <a:ext cx="1325880" cy="347472"/>
+            <a:off x="9692640" y="3264408"/>
+            <a:ext cx="932688" cy="347472"/>
           </a:xfrm>
           <a:prstGeom prst="roundRect">
             <a:avLst>
@@ -29295,14 +29296,111 @@
                 <a:ea typeface="微软雅黑"/>
                 <a:cs typeface="微软雅黑"/>
               </a:rPr>
-              <a:t>测试台 ×3</a:t>
-            </a:r>
-          </a:p>
-        </p:txBody>
-      </p:sp>
-      <p:sp>
-        <p:nvSpPr>
-          <p:cNvPr id="74" name="TextBox 73"/>
+              <a:t>供应商设备</a:t>
+            </a:r>
+          </a:p>
+        </p:txBody>
+      </p:sp>
+      <p:cxnSp>
+        <p:nvCxnSpPr>
+          <p:cNvPr id="74" name="Connector 73"/>
+          <p:cNvCxnSpPr/>
+          <p:nvPr/>
+        </p:nvCxnSpPr>
+        <p:spPr>
+          <a:xfrm>
+            <a:off x="10643615" y="3438144"/>
+            <a:ext cx="109729" cy="0"/>
+          </a:xfrm>
+          <a:prstGeom prst="line">
+            <a:avLst/>
+          </a:prstGeom>
+          <a:ln w="13970">
+            <a:solidFill>
+              <a:srgbClr val="5C5C56"/>
+            </a:solidFill>
+            <a:tailEnd type="triangle" w="lg" len="lg"/>
+          </a:ln>
+        </p:spPr>
+        <p:style>
+          <a:lnRef idx="2">
+            <a:schemeClr val="accent1"/>
+          </a:lnRef>
+          <a:fillRef idx="0">
+            <a:schemeClr val="accent1"/>
+          </a:fillRef>
+          <a:effectRef idx="1">
+            <a:schemeClr val="accent1"/>
+          </a:effectRef>
+          <a:fontRef idx="minor">
+            <a:schemeClr val="tx1"/>
+          </a:fontRef>
+        </p:style>
+      </p:cxnSp>
+      <p:sp>
+        <p:nvSpPr>
+          <p:cNvPr id="75" name="Rounded Rectangle 74"/>
+          <p:cNvSpPr/>
+          <p:nvPr/>
+        </p:nvSpPr>
+        <p:spPr>
+          <a:xfrm>
+            <a:off x="10771632" y="3264408"/>
+            <a:ext cx="932688" cy="347472"/>
+          </a:xfrm>
+          <a:prstGeom prst="roundRect">
+            <a:avLst>
+              <a:gd name="adj" fmla="val 4000"/>
+            </a:avLst>
+          </a:prstGeom>
+          <a:solidFill>
+            <a:srgbClr val="ECECEC"/>
+          </a:solidFill>
+          <a:ln>
+            <a:noFill/>
+          </a:ln>
+          <a:effectLst/>
+        </p:spPr>
+        <p:style>
+          <a:lnRef idx="1">
+            <a:schemeClr val="accent1"/>
+          </a:lnRef>
+          <a:fillRef idx="3">
+            <a:schemeClr val="accent1"/>
+          </a:fillRef>
+          <a:effectRef idx="2">
+            <a:schemeClr val="accent1"/>
+          </a:effectRef>
+          <a:fontRef idx="minor">
+            <a:schemeClr val="lt1"/>
+          </a:fontRef>
+        </p:style>
+        <p:txBody>
+          <a:bodyPr rtlCol="0" anchor="ctr" wrap="square" lIns="18288" rIns="18288" tIns="0" bIns="0"/>
+          <a:lstStyle/>
+          <a:p>
+            <a:pPr algn="ctr">
+              <a:lnSpc>
+                <a:spcPct val="100000"/>
+              </a:lnSpc>
+            </a:pPr>
+            <a:r>
+              <a:rPr sz="750" b="0">
+                <a:solidFill>
+                  <a:srgbClr val="141414"/>
+                </a:solidFill>
+                <a:latin typeface="微软雅黑"/>
+                <a:ea typeface="微软雅黑"/>
+                <a:cs typeface="微软雅黑"/>
+              </a:rPr>
+              <a:t>仪器 ×N</a:t>
+            </a:r>
+          </a:p>
+        </p:txBody>
+      </p:sp>
+      <p:sp>
+        <p:nvSpPr>
+          <p:cNvPr id="76" name="TextBox 75"/>
           <p:cNvSpPr txBox="1"/>
           <p:nvPr/>
         </p:nvSpPr>
@@ -29336,14 +29434,14 @@
                 <a:ea typeface="微软雅黑"/>
                 <a:cs typeface="微软雅黑"/>
               </a:rPr>
-              <a:t>多台并行或排队执行，Runner 多实例或单实例串行</a:t>
-            </a:r>
-          </a:p>
-        </p:txBody>
-      </p:sp>
-      <p:sp>
-        <p:nvSpPr>
-          <p:cNvPr id="75" name="Rounded Rectangle 74"/>
+              <a:t>仅能经供应商私有接口或界面交互</a:t>
+            </a:r>
+          </a:p>
+        </p:txBody>
+      </p:sp>
+      <p:sp>
+        <p:nvSpPr>
+          <p:cNvPr id="77" name="Rounded Rectangle 76"/>
           <p:cNvSpPr/>
           <p:nvPr/>
         </p:nvSpPr>
@@ -29358,7 +29456,7 @@
             </a:avLst>
           </a:prstGeom>
           <a:solidFill>
-            <a:srgbClr val="FFFFFF"/>
+            <a:srgbClr val="F8EDEC"/>
           </a:solidFill>
           <a:ln w="12700">
             <a:solidFill>
@@ -29391,7 +29489,7 @@
       </p:sp>
       <p:sp>
         <p:nvSpPr>
-          <p:cNvPr id="76" name="TextBox 75"/>
+          <p:cNvPr id="78" name="TextBox 77"/>
           <p:cNvSpPr txBox="1"/>
           <p:nvPr/>
         </p:nvSpPr>
@@ -29425,14 +29523,14 @@
                 <a:ea typeface="微软雅黑"/>
                 <a:cs typeface="微软雅黑"/>
               </a:rPr>
-              <a:t>T3 分布式</a:t>
-            </a:r>
-          </a:p>
-        </p:txBody>
-      </p:sp>
-      <p:sp>
-        <p:nvSpPr>
-          <p:cNvPr id="77" name="Rounded Rectangle 76"/>
+              <a:t>T3 组合拓扑</a:t>
+            </a:r>
+          </a:p>
+        </p:txBody>
+      </p:sp>
+      <p:sp>
+        <p:nvSpPr>
+          <p:cNvPr id="79" name="Rounded Rectangle 78"/>
           <p:cNvSpPr/>
           <p:nvPr/>
         </p:nvSpPr>
@@ -29486,14 +29584,14 @@
                 <a:ea typeface="微软雅黑"/>
                 <a:cs typeface="微软雅黑"/>
               </a:rPr>
-              <a:t>Controller</a:t>
+              <a:t>工控机</a:t>
             </a:r>
           </a:p>
         </p:txBody>
       </p:sp>
       <p:cxnSp>
         <p:nvCxnSpPr>
-          <p:cNvPr id="78" name="Connector 77"/>
+          <p:cNvPr id="80" name="Connector 79"/>
           <p:cNvCxnSpPr/>
           <p:nvPr/>
         </p:nvCxnSpPr>
@@ -29529,7 +29627,7 @@
       </p:cxnSp>
       <p:sp>
         <p:nvSpPr>
-          <p:cNvPr id="79" name="Rounded Rectangle 78"/>
+          <p:cNvPr id="81" name="Rounded Rectangle 80"/>
           <p:cNvSpPr/>
           <p:nvPr/>
         </p:nvSpPr>
@@ -29583,14 +29681,14 @@
                 <a:ea typeface="微软雅黑"/>
                 <a:cs typeface="微软雅黑"/>
               </a:rPr>
-              <a:t>Runner ×3</a:t>
+              <a:t>SCH / LCH</a:t>
             </a:r>
           </a:p>
         </p:txBody>
       </p:sp>
       <p:cxnSp>
         <p:nvCxnSpPr>
-          <p:cNvPr id="80" name="Connector 79"/>
+          <p:cNvPr id="82" name="Connector 81"/>
           <p:cNvCxnSpPr/>
           <p:nvPr/>
         </p:nvCxnSpPr>
@@ -29626,7 +29724,7 @@
       </p:cxnSp>
       <p:sp>
         <p:nvSpPr>
-          <p:cNvPr id="81" name="Rounded Rectangle 80"/>
+          <p:cNvPr id="83" name="Rounded Rectangle 82"/>
           <p:cNvSpPr/>
           <p:nvPr/>
         </p:nvSpPr>
@@ -29680,14 +29778,14 @@
                 <a:ea typeface="微软雅黑"/>
                 <a:cs typeface="微软雅黑"/>
               </a:rPr>
-              <a:t>仪器</a:t>
-            </a:r>
-          </a:p>
-        </p:txBody>
-      </p:sp>
-      <p:sp>
-        <p:nvSpPr>
-          <p:cNvPr id="82" name="TextBox 81"/>
+              <a:t>供应商设备</a:t>
+            </a:r>
+          </a:p>
+        </p:txBody>
+      </p:sp>
+      <p:sp>
+        <p:nvSpPr>
+          <p:cNvPr id="84" name="TextBox 83"/>
           <p:cNvSpPr txBox="1"/>
           <p:nvPr/>
         </p:nvSpPr>
@@ -29721,14 +29819,55 @@
                 <a:ea typeface="微软雅黑"/>
                 <a:cs typeface="微软雅黑"/>
               </a:rPr>
-              <a:t>各测试台独立工控机，Controller 统一调度与汇总</a:t>
-            </a:r>
-          </a:p>
-        </p:txBody>
-      </p:sp>
-      <p:sp>
-        <p:nvSpPr>
-          <p:cNvPr id="83" name="Rectangle 82"/>
+              <a:t>同一站内并存，需统一编排与归一</a:t>
+            </a:r>
+          </a:p>
+        </p:txBody>
+      </p:sp>
+      <p:sp>
+        <p:nvSpPr>
+          <p:cNvPr id="85" name="TextBox 84"/>
+          <p:cNvSpPr txBox="1"/>
+          <p:nvPr/>
+        </p:nvSpPr>
+        <p:spPr>
+          <a:xfrm>
+            <a:off x="8503920" y="5870448"/>
+            <a:ext cx="3401568" cy="274320"/>
+          </a:xfrm>
+          <a:prstGeom prst="rect">
+            <a:avLst/>
+          </a:prstGeom>
+          <a:noFill/>
+        </p:spPr>
+        <p:txBody>
+          <a:bodyPr wrap="square" lIns="27432" rIns="27432" tIns="9144" bIns="9144" anchor="ctr">
+            <a:spAutoFit/>
+          </a:bodyPr>
+          <a:lstStyle/>
+          <a:p>
+            <a:pPr algn="l">
+              <a:lnSpc>
+                <a:spcPct val="110000"/>
+              </a:lnSpc>
+            </a:pPr>
+            <a:r>
+              <a:rPr sz="700" b="0">
+                <a:solidFill>
+                  <a:srgbClr val="5C5C56"/>
+                </a:solidFill>
+                <a:latin typeface="微软雅黑"/>
+                <a:ea typeface="微软雅黑"/>
+                <a:cs typeface="微软雅黑"/>
+              </a:rPr>
+              <a:t>浅红底为含供应商设备的拓扑，其软硬件要求见下页</a:t>
+            </a:r>
+          </a:p>
+        </p:txBody>
+      </p:sp>
+      <p:sp>
+        <p:nvSpPr>
+          <p:cNvPr id="86" name="Rectangle 85"/>
           <p:cNvSpPr/>
           <p:nvPr/>
         </p:nvSpPr>
@@ -29772,7 +29911,7 @@
       </p:sp>
       <p:sp>
         <p:nvSpPr>
-          <p:cNvPr id="84" name="TextBox 83"/>
+          <p:cNvPr id="87" name="TextBox 86"/>
           <p:cNvSpPr txBox="1"/>
           <p:nvPr/>
         </p:nvSpPr>
@@ -29813,7 +29952,7 @@
       </p:sp>
       <p:sp>
         <p:nvSpPr>
-          <p:cNvPr id="85" name="TextBox 84"/>
+          <p:cNvPr id="88" name="TextBox 87"/>
           <p:cNvSpPr txBox="1"/>
           <p:nvPr/>
         </p:nvSpPr>
@@ -29848,6 +29987,2580 @@
                 <a:cs typeface="微软雅黑"/>
               </a:rPr>
               <a:t>同一份用例在三种拓扑下不改代码，只改部署参数</a:t>
+            </a:r>
+          </a:p>
+        </p:txBody>
+      </p:sp>
+    </p:spTree>
+  </p:cSld>
+  <p:clrMapOvr>
+    <a:masterClrMapping/>
+  </p:clrMapOvr>
+</p:sld>
+</file>
+
+<file path=ppt/slides/slide9.xml><?xml version="1.0" encoding="utf-8"?>
+<p:sld xmlns:a="http://schemas.openxmlformats.org/drawingml/2006/main" xmlns:p="http://schemas.openxmlformats.org/presentationml/2006/main" xmlns:r="http://schemas.openxmlformats.org/officeDocument/2006/relationships">
+  <p:cSld>
+    <p:spTree>
+      <p:nvGrpSpPr>
+        <p:cNvPr id="1" name=""/>
+        <p:cNvGrpSpPr/>
+        <p:nvPr/>
+      </p:nvGrpSpPr>
+      <p:grpSpPr/>
+      <p:sp>
+        <p:nvSpPr>
+          <p:cNvPr id="2" name="TextBox 1"/>
+          <p:cNvSpPr txBox="1"/>
+          <p:nvPr/>
+        </p:nvSpPr>
+        <p:spPr>
+          <a:xfrm>
+            <a:off x="274320" y="201168"/>
+            <a:ext cx="10881360" cy="457200"/>
+          </a:xfrm>
+          <a:prstGeom prst="rect">
+            <a:avLst/>
+          </a:prstGeom>
+          <a:noFill/>
+        </p:spPr>
+        <p:txBody>
+          <a:bodyPr wrap="square" lIns="27432" rIns="27432" tIns="9144" bIns="9144" anchor="ctr">
+            <a:spAutoFit/>
+          </a:bodyPr>
+          <a:lstStyle/>
+          <a:p>
+            <a:pPr algn="l">
+              <a:lnSpc>
+                <a:spcPct val="110000"/>
+              </a:lnSpc>
+            </a:pPr>
+            <a:r>
+              <a:rPr sz="2400" b="1">
+                <a:solidFill>
+                  <a:srgbClr val="141414"/>
+                </a:solidFill>
+                <a:latin typeface="微软雅黑"/>
+                <a:ea typeface="微软雅黑"/>
+                <a:cs typeface="微软雅黑"/>
+              </a:rPr>
+              <a:t>含供应商设备的拓扑 · 软硬件要求</a:t>
+            </a:r>
+          </a:p>
+        </p:txBody>
+      </p:sp>
+      <p:sp>
+        <p:nvSpPr>
+          <p:cNvPr id="3" name="TextBox 2"/>
+          <p:cNvSpPr txBox="1"/>
+          <p:nvPr/>
+        </p:nvSpPr>
+        <p:spPr>
+          <a:xfrm>
+            <a:off x="274320" y="658368"/>
+            <a:ext cx="11155680" cy="310896"/>
+          </a:xfrm>
+          <a:prstGeom prst="rect">
+            <a:avLst/>
+          </a:prstGeom>
+          <a:noFill/>
+        </p:spPr>
+        <p:txBody>
+          <a:bodyPr wrap="square" lIns="27432" rIns="27432" tIns="9144" bIns="9144" anchor="ctr">
+            <a:spAutoFit/>
+          </a:bodyPr>
+          <a:lstStyle/>
+          <a:p>
+            <a:pPr algn="l">
+              <a:lnSpc>
+                <a:spcPct val="110000"/>
+              </a:lnSpc>
+            </a:pPr>
+            <a:r>
+              <a:rPr sz="1050" b="0">
+                <a:solidFill>
+                  <a:srgbClr val="5C5C56"/>
+                </a:solidFill>
+                <a:latin typeface="微软雅黑"/>
+                <a:ea typeface="微软雅黑"/>
+                <a:cs typeface="微软雅黑"/>
+              </a:rPr>
+              <a:t>工控机之下三类拓扑并存；含供应商设备的 T2、T3 须以「硬件隔离 + 适配收敛 + 超时兜底 + 授权可控」为入场门槛</a:t>
+            </a:r>
+          </a:p>
+        </p:txBody>
+      </p:sp>
+      <p:sp>
+        <p:nvSpPr>
+          <p:cNvPr id="4" name="Rectangle 3"/>
+          <p:cNvSpPr/>
+          <p:nvPr/>
+        </p:nvSpPr>
+        <p:spPr>
+          <a:xfrm>
+            <a:off x="274320" y="987552"/>
+            <a:ext cx="11640312" cy="25603"/>
+          </a:xfrm>
+          <a:prstGeom prst="rect">
+            <a:avLst/>
+          </a:prstGeom>
+          <a:solidFill>
+            <a:srgbClr val="8B0F1A"/>
+          </a:solidFill>
+          <a:ln>
+            <a:noFill/>
+          </a:ln>
+          <a:effectLst/>
+        </p:spPr>
+        <p:style>
+          <a:lnRef idx="1">
+            <a:schemeClr val="accent1"/>
+          </a:lnRef>
+          <a:fillRef idx="3">
+            <a:schemeClr val="accent1"/>
+          </a:fillRef>
+          <a:effectRef idx="2">
+            <a:schemeClr val="accent1"/>
+          </a:effectRef>
+          <a:fontRef idx="minor">
+            <a:schemeClr val="lt1"/>
+          </a:fontRef>
+        </p:style>
+        <p:txBody>
+          <a:bodyPr rtlCol="0" anchor="ctr" wrap="square"/>
+          <a:lstStyle/>
+          <a:p>
+            <a:pPr algn="ctr"/>
+          </a:p>
+        </p:txBody>
+      </p:sp>
+      <p:sp>
+        <p:nvSpPr>
+          <p:cNvPr id="5" name="Rounded Rectangle 4"/>
+          <p:cNvSpPr/>
+          <p:nvPr/>
+        </p:nvSpPr>
+        <p:spPr>
+          <a:xfrm>
+            <a:off x="274320" y="1389888"/>
+            <a:ext cx="1188720" cy="566928"/>
+          </a:xfrm>
+          <a:prstGeom prst="roundRect">
+            <a:avLst>
+              <a:gd name="adj" fmla="val 5000"/>
+            </a:avLst>
+          </a:prstGeom>
+          <a:solidFill>
+            <a:srgbClr val="FFFFFF"/>
+          </a:solidFill>
+          <a:ln w="13970">
+            <a:solidFill>
+              <a:srgbClr val="C9C9C2"/>
+            </a:solidFill>
+          </a:ln>
+          <a:effectLst/>
+        </p:spPr>
+        <p:style>
+          <a:lnRef idx="1">
+            <a:schemeClr val="accent1"/>
+          </a:lnRef>
+          <a:fillRef idx="3">
+            <a:schemeClr val="accent1"/>
+          </a:fillRef>
+          <a:effectRef idx="2">
+            <a:schemeClr val="accent1"/>
+          </a:effectRef>
+          <a:fontRef idx="minor">
+            <a:schemeClr val="lt1"/>
+          </a:fontRef>
+        </p:style>
+        <p:txBody>
+          <a:bodyPr rtlCol="0" anchor="ctr" wrap="square"/>
+          <a:lstStyle/>
+          <a:p>
+            <a:pPr algn="ctr"/>
+          </a:p>
+        </p:txBody>
+      </p:sp>
+      <p:sp>
+        <p:nvSpPr>
+          <p:cNvPr id="6" name="TextBox 5"/>
+          <p:cNvSpPr txBox="1"/>
+          <p:nvPr/>
+        </p:nvSpPr>
+        <p:spPr>
+          <a:xfrm>
+            <a:off x="274320" y="1389888"/>
+            <a:ext cx="1188720" cy="566928"/>
+          </a:xfrm>
+          <a:prstGeom prst="rect">
+            <a:avLst/>
+          </a:prstGeom>
+          <a:noFill/>
+        </p:spPr>
+        <p:txBody>
+          <a:bodyPr wrap="square" lIns="27432" rIns="27432" tIns="9144" bIns="9144" anchor="ctr">
+            <a:spAutoFit/>
+          </a:bodyPr>
+          <a:lstStyle/>
+          <a:p>
+            <a:pPr algn="ctr">
+              <a:lnSpc>
+                <a:spcPct val="110000"/>
+              </a:lnSpc>
+            </a:pPr>
+            <a:r>
+              <a:rPr sz="900" b="1">
+                <a:solidFill>
+                  <a:srgbClr val="141414"/>
+                </a:solidFill>
+                <a:latin typeface="微软雅黑"/>
+                <a:ea typeface="微软雅黑"/>
+                <a:cs typeface="微软雅黑"/>
+              </a:rPr>
+              <a:t>工控机 PC</a:t>
+            </a:r>
+          </a:p>
+        </p:txBody>
+      </p:sp>
+      <p:sp>
+        <p:nvSpPr>
+          <p:cNvPr id="7" name="Rounded Rectangle 6"/>
+          <p:cNvSpPr/>
+          <p:nvPr/>
+        </p:nvSpPr>
+        <p:spPr>
+          <a:xfrm>
+            <a:off x="2103120" y="1170432"/>
+            <a:ext cx="420624" cy="310896"/>
+          </a:xfrm>
+          <a:prstGeom prst="roundRect">
+            <a:avLst>
+              <a:gd name="adj" fmla="val 3000"/>
+            </a:avLst>
+          </a:prstGeom>
+          <a:solidFill>
+            <a:srgbClr val="ECECEC"/>
+          </a:solidFill>
+          <a:ln>
+            <a:noFill/>
+          </a:ln>
+          <a:effectLst/>
+        </p:spPr>
+        <p:style>
+          <a:lnRef idx="1">
+            <a:schemeClr val="accent1"/>
+          </a:lnRef>
+          <a:fillRef idx="3">
+            <a:schemeClr val="accent1"/>
+          </a:fillRef>
+          <a:effectRef idx="2">
+            <a:schemeClr val="accent1"/>
+          </a:effectRef>
+          <a:fontRef idx="minor">
+            <a:schemeClr val="lt1"/>
+          </a:fontRef>
+        </p:style>
+        <p:txBody>
+          <a:bodyPr rtlCol="0" anchor="ctr" wrap="square" lIns="18288" rIns="18288" tIns="0" bIns="0"/>
+          <a:lstStyle/>
+          <a:p>
+            <a:pPr algn="ctr">
+              <a:lnSpc>
+                <a:spcPct val="100000"/>
+              </a:lnSpc>
+            </a:pPr>
+            <a:r>
+              <a:rPr sz="800" b="1">
+                <a:solidFill>
+                  <a:srgbClr val="141414"/>
+                </a:solidFill>
+                <a:latin typeface="微软雅黑"/>
+                <a:ea typeface="微软雅黑"/>
+                <a:cs typeface="微软雅黑"/>
+              </a:rPr>
+              <a:t>T1</a:t>
+            </a:r>
+          </a:p>
+        </p:txBody>
+      </p:sp>
+      <p:sp>
+        <p:nvSpPr>
+          <p:cNvPr id="8" name="Rounded Rectangle 7"/>
+          <p:cNvSpPr/>
+          <p:nvPr/>
+        </p:nvSpPr>
+        <p:spPr>
+          <a:xfrm>
+            <a:off x="2560320" y="1170432"/>
+            <a:ext cx="3547872" cy="310896"/>
+          </a:xfrm>
+          <a:prstGeom prst="roundRect">
+            <a:avLst>
+              <a:gd name="adj" fmla="val 3000"/>
+            </a:avLst>
+          </a:prstGeom>
+          <a:solidFill>
+            <a:srgbClr val="ECECEC"/>
+          </a:solidFill>
+          <a:ln>
+            <a:noFill/>
+          </a:ln>
+          <a:effectLst/>
+        </p:spPr>
+        <p:style>
+          <a:lnRef idx="1">
+            <a:schemeClr val="accent1"/>
+          </a:lnRef>
+          <a:fillRef idx="3">
+            <a:schemeClr val="accent1"/>
+          </a:fillRef>
+          <a:effectRef idx="2">
+            <a:schemeClr val="accent1"/>
+          </a:effectRef>
+          <a:fontRef idx="minor">
+            <a:schemeClr val="lt1"/>
+          </a:fontRef>
+        </p:style>
+        <p:txBody>
+          <a:bodyPr rtlCol="0" anchor="ctr" wrap="square"/>
+          <a:lstStyle/>
+          <a:p>
+            <a:pPr algn="ctr"/>
+          </a:p>
+        </p:txBody>
+      </p:sp>
+      <p:sp>
+        <p:nvSpPr>
+          <p:cNvPr id="9" name="TextBox 8"/>
+          <p:cNvSpPr txBox="1"/>
+          <p:nvPr/>
+        </p:nvSpPr>
+        <p:spPr>
+          <a:xfrm>
+            <a:off x="2615184" y="1170432"/>
+            <a:ext cx="3438144" cy="310896"/>
+          </a:xfrm>
+          <a:prstGeom prst="rect">
+            <a:avLst/>
+          </a:prstGeom>
+          <a:noFill/>
+        </p:spPr>
+        <p:txBody>
+          <a:bodyPr wrap="square" lIns="27432" rIns="27432" tIns="9144" bIns="9144" anchor="ctr">
+            <a:spAutoFit/>
+          </a:bodyPr>
+          <a:lstStyle/>
+          <a:p>
+            <a:pPr algn="l">
+              <a:lnSpc>
+                <a:spcPct val="110000"/>
+              </a:lnSpc>
+            </a:pPr>
+            <a:r>
+              <a:rPr sz="700" b="0">
+                <a:solidFill>
+                  <a:srgbClr val="3A3A35"/>
+                </a:solidFill>
+                <a:latin typeface="微软雅黑"/>
+                <a:ea typeface="微软雅黑"/>
+                <a:cs typeface="微软雅黑"/>
+              </a:rPr>
+              <a:t>自有标准架构：工控机 → SCH 上位机 → LCH 下位机，接口与授权自主可控（本次不改）</a:t>
+            </a:r>
+          </a:p>
+        </p:txBody>
+      </p:sp>
+      <p:cxnSp>
+        <p:nvCxnSpPr>
+          <p:cNvPr id="10" name="Connector 9"/>
+          <p:cNvCxnSpPr/>
+          <p:nvPr/>
+        </p:nvCxnSpPr>
+        <p:spPr>
+          <a:xfrm flipV="1">
+            <a:off x="1481328" y="1325880"/>
+            <a:ext cx="585215" cy="347472"/>
+          </a:xfrm>
+          <a:prstGeom prst="line">
+            <a:avLst/>
+          </a:prstGeom>
+          <a:ln w="13970">
+            <a:solidFill>
+              <a:srgbClr val="5C5C56"/>
+            </a:solidFill>
+            <a:tailEnd type="triangle" w="lg" len="lg"/>
+          </a:ln>
+        </p:spPr>
+        <p:style>
+          <a:lnRef idx="2">
+            <a:schemeClr val="accent1"/>
+          </a:lnRef>
+          <a:fillRef idx="0">
+            <a:schemeClr val="accent1"/>
+          </a:fillRef>
+          <a:effectRef idx="1">
+            <a:schemeClr val="accent1"/>
+          </a:effectRef>
+          <a:fontRef idx="minor">
+            <a:schemeClr val="tx1"/>
+          </a:fontRef>
+        </p:style>
+      </p:cxnSp>
+      <p:sp>
+        <p:nvSpPr>
+          <p:cNvPr id="11" name="Rounded Rectangle 10"/>
+          <p:cNvSpPr/>
+          <p:nvPr/>
+        </p:nvSpPr>
+        <p:spPr>
+          <a:xfrm>
+            <a:off x="2103120" y="1517904"/>
+            <a:ext cx="420624" cy="310896"/>
+          </a:xfrm>
+          <a:prstGeom prst="roundRect">
+            <a:avLst>
+              <a:gd name="adj" fmla="val 3000"/>
+            </a:avLst>
+          </a:prstGeom>
+          <a:solidFill>
+            <a:srgbClr val="F8EDEC"/>
+          </a:solidFill>
+          <a:ln>
+            <a:noFill/>
+          </a:ln>
+          <a:effectLst/>
+        </p:spPr>
+        <p:style>
+          <a:lnRef idx="1">
+            <a:schemeClr val="accent1"/>
+          </a:lnRef>
+          <a:fillRef idx="3">
+            <a:schemeClr val="accent1"/>
+          </a:fillRef>
+          <a:effectRef idx="2">
+            <a:schemeClr val="accent1"/>
+          </a:effectRef>
+          <a:fontRef idx="minor">
+            <a:schemeClr val="lt1"/>
+          </a:fontRef>
+        </p:style>
+        <p:txBody>
+          <a:bodyPr rtlCol="0" anchor="ctr" wrap="square" lIns="18288" rIns="18288" tIns="0" bIns="0"/>
+          <a:lstStyle/>
+          <a:p>
+            <a:pPr algn="ctr">
+              <a:lnSpc>
+                <a:spcPct val="100000"/>
+              </a:lnSpc>
+            </a:pPr>
+            <a:r>
+              <a:rPr sz="800" b="1">
+                <a:solidFill>
+                  <a:srgbClr val="8B0F1A"/>
+                </a:solidFill>
+                <a:latin typeface="微软雅黑"/>
+                <a:ea typeface="微软雅黑"/>
+                <a:cs typeface="微软雅黑"/>
+              </a:rPr>
+              <a:t>T2</a:t>
+            </a:r>
+          </a:p>
+        </p:txBody>
+      </p:sp>
+      <p:sp>
+        <p:nvSpPr>
+          <p:cNvPr id="12" name="Rounded Rectangle 11"/>
+          <p:cNvSpPr/>
+          <p:nvPr/>
+        </p:nvSpPr>
+        <p:spPr>
+          <a:xfrm>
+            <a:off x="2560320" y="1517904"/>
+            <a:ext cx="3547872" cy="310896"/>
+          </a:xfrm>
+          <a:prstGeom prst="roundRect">
+            <a:avLst>
+              <a:gd name="adj" fmla="val 3000"/>
+            </a:avLst>
+          </a:prstGeom>
+          <a:solidFill>
+            <a:srgbClr val="F8EDEC"/>
+          </a:solidFill>
+          <a:ln>
+            <a:noFill/>
+          </a:ln>
+          <a:effectLst/>
+        </p:spPr>
+        <p:style>
+          <a:lnRef idx="1">
+            <a:schemeClr val="accent1"/>
+          </a:lnRef>
+          <a:fillRef idx="3">
+            <a:schemeClr val="accent1"/>
+          </a:fillRef>
+          <a:effectRef idx="2">
+            <a:schemeClr val="accent1"/>
+          </a:effectRef>
+          <a:fontRef idx="minor">
+            <a:schemeClr val="lt1"/>
+          </a:fontRef>
+        </p:style>
+        <p:txBody>
+          <a:bodyPr rtlCol="0" anchor="ctr" wrap="square"/>
+          <a:lstStyle/>
+          <a:p>
+            <a:pPr algn="ctr"/>
+          </a:p>
+        </p:txBody>
+      </p:sp>
+      <p:sp>
+        <p:nvSpPr>
+          <p:cNvPr id="13" name="TextBox 12"/>
+          <p:cNvSpPr txBox="1"/>
+          <p:nvPr/>
+        </p:nvSpPr>
+        <p:spPr>
+          <a:xfrm>
+            <a:off x="2615184" y="1517904"/>
+            <a:ext cx="3438144" cy="310896"/>
+          </a:xfrm>
+          <a:prstGeom prst="rect">
+            <a:avLst/>
+          </a:prstGeom>
+          <a:noFill/>
+        </p:spPr>
+        <p:txBody>
+          <a:bodyPr wrap="square" lIns="27432" rIns="27432" tIns="9144" bIns="9144" anchor="ctr">
+            <a:spAutoFit/>
+          </a:bodyPr>
+          <a:lstStyle/>
+          <a:p>
+            <a:pPr algn="l">
+              <a:lnSpc>
+                <a:spcPct val="110000"/>
+              </a:lnSpc>
+            </a:pPr>
+            <a:r>
+              <a:rPr sz="700" b="0">
+                <a:solidFill>
+                  <a:srgbClr val="3A3A35"/>
+                </a:solidFill>
+                <a:latin typeface="微软雅黑"/>
+                <a:ea typeface="微软雅黑"/>
+                <a:cs typeface="微软雅黑"/>
+              </a:rPr>
+              <a:t>供应商测试台：设备自带控制软件，仅暴露私有接口或界面（本次要求对象）</a:t>
+            </a:r>
+          </a:p>
+        </p:txBody>
+      </p:sp>
+      <p:cxnSp>
+        <p:nvCxnSpPr>
+          <p:cNvPr id="14" name="Connector 13"/>
+          <p:cNvCxnSpPr/>
+          <p:nvPr/>
+        </p:nvCxnSpPr>
+        <p:spPr>
+          <a:xfrm flipV="1">
+            <a:off x="1481328" y="1673351"/>
+            <a:ext cx="585215" cy="1"/>
+          </a:xfrm>
+          <a:prstGeom prst="line">
+            <a:avLst/>
+          </a:prstGeom>
+          <a:ln w="13970">
+            <a:solidFill>
+              <a:srgbClr val="5C5C56"/>
+            </a:solidFill>
+            <a:tailEnd type="triangle" w="lg" len="lg"/>
+          </a:ln>
+        </p:spPr>
+        <p:style>
+          <a:lnRef idx="2">
+            <a:schemeClr val="accent1"/>
+          </a:lnRef>
+          <a:fillRef idx="0">
+            <a:schemeClr val="accent1"/>
+          </a:fillRef>
+          <a:effectRef idx="1">
+            <a:schemeClr val="accent1"/>
+          </a:effectRef>
+          <a:fontRef idx="minor">
+            <a:schemeClr val="tx1"/>
+          </a:fontRef>
+        </p:style>
+      </p:cxnSp>
+      <p:sp>
+        <p:nvSpPr>
+          <p:cNvPr id="15" name="Rounded Rectangle 14"/>
+          <p:cNvSpPr/>
+          <p:nvPr/>
+        </p:nvSpPr>
+        <p:spPr>
+          <a:xfrm>
+            <a:off x="2103120" y="1865376"/>
+            <a:ext cx="420624" cy="310896"/>
+          </a:xfrm>
+          <a:prstGeom prst="roundRect">
+            <a:avLst>
+              <a:gd name="adj" fmla="val 3000"/>
+            </a:avLst>
+          </a:prstGeom>
+          <a:solidFill>
+            <a:srgbClr val="F8EDEC"/>
+          </a:solidFill>
+          <a:ln>
+            <a:noFill/>
+          </a:ln>
+          <a:effectLst/>
+        </p:spPr>
+        <p:style>
+          <a:lnRef idx="1">
+            <a:schemeClr val="accent1"/>
+          </a:lnRef>
+          <a:fillRef idx="3">
+            <a:schemeClr val="accent1"/>
+          </a:fillRef>
+          <a:effectRef idx="2">
+            <a:schemeClr val="accent1"/>
+          </a:effectRef>
+          <a:fontRef idx="minor">
+            <a:schemeClr val="lt1"/>
+          </a:fontRef>
+        </p:style>
+        <p:txBody>
+          <a:bodyPr rtlCol="0" anchor="ctr" wrap="square" lIns="18288" rIns="18288" tIns="0" bIns="0"/>
+          <a:lstStyle/>
+          <a:p>
+            <a:pPr algn="ctr">
+              <a:lnSpc>
+                <a:spcPct val="100000"/>
+              </a:lnSpc>
+            </a:pPr>
+            <a:r>
+              <a:rPr sz="800" b="1">
+                <a:solidFill>
+                  <a:srgbClr val="8B0F1A"/>
+                </a:solidFill>
+                <a:latin typeface="微软雅黑"/>
+                <a:ea typeface="微软雅黑"/>
+                <a:cs typeface="微软雅黑"/>
+              </a:rPr>
+              <a:t>T3</a:t>
+            </a:r>
+          </a:p>
+        </p:txBody>
+      </p:sp>
+      <p:sp>
+        <p:nvSpPr>
+          <p:cNvPr id="16" name="Rounded Rectangle 15"/>
+          <p:cNvSpPr/>
+          <p:nvPr/>
+        </p:nvSpPr>
+        <p:spPr>
+          <a:xfrm>
+            <a:off x="2560320" y="1865376"/>
+            <a:ext cx="3547872" cy="310896"/>
+          </a:xfrm>
+          <a:prstGeom prst="roundRect">
+            <a:avLst>
+              <a:gd name="adj" fmla="val 3000"/>
+            </a:avLst>
+          </a:prstGeom>
+          <a:solidFill>
+            <a:srgbClr val="F8EDEC"/>
+          </a:solidFill>
+          <a:ln>
+            <a:noFill/>
+          </a:ln>
+          <a:effectLst/>
+        </p:spPr>
+        <p:style>
+          <a:lnRef idx="1">
+            <a:schemeClr val="accent1"/>
+          </a:lnRef>
+          <a:fillRef idx="3">
+            <a:schemeClr val="accent1"/>
+          </a:fillRef>
+          <a:effectRef idx="2">
+            <a:schemeClr val="accent1"/>
+          </a:effectRef>
+          <a:fontRef idx="minor">
+            <a:schemeClr val="lt1"/>
+          </a:fontRef>
+        </p:style>
+        <p:txBody>
+          <a:bodyPr rtlCol="0" anchor="ctr" wrap="square"/>
+          <a:lstStyle/>
+          <a:p>
+            <a:pPr algn="ctr"/>
+          </a:p>
+        </p:txBody>
+      </p:sp>
+      <p:sp>
+        <p:nvSpPr>
+          <p:cNvPr id="17" name="TextBox 16"/>
+          <p:cNvSpPr txBox="1"/>
+          <p:nvPr/>
+        </p:nvSpPr>
+        <p:spPr>
+          <a:xfrm>
+            <a:off x="2615184" y="1865376"/>
+            <a:ext cx="3438144" cy="310896"/>
+          </a:xfrm>
+          <a:prstGeom prst="rect">
+            <a:avLst/>
+          </a:prstGeom>
+          <a:noFill/>
+        </p:spPr>
+        <p:txBody>
+          <a:bodyPr wrap="square" lIns="27432" rIns="27432" tIns="9144" bIns="9144" anchor="ctr">
+            <a:spAutoFit/>
+          </a:bodyPr>
+          <a:lstStyle/>
+          <a:p>
+            <a:pPr algn="l">
+              <a:lnSpc>
+                <a:spcPct val="110000"/>
+              </a:lnSpc>
+            </a:pPr>
+            <a:r>
+              <a:rPr sz="700" b="0">
+                <a:solidFill>
+                  <a:srgbClr val="3A3A35"/>
+                </a:solidFill>
+                <a:latin typeface="微软雅黑"/>
+                <a:ea typeface="微软雅黑"/>
+                <a:cs typeface="微软雅黑"/>
+              </a:rPr>
+              <a:t>组合拓扑：同站内自有架构与供应商设备并存，需统一编排与结果归一（本次要求对象）</a:t>
+            </a:r>
+          </a:p>
+        </p:txBody>
+      </p:sp>
+      <p:cxnSp>
+        <p:nvCxnSpPr>
+          <p:cNvPr id="18" name="Connector 17"/>
+          <p:cNvCxnSpPr/>
+          <p:nvPr/>
+        </p:nvCxnSpPr>
+        <p:spPr>
+          <a:xfrm>
+            <a:off x="1481328" y="1673352"/>
+            <a:ext cx="585215" cy="347472"/>
+          </a:xfrm>
+          <a:prstGeom prst="line">
+            <a:avLst/>
+          </a:prstGeom>
+          <a:ln w="13970">
+            <a:solidFill>
+              <a:srgbClr val="5C5C56"/>
+            </a:solidFill>
+            <a:tailEnd type="triangle" w="lg" len="lg"/>
+          </a:ln>
+        </p:spPr>
+        <p:style>
+          <a:lnRef idx="2">
+            <a:schemeClr val="accent1"/>
+          </a:lnRef>
+          <a:fillRef idx="0">
+            <a:schemeClr val="accent1"/>
+          </a:fillRef>
+          <a:effectRef idx="1">
+            <a:schemeClr val="accent1"/>
+          </a:effectRef>
+          <a:fontRef idx="minor">
+            <a:schemeClr val="tx1"/>
+          </a:fontRef>
+        </p:style>
+      </p:cxnSp>
+      <p:sp>
+        <p:nvSpPr>
+          <p:cNvPr id="19" name="TextBox 18"/>
+          <p:cNvSpPr txBox="1"/>
+          <p:nvPr/>
+        </p:nvSpPr>
+        <p:spPr>
+          <a:xfrm>
+            <a:off x="6355080" y="1133856"/>
+            <a:ext cx="5532120" cy="219456"/>
+          </a:xfrm>
+          <a:prstGeom prst="rect">
+            <a:avLst/>
+          </a:prstGeom>
+          <a:noFill/>
+        </p:spPr>
+        <p:txBody>
+          <a:bodyPr wrap="square" lIns="27432" rIns="27432" tIns="9144" bIns="9144" anchor="ctr">
+            <a:spAutoFit/>
+          </a:bodyPr>
+          <a:lstStyle/>
+          <a:p>
+            <a:pPr algn="l">
+              <a:lnSpc>
+                <a:spcPct val="110000"/>
+              </a:lnSpc>
+            </a:pPr>
+            <a:r>
+              <a:rPr sz="850" b="1">
+                <a:solidFill>
+                  <a:srgbClr val="8B0F1A"/>
+                </a:solidFill>
+                <a:latin typeface="微软雅黑"/>
+                <a:ea typeface="微软雅黑"/>
+                <a:cs typeface="微软雅黑"/>
+              </a:rPr>
+              <a:t>四条要求主线</a:t>
+            </a:r>
+          </a:p>
+        </p:txBody>
+      </p:sp>
+      <p:sp>
+        <p:nvSpPr>
+          <p:cNvPr id="20" name="Rounded Rectangle 19"/>
+          <p:cNvSpPr/>
+          <p:nvPr/>
+        </p:nvSpPr>
+        <p:spPr>
+          <a:xfrm>
+            <a:off x="6355080" y="1389888"/>
+            <a:ext cx="1298448" cy="310896"/>
+          </a:xfrm>
+          <a:prstGeom prst="roundRect">
+            <a:avLst>
+              <a:gd name="adj" fmla="val 3000"/>
+            </a:avLst>
+          </a:prstGeom>
+          <a:solidFill>
+            <a:srgbClr val="E8F0F7"/>
+          </a:solidFill>
+          <a:ln>
+            <a:noFill/>
+          </a:ln>
+          <a:effectLst/>
+        </p:spPr>
+        <p:style>
+          <a:lnRef idx="1">
+            <a:schemeClr val="accent1"/>
+          </a:lnRef>
+          <a:fillRef idx="3">
+            <a:schemeClr val="accent1"/>
+          </a:fillRef>
+          <a:effectRef idx="2">
+            <a:schemeClr val="accent1"/>
+          </a:effectRef>
+          <a:fontRef idx="minor">
+            <a:schemeClr val="lt1"/>
+          </a:fontRef>
+        </p:style>
+        <p:txBody>
+          <a:bodyPr rtlCol="0" anchor="ctr" wrap="square" lIns="18288" rIns="18288" tIns="0" bIns="0"/>
+          <a:lstStyle/>
+          <a:p>
+            <a:pPr algn="ctr">
+              <a:lnSpc>
+                <a:spcPct val="100000"/>
+              </a:lnSpc>
+            </a:pPr>
+            <a:r>
+              <a:rPr sz="850" b="1">
+                <a:solidFill>
+                  <a:srgbClr val="0F4C81"/>
+                </a:solidFill>
+                <a:latin typeface="微软雅黑"/>
+                <a:ea typeface="微软雅黑"/>
+                <a:cs typeface="微软雅黑"/>
+              </a:rPr>
+              <a:t>硬件隔离</a:t>
+            </a:r>
+          </a:p>
+        </p:txBody>
+      </p:sp>
+      <p:sp>
+        <p:nvSpPr>
+          <p:cNvPr id="21" name="Rounded Rectangle 20"/>
+          <p:cNvSpPr/>
+          <p:nvPr/>
+        </p:nvSpPr>
+        <p:spPr>
+          <a:xfrm>
+            <a:off x="7754112" y="1389888"/>
+            <a:ext cx="1298448" cy="310896"/>
+          </a:xfrm>
+          <a:prstGeom prst="roundRect">
+            <a:avLst>
+              <a:gd name="adj" fmla="val 3000"/>
+            </a:avLst>
+          </a:prstGeom>
+          <a:solidFill>
+            <a:srgbClr val="E8F0F7"/>
+          </a:solidFill>
+          <a:ln>
+            <a:noFill/>
+          </a:ln>
+          <a:effectLst/>
+        </p:spPr>
+        <p:style>
+          <a:lnRef idx="1">
+            <a:schemeClr val="accent1"/>
+          </a:lnRef>
+          <a:fillRef idx="3">
+            <a:schemeClr val="accent1"/>
+          </a:fillRef>
+          <a:effectRef idx="2">
+            <a:schemeClr val="accent1"/>
+          </a:effectRef>
+          <a:fontRef idx="minor">
+            <a:schemeClr val="lt1"/>
+          </a:fontRef>
+        </p:style>
+        <p:txBody>
+          <a:bodyPr rtlCol="0" anchor="ctr" wrap="square" lIns="18288" rIns="18288" tIns="0" bIns="0"/>
+          <a:lstStyle/>
+          <a:p>
+            <a:pPr algn="ctr">
+              <a:lnSpc>
+                <a:spcPct val="100000"/>
+              </a:lnSpc>
+            </a:pPr>
+            <a:r>
+              <a:rPr sz="850" b="1">
+                <a:solidFill>
+                  <a:srgbClr val="0F4C81"/>
+                </a:solidFill>
+                <a:latin typeface="微软雅黑"/>
+                <a:ea typeface="微软雅黑"/>
+                <a:cs typeface="微软雅黑"/>
+              </a:rPr>
+              <a:t>适配收敛</a:t>
+            </a:r>
+          </a:p>
+        </p:txBody>
+      </p:sp>
+      <p:sp>
+        <p:nvSpPr>
+          <p:cNvPr id="22" name="Rounded Rectangle 21"/>
+          <p:cNvSpPr/>
+          <p:nvPr/>
+        </p:nvSpPr>
+        <p:spPr>
+          <a:xfrm>
+            <a:off x="9153144" y="1389888"/>
+            <a:ext cx="1298448" cy="310896"/>
+          </a:xfrm>
+          <a:prstGeom prst="roundRect">
+            <a:avLst>
+              <a:gd name="adj" fmla="val 3000"/>
+            </a:avLst>
+          </a:prstGeom>
+          <a:solidFill>
+            <a:srgbClr val="E8F0F7"/>
+          </a:solidFill>
+          <a:ln>
+            <a:noFill/>
+          </a:ln>
+          <a:effectLst/>
+        </p:spPr>
+        <p:style>
+          <a:lnRef idx="1">
+            <a:schemeClr val="accent1"/>
+          </a:lnRef>
+          <a:fillRef idx="3">
+            <a:schemeClr val="accent1"/>
+          </a:fillRef>
+          <a:effectRef idx="2">
+            <a:schemeClr val="accent1"/>
+          </a:effectRef>
+          <a:fontRef idx="minor">
+            <a:schemeClr val="lt1"/>
+          </a:fontRef>
+        </p:style>
+        <p:txBody>
+          <a:bodyPr rtlCol="0" anchor="ctr" wrap="square" lIns="18288" rIns="18288" tIns="0" bIns="0"/>
+          <a:lstStyle/>
+          <a:p>
+            <a:pPr algn="ctr">
+              <a:lnSpc>
+                <a:spcPct val="100000"/>
+              </a:lnSpc>
+            </a:pPr>
+            <a:r>
+              <a:rPr sz="850" b="1">
+                <a:solidFill>
+                  <a:srgbClr val="0F4C81"/>
+                </a:solidFill>
+                <a:latin typeface="微软雅黑"/>
+                <a:ea typeface="微软雅黑"/>
+                <a:cs typeface="微软雅黑"/>
+              </a:rPr>
+              <a:t>超时兜底</a:t>
+            </a:r>
+          </a:p>
+        </p:txBody>
+      </p:sp>
+      <p:sp>
+        <p:nvSpPr>
+          <p:cNvPr id="23" name="Rounded Rectangle 22"/>
+          <p:cNvSpPr/>
+          <p:nvPr/>
+        </p:nvSpPr>
+        <p:spPr>
+          <a:xfrm>
+            <a:off x="10552176" y="1389888"/>
+            <a:ext cx="1298448" cy="310896"/>
+          </a:xfrm>
+          <a:prstGeom prst="roundRect">
+            <a:avLst>
+              <a:gd name="adj" fmla="val 3000"/>
+            </a:avLst>
+          </a:prstGeom>
+          <a:solidFill>
+            <a:srgbClr val="E8F0F7"/>
+          </a:solidFill>
+          <a:ln>
+            <a:noFill/>
+          </a:ln>
+          <a:effectLst/>
+        </p:spPr>
+        <p:style>
+          <a:lnRef idx="1">
+            <a:schemeClr val="accent1"/>
+          </a:lnRef>
+          <a:fillRef idx="3">
+            <a:schemeClr val="accent1"/>
+          </a:fillRef>
+          <a:effectRef idx="2">
+            <a:schemeClr val="accent1"/>
+          </a:effectRef>
+          <a:fontRef idx="minor">
+            <a:schemeClr val="lt1"/>
+          </a:fontRef>
+        </p:style>
+        <p:txBody>
+          <a:bodyPr rtlCol="0" anchor="ctr" wrap="square" lIns="18288" rIns="18288" tIns="0" bIns="0"/>
+          <a:lstStyle/>
+          <a:p>
+            <a:pPr algn="ctr">
+              <a:lnSpc>
+                <a:spcPct val="100000"/>
+              </a:lnSpc>
+            </a:pPr>
+            <a:r>
+              <a:rPr sz="850" b="1">
+                <a:solidFill>
+                  <a:srgbClr val="0F4C81"/>
+                </a:solidFill>
+                <a:latin typeface="微软雅黑"/>
+                <a:ea typeface="微软雅黑"/>
+                <a:cs typeface="微软雅黑"/>
+              </a:rPr>
+              <a:t>授权可控</a:t>
+            </a:r>
+          </a:p>
+        </p:txBody>
+      </p:sp>
+      <p:sp>
+        <p:nvSpPr>
+          <p:cNvPr id="24" name="TextBox 23"/>
+          <p:cNvSpPr txBox="1"/>
+          <p:nvPr/>
+        </p:nvSpPr>
+        <p:spPr>
+          <a:xfrm>
+            <a:off x="274320" y="2340864"/>
+            <a:ext cx="5577840" cy="237744"/>
+          </a:xfrm>
+          <a:prstGeom prst="rect">
+            <a:avLst/>
+          </a:prstGeom>
+          <a:noFill/>
+        </p:spPr>
+        <p:txBody>
+          <a:bodyPr wrap="square" lIns="27432" rIns="27432" tIns="9144" bIns="9144" anchor="ctr">
+            <a:spAutoFit/>
+          </a:bodyPr>
+          <a:lstStyle/>
+          <a:p>
+            <a:pPr algn="l">
+              <a:lnSpc>
+                <a:spcPct val="110000"/>
+              </a:lnSpc>
+            </a:pPr>
+            <a:r>
+              <a:rPr sz="1000" b="1">
+                <a:solidFill>
+                  <a:srgbClr val="8B0F1A"/>
+                </a:solidFill>
+                <a:latin typeface="微软雅黑"/>
+                <a:ea typeface="微软雅黑"/>
+                <a:cs typeface="微软雅黑"/>
+              </a:rPr>
+              <a:t>硬件要求（6 项）</a:t>
+            </a:r>
+          </a:p>
+        </p:txBody>
+      </p:sp>
+      <p:sp>
+        <p:nvSpPr>
+          <p:cNvPr id="25" name="Rounded Rectangle 24"/>
+          <p:cNvSpPr/>
+          <p:nvPr/>
+        </p:nvSpPr>
+        <p:spPr>
+          <a:xfrm>
+            <a:off x="274320" y="2633472"/>
+            <a:ext cx="5623560" cy="512064"/>
+          </a:xfrm>
+          <a:prstGeom prst="roundRect">
+            <a:avLst>
+              <a:gd name="adj" fmla="val 4000"/>
+            </a:avLst>
+          </a:prstGeom>
+          <a:solidFill>
+            <a:srgbClr val="ECECEC"/>
+          </a:solidFill>
+          <a:ln>
+            <a:noFill/>
+          </a:ln>
+          <a:effectLst/>
+        </p:spPr>
+        <p:style>
+          <a:lnRef idx="1">
+            <a:schemeClr val="accent1"/>
+          </a:lnRef>
+          <a:fillRef idx="3">
+            <a:schemeClr val="accent1"/>
+          </a:fillRef>
+          <a:effectRef idx="2">
+            <a:schemeClr val="accent1"/>
+          </a:effectRef>
+          <a:fontRef idx="minor">
+            <a:schemeClr val="lt1"/>
+          </a:fontRef>
+        </p:style>
+        <p:txBody>
+          <a:bodyPr rtlCol="0" anchor="ctr" wrap="square"/>
+          <a:lstStyle/>
+          <a:p>
+            <a:pPr algn="ctr"/>
+          </a:p>
+        </p:txBody>
+      </p:sp>
+      <p:sp>
+        <p:nvSpPr>
+          <p:cNvPr id="26" name="TextBox 25"/>
+          <p:cNvSpPr txBox="1"/>
+          <p:nvPr/>
+        </p:nvSpPr>
+        <p:spPr>
+          <a:xfrm>
+            <a:off x="365760" y="2660903"/>
+            <a:ext cx="5440680" cy="457200"/>
+          </a:xfrm>
+          <a:prstGeom prst="rect">
+            <a:avLst/>
+          </a:prstGeom>
+          <a:noFill/>
+        </p:spPr>
+        <p:txBody>
+          <a:bodyPr wrap="square" lIns="27432" rIns="27432" tIns="9144" bIns="9144" anchor="t">
+            <a:spAutoFit/>
+          </a:bodyPr>
+          <a:lstStyle/>
+          <a:p>
+            <a:pPr algn="l">
+              <a:lnSpc>
+                <a:spcPct val="110000"/>
+              </a:lnSpc>
+            </a:pPr>
+            <a:r>
+              <a:rPr sz="750" b="1">
+                <a:solidFill>
+                  <a:srgbClr val="0F4C81"/>
+                </a:solidFill>
+                <a:latin typeface="微软雅黑"/>
+                <a:ea typeface="微软雅黑"/>
+                <a:cs typeface="微软雅黑"/>
+              </a:rPr>
+              <a:t>独立网络通道</a:t>
+            </a:r>
+          </a:p>
+          <a:p>
+            <a:pPr algn="l">
+              <a:lnSpc>
+                <a:spcPct val="110000"/>
+              </a:lnSpc>
+              <a:spcBef>
+                <a:spcPts val="100"/>
+              </a:spcBef>
+            </a:pPr>
+            <a:r>
+              <a:rPr sz="750" b="0">
+                <a:solidFill>
+                  <a:srgbClr val="3A3A35"/>
+                </a:solidFill>
+                <a:latin typeface="微软雅黑"/>
+                <a:ea typeface="微软雅黑"/>
+                <a:cs typeface="微软雅黑"/>
+              </a:rPr>
+              <a:t>独立网口、独立 VLAN 与交换机端口，不与管理网、办公网混用</a:t>
+            </a:r>
+          </a:p>
+        </p:txBody>
+      </p:sp>
+      <p:sp>
+        <p:nvSpPr>
+          <p:cNvPr id="27" name="Rounded Rectangle 26"/>
+          <p:cNvSpPr/>
+          <p:nvPr/>
+        </p:nvSpPr>
+        <p:spPr>
+          <a:xfrm>
+            <a:off x="274320" y="3214115"/>
+            <a:ext cx="5623560" cy="512064"/>
+          </a:xfrm>
+          <a:prstGeom prst="roundRect">
+            <a:avLst>
+              <a:gd name="adj" fmla="val 4000"/>
+            </a:avLst>
+          </a:prstGeom>
+          <a:solidFill>
+            <a:srgbClr val="ECECEC"/>
+          </a:solidFill>
+          <a:ln>
+            <a:noFill/>
+          </a:ln>
+          <a:effectLst/>
+        </p:spPr>
+        <p:style>
+          <a:lnRef idx="1">
+            <a:schemeClr val="accent1"/>
+          </a:lnRef>
+          <a:fillRef idx="3">
+            <a:schemeClr val="accent1"/>
+          </a:fillRef>
+          <a:effectRef idx="2">
+            <a:schemeClr val="accent1"/>
+          </a:effectRef>
+          <a:fontRef idx="minor">
+            <a:schemeClr val="lt1"/>
+          </a:fontRef>
+        </p:style>
+        <p:txBody>
+          <a:bodyPr rtlCol="0" anchor="ctr" wrap="square"/>
+          <a:lstStyle/>
+          <a:p>
+            <a:pPr algn="ctr"/>
+          </a:p>
+        </p:txBody>
+      </p:sp>
+      <p:sp>
+        <p:nvSpPr>
+          <p:cNvPr id="28" name="TextBox 27"/>
+          <p:cNvSpPr txBox="1"/>
+          <p:nvPr/>
+        </p:nvSpPr>
+        <p:spPr>
+          <a:xfrm>
+            <a:off x="365760" y="3241547"/>
+            <a:ext cx="5440680" cy="457200"/>
+          </a:xfrm>
+          <a:prstGeom prst="rect">
+            <a:avLst/>
+          </a:prstGeom>
+          <a:noFill/>
+        </p:spPr>
+        <p:txBody>
+          <a:bodyPr wrap="square" lIns="27432" rIns="27432" tIns="9144" bIns="9144" anchor="t">
+            <a:spAutoFit/>
+          </a:bodyPr>
+          <a:lstStyle/>
+          <a:p>
+            <a:pPr algn="l">
+              <a:lnSpc>
+                <a:spcPct val="110000"/>
+              </a:lnSpc>
+            </a:pPr>
+            <a:r>
+              <a:rPr sz="750" b="1">
+                <a:solidFill>
+                  <a:srgbClr val="0F4C81"/>
+                </a:solidFill>
+                <a:latin typeface="微软雅黑"/>
+                <a:ea typeface="微软雅黑"/>
+                <a:cs typeface="微软雅黑"/>
+              </a:rPr>
+              <a:t>接口扩展预留</a:t>
+            </a:r>
+          </a:p>
+          <a:p>
+            <a:pPr algn="l">
+              <a:lnSpc>
+                <a:spcPct val="110000"/>
+              </a:lnSpc>
+              <a:spcBef>
+                <a:spcPts val="100"/>
+              </a:spcBef>
+            </a:pPr>
+            <a:r>
+              <a:rPr sz="750" b="0">
+                <a:solidFill>
+                  <a:srgbClr val="3A3A35"/>
+                </a:solidFill>
+                <a:latin typeface="微软雅黑"/>
+                <a:ea typeface="微软雅黑"/>
+                <a:cs typeface="微软雅黑"/>
+              </a:rPr>
+              <a:t>GPIB / USB / 串口扩展卡或 USB-Ethernet，按台位数与仪器数预留</a:t>
+            </a:r>
+          </a:p>
+        </p:txBody>
+      </p:sp>
+      <p:sp>
+        <p:nvSpPr>
+          <p:cNvPr id="29" name="Rounded Rectangle 28"/>
+          <p:cNvSpPr/>
+          <p:nvPr/>
+        </p:nvSpPr>
+        <p:spPr>
+          <a:xfrm>
+            <a:off x="274320" y="3794759"/>
+            <a:ext cx="5623560" cy="512064"/>
+          </a:xfrm>
+          <a:prstGeom prst="roundRect">
+            <a:avLst>
+              <a:gd name="adj" fmla="val 4000"/>
+            </a:avLst>
+          </a:prstGeom>
+          <a:solidFill>
+            <a:srgbClr val="ECECEC"/>
+          </a:solidFill>
+          <a:ln>
+            <a:noFill/>
+          </a:ln>
+          <a:effectLst/>
+        </p:spPr>
+        <p:style>
+          <a:lnRef idx="1">
+            <a:schemeClr val="accent1"/>
+          </a:lnRef>
+          <a:fillRef idx="3">
+            <a:schemeClr val="accent1"/>
+          </a:fillRef>
+          <a:effectRef idx="2">
+            <a:schemeClr val="accent1"/>
+          </a:effectRef>
+          <a:fontRef idx="minor">
+            <a:schemeClr val="lt1"/>
+          </a:fontRef>
+        </p:style>
+        <p:txBody>
+          <a:bodyPr rtlCol="0" anchor="ctr" wrap="square"/>
+          <a:lstStyle/>
+          <a:p>
+            <a:pPr algn="ctr"/>
+          </a:p>
+        </p:txBody>
+      </p:sp>
+      <p:sp>
+        <p:nvSpPr>
+          <p:cNvPr id="30" name="TextBox 29"/>
+          <p:cNvSpPr txBox="1"/>
+          <p:nvPr/>
+        </p:nvSpPr>
+        <p:spPr>
+          <a:xfrm>
+            <a:off x="365760" y="3822191"/>
+            <a:ext cx="5440680" cy="457200"/>
+          </a:xfrm>
+          <a:prstGeom prst="rect">
+            <a:avLst/>
+          </a:prstGeom>
+          <a:noFill/>
+        </p:spPr>
+        <p:txBody>
+          <a:bodyPr wrap="square" lIns="27432" rIns="27432" tIns="9144" bIns="9144" anchor="t">
+            <a:spAutoFit/>
+          </a:bodyPr>
+          <a:lstStyle/>
+          <a:p>
+            <a:pPr algn="l">
+              <a:lnSpc>
+                <a:spcPct val="110000"/>
+              </a:lnSpc>
+            </a:pPr>
+            <a:r>
+              <a:rPr sz="750" b="1">
+                <a:solidFill>
+                  <a:srgbClr val="0F4C81"/>
+                </a:solidFill>
+                <a:latin typeface="微软雅黑"/>
+                <a:ea typeface="微软雅黑"/>
+                <a:cs typeface="微软雅黑"/>
+              </a:rPr>
+              <a:t>授权载体托管</a:t>
+            </a:r>
+          </a:p>
+          <a:p>
+            <a:pPr algn="l">
+              <a:lnSpc>
+                <a:spcPct val="110000"/>
+              </a:lnSpc>
+              <a:spcBef>
+                <a:spcPts val="100"/>
+              </a:spcBef>
+            </a:pPr>
+            <a:r>
+              <a:rPr sz="750" b="0">
+                <a:solidFill>
+                  <a:srgbClr val="3A3A35"/>
+                </a:solidFill>
+                <a:latin typeface="微软雅黑"/>
+                <a:ea typeface="微软雅黑"/>
+                <a:cs typeface="微软雅黑"/>
+              </a:rPr>
+              <a:t>加密狗上网络 USB Server；许可服务器独立主机并纳入备份与监控</a:t>
+            </a:r>
+          </a:p>
+        </p:txBody>
+      </p:sp>
+      <p:sp>
+        <p:nvSpPr>
+          <p:cNvPr id="31" name="Rounded Rectangle 30"/>
+          <p:cNvSpPr/>
+          <p:nvPr/>
+        </p:nvSpPr>
+        <p:spPr>
+          <a:xfrm>
+            <a:off x="274320" y="4375403"/>
+            <a:ext cx="5623560" cy="512064"/>
+          </a:xfrm>
+          <a:prstGeom prst="roundRect">
+            <a:avLst>
+              <a:gd name="adj" fmla="val 4000"/>
+            </a:avLst>
+          </a:prstGeom>
+          <a:solidFill>
+            <a:srgbClr val="ECECEC"/>
+          </a:solidFill>
+          <a:ln>
+            <a:noFill/>
+          </a:ln>
+          <a:effectLst/>
+        </p:spPr>
+        <p:style>
+          <a:lnRef idx="1">
+            <a:schemeClr val="accent1"/>
+          </a:lnRef>
+          <a:fillRef idx="3">
+            <a:schemeClr val="accent1"/>
+          </a:fillRef>
+          <a:effectRef idx="2">
+            <a:schemeClr val="accent1"/>
+          </a:effectRef>
+          <a:fontRef idx="minor">
+            <a:schemeClr val="lt1"/>
+          </a:fontRef>
+        </p:style>
+        <p:txBody>
+          <a:bodyPr rtlCol="0" anchor="ctr" wrap="square"/>
+          <a:lstStyle/>
+          <a:p>
+            <a:pPr algn="ctr"/>
+          </a:p>
+        </p:txBody>
+      </p:sp>
+      <p:sp>
+        <p:nvSpPr>
+          <p:cNvPr id="32" name="TextBox 31"/>
+          <p:cNvSpPr txBox="1"/>
+          <p:nvPr/>
+        </p:nvSpPr>
+        <p:spPr>
+          <a:xfrm>
+            <a:off x="365760" y="4402836"/>
+            <a:ext cx="5440680" cy="457200"/>
+          </a:xfrm>
+          <a:prstGeom prst="rect">
+            <a:avLst/>
+          </a:prstGeom>
+          <a:noFill/>
+        </p:spPr>
+        <p:txBody>
+          <a:bodyPr wrap="square" lIns="27432" rIns="27432" tIns="9144" bIns="9144" anchor="t">
+            <a:spAutoFit/>
+          </a:bodyPr>
+          <a:lstStyle/>
+          <a:p>
+            <a:pPr algn="l">
+              <a:lnSpc>
+                <a:spcPct val="110000"/>
+              </a:lnSpc>
+            </a:pPr>
+            <a:r>
+              <a:rPr sz="750" b="1">
+                <a:solidFill>
+                  <a:srgbClr val="0F4C81"/>
+                </a:solidFill>
+                <a:latin typeface="微软雅黑"/>
+                <a:ea typeface="微软雅黑"/>
+                <a:cs typeface="微软雅黑"/>
+              </a:rPr>
+              <a:t>供电与远程复位</a:t>
+            </a:r>
+          </a:p>
+          <a:p>
+            <a:pPr algn="l">
+              <a:lnSpc>
+                <a:spcPct val="110000"/>
+              </a:lnSpc>
+              <a:spcBef>
+                <a:spcPts val="100"/>
+              </a:spcBef>
+            </a:pPr>
+            <a:r>
+              <a:rPr sz="750" b="0">
+                <a:solidFill>
+                  <a:srgbClr val="3A3A35"/>
+                </a:solidFill>
+                <a:latin typeface="微软雅黑"/>
+                <a:ea typeface="微软雅黑"/>
+                <a:cs typeface="微软雅黑"/>
+              </a:rPr>
+              <a:t>供应商设备独立供电回路加智能 PDU / 继电器，异常可硬复位</a:t>
+            </a:r>
+          </a:p>
+        </p:txBody>
+      </p:sp>
+      <p:sp>
+        <p:nvSpPr>
+          <p:cNvPr id="33" name="Rounded Rectangle 32"/>
+          <p:cNvSpPr/>
+          <p:nvPr/>
+        </p:nvSpPr>
+        <p:spPr>
+          <a:xfrm>
+            <a:off x="274320" y="4956047"/>
+            <a:ext cx="5623560" cy="512064"/>
+          </a:xfrm>
+          <a:prstGeom prst="roundRect">
+            <a:avLst>
+              <a:gd name="adj" fmla="val 4000"/>
+            </a:avLst>
+          </a:prstGeom>
+          <a:solidFill>
+            <a:srgbClr val="ECECEC"/>
+          </a:solidFill>
+          <a:ln>
+            <a:noFill/>
+          </a:ln>
+          <a:effectLst/>
+        </p:spPr>
+        <p:style>
+          <a:lnRef idx="1">
+            <a:schemeClr val="accent1"/>
+          </a:lnRef>
+          <a:fillRef idx="3">
+            <a:schemeClr val="accent1"/>
+          </a:fillRef>
+          <a:effectRef idx="2">
+            <a:schemeClr val="accent1"/>
+          </a:effectRef>
+          <a:fontRef idx="minor">
+            <a:schemeClr val="lt1"/>
+          </a:fontRef>
+        </p:style>
+        <p:txBody>
+          <a:bodyPr rtlCol="0" anchor="ctr" wrap="square"/>
+          <a:lstStyle/>
+          <a:p>
+            <a:pPr algn="ctr"/>
+          </a:p>
+        </p:txBody>
+      </p:sp>
+      <p:sp>
+        <p:nvSpPr>
+          <p:cNvPr id="34" name="TextBox 33"/>
+          <p:cNvSpPr txBox="1"/>
+          <p:nvPr/>
+        </p:nvSpPr>
+        <p:spPr>
+          <a:xfrm>
+            <a:off x="365760" y="4983479"/>
+            <a:ext cx="5440680" cy="457200"/>
+          </a:xfrm>
+          <a:prstGeom prst="rect">
+            <a:avLst/>
+          </a:prstGeom>
+          <a:noFill/>
+        </p:spPr>
+        <p:txBody>
+          <a:bodyPr wrap="square" lIns="27432" rIns="27432" tIns="9144" bIns="9144" anchor="t">
+            <a:spAutoFit/>
+          </a:bodyPr>
+          <a:lstStyle/>
+          <a:p>
+            <a:pPr algn="l">
+              <a:lnSpc>
+                <a:spcPct val="110000"/>
+              </a:lnSpc>
+            </a:pPr>
+            <a:r>
+              <a:rPr sz="750" b="1">
+                <a:solidFill>
+                  <a:srgbClr val="0F4C81"/>
+                </a:solidFill>
+                <a:latin typeface="微软雅黑"/>
+                <a:ea typeface="微软雅黑"/>
+                <a:cs typeface="微软雅黑"/>
+              </a:rPr>
+              <a:t>资源与端口预留</a:t>
+            </a:r>
+          </a:p>
+          <a:p>
+            <a:pPr algn="l">
+              <a:lnSpc>
+                <a:spcPct val="110000"/>
+              </a:lnSpc>
+              <a:spcBef>
+                <a:spcPts val="100"/>
+              </a:spcBef>
+            </a:pPr>
+            <a:r>
+              <a:rPr sz="750" b="0">
+                <a:solidFill>
+                  <a:srgbClr val="3A3A35"/>
+                </a:solidFill>
+                <a:latin typeface="微软雅黑"/>
+                <a:ea typeface="微软雅黑"/>
+                <a:cs typeface="微软雅黑"/>
+              </a:rPr>
+              <a:t>每并行台位预留进程、端口与磁盘配额；工控机不兼作其他业务</a:t>
+            </a:r>
+          </a:p>
+        </p:txBody>
+      </p:sp>
+      <p:sp>
+        <p:nvSpPr>
+          <p:cNvPr id="35" name="Rounded Rectangle 34"/>
+          <p:cNvSpPr/>
+          <p:nvPr/>
+        </p:nvSpPr>
+        <p:spPr>
+          <a:xfrm>
+            <a:off x="274320" y="5536691"/>
+            <a:ext cx="5623560" cy="512064"/>
+          </a:xfrm>
+          <a:prstGeom prst="roundRect">
+            <a:avLst>
+              <a:gd name="adj" fmla="val 4000"/>
+            </a:avLst>
+          </a:prstGeom>
+          <a:solidFill>
+            <a:srgbClr val="ECECEC"/>
+          </a:solidFill>
+          <a:ln>
+            <a:noFill/>
+          </a:ln>
+          <a:effectLst/>
+        </p:spPr>
+        <p:style>
+          <a:lnRef idx="1">
+            <a:schemeClr val="accent1"/>
+          </a:lnRef>
+          <a:fillRef idx="3">
+            <a:schemeClr val="accent1"/>
+          </a:fillRef>
+          <a:effectRef idx="2">
+            <a:schemeClr val="accent1"/>
+          </a:effectRef>
+          <a:fontRef idx="minor">
+            <a:schemeClr val="lt1"/>
+          </a:fontRef>
+        </p:style>
+        <p:txBody>
+          <a:bodyPr rtlCol="0" anchor="ctr" wrap="square"/>
+          <a:lstStyle/>
+          <a:p>
+            <a:pPr algn="ctr"/>
+          </a:p>
+        </p:txBody>
+      </p:sp>
+      <p:sp>
+        <p:nvSpPr>
+          <p:cNvPr id="36" name="TextBox 35"/>
+          <p:cNvSpPr txBox="1"/>
+          <p:nvPr/>
+        </p:nvSpPr>
+        <p:spPr>
+          <a:xfrm>
+            <a:off x="365760" y="5564123"/>
+            <a:ext cx="5440680" cy="457200"/>
+          </a:xfrm>
+          <a:prstGeom prst="rect">
+            <a:avLst/>
+          </a:prstGeom>
+          <a:noFill/>
+        </p:spPr>
+        <p:txBody>
+          <a:bodyPr wrap="square" lIns="27432" rIns="27432" tIns="9144" bIns="9144" anchor="t">
+            <a:spAutoFit/>
+          </a:bodyPr>
+          <a:lstStyle/>
+          <a:p>
+            <a:pPr algn="l">
+              <a:lnSpc>
+                <a:spcPct val="110000"/>
+              </a:lnSpc>
+            </a:pPr>
+            <a:r>
+              <a:rPr sz="750" b="1">
+                <a:solidFill>
+                  <a:srgbClr val="0F4C81"/>
+                </a:solidFill>
+                <a:latin typeface="微软雅黑"/>
+                <a:ea typeface="微软雅黑"/>
+                <a:cs typeface="微软雅黑"/>
+              </a:rPr>
+              <a:t>时钟与布线规范</a:t>
+            </a:r>
+          </a:p>
+          <a:p>
+            <a:pPr algn="l">
+              <a:lnSpc>
+                <a:spcPct val="110000"/>
+              </a:lnSpc>
+              <a:spcBef>
+                <a:spcPts val="100"/>
+              </a:spcBef>
+            </a:pPr>
+            <a:r>
+              <a:rPr sz="750" b="0">
+                <a:solidFill>
+                  <a:srgbClr val="3A3A35"/>
+                </a:solidFill>
+                <a:latin typeface="微软雅黑"/>
+                <a:ea typeface="微软雅黑"/>
+                <a:cs typeface="微软雅黑"/>
+              </a:rPr>
+              <a:t>全站 NTP 同源；台位与端口标识清晰，预留调试口与旁路通道</a:t>
+            </a:r>
+          </a:p>
+        </p:txBody>
+      </p:sp>
+      <p:sp>
+        <p:nvSpPr>
+          <p:cNvPr id="37" name="TextBox 36"/>
+          <p:cNvSpPr txBox="1"/>
+          <p:nvPr/>
+        </p:nvSpPr>
+        <p:spPr>
+          <a:xfrm>
+            <a:off x="6291072" y="2340864"/>
+            <a:ext cx="5577840" cy="237744"/>
+          </a:xfrm>
+          <a:prstGeom prst="rect">
+            <a:avLst/>
+          </a:prstGeom>
+          <a:noFill/>
+        </p:spPr>
+        <p:txBody>
+          <a:bodyPr wrap="square" lIns="27432" rIns="27432" tIns="9144" bIns="9144" anchor="ctr">
+            <a:spAutoFit/>
+          </a:bodyPr>
+          <a:lstStyle/>
+          <a:p>
+            <a:pPr algn="l">
+              <a:lnSpc>
+                <a:spcPct val="110000"/>
+              </a:lnSpc>
+            </a:pPr>
+            <a:r>
+              <a:rPr sz="1000" b="1">
+                <a:solidFill>
+                  <a:srgbClr val="8B0F1A"/>
+                </a:solidFill>
+                <a:latin typeface="微软雅黑"/>
+                <a:ea typeface="微软雅黑"/>
+                <a:cs typeface="微软雅黑"/>
+              </a:rPr>
+              <a:t>软件要求（6 项）</a:t>
+            </a:r>
+          </a:p>
+        </p:txBody>
+      </p:sp>
+      <p:sp>
+        <p:nvSpPr>
+          <p:cNvPr id="38" name="Rounded Rectangle 37"/>
+          <p:cNvSpPr/>
+          <p:nvPr/>
+        </p:nvSpPr>
+        <p:spPr>
+          <a:xfrm>
+            <a:off x="6291072" y="2633472"/>
+            <a:ext cx="5623560" cy="512064"/>
+          </a:xfrm>
+          <a:prstGeom prst="roundRect">
+            <a:avLst>
+              <a:gd name="adj" fmla="val 4000"/>
+            </a:avLst>
+          </a:prstGeom>
+          <a:solidFill>
+            <a:srgbClr val="ECECEC"/>
+          </a:solidFill>
+          <a:ln>
+            <a:noFill/>
+          </a:ln>
+          <a:effectLst/>
+        </p:spPr>
+        <p:style>
+          <a:lnRef idx="1">
+            <a:schemeClr val="accent1"/>
+          </a:lnRef>
+          <a:fillRef idx="3">
+            <a:schemeClr val="accent1"/>
+          </a:fillRef>
+          <a:effectRef idx="2">
+            <a:schemeClr val="accent1"/>
+          </a:effectRef>
+          <a:fontRef idx="minor">
+            <a:schemeClr val="lt1"/>
+          </a:fontRef>
+        </p:style>
+        <p:txBody>
+          <a:bodyPr rtlCol="0" anchor="ctr" wrap="square"/>
+          <a:lstStyle/>
+          <a:p>
+            <a:pPr algn="ctr"/>
+          </a:p>
+        </p:txBody>
+      </p:sp>
+      <p:sp>
+        <p:nvSpPr>
+          <p:cNvPr id="39" name="TextBox 38"/>
+          <p:cNvSpPr txBox="1"/>
+          <p:nvPr/>
+        </p:nvSpPr>
+        <p:spPr>
+          <a:xfrm>
+            <a:off x="6382512" y="2660903"/>
+            <a:ext cx="5440680" cy="457200"/>
+          </a:xfrm>
+          <a:prstGeom prst="rect">
+            <a:avLst/>
+          </a:prstGeom>
+          <a:noFill/>
+        </p:spPr>
+        <p:txBody>
+          <a:bodyPr wrap="square" lIns="27432" rIns="27432" tIns="9144" bIns="9144" anchor="t">
+            <a:spAutoFit/>
+          </a:bodyPr>
+          <a:lstStyle/>
+          <a:p>
+            <a:pPr algn="l">
+              <a:lnSpc>
+                <a:spcPct val="110000"/>
+              </a:lnSpc>
+            </a:pPr>
+            <a:r>
+              <a:rPr sz="750" b="1">
+                <a:solidFill>
+                  <a:srgbClr val="0F4C81"/>
+                </a:solidFill>
+                <a:latin typeface="微软雅黑"/>
+                <a:ea typeface="微软雅黑"/>
+                <a:cs typeface="微软雅黑"/>
+              </a:rPr>
+              <a:t>适配层收敛</a:t>
+            </a:r>
+          </a:p>
+          <a:p>
+            <a:pPr algn="l">
+              <a:lnSpc>
+                <a:spcPct val="110000"/>
+              </a:lnSpc>
+              <a:spcBef>
+                <a:spcPts val="100"/>
+              </a:spcBef>
+            </a:pPr>
+            <a:r>
+              <a:rPr sz="750" b="0">
+                <a:solidFill>
+                  <a:srgbClr val="3A3A35"/>
+                </a:solidFill>
+                <a:latin typeface="微软雅黑"/>
+                <a:ea typeface="微软雅黑"/>
+                <a:cs typeface="微软雅黑"/>
+              </a:rPr>
+              <a:t>供应商能力只经驱动适配层暴露，上层不直连其私有 API 或界面</a:t>
+            </a:r>
+          </a:p>
+        </p:txBody>
+      </p:sp>
+      <p:sp>
+        <p:nvSpPr>
+          <p:cNvPr id="40" name="Rounded Rectangle 39"/>
+          <p:cNvSpPr/>
+          <p:nvPr/>
+        </p:nvSpPr>
+        <p:spPr>
+          <a:xfrm>
+            <a:off x="6291072" y="3214115"/>
+            <a:ext cx="5623560" cy="512064"/>
+          </a:xfrm>
+          <a:prstGeom prst="roundRect">
+            <a:avLst>
+              <a:gd name="adj" fmla="val 4000"/>
+            </a:avLst>
+          </a:prstGeom>
+          <a:solidFill>
+            <a:srgbClr val="ECECEC"/>
+          </a:solidFill>
+          <a:ln>
+            <a:noFill/>
+          </a:ln>
+          <a:effectLst/>
+        </p:spPr>
+        <p:style>
+          <a:lnRef idx="1">
+            <a:schemeClr val="accent1"/>
+          </a:lnRef>
+          <a:fillRef idx="3">
+            <a:schemeClr val="accent1"/>
+          </a:fillRef>
+          <a:effectRef idx="2">
+            <a:schemeClr val="accent1"/>
+          </a:effectRef>
+          <a:fontRef idx="minor">
+            <a:schemeClr val="lt1"/>
+          </a:fontRef>
+        </p:style>
+        <p:txBody>
+          <a:bodyPr rtlCol="0" anchor="ctr" wrap="square"/>
+          <a:lstStyle/>
+          <a:p>
+            <a:pPr algn="ctr"/>
+          </a:p>
+        </p:txBody>
+      </p:sp>
+      <p:sp>
+        <p:nvSpPr>
+          <p:cNvPr id="41" name="TextBox 40"/>
+          <p:cNvSpPr txBox="1"/>
+          <p:nvPr/>
+        </p:nvSpPr>
+        <p:spPr>
+          <a:xfrm>
+            <a:off x="6382512" y="3241547"/>
+            <a:ext cx="5440680" cy="457200"/>
+          </a:xfrm>
+          <a:prstGeom prst="rect">
+            <a:avLst/>
+          </a:prstGeom>
+          <a:noFill/>
+        </p:spPr>
+        <p:txBody>
+          <a:bodyPr wrap="square" lIns="27432" rIns="27432" tIns="9144" bIns="9144" anchor="t">
+            <a:spAutoFit/>
+          </a:bodyPr>
+          <a:lstStyle/>
+          <a:p>
+            <a:pPr algn="l">
+              <a:lnSpc>
+                <a:spcPct val="110000"/>
+              </a:lnSpc>
+            </a:pPr>
+            <a:r>
+              <a:rPr sz="750" b="1">
+                <a:solidFill>
+                  <a:srgbClr val="0F4C81"/>
+                </a:solidFill>
+                <a:latin typeface="微软雅黑"/>
+                <a:ea typeface="微软雅黑"/>
+                <a:cs typeface="微软雅黑"/>
+              </a:rPr>
+              <a:t>进程与服务边界</a:t>
+            </a:r>
+          </a:p>
+          <a:p>
+            <a:pPr algn="l">
+              <a:lnSpc>
+                <a:spcPct val="110000"/>
+              </a:lnSpc>
+              <a:spcBef>
+                <a:spcPts val="100"/>
+              </a:spcBef>
+            </a:pPr>
+            <a:r>
+              <a:rPr sz="750" b="0">
+                <a:solidFill>
+                  <a:srgbClr val="3A3A35"/>
+                </a:solidFill>
+                <a:latin typeface="微软雅黑"/>
+                <a:ea typeface="微软雅黑"/>
+                <a:cs typeface="微软雅黑"/>
+              </a:rPr>
+              <a:t>供应商软件独立进程/服务运行，由代理进程持有连接，崩溃不连坐</a:t>
+            </a:r>
+          </a:p>
+        </p:txBody>
+      </p:sp>
+      <p:sp>
+        <p:nvSpPr>
+          <p:cNvPr id="42" name="Rounded Rectangle 41"/>
+          <p:cNvSpPr/>
+          <p:nvPr/>
+        </p:nvSpPr>
+        <p:spPr>
+          <a:xfrm>
+            <a:off x="6291072" y="3794759"/>
+            <a:ext cx="5623560" cy="512064"/>
+          </a:xfrm>
+          <a:prstGeom prst="roundRect">
+            <a:avLst>
+              <a:gd name="adj" fmla="val 4000"/>
+            </a:avLst>
+          </a:prstGeom>
+          <a:solidFill>
+            <a:srgbClr val="ECECEC"/>
+          </a:solidFill>
+          <a:ln>
+            <a:noFill/>
+          </a:ln>
+          <a:effectLst/>
+        </p:spPr>
+        <p:style>
+          <a:lnRef idx="1">
+            <a:schemeClr val="accent1"/>
+          </a:lnRef>
+          <a:fillRef idx="3">
+            <a:schemeClr val="accent1"/>
+          </a:fillRef>
+          <a:effectRef idx="2">
+            <a:schemeClr val="accent1"/>
+          </a:effectRef>
+          <a:fontRef idx="minor">
+            <a:schemeClr val="lt1"/>
+          </a:fontRef>
+        </p:style>
+        <p:txBody>
+          <a:bodyPr rtlCol="0" anchor="ctr" wrap="square"/>
+          <a:lstStyle/>
+          <a:p>
+            <a:pPr algn="ctr"/>
+          </a:p>
+        </p:txBody>
+      </p:sp>
+      <p:sp>
+        <p:nvSpPr>
+          <p:cNvPr id="43" name="TextBox 42"/>
+          <p:cNvSpPr txBox="1"/>
+          <p:nvPr/>
+        </p:nvSpPr>
+        <p:spPr>
+          <a:xfrm>
+            <a:off x="6382512" y="3822191"/>
+            <a:ext cx="5440680" cy="457200"/>
+          </a:xfrm>
+          <a:prstGeom prst="rect">
+            <a:avLst/>
+          </a:prstGeom>
+          <a:noFill/>
+        </p:spPr>
+        <p:txBody>
+          <a:bodyPr wrap="square" lIns="27432" rIns="27432" tIns="9144" bIns="9144" anchor="t">
+            <a:spAutoFit/>
+          </a:bodyPr>
+          <a:lstStyle/>
+          <a:p>
+            <a:pPr algn="l">
+              <a:lnSpc>
+                <a:spcPct val="110000"/>
+              </a:lnSpc>
+            </a:pPr>
+            <a:r>
+              <a:rPr sz="750" b="1">
+                <a:solidFill>
+                  <a:srgbClr val="0F4C81"/>
+                </a:solidFill>
+                <a:latin typeface="微软雅黑"/>
+                <a:ea typeface="微软雅黑"/>
+                <a:cs typeface="微软雅黑"/>
+              </a:rPr>
+              <a:t>仿真与回放</a:t>
+            </a:r>
+          </a:p>
+          <a:p>
+            <a:pPr algn="l">
+              <a:lnSpc>
+                <a:spcPct val="110000"/>
+              </a:lnSpc>
+              <a:spcBef>
+                <a:spcPts val="100"/>
+              </a:spcBef>
+            </a:pPr>
+            <a:r>
+              <a:rPr sz="750" b="0">
+                <a:solidFill>
+                  <a:srgbClr val="3A3A35"/>
+                </a:solidFill>
+                <a:latin typeface="微软雅黑"/>
+                <a:ea typeface="微软雅黑"/>
+                <a:cs typeface="微软雅黑"/>
+              </a:rPr>
+              <a:t>必须具备仿真 / 回放或 Mock 驱动，无设备时也能跑通流程与回归</a:t>
+            </a:r>
+          </a:p>
+        </p:txBody>
+      </p:sp>
+      <p:sp>
+        <p:nvSpPr>
+          <p:cNvPr id="44" name="Rounded Rectangle 43"/>
+          <p:cNvSpPr/>
+          <p:nvPr/>
+        </p:nvSpPr>
+        <p:spPr>
+          <a:xfrm>
+            <a:off x="6291072" y="4375403"/>
+            <a:ext cx="5623560" cy="512064"/>
+          </a:xfrm>
+          <a:prstGeom prst="roundRect">
+            <a:avLst>
+              <a:gd name="adj" fmla="val 4000"/>
+            </a:avLst>
+          </a:prstGeom>
+          <a:solidFill>
+            <a:srgbClr val="ECECEC"/>
+          </a:solidFill>
+          <a:ln>
+            <a:noFill/>
+          </a:ln>
+          <a:effectLst/>
+        </p:spPr>
+        <p:style>
+          <a:lnRef idx="1">
+            <a:schemeClr val="accent1"/>
+          </a:lnRef>
+          <a:fillRef idx="3">
+            <a:schemeClr val="accent1"/>
+          </a:fillRef>
+          <a:effectRef idx="2">
+            <a:schemeClr val="accent1"/>
+          </a:effectRef>
+          <a:fontRef idx="minor">
+            <a:schemeClr val="lt1"/>
+          </a:fontRef>
+        </p:style>
+        <p:txBody>
+          <a:bodyPr rtlCol="0" anchor="ctr" wrap="square"/>
+          <a:lstStyle/>
+          <a:p>
+            <a:pPr algn="ctr"/>
+          </a:p>
+        </p:txBody>
+      </p:sp>
+      <p:sp>
+        <p:nvSpPr>
+          <p:cNvPr id="45" name="TextBox 44"/>
+          <p:cNvSpPr txBox="1"/>
+          <p:nvPr/>
+        </p:nvSpPr>
+        <p:spPr>
+          <a:xfrm>
+            <a:off x="6382512" y="4402836"/>
+            <a:ext cx="5440680" cy="457200"/>
+          </a:xfrm>
+          <a:prstGeom prst="rect">
+            <a:avLst/>
+          </a:prstGeom>
+          <a:noFill/>
+        </p:spPr>
+        <p:txBody>
+          <a:bodyPr wrap="square" lIns="27432" rIns="27432" tIns="9144" bIns="9144" anchor="t">
+            <a:spAutoFit/>
+          </a:bodyPr>
+          <a:lstStyle/>
+          <a:p>
+            <a:pPr algn="l">
+              <a:lnSpc>
+                <a:spcPct val="110000"/>
+              </a:lnSpc>
+            </a:pPr>
+            <a:r>
+              <a:rPr sz="750" b="1">
+                <a:solidFill>
+                  <a:srgbClr val="0F4C81"/>
+                </a:solidFill>
+                <a:latin typeface="微软雅黑"/>
+                <a:ea typeface="微软雅黑"/>
+                <a:cs typeface="微软雅黑"/>
+              </a:rPr>
+              <a:t>硬超时与看门狗</a:t>
+            </a:r>
+          </a:p>
+          <a:p>
+            <a:pPr algn="l">
+              <a:lnSpc>
+                <a:spcPct val="110000"/>
+              </a:lnSpc>
+              <a:spcBef>
+                <a:spcPts val="100"/>
+              </a:spcBef>
+            </a:pPr>
+            <a:r>
+              <a:rPr sz="750" b="0">
+                <a:solidFill>
+                  <a:srgbClr val="3A3A35"/>
+                </a:solidFill>
+                <a:latin typeface="微软雅黑"/>
+                <a:ea typeface="微软雅黑"/>
+                <a:cs typeface="微软雅黑"/>
+              </a:rPr>
+              <a:t>所有对外调用设定硬超时，禁止无界阻塞；超时自动重连与复位</a:t>
+            </a:r>
+          </a:p>
+        </p:txBody>
+      </p:sp>
+      <p:sp>
+        <p:nvSpPr>
+          <p:cNvPr id="46" name="Rounded Rectangle 45"/>
+          <p:cNvSpPr/>
+          <p:nvPr/>
+        </p:nvSpPr>
+        <p:spPr>
+          <a:xfrm>
+            <a:off x="6291072" y="4956047"/>
+            <a:ext cx="5623560" cy="512064"/>
+          </a:xfrm>
+          <a:prstGeom prst="roundRect">
+            <a:avLst>
+              <a:gd name="adj" fmla="val 4000"/>
+            </a:avLst>
+          </a:prstGeom>
+          <a:solidFill>
+            <a:srgbClr val="ECECEC"/>
+          </a:solidFill>
+          <a:ln>
+            <a:noFill/>
+          </a:ln>
+          <a:effectLst/>
+        </p:spPr>
+        <p:style>
+          <a:lnRef idx="1">
+            <a:schemeClr val="accent1"/>
+          </a:lnRef>
+          <a:fillRef idx="3">
+            <a:schemeClr val="accent1"/>
+          </a:fillRef>
+          <a:effectRef idx="2">
+            <a:schemeClr val="accent1"/>
+          </a:effectRef>
+          <a:fontRef idx="minor">
+            <a:schemeClr val="lt1"/>
+          </a:fontRef>
+        </p:style>
+        <p:txBody>
+          <a:bodyPr rtlCol="0" anchor="ctr" wrap="square"/>
+          <a:lstStyle/>
+          <a:p>
+            <a:pPr algn="ctr"/>
+          </a:p>
+        </p:txBody>
+      </p:sp>
+      <p:sp>
+        <p:nvSpPr>
+          <p:cNvPr id="47" name="TextBox 46"/>
+          <p:cNvSpPr txBox="1"/>
+          <p:nvPr/>
+        </p:nvSpPr>
+        <p:spPr>
+          <a:xfrm>
+            <a:off x="6382512" y="4983479"/>
+            <a:ext cx="5440680" cy="457200"/>
+          </a:xfrm>
+          <a:prstGeom prst="rect">
+            <a:avLst/>
+          </a:prstGeom>
+          <a:noFill/>
+        </p:spPr>
+        <p:txBody>
+          <a:bodyPr wrap="square" lIns="27432" rIns="27432" tIns="9144" bIns="9144" anchor="t">
+            <a:spAutoFit/>
+          </a:bodyPr>
+          <a:lstStyle/>
+          <a:p>
+            <a:pPr algn="l">
+              <a:lnSpc>
+                <a:spcPct val="110000"/>
+              </a:lnSpc>
+            </a:pPr>
+            <a:r>
+              <a:rPr sz="750" b="1">
+                <a:solidFill>
+                  <a:srgbClr val="0F4C81"/>
+                </a:solidFill>
+                <a:latin typeface="微软雅黑"/>
+                <a:ea typeface="微软雅黑"/>
+                <a:cs typeface="微软雅黑"/>
+              </a:rPr>
+              <a:t>版本与授权校验</a:t>
+            </a:r>
+          </a:p>
+          <a:p>
+            <a:pPr algn="l">
+              <a:lnSpc>
+                <a:spcPct val="110000"/>
+              </a:lnSpc>
+              <a:spcBef>
+                <a:spcPts val="100"/>
+              </a:spcBef>
+            </a:pPr>
+            <a:r>
+              <a:rPr sz="750" b="0">
+                <a:solidFill>
+                  <a:srgbClr val="3A3A35"/>
+                </a:solidFill>
+                <a:latin typeface="微软雅黑"/>
+                <a:ea typeface="微软雅黑"/>
+                <a:cs typeface="微软雅黑"/>
+              </a:rPr>
+              <a:t>启动校验版本、指纹与授权余量，不足时按并发排队而非随机失败</a:t>
+            </a:r>
+          </a:p>
+        </p:txBody>
+      </p:sp>
+      <p:sp>
+        <p:nvSpPr>
+          <p:cNvPr id="48" name="Rounded Rectangle 47"/>
+          <p:cNvSpPr/>
+          <p:nvPr/>
+        </p:nvSpPr>
+        <p:spPr>
+          <a:xfrm>
+            <a:off x="6291072" y="5536691"/>
+            <a:ext cx="5623560" cy="512064"/>
+          </a:xfrm>
+          <a:prstGeom prst="roundRect">
+            <a:avLst>
+              <a:gd name="adj" fmla="val 4000"/>
+            </a:avLst>
+          </a:prstGeom>
+          <a:solidFill>
+            <a:srgbClr val="ECECEC"/>
+          </a:solidFill>
+          <a:ln>
+            <a:noFill/>
+          </a:ln>
+          <a:effectLst/>
+        </p:spPr>
+        <p:style>
+          <a:lnRef idx="1">
+            <a:schemeClr val="accent1"/>
+          </a:lnRef>
+          <a:fillRef idx="3">
+            <a:schemeClr val="accent1"/>
+          </a:fillRef>
+          <a:effectRef idx="2">
+            <a:schemeClr val="accent1"/>
+          </a:effectRef>
+          <a:fontRef idx="minor">
+            <a:schemeClr val="lt1"/>
+          </a:fontRef>
+        </p:style>
+        <p:txBody>
+          <a:bodyPr rtlCol="0" anchor="ctr" wrap="square"/>
+          <a:lstStyle/>
+          <a:p>
+            <a:pPr algn="ctr"/>
+          </a:p>
+        </p:txBody>
+      </p:sp>
+      <p:sp>
+        <p:nvSpPr>
+          <p:cNvPr id="49" name="TextBox 48"/>
+          <p:cNvSpPr txBox="1"/>
+          <p:nvPr/>
+        </p:nvSpPr>
+        <p:spPr>
+          <a:xfrm>
+            <a:off x="6382512" y="5564123"/>
+            <a:ext cx="5440680" cy="457200"/>
+          </a:xfrm>
+          <a:prstGeom prst="rect">
+            <a:avLst/>
+          </a:prstGeom>
+          <a:noFill/>
+        </p:spPr>
+        <p:txBody>
+          <a:bodyPr wrap="square" lIns="27432" rIns="27432" tIns="9144" bIns="9144" anchor="t">
+            <a:spAutoFit/>
+          </a:bodyPr>
+          <a:lstStyle/>
+          <a:p>
+            <a:pPr algn="l">
+              <a:lnSpc>
+                <a:spcPct val="110000"/>
+              </a:lnSpc>
+            </a:pPr>
+            <a:r>
+              <a:rPr sz="750" b="1">
+                <a:solidFill>
+                  <a:srgbClr val="0F4C81"/>
+                </a:solidFill>
+                <a:latin typeface="微软雅黑"/>
+                <a:ea typeface="微软雅黑"/>
+                <a:cs typeface="微软雅黑"/>
+              </a:rPr>
+              <a:t>结果标准化与留痕</a:t>
+            </a:r>
+          </a:p>
+          <a:p>
+            <a:pPr algn="l">
+              <a:lnSpc>
+                <a:spcPct val="110000"/>
+              </a:lnSpc>
+              <a:spcBef>
+                <a:spcPts val="100"/>
+              </a:spcBef>
+            </a:pPr>
+            <a:r>
+              <a:rPr sz="750" b="0">
+                <a:solidFill>
+                  <a:srgbClr val="3A3A35"/>
+                </a:solidFill>
+                <a:latin typeface="微软雅黑"/>
+                <a:ea typeface="微软雅黑"/>
+                <a:cs typeface="微软雅黑"/>
+              </a:rPr>
+              <a:t>原始结果映射统一字段与错误码；调用、报文、人工介入全程留痕</a:t>
+            </a:r>
+          </a:p>
+        </p:txBody>
+      </p:sp>
+      <p:sp>
+        <p:nvSpPr>
+          <p:cNvPr id="50" name="Rectangle 49"/>
+          <p:cNvSpPr/>
+          <p:nvPr/>
+        </p:nvSpPr>
+        <p:spPr>
+          <a:xfrm>
+            <a:off x="274320" y="6400800"/>
+            <a:ext cx="11640312" cy="12801"/>
+          </a:xfrm>
+          <a:prstGeom prst="rect">
+            <a:avLst/>
+          </a:prstGeom>
+          <a:solidFill>
+            <a:srgbClr val="D9D6CD"/>
+          </a:solidFill>
+          <a:ln>
+            <a:noFill/>
+          </a:ln>
+          <a:effectLst/>
+        </p:spPr>
+        <p:style>
+          <a:lnRef idx="1">
+            <a:schemeClr val="accent1"/>
+          </a:lnRef>
+          <a:fillRef idx="3">
+            <a:schemeClr val="accent1"/>
+          </a:fillRef>
+          <a:effectRef idx="2">
+            <a:schemeClr val="accent1"/>
+          </a:effectRef>
+          <a:fontRef idx="minor">
+            <a:schemeClr val="lt1"/>
+          </a:fontRef>
+        </p:style>
+        <p:txBody>
+          <a:bodyPr rtlCol="0" anchor="ctr" wrap="square"/>
+          <a:lstStyle/>
+          <a:p>
+            <a:pPr algn="ctr"/>
+          </a:p>
+        </p:txBody>
+      </p:sp>
+      <p:sp>
+        <p:nvSpPr>
+          <p:cNvPr id="51" name="TextBox 50"/>
+          <p:cNvSpPr txBox="1"/>
+          <p:nvPr/>
+        </p:nvSpPr>
+        <p:spPr>
+          <a:xfrm>
+            <a:off x="274320" y="6446520"/>
+            <a:ext cx="6858000" cy="274320"/>
+          </a:xfrm>
+          <a:prstGeom prst="rect">
+            <a:avLst/>
+          </a:prstGeom>
+          <a:noFill/>
+        </p:spPr>
+        <p:txBody>
+          <a:bodyPr wrap="square" lIns="27432" rIns="27432" tIns="9144" bIns="9144" anchor="ctr">
+            <a:spAutoFit/>
+          </a:bodyPr>
+          <a:lstStyle/>
+          <a:p>
+            <a:pPr algn="l">
+              <a:lnSpc>
+                <a:spcPct val="110000"/>
+              </a:lnSpc>
+            </a:pPr>
+            <a:r>
+              <a:rPr sz="850" b="0">
+                <a:solidFill>
+                  <a:srgbClr val="5C5C56"/>
+                </a:solidFill>
+                <a:latin typeface="微软雅黑"/>
+                <a:ea typeface="微软雅黑"/>
+                <a:cs typeface="微软雅黑"/>
+              </a:rPr>
+              <a:t>落地口径：硬件负责「连得上、能复位、可授权」，软件负责「可替换、有超时、可留痕」</a:t>
+            </a:r>
+          </a:p>
+        </p:txBody>
+      </p:sp>
+      <p:sp>
+        <p:nvSpPr>
+          <p:cNvPr id="52" name="TextBox 51"/>
+          <p:cNvSpPr txBox="1"/>
+          <p:nvPr/>
+        </p:nvSpPr>
+        <p:spPr>
+          <a:xfrm>
+            <a:off x="7223760" y="6446520"/>
+            <a:ext cx="4690872" cy="274320"/>
+          </a:xfrm>
+          <a:prstGeom prst="rect">
+            <a:avLst/>
+          </a:prstGeom>
+          <a:noFill/>
+        </p:spPr>
+        <p:txBody>
+          <a:bodyPr wrap="square" lIns="27432" rIns="27432" tIns="9144" bIns="9144" anchor="ctr">
+            <a:spAutoFit/>
+          </a:bodyPr>
+          <a:lstStyle/>
+          <a:p>
+            <a:pPr algn="r">
+              <a:lnSpc>
+                <a:spcPct val="110000"/>
+              </a:lnSpc>
+            </a:pPr>
+            <a:r>
+              <a:rPr sz="850" b="0">
+                <a:solidFill>
+                  <a:srgbClr val="5C5C56"/>
+                </a:solidFill>
+                <a:latin typeface="微软雅黑"/>
+                <a:ea typeface="微软雅黑"/>
+                <a:cs typeface="微软雅黑"/>
+              </a:rPr>
+              <a:t>任一项不满足，该台位不得纳入无人值守排产</a:t>
             </a:r>
           </a:p>
         </p:txBody>
